--- a/outputs/presentation/downturn-scenario-impact.pptx
+++ b/outputs/presentation/downturn-scenario-impact.pptx
@@ -3096,7 +3096,7 @@
         </p:nvSpPr>
         <p:spPr>
           <a:xfrm>
-            <a:off x="429768" y="237744"/>
+            <a:off x="429768" y="256032"/>
             <a:ext cx="11332159" cy="347472"/>
           </a:xfrm>
           <a:prstGeom prst="rect">
@@ -3124,7 +3124,7 @@
                 <a:ea typeface="SamsungOneKorean"/>
                 <a:cs typeface="SamsungOneKorean"/>
               </a:rPr>
-              <a:t>시나리오별 영향 진단: </a:t>
+              <a:t>시나리오별 영향 진단:  </a:t>
             </a:r>
             <a:r>
               <a:rPr sz="2000" b="1">
@@ -3135,61 +3135,20 @@
                 <a:ea typeface="SamsungOneKorean"/>
                 <a:cs typeface="SamsungOneKorean"/>
               </a:rPr>
-              <a:t>발화하는 강점은 유형마다 다르나, 찔리는 약점은 판단 지연으로 수렴한다</a:t>
-            </a:r>
-          </a:p>
-        </p:txBody>
-      </p:sp>
-      <p:sp>
-        <p:nvSpPr>
-          <p:cNvPr id="3" name="TextBox 2"/>
-          <p:cNvSpPr txBox="1"/>
-          <p:nvPr/>
-        </p:nvSpPr>
-        <p:spPr>
-          <a:xfrm>
-            <a:off x="429768" y="621792"/>
-            <a:ext cx="11332159" cy="201168"/>
-          </a:xfrm>
-          <a:prstGeom prst="rect">
-            <a:avLst/>
-          </a:prstGeom>
-          <a:noFill/>
-        </p:spPr>
-        <p:txBody>
-          <a:bodyPr wrap="square" anchor="t" lIns="0" rIns="0" tIns="0" bIns="0">
-            <a:spAutoFit/>
-          </a:bodyPr>
-          <a:lstStyle/>
-          <a:p>
-            <a:pPr algn="l">
-              <a:lnSpc>
-                <a:spcPct val="100000"/>
-              </a:lnSpc>
-            </a:pPr>
-            <a:r>
-              <a:rPr sz="1050" b="0">
-                <a:solidFill>
-                  <a:srgbClr val="1A1A1A"/>
-                </a:solidFill>
-                <a:latin typeface="SamsungOneKorean"/>
-                <a:ea typeface="SamsungOneKorean"/>
-                <a:cs typeface="SamsungOneKorean"/>
-              </a:rPr>
-              <a:t>SP-2 다운턴 5개 시나리오의 삼성 메모리 노출 진단. 강점(S)·약점(W) 코드 기준의 승부처와 보완·활용 힌트까지만 담았다. 대응 전략은 별도 장에서 다루며, 확률은 표기하지 않는다.</a:t>
+              <a:t>강점의 발화는 갈리고, 약점은 판단 지연으로 수렴한다</a:t>
             </a:r>
           </a:p>
         </p:txBody>
       </p:sp>
       <p:cxnSp>
         <p:nvCxnSpPr>
-          <p:cNvPr id="4" name="Connector 3"/>
+          <p:cNvPr id="3" name="Connector 2"/>
           <p:cNvCxnSpPr/>
           <p:nvPr/>
         </p:nvCxnSpPr>
         <p:spPr>
           <a:xfrm>
-            <a:off x="429768" y="886968"/>
+            <a:off x="429768" y="676656"/>
             <a:ext cx="11332159" cy="0"/>
           </a:xfrm>
           <a:prstGeom prst="line">
@@ -3219,18 +3178,18 @@
       </p:cxnSp>
       <p:sp>
         <p:nvSpPr>
-          <p:cNvPr id="5" name="Rounded Rectangle 4"/>
+          <p:cNvPr id="4" name="Rounded Rectangle 3"/>
           <p:cNvSpPr/>
           <p:nvPr/>
         </p:nvSpPr>
         <p:spPr>
           <a:xfrm>
-            <a:off x="429768" y="978408"/>
-            <a:ext cx="1347825" cy="493776"/>
+            <a:off x="429768" y="804672"/>
+            <a:ext cx="1347825" cy="310896"/>
           </a:xfrm>
           <a:prstGeom prst="roundRect">
             <a:avLst>
-              <a:gd name="adj" fmla="val 9000"/>
+              <a:gd name="adj" fmla="val 16000"/>
             </a:avLst>
           </a:prstGeom>
           <a:solidFill>
@@ -3267,14 +3226,14 @@
       </p:sp>
       <p:sp>
         <p:nvSpPr>
-          <p:cNvPr id="6" name="TextBox 5"/>
+          <p:cNvPr id="5" name="TextBox 4"/>
           <p:cNvSpPr txBox="1"/>
           <p:nvPr/>
         </p:nvSpPr>
         <p:spPr>
           <a:xfrm>
-            <a:off x="512063" y="1033271"/>
-            <a:ext cx="1201521" cy="164592"/>
+            <a:off x="429768" y="873252"/>
+            <a:ext cx="1347825" cy="182880"/>
           </a:xfrm>
           <a:prstGeom prst="rect">
             <a:avLst/>
@@ -3287,13 +3246,13 @@
           </a:bodyPr>
           <a:lstStyle/>
           <a:p>
-            <a:pPr algn="l">
+            <a:pPr algn="ctr">
               <a:lnSpc>
                 <a:spcPct val="100000"/>
               </a:lnSpc>
             </a:pPr>
             <a:r>
-              <a:rPr sz="1000" b="1">
+              <a:rPr sz="1050" b="1">
                 <a:solidFill>
                   <a:srgbClr val="1428A0"/>
                 </a:solidFill>
@@ -3301,10 +3260,10 @@
                 <a:ea typeface="SamsungOneKorean"/>
                 <a:cs typeface="SamsungOneKorean"/>
               </a:rPr>
-              <a:t>S1 </a:t>
-            </a:r>
-            <a:r>
-              <a:rPr sz="1000" b="1">
+              <a:t>S1  </a:t>
+            </a:r>
+            <a:r>
+              <a:rPr sz="1050" b="0">
                 <a:solidFill>
                   <a:srgbClr val="1A1A1A"/>
                 </a:solidFill>
@@ -3319,59 +3278,18 @@
       </p:sp>
       <p:sp>
         <p:nvSpPr>
-          <p:cNvPr id="7" name="TextBox 6"/>
-          <p:cNvSpPr txBox="1"/>
-          <p:nvPr/>
-        </p:nvSpPr>
-        <p:spPr>
-          <a:xfrm>
-            <a:off x="512063" y="1220724"/>
-            <a:ext cx="1201521" cy="164592"/>
-          </a:xfrm>
-          <a:prstGeom prst="rect">
-            <a:avLst/>
-          </a:prstGeom>
-          <a:noFill/>
-        </p:spPr>
-        <p:txBody>
-          <a:bodyPr wrap="none" anchor="t" lIns="0" rIns="0" tIns="0" bIns="0">
-            <a:spAutoFit/>
-          </a:bodyPr>
-          <a:lstStyle/>
-          <a:p>
-            <a:pPr algn="l">
-              <a:lnSpc>
-                <a:spcPct val="100000"/>
-              </a:lnSpc>
-            </a:pPr>
-            <a:r>
-              <a:rPr sz="1000" b="0">
-                <a:solidFill>
-                  <a:srgbClr val="555555"/>
-                </a:solidFill>
-                <a:latin typeface="SamsungOneKorean"/>
-                <a:ea typeface="SamsungOneKorean"/>
-                <a:cs typeface="SamsungOneKorean"/>
-              </a:rPr>
-              <a:t>역사이클 집행력</a:t>
-            </a:r>
-          </a:p>
-        </p:txBody>
-      </p:sp>
-      <p:sp>
-        <p:nvSpPr>
-          <p:cNvPr id="8" name="Rounded Rectangle 7"/>
+          <p:cNvPr id="6" name="Rounded Rectangle 5"/>
           <p:cNvSpPr/>
           <p:nvPr/>
         </p:nvSpPr>
         <p:spPr>
           <a:xfrm>
-            <a:off x="1856232" y="978408"/>
-            <a:ext cx="1347825" cy="493776"/>
+            <a:off x="1856232" y="804672"/>
+            <a:ext cx="1347825" cy="310896"/>
           </a:xfrm>
           <a:prstGeom prst="roundRect">
             <a:avLst>
-              <a:gd name="adj" fmla="val 9000"/>
+              <a:gd name="adj" fmla="val 16000"/>
             </a:avLst>
           </a:prstGeom>
           <a:solidFill>
@@ -3408,14 +3326,14 @@
       </p:sp>
       <p:sp>
         <p:nvSpPr>
-          <p:cNvPr id="9" name="TextBox 8"/>
+          <p:cNvPr id="7" name="TextBox 6"/>
           <p:cNvSpPr txBox="1"/>
           <p:nvPr/>
         </p:nvSpPr>
         <p:spPr>
           <a:xfrm>
-            <a:off x="1938528" y="1033271"/>
-            <a:ext cx="1201521" cy="164592"/>
+            <a:off x="1856232" y="873252"/>
+            <a:ext cx="1347825" cy="182880"/>
           </a:xfrm>
           <a:prstGeom prst="rect">
             <a:avLst/>
@@ -3428,13 +3346,13 @@
           </a:bodyPr>
           <a:lstStyle/>
           <a:p>
-            <a:pPr algn="l">
+            <a:pPr algn="ctr">
               <a:lnSpc>
                 <a:spcPct val="100000"/>
               </a:lnSpc>
             </a:pPr>
             <a:r>
-              <a:rPr sz="1000" b="1">
+              <a:rPr sz="1050" b="1">
                 <a:solidFill>
                   <a:srgbClr val="1428A0"/>
                 </a:solidFill>
@@ -3442,10 +3360,10 @@
                 <a:ea typeface="SamsungOneKorean"/>
                 <a:cs typeface="SamsungOneKorean"/>
               </a:rPr>
-              <a:t>S2 </a:t>
-            </a:r>
-            <a:r>
-              <a:rPr sz="1000" b="1">
+              <a:t>S2  </a:t>
+            </a:r>
+            <a:r>
+              <a:rPr sz="1050" b="0">
                 <a:solidFill>
                   <a:srgbClr val="1A1A1A"/>
                 </a:solidFill>
@@ -3460,59 +3378,18 @@
       </p:sp>
       <p:sp>
         <p:nvSpPr>
-          <p:cNvPr id="10" name="TextBox 9"/>
-          <p:cNvSpPr txBox="1"/>
-          <p:nvPr/>
-        </p:nvSpPr>
-        <p:spPr>
-          <a:xfrm>
-            <a:off x="1938528" y="1220724"/>
-            <a:ext cx="1201521" cy="164592"/>
-          </a:xfrm>
-          <a:prstGeom prst="rect">
-            <a:avLst/>
-          </a:prstGeom>
-          <a:noFill/>
-        </p:spPr>
-        <p:txBody>
-          <a:bodyPr wrap="none" anchor="t" lIns="0" rIns="0" tIns="0" bIns="0">
-            <a:spAutoFit/>
-          </a:bodyPr>
-          <a:lstStyle/>
-          <a:p>
-            <a:pPr algn="l">
-              <a:lnSpc>
-                <a:spcPct val="100000"/>
-              </a:lnSpc>
-            </a:pPr>
-            <a:r>
-              <a:rPr sz="1000" b="0">
-                <a:solidFill>
-                  <a:srgbClr val="555555"/>
-                </a:solidFill>
-                <a:latin typeface="SamsungOneKorean"/>
-                <a:ea typeface="SamsungOneKorean"/>
-                <a:cs typeface="SamsungOneKorean"/>
-              </a:rPr>
-              <a:t>DRAM·NAND·SSD 폭</a:t>
-            </a:r>
-          </a:p>
-        </p:txBody>
-      </p:sp>
-      <p:sp>
-        <p:nvSpPr>
-          <p:cNvPr id="11" name="Rounded Rectangle 10"/>
+          <p:cNvPr id="8" name="Rounded Rectangle 7"/>
           <p:cNvSpPr/>
           <p:nvPr/>
         </p:nvSpPr>
         <p:spPr>
           <a:xfrm>
-            <a:off x="3282696" y="978408"/>
-            <a:ext cx="1347825" cy="493776"/>
+            <a:off x="3282696" y="804672"/>
+            <a:ext cx="1347825" cy="310896"/>
           </a:xfrm>
           <a:prstGeom prst="roundRect">
             <a:avLst>
-              <a:gd name="adj" fmla="val 9000"/>
+              <a:gd name="adj" fmla="val 16000"/>
             </a:avLst>
           </a:prstGeom>
           <a:solidFill>
@@ -3549,14 +3426,14 @@
       </p:sp>
       <p:sp>
         <p:nvSpPr>
-          <p:cNvPr id="12" name="TextBox 11"/>
+          <p:cNvPr id="9" name="TextBox 8"/>
           <p:cNvSpPr txBox="1"/>
           <p:nvPr/>
         </p:nvSpPr>
         <p:spPr>
           <a:xfrm>
-            <a:off x="3364991" y="1033271"/>
-            <a:ext cx="1201521" cy="164592"/>
+            <a:off x="3282696" y="873252"/>
+            <a:ext cx="1347825" cy="182880"/>
           </a:xfrm>
           <a:prstGeom prst="rect">
             <a:avLst/>
@@ -3569,13 +3446,13 @@
           </a:bodyPr>
           <a:lstStyle/>
           <a:p>
-            <a:pPr algn="l">
+            <a:pPr algn="ctr">
               <a:lnSpc>
                 <a:spcPct val="100000"/>
               </a:lnSpc>
             </a:pPr>
             <a:r>
-              <a:rPr sz="1000" b="1">
+              <a:rPr sz="1050" b="1">
                 <a:solidFill>
                   <a:srgbClr val="1428A0"/>
                 </a:solidFill>
@@ -3583,10 +3460,10 @@
                 <a:ea typeface="SamsungOneKorean"/>
                 <a:cs typeface="SamsungOneKorean"/>
               </a:rPr>
-              <a:t>S3 </a:t>
-            </a:r>
-            <a:r>
-              <a:rPr sz="1000" b="1">
+              <a:t>S3  </a:t>
+            </a:r>
+            <a:r>
+              <a:rPr sz="1050" b="0">
                 <a:solidFill>
                   <a:srgbClr val="1A1A1A"/>
                 </a:solidFill>
@@ -3594,66 +3471,25 @@
                 <a:ea typeface="SamsungOneKorean"/>
                 <a:cs typeface="SamsungOneKorean"/>
               </a:rPr>
-              <a:t>IDM 결합</a:t>
-            </a:r>
-          </a:p>
-        </p:txBody>
-      </p:sp>
-      <p:sp>
-        <p:nvSpPr>
-          <p:cNvPr id="13" name="TextBox 12"/>
-          <p:cNvSpPr txBox="1"/>
-          <p:nvPr/>
-        </p:nvSpPr>
-        <p:spPr>
-          <a:xfrm>
-            <a:off x="3364991" y="1220724"/>
-            <a:ext cx="1201521" cy="164592"/>
-          </a:xfrm>
-          <a:prstGeom prst="rect">
-            <a:avLst/>
-          </a:prstGeom>
-          <a:noFill/>
-        </p:spPr>
-        <p:txBody>
-          <a:bodyPr wrap="none" anchor="t" lIns="0" rIns="0" tIns="0" bIns="0">
-            <a:spAutoFit/>
-          </a:bodyPr>
-          <a:lstStyle/>
-          <a:p>
-            <a:pPr algn="l">
-              <a:lnSpc>
-                <a:spcPct val="100000"/>
-              </a:lnSpc>
-            </a:pPr>
-            <a:r>
-              <a:rPr sz="1000" b="0">
-                <a:solidFill>
-                  <a:srgbClr val="555555"/>
-                </a:solidFill>
-                <a:latin typeface="SamsungOneKorean"/>
-                <a:ea typeface="SamsungOneKorean"/>
-                <a:cs typeface="SamsungOneKorean"/>
-              </a:rPr>
-              <a:t>라인 전환 옵션</a:t>
-            </a:r>
-          </a:p>
-        </p:txBody>
-      </p:sp>
-      <p:sp>
-        <p:nvSpPr>
-          <p:cNvPr id="14" name="Rounded Rectangle 13"/>
+              <a:t>IDM 전환력</a:t>
+            </a:r>
+          </a:p>
+        </p:txBody>
+      </p:sp>
+      <p:sp>
+        <p:nvSpPr>
+          <p:cNvPr id="10" name="Rounded Rectangle 9"/>
           <p:cNvSpPr/>
           <p:nvPr/>
         </p:nvSpPr>
         <p:spPr>
           <a:xfrm>
-            <a:off x="4709159" y="978408"/>
-            <a:ext cx="1347825" cy="493776"/>
+            <a:off x="4709159" y="804672"/>
+            <a:ext cx="1347825" cy="310896"/>
           </a:xfrm>
           <a:prstGeom prst="roundRect">
             <a:avLst>
-              <a:gd name="adj" fmla="val 9000"/>
+              <a:gd name="adj" fmla="val 16000"/>
             </a:avLst>
           </a:prstGeom>
           <a:solidFill>
@@ -3690,14 +3526,14 @@
       </p:sp>
       <p:sp>
         <p:nvSpPr>
-          <p:cNvPr id="15" name="TextBox 14"/>
+          <p:cNvPr id="11" name="TextBox 10"/>
           <p:cNvSpPr txBox="1"/>
           <p:nvPr/>
         </p:nvSpPr>
         <p:spPr>
           <a:xfrm>
-            <a:off x="4791455" y="1033271"/>
-            <a:ext cx="1201521" cy="164592"/>
+            <a:off x="4709159" y="873252"/>
+            <a:ext cx="1347825" cy="182880"/>
           </a:xfrm>
           <a:prstGeom prst="rect">
             <a:avLst/>
@@ -3710,13 +3546,13 @@
           </a:bodyPr>
           <a:lstStyle/>
           <a:p>
-            <a:pPr algn="l">
+            <a:pPr algn="ctr">
               <a:lnSpc>
                 <a:spcPct val="100000"/>
               </a:lnSpc>
             </a:pPr>
             <a:r>
-              <a:rPr sz="1000" b="1">
+              <a:rPr sz="1050" b="1">
                 <a:solidFill>
                   <a:srgbClr val="1428A0"/>
                 </a:solidFill>
@@ -3724,10 +3560,10 @@
                 <a:ea typeface="SamsungOneKorean"/>
                 <a:cs typeface="SamsungOneKorean"/>
               </a:rPr>
-              <a:t>S4 </a:t>
-            </a:r>
-            <a:r>
-              <a:rPr sz="1000" b="1">
+              <a:t>S4  </a:t>
+            </a:r>
+            <a:r>
+              <a:rPr sz="1050" b="0">
                 <a:solidFill>
                   <a:srgbClr val="1A1A1A"/>
                 </a:solidFill>
@@ -3742,59 +3578,18 @@
       </p:sp>
       <p:sp>
         <p:nvSpPr>
-          <p:cNvPr id="16" name="TextBox 15"/>
-          <p:cNvSpPr txBox="1"/>
-          <p:nvPr/>
-        </p:nvSpPr>
-        <p:spPr>
-          <a:xfrm>
-            <a:off x="4791455" y="1220724"/>
-            <a:ext cx="1201521" cy="164592"/>
-          </a:xfrm>
-          <a:prstGeom prst="rect">
-            <a:avLst/>
-          </a:prstGeom>
-          <a:noFill/>
-        </p:spPr>
-        <p:txBody>
-          <a:bodyPr wrap="none" anchor="t" lIns="0" rIns="0" tIns="0" bIns="0">
-            <a:spAutoFit/>
-          </a:bodyPr>
-          <a:lstStyle/>
-          <a:p>
-            <a:pPr algn="l">
-              <a:lnSpc>
-                <a:spcPct val="100000"/>
-              </a:lnSpc>
-            </a:pPr>
-            <a:r>
-              <a:rPr sz="1000" b="0">
-                <a:solidFill>
-                  <a:srgbClr val="555555"/>
-                </a:solidFill>
-                <a:latin typeface="SamsungOneKorean"/>
-                <a:ea typeface="SamsungOneKorean"/>
-                <a:cs typeface="SamsungOneKorean"/>
-              </a:rPr>
-              <a:t>전환 이력·감가 설비</a:t>
-            </a:r>
-          </a:p>
-        </p:txBody>
-      </p:sp>
-      <p:sp>
-        <p:nvSpPr>
-          <p:cNvPr id="17" name="Rounded Rectangle 16"/>
+          <p:cNvPr id="12" name="Rounded Rectangle 11"/>
           <p:cNvSpPr/>
           <p:nvPr/>
         </p:nvSpPr>
         <p:spPr>
           <a:xfrm>
-            <a:off x="6135624" y="978408"/>
-            <a:ext cx="1347825" cy="493776"/>
+            <a:off x="6135624" y="804672"/>
+            <a:ext cx="1347825" cy="310896"/>
           </a:xfrm>
           <a:prstGeom prst="roundRect">
             <a:avLst>
-              <a:gd name="adj" fmla="val 9000"/>
+              <a:gd name="adj" fmla="val 16000"/>
             </a:avLst>
           </a:prstGeom>
           <a:solidFill>
@@ -3831,14 +3626,14 @@
       </p:sp>
       <p:sp>
         <p:nvSpPr>
-          <p:cNvPr id="18" name="TextBox 17"/>
+          <p:cNvPr id="13" name="TextBox 12"/>
           <p:cNvSpPr txBox="1"/>
           <p:nvPr/>
         </p:nvSpPr>
         <p:spPr>
           <a:xfrm>
-            <a:off x="6217920" y="1033271"/>
-            <a:ext cx="1201521" cy="164592"/>
+            <a:off x="6135624" y="873252"/>
+            <a:ext cx="1347825" cy="182880"/>
           </a:xfrm>
           <a:prstGeom prst="rect">
             <a:avLst/>
@@ -3851,13 +3646,13 @@
           </a:bodyPr>
           <a:lstStyle/>
           <a:p>
-            <a:pPr algn="l">
+            <a:pPr algn="ctr">
               <a:lnSpc>
                 <a:spcPct val="100000"/>
               </a:lnSpc>
             </a:pPr>
             <a:r>
-              <a:rPr sz="1000" b="1">
+              <a:rPr sz="1050" b="1">
                 <a:solidFill>
                   <a:srgbClr val="D93025"/>
                 </a:solidFill>
@@ -3865,10 +3660,10 @@
                 <a:ea typeface="SamsungOneKorean"/>
                 <a:cs typeface="SamsungOneKorean"/>
               </a:rPr>
-              <a:t>W1 </a:t>
-            </a:r>
-            <a:r>
-              <a:rPr sz="1000" b="1">
+              <a:t>W1  </a:t>
+            </a:r>
+            <a:r>
+              <a:rPr sz="1050" b="0">
                 <a:solidFill>
                   <a:srgbClr val="1A1A1A"/>
                 </a:solidFill>
@@ -3883,59 +3678,18 @@
       </p:sp>
       <p:sp>
         <p:nvSpPr>
-          <p:cNvPr id="19" name="TextBox 18"/>
-          <p:cNvSpPr txBox="1"/>
-          <p:nvPr/>
-        </p:nvSpPr>
-        <p:spPr>
-          <a:xfrm>
-            <a:off x="6217920" y="1220724"/>
-            <a:ext cx="1201521" cy="164592"/>
-          </a:xfrm>
-          <a:prstGeom prst="rect">
-            <a:avLst/>
-          </a:prstGeom>
-          <a:noFill/>
-        </p:spPr>
-        <p:txBody>
-          <a:bodyPr wrap="none" anchor="t" lIns="0" rIns="0" tIns="0" bIns="0">
-            <a:spAutoFit/>
-          </a:bodyPr>
-          <a:lstStyle/>
-          <a:p>
-            <a:pPr algn="l">
-              <a:lnSpc>
-                <a:spcPct val="100000"/>
-              </a:lnSpc>
-            </a:pPr>
-            <a:r>
-              <a:rPr sz="1000" b="0">
-                <a:solidFill>
-                  <a:srgbClr val="555555"/>
-                </a:solidFill>
-                <a:latin typeface="SamsungOneKorean"/>
-                <a:ea typeface="SamsungOneKorean"/>
-                <a:cs typeface="SamsungOneKorean"/>
-              </a:rPr>
-              <a:t>HBM 급감·후순위</a:t>
-            </a:r>
-          </a:p>
-        </p:txBody>
-      </p:sp>
-      <p:sp>
-        <p:nvSpPr>
-          <p:cNvPr id="20" name="Rounded Rectangle 19"/>
+          <p:cNvPr id="14" name="Rounded Rectangle 13"/>
           <p:cNvSpPr/>
           <p:nvPr/>
         </p:nvSpPr>
         <p:spPr>
           <a:xfrm>
-            <a:off x="7562088" y="978408"/>
-            <a:ext cx="1347825" cy="493776"/>
+            <a:off x="7562088" y="804672"/>
+            <a:ext cx="1347825" cy="310896"/>
           </a:xfrm>
           <a:prstGeom prst="roundRect">
             <a:avLst>
-              <a:gd name="adj" fmla="val 9000"/>
+              <a:gd name="adj" fmla="val 16000"/>
             </a:avLst>
           </a:prstGeom>
           <a:solidFill>
@@ -3972,14 +3726,14 @@
       </p:sp>
       <p:sp>
         <p:nvSpPr>
-          <p:cNvPr id="21" name="TextBox 20"/>
+          <p:cNvPr id="15" name="TextBox 14"/>
           <p:cNvSpPr txBox="1"/>
           <p:nvPr/>
         </p:nvSpPr>
         <p:spPr>
           <a:xfrm>
-            <a:off x="7644384" y="1033271"/>
-            <a:ext cx="1201521" cy="164592"/>
+            <a:off x="7562088" y="873252"/>
+            <a:ext cx="1347825" cy="182880"/>
           </a:xfrm>
           <a:prstGeom prst="rect">
             <a:avLst/>
@@ -3992,13 +3746,13 @@
           </a:bodyPr>
           <a:lstStyle/>
           <a:p>
-            <a:pPr algn="l">
+            <a:pPr algn="ctr">
               <a:lnSpc>
                 <a:spcPct val="100000"/>
               </a:lnSpc>
             </a:pPr>
             <a:r>
-              <a:rPr sz="1000" b="1">
+              <a:rPr sz="1050" b="1">
                 <a:solidFill>
                   <a:srgbClr val="D93025"/>
                 </a:solidFill>
@@ -4006,10 +3760,10 @@
                 <a:ea typeface="SamsungOneKorean"/>
                 <a:cs typeface="SamsungOneKorean"/>
               </a:rPr>
-              <a:t>W2 </a:t>
-            </a:r>
-            <a:r>
-              <a:rPr sz="1000" b="1">
+              <a:t>W2  </a:t>
+            </a:r>
+            <a:r>
+              <a:rPr sz="1050" b="0">
                 <a:solidFill>
                   <a:srgbClr val="1A1A1A"/>
                 </a:solidFill>
@@ -4024,59 +3778,18 @@
       </p:sp>
       <p:sp>
         <p:nvSpPr>
-          <p:cNvPr id="22" name="TextBox 21"/>
-          <p:cNvSpPr txBox="1"/>
-          <p:nvPr/>
-        </p:nvSpPr>
-        <p:spPr>
-          <a:xfrm>
-            <a:off x="7644384" y="1220724"/>
-            <a:ext cx="1201521" cy="164592"/>
-          </a:xfrm>
-          <a:prstGeom prst="rect">
-            <a:avLst/>
-          </a:prstGeom>
-          <a:noFill/>
-        </p:spPr>
-        <p:txBody>
-          <a:bodyPr wrap="none" anchor="t" lIns="0" rIns="0" tIns="0" bIns="0">
-            <a:spAutoFit/>
-          </a:bodyPr>
-          <a:lstStyle/>
-          <a:p>
-            <a:pPr algn="l">
-              <a:lnSpc>
-                <a:spcPct val="100000"/>
-              </a:lnSpc>
-            </a:pPr>
-            <a:r>
-              <a:rPr sz="1000" b="0">
-                <a:solidFill>
-                  <a:srgbClr val="555555"/>
-                </a:solidFill>
-                <a:latin typeface="SamsungOneKorean"/>
-                <a:ea typeface="SamsungOneKorean"/>
-                <a:cs typeface="SamsungOneKorean"/>
-              </a:rPr>
-              <a:t>1c 수율 추격</a:t>
-            </a:r>
-          </a:p>
-        </p:txBody>
-      </p:sp>
-      <p:sp>
-        <p:nvSpPr>
-          <p:cNvPr id="23" name="Rounded Rectangle 22"/>
+          <p:cNvPr id="16" name="Rounded Rectangle 15"/>
           <p:cNvSpPr/>
           <p:nvPr/>
         </p:nvSpPr>
         <p:spPr>
           <a:xfrm>
-            <a:off x="8988552" y="978408"/>
-            <a:ext cx="1347825" cy="493776"/>
+            <a:off x="8988552" y="804672"/>
+            <a:ext cx="1347825" cy="310896"/>
           </a:xfrm>
           <a:prstGeom prst="roundRect">
             <a:avLst>
-              <a:gd name="adj" fmla="val 9000"/>
+              <a:gd name="adj" fmla="val 16000"/>
             </a:avLst>
           </a:prstGeom>
           <a:solidFill>
@@ -4113,14 +3826,14 @@
       </p:sp>
       <p:sp>
         <p:nvSpPr>
-          <p:cNvPr id="24" name="TextBox 23"/>
+          <p:cNvPr id="17" name="TextBox 16"/>
           <p:cNvSpPr txBox="1"/>
           <p:nvPr/>
         </p:nvSpPr>
         <p:spPr>
           <a:xfrm>
-            <a:off x="9070848" y="1033271"/>
-            <a:ext cx="1201521" cy="164592"/>
+            <a:off x="8988552" y="873252"/>
+            <a:ext cx="1347825" cy="182880"/>
           </a:xfrm>
           <a:prstGeom prst="rect">
             <a:avLst/>
@@ -4133,13 +3846,13 @@
           </a:bodyPr>
           <a:lstStyle/>
           <a:p>
-            <a:pPr algn="l">
+            <a:pPr algn="ctr">
               <a:lnSpc>
                 <a:spcPct val="100000"/>
               </a:lnSpc>
             </a:pPr>
             <a:r>
-              <a:rPr sz="1000" b="1">
+              <a:rPr sz="1050" b="1">
                 <a:solidFill>
                   <a:srgbClr val="D93025"/>
                 </a:solidFill>
@@ -4147,10 +3860,10 @@
                 <a:ea typeface="SamsungOneKorean"/>
                 <a:cs typeface="SamsungOneKorean"/>
               </a:rPr>
-              <a:t>W3 </a:t>
-            </a:r>
-            <a:r>
-              <a:rPr sz="1000" b="1">
+              <a:t>W3  </a:t>
+            </a:r>
+            <a:r>
+              <a:rPr sz="1050" b="0">
                 <a:solidFill>
                   <a:srgbClr val="1A1A1A"/>
                 </a:solidFill>
@@ -4165,59 +3878,18 @@
       </p:sp>
       <p:sp>
         <p:nvSpPr>
-          <p:cNvPr id="25" name="TextBox 24"/>
-          <p:cNvSpPr txBox="1"/>
-          <p:nvPr/>
-        </p:nvSpPr>
-        <p:spPr>
-          <a:xfrm>
-            <a:off x="9070848" y="1220724"/>
-            <a:ext cx="1201521" cy="164592"/>
-          </a:xfrm>
-          <a:prstGeom prst="rect">
-            <a:avLst/>
-          </a:prstGeom>
-          <a:noFill/>
-        </p:spPr>
-        <p:txBody>
-          <a:bodyPr wrap="none" anchor="t" lIns="0" rIns="0" tIns="0" bIns="0">
-            <a:spAutoFit/>
-          </a:bodyPr>
-          <a:lstStyle/>
-          <a:p>
-            <a:pPr algn="l">
-              <a:lnSpc>
-                <a:spcPct val="100000"/>
-              </a:lnSpc>
-            </a:pPr>
-            <a:r>
-              <a:rPr sz="1000" b="0">
-                <a:solidFill>
-                  <a:srgbClr val="555555"/>
-                </a:solidFill>
-                <a:latin typeface="SamsungOneKorean"/>
-                <a:ea typeface="SamsungOneKorean"/>
-                <a:cs typeface="SamsungOneKorean"/>
-              </a:rPr>
-              <a:t>신호→행동 배선 부재</a:t>
-            </a:r>
-          </a:p>
-        </p:txBody>
-      </p:sp>
-      <p:sp>
-        <p:nvSpPr>
-          <p:cNvPr id="26" name="Rounded Rectangle 25"/>
+          <p:cNvPr id="18" name="Rounded Rectangle 17"/>
           <p:cNvSpPr/>
           <p:nvPr/>
         </p:nvSpPr>
         <p:spPr>
           <a:xfrm>
-            <a:off x="10415016" y="978408"/>
-            <a:ext cx="1347825" cy="493776"/>
+            <a:off x="10415016" y="804672"/>
+            <a:ext cx="1347825" cy="310896"/>
           </a:xfrm>
           <a:prstGeom prst="roundRect">
             <a:avLst>
-              <a:gd name="adj" fmla="val 9000"/>
+              <a:gd name="adj" fmla="val 16000"/>
             </a:avLst>
           </a:prstGeom>
           <a:solidFill>
@@ -4254,14 +3926,14 @@
       </p:sp>
       <p:sp>
         <p:nvSpPr>
-          <p:cNvPr id="27" name="TextBox 26"/>
+          <p:cNvPr id="19" name="TextBox 18"/>
           <p:cNvSpPr txBox="1"/>
           <p:nvPr/>
         </p:nvSpPr>
         <p:spPr>
           <a:xfrm>
-            <a:off x="10497312" y="1033271"/>
-            <a:ext cx="1201521" cy="164592"/>
+            <a:off x="10415016" y="873252"/>
+            <a:ext cx="1347825" cy="182880"/>
           </a:xfrm>
           <a:prstGeom prst="rect">
             <a:avLst/>
@@ -4274,13 +3946,13 @@
           </a:bodyPr>
           <a:lstStyle/>
           <a:p>
-            <a:pPr algn="l">
+            <a:pPr algn="ctr">
               <a:lnSpc>
                 <a:spcPct val="100000"/>
               </a:lnSpc>
             </a:pPr>
             <a:r>
-              <a:rPr sz="1000" b="1">
+              <a:rPr sz="1050" b="1">
                 <a:solidFill>
                   <a:srgbClr val="D93025"/>
                 </a:solidFill>
@@ -4288,10 +3960,10 @@
                 <a:ea typeface="SamsungOneKorean"/>
                 <a:cs typeface="SamsungOneKorean"/>
               </a:rPr>
-              <a:t>W4 </a:t>
-            </a:r>
-            <a:r>
-              <a:rPr sz="1000" b="1">
+              <a:t>W4  </a:t>
+            </a:r>
+            <a:r>
+              <a:rPr sz="1050" b="0">
                 <a:solidFill>
                   <a:srgbClr val="1A1A1A"/>
                 </a:solidFill>
@@ -4306,240 +3978,14 @@
       </p:sp>
       <p:sp>
         <p:nvSpPr>
-          <p:cNvPr id="28" name="TextBox 27"/>
-          <p:cNvSpPr txBox="1"/>
-          <p:nvPr/>
-        </p:nvSpPr>
-        <p:spPr>
-          <a:xfrm>
-            <a:off x="10497312" y="1220724"/>
-            <a:ext cx="1201521" cy="164592"/>
-          </a:xfrm>
-          <a:prstGeom prst="rect">
-            <a:avLst/>
-          </a:prstGeom>
-          <a:noFill/>
-        </p:spPr>
-        <p:txBody>
-          <a:bodyPr wrap="none" anchor="t" lIns="0" rIns="0" tIns="0" bIns="0">
-            <a:spAutoFit/>
-          </a:bodyPr>
-          <a:lstStyle/>
-          <a:p>
-            <a:pPr algn="l">
-              <a:lnSpc>
-                <a:spcPct val="100000"/>
-              </a:lnSpc>
-            </a:pPr>
-            <a:r>
-              <a:rPr sz="1000" b="0">
-                <a:solidFill>
-                  <a:srgbClr val="555555"/>
-                </a:solidFill>
-                <a:latin typeface="SamsungOneKorean"/>
-                <a:ea typeface="SamsungOneKorean"/>
-                <a:cs typeface="SamsungOneKorean"/>
-              </a:rPr>
-              <a:t>확정 투자·니치 배제</a:t>
-            </a:r>
-          </a:p>
-        </p:txBody>
-      </p:sp>
-      <p:sp>
-        <p:nvSpPr>
-          <p:cNvPr id="29" name="TextBox 28"/>
-          <p:cNvSpPr txBox="1"/>
-          <p:nvPr/>
-        </p:nvSpPr>
-        <p:spPr>
-          <a:xfrm>
-            <a:off x="7555687" y="1554480"/>
-            <a:ext cx="4206240" cy="164592"/>
-          </a:xfrm>
-          <a:prstGeom prst="rect">
-            <a:avLst/>
-          </a:prstGeom>
-          <a:noFill/>
-        </p:spPr>
-        <p:txBody>
-          <a:bodyPr wrap="square" anchor="t" lIns="0" rIns="0" tIns="0" bIns="0">
-            <a:spAutoFit/>
-          </a:bodyPr>
-          <a:lstStyle/>
-          <a:p>
-            <a:pPr algn="r">
-              <a:lnSpc>
-                <a:spcPct val="100000"/>
-              </a:lnSpc>
-            </a:pPr>
-            <a:r>
-              <a:rPr sz="1000" b="0">
-                <a:solidFill>
-                  <a:srgbClr val="555555"/>
-                </a:solidFill>
-                <a:latin typeface="SamsungOneKorean"/>
-                <a:ea typeface="SamsungOneKorean"/>
-                <a:cs typeface="SamsungOneKorean"/>
-              </a:rPr>
-              <a:t>노출  </a:t>
-            </a:r>
-            <a:r>
-              <a:rPr sz="1000" b="0">
-                <a:solidFill>
-                  <a:srgbClr val="D93025"/>
-                </a:solidFill>
-                <a:latin typeface="SamsungOneKorean"/>
-                <a:ea typeface="SamsungOneKorean"/>
-                <a:cs typeface="SamsungOneKorean"/>
-              </a:rPr>
-              <a:t>■ 직격  </a:t>
-            </a:r>
-            <a:r>
-              <a:rPr sz="1000" b="0">
-                <a:solidFill>
-                  <a:srgbClr val="B44A40"/>
-                </a:solidFill>
-                <a:latin typeface="SamsungOneKorean"/>
-                <a:ea typeface="SamsungOneKorean"/>
-                <a:cs typeface="SamsungOneKorean"/>
-              </a:rPr>
-              <a:t>■ 압박  </a:t>
-            </a:r>
-            <a:r>
-              <a:rPr sz="1000" b="0">
-                <a:solidFill>
-                  <a:srgbClr val="555555"/>
-                </a:solidFill>
-                <a:latin typeface="SamsungOneKorean"/>
-                <a:ea typeface="SamsungOneKorean"/>
-                <a:cs typeface="SamsungOneKorean"/>
-              </a:rPr>
-              <a:t>■ 제한  </a:t>
-            </a:r>
-            <a:r>
-              <a:rPr sz="1000" b="0">
-                <a:solidFill>
-                  <a:srgbClr val="00A651"/>
-                </a:solidFill>
-                <a:latin typeface="SamsungOneKorean"/>
-                <a:ea typeface="SamsungOneKorean"/>
-                <a:cs typeface="SamsungOneKorean"/>
-              </a:rPr>
-              <a:t>■ 방어·수혜</a:t>
-            </a:r>
-          </a:p>
-        </p:txBody>
-      </p:sp>
-      <p:sp>
-        <p:nvSpPr>
-          <p:cNvPr id="30" name="TextBox 29"/>
-          <p:cNvSpPr txBox="1"/>
-          <p:nvPr/>
-        </p:nvSpPr>
-        <p:spPr>
-          <a:xfrm>
-            <a:off x="429768" y="1554480"/>
-            <a:ext cx="6766560" cy="164592"/>
-          </a:xfrm>
-          <a:prstGeom prst="rect">
-            <a:avLst/>
-          </a:prstGeom>
-          <a:noFill/>
-        </p:spPr>
-        <p:txBody>
-          <a:bodyPr wrap="square" anchor="t" lIns="0" rIns="0" tIns="0" bIns="0">
-            <a:spAutoFit/>
-          </a:bodyPr>
-          <a:lstStyle/>
-          <a:p>
-            <a:pPr algn="l">
-              <a:lnSpc>
-                <a:spcPct val="100000"/>
-              </a:lnSpc>
-            </a:pPr>
-            <a:r>
-              <a:rPr sz="1000" b="1">
-                <a:solidFill>
-                  <a:srgbClr val="555555"/>
-                </a:solidFill>
-                <a:latin typeface="SamsungOneKorean"/>
-                <a:ea typeface="SamsungOneKorean"/>
-                <a:cs typeface="SamsungOneKorean"/>
-              </a:rPr>
-              <a:t>시나리오 진단  </a:t>
-            </a:r>
-            <a:r>
-              <a:rPr sz="1000" b="0">
-                <a:solidFill>
-                  <a:srgbClr val="555555"/>
-                </a:solidFill>
-                <a:latin typeface="SamsungOneKorean"/>
-                <a:ea typeface="SamsungOneKorean"/>
-                <a:cs typeface="SamsungOneKorean"/>
-              </a:rPr>
-              <a:t>제품 노출 · 무엇이 갈리나 · 찔리는 곳(W)과 보완 · 살리는 곳(S)과 활용 · 전략적 중요 분야</a:t>
-            </a:r>
-          </a:p>
-        </p:txBody>
-      </p:sp>
-      <p:sp>
-        <p:nvSpPr>
-          <p:cNvPr id="31" name="Rounded Rectangle 30"/>
+          <p:cNvPr id="20" name="Rectangle 19"/>
           <p:cNvSpPr/>
           <p:nvPr/>
         </p:nvSpPr>
         <p:spPr>
           <a:xfrm>
-            <a:off x="429768" y="1783080"/>
-            <a:ext cx="2189073" cy="4224528"/>
-          </a:xfrm>
-          <a:prstGeom prst="roundRect">
-            <a:avLst>
-              <a:gd name="adj" fmla="val 2800"/>
-            </a:avLst>
-          </a:prstGeom>
-          <a:solidFill>
-            <a:srgbClr val="FFFFFF"/>
-          </a:solidFill>
-          <a:ln w="7620">
-            <a:solidFill>
-              <a:srgbClr val="D9D9D9"/>
-            </a:solidFill>
-          </a:ln>
-          <a:effectLst/>
-        </p:spPr>
-        <p:style>
-          <a:lnRef idx="1">
-            <a:schemeClr val="accent1"/>
-          </a:lnRef>
-          <a:fillRef idx="3">
-            <a:schemeClr val="accent1"/>
-          </a:fillRef>
-          <a:effectRef idx="2">
-            <a:schemeClr val="accent1"/>
-          </a:effectRef>
-          <a:fontRef idx="minor">
-            <a:schemeClr val="lt1"/>
-          </a:fontRef>
-        </p:style>
-        <p:txBody>
-          <a:bodyPr rtlCol="0" anchor="ctr"/>
-          <a:lstStyle/>
-          <a:p>
-            <a:pPr algn="ctr"/>
-          </a:p>
-        </p:txBody>
-      </p:sp>
-      <p:sp>
-        <p:nvSpPr>
-          <p:cNvPr id="32" name="Rectangle 31"/>
-          <p:cNvSpPr/>
-          <p:nvPr/>
-        </p:nvSpPr>
-        <p:spPr>
-          <a:xfrm>
-            <a:off x="429768" y="1783080"/>
-            <a:ext cx="2189073" cy="41148"/>
+            <a:off x="1399032" y="1316736"/>
+            <a:ext cx="1999427" cy="41148"/>
           </a:xfrm>
           <a:prstGeom prst="rect">
             <a:avLst/>
@@ -4576,14 +4022,14 @@
       </p:sp>
       <p:sp>
         <p:nvSpPr>
-          <p:cNvPr id="33" name="TextBox 32"/>
+          <p:cNvPr id="21" name="TextBox 20"/>
           <p:cNvSpPr txBox="1"/>
           <p:nvPr/>
         </p:nvSpPr>
         <p:spPr>
           <a:xfrm>
-            <a:off x="521207" y="1874519"/>
-            <a:ext cx="2006193" cy="182880"/>
+            <a:off x="1399032" y="1408176"/>
+            <a:ext cx="1999427" cy="201168"/>
           </a:xfrm>
           <a:prstGeom prst="rect">
             <a:avLst/>
@@ -4602,7 +4048,7 @@
               </a:lnSpc>
             </a:pPr>
             <a:r>
-              <a:rPr sz="1250" b="1">
+              <a:rPr sz="1300" b="1">
                 <a:solidFill>
                   <a:srgbClr val="1428A0"/>
                 </a:solidFill>
@@ -4613,7 +4059,7 @@
               <a:t>DT-A  </a:t>
             </a:r>
             <a:r>
-              <a:rPr sz="1250" b="1">
+              <a:rPr sz="1300" b="1">
                 <a:solidFill>
                   <a:srgbClr val="1A1A1A"/>
                 </a:solidFill>
@@ -4628,14 +4074,14 @@
       </p:sp>
       <p:sp>
         <p:nvSpPr>
-          <p:cNvPr id="34" name="TextBox 33"/>
+          <p:cNvPr id="22" name="TextBox 21"/>
           <p:cNvSpPr txBox="1"/>
           <p:nvPr/>
         </p:nvSpPr>
         <p:spPr>
           <a:xfrm>
-            <a:off x="521207" y="2089404"/>
-            <a:ext cx="2006193" cy="146304"/>
+            <a:off x="1399032" y="1636776"/>
+            <a:ext cx="1999427" cy="146304"/>
           </a:xfrm>
           <a:prstGeom prst="rect">
             <a:avLst/>
@@ -4667,52 +4113,60 @@
           </a:p>
         </p:txBody>
       </p:sp>
-      <p:cxnSp>
-        <p:nvCxnSpPr>
-          <p:cNvPr id="35" name="Connector 34"/>
-          <p:cNvCxnSpPr/>
-          <p:nvPr/>
-        </p:nvCxnSpPr>
-        <p:spPr>
-          <a:xfrm>
-            <a:off x="521207" y="2281428"/>
-            <a:ext cx="2006194" cy="0"/>
-          </a:xfrm>
-          <a:prstGeom prst="line">
-            <a:avLst/>
-          </a:prstGeom>
-          <a:ln w="6350">
-            <a:solidFill>
-              <a:srgbClr val="D9D9D9"/>
-            </a:solidFill>
+      <p:sp>
+        <p:nvSpPr>
+          <p:cNvPr id="23" name="Rectangle 22"/>
+          <p:cNvSpPr/>
+          <p:nvPr/>
+        </p:nvSpPr>
+        <p:spPr>
+          <a:xfrm>
+            <a:off x="3489899" y="1316736"/>
+            <a:ext cx="1999427" cy="41148"/>
+          </a:xfrm>
+          <a:prstGeom prst="rect">
+            <a:avLst/>
+          </a:prstGeom>
+          <a:solidFill>
+            <a:srgbClr val="1428A0"/>
+          </a:solidFill>
+          <a:ln>
+            <a:noFill/>
           </a:ln>
           <a:effectLst/>
         </p:spPr>
         <p:style>
-          <a:lnRef idx="2">
+          <a:lnRef idx="1">
             <a:schemeClr val="accent1"/>
           </a:lnRef>
-          <a:fillRef idx="0">
+          <a:fillRef idx="3">
             <a:schemeClr val="accent1"/>
           </a:fillRef>
-          <a:effectRef idx="1">
+          <a:effectRef idx="2">
             <a:schemeClr val="accent1"/>
           </a:effectRef>
           <a:fontRef idx="minor">
-            <a:schemeClr val="tx1"/>
+            <a:schemeClr val="lt1"/>
           </a:fontRef>
         </p:style>
-      </p:cxnSp>
-      <p:sp>
-        <p:nvSpPr>
-          <p:cNvPr id="36" name="TextBox 35"/>
+        <p:txBody>
+          <a:bodyPr rtlCol="0" anchor="ctr"/>
+          <a:lstStyle/>
+          <a:p>
+            <a:pPr algn="ctr"/>
+          </a:p>
+        </p:txBody>
+      </p:sp>
+      <p:sp>
+        <p:nvSpPr>
+          <p:cNvPr id="24" name="TextBox 23"/>
           <p:cNvSpPr txBox="1"/>
           <p:nvPr/>
         </p:nvSpPr>
         <p:spPr>
           <a:xfrm>
-            <a:off x="521207" y="2345436"/>
-            <a:ext cx="1078992" cy="137160"/>
+            <a:off x="3489899" y="1408176"/>
+            <a:ext cx="1999427" cy="201168"/>
           </a:xfrm>
           <a:prstGeom prst="rect">
             <a:avLst/>
@@ -4720,7 +4174,7 @@
           <a:noFill/>
         </p:spPr>
         <p:txBody>
-          <a:bodyPr wrap="none" anchor="t" lIns="0" rIns="0" tIns="0" bIns="0">
+          <a:bodyPr wrap="square" anchor="t" lIns="0" rIns="0" tIns="0" bIns="0">
             <a:spAutoFit/>
           </a:bodyPr>
           <a:lstStyle/>
@@ -4731,6 +4185,58 @@
               </a:lnSpc>
             </a:pPr>
             <a:r>
+              <a:rPr sz="1300" b="1">
+                <a:solidFill>
+                  <a:srgbClr val="1428A0"/>
+                </a:solidFill>
+                <a:latin typeface="SamsungOneKorean"/>
+                <a:ea typeface="SamsungOneKorean"/>
+                <a:cs typeface="SamsungOneKorean"/>
+              </a:rPr>
+              <a:t>DT-B  </a:t>
+            </a:r>
+            <a:r>
+              <a:rPr sz="1300" b="1">
+                <a:solidFill>
+                  <a:srgbClr val="1A1A1A"/>
+                </a:solidFill>
+                <a:latin typeface="SamsungOneKorean"/>
+                <a:ea typeface="SamsungOneKorean"/>
+                <a:cs typeface="SamsungOneKorean"/>
+              </a:rPr>
+              <a:t>긴 하산</a:t>
+            </a:r>
+          </a:p>
+        </p:txBody>
+      </p:sp>
+      <p:sp>
+        <p:nvSpPr>
+          <p:cNvPr id="25" name="TextBox 24"/>
+          <p:cNvSpPr txBox="1"/>
+          <p:nvPr/>
+        </p:nvSpPr>
+        <p:spPr>
+          <a:xfrm>
+            <a:off x="3489899" y="1636776"/>
+            <a:ext cx="1999427" cy="146304"/>
+          </a:xfrm>
+          <a:prstGeom prst="rect">
+            <a:avLst/>
+          </a:prstGeom>
+          <a:noFill/>
+        </p:spPr>
+        <p:txBody>
+          <a:bodyPr wrap="square" anchor="t" lIns="0" rIns="0" tIns="0" bIns="0">
+            <a:spAutoFit/>
+          </a:bodyPr>
+          <a:lstStyle/>
+          <a:p>
+            <a:pPr algn="l">
+              <a:lnSpc>
+                <a:spcPct val="100000"/>
+              </a:lnSpc>
+            </a:pPr>
+            <a:r>
               <a:rPr sz="1000" b="0">
                 <a:solidFill>
                   <a:srgbClr val="555555"/>
@@ -4739,6 +4245,573 @@
                 <a:ea typeface="SamsungOneKorean"/>
                 <a:cs typeface="SamsungOneKorean"/>
               </a:rPr>
+              <a:t>수요발 × 침식</a:t>
+            </a:r>
+          </a:p>
+        </p:txBody>
+      </p:sp>
+      <p:sp>
+        <p:nvSpPr>
+          <p:cNvPr id="26" name="Rectangle 25"/>
+          <p:cNvSpPr/>
+          <p:nvPr/>
+        </p:nvSpPr>
+        <p:spPr>
+          <a:xfrm>
+            <a:off x="5580766" y="1316736"/>
+            <a:ext cx="1999427" cy="41148"/>
+          </a:xfrm>
+          <a:prstGeom prst="rect">
+            <a:avLst/>
+          </a:prstGeom>
+          <a:solidFill>
+            <a:srgbClr val="1428A0"/>
+          </a:solidFill>
+          <a:ln>
+            <a:noFill/>
+          </a:ln>
+          <a:effectLst/>
+        </p:spPr>
+        <p:style>
+          <a:lnRef idx="1">
+            <a:schemeClr val="accent1"/>
+          </a:lnRef>
+          <a:fillRef idx="3">
+            <a:schemeClr val="accent1"/>
+          </a:fillRef>
+          <a:effectRef idx="2">
+            <a:schemeClr val="accent1"/>
+          </a:effectRef>
+          <a:fontRef idx="minor">
+            <a:schemeClr val="lt1"/>
+          </a:fontRef>
+        </p:style>
+        <p:txBody>
+          <a:bodyPr rtlCol="0" anchor="ctr"/>
+          <a:lstStyle/>
+          <a:p>
+            <a:pPr algn="ctr"/>
+          </a:p>
+        </p:txBody>
+      </p:sp>
+      <p:sp>
+        <p:nvSpPr>
+          <p:cNvPr id="27" name="TextBox 26"/>
+          <p:cNvSpPr txBox="1"/>
+          <p:nvPr/>
+        </p:nvSpPr>
+        <p:spPr>
+          <a:xfrm>
+            <a:off x="5580766" y="1408176"/>
+            <a:ext cx="1999427" cy="201168"/>
+          </a:xfrm>
+          <a:prstGeom prst="rect">
+            <a:avLst/>
+          </a:prstGeom>
+          <a:noFill/>
+        </p:spPr>
+        <p:txBody>
+          <a:bodyPr wrap="square" anchor="t" lIns="0" rIns="0" tIns="0" bIns="0">
+            <a:spAutoFit/>
+          </a:bodyPr>
+          <a:lstStyle/>
+          <a:p>
+            <a:pPr algn="l">
+              <a:lnSpc>
+                <a:spcPct val="100000"/>
+              </a:lnSpc>
+            </a:pPr>
+            <a:r>
+              <a:rPr sz="1300" b="1">
+                <a:solidFill>
+                  <a:srgbClr val="1428A0"/>
+                </a:solidFill>
+                <a:latin typeface="SamsungOneKorean"/>
+                <a:ea typeface="SamsungOneKorean"/>
+                <a:cs typeface="SamsungOneKorean"/>
+              </a:rPr>
+              <a:t>DT-C  </a:t>
+            </a:r>
+            <a:r>
+              <a:rPr sz="1300" b="1">
+                <a:solidFill>
+                  <a:srgbClr val="1A1A1A"/>
+                </a:solidFill>
+                <a:latin typeface="SamsungOneKorean"/>
+                <a:ea typeface="SamsungOneKorean"/>
+                <a:cs typeface="SamsungOneKorean"/>
+              </a:rPr>
+              <a:t>동시 방류</a:t>
+            </a:r>
+          </a:p>
+        </p:txBody>
+      </p:sp>
+      <p:sp>
+        <p:nvSpPr>
+          <p:cNvPr id="28" name="TextBox 27"/>
+          <p:cNvSpPr txBox="1"/>
+          <p:nvPr/>
+        </p:nvSpPr>
+        <p:spPr>
+          <a:xfrm>
+            <a:off x="5580766" y="1636776"/>
+            <a:ext cx="1999427" cy="146304"/>
+          </a:xfrm>
+          <a:prstGeom prst="rect">
+            <a:avLst/>
+          </a:prstGeom>
+          <a:noFill/>
+        </p:spPr>
+        <p:txBody>
+          <a:bodyPr wrap="square" anchor="t" lIns="0" rIns="0" tIns="0" bIns="0">
+            <a:spAutoFit/>
+          </a:bodyPr>
+          <a:lstStyle/>
+          <a:p>
+            <a:pPr algn="l">
+              <a:lnSpc>
+                <a:spcPct val="100000"/>
+              </a:lnSpc>
+            </a:pPr>
+            <a:r>
+              <a:rPr sz="1000" b="0">
+                <a:solidFill>
+                  <a:srgbClr val="555555"/>
+                </a:solidFill>
+                <a:latin typeface="SamsungOneKorean"/>
+                <a:ea typeface="SamsungOneKorean"/>
+                <a:cs typeface="SamsungOneKorean"/>
+              </a:rPr>
+              <a:t>공급발 × 급락</a:t>
+            </a:r>
+          </a:p>
+        </p:txBody>
+      </p:sp>
+      <p:sp>
+        <p:nvSpPr>
+          <p:cNvPr id="29" name="Rectangle 28"/>
+          <p:cNvSpPr/>
+          <p:nvPr/>
+        </p:nvSpPr>
+        <p:spPr>
+          <a:xfrm>
+            <a:off x="7671633" y="1316736"/>
+            <a:ext cx="1999427" cy="41148"/>
+          </a:xfrm>
+          <a:prstGeom prst="rect">
+            <a:avLst/>
+          </a:prstGeom>
+          <a:solidFill>
+            <a:srgbClr val="1428A0"/>
+          </a:solidFill>
+          <a:ln>
+            <a:noFill/>
+          </a:ln>
+          <a:effectLst/>
+        </p:spPr>
+        <p:style>
+          <a:lnRef idx="1">
+            <a:schemeClr val="accent1"/>
+          </a:lnRef>
+          <a:fillRef idx="3">
+            <a:schemeClr val="accent1"/>
+          </a:fillRef>
+          <a:effectRef idx="2">
+            <a:schemeClr val="accent1"/>
+          </a:effectRef>
+          <a:fontRef idx="minor">
+            <a:schemeClr val="lt1"/>
+          </a:fontRef>
+        </p:style>
+        <p:txBody>
+          <a:bodyPr rtlCol="0" anchor="ctr"/>
+          <a:lstStyle/>
+          <a:p>
+            <a:pPr algn="ctr"/>
+          </a:p>
+        </p:txBody>
+      </p:sp>
+      <p:sp>
+        <p:nvSpPr>
+          <p:cNvPr id="30" name="TextBox 29"/>
+          <p:cNvSpPr txBox="1"/>
+          <p:nvPr/>
+        </p:nvSpPr>
+        <p:spPr>
+          <a:xfrm>
+            <a:off x="7671633" y="1408176"/>
+            <a:ext cx="1999427" cy="201168"/>
+          </a:xfrm>
+          <a:prstGeom prst="rect">
+            <a:avLst/>
+          </a:prstGeom>
+          <a:noFill/>
+        </p:spPr>
+        <p:txBody>
+          <a:bodyPr wrap="square" anchor="t" lIns="0" rIns="0" tIns="0" bIns="0">
+            <a:spAutoFit/>
+          </a:bodyPr>
+          <a:lstStyle/>
+          <a:p>
+            <a:pPr algn="l">
+              <a:lnSpc>
+                <a:spcPct val="100000"/>
+              </a:lnSpc>
+            </a:pPr>
+            <a:r>
+              <a:rPr sz="1300" b="1">
+                <a:solidFill>
+                  <a:srgbClr val="1428A0"/>
+                </a:solidFill>
+                <a:latin typeface="SamsungOneKorean"/>
+                <a:ea typeface="SamsungOneKorean"/>
+                <a:cs typeface="SamsungOneKorean"/>
+              </a:rPr>
+              <a:t>DT-D  </a:t>
+            </a:r>
+            <a:r>
+              <a:rPr sz="1300" b="1">
+                <a:solidFill>
+                  <a:srgbClr val="1A1A1A"/>
+                </a:solidFill>
+                <a:latin typeface="SamsungOneKorean"/>
+                <a:ea typeface="SamsungOneKorean"/>
+                <a:cs typeface="SamsungOneKorean"/>
+              </a:rPr>
+              <a:t>저가 잠식</a:t>
+            </a:r>
+          </a:p>
+        </p:txBody>
+      </p:sp>
+      <p:sp>
+        <p:nvSpPr>
+          <p:cNvPr id="31" name="TextBox 30"/>
+          <p:cNvSpPr txBox="1"/>
+          <p:nvPr/>
+        </p:nvSpPr>
+        <p:spPr>
+          <a:xfrm>
+            <a:off x="7671633" y="1636776"/>
+            <a:ext cx="1999427" cy="146304"/>
+          </a:xfrm>
+          <a:prstGeom prst="rect">
+            <a:avLst/>
+          </a:prstGeom>
+          <a:noFill/>
+        </p:spPr>
+        <p:txBody>
+          <a:bodyPr wrap="square" anchor="t" lIns="0" rIns="0" tIns="0" bIns="0">
+            <a:spAutoFit/>
+          </a:bodyPr>
+          <a:lstStyle/>
+          <a:p>
+            <a:pPr algn="l">
+              <a:lnSpc>
+                <a:spcPct val="100000"/>
+              </a:lnSpc>
+            </a:pPr>
+            <a:r>
+              <a:rPr sz="1000" b="0">
+                <a:solidFill>
+                  <a:srgbClr val="555555"/>
+                </a:solidFill>
+                <a:latin typeface="SamsungOneKorean"/>
+                <a:ea typeface="SamsungOneKorean"/>
+                <a:cs typeface="SamsungOneKorean"/>
+              </a:rPr>
+              <a:t>공급발 × 침식</a:t>
+            </a:r>
+          </a:p>
+        </p:txBody>
+      </p:sp>
+      <p:sp>
+        <p:nvSpPr>
+          <p:cNvPr id="32" name="Rectangle 31"/>
+          <p:cNvSpPr/>
+          <p:nvPr/>
+        </p:nvSpPr>
+        <p:spPr>
+          <a:xfrm>
+            <a:off x="9762500" y="1316736"/>
+            <a:ext cx="1999427" cy="41148"/>
+          </a:xfrm>
+          <a:prstGeom prst="rect">
+            <a:avLst/>
+          </a:prstGeom>
+          <a:solidFill>
+            <a:srgbClr val="1428A0"/>
+          </a:solidFill>
+          <a:ln>
+            <a:noFill/>
+          </a:ln>
+          <a:effectLst/>
+        </p:spPr>
+        <p:style>
+          <a:lnRef idx="1">
+            <a:schemeClr val="accent1"/>
+          </a:lnRef>
+          <a:fillRef idx="3">
+            <a:schemeClr val="accent1"/>
+          </a:fillRef>
+          <a:effectRef idx="2">
+            <a:schemeClr val="accent1"/>
+          </a:effectRef>
+          <a:fontRef idx="minor">
+            <a:schemeClr val="lt1"/>
+          </a:fontRef>
+        </p:style>
+        <p:txBody>
+          <a:bodyPr rtlCol="0" anchor="ctr"/>
+          <a:lstStyle/>
+          <a:p>
+            <a:pPr algn="ctr"/>
+          </a:p>
+        </p:txBody>
+      </p:sp>
+      <p:sp>
+        <p:nvSpPr>
+          <p:cNvPr id="33" name="TextBox 32"/>
+          <p:cNvSpPr txBox="1"/>
+          <p:nvPr/>
+        </p:nvSpPr>
+        <p:spPr>
+          <a:xfrm>
+            <a:off x="9762500" y="1408176"/>
+            <a:ext cx="1999427" cy="201168"/>
+          </a:xfrm>
+          <a:prstGeom prst="rect">
+            <a:avLst/>
+          </a:prstGeom>
+          <a:noFill/>
+        </p:spPr>
+        <p:txBody>
+          <a:bodyPr wrap="square" anchor="t" lIns="0" rIns="0" tIns="0" bIns="0">
+            <a:spAutoFit/>
+          </a:bodyPr>
+          <a:lstStyle/>
+          <a:p>
+            <a:pPr algn="l">
+              <a:lnSpc>
+                <a:spcPct val="100000"/>
+              </a:lnSpc>
+            </a:pPr>
+            <a:r>
+              <a:rPr sz="1300" b="1">
+                <a:solidFill>
+                  <a:srgbClr val="1428A0"/>
+                </a:solidFill>
+                <a:latin typeface="SamsungOneKorean"/>
+                <a:ea typeface="SamsungOneKorean"/>
+                <a:cs typeface="SamsungOneKorean"/>
+              </a:rPr>
+              <a:t>DT-E  </a:t>
+            </a:r>
+            <a:r>
+              <a:rPr sz="1300" b="1">
+                <a:solidFill>
+                  <a:srgbClr val="1A1A1A"/>
+                </a:solidFill>
+                <a:latin typeface="SamsungOneKorean"/>
+                <a:ea typeface="SamsungOneKorean"/>
+                <a:cs typeface="SamsungOneKorean"/>
+              </a:rPr>
+              <a:t>판 갈이</a:t>
+            </a:r>
+          </a:p>
+        </p:txBody>
+      </p:sp>
+      <p:sp>
+        <p:nvSpPr>
+          <p:cNvPr id="34" name="TextBox 33"/>
+          <p:cNvSpPr txBox="1"/>
+          <p:nvPr/>
+        </p:nvSpPr>
+        <p:spPr>
+          <a:xfrm>
+            <a:off x="9762500" y="1636776"/>
+            <a:ext cx="1999427" cy="146304"/>
+          </a:xfrm>
+          <a:prstGeom prst="rect">
+            <a:avLst/>
+          </a:prstGeom>
+          <a:noFill/>
+        </p:spPr>
+        <p:txBody>
+          <a:bodyPr wrap="square" anchor="t" lIns="0" rIns="0" tIns="0" bIns="0">
+            <a:spAutoFit/>
+          </a:bodyPr>
+          <a:lstStyle/>
+          <a:p>
+            <a:pPr algn="l">
+              <a:lnSpc>
+                <a:spcPct val="100000"/>
+              </a:lnSpc>
+            </a:pPr>
+            <a:r>
+              <a:rPr sz="1000" b="0">
+                <a:solidFill>
+                  <a:srgbClr val="555555"/>
+                </a:solidFill>
+                <a:latin typeface="SamsungOneKorean"/>
+                <a:ea typeface="SamsungOneKorean"/>
+                <a:cs typeface="SamsungOneKorean"/>
+              </a:rPr>
+              <a:t>전환발 · 와일드카드</a:t>
+            </a:r>
+          </a:p>
+        </p:txBody>
+      </p:sp>
+      <p:sp>
+        <p:nvSpPr>
+          <p:cNvPr id="35" name="TextBox 34"/>
+          <p:cNvSpPr txBox="1"/>
+          <p:nvPr/>
+        </p:nvSpPr>
+        <p:spPr>
+          <a:xfrm>
+            <a:off x="429768" y="1883664"/>
+            <a:ext cx="914400" cy="146304"/>
+          </a:xfrm>
+          <a:prstGeom prst="rect">
+            <a:avLst/>
+          </a:prstGeom>
+          <a:noFill/>
+        </p:spPr>
+        <p:txBody>
+          <a:bodyPr wrap="square" anchor="t" lIns="0" rIns="0" tIns="0" bIns="0">
+            <a:spAutoFit/>
+          </a:bodyPr>
+          <a:lstStyle/>
+          <a:p>
+            <a:pPr algn="l">
+              <a:lnSpc>
+                <a:spcPct val="100000"/>
+              </a:lnSpc>
+            </a:pPr>
+            <a:r>
+              <a:rPr sz="1000" b="1">
+                <a:solidFill>
+                  <a:srgbClr val="555555"/>
+                </a:solidFill>
+                <a:latin typeface="SamsungOneKorean"/>
+                <a:ea typeface="SamsungOneKorean"/>
+                <a:cs typeface="SamsungOneKorean"/>
+              </a:rPr>
+              <a:t>제품 노출</a:t>
+            </a:r>
+          </a:p>
+        </p:txBody>
+      </p:sp>
+      <p:sp>
+        <p:nvSpPr>
+          <p:cNvPr id="36" name="TextBox 35"/>
+          <p:cNvSpPr txBox="1"/>
+          <p:nvPr/>
+        </p:nvSpPr>
+        <p:spPr>
+          <a:xfrm>
+            <a:off x="8652967" y="1883664"/>
+            <a:ext cx="3108960" cy="146304"/>
+          </a:xfrm>
+          <a:prstGeom prst="rect">
+            <a:avLst/>
+          </a:prstGeom>
+          <a:noFill/>
+        </p:spPr>
+        <p:txBody>
+          <a:bodyPr wrap="square" anchor="t" lIns="0" rIns="0" tIns="0" bIns="0">
+            <a:spAutoFit/>
+          </a:bodyPr>
+          <a:lstStyle/>
+          <a:p>
+            <a:pPr algn="r">
+              <a:lnSpc>
+                <a:spcPct val="100000"/>
+              </a:lnSpc>
+            </a:pPr>
+            <a:r>
+              <a:rPr sz="1000" b="0">
+                <a:solidFill>
+                  <a:srgbClr val="D93025"/>
+                </a:solidFill>
+                <a:latin typeface="SamsungOneKorean"/>
+                <a:ea typeface="SamsungOneKorean"/>
+                <a:cs typeface="SamsungOneKorean"/>
+              </a:rPr>
+              <a:t>■ 직격  </a:t>
+            </a:r>
+            <a:r>
+              <a:rPr sz="1000" b="0">
+                <a:solidFill>
+                  <a:srgbClr val="B44A40"/>
+                </a:solidFill>
+                <a:latin typeface="SamsungOneKorean"/>
+                <a:ea typeface="SamsungOneKorean"/>
+                <a:cs typeface="SamsungOneKorean"/>
+              </a:rPr>
+              <a:t>■ 압박  </a:t>
+            </a:r>
+            <a:r>
+              <a:rPr sz="1000" b="0">
+                <a:solidFill>
+                  <a:srgbClr val="555555"/>
+                </a:solidFill>
+                <a:latin typeface="SamsungOneKorean"/>
+                <a:ea typeface="SamsungOneKorean"/>
+                <a:cs typeface="SamsungOneKorean"/>
+              </a:rPr>
+              <a:t>■ 제한  </a:t>
+            </a:r>
+            <a:r>
+              <a:rPr sz="1000" b="0">
+                <a:solidFill>
+                  <a:srgbClr val="00A651"/>
+                </a:solidFill>
+                <a:latin typeface="SamsungOneKorean"/>
+                <a:ea typeface="SamsungOneKorean"/>
+                <a:cs typeface="SamsungOneKorean"/>
+              </a:rPr>
+              <a:t>■ 방어·수혜</a:t>
+            </a:r>
+          </a:p>
+        </p:txBody>
+      </p:sp>
+      <p:sp>
+        <p:nvSpPr>
+          <p:cNvPr id="37" name="TextBox 36"/>
+          <p:cNvSpPr txBox="1"/>
+          <p:nvPr/>
+        </p:nvSpPr>
+        <p:spPr>
+          <a:xfrm>
+            <a:off x="429768" y="2162556"/>
+            <a:ext cx="877824" cy="146304"/>
+          </a:xfrm>
+          <a:prstGeom prst="rect">
+            <a:avLst/>
+          </a:prstGeom>
+          <a:noFill/>
+        </p:spPr>
+        <p:txBody>
+          <a:bodyPr wrap="none" anchor="t" lIns="0" rIns="0" tIns="0" bIns="0">
+            <a:spAutoFit/>
+          </a:bodyPr>
+          <a:lstStyle/>
+          <a:p>
+            <a:pPr algn="r">
+              <a:lnSpc>
+                <a:spcPct val="100000"/>
+              </a:lnSpc>
+            </a:pPr>
+            <a:r>
+              <a:rPr sz="1000" b="0">
+                <a:solidFill>
+                  <a:srgbClr val="555555"/>
+                </a:solidFill>
+                <a:latin typeface="SamsungOneKorean"/>
+                <a:ea typeface="SamsungOneKorean"/>
+                <a:cs typeface="SamsungOneKorean"/>
+              </a:rPr>
               <a:t>HBM</a:t>
             </a:r>
           </a:p>
@@ -4746,17 +4819,19 @@
       </p:sp>
       <p:sp>
         <p:nvSpPr>
-          <p:cNvPr id="37" name="Rectangle 36"/>
+          <p:cNvPr id="38" name="Rounded Rectangle 37"/>
           <p:cNvSpPr/>
           <p:nvPr/>
         </p:nvSpPr>
         <p:spPr>
           <a:xfrm>
-            <a:off x="1819655" y="2360980"/>
-            <a:ext cx="105156" cy="105156"/>
-          </a:xfrm>
-          <a:prstGeom prst="rect">
-            <a:avLst/>
+            <a:off x="1399032" y="2103120"/>
+            <a:ext cx="1999427" cy="269748"/>
+          </a:xfrm>
+          <a:prstGeom prst="roundRect">
+            <a:avLst>
+              <a:gd name="adj" fmla="val 14000"/>
+            </a:avLst>
           </a:prstGeom>
           <a:solidFill>
             <a:srgbClr val="D93025"/>
@@ -4790,14 +4865,14 @@
       </p:sp>
       <p:sp>
         <p:nvSpPr>
-          <p:cNvPr id="38" name="TextBox 37"/>
+          <p:cNvPr id="39" name="TextBox 38"/>
           <p:cNvSpPr txBox="1"/>
           <p:nvPr/>
         </p:nvSpPr>
         <p:spPr>
           <a:xfrm>
-            <a:off x="1984248" y="2345436"/>
-            <a:ext cx="566928" cy="137160"/>
+            <a:off x="1399032" y="2159812"/>
+            <a:ext cx="1999427" cy="155448"/>
           </a:xfrm>
           <a:prstGeom prst="rect">
             <a:avLst/>
@@ -4805,12 +4880,12 @@
           <a:noFill/>
         </p:spPr>
         <p:txBody>
-          <a:bodyPr wrap="none" anchor="t" lIns="0" rIns="0" tIns="0" bIns="0">
+          <a:bodyPr wrap="square" anchor="t" lIns="0" rIns="0" tIns="0" bIns="0">
             <a:spAutoFit/>
           </a:bodyPr>
           <a:lstStyle/>
           <a:p>
-            <a:pPr algn="l">
+            <a:pPr algn="ctr">
               <a:lnSpc>
                 <a:spcPct val="100000"/>
               </a:lnSpc>
@@ -4818,7 +4893,7 @@
             <a:r>
               <a:rPr sz="1000" b="1">
                 <a:solidFill>
-                  <a:srgbClr val="D93025"/>
+                  <a:srgbClr val="FFFFFF"/>
                 </a:solidFill>
                 <a:latin typeface="SamsungOneKorean"/>
                 <a:ea typeface="SamsungOneKorean"/>
@@ -4831,14 +4906,60 @@
       </p:sp>
       <p:sp>
         <p:nvSpPr>
-          <p:cNvPr id="39" name="TextBox 38"/>
+          <p:cNvPr id="40" name="Rounded Rectangle 39"/>
+          <p:cNvSpPr/>
+          <p:nvPr/>
+        </p:nvSpPr>
+        <p:spPr>
+          <a:xfrm>
+            <a:off x="3489899" y="2103120"/>
+            <a:ext cx="1999427" cy="269748"/>
+          </a:xfrm>
+          <a:prstGeom prst="roundRect">
+            <a:avLst>
+              <a:gd name="adj" fmla="val 14000"/>
+            </a:avLst>
+          </a:prstGeom>
+          <a:solidFill>
+            <a:srgbClr val="F3C2BD"/>
+          </a:solidFill>
+          <a:ln>
+            <a:noFill/>
+          </a:ln>
+          <a:effectLst/>
+        </p:spPr>
+        <p:style>
+          <a:lnRef idx="1">
+            <a:schemeClr val="accent1"/>
+          </a:lnRef>
+          <a:fillRef idx="3">
+            <a:schemeClr val="accent1"/>
+          </a:fillRef>
+          <a:effectRef idx="2">
+            <a:schemeClr val="accent1"/>
+          </a:effectRef>
+          <a:fontRef idx="minor">
+            <a:schemeClr val="lt1"/>
+          </a:fontRef>
+        </p:style>
+        <p:txBody>
+          <a:bodyPr rtlCol="0" anchor="ctr"/>
+          <a:lstStyle/>
+          <a:p>
+            <a:pPr algn="ctr"/>
+          </a:p>
+        </p:txBody>
+      </p:sp>
+      <p:sp>
+        <p:nvSpPr>
+          <p:cNvPr id="41" name="TextBox 40"/>
           <p:cNvSpPr txBox="1"/>
           <p:nvPr/>
         </p:nvSpPr>
         <p:spPr>
           <a:xfrm>
-            <a:off x="521207" y="2499055"/>
-            <a:ext cx="1078992" cy="137160"/>
+            <a:off x="3489899" y="2159812"/>
+            <a:ext cx="1999427" cy="155448"/>
           </a:xfrm>
           <a:prstGeom prst="rect">
             <a:avLst/>
@@ -4846,18 +4967,105 @@
           <a:noFill/>
         </p:spPr>
         <p:txBody>
-          <a:bodyPr wrap="none" anchor="t" lIns="0" rIns="0" tIns="0" bIns="0">
+          <a:bodyPr wrap="square" anchor="t" lIns="0" rIns="0" tIns="0" bIns="0">
             <a:spAutoFit/>
           </a:bodyPr>
           <a:lstStyle/>
           <a:p>
-            <a:pPr algn="l">
+            <a:pPr algn="ctr">
               <a:lnSpc>
                 <a:spcPct val="100000"/>
               </a:lnSpc>
             </a:pPr>
             <a:r>
-              <a:rPr sz="1000" b="0">
+              <a:rPr sz="1000" b="1">
+                <a:solidFill>
+                  <a:srgbClr val="B44A40"/>
+                </a:solidFill>
+                <a:latin typeface="SamsungOneKorean"/>
+                <a:ea typeface="SamsungOneKorean"/>
+                <a:cs typeface="SamsungOneKorean"/>
+              </a:rPr>
+              <a:t>압박</a:t>
+            </a:r>
+          </a:p>
+        </p:txBody>
+      </p:sp>
+      <p:sp>
+        <p:nvSpPr>
+          <p:cNvPr id="42" name="Rounded Rectangle 41"/>
+          <p:cNvSpPr/>
+          <p:nvPr/>
+        </p:nvSpPr>
+        <p:spPr>
+          <a:xfrm>
+            <a:off x="5580766" y="2103120"/>
+            <a:ext cx="1999427" cy="269748"/>
+          </a:xfrm>
+          <a:prstGeom prst="roundRect">
+            <a:avLst>
+              <a:gd name="adj" fmla="val 14000"/>
+            </a:avLst>
+          </a:prstGeom>
+          <a:solidFill>
+            <a:srgbClr val="E9EAEC"/>
+          </a:solidFill>
+          <a:ln>
+            <a:noFill/>
+          </a:ln>
+          <a:effectLst/>
+        </p:spPr>
+        <p:style>
+          <a:lnRef idx="1">
+            <a:schemeClr val="accent1"/>
+          </a:lnRef>
+          <a:fillRef idx="3">
+            <a:schemeClr val="accent1"/>
+          </a:fillRef>
+          <a:effectRef idx="2">
+            <a:schemeClr val="accent1"/>
+          </a:effectRef>
+          <a:fontRef idx="minor">
+            <a:schemeClr val="lt1"/>
+          </a:fontRef>
+        </p:style>
+        <p:txBody>
+          <a:bodyPr rtlCol="0" anchor="ctr"/>
+          <a:lstStyle/>
+          <a:p>
+            <a:pPr algn="ctr"/>
+          </a:p>
+        </p:txBody>
+      </p:sp>
+      <p:sp>
+        <p:nvSpPr>
+          <p:cNvPr id="43" name="TextBox 42"/>
+          <p:cNvSpPr txBox="1"/>
+          <p:nvPr/>
+        </p:nvSpPr>
+        <p:spPr>
+          <a:xfrm>
+            <a:off x="5580766" y="2159812"/>
+            <a:ext cx="1999427" cy="155448"/>
+          </a:xfrm>
+          <a:prstGeom prst="rect">
+            <a:avLst/>
+          </a:prstGeom>
+          <a:noFill/>
+        </p:spPr>
+        <p:txBody>
+          <a:bodyPr wrap="square" anchor="t" lIns="0" rIns="0" tIns="0" bIns="0">
+            <a:spAutoFit/>
+          </a:bodyPr>
+          <a:lstStyle/>
+          <a:p>
+            <a:pPr algn="ctr">
+              <a:lnSpc>
+                <a:spcPct val="100000"/>
+              </a:lnSpc>
+            </a:pPr>
+            <a:r>
+              <a:rPr sz="1000" b="1">
                 <a:solidFill>
                   <a:srgbClr val="555555"/>
                 </a:solidFill>
@@ -4865,24 +5073,113 @@
                 <a:ea typeface="SamsungOneKorean"/>
                 <a:cs typeface="SamsungOneKorean"/>
               </a:rPr>
-              <a:t>서버 DRAM</a:t>
-            </a:r>
-          </a:p>
-        </p:txBody>
-      </p:sp>
-      <p:sp>
-        <p:nvSpPr>
-          <p:cNvPr id="40" name="Rectangle 39"/>
+              <a:t>제한</a:t>
+            </a:r>
+          </a:p>
+        </p:txBody>
+      </p:sp>
+      <p:sp>
+        <p:nvSpPr>
+          <p:cNvPr id="44" name="Rounded Rectangle 43"/>
           <p:cNvSpPr/>
           <p:nvPr/>
         </p:nvSpPr>
         <p:spPr>
           <a:xfrm>
-            <a:off x="1819655" y="2514600"/>
-            <a:ext cx="105156" cy="105156"/>
-          </a:xfrm>
-          <a:prstGeom prst="rect">
-            <a:avLst/>
+            <a:off x="7671633" y="2103120"/>
+            <a:ext cx="1999427" cy="269748"/>
+          </a:xfrm>
+          <a:prstGeom prst="roundRect">
+            <a:avLst>
+              <a:gd name="adj" fmla="val 14000"/>
+            </a:avLst>
+          </a:prstGeom>
+          <a:solidFill>
+            <a:srgbClr val="00A651"/>
+          </a:solidFill>
+          <a:ln>
+            <a:noFill/>
+          </a:ln>
+          <a:effectLst/>
+        </p:spPr>
+        <p:style>
+          <a:lnRef idx="1">
+            <a:schemeClr val="accent1"/>
+          </a:lnRef>
+          <a:fillRef idx="3">
+            <a:schemeClr val="accent1"/>
+          </a:fillRef>
+          <a:effectRef idx="2">
+            <a:schemeClr val="accent1"/>
+          </a:effectRef>
+          <a:fontRef idx="minor">
+            <a:schemeClr val="lt1"/>
+          </a:fontRef>
+        </p:style>
+        <p:txBody>
+          <a:bodyPr rtlCol="0" anchor="ctr"/>
+          <a:lstStyle/>
+          <a:p>
+            <a:pPr algn="ctr"/>
+          </a:p>
+        </p:txBody>
+      </p:sp>
+      <p:sp>
+        <p:nvSpPr>
+          <p:cNvPr id="45" name="TextBox 44"/>
+          <p:cNvSpPr txBox="1"/>
+          <p:nvPr/>
+        </p:nvSpPr>
+        <p:spPr>
+          <a:xfrm>
+            <a:off x="7671633" y="2159812"/>
+            <a:ext cx="1999427" cy="155448"/>
+          </a:xfrm>
+          <a:prstGeom prst="rect">
+            <a:avLst/>
+          </a:prstGeom>
+          <a:noFill/>
+        </p:spPr>
+        <p:txBody>
+          <a:bodyPr wrap="square" anchor="t" lIns="0" rIns="0" tIns="0" bIns="0">
+            <a:spAutoFit/>
+          </a:bodyPr>
+          <a:lstStyle/>
+          <a:p>
+            <a:pPr algn="ctr">
+              <a:lnSpc>
+                <a:spcPct val="100000"/>
+              </a:lnSpc>
+            </a:pPr>
+            <a:r>
+              <a:rPr sz="1000" b="1">
+                <a:solidFill>
+                  <a:srgbClr val="FFFFFF"/>
+                </a:solidFill>
+                <a:latin typeface="SamsungOneKorean"/>
+                <a:ea typeface="SamsungOneKorean"/>
+                <a:cs typeface="SamsungOneKorean"/>
+              </a:rPr>
+              <a:t>방어</a:t>
+            </a:r>
+          </a:p>
+        </p:txBody>
+      </p:sp>
+      <p:sp>
+        <p:nvSpPr>
+          <p:cNvPr id="46" name="Rounded Rectangle 45"/>
+          <p:cNvSpPr/>
+          <p:nvPr/>
+        </p:nvSpPr>
+        <p:spPr>
+          <a:xfrm>
+            <a:off x="9762500" y="2103120"/>
+            <a:ext cx="1999427" cy="269748"/>
+          </a:xfrm>
+          <a:prstGeom prst="roundRect">
+            <a:avLst>
+              <a:gd name="adj" fmla="val 14000"/>
+            </a:avLst>
           </a:prstGeom>
           <a:solidFill>
             <a:srgbClr val="D93025"/>
@@ -4916,14 +5213,14 @@
       </p:sp>
       <p:sp>
         <p:nvSpPr>
-          <p:cNvPr id="41" name="TextBox 40"/>
+          <p:cNvPr id="47" name="TextBox 46"/>
           <p:cNvSpPr txBox="1"/>
           <p:nvPr/>
         </p:nvSpPr>
         <p:spPr>
           <a:xfrm>
-            <a:off x="1984248" y="2499055"/>
-            <a:ext cx="566928" cy="137160"/>
+            <a:off x="9762500" y="2159812"/>
+            <a:ext cx="1999427" cy="155448"/>
           </a:xfrm>
           <a:prstGeom prst="rect">
             <a:avLst/>
@@ -4931,12 +5228,12 @@
           <a:noFill/>
         </p:spPr>
         <p:txBody>
-          <a:bodyPr wrap="none" anchor="t" lIns="0" rIns="0" tIns="0" bIns="0">
+          <a:bodyPr wrap="square" anchor="t" lIns="0" rIns="0" tIns="0" bIns="0">
             <a:spAutoFit/>
           </a:bodyPr>
           <a:lstStyle/>
           <a:p>
-            <a:pPr algn="l">
+            <a:pPr algn="ctr">
               <a:lnSpc>
                 <a:spcPct val="100000"/>
               </a:lnSpc>
@@ -4944,7 +5241,7 @@
             <a:r>
               <a:rPr sz="1000" b="1">
                 <a:solidFill>
-                  <a:srgbClr val="D93025"/>
+                  <a:srgbClr val="FFFFFF"/>
                 </a:solidFill>
                 <a:latin typeface="SamsungOneKorean"/>
                 <a:ea typeface="SamsungOneKorean"/>
@@ -4957,14 +5254,14 @@
       </p:sp>
       <p:sp>
         <p:nvSpPr>
-          <p:cNvPr id="42" name="TextBox 41"/>
+          <p:cNvPr id="48" name="TextBox 47"/>
           <p:cNvSpPr txBox="1"/>
           <p:nvPr/>
         </p:nvSpPr>
         <p:spPr>
           <a:xfrm>
-            <a:off x="521207" y="2652674"/>
-            <a:ext cx="1078992" cy="137160"/>
+            <a:off x="429768" y="2482596"/>
+            <a:ext cx="877824" cy="146304"/>
           </a:xfrm>
           <a:prstGeom prst="rect">
             <a:avLst/>
@@ -4977,7 +5274,7 @@
           </a:bodyPr>
           <a:lstStyle/>
           <a:p>
-            <a:pPr algn="l">
+            <a:pPr algn="r">
               <a:lnSpc>
                 <a:spcPct val="100000"/>
               </a:lnSpc>
@@ -4991,27 +5288,29 @@
                 <a:ea typeface="SamsungOneKorean"/>
                 <a:cs typeface="SamsungOneKorean"/>
               </a:rPr>
-              <a:t>범용·레거시</a:t>
-            </a:r>
-          </a:p>
-        </p:txBody>
-      </p:sp>
-      <p:sp>
-        <p:nvSpPr>
-          <p:cNvPr id="43" name="Rectangle 42"/>
+              <a:t>서버 DRAM</a:t>
+            </a:r>
+          </a:p>
+        </p:txBody>
+      </p:sp>
+      <p:sp>
+        <p:nvSpPr>
+          <p:cNvPr id="49" name="Rounded Rectangle 48"/>
           <p:cNvSpPr/>
           <p:nvPr/>
         </p:nvSpPr>
         <p:spPr>
           <a:xfrm>
-            <a:off x="1819655" y="2668219"/>
-            <a:ext cx="105156" cy="105156"/>
-          </a:xfrm>
-          <a:prstGeom prst="rect">
-            <a:avLst/>
+            <a:off x="1399032" y="2423160"/>
+            <a:ext cx="1999427" cy="269748"/>
+          </a:xfrm>
+          <a:prstGeom prst="roundRect">
+            <a:avLst>
+              <a:gd name="adj" fmla="val 14000"/>
+            </a:avLst>
           </a:prstGeom>
           <a:solidFill>
-            <a:srgbClr val="D9D9D9"/>
+            <a:srgbClr val="D93025"/>
           </a:solidFill>
           <a:ln>
             <a:noFill/>
@@ -5042,14 +5341,14 @@
       </p:sp>
       <p:sp>
         <p:nvSpPr>
-          <p:cNvPr id="44" name="TextBox 43"/>
+          <p:cNvPr id="50" name="TextBox 49"/>
           <p:cNvSpPr txBox="1"/>
           <p:nvPr/>
         </p:nvSpPr>
         <p:spPr>
           <a:xfrm>
-            <a:off x="1984248" y="2652674"/>
-            <a:ext cx="566928" cy="137160"/>
+            <a:off x="1399032" y="2479852"/>
+            <a:ext cx="1999427" cy="155448"/>
           </a:xfrm>
           <a:prstGeom prst="rect">
             <a:avLst/>
@@ -5057,12 +5356,12 @@
           <a:noFill/>
         </p:spPr>
         <p:txBody>
-          <a:bodyPr wrap="none" anchor="t" lIns="0" rIns="0" tIns="0" bIns="0">
+          <a:bodyPr wrap="square" anchor="t" lIns="0" rIns="0" tIns="0" bIns="0">
             <a:spAutoFit/>
           </a:bodyPr>
           <a:lstStyle/>
           <a:p>
-            <a:pPr algn="l">
+            <a:pPr algn="ctr">
               <a:lnSpc>
                 <a:spcPct val="100000"/>
               </a:lnSpc>
@@ -5070,74 +5369,35 @@
             <a:r>
               <a:rPr sz="1000" b="1">
                 <a:solidFill>
-                  <a:srgbClr val="555555"/>
-                </a:solidFill>
-                <a:latin typeface="SamsungOneKorean"/>
-                <a:ea typeface="SamsungOneKorean"/>
-                <a:cs typeface="SamsungOneKorean"/>
-              </a:rPr>
-              <a:t>제한</a:t>
-            </a:r>
-          </a:p>
-        </p:txBody>
-      </p:sp>
-      <p:sp>
-        <p:nvSpPr>
-          <p:cNvPr id="45" name="TextBox 44"/>
-          <p:cNvSpPr txBox="1"/>
-          <p:nvPr/>
-        </p:nvSpPr>
-        <p:spPr>
-          <a:xfrm>
-            <a:off x="521207" y="2806293"/>
-            <a:ext cx="1078992" cy="137160"/>
-          </a:xfrm>
-          <a:prstGeom prst="rect">
-            <a:avLst/>
-          </a:prstGeom>
-          <a:noFill/>
-        </p:spPr>
-        <p:txBody>
-          <a:bodyPr wrap="none" anchor="t" lIns="0" rIns="0" tIns="0" bIns="0">
-            <a:spAutoFit/>
-          </a:bodyPr>
-          <a:lstStyle/>
-          <a:p>
-            <a:pPr algn="l">
-              <a:lnSpc>
-                <a:spcPct val="100000"/>
-              </a:lnSpc>
-            </a:pPr>
-            <a:r>
-              <a:rPr sz="1000" b="0">
-                <a:solidFill>
-                  <a:srgbClr val="555555"/>
-                </a:solidFill>
-                <a:latin typeface="SamsungOneKorean"/>
-                <a:ea typeface="SamsungOneKorean"/>
-                <a:cs typeface="SamsungOneKorean"/>
-              </a:rPr>
-              <a:t>NAND·SSD</a:t>
-            </a:r>
-          </a:p>
-        </p:txBody>
-      </p:sp>
-      <p:sp>
-        <p:nvSpPr>
-          <p:cNvPr id="46" name="Rectangle 45"/>
+                  <a:srgbClr val="FFFFFF"/>
+                </a:solidFill>
+                <a:latin typeface="SamsungOneKorean"/>
+                <a:ea typeface="SamsungOneKorean"/>
+                <a:cs typeface="SamsungOneKorean"/>
+              </a:rPr>
+              <a:t>직격</a:t>
+            </a:r>
+          </a:p>
+        </p:txBody>
+      </p:sp>
+      <p:sp>
+        <p:nvSpPr>
+          <p:cNvPr id="51" name="Rounded Rectangle 50"/>
           <p:cNvSpPr/>
           <p:nvPr/>
         </p:nvSpPr>
         <p:spPr>
           <a:xfrm>
-            <a:off x="1819655" y="2821838"/>
-            <a:ext cx="105156" cy="105156"/>
-          </a:xfrm>
-          <a:prstGeom prst="rect">
-            <a:avLst/>
+            <a:off x="3489899" y="2423160"/>
+            <a:ext cx="1999427" cy="269748"/>
+          </a:xfrm>
+          <a:prstGeom prst="roundRect">
+            <a:avLst>
+              <a:gd name="adj" fmla="val 14000"/>
+            </a:avLst>
           </a:prstGeom>
           <a:solidFill>
-            <a:srgbClr val="E89B94"/>
+            <a:srgbClr val="F3C2BD"/>
           </a:solidFill>
           <a:ln>
             <a:noFill/>
@@ -5168,14 +5428,14 @@
       </p:sp>
       <p:sp>
         <p:nvSpPr>
-          <p:cNvPr id="47" name="TextBox 46"/>
+          <p:cNvPr id="52" name="TextBox 51"/>
           <p:cNvSpPr txBox="1"/>
           <p:nvPr/>
         </p:nvSpPr>
         <p:spPr>
           <a:xfrm>
-            <a:off x="1984248" y="2806293"/>
-            <a:ext cx="566928" cy="137160"/>
+            <a:off x="3489899" y="2479852"/>
+            <a:ext cx="1999427" cy="155448"/>
           </a:xfrm>
           <a:prstGeom prst="rect">
             <a:avLst/>
@@ -5183,12 +5443,12 @@
           <a:noFill/>
         </p:spPr>
         <p:txBody>
-          <a:bodyPr wrap="none" anchor="t" lIns="0" rIns="0" tIns="0" bIns="0">
+          <a:bodyPr wrap="square" anchor="t" lIns="0" rIns="0" tIns="0" bIns="0">
             <a:spAutoFit/>
           </a:bodyPr>
           <a:lstStyle/>
           <a:p>
-            <a:pPr algn="l">
+            <a:pPr algn="ctr">
               <a:lnSpc>
                 <a:spcPct val="100000"/>
               </a:lnSpc>
@@ -5207,16 +5467,1229 @@
           </a:p>
         </p:txBody>
       </p:sp>
+      <p:sp>
+        <p:nvSpPr>
+          <p:cNvPr id="53" name="Rounded Rectangle 52"/>
+          <p:cNvSpPr/>
+          <p:nvPr/>
+        </p:nvSpPr>
+        <p:spPr>
+          <a:xfrm>
+            <a:off x="5580766" y="2423160"/>
+            <a:ext cx="1999427" cy="269748"/>
+          </a:xfrm>
+          <a:prstGeom prst="roundRect">
+            <a:avLst>
+              <a:gd name="adj" fmla="val 14000"/>
+            </a:avLst>
+          </a:prstGeom>
+          <a:solidFill>
+            <a:srgbClr val="F3C2BD"/>
+          </a:solidFill>
+          <a:ln>
+            <a:noFill/>
+          </a:ln>
+          <a:effectLst/>
+        </p:spPr>
+        <p:style>
+          <a:lnRef idx="1">
+            <a:schemeClr val="accent1"/>
+          </a:lnRef>
+          <a:fillRef idx="3">
+            <a:schemeClr val="accent1"/>
+          </a:fillRef>
+          <a:effectRef idx="2">
+            <a:schemeClr val="accent1"/>
+          </a:effectRef>
+          <a:fontRef idx="minor">
+            <a:schemeClr val="lt1"/>
+          </a:fontRef>
+        </p:style>
+        <p:txBody>
+          <a:bodyPr rtlCol="0" anchor="ctr"/>
+          <a:lstStyle/>
+          <a:p>
+            <a:pPr algn="ctr"/>
+          </a:p>
+        </p:txBody>
+      </p:sp>
+      <p:sp>
+        <p:nvSpPr>
+          <p:cNvPr id="54" name="TextBox 53"/>
+          <p:cNvSpPr txBox="1"/>
+          <p:nvPr/>
+        </p:nvSpPr>
+        <p:spPr>
+          <a:xfrm>
+            <a:off x="5580766" y="2479852"/>
+            <a:ext cx="1999427" cy="155448"/>
+          </a:xfrm>
+          <a:prstGeom prst="rect">
+            <a:avLst/>
+          </a:prstGeom>
+          <a:noFill/>
+        </p:spPr>
+        <p:txBody>
+          <a:bodyPr wrap="square" anchor="t" lIns="0" rIns="0" tIns="0" bIns="0">
+            <a:spAutoFit/>
+          </a:bodyPr>
+          <a:lstStyle/>
+          <a:p>
+            <a:pPr algn="ctr">
+              <a:lnSpc>
+                <a:spcPct val="100000"/>
+              </a:lnSpc>
+            </a:pPr>
+            <a:r>
+              <a:rPr sz="1000" b="1">
+                <a:solidFill>
+                  <a:srgbClr val="B44A40"/>
+                </a:solidFill>
+                <a:latin typeface="SamsungOneKorean"/>
+                <a:ea typeface="SamsungOneKorean"/>
+                <a:cs typeface="SamsungOneKorean"/>
+              </a:rPr>
+              <a:t>압박</a:t>
+            </a:r>
+          </a:p>
+        </p:txBody>
+      </p:sp>
+      <p:sp>
+        <p:nvSpPr>
+          <p:cNvPr id="55" name="Rounded Rectangle 54"/>
+          <p:cNvSpPr/>
+          <p:nvPr/>
+        </p:nvSpPr>
+        <p:spPr>
+          <a:xfrm>
+            <a:off x="7671633" y="2423160"/>
+            <a:ext cx="1999427" cy="269748"/>
+          </a:xfrm>
+          <a:prstGeom prst="roundRect">
+            <a:avLst>
+              <a:gd name="adj" fmla="val 14000"/>
+            </a:avLst>
+          </a:prstGeom>
+          <a:solidFill>
+            <a:srgbClr val="E9EAEC"/>
+          </a:solidFill>
+          <a:ln>
+            <a:noFill/>
+          </a:ln>
+          <a:effectLst/>
+        </p:spPr>
+        <p:style>
+          <a:lnRef idx="1">
+            <a:schemeClr val="accent1"/>
+          </a:lnRef>
+          <a:fillRef idx="3">
+            <a:schemeClr val="accent1"/>
+          </a:fillRef>
+          <a:effectRef idx="2">
+            <a:schemeClr val="accent1"/>
+          </a:effectRef>
+          <a:fontRef idx="minor">
+            <a:schemeClr val="lt1"/>
+          </a:fontRef>
+        </p:style>
+        <p:txBody>
+          <a:bodyPr rtlCol="0" anchor="ctr"/>
+          <a:lstStyle/>
+          <a:p>
+            <a:pPr algn="ctr"/>
+          </a:p>
+        </p:txBody>
+      </p:sp>
+      <p:sp>
+        <p:nvSpPr>
+          <p:cNvPr id="56" name="TextBox 55"/>
+          <p:cNvSpPr txBox="1"/>
+          <p:nvPr/>
+        </p:nvSpPr>
+        <p:spPr>
+          <a:xfrm>
+            <a:off x="7671633" y="2479852"/>
+            <a:ext cx="1999427" cy="155448"/>
+          </a:xfrm>
+          <a:prstGeom prst="rect">
+            <a:avLst/>
+          </a:prstGeom>
+          <a:noFill/>
+        </p:spPr>
+        <p:txBody>
+          <a:bodyPr wrap="square" anchor="t" lIns="0" rIns="0" tIns="0" bIns="0">
+            <a:spAutoFit/>
+          </a:bodyPr>
+          <a:lstStyle/>
+          <a:p>
+            <a:pPr algn="ctr">
+              <a:lnSpc>
+                <a:spcPct val="100000"/>
+              </a:lnSpc>
+            </a:pPr>
+            <a:r>
+              <a:rPr sz="1000" b="1">
+                <a:solidFill>
+                  <a:srgbClr val="555555"/>
+                </a:solidFill>
+                <a:latin typeface="SamsungOneKorean"/>
+                <a:ea typeface="SamsungOneKorean"/>
+                <a:cs typeface="SamsungOneKorean"/>
+              </a:rPr>
+              <a:t>제한</a:t>
+            </a:r>
+          </a:p>
+        </p:txBody>
+      </p:sp>
+      <p:sp>
+        <p:nvSpPr>
+          <p:cNvPr id="57" name="Rounded Rectangle 56"/>
+          <p:cNvSpPr/>
+          <p:nvPr/>
+        </p:nvSpPr>
+        <p:spPr>
+          <a:xfrm>
+            <a:off x="9762500" y="2423160"/>
+            <a:ext cx="1999427" cy="269748"/>
+          </a:xfrm>
+          <a:prstGeom prst="roundRect">
+            <a:avLst>
+              <a:gd name="adj" fmla="val 14000"/>
+            </a:avLst>
+          </a:prstGeom>
+          <a:solidFill>
+            <a:srgbClr val="F3C2BD"/>
+          </a:solidFill>
+          <a:ln>
+            <a:noFill/>
+          </a:ln>
+          <a:effectLst/>
+        </p:spPr>
+        <p:style>
+          <a:lnRef idx="1">
+            <a:schemeClr val="accent1"/>
+          </a:lnRef>
+          <a:fillRef idx="3">
+            <a:schemeClr val="accent1"/>
+          </a:fillRef>
+          <a:effectRef idx="2">
+            <a:schemeClr val="accent1"/>
+          </a:effectRef>
+          <a:fontRef idx="minor">
+            <a:schemeClr val="lt1"/>
+          </a:fontRef>
+        </p:style>
+        <p:txBody>
+          <a:bodyPr rtlCol="0" anchor="ctr"/>
+          <a:lstStyle/>
+          <a:p>
+            <a:pPr algn="ctr"/>
+          </a:p>
+        </p:txBody>
+      </p:sp>
+      <p:sp>
+        <p:nvSpPr>
+          <p:cNvPr id="58" name="TextBox 57"/>
+          <p:cNvSpPr txBox="1"/>
+          <p:nvPr/>
+        </p:nvSpPr>
+        <p:spPr>
+          <a:xfrm>
+            <a:off x="9762500" y="2479852"/>
+            <a:ext cx="1999427" cy="155448"/>
+          </a:xfrm>
+          <a:prstGeom prst="rect">
+            <a:avLst/>
+          </a:prstGeom>
+          <a:noFill/>
+        </p:spPr>
+        <p:txBody>
+          <a:bodyPr wrap="square" anchor="t" lIns="0" rIns="0" tIns="0" bIns="0">
+            <a:spAutoFit/>
+          </a:bodyPr>
+          <a:lstStyle/>
+          <a:p>
+            <a:pPr algn="ctr">
+              <a:lnSpc>
+                <a:spcPct val="100000"/>
+              </a:lnSpc>
+            </a:pPr>
+            <a:r>
+              <a:rPr sz="1000" b="1">
+                <a:solidFill>
+                  <a:srgbClr val="B44A40"/>
+                </a:solidFill>
+                <a:latin typeface="SamsungOneKorean"/>
+                <a:ea typeface="SamsungOneKorean"/>
+                <a:cs typeface="SamsungOneKorean"/>
+              </a:rPr>
+              <a:t>압박</a:t>
+            </a:r>
+          </a:p>
+        </p:txBody>
+      </p:sp>
+      <p:sp>
+        <p:nvSpPr>
+          <p:cNvPr id="59" name="TextBox 58"/>
+          <p:cNvSpPr txBox="1"/>
+          <p:nvPr/>
+        </p:nvSpPr>
+        <p:spPr>
+          <a:xfrm>
+            <a:off x="429768" y="2802636"/>
+            <a:ext cx="877824" cy="146304"/>
+          </a:xfrm>
+          <a:prstGeom prst="rect">
+            <a:avLst/>
+          </a:prstGeom>
+          <a:noFill/>
+        </p:spPr>
+        <p:txBody>
+          <a:bodyPr wrap="none" anchor="t" lIns="0" rIns="0" tIns="0" bIns="0">
+            <a:spAutoFit/>
+          </a:bodyPr>
+          <a:lstStyle/>
+          <a:p>
+            <a:pPr algn="r">
+              <a:lnSpc>
+                <a:spcPct val="100000"/>
+              </a:lnSpc>
+            </a:pPr>
+            <a:r>
+              <a:rPr sz="1000" b="0">
+                <a:solidFill>
+                  <a:srgbClr val="555555"/>
+                </a:solidFill>
+                <a:latin typeface="SamsungOneKorean"/>
+                <a:ea typeface="SamsungOneKorean"/>
+                <a:cs typeface="SamsungOneKorean"/>
+              </a:rPr>
+              <a:t>범용·레거시</a:t>
+            </a:r>
+          </a:p>
+        </p:txBody>
+      </p:sp>
+      <p:sp>
+        <p:nvSpPr>
+          <p:cNvPr id="60" name="Rounded Rectangle 59"/>
+          <p:cNvSpPr/>
+          <p:nvPr/>
+        </p:nvSpPr>
+        <p:spPr>
+          <a:xfrm>
+            <a:off x="1399032" y="2743200"/>
+            <a:ext cx="1999427" cy="269748"/>
+          </a:xfrm>
+          <a:prstGeom prst="roundRect">
+            <a:avLst>
+              <a:gd name="adj" fmla="val 14000"/>
+            </a:avLst>
+          </a:prstGeom>
+          <a:solidFill>
+            <a:srgbClr val="E9EAEC"/>
+          </a:solidFill>
+          <a:ln>
+            <a:noFill/>
+          </a:ln>
+          <a:effectLst/>
+        </p:spPr>
+        <p:style>
+          <a:lnRef idx="1">
+            <a:schemeClr val="accent1"/>
+          </a:lnRef>
+          <a:fillRef idx="3">
+            <a:schemeClr val="accent1"/>
+          </a:fillRef>
+          <a:effectRef idx="2">
+            <a:schemeClr val="accent1"/>
+          </a:effectRef>
+          <a:fontRef idx="minor">
+            <a:schemeClr val="lt1"/>
+          </a:fontRef>
+        </p:style>
+        <p:txBody>
+          <a:bodyPr rtlCol="0" anchor="ctr"/>
+          <a:lstStyle/>
+          <a:p>
+            <a:pPr algn="ctr"/>
+          </a:p>
+        </p:txBody>
+      </p:sp>
+      <p:sp>
+        <p:nvSpPr>
+          <p:cNvPr id="61" name="TextBox 60"/>
+          <p:cNvSpPr txBox="1"/>
+          <p:nvPr/>
+        </p:nvSpPr>
+        <p:spPr>
+          <a:xfrm>
+            <a:off x="1399032" y="2799892"/>
+            <a:ext cx="1999427" cy="155448"/>
+          </a:xfrm>
+          <a:prstGeom prst="rect">
+            <a:avLst/>
+          </a:prstGeom>
+          <a:noFill/>
+        </p:spPr>
+        <p:txBody>
+          <a:bodyPr wrap="square" anchor="t" lIns="0" rIns="0" tIns="0" bIns="0">
+            <a:spAutoFit/>
+          </a:bodyPr>
+          <a:lstStyle/>
+          <a:p>
+            <a:pPr algn="ctr">
+              <a:lnSpc>
+                <a:spcPct val="100000"/>
+              </a:lnSpc>
+            </a:pPr>
+            <a:r>
+              <a:rPr sz="1000" b="1">
+                <a:solidFill>
+                  <a:srgbClr val="555555"/>
+                </a:solidFill>
+                <a:latin typeface="SamsungOneKorean"/>
+                <a:ea typeface="SamsungOneKorean"/>
+                <a:cs typeface="SamsungOneKorean"/>
+              </a:rPr>
+              <a:t>제한</a:t>
+            </a:r>
+          </a:p>
+        </p:txBody>
+      </p:sp>
+      <p:sp>
+        <p:nvSpPr>
+          <p:cNvPr id="62" name="Rounded Rectangle 61"/>
+          <p:cNvSpPr/>
+          <p:nvPr/>
+        </p:nvSpPr>
+        <p:spPr>
+          <a:xfrm>
+            <a:off x="3489899" y="2743200"/>
+            <a:ext cx="1999427" cy="269748"/>
+          </a:xfrm>
+          <a:prstGeom prst="roundRect">
+            <a:avLst>
+              <a:gd name="adj" fmla="val 14000"/>
+            </a:avLst>
+          </a:prstGeom>
+          <a:solidFill>
+            <a:srgbClr val="F3C2BD"/>
+          </a:solidFill>
+          <a:ln>
+            <a:noFill/>
+          </a:ln>
+          <a:effectLst/>
+        </p:spPr>
+        <p:style>
+          <a:lnRef idx="1">
+            <a:schemeClr val="accent1"/>
+          </a:lnRef>
+          <a:fillRef idx="3">
+            <a:schemeClr val="accent1"/>
+          </a:fillRef>
+          <a:effectRef idx="2">
+            <a:schemeClr val="accent1"/>
+          </a:effectRef>
+          <a:fontRef idx="minor">
+            <a:schemeClr val="lt1"/>
+          </a:fontRef>
+        </p:style>
+        <p:txBody>
+          <a:bodyPr rtlCol="0" anchor="ctr"/>
+          <a:lstStyle/>
+          <a:p>
+            <a:pPr algn="ctr"/>
+          </a:p>
+        </p:txBody>
+      </p:sp>
+      <p:sp>
+        <p:nvSpPr>
+          <p:cNvPr id="63" name="TextBox 62"/>
+          <p:cNvSpPr txBox="1"/>
+          <p:nvPr/>
+        </p:nvSpPr>
+        <p:spPr>
+          <a:xfrm>
+            <a:off x="3489899" y="2799892"/>
+            <a:ext cx="1999427" cy="155448"/>
+          </a:xfrm>
+          <a:prstGeom prst="rect">
+            <a:avLst/>
+          </a:prstGeom>
+          <a:noFill/>
+        </p:spPr>
+        <p:txBody>
+          <a:bodyPr wrap="square" anchor="t" lIns="0" rIns="0" tIns="0" bIns="0">
+            <a:spAutoFit/>
+          </a:bodyPr>
+          <a:lstStyle/>
+          <a:p>
+            <a:pPr algn="ctr">
+              <a:lnSpc>
+                <a:spcPct val="100000"/>
+              </a:lnSpc>
+            </a:pPr>
+            <a:r>
+              <a:rPr sz="1000" b="1">
+                <a:solidFill>
+                  <a:srgbClr val="B44A40"/>
+                </a:solidFill>
+                <a:latin typeface="SamsungOneKorean"/>
+                <a:ea typeface="SamsungOneKorean"/>
+                <a:cs typeface="SamsungOneKorean"/>
+              </a:rPr>
+              <a:t>압박</a:t>
+            </a:r>
+          </a:p>
+        </p:txBody>
+      </p:sp>
+      <p:sp>
+        <p:nvSpPr>
+          <p:cNvPr id="64" name="Rounded Rectangle 63"/>
+          <p:cNvSpPr/>
+          <p:nvPr/>
+        </p:nvSpPr>
+        <p:spPr>
+          <a:xfrm>
+            <a:off x="5580766" y="2743200"/>
+            <a:ext cx="1999427" cy="269748"/>
+          </a:xfrm>
+          <a:prstGeom prst="roundRect">
+            <a:avLst>
+              <a:gd name="adj" fmla="val 14000"/>
+            </a:avLst>
+          </a:prstGeom>
+          <a:solidFill>
+            <a:srgbClr val="D93025"/>
+          </a:solidFill>
+          <a:ln>
+            <a:noFill/>
+          </a:ln>
+          <a:effectLst/>
+        </p:spPr>
+        <p:style>
+          <a:lnRef idx="1">
+            <a:schemeClr val="accent1"/>
+          </a:lnRef>
+          <a:fillRef idx="3">
+            <a:schemeClr val="accent1"/>
+          </a:fillRef>
+          <a:effectRef idx="2">
+            <a:schemeClr val="accent1"/>
+          </a:effectRef>
+          <a:fontRef idx="minor">
+            <a:schemeClr val="lt1"/>
+          </a:fontRef>
+        </p:style>
+        <p:txBody>
+          <a:bodyPr rtlCol="0" anchor="ctr"/>
+          <a:lstStyle/>
+          <a:p>
+            <a:pPr algn="ctr"/>
+          </a:p>
+        </p:txBody>
+      </p:sp>
+      <p:sp>
+        <p:nvSpPr>
+          <p:cNvPr id="65" name="TextBox 64"/>
+          <p:cNvSpPr txBox="1"/>
+          <p:nvPr/>
+        </p:nvSpPr>
+        <p:spPr>
+          <a:xfrm>
+            <a:off x="5580766" y="2799892"/>
+            <a:ext cx="1999427" cy="155448"/>
+          </a:xfrm>
+          <a:prstGeom prst="rect">
+            <a:avLst/>
+          </a:prstGeom>
+          <a:noFill/>
+        </p:spPr>
+        <p:txBody>
+          <a:bodyPr wrap="square" anchor="t" lIns="0" rIns="0" tIns="0" bIns="0">
+            <a:spAutoFit/>
+          </a:bodyPr>
+          <a:lstStyle/>
+          <a:p>
+            <a:pPr algn="ctr">
+              <a:lnSpc>
+                <a:spcPct val="100000"/>
+              </a:lnSpc>
+            </a:pPr>
+            <a:r>
+              <a:rPr sz="1000" b="1">
+                <a:solidFill>
+                  <a:srgbClr val="FFFFFF"/>
+                </a:solidFill>
+                <a:latin typeface="SamsungOneKorean"/>
+                <a:ea typeface="SamsungOneKorean"/>
+                <a:cs typeface="SamsungOneKorean"/>
+              </a:rPr>
+              <a:t>직격</a:t>
+            </a:r>
+          </a:p>
+        </p:txBody>
+      </p:sp>
+      <p:sp>
+        <p:nvSpPr>
+          <p:cNvPr id="66" name="Rounded Rectangle 65"/>
+          <p:cNvSpPr/>
+          <p:nvPr/>
+        </p:nvSpPr>
+        <p:spPr>
+          <a:xfrm>
+            <a:off x="7671633" y="2743200"/>
+            <a:ext cx="1999427" cy="269748"/>
+          </a:xfrm>
+          <a:prstGeom prst="roundRect">
+            <a:avLst>
+              <a:gd name="adj" fmla="val 14000"/>
+            </a:avLst>
+          </a:prstGeom>
+          <a:solidFill>
+            <a:srgbClr val="D93025"/>
+          </a:solidFill>
+          <a:ln>
+            <a:noFill/>
+          </a:ln>
+          <a:effectLst/>
+        </p:spPr>
+        <p:style>
+          <a:lnRef idx="1">
+            <a:schemeClr val="accent1"/>
+          </a:lnRef>
+          <a:fillRef idx="3">
+            <a:schemeClr val="accent1"/>
+          </a:fillRef>
+          <a:effectRef idx="2">
+            <a:schemeClr val="accent1"/>
+          </a:effectRef>
+          <a:fontRef idx="minor">
+            <a:schemeClr val="lt1"/>
+          </a:fontRef>
+        </p:style>
+        <p:txBody>
+          <a:bodyPr rtlCol="0" anchor="ctr"/>
+          <a:lstStyle/>
+          <a:p>
+            <a:pPr algn="ctr"/>
+          </a:p>
+        </p:txBody>
+      </p:sp>
+      <p:sp>
+        <p:nvSpPr>
+          <p:cNvPr id="67" name="TextBox 66"/>
+          <p:cNvSpPr txBox="1"/>
+          <p:nvPr/>
+        </p:nvSpPr>
+        <p:spPr>
+          <a:xfrm>
+            <a:off x="7671633" y="2799892"/>
+            <a:ext cx="1999427" cy="155448"/>
+          </a:xfrm>
+          <a:prstGeom prst="rect">
+            <a:avLst/>
+          </a:prstGeom>
+          <a:noFill/>
+        </p:spPr>
+        <p:txBody>
+          <a:bodyPr wrap="square" anchor="t" lIns="0" rIns="0" tIns="0" bIns="0">
+            <a:spAutoFit/>
+          </a:bodyPr>
+          <a:lstStyle/>
+          <a:p>
+            <a:pPr algn="ctr">
+              <a:lnSpc>
+                <a:spcPct val="100000"/>
+              </a:lnSpc>
+            </a:pPr>
+            <a:r>
+              <a:rPr sz="1000" b="1">
+                <a:solidFill>
+                  <a:srgbClr val="FFFFFF"/>
+                </a:solidFill>
+                <a:latin typeface="SamsungOneKorean"/>
+                <a:ea typeface="SamsungOneKorean"/>
+                <a:cs typeface="SamsungOneKorean"/>
+              </a:rPr>
+              <a:t>직격</a:t>
+            </a:r>
+          </a:p>
+        </p:txBody>
+      </p:sp>
+      <p:sp>
+        <p:nvSpPr>
+          <p:cNvPr id="68" name="Rounded Rectangle 67"/>
+          <p:cNvSpPr/>
+          <p:nvPr/>
+        </p:nvSpPr>
+        <p:spPr>
+          <a:xfrm>
+            <a:off x="9762500" y="2743200"/>
+            <a:ext cx="1999427" cy="269748"/>
+          </a:xfrm>
+          <a:prstGeom prst="roundRect">
+            <a:avLst>
+              <a:gd name="adj" fmla="val 14000"/>
+            </a:avLst>
+          </a:prstGeom>
+          <a:solidFill>
+            <a:srgbClr val="E9EAEC"/>
+          </a:solidFill>
+          <a:ln>
+            <a:noFill/>
+          </a:ln>
+          <a:effectLst/>
+        </p:spPr>
+        <p:style>
+          <a:lnRef idx="1">
+            <a:schemeClr val="accent1"/>
+          </a:lnRef>
+          <a:fillRef idx="3">
+            <a:schemeClr val="accent1"/>
+          </a:fillRef>
+          <a:effectRef idx="2">
+            <a:schemeClr val="accent1"/>
+          </a:effectRef>
+          <a:fontRef idx="minor">
+            <a:schemeClr val="lt1"/>
+          </a:fontRef>
+        </p:style>
+        <p:txBody>
+          <a:bodyPr rtlCol="0" anchor="ctr"/>
+          <a:lstStyle/>
+          <a:p>
+            <a:pPr algn="ctr"/>
+          </a:p>
+        </p:txBody>
+      </p:sp>
+      <p:sp>
+        <p:nvSpPr>
+          <p:cNvPr id="69" name="TextBox 68"/>
+          <p:cNvSpPr txBox="1"/>
+          <p:nvPr/>
+        </p:nvSpPr>
+        <p:spPr>
+          <a:xfrm>
+            <a:off x="9762500" y="2799892"/>
+            <a:ext cx="1999427" cy="155448"/>
+          </a:xfrm>
+          <a:prstGeom prst="rect">
+            <a:avLst/>
+          </a:prstGeom>
+          <a:noFill/>
+        </p:spPr>
+        <p:txBody>
+          <a:bodyPr wrap="square" anchor="t" lIns="0" rIns="0" tIns="0" bIns="0">
+            <a:spAutoFit/>
+          </a:bodyPr>
+          <a:lstStyle/>
+          <a:p>
+            <a:pPr algn="ctr">
+              <a:lnSpc>
+                <a:spcPct val="100000"/>
+              </a:lnSpc>
+            </a:pPr>
+            <a:r>
+              <a:rPr sz="1000" b="1">
+                <a:solidFill>
+                  <a:srgbClr val="555555"/>
+                </a:solidFill>
+                <a:latin typeface="SamsungOneKorean"/>
+                <a:ea typeface="SamsungOneKorean"/>
+                <a:cs typeface="SamsungOneKorean"/>
+              </a:rPr>
+              <a:t>제한</a:t>
+            </a:r>
+          </a:p>
+        </p:txBody>
+      </p:sp>
+      <p:sp>
+        <p:nvSpPr>
+          <p:cNvPr id="70" name="TextBox 69"/>
+          <p:cNvSpPr txBox="1"/>
+          <p:nvPr/>
+        </p:nvSpPr>
+        <p:spPr>
+          <a:xfrm>
+            <a:off x="429768" y="3122675"/>
+            <a:ext cx="877824" cy="146304"/>
+          </a:xfrm>
+          <a:prstGeom prst="rect">
+            <a:avLst/>
+          </a:prstGeom>
+          <a:noFill/>
+        </p:spPr>
+        <p:txBody>
+          <a:bodyPr wrap="none" anchor="t" lIns="0" rIns="0" tIns="0" bIns="0">
+            <a:spAutoFit/>
+          </a:bodyPr>
+          <a:lstStyle/>
+          <a:p>
+            <a:pPr algn="r">
+              <a:lnSpc>
+                <a:spcPct val="100000"/>
+              </a:lnSpc>
+            </a:pPr>
+            <a:r>
+              <a:rPr sz="1000" b="0">
+                <a:solidFill>
+                  <a:srgbClr val="555555"/>
+                </a:solidFill>
+                <a:latin typeface="SamsungOneKorean"/>
+                <a:ea typeface="SamsungOneKorean"/>
+                <a:cs typeface="SamsungOneKorean"/>
+              </a:rPr>
+              <a:t>NAND·SSD</a:t>
+            </a:r>
+          </a:p>
+        </p:txBody>
+      </p:sp>
+      <p:sp>
+        <p:nvSpPr>
+          <p:cNvPr id="71" name="Rounded Rectangle 70"/>
+          <p:cNvSpPr/>
+          <p:nvPr/>
+        </p:nvSpPr>
+        <p:spPr>
+          <a:xfrm>
+            <a:off x="1399032" y="3063239"/>
+            <a:ext cx="1999427" cy="269748"/>
+          </a:xfrm>
+          <a:prstGeom prst="roundRect">
+            <a:avLst>
+              <a:gd name="adj" fmla="val 14000"/>
+            </a:avLst>
+          </a:prstGeom>
+          <a:solidFill>
+            <a:srgbClr val="F3C2BD"/>
+          </a:solidFill>
+          <a:ln>
+            <a:noFill/>
+          </a:ln>
+          <a:effectLst/>
+        </p:spPr>
+        <p:style>
+          <a:lnRef idx="1">
+            <a:schemeClr val="accent1"/>
+          </a:lnRef>
+          <a:fillRef idx="3">
+            <a:schemeClr val="accent1"/>
+          </a:fillRef>
+          <a:effectRef idx="2">
+            <a:schemeClr val="accent1"/>
+          </a:effectRef>
+          <a:fontRef idx="minor">
+            <a:schemeClr val="lt1"/>
+          </a:fontRef>
+        </p:style>
+        <p:txBody>
+          <a:bodyPr rtlCol="0" anchor="ctr"/>
+          <a:lstStyle/>
+          <a:p>
+            <a:pPr algn="ctr"/>
+          </a:p>
+        </p:txBody>
+      </p:sp>
+      <p:sp>
+        <p:nvSpPr>
+          <p:cNvPr id="72" name="TextBox 71"/>
+          <p:cNvSpPr txBox="1"/>
+          <p:nvPr/>
+        </p:nvSpPr>
+        <p:spPr>
+          <a:xfrm>
+            <a:off x="1399032" y="3119932"/>
+            <a:ext cx="1999427" cy="155448"/>
+          </a:xfrm>
+          <a:prstGeom prst="rect">
+            <a:avLst/>
+          </a:prstGeom>
+          <a:noFill/>
+        </p:spPr>
+        <p:txBody>
+          <a:bodyPr wrap="square" anchor="t" lIns="0" rIns="0" tIns="0" bIns="0">
+            <a:spAutoFit/>
+          </a:bodyPr>
+          <a:lstStyle/>
+          <a:p>
+            <a:pPr algn="ctr">
+              <a:lnSpc>
+                <a:spcPct val="100000"/>
+              </a:lnSpc>
+            </a:pPr>
+            <a:r>
+              <a:rPr sz="1000" b="1">
+                <a:solidFill>
+                  <a:srgbClr val="B44A40"/>
+                </a:solidFill>
+                <a:latin typeface="SamsungOneKorean"/>
+                <a:ea typeface="SamsungOneKorean"/>
+                <a:cs typeface="SamsungOneKorean"/>
+              </a:rPr>
+              <a:t>압박</a:t>
+            </a:r>
+          </a:p>
+        </p:txBody>
+      </p:sp>
+      <p:sp>
+        <p:nvSpPr>
+          <p:cNvPr id="73" name="Rounded Rectangle 72"/>
+          <p:cNvSpPr/>
+          <p:nvPr/>
+        </p:nvSpPr>
+        <p:spPr>
+          <a:xfrm>
+            <a:off x="3489899" y="3063239"/>
+            <a:ext cx="1999427" cy="269748"/>
+          </a:xfrm>
+          <a:prstGeom prst="roundRect">
+            <a:avLst>
+              <a:gd name="adj" fmla="val 14000"/>
+            </a:avLst>
+          </a:prstGeom>
+          <a:solidFill>
+            <a:srgbClr val="00A651"/>
+          </a:solidFill>
+          <a:ln>
+            <a:noFill/>
+          </a:ln>
+          <a:effectLst/>
+        </p:spPr>
+        <p:style>
+          <a:lnRef idx="1">
+            <a:schemeClr val="accent1"/>
+          </a:lnRef>
+          <a:fillRef idx="3">
+            <a:schemeClr val="accent1"/>
+          </a:fillRef>
+          <a:effectRef idx="2">
+            <a:schemeClr val="accent1"/>
+          </a:effectRef>
+          <a:fontRef idx="minor">
+            <a:schemeClr val="lt1"/>
+          </a:fontRef>
+        </p:style>
+        <p:txBody>
+          <a:bodyPr rtlCol="0" anchor="ctr"/>
+          <a:lstStyle/>
+          <a:p>
+            <a:pPr algn="ctr"/>
+          </a:p>
+        </p:txBody>
+      </p:sp>
+      <p:sp>
+        <p:nvSpPr>
+          <p:cNvPr id="74" name="TextBox 73"/>
+          <p:cNvSpPr txBox="1"/>
+          <p:nvPr/>
+        </p:nvSpPr>
+        <p:spPr>
+          <a:xfrm>
+            <a:off x="3489899" y="3119932"/>
+            <a:ext cx="1999427" cy="155448"/>
+          </a:xfrm>
+          <a:prstGeom prst="rect">
+            <a:avLst/>
+          </a:prstGeom>
+          <a:noFill/>
+        </p:spPr>
+        <p:txBody>
+          <a:bodyPr wrap="square" anchor="t" lIns="0" rIns="0" tIns="0" bIns="0">
+            <a:spAutoFit/>
+          </a:bodyPr>
+          <a:lstStyle/>
+          <a:p>
+            <a:pPr algn="ctr">
+              <a:lnSpc>
+                <a:spcPct val="100000"/>
+              </a:lnSpc>
+            </a:pPr>
+            <a:r>
+              <a:rPr sz="1000" b="1">
+                <a:solidFill>
+                  <a:srgbClr val="FFFFFF"/>
+                </a:solidFill>
+                <a:latin typeface="SamsungOneKorean"/>
+                <a:ea typeface="SamsungOneKorean"/>
+                <a:cs typeface="SamsungOneKorean"/>
+              </a:rPr>
+              <a:t>수혜</a:t>
+            </a:r>
+          </a:p>
+        </p:txBody>
+      </p:sp>
+      <p:sp>
+        <p:nvSpPr>
+          <p:cNvPr id="75" name="Rounded Rectangle 74"/>
+          <p:cNvSpPr/>
+          <p:nvPr/>
+        </p:nvSpPr>
+        <p:spPr>
+          <a:xfrm>
+            <a:off x="5580766" y="3063239"/>
+            <a:ext cx="1999427" cy="269748"/>
+          </a:xfrm>
+          <a:prstGeom prst="roundRect">
+            <a:avLst>
+              <a:gd name="adj" fmla="val 14000"/>
+            </a:avLst>
+          </a:prstGeom>
+          <a:solidFill>
+            <a:srgbClr val="D93025"/>
+          </a:solidFill>
+          <a:ln>
+            <a:noFill/>
+          </a:ln>
+          <a:effectLst/>
+        </p:spPr>
+        <p:style>
+          <a:lnRef idx="1">
+            <a:schemeClr val="accent1"/>
+          </a:lnRef>
+          <a:fillRef idx="3">
+            <a:schemeClr val="accent1"/>
+          </a:fillRef>
+          <a:effectRef idx="2">
+            <a:schemeClr val="accent1"/>
+          </a:effectRef>
+          <a:fontRef idx="minor">
+            <a:schemeClr val="lt1"/>
+          </a:fontRef>
+        </p:style>
+        <p:txBody>
+          <a:bodyPr rtlCol="0" anchor="ctr"/>
+          <a:lstStyle/>
+          <a:p>
+            <a:pPr algn="ctr"/>
+          </a:p>
+        </p:txBody>
+      </p:sp>
+      <p:sp>
+        <p:nvSpPr>
+          <p:cNvPr id="76" name="TextBox 75"/>
+          <p:cNvSpPr txBox="1"/>
+          <p:nvPr/>
+        </p:nvSpPr>
+        <p:spPr>
+          <a:xfrm>
+            <a:off x="5580766" y="3119932"/>
+            <a:ext cx="1999427" cy="155448"/>
+          </a:xfrm>
+          <a:prstGeom prst="rect">
+            <a:avLst/>
+          </a:prstGeom>
+          <a:noFill/>
+        </p:spPr>
+        <p:txBody>
+          <a:bodyPr wrap="square" anchor="t" lIns="0" rIns="0" tIns="0" bIns="0">
+            <a:spAutoFit/>
+          </a:bodyPr>
+          <a:lstStyle/>
+          <a:p>
+            <a:pPr algn="ctr">
+              <a:lnSpc>
+                <a:spcPct val="100000"/>
+              </a:lnSpc>
+            </a:pPr>
+            <a:r>
+              <a:rPr sz="1000" b="1">
+                <a:solidFill>
+                  <a:srgbClr val="FFFFFF"/>
+                </a:solidFill>
+                <a:latin typeface="SamsungOneKorean"/>
+                <a:ea typeface="SamsungOneKorean"/>
+                <a:cs typeface="SamsungOneKorean"/>
+              </a:rPr>
+              <a:t>직격</a:t>
+            </a:r>
+          </a:p>
+        </p:txBody>
+      </p:sp>
+      <p:sp>
+        <p:nvSpPr>
+          <p:cNvPr id="77" name="Rounded Rectangle 76"/>
+          <p:cNvSpPr/>
+          <p:nvPr/>
+        </p:nvSpPr>
+        <p:spPr>
+          <a:xfrm>
+            <a:off x="7671633" y="3063239"/>
+            <a:ext cx="1999427" cy="269748"/>
+          </a:xfrm>
+          <a:prstGeom prst="roundRect">
+            <a:avLst>
+              <a:gd name="adj" fmla="val 14000"/>
+            </a:avLst>
+          </a:prstGeom>
+          <a:solidFill>
+            <a:srgbClr val="D93025"/>
+          </a:solidFill>
+          <a:ln>
+            <a:noFill/>
+          </a:ln>
+          <a:effectLst/>
+        </p:spPr>
+        <p:style>
+          <a:lnRef idx="1">
+            <a:schemeClr val="accent1"/>
+          </a:lnRef>
+          <a:fillRef idx="3">
+            <a:schemeClr val="accent1"/>
+          </a:fillRef>
+          <a:effectRef idx="2">
+            <a:schemeClr val="accent1"/>
+          </a:effectRef>
+          <a:fontRef idx="minor">
+            <a:schemeClr val="lt1"/>
+          </a:fontRef>
+        </p:style>
+        <p:txBody>
+          <a:bodyPr rtlCol="0" anchor="ctr"/>
+          <a:lstStyle/>
+          <a:p>
+            <a:pPr algn="ctr"/>
+          </a:p>
+        </p:txBody>
+      </p:sp>
+      <p:sp>
+        <p:nvSpPr>
+          <p:cNvPr id="78" name="TextBox 77"/>
+          <p:cNvSpPr txBox="1"/>
+          <p:nvPr/>
+        </p:nvSpPr>
+        <p:spPr>
+          <a:xfrm>
+            <a:off x="7671633" y="3119932"/>
+            <a:ext cx="1999427" cy="155448"/>
+          </a:xfrm>
+          <a:prstGeom prst="rect">
+            <a:avLst/>
+          </a:prstGeom>
+          <a:noFill/>
+        </p:spPr>
+        <p:txBody>
+          <a:bodyPr wrap="square" anchor="t" lIns="0" rIns="0" tIns="0" bIns="0">
+            <a:spAutoFit/>
+          </a:bodyPr>
+          <a:lstStyle/>
+          <a:p>
+            <a:pPr algn="ctr">
+              <a:lnSpc>
+                <a:spcPct val="100000"/>
+              </a:lnSpc>
+            </a:pPr>
+            <a:r>
+              <a:rPr sz="1000" b="1">
+                <a:solidFill>
+                  <a:srgbClr val="FFFFFF"/>
+                </a:solidFill>
+                <a:latin typeface="SamsungOneKorean"/>
+                <a:ea typeface="SamsungOneKorean"/>
+                <a:cs typeface="SamsungOneKorean"/>
+              </a:rPr>
+              <a:t>직격</a:t>
+            </a:r>
+          </a:p>
+        </p:txBody>
+      </p:sp>
+      <p:sp>
+        <p:nvSpPr>
+          <p:cNvPr id="79" name="Rounded Rectangle 78"/>
+          <p:cNvSpPr/>
+          <p:nvPr/>
+        </p:nvSpPr>
+        <p:spPr>
+          <a:xfrm>
+            <a:off x="9762500" y="3063239"/>
+            <a:ext cx="1999427" cy="269748"/>
+          </a:xfrm>
+          <a:prstGeom prst="roundRect">
+            <a:avLst>
+              <a:gd name="adj" fmla="val 14000"/>
+            </a:avLst>
+          </a:prstGeom>
+          <a:solidFill>
+            <a:srgbClr val="00A651"/>
+          </a:solidFill>
+          <a:ln>
+            <a:noFill/>
+          </a:ln>
+          <a:effectLst/>
+        </p:spPr>
+        <p:style>
+          <a:lnRef idx="1">
+            <a:schemeClr val="accent1"/>
+          </a:lnRef>
+          <a:fillRef idx="3">
+            <a:schemeClr val="accent1"/>
+          </a:fillRef>
+          <a:effectRef idx="2">
+            <a:schemeClr val="accent1"/>
+          </a:effectRef>
+          <a:fontRef idx="minor">
+            <a:schemeClr val="lt1"/>
+          </a:fontRef>
+        </p:style>
+        <p:txBody>
+          <a:bodyPr rtlCol="0" anchor="ctr"/>
+          <a:lstStyle/>
+          <a:p>
+            <a:pPr algn="ctr"/>
+          </a:p>
+        </p:txBody>
+      </p:sp>
+      <p:sp>
+        <p:nvSpPr>
+          <p:cNvPr id="80" name="TextBox 79"/>
+          <p:cNvSpPr txBox="1"/>
+          <p:nvPr/>
+        </p:nvSpPr>
+        <p:spPr>
+          <a:xfrm>
+            <a:off x="9762500" y="3119932"/>
+            <a:ext cx="1999427" cy="155448"/>
+          </a:xfrm>
+          <a:prstGeom prst="rect">
+            <a:avLst/>
+          </a:prstGeom>
+          <a:noFill/>
+        </p:spPr>
+        <p:txBody>
+          <a:bodyPr wrap="square" anchor="t" lIns="0" rIns="0" tIns="0" bIns="0">
+            <a:spAutoFit/>
+          </a:bodyPr>
+          <a:lstStyle/>
+          <a:p>
+            <a:pPr algn="ctr">
+              <a:lnSpc>
+                <a:spcPct val="100000"/>
+              </a:lnSpc>
+            </a:pPr>
+            <a:r>
+              <a:rPr sz="1000" b="1">
+                <a:solidFill>
+                  <a:srgbClr val="FFFFFF"/>
+                </a:solidFill>
+                <a:latin typeface="SamsungOneKorean"/>
+                <a:ea typeface="SamsungOneKorean"/>
+                <a:cs typeface="SamsungOneKorean"/>
+              </a:rPr>
+              <a:t>수혜</a:t>
+            </a:r>
+          </a:p>
+        </p:txBody>
+      </p:sp>
       <p:cxnSp>
         <p:nvCxnSpPr>
-          <p:cNvPr id="48" name="Connector 47"/>
+          <p:cNvPr id="81" name="Connector 80"/>
           <p:cNvCxnSpPr/>
           <p:nvPr/>
         </p:nvCxnSpPr>
         <p:spPr>
           <a:xfrm>
-            <a:off x="521207" y="3010204"/>
-            <a:ext cx="2006194" cy="0"/>
+            <a:off x="3444179" y="3497579"/>
+            <a:ext cx="0" cy="2491741"/>
           </a:xfrm>
           <a:prstGeom prst="line">
             <a:avLst/>
@@ -5243,16 +6716,227 @@
           </a:fontRef>
         </p:style>
       </p:cxnSp>
-      <p:sp>
-        <p:nvSpPr>
-          <p:cNvPr id="49" name="TextBox 48"/>
+      <p:cxnSp>
+        <p:nvCxnSpPr>
+          <p:cNvPr id="82" name="Connector 81"/>
+          <p:cNvCxnSpPr/>
+          <p:nvPr/>
+        </p:nvCxnSpPr>
+        <p:spPr>
+          <a:xfrm>
+            <a:off x="5535046" y="3497579"/>
+            <a:ext cx="0" cy="2491741"/>
+          </a:xfrm>
+          <a:prstGeom prst="line">
+            <a:avLst/>
+          </a:prstGeom>
+          <a:ln w="6350">
+            <a:solidFill>
+              <a:srgbClr val="D9D9D9"/>
+            </a:solidFill>
+          </a:ln>
+          <a:effectLst/>
+        </p:spPr>
+        <p:style>
+          <a:lnRef idx="2">
+            <a:schemeClr val="accent1"/>
+          </a:lnRef>
+          <a:fillRef idx="0">
+            <a:schemeClr val="accent1"/>
+          </a:fillRef>
+          <a:effectRef idx="1">
+            <a:schemeClr val="accent1"/>
+          </a:effectRef>
+          <a:fontRef idx="minor">
+            <a:schemeClr val="tx1"/>
+          </a:fontRef>
+        </p:style>
+      </p:cxnSp>
+      <p:cxnSp>
+        <p:nvCxnSpPr>
+          <p:cNvPr id="83" name="Connector 82"/>
+          <p:cNvCxnSpPr/>
+          <p:nvPr/>
+        </p:nvCxnSpPr>
+        <p:spPr>
+          <a:xfrm>
+            <a:off x="7625913" y="3497579"/>
+            <a:ext cx="0" cy="2491741"/>
+          </a:xfrm>
+          <a:prstGeom prst="line">
+            <a:avLst/>
+          </a:prstGeom>
+          <a:ln w="6350">
+            <a:solidFill>
+              <a:srgbClr val="D9D9D9"/>
+            </a:solidFill>
+          </a:ln>
+          <a:effectLst/>
+        </p:spPr>
+        <p:style>
+          <a:lnRef idx="2">
+            <a:schemeClr val="accent1"/>
+          </a:lnRef>
+          <a:fillRef idx="0">
+            <a:schemeClr val="accent1"/>
+          </a:fillRef>
+          <a:effectRef idx="1">
+            <a:schemeClr val="accent1"/>
+          </a:effectRef>
+          <a:fontRef idx="minor">
+            <a:schemeClr val="tx1"/>
+          </a:fontRef>
+        </p:style>
+      </p:cxnSp>
+      <p:cxnSp>
+        <p:nvCxnSpPr>
+          <p:cNvPr id="84" name="Connector 83"/>
+          <p:cNvCxnSpPr/>
+          <p:nvPr/>
+        </p:nvCxnSpPr>
+        <p:spPr>
+          <a:xfrm>
+            <a:off x="9716780" y="3497579"/>
+            <a:ext cx="0" cy="2491741"/>
+          </a:xfrm>
+          <a:prstGeom prst="line">
+            <a:avLst/>
+          </a:prstGeom>
+          <a:ln w="6350">
+            <a:solidFill>
+              <a:srgbClr val="D9D9D9"/>
+            </a:solidFill>
+          </a:ln>
+          <a:effectLst/>
+        </p:spPr>
+        <p:style>
+          <a:lnRef idx="2">
+            <a:schemeClr val="accent1"/>
+          </a:lnRef>
+          <a:fillRef idx="0">
+            <a:schemeClr val="accent1"/>
+          </a:fillRef>
+          <a:effectRef idx="1">
+            <a:schemeClr val="accent1"/>
+          </a:effectRef>
+          <a:fontRef idx="minor">
+            <a:schemeClr val="tx1"/>
+          </a:fontRef>
+        </p:style>
+      </p:cxnSp>
+      <p:sp>
+        <p:nvSpPr>
+          <p:cNvPr id="85" name="Rectangle 84"/>
+          <p:cNvSpPr/>
+          <p:nvPr/>
+        </p:nvSpPr>
+        <p:spPr>
+          <a:xfrm>
+            <a:off x="1399032" y="3515868"/>
+            <a:ext cx="32004" cy="475488"/>
+          </a:xfrm>
+          <a:prstGeom prst="rect">
+            <a:avLst/>
+          </a:prstGeom>
+          <a:solidFill>
+            <a:srgbClr val="1428A0"/>
+          </a:solidFill>
+          <a:ln>
+            <a:noFill/>
+          </a:ln>
+          <a:effectLst/>
+        </p:spPr>
+        <p:style>
+          <a:lnRef idx="1">
+            <a:schemeClr val="accent1"/>
+          </a:lnRef>
+          <a:fillRef idx="3">
+            <a:schemeClr val="accent1"/>
+          </a:fillRef>
+          <a:effectRef idx="2">
+            <a:schemeClr val="accent1"/>
+          </a:effectRef>
+          <a:fontRef idx="minor">
+            <a:schemeClr val="lt1"/>
+          </a:fontRef>
+        </p:style>
+        <p:txBody>
+          <a:bodyPr rtlCol="0" anchor="ctr"/>
+          <a:lstStyle/>
+          <a:p>
+            <a:pPr algn="ctr"/>
+          </a:p>
+        </p:txBody>
+      </p:sp>
+      <p:sp>
+        <p:nvSpPr>
+          <p:cNvPr id="86" name="TextBox 85"/>
           <p:cNvSpPr txBox="1"/>
           <p:nvPr/>
         </p:nvSpPr>
         <p:spPr>
           <a:xfrm>
-            <a:off x="521207" y="3065068"/>
-            <a:ext cx="2006193" cy="146304"/>
+            <a:off x="1517904" y="3525011"/>
+            <a:ext cx="1880555" cy="475488"/>
+          </a:xfrm>
+          <a:prstGeom prst="rect">
+            <a:avLst/>
+          </a:prstGeom>
+          <a:noFill/>
+        </p:spPr>
+        <p:txBody>
+          <a:bodyPr wrap="square" anchor="t" lIns="0" rIns="0" tIns="0" bIns="0">
+            <a:spAutoFit/>
+          </a:bodyPr>
+          <a:lstStyle/>
+          <a:p>
+            <a:pPr algn="l">
+              <a:lnSpc>
+                <a:spcPct val="112000"/>
+              </a:lnSpc>
+            </a:pPr>
+            <a:r>
+              <a:rPr sz="1150" b="1">
+                <a:solidFill>
+                  <a:srgbClr val="1A1A1A"/>
+                </a:solidFill>
+                <a:latin typeface="SamsungOneKorean"/>
+                <a:ea typeface="SamsungOneKorean"/>
+                <a:cs typeface="SamsungOneKorean"/>
+              </a:rPr>
+              <a:t>대응할 시간이 없다.</a:t>
+            </a:r>
+          </a:p>
+          <a:p>
+            <a:pPr algn="l">
+              <a:lnSpc>
+                <a:spcPct val="112000"/>
+              </a:lnSpc>
+            </a:pPr>
+            <a:r>
+              <a:rPr sz="1150" b="1">
+                <a:solidFill>
+                  <a:srgbClr val="1A1A1A"/>
+                </a:solidFill>
+                <a:latin typeface="SamsungOneKorean"/>
+                <a:ea typeface="SamsungOneKorean"/>
+                <a:cs typeface="SamsungOneKorean"/>
+              </a:rPr>
+              <a:t>도착 전에 이미 결정된다</a:t>
+            </a:r>
+          </a:p>
+        </p:txBody>
+      </p:sp>
+      <p:sp>
+        <p:nvSpPr>
+          <p:cNvPr id="87" name="TextBox 86"/>
+          <p:cNvSpPr txBox="1"/>
+          <p:nvPr/>
+        </p:nvSpPr>
+        <p:spPr>
+          <a:xfrm>
+            <a:off x="1399032" y="4155948"/>
+            <a:ext cx="1999427" cy="155448"/>
           </a:xfrm>
           <a:prstGeom prst="rect">
             <a:avLst/>
@@ -5273,68 +6957,38 @@
             <a:r>
               <a:rPr sz="1000" b="1">
                 <a:solidFill>
-                  <a:srgbClr val="1428A0"/>
-                </a:solidFill>
-                <a:latin typeface="SamsungOneKorean"/>
-                <a:ea typeface="SamsungOneKorean"/>
-                <a:cs typeface="SamsungOneKorean"/>
-              </a:rPr>
-              <a:t>무엇이 갈리나</a:t>
-            </a:r>
-          </a:p>
-        </p:txBody>
-      </p:sp>
-      <p:sp>
-        <p:nvSpPr>
-          <p:cNvPr id="50" name="TextBox 49"/>
+                  <a:srgbClr val="D93025"/>
+                </a:solidFill>
+                <a:latin typeface="SamsungOneKorean"/>
+                <a:ea typeface="SamsungOneKorean"/>
+                <a:cs typeface="SamsungOneKorean"/>
+              </a:rPr>
+              <a:t>찔리는 곳  </a:t>
+            </a:r>
+            <a:r>
+              <a:rPr sz="1050" b="1">
+                <a:solidFill>
+                  <a:srgbClr val="D93025"/>
+                </a:solidFill>
+                <a:latin typeface="SamsungOneKorean"/>
+                <a:ea typeface="SamsungOneKorean"/>
+                <a:cs typeface="SamsungOneKorean"/>
+              </a:rPr>
+              <a:t>W3·W1</a:t>
+            </a:r>
+          </a:p>
+        </p:txBody>
+      </p:sp>
+      <p:sp>
+        <p:nvSpPr>
+          <p:cNvPr id="88" name="TextBox 87"/>
           <p:cNvSpPr txBox="1"/>
           <p:nvPr/>
         </p:nvSpPr>
         <p:spPr>
           <a:xfrm>
-            <a:off x="521207" y="3225088"/>
-            <a:ext cx="2006193" cy="457200"/>
-          </a:xfrm>
-          <a:prstGeom prst="rect">
-            <a:avLst/>
-          </a:prstGeom>
-          <a:noFill/>
-        </p:spPr>
-        <p:txBody>
-          <a:bodyPr wrap="square" anchor="t" lIns="0" rIns="0" tIns="0" bIns="0">
-            <a:spAutoFit/>
-          </a:bodyPr>
-          <a:lstStyle/>
-          <a:p>
-            <a:pPr algn="l">
-              <a:lnSpc>
-                <a:spcPct val="106000"/>
-              </a:lnSpc>
-            </a:pPr>
-            <a:r>
-              <a:rPr sz="1000" b="0">
-                <a:solidFill>
-                  <a:srgbClr val="1A1A1A"/>
-                </a:solidFill>
-                <a:latin typeface="SamsungOneKorean"/>
-                <a:ea typeface="SamsungOneKorean"/>
-                <a:cs typeface="SamsungOneKorean"/>
-              </a:rPr>
-              <a:t>대응할 시간이 없다. 도착 시점에 갖춰진 계약의 질·현금·판단 배선이 결과를 결정한다</a:t>
-            </a:r>
-          </a:p>
-        </p:txBody>
-      </p:sp>
-      <p:sp>
-        <p:nvSpPr>
-          <p:cNvPr id="51" name="TextBox 50"/>
-          <p:cNvSpPr txBox="1"/>
-          <p:nvPr/>
-        </p:nvSpPr>
-        <p:spPr>
-          <a:xfrm>
-            <a:off x="521207" y="3741724"/>
-            <a:ext cx="2006193" cy="146304"/>
+            <a:off x="1399032" y="4338828"/>
+            <a:ext cx="1999427" cy="164592"/>
           </a:xfrm>
           <a:prstGeom prst="rect">
             <a:avLst/>
@@ -5353,81 +7007,29 @@
               </a:lnSpc>
             </a:pPr>
             <a:r>
-              <a:rPr sz="1000" b="1">
-                <a:solidFill>
-                  <a:srgbClr val="D93025"/>
-                </a:solidFill>
-                <a:latin typeface="SamsungOneKorean"/>
-                <a:ea typeface="SamsungOneKorean"/>
-                <a:cs typeface="SamsungOneKorean"/>
-              </a:rPr>
-              <a:t>찔리는 곳 </a:t>
-            </a:r>
-            <a:r>
-              <a:rPr sz="1000" b="1">
-                <a:solidFill>
-                  <a:srgbClr val="D93025"/>
-                </a:solidFill>
-                <a:latin typeface="SamsungOneKorean"/>
-                <a:ea typeface="SamsungOneKorean"/>
-                <a:cs typeface="SamsungOneKorean"/>
-              </a:rPr>
-              <a:t>W3·W1</a:t>
-            </a:r>
-          </a:p>
-        </p:txBody>
-      </p:sp>
-      <p:sp>
-        <p:nvSpPr>
-          <p:cNvPr id="52" name="TextBox 51"/>
+              <a:rPr sz="1050" b="0">
+                <a:solidFill>
+                  <a:srgbClr val="1A1A1A"/>
+                </a:solidFill>
+                <a:latin typeface="SamsungOneKorean"/>
+                <a:ea typeface="SamsungOneKorean"/>
+                <a:cs typeface="SamsungOneKorean"/>
+              </a:rPr>
+              <a:t>판단을 신호에 사전 위임</a:t>
+            </a:r>
+          </a:p>
+        </p:txBody>
+      </p:sp>
+      <p:sp>
+        <p:nvSpPr>
+          <p:cNvPr id="89" name="TextBox 88"/>
           <p:cNvSpPr txBox="1"/>
           <p:nvPr/>
         </p:nvSpPr>
         <p:spPr>
           <a:xfrm>
-            <a:off x="521207" y="3901744"/>
-            <a:ext cx="2006193" cy="457200"/>
-          </a:xfrm>
-          <a:prstGeom prst="rect">
-            <a:avLst/>
-          </a:prstGeom>
-          <a:noFill/>
-        </p:spPr>
-        <p:txBody>
-          <a:bodyPr wrap="square" anchor="t" lIns="0" rIns="0" tIns="0" bIns="0">
-            <a:spAutoFit/>
-          </a:bodyPr>
-          <a:lstStyle/>
-          <a:p>
-            <a:pPr algn="l">
-              <a:lnSpc>
-                <a:spcPct val="106000"/>
-              </a:lnSpc>
-            </a:pPr>
-            <a:r>
-              <a:rPr sz="1000" b="0">
-                <a:solidFill>
-                  <a:srgbClr val="1A1A1A"/>
-                </a:solidFill>
-                <a:latin typeface="SamsungOneKorean"/>
-                <a:ea typeface="SamsungOneKorean"/>
-                <a:cs typeface="SamsungOneKorean"/>
-              </a:rPr>
-              <a:t>판단 지연이 분기 손실로 직결, 고부가 캐파 공동화. 판단을 사전 합의된 신호에 위임해 둘 것</a:t>
-            </a:r>
-          </a:p>
-        </p:txBody>
-      </p:sp>
-      <p:sp>
-        <p:nvSpPr>
-          <p:cNvPr id="53" name="TextBox 52"/>
-          <p:cNvSpPr txBox="1"/>
-          <p:nvPr/>
-        </p:nvSpPr>
-        <p:spPr>
-          <a:xfrm>
-            <a:off x="521207" y="4422952"/>
-            <a:ext cx="2006193" cy="146304"/>
+            <a:off x="1399032" y="4631436"/>
+            <a:ext cx="1999427" cy="155448"/>
           </a:xfrm>
           <a:prstGeom prst="rect">
             <a:avLst/>
@@ -5454,10 +7056,10 @@
                 <a:ea typeface="SamsungOneKorean"/>
                 <a:cs typeface="SamsungOneKorean"/>
               </a:rPr>
-              <a:t>살리는 곳 </a:t>
-            </a:r>
-            <a:r>
-              <a:rPr sz="1000" b="1">
+              <a:t>살리는 곳  </a:t>
+            </a:r>
+            <a:r>
+              <a:rPr sz="1050" b="1">
                 <a:solidFill>
                   <a:srgbClr val="1428A0"/>
                 </a:solidFill>
@@ -5472,55 +7074,14 @@
       </p:sp>
       <p:sp>
         <p:nvSpPr>
-          <p:cNvPr id="54" name="TextBox 53"/>
+          <p:cNvPr id="90" name="TextBox 89"/>
           <p:cNvSpPr txBox="1"/>
           <p:nvPr/>
         </p:nvSpPr>
         <p:spPr>
           <a:xfrm>
-            <a:off x="521207" y="4582972"/>
-            <a:ext cx="2006193" cy="457200"/>
-          </a:xfrm>
-          <a:prstGeom prst="rect">
-            <a:avLst/>
-          </a:prstGeom>
-          <a:noFill/>
-        </p:spPr>
-        <p:txBody>
-          <a:bodyPr wrap="square" anchor="t" lIns="0" rIns="0" tIns="0" bIns="0">
-            <a:spAutoFit/>
-          </a:bodyPr>
-          <a:lstStyle/>
-          <a:p>
-            <a:pPr algn="l">
-              <a:lnSpc>
-                <a:spcPct val="106000"/>
-              </a:lnSpc>
-            </a:pPr>
-            <a:r>
-              <a:rPr sz="1000" b="0">
-                <a:solidFill>
-                  <a:srgbClr val="1A1A1A"/>
-                </a:solidFill>
-                <a:latin typeface="SamsungOneKorean"/>
-                <a:ea typeface="SamsungOneKorean"/>
-                <a:cs typeface="SamsungOneKorean"/>
-              </a:rPr>
-              <a:t>체력 발화가 최대인 국면. 버티기가 아니라 바닥 매수의 선택권으로 쓰고, 소비자 축이 완충</a:t>
-            </a:r>
-          </a:p>
-        </p:txBody>
-      </p:sp>
-      <p:sp>
-        <p:nvSpPr>
-          <p:cNvPr id="55" name="TextBox 54"/>
-          <p:cNvSpPr txBox="1"/>
-          <p:nvPr/>
-        </p:nvSpPr>
-        <p:spPr>
-          <a:xfrm>
-            <a:off x="521207" y="5104180"/>
-            <a:ext cx="2006193" cy="146304"/>
+            <a:off x="1399032" y="4814316"/>
+            <a:ext cx="1999427" cy="164592"/>
           </a:xfrm>
           <a:prstGeom prst="rect">
             <a:avLst/>
@@ -5539,6 +7100,47 @@
               </a:lnSpc>
             </a:pPr>
             <a:r>
+              <a:rPr sz="1050" b="0">
+                <a:solidFill>
+                  <a:srgbClr val="1A1A1A"/>
+                </a:solidFill>
+                <a:latin typeface="SamsungOneKorean"/>
+                <a:ea typeface="SamsungOneKorean"/>
+                <a:cs typeface="SamsungOneKorean"/>
+              </a:rPr>
+              <a:t>체력을 바닥 매수 선택권으로</a:t>
+            </a:r>
+          </a:p>
+        </p:txBody>
+      </p:sp>
+      <p:sp>
+        <p:nvSpPr>
+          <p:cNvPr id="91" name="TextBox 90"/>
+          <p:cNvSpPr txBox="1"/>
+          <p:nvPr/>
+        </p:nvSpPr>
+        <p:spPr>
+          <a:xfrm>
+            <a:off x="1399032" y="5143500"/>
+            <a:ext cx="1999427" cy="146304"/>
+          </a:xfrm>
+          <a:prstGeom prst="rect">
+            <a:avLst/>
+          </a:prstGeom>
+          <a:noFill/>
+        </p:spPr>
+        <p:txBody>
+          <a:bodyPr wrap="square" anchor="t" lIns="0" rIns="0" tIns="0" bIns="0">
+            <a:spAutoFit/>
+          </a:bodyPr>
+          <a:lstStyle/>
+          <a:p>
+            <a:pPr algn="l">
+              <a:lnSpc>
+                <a:spcPct val="100000"/>
+              </a:lnSpc>
+            </a:pPr>
+            <a:r>
               <a:rPr sz="1000" b="1">
                 <a:solidFill>
                   <a:srgbClr val="555555"/>
@@ -5554,14 +7156,14 @@
       </p:sp>
       <p:sp>
         <p:nvSpPr>
-          <p:cNvPr id="56" name="Rounded Rectangle 55"/>
+          <p:cNvPr id="92" name="Rounded Rectangle 91"/>
           <p:cNvSpPr/>
           <p:nvPr/>
         </p:nvSpPr>
         <p:spPr>
           <a:xfrm>
-            <a:off x="521207" y="5273344"/>
-            <a:ext cx="2006193" cy="173736"/>
+            <a:off x="1399032" y="5335524"/>
+            <a:ext cx="1999427" cy="192024"/>
           </a:xfrm>
           <a:prstGeom prst="roundRect">
             <a:avLst>
@@ -5602,14 +7204,14 @@
       </p:sp>
       <p:sp>
         <p:nvSpPr>
-          <p:cNvPr id="57" name="TextBox 56"/>
+          <p:cNvPr id="93" name="TextBox 92"/>
           <p:cNvSpPr txBox="1"/>
           <p:nvPr/>
         </p:nvSpPr>
         <p:spPr>
           <a:xfrm>
-            <a:off x="585215" y="5293461"/>
-            <a:ext cx="1878177" cy="137160"/>
+            <a:off x="1399032" y="5367528"/>
+            <a:ext cx="1999427" cy="137160"/>
           </a:xfrm>
           <a:prstGeom prst="rect">
             <a:avLst/>
@@ -5643,14 +7245,14 @@
       </p:sp>
       <p:sp>
         <p:nvSpPr>
-          <p:cNvPr id="58" name="Rounded Rectangle 57"/>
+          <p:cNvPr id="94" name="Rounded Rectangle 93"/>
           <p:cNvSpPr/>
           <p:nvPr/>
         </p:nvSpPr>
         <p:spPr>
           <a:xfrm>
-            <a:off x="521207" y="5479084"/>
-            <a:ext cx="2006193" cy="173736"/>
+            <a:off x="1399032" y="5568696"/>
+            <a:ext cx="1999427" cy="192024"/>
           </a:xfrm>
           <a:prstGeom prst="roundRect">
             <a:avLst>
@@ -5691,14 +7293,14 @@
       </p:sp>
       <p:sp>
         <p:nvSpPr>
-          <p:cNvPr id="59" name="TextBox 58"/>
+          <p:cNvPr id="95" name="TextBox 94"/>
           <p:cNvSpPr txBox="1"/>
           <p:nvPr/>
         </p:nvSpPr>
         <p:spPr>
           <a:xfrm>
-            <a:off x="585215" y="5499201"/>
-            <a:ext cx="1878177" cy="137160"/>
+            <a:off x="1399032" y="5600700"/>
+            <a:ext cx="1999427" cy="137160"/>
           </a:xfrm>
           <a:prstGeom prst="rect">
             <a:avLst/>
@@ -5725,21 +7327,21 @@
                 <a:ea typeface="SamsungOneKorean"/>
                 <a:cs typeface="SamsungOneKorean"/>
               </a:rPr>
-              <a:t>조달·FCF 신호 감시</a:t>
-            </a:r>
-          </a:p>
-        </p:txBody>
-      </p:sp>
-      <p:sp>
-        <p:nvSpPr>
-          <p:cNvPr id="60" name="Rounded Rectangle 59"/>
+              <a:t>조달·FCF 신호</a:t>
+            </a:r>
+          </a:p>
+        </p:txBody>
+      </p:sp>
+      <p:sp>
+        <p:nvSpPr>
+          <p:cNvPr id="96" name="Rounded Rectangle 95"/>
           <p:cNvSpPr/>
           <p:nvPr/>
         </p:nvSpPr>
         <p:spPr>
           <a:xfrm>
-            <a:off x="521207" y="5684824"/>
-            <a:ext cx="2006193" cy="173736"/>
+            <a:off x="1399032" y="5801868"/>
+            <a:ext cx="1999427" cy="192024"/>
           </a:xfrm>
           <a:prstGeom prst="roundRect">
             <a:avLst>
@@ -5780,14 +7382,14 @@
       </p:sp>
       <p:sp>
         <p:nvSpPr>
-          <p:cNvPr id="61" name="TextBox 60"/>
+          <p:cNvPr id="97" name="TextBox 96"/>
           <p:cNvSpPr txBox="1"/>
           <p:nvPr/>
         </p:nvSpPr>
         <p:spPr>
           <a:xfrm>
-            <a:off x="585215" y="5704941"/>
-            <a:ext cx="1878177" cy="137160"/>
+            <a:off x="1399032" y="5833872"/>
+            <a:ext cx="1999427" cy="137160"/>
           </a:xfrm>
           <a:prstGeom prst="rect">
             <a:avLst/>
@@ -5821,62 +7423,14 @@
       </p:sp>
       <p:sp>
         <p:nvSpPr>
-          <p:cNvPr id="62" name="Rounded Rectangle 61"/>
+          <p:cNvPr id="98" name="Rectangle 97"/>
           <p:cNvSpPr/>
           <p:nvPr/>
         </p:nvSpPr>
         <p:spPr>
           <a:xfrm>
-            <a:off x="2715768" y="1783080"/>
-            <a:ext cx="2189073" cy="4224528"/>
-          </a:xfrm>
-          <a:prstGeom prst="roundRect">
-            <a:avLst>
-              <a:gd name="adj" fmla="val 2800"/>
-            </a:avLst>
-          </a:prstGeom>
-          <a:solidFill>
-            <a:srgbClr val="FFFFFF"/>
-          </a:solidFill>
-          <a:ln w="7620">
-            <a:solidFill>
-              <a:srgbClr val="D9D9D9"/>
-            </a:solidFill>
-          </a:ln>
-          <a:effectLst/>
-        </p:spPr>
-        <p:style>
-          <a:lnRef idx="1">
-            <a:schemeClr val="accent1"/>
-          </a:lnRef>
-          <a:fillRef idx="3">
-            <a:schemeClr val="accent1"/>
-          </a:fillRef>
-          <a:effectRef idx="2">
-            <a:schemeClr val="accent1"/>
-          </a:effectRef>
-          <a:fontRef idx="minor">
-            <a:schemeClr val="lt1"/>
-          </a:fontRef>
-        </p:style>
-        <p:txBody>
-          <a:bodyPr rtlCol="0" anchor="ctr"/>
-          <a:lstStyle/>
-          <a:p>
-            <a:pPr algn="ctr"/>
-          </a:p>
-        </p:txBody>
-      </p:sp>
-      <p:sp>
-        <p:nvSpPr>
-          <p:cNvPr id="63" name="Rectangle 62"/>
-          <p:cNvSpPr/>
-          <p:nvPr/>
-        </p:nvSpPr>
-        <p:spPr>
-          <a:xfrm>
-            <a:off x="2715768" y="1783080"/>
-            <a:ext cx="2189073" cy="41148"/>
+            <a:off x="3489899" y="3515868"/>
+            <a:ext cx="32004" cy="475488"/>
           </a:xfrm>
           <a:prstGeom prst="rect">
             <a:avLst/>
@@ -5913,14 +7467,73 @@
       </p:sp>
       <p:sp>
         <p:nvSpPr>
-          <p:cNvPr id="64" name="TextBox 63"/>
+          <p:cNvPr id="99" name="TextBox 98"/>
           <p:cNvSpPr txBox="1"/>
           <p:nvPr/>
         </p:nvSpPr>
         <p:spPr>
           <a:xfrm>
-            <a:off x="2807208" y="1874519"/>
-            <a:ext cx="2006193" cy="182880"/>
+            <a:off x="3608771" y="3525011"/>
+            <a:ext cx="1880555" cy="475488"/>
+          </a:xfrm>
+          <a:prstGeom prst="rect">
+            <a:avLst/>
+          </a:prstGeom>
+          <a:noFill/>
+        </p:spPr>
+        <p:txBody>
+          <a:bodyPr wrap="square" anchor="t" lIns="0" rIns="0" tIns="0" bIns="0">
+            <a:spAutoFit/>
+          </a:bodyPr>
+          <a:lstStyle/>
+          <a:p>
+            <a:pPr algn="l">
+              <a:lnSpc>
+                <a:spcPct val="112000"/>
+              </a:lnSpc>
+            </a:pPr>
+            <a:r>
+              <a:rPr sz="1150" b="1">
+                <a:solidFill>
+                  <a:srgbClr val="1A1A1A"/>
+                </a:solidFill>
+                <a:latin typeface="SamsungOneKorean"/>
+                <a:ea typeface="SamsungOneKorean"/>
+                <a:cs typeface="SamsungOneKorean"/>
+              </a:rPr>
+              <a:t>위기감이 없는 것이</a:t>
+            </a:r>
+          </a:p>
+          <a:p>
+            <a:pPr algn="l">
+              <a:lnSpc>
+                <a:spcPct val="112000"/>
+              </a:lnSpc>
+            </a:pPr>
+            <a:r>
+              <a:rPr sz="1150" b="1">
+                <a:solidFill>
+                  <a:srgbClr val="1A1A1A"/>
+                </a:solidFill>
+                <a:latin typeface="SamsungOneKorean"/>
+                <a:ea typeface="SamsungOneKorean"/>
+                <a:cs typeface="SamsungOneKorean"/>
+              </a:rPr>
+              <a:t>가장 큰 위기다</a:t>
+            </a:r>
+          </a:p>
+        </p:txBody>
+      </p:sp>
+      <p:sp>
+        <p:nvSpPr>
+          <p:cNvPr id="100" name="TextBox 99"/>
+          <p:cNvSpPr txBox="1"/>
+          <p:nvPr/>
+        </p:nvSpPr>
+        <p:spPr>
+          <a:xfrm>
+            <a:off x="3489899" y="4155948"/>
+            <a:ext cx="1999427" cy="155448"/>
           </a:xfrm>
           <a:prstGeom prst="rect">
             <a:avLst/>
@@ -5939,40 +7552,40 @@
               </a:lnSpc>
             </a:pPr>
             <a:r>
-              <a:rPr sz="1250" b="1">
-                <a:solidFill>
-                  <a:srgbClr val="1428A0"/>
-                </a:solidFill>
-                <a:latin typeface="SamsungOneKorean"/>
-                <a:ea typeface="SamsungOneKorean"/>
-                <a:cs typeface="SamsungOneKorean"/>
-              </a:rPr>
-              <a:t>DT-B  </a:t>
-            </a:r>
-            <a:r>
-              <a:rPr sz="1250" b="1">
-                <a:solidFill>
-                  <a:srgbClr val="1A1A1A"/>
-                </a:solidFill>
-                <a:latin typeface="SamsungOneKorean"/>
-                <a:ea typeface="SamsungOneKorean"/>
-                <a:cs typeface="SamsungOneKorean"/>
-              </a:rPr>
-              <a:t>긴 하산</a:t>
-            </a:r>
-          </a:p>
-        </p:txBody>
-      </p:sp>
-      <p:sp>
-        <p:nvSpPr>
-          <p:cNvPr id="65" name="TextBox 64"/>
+              <a:rPr sz="1000" b="1">
+                <a:solidFill>
+                  <a:srgbClr val="D93025"/>
+                </a:solidFill>
+                <a:latin typeface="SamsungOneKorean"/>
+                <a:ea typeface="SamsungOneKorean"/>
+                <a:cs typeface="SamsungOneKorean"/>
+              </a:rPr>
+              <a:t>찔리는 곳  </a:t>
+            </a:r>
+            <a:r>
+              <a:rPr sz="1050" b="1">
+                <a:solidFill>
+                  <a:srgbClr val="D93025"/>
+                </a:solidFill>
+                <a:latin typeface="SamsungOneKorean"/>
+                <a:ea typeface="SamsungOneKorean"/>
+                <a:cs typeface="SamsungOneKorean"/>
+              </a:rPr>
+              <a:t>W3</a:t>
+            </a:r>
+          </a:p>
+        </p:txBody>
+      </p:sp>
+      <p:sp>
+        <p:nvSpPr>
+          <p:cNvPr id="101" name="TextBox 100"/>
           <p:cNvSpPr txBox="1"/>
           <p:nvPr/>
         </p:nvSpPr>
         <p:spPr>
           <a:xfrm>
-            <a:off x="2807208" y="2089404"/>
-            <a:ext cx="2006193" cy="146304"/>
+            <a:off x="3489899" y="4338828"/>
+            <a:ext cx="1999427" cy="164592"/>
           </a:xfrm>
           <a:prstGeom prst="rect">
             <a:avLst/>
@@ -5991,65 +7604,29 @@
               </a:lnSpc>
             </a:pPr>
             <a:r>
-              <a:rPr sz="1000" b="0">
-                <a:solidFill>
-                  <a:srgbClr val="555555"/>
-                </a:solidFill>
-                <a:latin typeface="SamsungOneKorean"/>
-                <a:ea typeface="SamsungOneKorean"/>
-                <a:cs typeface="SamsungOneKorean"/>
-              </a:rPr>
-              <a:t>수요발 × 침식</a:t>
-            </a:r>
-          </a:p>
-        </p:txBody>
-      </p:sp>
-      <p:cxnSp>
-        <p:nvCxnSpPr>
-          <p:cNvPr id="66" name="Connector 65"/>
-          <p:cNvCxnSpPr/>
-          <p:nvPr/>
-        </p:nvCxnSpPr>
-        <p:spPr>
-          <a:xfrm>
-            <a:off x="2807208" y="2281428"/>
-            <a:ext cx="2006193" cy="0"/>
-          </a:xfrm>
-          <a:prstGeom prst="line">
-            <a:avLst/>
-          </a:prstGeom>
-          <a:ln w="6350">
-            <a:solidFill>
-              <a:srgbClr val="D9D9D9"/>
-            </a:solidFill>
-          </a:ln>
-          <a:effectLst/>
-        </p:spPr>
-        <p:style>
-          <a:lnRef idx="2">
-            <a:schemeClr val="accent1"/>
-          </a:lnRef>
-          <a:fillRef idx="0">
-            <a:schemeClr val="accent1"/>
-          </a:fillRef>
-          <a:effectRef idx="1">
-            <a:schemeClr val="accent1"/>
-          </a:effectRef>
-          <a:fontRef idx="minor">
-            <a:schemeClr val="tx1"/>
-          </a:fontRef>
-        </p:style>
-      </p:cxnSp>
-      <p:sp>
-        <p:nvSpPr>
-          <p:cNvPr id="67" name="TextBox 66"/>
+              <a:rPr sz="1050" b="0">
+                <a:solidFill>
+                  <a:srgbClr val="1A1A1A"/>
+                </a:solidFill>
+                <a:latin typeface="SamsungOneKorean"/>
+                <a:ea typeface="SamsungOneKorean"/>
+                <a:cs typeface="SamsungOneKorean"/>
+              </a:rPr>
+              <a:t>판단 기준을 원가 곡선으로</a:t>
+            </a:r>
+          </a:p>
+        </p:txBody>
+      </p:sp>
+      <p:sp>
+        <p:nvSpPr>
+          <p:cNvPr id="102" name="TextBox 101"/>
           <p:cNvSpPr txBox="1"/>
           <p:nvPr/>
         </p:nvSpPr>
         <p:spPr>
           <a:xfrm>
-            <a:off x="2807208" y="2345436"/>
-            <a:ext cx="1078992" cy="137160"/>
+            <a:off x="3489899" y="4631436"/>
+            <a:ext cx="1999427" cy="155448"/>
           </a:xfrm>
           <a:prstGeom prst="rect">
             <a:avLst/>
@@ -6057,7 +7634,7 @@
           <a:noFill/>
         </p:spPr>
         <p:txBody>
-          <a:bodyPr wrap="none" anchor="t" lIns="0" rIns="0" tIns="0" bIns="0">
+          <a:bodyPr wrap="square" anchor="t" lIns="0" rIns="0" tIns="0" bIns="0">
             <a:spAutoFit/>
           </a:bodyPr>
           <a:lstStyle/>
@@ -6068,73 +7645,40 @@
               </a:lnSpc>
             </a:pPr>
             <a:r>
-              <a:rPr sz="1000" b="0">
-                <a:solidFill>
-                  <a:srgbClr val="555555"/>
-                </a:solidFill>
-                <a:latin typeface="SamsungOneKorean"/>
-                <a:ea typeface="SamsungOneKorean"/>
-                <a:cs typeface="SamsungOneKorean"/>
-              </a:rPr>
-              <a:t>HBM</a:t>
-            </a:r>
-          </a:p>
-        </p:txBody>
-      </p:sp>
-      <p:sp>
-        <p:nvSpPr>
-          <p:cNvPr id="68" name="Rectangle 67"/>
-          <p:cNvSpPr/>
-          <p:nvPr/>
-        </p:nvSpPr>
-        <p:spPr>
-          <a:xfrm>
-            <a:off x="4105656" y="2360980"/>
-            <a:ext cx="105156" cy="105156"/>
-          </a:xfrm>
-          <a:prstGeom prst="rect">
-            <a:avLst/>
-          </a:prstGeom>
-          <a:solidFill>
-            <a:srgbClr val="E89B94"/>
-          </a:solidFill>
-          <a:ln>
-            <a:noFill/>
-          </a:ln>
-          <a:effectLst/>
-        </p:spPr>
-        <p:style>
-          <a:lnRef idx="1">
-            <a:schemeClr val="accent1"/>
-          </a:lnRef>
-          <a:fillRef idx="3">
-            <a:schemeClr val="accent1"/>
-          </a:fillRef>
-          <a:effectRef idx="2">
-            <a:schemeClr val="accent1"/>
-          </a:effectRef>
-          <a:fontRef idx="minor">
-            <a:schemeClr val="lt1"/>
-          </a:fontRef>
-        </p:style>
-        <p:txBody>
-          <a:bodyPr rtlCol="0" anchor="ctr"/>
-          <a:lstStyle/>
-          <a:p>
-            <a:pPr algn="ctr"/>
-          </a:p>
-        </p:txBody>
-      </p:sp>
-      <p:sp>
-        <p:nvSpPr>
-          <p:cNvPr id="69" name="TextBox 68"/>
+              <a:rPr sz="1000" b="1">
+                <a:solidFill>
+                  <a:srgbClr val="1428A0"/>
+                </a:solidFill>
+                <a:latin typeface="SamsungOneKorean"/>
+                <a:ea typeface="SamsungOneKorean"/>
+                <a:cs typeface="SamsungOneKorean"/>
+              </a:rPr>
+              <a:t>살리는 곳  </a:t>
+            </a:r>
+            <a:r>
+              <a:rPr sz="1050" b="1">
+                <a:solidFill>
+                  <a:srgbClr val="1428A0"/>
+                </a:solidFill>
+                <a:latin typeface="SamsungOneKorean"/>
+                <a:ea typeface="SamsungOneKorean"/>
+                <a:cs typeface="SamsungOneKorean"/>
+              </a:rPr>
+              <a:t>S2</a:t>
+            </a:r>
+          </a:p>
+        </p:txBody>
+      </p:sp>
+      <p:sp>
+        <p:nvSpPr>
+          <p:cNvPr id="103" name="TextBox 102"/>
           <p:cNvSpPr txBox="1"/>
           <p:nvPr/>
         </p:nvSpPr>
         <p:spPr>
           <a:xfrm>
-            <a:off x="4270248" y="2345436"/>
-            <a:ext cx="566928" cy="137160"/>
+            <a:off x="3489899" y="4814316"/>
+            <a:ext cx="1999427" cy="164592"/>
           </a:xfrm>
           <a:prstGeom prst="rect">
             <a:avLst/>
@@ -6142,7 +7686,7 @@
           <a:noFill/>
         </p:spPr>
         <p:txBody>
-          <a:bodyPr wrap="none" anchor="t" lIns="0" rIns="0" tIns="0" bIns="0">
+          <a:bodyPr wrap="square" anchor="t" lIns="0" rIns="0" tIns="0" bIns="0">
             <a:spAutoFit/>
           </a:bodyPr>
           <a:lstStyle/>
@@ -6153,29 +7697,29 @@
               </a:lnSpc>
             </a:pPr>
             <a:r>
-              <a:rPr sz="1000" b="1">
-                <a:solidFill>
-                  <a:srgbClr val="B44A40"/>
-                </a:solidFill>
-                <a:latin typeface="SamsungOneKorean"/>
-                <a:ea typeface="SamsungOneKorean"/>
-                <a:cs typeface="SamsungOneKorean"/>
-              </a:rPr>
-              <a:t>압박</a:t>
-            </a:r>
-          </a:p>
-        </p:txBody>
-      </p:sp>
-      <p:sp>
-        <p:nvSpPr>
-          <p:cNvPr id="70" name="TextBox 69"/>
+              <a:rPr sz="1050" b="0">
+                <a:solidFill>
+                  <a:srgbClr val="1A1A1A"/>
+                </a:solidFill>
+                <a:latin typeface="SamsungOneKorean"/>
+                <a:ea typeface="SamsungOneKorean"/>
+                <a:cs typeface="SamsungOneKorean"/>
+              </a:rPr>
+              <a:t>스토리지 축이 유일한 상방</a:t>
+            </a:r>
+          </a:p>
+        </p:txBody>
+      </p:sp>
+      <p:sp>
+        <p:nvSpPr>
+          <p:cNvPr id="104" name="TextBox 103"/>
           <p:cNvSpPr txBox="1"/>
           <p:nvPr/>
         </p:nvSpPr>
         <p:spPr>
           <a:xfrm>
-            <a:off x="2807208" y="2499055"/>
-            <a:ext cx="1078992" cy="137160"/>
+            <a:off x="3489899" y="5143500"/>
+            <a:ext cx="1999427" cy="146304"/>
           </a:xfrm>
           <a:prstGeom prst="rect">
             <a:avLst/>
@@ -6183,7 +7727,7 @@
           <a:noFill/>
         </p:spPr>
         <p:txBody>
-          <a:bodyPr wrap="none" anchor="t" lIns="0" rIns="0" tIns="0" bIns="0">
+          <a:bodyPr wrap="square" anchor="t" lIns="0" rIns="0" tIns="0" bIns="0">
             <a:spAutoFit/>
           </a:bodyPr>
           <a:lstStyle/>
@@ -6194,7 +7738,7 @@
               </a:lnSpc>
             </a:pPr>
             <a:r>
-              <a:rPr sz="1000" b="0">
+              <a:rPr sz="1000" b="1">
                 <a:solidFill>
                   <a:srgbClr val="555555"/>
                 </a:solidFill>
@@ -6202,703 +7746,21 @@
                 <a:ea typeface="SamsungOneKorean"/>
                 <a:cs typeface="SamsungOneKorean"/>
               </a:rPr>
-              <a:t>서버 DRAM</a:t>
-            </a:r>
-          </a:p>
-        </p:txBody>
-      </p:sp>
-      <p:sp>
-        <p:nvSpPr>
-          <p:cNvPr id="71" name="Rectangle 70"/>
+              <a:t>전략적 중요 분야</a:t>
+            </a:r>
+          </a:p>
+        </p:txBody>
+      </p:sp>
+      <p:sp>
+        <p:nvSpPr>
+          <p:cNvPr id="105" name="Rounded Rectangle 104"/>
           <p:cNvSpPr/>
           <p:nvPr/>
         </p:nvSpPr>
         <p:spPr>
           <a:xfrm>
-            <a:off x="4105656" y="2514600"/>
-            <a:ext cx="105156" cy="105156"/>
-          </a:xfrm>
-          <a:prstGeom prst="rect">
-            <a:avLst/>
-          </a:prstGeom>
-          <a:solidFill>
-            <a:srgbClr val="E89B94"/>
-          </a:solidFill>
-          <a:ln>
-            <a:noFill/>
-          </a:ln>
-          <a:effectLst/>
-        </p:spPr>
-        <p:style>
-          <a:lnRef idx="1">
-            <a:schemeClr val="accent1"/>
-          </a:lnRef>
-          <a:fillRef idx="3">
-            <a:schemeClr val="accent1"/>
-          </a:fillRef>
-          <a:effectRef idx="2">
-            <a:schemeClr val="accent1"/>
-          </a:effectRef>
-          <a:fontRef idx="minor">
-            <a:schemeClr val="lt1"/>
-          </a:fontRef>
-        </p:style>
-        <p:txBody>
-          <a:bodyPr rtlCol="0" anchor="ctr"/>
-          <a:lstStyle/>
-          <a:p>
-            <a:pPr algn="ctr"/>
-          </a:p>
-        </p:txBody>
-      </p:sp>
-      <p:sp>
-        <p:nvSpPr>
-          <p:cNvPr id="72" name="TextBox 71"/>
-          <p:cNvSpPr txBox="1"/>
-          <p:nvPr/>
-        </p:nvSpPr>
-        <p:spPr>
-          <a:xfrm>
-            <a:off x="4270248" y="2499055"/>
-            <a:ext cx="566928" cy="137160"/>
-          </a:xfrm>
-          <a:prstGeom prst="rect">
-            <a:avLst/>
-          </a:prstGeom>
-          <a:noFill/>
-        </p:spPr>
-        <p:txBody>
-          <a:bodyPr wrap="none" anchor="t" lIns="0" rIns="0" tIns="0" bIns="0">
-            <a:spAutoFit/>
-          </a:bodyPr>
-          <a:lstStyle/>
-          <a:p>
-            <a:pPr algn="l">
-              <a:lnSpc>
-                <a:spcPct val="100000"/>
-              </a:lnSpc>
-            </a:pPr>
-            <a:r>
-              <a:rPr sz="1000" b="1">
-                <a:solidFill>
-                  <a:srgbClr val="B44A40"/>
-                </a:solidFill>
-                <a:latin typeface="SamsungOneKorean"/>
-                <a:ea typeface="SamsungOneKorean"/>
-                <a:cs typeface="SamsungOneKorean"/>
-              </a:rPr>
-              <a:t>압박</a:t>
-            </a:r>
-          </a:p>
-        </p:txBody>
-      </p:sp>
-      <p:sp>
-        <p:nvSpPr>
-          <p:cNvPr id="73" name="TextBox 72"/>
-          <p:cNvSpPr txBox="1"/>
-          <p:nvPr/>
-        </p:nvSpPr>
-        <p:spPr>
-          <a:xfrm>
-            <a:off x="2807208" y="2652674"/>
-            <a:ext cx="1078992" cy="137160"/>
-          </a:xfrm>
-          <a:prstGeom prst="rect">
-            <a:avLst/>
-          </a:prstGeom>
-          <a:noFill/>
-        </p:spPr>
-        <p:txBody>
-          <a:bodyPr wrap="none" anchor="t" lIns="0" rIns="0" tIns="0" bIns="0">
-            <a:spAutoFit/>
-          </a:bodyPr>
-          <a:lstStyle/>
-          <a:p>
-            <a:pPr algn="l">
-              <a:lnSpc>
-                <a:spcPct val="100000"/>
-              </a:lnSpc>
-            </a:pPr>
-            <a:r>
-              <a:rPr sz="1000" b="0">
-                <a:solidFill>
-                  <a:srgbClr val="555555"/>
-                </a:solidFill>
-                <a:latin typeface="SamsungOneKorean"/>
-                <a:ea typeface="SamsungOneKorean"/>
-                <a:cs typeface="SamsungOneKorean"/>
-              </a:rPr>
-              <a:t>범용·레거시</a:t>
-            </a:r>
-          </a:p>
-        </p:txBody>
-      </p:sp>
-      <p:sp>
-        <p:nvSpPr>
-          <p:cNvPr id="74" name="Rectangle 73"/>
-          <p:cNvSpPr/>
-          <p:nvPr/>
-        </p:nvSpPr>
-        <p:spPr>
-          <a:xfrm>
-            <a:off x="4105656" y="2668219"/>
-            <a:ext cx="105156" cy="105156"/>
-          </a:xfrm>
-          <a:prstGeom prst="rect">
-            <a:avLst/>
-          </a:prstGeom>
-          <a:solidFill>
-            <a:srgbClr val="E89B94"/>
-          </a:solidFill>
-          <a:ln>
-            <a:noFill/>
-          </a:ln>
-          <a:effectLst/>
-        </p:spPr>
-        <p:style>
-          <a:lnRef idx="1">
-            <a:schemeClr val="accent1"/>
-          </a:lnRef>
-          <a:fillRef idx="3">
-            <a:schemeClr val="accent1"/>
-          </a:fillRef>
-          <a:effectRef idx="2">
-            <a:schemeClr val="accent1"/>
-          </a:effectRef>
-          <a:fontRef idx="minor">
-            <a:schemeClr val="lt1"/>
-          </a:fontRef>
-        </p:style>
-        <p:txBody>
-          <a:bodyPr rtlCol="0" anchor="ctr"/>
-          <a:lstStyle/>
-          <a:p>
-            <a:pPr algn="ctr"/>
-          </a:p>
-        </p:txBody>
-      </p:sp>
-      <p:sp>
-        <p:nvSpPr>
-          <p:cNvPr id="75" name="TextBox 74"/>
-          <p:cNvSpPr txBox="1"/>
-          <p:nvPr/>
-        </p:nvSpPr>
-        <p:spPr>
-          <a:xfrm>
-            <a:off x="4270248" y="2652674"/>
-            <a:ext cx="566928" cy="137160"/>
-          </a:xfrm>
-          <a:prstGeom prst="rect">
-            <a:avLst/>
-          </a:prstGeom>
-          <a:noFill/>
-        </p:spPr>
-        <p:txBody>
-          <a:bodyPr wrap="none" anchor="t" lIns="0" rIns="0" tIns="0" bIns="0">
-            <a:spAutoFit/>
-          </a:bodyPr>
-          <a:lstStyle/>
-          <a:p>
-            <a:pPr algn="l">
-              <a:lnSpc>
-                <a:spcPct val="100000"/>
-              </a:lnSpc>
-            </a:pPr>
-            <a:r>
-              <a:rPr sz="1000" b="1">
-                <a:solidFill>
-                  <a:srgbClr val="B44A40"/>
-                </a:solidFill>
-                <a:latin typeface="SamsungOneKorean"/>
-                <a:ea typeface="SamsungOneKorean"/>
-                <a:cs typeface="SamsungOneKorean"/>
-              </a:rPr>
-              <a:t>압박</a:t>
-            </a:r>
-          </a:p>
-        </p:txBody>
-      </p:sp>
-      <p:sp>
-        <p:nvSpPr>
-          <p:cNvPr id="76" name="TextBox 75"/>
-          <p:cNvSpPr txBox="1"/>
-          <p:nvPr/>
-        </p:nvSpPr>
-        <p:spPr>
-          <a:xfrm>
-            <a:off x="2807208" y="2806293"/>
-            <a:ext cx="1078992" cy="137160"/>
-          </a:xfrm>
-          <a:prstGeom prst="rect">
-            <a:avLst/>
-          </a:prstGeom>
-          <a:noFill/>
-        </p:spPr>
-        <p:txBody>
-          <a:bodyPr wrap="none" anchor="t" lIns="0" rIns="0" tIns="0" bIns="0">
-            <a:spAutoFit/>
-          </a:bodyPr>
-          <a:lstStyle/>
-          <a:p>
-            <a:pPr algn="l">
-              <a:lnSpc>
-                <a:spcPct val="100000"/>
-              </a:lnSpc>
-            </a:pPr>
-            <a:r>
-              <a:rPr sz="1000" b="0">
-                <a:solidFill>
-                  <a:srgbClr val="555555"/>
-                </a:solidFill>
-                <a:latin typeface="SamsungOneKorean"/>
-                <a:ea typeface="SamsungOneKorean"/>
-                <a:cs typeface="SamsungOneKorean"/>
-              </a:rPr>
-              <a:t>NAND·SSD</a:t>
-            </a:r>
-          </a:p>
-        </p:txBody>
-      </p:sp>
-      <p:sp>
-        <p:nvSpPr>
-          <p:cNvPr id="77" name="Rectangle 76"/>
-          <p:cNvSpPr/>
-          <p:nvPr/>
-        </p:nvSpPr>
-        <p:spPr>
-          <a:xfrm>
-            <a:off x="4105656" y="2821838"/>
-            <a:ext cx="105156" cy="105156"/>
-          </a:xfrm>
-          <a:prstGeom prst="rect">
-            <a:avLst/>
-          </a:prstGeom>
-          <a:solidFill>
-            <a:srgbClr val="00A651"/>
-          </a:solidFill>
-          <a:ln>
-            <a:noFill/>
-          </a:ln>
-          <a:effectLst/>
-        </p:spPr>
-        <p:style>
-          <a:lnRef idx="1">
-            <a:schemeClr val="accent1"/>
-          </a:lnRef>
-          <a:fillRef idx="3">
-            <a:schemeClr val="accent1"/>
-          </a:fillRef>
-          <a:effectRef idx="2">
-            <a:schemeClr val="accent1"/>
-          </a:effectRef>
-          <a:fontRef idx="minor">
-            <a:schemeClr val="lt1"/>
-          </a:fontRef>
-        </p:style>
-        <p:txBody>
-          <a:bodyPr rtlCol="0" anchor="ctr"/>
-          <a:lstStyle/>
-          <a:p>
-            <a:pPr algn="ctr"/>
-          </a:p>
-        </p:txBody>
-      </p:sp>
-      <p:sp>
-        <p:nvSpPr>
-          <p:cNvPr id="78" name="TextBox 77"/>
-          <p:cNvSpPr txBox="1"/>
-          <p:nvPr/>
-        </p:nvSpPr>
-        <p:spPr>
-          <a:xfrm>
-            <a:off x="4270248" y="2806293"/>
-            <a:ext cx="566928" cy="137160"/>
-          </a:xfrm>
-          <a:prstGeom prst="rect">
-            <a:avLst/>
-          </a:prstGeom>
-          <a:noFill/>
-        </p:spPr>
-        <p:txBody>
-          <a:bodyPr wrap="none" anchor="t" lIns="0" rIns="0" tIns="0" bIns="0">
-            <a:spAutoFit/>
-          </a:bodyPr>
-          <a:lstStyle/>
-          <a:p>
-            <a:pPr algn="l">
-              <a:lnSpc>
-                <a:spcPct val="100000"/>
-              </a:lnSpc>
-            </a:pPr>
-            <a:r>
-              <a:rPr sz="1000" b="1">
-                <a:solidFill>
-                  <a:srgbClr val="00A651"/>
-                </a:solidFill>
-                <a:latin typeface="SamsungOneKorean"/>
-                <a:ea typeface="SamsungOneKorean"/>
-                <a:cs typeface="SamsungOneKorean"/>
-              </a:rPr>
-              <a:t>수혜</a:t>
-            </a:r>
-          </a:p>
-        </p:txBody>
-      </p:sp>
-      <p:cxnSp>
-        <p:nvCxnSpPr>
-          <p:cNvPr id="79" name="Connector 78"/>
-          <p:cNvCxnSpPr/>
-          <p:nvPr/>
-        </p:nvCxnSpPr>
-        <p:spPr>
-          <a:xfrm>
-            <a:off x="2807208" y="3010204"/>
-            <a:ext cx="2006193" cy="0"/>
-          </a:xfrm>
-          <a:prstGeom prst="line">
-            <a:avLst/>
-          </a:prstGeom>
-          <a:ln w="6350">
-            <a:solidFill>
-              <a:srgbClr val="D9D9D9"/>
-            </a:solidFill>
-          </a:ln>
-          <a:effectLst/>
-        </p:spPr>
-        <p:style>
-          <a:lnRef idx="2">
-            <a:schemeClr val="accent1"/>
-          </a:lnRef>
-          <a:fillRef idx="0">
-            <a:schemeClr val="accent1"/>
-          </a:fillRef>
-          <a:effectRef idx="1">
-            <a:schemeClr val="accent1"/>
-          </a:effectRef>
-          <a:fontRef idx="minor">
-            <a:schemeClr val="tx1"/>
-          </a:fontRef>
-        </p:style>
-      </p:cxnSp>
-      <p:sp>
-        <p:nvSpPr>
-          <p:cNvPr id="80" name="TextBox 79"/>
-          <p:cNvSpPr txBox="1"/>
-          <p:nvPr/>
-        </p:nvSpPr>
-        <p:spPr>
-          <a:xfrm>
-            <a:off x="2807208" y="3065068"/>
-            <a:ext cx="2006193" cy="146304"/>
-          </a:xfrm>
-          <a:prstGeom prst="rect">
-            <a:avLst/>
-          </a:prstGeom>
-          <a:noFill/>
-        </p:spPr>
-        <p:txBody>
-          <a:bodyPr wrap="square" anchor="t" lIns="0" rIns="0" tIns="0" bIns="0">
-            <a:spAutoFit/>
-          </a:bodyPr>
-          <a:lstStyle/>
-          <a:p>
-            <a:pPr algn="l">
-              <a:lnSpc>
-                <a:spcPct val="100000"/>
-              </a:lnSpc>
-            </a:pPr>
-            <a:r>
-              <a:rPr sz="1000" b="1">
-                <a:solidFill>
-                  <a:srgbClr val="1428A0"/>
-                </a:solidFill>
-                <a:latin typeface="SamsungOneKorean"/>
-                <a:ea typeface="SamsungOneKorean"/>
-                <a:cs typeface="SamsungOneKorean"/>
-              </a:rPr>
-              <a:t>무엇이 갈리나</a:t>
-            </a:r>
-          </a:p>
-        </p:txBody>
-      </p:sp>
-      <p:sp>
-        <p:nvSpPr>
-          <p:cNvPr id="81" name="TextBox 80"/>
-          <p:cNvSpPr txBox="1"/>
-          <p:nvPr/>
-        </p:nvSpPr>
-        <p:spPr>
-          <a:xfrm>
-            <a:off x="2807208" y="3225088"/>
-            <a:ext cx="2006193" cy="457200"/>
-          </a:xfrm>
-          <a:prstGeom prst="rect">
-            <a:avLst/>
-          </a:prstGeom>
-          <a:noFill/>
-        </p:spPr>
-        <p:txBody>
-          <a:bodyPr wrap="square" anchor="t" lIns="0" rIns="0" tIns="0" bIns="0">
-            <a:spAutoFit/>
-          </a:bodyPr>
-          <a:lstStyle/>
-          <a:p>
-            <a:pPr algn="l">
-              <a:lnSpc>
-                <a:spcPct val="106000"/>
-              </a:lnSpc>
-            </a:pPr>
-            <a:r>
-              <a:rPr sz="1000" b="0">
-                <a:solidFill>
-                  <a:srgbClr val="1A1A1A"/>
-                </a:solidFill>
-                <a:latin typeface="SamsungOneKorean"/>
-                <a:ea typeface="SamsungOneKorean"/>
-                <a:cs typeface="SamsungOneKorean"/>
-              </a:rPr>
-              <a:t>위기감이 생기지 않아 결정이 밀린다. 행동보다 판단 기준 자체가 승부처다</a:t>
-            </a:r>
-          </a:p>
-        </p:txBody>
-      </p:sp>
-      <p:sp>
-        <p:nvSpPr>
-          <p:cNvPr id="82" name="TextBox 81"/>
-          <p:cNvSpPr txBox="1"/>
-          <p:nvPr/>
-        </p:nvSpPr>
-        <p:spPr>
-          <a:xfrm>
-            <a:off x="2807208" y="3741724"/>
-            <a:ext cx="2006193" cy="146304"/>
-          </a:xfrm>
-          <a:prstGeom prst="rect">
-            <a:avLst/>
-          </a:prstGeom>
-          <a:noFill/>
-        </p:spPr>
-        <p:txBody>
-          <a:bodyPr wrap="square" anchor="t" lIns="0" rIns="0" tIns="0" bIns="0">
-            <a:spAutoFit/>
-          </a:bodyPr>
-          <a:lstStyle/>
-          <a:p>
-            <a:pPr algn="l">
-              <a:lnSpc>
-                <a:spcPct val="100000"/>
-              </a:lnSpc>
-            </a:pPr>
-            <a:r>
-              <a:rPr sz="1000" b="1">
-                <a:solidFill>
-                  <a:srgbClr val="D93025"/>
-                </a:solidFill>
-                <a:latin typeface="SamsungOneKorean"/>
-                <a:ea typeface="SamsungOneKorean"/>
-                <a:cs typeface="SamsungOneKorean"/>
-              </a:rPr>
-              <a:t>찔리는 곳 </a:t>
-            </a:r>
-            <a:r>
-              <a:rPr sz="1000" b="1">
-                <a:solidFill>
-                  <a:srgbClr val="D93025"/>
-                </a:solidFill>
-                <a:latin typeface="SamsungOneKorean"/>
-                <a:ea typeface="SamsungOneKorean"/>
-                <a:cs typeface="SamsungOneKorean"/>
-              </a:rPr>
-              <a:t>W3</a:t>
-            </a:r>
-          </a:p>
-        </p:txBody>
-      </p:sp>
-      <p:sp>
-        <p:nvSpPr>
-          <p:cNvPr id="83" name="TextBox 82"/>
-          <p:cNvSpPr txBox="1"/>
-          <p:nvPr/>
-        </p:nvSpPr>
-        <p:spPr>
-          <a:xfrm>
-            <a:off x="2807208" y="3901744"/>
-            <a:ext cx="2006193" cy="457200"/>
-          </a:xfrm>
-          <a:prstGeom prst="rect">
-            <a:avLst/>
-          </a:prstGeom>
-          <a:noFill/>
-        </p:spPr>
-        <p:txBody>
-          <a:bodyPr wrap="square" anchor="t" lIns="0" rIns="0" tIns="0" bIns="0">
-            <a:spAutoFit/>
-          </a:bodyPr>
-          <a:lstStyle/>
-          <a:p>
-            <a:pPr algn="l">
-              <a:lnSpc>
-                <a:spcPct val="106000"/>
-              </a:lnSpc>
-            </a:pPr>
-            <a:r>
-              <a:rPr sz="1000" b="0">
-                <a:solidFill>
-                  <a:srgbClr val="1A1A1A"/>
-                </a:solidFill>
-                <a:latin typeface="SamsungOneKorean"/>
-                <a:ea typeface="SamsungOneKorean"/>
-                <a:cs typeface="SamsungOneKorean"/>
-              </a:rPr>
-              <a:t>"일시적" 해석 관성이 가장 깊게 찔린다. 판단 기준을 가격에서 원가 곡선 위치로 교체할 것</a:t>
-            </a:r>
-          </a:p>
-        </p:txBody>
-      </p:sp>
-      <p:sp>
-        <p:nvSpPr>
-          <p:cNvPr id="84" name="TextBox 83"/>
-          <p:cNvSpPr txBox="1"/>
-          <p:nvPr/>
-        </p:nvSpPr>
-        <p:spPr>
-          <a:xfrm>
-            <a:off x="2807208" y="4422952"/>
-            <a:ext cx="2006193" cy="146304"/>
-          </a:xfrm>
-          <a:prstGeom prst="rect">
-            <a:avLst/>
-          </a:prstGeom>
-          <a:noFill/>
-        </p:spPr>
-        <p:txBody>
-          <a:bodyPr wrap="square" anchor="t" lIns="0" rIns="0" tIns="0" bIns="0">
-            <a:spAutoFit/>
-          </a:bodyPr>
-          <a:lstStyle/>
-          <a:p>
-            <a:pPr algn="l">
-              <a:lnSpc>
-                <a:spcPct val="100000"/>
-              </a:lnSpc>
-            </a:pPr>
-            <a:r>
-              <a:rPr sz="1000" b="1">
-                <a:solidFill>
-                  <a:srgbClr val="1428A0"/>
-                </a:solidFill>
-                <a:latin typeface="SamsungOneKorean"/>
-                <a:ea typeface="SamsungOneKorean"/>
-                <a:cs typeface="SamsungOneKorean"/>
-              </a:rPr>
-              <a:t>살리는 곳 </a:t>
-            </a:r>
-            <a:r>
-              <a:rPr sz="1000" b="1">
-                <a:solidFill>
-                  <a:srgbClr val="1428A0"/>
-                </a:solidFill>
-                <a:latin typeface="SamsungOneKorean"/>
-                <a:ea typeface="SamsungOneKorean"/>
-                <a:cs typeface="SamsungOneKorean"/>
-              </a:rPr>
-              <a:t>S2</a:t>
-            </a:r>
-          </a:p>
-        </p:txBody>
-      </p:sp>
-      <p:sp>
-        <p:nvSpPr>
-          <p:cNvPr id="85" name="TextBox 84"/>
-          <p:cNvSpPr txBox="1"/>
-          <p:nvPr/>
-        </p:nvSpPr>
-        <p:spPr>
-          <a:xfrm>
-            <a:off x="2807208" y="4582972"/>
-            <a:ext cx="2006193" cy="457200"/>
-          </a:xfrm>
-          <a:prstGeom prst="rect">
-            <a:avLst/>
-          </a:prstGeom>
-          <a:noFill/>
-        </p:spPr>
-        <p:txBody>
-          <a:bodyPr wrap="square" anchor="t" lIns="0" rIns="0" tIns="0" bIns="0">
-            <a:spAutoFit/>
-          </a:bodyPr>
-          <a:lstStyle/>
-          <a:p>
-            <a:pPr algn="l">
-              <a:lnSpc>
-                <a:spcPct val="106000"/>
-              </a:lnSpc>
-            </a:pPr>
-            <a:r>
-              <a:rPr sz="1000" b="0">
-                <a:solidFill>
-                  <a:srgbClr val="1A1A1A"/>
-                </a:solidFill>
-                <a:latin typeface="SamsungOneKorean"/>
-                <a:ea typeface="SamsungOneKorean"/>
-                <a:cs typeface="SamsungOneKorean"/>
-              </a:rPr>
-              <a:t>스토리지가 유일한 상방 축(eSSD 1위 38.2%). 믹스를 하강 축에서 성장 축으로 계속 이동</a:t>
-            </a:r>
-          </a:p>
-        </p:txBody>
-      </p:sp>
-      <p:sp>
-        <p:nvSpPr>
-          <p:cNvPr id="86" name="TextBox 85"/>
-          <p:cNvSpPr txBox="1"/>
-          <p:nvPr/>
-        </p:nvSpPr>
-        <p:spPr>
-          <a:xfrm>
-            <a:off x="2807208" y="5104180"/>
-            <a:ext cx="2006193" cy="146304"/>
-          </a:xfrm>
-          <a:prstGeom prst="rect">
-            <a:avLst/>
-          </a:prstGeom>
-          <a:noFill/>
-        </p:spPr>
-        <p:txBody>
-          <a:bodyPr wrap="square" anchor="t" lIns="0" rIns="0" tIns="0" bIns="0">
-            <a:spAutoFit/>
-          </a:bodyPr>
-          <a:lstStyle/>
-          <a:p>
-            <a:pPr algn="l">
-              <a:lnSpc>
-                <a:spcPct val="100000"/>
-              </a:lnSpc>
-            </a:pPr>
-            <a:r>
-              <a:rPr sz="1000" b="1">
-                <a:solidFill>
-                  <a:srgbClr val="555555"/>
-                </a:solidFill>
-                <a:latin typeface="SamsungOneKorean"/>
-                <a:ea typeface="SamsungOneKorean"/>
-                <a:cs typeface="SamsungOneKorean"/>
-              </a:rPr>
-              <a:t>전략적 중요 분야</a:t>
-            </a:r>
-          </a:p>
-        </p:txBody>
-      </p:sp>
-      <p:sp>
-        <p:nvSpPr>
-          <p:cNvPr id="87" name="Rounded Rectangle 86"/>
-          <p:cNvSpPr/>
-          <p:nvPr/>
-        </p:nvSpPr>
-        <p:spPr>
-          <a:xfrm>
-            <a:off x="2807208" y="5273344"/>
-            <a:ext cx="2006193" cy="173736"/>
+            <a:off x="3489899" y="5335524"/>
+            <a:ext cx="1999427" cy="192024"/>
           </a:xfrm>
           <a:prstGeom prst="roundRect">
             <a:avLst>
@@ -6939,14 +7801,14 @@
       </p:sp>
       <p:sp>
         <p:nvSpPr>
-          <p:cNvPr id="88" name="TextBox 87"/>
+          <p:cNvPr id="106" name="TextBox 105"/>
           <p:cNvSpPr txBox="1"/>
           <p:nvPr/>
         </p:nvSpPr>
         <p:spPr>
           <a:xfrm>
-            <a:off x="2871215" y="5293461"/>
-            <a:ext cx="1878177" cy="137160"/>
+            <a:off x="3489899" y="5367528"/>
+            <a:ext cx="1999427" cy="137160"/>
           </a:xfrm>
           <a:prstGeom prst="rect">
             <a:avLst/>
@@ -6973,21 +7835,21 @@
                 <a:ea typeface="SamsungOneKorean"/>
                 <a:cs typeface="SamsungOneKorean"/>
               </a:rPr>
-              <a:t>메모리 원단위 추적</a:t>
-            </a:r>
-          </a:p>
-        </p:txBody>
-      </p:sp>
-      <p:sp>
-        <p:nvSpPr>
-          <p:cNvPr id="89" name="Rounded Rectangle 88"/>
+              <a:t>메모리 원단위</a:t>
+            </a:r>
+          </a:p>
+        </p:txBody>
+      </p:sp>
+      <p:sp>
+        <p:nvSpPr>
+          <p:cNvPr id="107" name="Rounded Rectangle 106"/>
           <p:cNvSpPr/>
           <p:nvPr/>
         </p:nvSpPr>
         <p:spPr>
           <a:xfrm>
-            <a:off x="2807208" y="5479084"/>
-            <a:ext cx="2006193" cy="173736"/>
+            <a:off x="3489899" y="5568696"/>
+            <a:ext cx="1999427" cy="192024"/>
           </a:xfrm>
           <a:prstGeom prst="roundRect">
             <a:avLst>
@@ -7028,14 +7890,14 @@
       </p:sp>
       <p:sp>
         <p:nvSpPr>
-          <p:cNvPr id="90" name="TextBox 89"/>
+          <p:cNvPr id="108" name="TextBox 107"/>
           <p:cNvSpPr txBox="1"/>
           <p:nvPr/>
         </p:nvSpPr>
         <p:spPr>
           <a:xfrm>
-            <a:off x="2871215" y="5499201"/>
-            <a:ext cx="1878177" cy="137160"/>
+            <a:off x="3489899" y="5600700"/>
+            <a:ext cx="1999427" cy="137160"/>
           </a:xfrm>
           <a:prstGeom prst="rect">
             <a:avLst/>
@@ -7069,14 +7931,14 @@
       </p:sp>
       <p:sp>
         <p:nvSpPr>
-          <p:cNvPr id="91" name="Rounded Rectangle 90"/>
+          <p:cNvPr id="109" name="Rounded Rectangle 108"/>
           <p:cNvSpPr/>
           <p:nvPr/>
         </p:nvSpPr>
         <p:spPr>
           <a:xfrm>
-            <a:off x="2807208" y="5684824"/>
-            <a:ext cx="2006193" cy="173736"/>
+            <a:off x="3489899" y="5801868"/>
+            <a:ext cx="1999427" cy="192024"/>
           </a:xfrm>
           <a:prstGeom prst="roundRect">
             <a:avLst>
@@ -7117,14 +7979,14 @@
       </p:sp>
       <p:sp>
         <p:nvSpPr>
-          <p:cNvPr id="92" name="TextBox 91"/>
+          <p:cNvPr id="110" name="TextBox 109"/>
           <p:cNvSpPr txBox="1"/>
           <p:nvPr/>
         </p:nvSpPr>
         <p:spPr>
           <a:xfrm>
-            <a:off x="2871215" y="5704941"/>
-            <a:ext cx="1878177" cy="137160"/>
+            <a:off x="3489899" y="5833872"/>
+            <a:ext cx="1999427" cy="137160"/>
           </a:xfrm>
           <a:prstGeom prst="rect">
             <a:avLst/>
@@ -7158,62 +8020,14 @@
       </p:sp>
       <p:sp>
         <p:nvSpPr>
-          <p:cNvPr id="93" name="Rounded Rectangle 92"/>
+          <p:cNvPr id="111" name="Rectangle 110"/>
           <p:cNvSpPr/>
           <p:nvPr/>
         </p:nvSpPr>
         <p:spPr>
           <a:xfrm>
-            <a:off x="5001768" y="1783080"/>
-            <a:ext cx="2189073" cy="4224528"/>
-          </a:xfrm>
-          <a:prstGeom prst="roundRect">
-            <a:avLst>
-              <a:gd name="adj" fmla="val 2800"/>
-            </a:avLst>
-          </a:prstGeom>
-          <a:solidFill>
-            <a:srgbClr val="FFFFFF"/>
-          </a:solidFill>
-          <a:ln w="7620">
-            <a:solidFill>
-              <a:srgbClr val="D9D9D9"/>
-            </a:solidFill>
-          </a:ln>
-          <a:effectLst/>
-        </p:spPr>
-        <p:style>
-          <a:lnRef idx="1">
-            <a:schemeClr val="accent1"/>
-          </a:lnRef>
-          <a:fillRef idx="3">
-            <a:schemeClr val="accent1"/>
-          </a:fillRef>
-          <a:effectRef idx="2">
-            <a:schemeClr val="accent1"/>
-          </a:effectRef>
-          <a:fontRef idx="minor">
-            <a:schemeClr val="lt1"/>
-          </a:fontRef>
-        </p:style>
-        <p:txBody>
-          <a:bodyPr rtlCol="0" anchor="ctr"/>
-          <a:lstStyle/>
-          <a:p>
-            <a:pPr algn="ctr"/>
-          </a:p>
-        </p:txBody>
-      </p:sp>
-      <p:sp>
-        <p:nvSpPr>
-          <p:cNvPr id="94" name="Rectangle 93"/>
-          <p:cNvSpPr/>
-          <p:nvPr/>
-        </p:nvSpPr>
-        <p:spPr>
-          <a:xfrm>
-            <a:off x="5001768" y="1783080"/>
-            <a:ext cx="2189073" cy="41148"/>
+            <a:off x="5580766" y="3515868"/>
+            <a:ext cx="32004" cy="475488"/>
           </a:xfrm>
           <a:prstGeom prst="rect">
             <a:avLst/>
@@ -7250,14 +8064,73 @@
       </p:sp>
       <p:sp>
         <p:nvSpPr>
-          <p:cNvPr id="95" name="TextBox 94"/>
+          <p:cNvPr id="112" name="TextBox 111"/>
           <p:cNvSpPr txBox="1"/>
           <p:nvPr/>
         </p:nvSpPr>
         <p:spPr>
           <a:xfrm>
-            <a:off x="5093207" y="1874519"/>
-            <a:ext cx="2006193" cy="182880"/>
+            <a:off x="5699638" y="3525011"/>
+            <a:ext cx="1880555" cy="475488"/>
+          </a:xfrm>
+          <a:prstGeom prst="rect">
+            <a:avLst/>
+          </a:prstGeom>
+          <a:noFill/>
+        </p:spPr>
+        <p:txBody>
+          <a:bodyPr wrap="square" anchor="t" lIns="0" rIns="0" tIns="0" bIns="0">
+            <a:spAutoFit/>
+          </a:bodyPr>
+          <a:lstStyle/>
+          <a:p>
+            <a:pPr algn="l">
+              <a:lnSpc>
+                <a:spcPct val="112000"/>
+              </a:lnSpc>
+            </a:pPr>
+            <a:r>
+              <a:rPr sz="1150" b="1">
+                <a:solidFill>
+                  <a:srgbClr val="1A1A1A"/>
+                </a:solidFill>
+                <a:latin typeface="SamsungOneKorean"/>
+                <a:ea typeface="SamsungOneKorean"/>
+                <a:cs typeface="SamsungOneKorean"/>
+              </a:rPr>
+              <a:t>감산이 통하는 유일한 판.</a:t>
+            </a:r>
+          </a:p>
+          <a:p>
+            <a:pPr algn="l">
+              <a:lnSpc>
+                <a:spcPct val="112000"/>
+              </a:lnSpc>
+            </a:pPr>
+            <a:r>
+              <a:rPr sz="1150" b="1">
+                <a:solidFill>
+                  <a:srgbClr val="1A1A1A"/>
+                </a:solidFill>
+                <a:latin typeface="SamsungOneKorean"/>
+                <a:ea typeface="SamsungOneKorean"/>
+                <a:cs typeface="SamsungOneKorean"/>
+              </a:rPr>
+              <a:t>승부는 속도다</a:t>
+            </a:r>
+          </a:p>
+        </p:txBody>
+      </p:sp>
+      <p:sp>
+        <p:nvSpPr>
+          <p:cNvPr id="113" name="TextBox 112"/>
+          <p:cNvSpPr txBox="1"/>
+          <p:nvPr/>
+        </p:nvSpPr>
+        <p:spPr>
+          <a:xfrm>
+            <a:off x="5580766" y="4155948"/>
+            <a:ext cx="1999427" cy="155448"/>
           </a:xfrm>
           <a:prstGeom prst="rect">
             <a:avLst/>
@@ -7276,40 +8149,40 @@
               </a:lnSpc>
             </a:pPr>
             <a:r>
-              <a:rPr sz="1250" b="1">
-                <a:solidFill>
-                  <a:srgbClr val="1428A0"/>
-                </a:solidFill>
-                <a:latin typeface="SamsungOneKorean"/>
-                <a:ea typeface="SamsungOneKorean"/>
-                <a:cs typeface="SamsungOneKorean"/>
-              </a:rPr>
-              <a:t>DT-C  </a:t>
-            </a:r>
-            <a:r>
-              <a:rPr sz="1250" b="1">
-                <a:solidFill>
-                  <a:srgbClr val="1A1A1A"/>
-                </a:solidFill>
-                <a:latin typeface="SamsungOneKorean"/>
-                <a:ea typeface="SamsungOneKorean"/>
-                <a:cs typeface="SamsungOneKorean"/>
-              </a:rPr>
-              <a:t>동시 방류</a:t>
-            </a:r>
-          </a:p>
-        </p:txBody>
-      </p:sp>
-      <p:sp>
-        <p:nvSpPr>
-          <p:cNvPr id="96" name="TextBox 95"/>
+              <a:rPr sz="1000" b="1">
+                <a:solidFill>
+                  <a:srgbClr val="D93025"/>
+                </a:solidFill>
+                <a:latin typeface="SamsungOneKorean"/>
+                <a:ea typeface="SamsungOneKorean"/>
+                <a:cs typeface="SamsungOneKorean"/>
+              </a:rPr>
+              <a:t>찔리는 곳  </a:t>
+            </a:r>
+            <a:r>
+              <a:rPr sz="1050" b="1">
+                <a:solidFill>
+                  <a:srgbClr val="D93025"/>
+                </a:solidFill>
+                <a:latin typeface="SamsungOneKorean"/>
+                <a:ea typeface="SamsungOneKorean"/>
+                <a:cs typeface="SamsungOneKorean"/>
+              </a:rPr>
+              <a:t>W3·W4</a:t>
+            </a:r>
+          </a:p>
+        </p:txBody>
+      </p:sp>
+      <p:sp>
+        <p:nvSpPr>
+          <p:cNvPr id="114" name="TextBox 113"/>
           <p:cNvSpPr txBox="1"/>
           <p:nvPr/>
         </p:nvSpPr>
         <p:spPr>
           <a:xfrm>
-            <a:off x="5093207" y="2089404"/>
-            <a:ext cx="2006193" cy="146304"/>
+            <a:off x="5580766" y="4338828"/>
+            <a:ext cx="1999427" cy="164592"/>
           </a:xfrm>
           <a:prstGeom prst="rect">
             <a:avLst/>
@@ -7328,65 +8201,29 @@
               </a:lnSpc>
             </a:pPr>
             <a:r>
-              <a:rPr sz="1000" b="0">
-                <a:solidFill>
-                  <a:srgbClr val="555555"/>
-                </a:solidFill>
-                <a:latin typeface="SamsungOneKorean"/>
-                <a:ea typeface="SamsungOneKorean"/>
-                <a:cs typeface="SamsungOneKorean"/>
-              </a:rPr>
-              <a:t>공급발 × 급락</a:t>
-            </a:r>
-          </a:p>
-        </p:txBody>
-      </p:sp>
-      <p:cxnSp>
-        <p:nvCxnSpPr>
-          <p:cNvPr id="97" name="Connector 96"/>
-          <p:cNvCxnSpPr/>
-          <p:nvPr/>
-        </p:nvCxnSpPr>
-        <p:spPr>
-          <a:xfrm>
-            <a:off x="5093207" y="2281428"/>
-            <a:ext cx="2006194" cy="0"/>
-          </a:xfrm>
-          <a:prstGeom prst="line">
-            <a:avLst/>
-          </a:prstGeom>
-          <a:ln w="6350">
-            <a:solidFill>
-              <a:srgbClr val="D9D9D9"/>
-            </a:solidFill>
-          </a:ln>
-          <a:effectLst/>
-        </p:spPr>
-        <p:style>
-          <a:lnRef idx="2">
-            <a:schemeClr val="accent1"/>
-          </a:lnRef>
-          <a:fillRef idx="0">
-            <a:schemeClr val="accent1"/>
-          </a:fillRef>
-          <a:effectRef idx="1">
-            <a:schemeClr val="accent1"/>
-          </a:effectRef>
-          <a:fontRef idx="minor">
-            <a:schemeClr val="tx1"/>
-          </a:fontRef>
-        </p:style>
-      </p:cxnSp>
-      <p:sp>
-        <p:nvSpPr>
-          <p:cNvPr id="98" name="TextBox 97"/>
+              <a:rPr sz="1050" b="0">
+                <a:solidFill>
+                  <a:srgbClr val="1A1A1A"/>
+                </a:solidFill>
+                <a:latin typeface="SamsungOneKorean"/>
+                <a:ea typeface="SamsungOneKorean"/>
+                <a:cs typeface="SamsungOneKorean"/>
+              </a:rPr>
+              <a:t>결정 기준·기한 사전 못박기</a:t>
+            </a:r>
+          </a:p>
+        </p:txBody>
+      </p:sp>
+      <p:sp>
+        <p:nvSpPr>
+          <p:cNvPr id="115" name="TextBox 114"/>
           <p:cNvSpPr txBox="1"/>
           <p:nvPr/>
         </p:nvSpPr>
         <p:spPr>
           <a:xfrm>
-            <a:off x="5093207" y="2345436"/>
-            <a:ext cx="1078992" cy="137160"/>
+            <a:off x="5580766" y="4631436"/>
+            <a:ext cx="1999427" cy="155448"/>
           </a:xfrm>
           <a:prstGeom prst="rect">
             <a:avLst/>
@@ -7394,7 +8231,7 @@
           <a:noFill/>
         </p:spPr>
         <p:txBody>
-          <a:bodyPr wrap="none" anchor="t" lIns="0" rIns="0" tIns="0" bIns="0">
+          <a:bodyPr wrap="square" anchor="t" lIns="0" rIns="0" tIns="0" bIns="0">
             <a:spAutoFit/>
           </a:bodyPr>
           <a:lstStyle/>
@@ -7405,73 +8242,40 @@
               </a:lnSpc>
             </a:pPr>
             <a:r>
-              <a:rPr sz="1000" b="0">
-                <a:solidFill>
-                  <a:srgbClr val="555555"/>
-                </a:solidFill>
-                <a:latin typeface="SamsungOneKorean"/>
-                <a:ea typeface="SamsungOneKorean"/>
-                <a:cs typeface="SamsungOneKorean"/>
-              </a:rPr>
-              <a:t>HBM</a:t>
-            </a:r>
-          </a:p>
-        </p:txBody>
-      </p:sp>
-      <p:sp>
-        <p:nvSpPr>
-          <p:cNvPr id="99" name="Rectangle 98"/>
-          <p:cNvSpPr/>
-          <p:nvPr/>
-        </p:nvSpPr>
-        <p:spPr>
-          <a:xfrm>
-            <a:off x="6391655" y="2360980"/>
-            <a:ext cx="105156" cy="105156"/>
-          </a:xfrm>
-          <a:prstGeom prst="rect">
-            <a:avLst/>
-          </a:prstGeom>
-          <a:solidFill>
-            <a:srgbClr val="D9D9D9"/>
-          </a:solidFill>
-          <a:ln>
-            <a:noFill/>
-          </a:ln>
-          <a:effectLst/>
-        </p:spPr>
-        <p:style>
-          <a:lnRef idx="1">
-            <a:schemeClr val="accent1"/>
-          </a:lnRef>
-          <a:fillRef idx="3">
-            <a:schemeClr val="accent1"/>
-          </a:fillRef>
-          <a:effectRef idx="2">
-            <a:schemeClr val="accent1"/>
-          </a:effectRef>
-          <a:fontRef idx="minor">
-            <a:schemeClr val="lt1"/>
-          </a:fontRef>
-        </p:style>
-        <p:txBody>
-          <a:bodyPr rtlCol="0" anchor="ctr"/>
-          <a:lstStyle/>
-          <a:p>
-            <a:pPr algn="ctr"/>
-          </a:p>
-        </p:txBody>
-      </p:sp>
-      <p:sp>
-        <p:nvSpPr>
-          <p:cNvPr id="100" name="TextBox 99"/>
+              <a:rPr sz="1000" b="1">
+                <a:solidFill>
+                  <a:srgbClr val="1428A0"/>
+                </a:solidFill>
+                <a:latin typeface="SamsungOneKorean"/>
+                <a:ea typeface="SamsungOneKorean"/>
+                <a:cs typeface="SamsungOneKorean"/>
+              </a:rPr>
+              <a:t>살리는 곳  </a:t>
+            </a:r>
+            <a:r>
+              <a:rPr sz="1050" b="1">
+                <a:solidFill>
+                  <a:srgbClr val="1428A0"/>
+                </a:solidFill>
+                <a:latin typeface="SamsungOneKorean"/>
+                <a:ea typeface="SamsungOneKorean"/>
+                <a:cs typeface="SamsungOneKorean"/>
+              </a:rPr>
+              <a:t>S4·S1</a:t>
+            </a:r>
+          </a:p>
+        </p:txBody>
+      </p:sp>
+      <p:sp>
+        <p:nvSpPr>
+          <p:cNvPr id="116" name="TextBox 115"/>
           <p:cNvSpPr txBox="1"/>
           <p:nvPr/>
         </p:nvSpPr>
         <p:spPr>
           <a:xfrm>
-            <a:off x="6556248" y="2345436"/>
-            <a:ext cx="566928" cy="137160"/>
+            <a:off x="5580766" y="4814316"/>
+            <a:ext cx="1999427" cy="164592"/>
           </a:xfrm>
           <a:prstGeom prst="rect">
             <a:avLst/>
@@ -7479,7 +8283,7 @@
           <a:noFill/>
         </p:spPr>
         <p:txBody>
-          <a:bodyPr wrap="none" anchor="t" lIns="0" rIns="0" tIns="0" bIns="0">
+          <a:bodyPr wrap="square" anchor="t" lIns="0" rIns="0" tIns="0" bIns="0">
             <a:spAutoFit/>
           </a:bodyPr>
           <a:lstStyle/>
@@ -7490,29 +8294,29 @@
               </a:lnSpc>
             </a:pPr>
             <a:r>
-              <a:rPr sz="1000" b="1">
-                <a:solidFill>
-                  <a:srgbClr val="555555"/>
-                </a:solidFill>
-                <a:latin typeface="SamsungOneKorean"/>
-                <a:ea typeface="SamsungOneKorean"/>
-                <a:cs typeface="SamsungOneKorean"/>
-              </a:rPr>
-              <a:t>제한</a:t>
-            </a:r>
-          </a:p>
-        </p:txBody>
-      </p:sp>
-      <p:sp>
-        <p:nvSpPr>
-          <p:cNvPr id="101" name="TextBox 100"/>
+              <a:rPr sz="1050" b="0">
+                <a:solidFill>
+                  <a:srgbClr val="1A1A1A"/>
+                </a:solidFill>
+                <a:latin typeface="SamsungOneKorean"/>
+                <a:ea typeface="SamsungOneKorean"/>
+                <a:cs typeface="SamsungOneKorean"/>
+              </a:rPr>
+              <a:t>원가 선행으로 규율 선도</a:t>
+            </a:r>
+          </a:p>
+        </p:txBody>
+      </p:sp>
+      <p:sp>
+        <p:nvSpPr>
+          <p:cNvPr id="117" name="TextBox 116"/>
           <p:cNvSpPr txBox="1"/>
           <p:nvPr/>
         </p:nvSpPr>
         <p:spPr>
           <a:xfrm>
-            <a:off x="5093207" y="2499055"/>
-            <a:ext cx="1078992" cy="137160"/>
+            <a:off x="5580766" y="5143500"/>
+            <a:ext cx="1999427" cy="146304"/>
           </a:xfrm>
           <a:prstGeom prst="rect">
             <a:avLst/>
@@ -7520,7 +8324,7 @@
           <a:noFill/>
         </p:spPr>
         <p:txBody>
-          <a:bodyPr wrap="none" anchor="t" lIns="0" rIns="0" tIns="0" bIns="0">
+          <a:bodyPr wrap="square" anchor="t" lIns="0" rIns="0" tIns="0" bIns="0">
             <a:spAutoFit/>
           </a:bodyPr>
           <a:lstStyle/>
@@ -7531,688 +8335,6 @@
               </a:lnSpc>
             </a:pPr>
             <a:r>
-              <a:rPr sz="1000" b="0">
-                <a:solidFill>
-                  <a:srgbClr val="555555"/>
-                </a:solidFill>
-                <a:latin typeface="SamsungOneKorean"/>
-                <a:ea typeface="SamsungOneKorean"/>
-                <a:cs typeface="SamsungOneKorean"/>
-              </a:rPr>
-              <a:t>서버 DRAM</a:t>
-            </a:r>
-          </a:p>
-        </p:txBody>
-      </p:sp>
-      <p:sp>
-        <p:nvSpPr>
-          <p:cNvPr id="102" name="Rectangle 101"/>
-          <p:cNvSpPr/>
-          <p:nvPr/>
-        </p:nvSpPr>
-        <p:spPr>
-          <a:xfrm>
-            <a:off x="6391655" y="2514600"/>
-            <a:ext cx="105156" cy="105156"/>
-          </a:xfrm>
-          <a:prstGeom prst="rect">
-            <a:avLst/>
-          </a:prstGeom>
-          <a:solidFill>
-            <a:srgbClr val="E89B94"/>
-          </a:solidFill>
-          <a:ln>
-            <a:noFill/>
-          </a:ln>
-          <a:effectLst/>
-        </p:spPr>
-        <p:style>
-          <a:lnRef idx="1">
-            <a:schemeClr val="accent1"/>
-          </a:lnRef>
-          <a:fillRef idx="3">
-            <a:schemeClr val="accent1"/>
-          </a:fillRef>
-          <a:effectRef idx="2">
-            <a:schemeClr val="accent1"/>
-          </a:effectRef>
-          <a:fontRef idx="minor">
-            <a:schemeClr val="lt1"/>
-          </a:fontRef>
-        </p:style>
-        <p:txBody>
-          <a:bodyPr rtlCol="0" anchor="ctr"/>
-          <a:lstStyle/>
-          <a:p>
-            <a:pPr algn="ctr"/>
-          </a:p>
-        </p:txBody>
-      </p:sp>
-      <p:sp>
-        <p:nvSpPr>
-          <p:cNvPr id="103" name="TextBox 102"/>
-          <p:cNvSpPr txBox="1"/>
-          <p:nvPr/>
-        </p:nvSpPr>
-        <p:spPr>
-          <a:xfrm>
-            <a:off x="6556248" y="2499055"/>
-            <a:ext cx="566928" cy="137160"/>
-          </a:xfrm>
-          <a:prstGeom prst="rect">
-            <a:avLst/>
-          </a:prstGeom>
-          <a:noFill/>
-        </p:spPr>
-        <p:txBody>
-          <a:bodyPr wrap="none" anchor="t" lIns="0" rIns="0" tIns="0" bIns="0">
-            <a:spAutoFit/>
-          </a:bodyPr>
-          <a:lstStyle/>
-          <a:p>
-            <a:pPr algn="l">
-              <a:lnSpc>
-                <a:spcPct val="100000"/>
-              </a:lnSpc>
-            </a:pPr>
-            <a:r>
-              <a:rPr sz="1000" b="1">
-                <a:solidFill>
-                  <a:srgbClr val="B44A40"/>
-                </a:solidFill>
-                <a:latin typeface="SamsungOneKorean"/>
-                <a:ea typeface="SamsungOneKorean"/>
-                <a:cs typeface="SamsungOneKorean"/>
-              </a:rPr>
-              <a:t>압박</a:t>
-            </a:r>
-          </a:p>
-        </p:txBody>
-      </p:sp>
-      <p:sp>
-        <p:nvSpPr>
-          <p:cNvPr id="104" name="TextBox 103"/>
-          <p:cNvSpPr txBox="1"/>
-          <p:nvPr/>
-        </p:nvSpPr>
-        <p:spPr>
-          <a:xfrm>
-            <a:off x="5093207" y="2652674"/>
-            <a:ext cx="1078992" cy="137160"/>
-          </a:xfrm>
-          <a:prstGeom prst="rect">
-            <a:avLst/>
-          </a:prstGeom>
-          <a:noFill/>
-        </p:spPr>
-        <p:txBody>
-          <a:bodyPr wrap="none" anchor="t" lIns="0" rIns="0" tIns="0" bIns="0">
-            <a:spAutoFit/>
-          </a:bodyPr>
-          <a:lstStyle/>
-          <a:p>
-            <a:pPr algn="l">
-              <a:lnSpc>
-                <a:spcPct val="100000"/>
-              </a:lnSpc>
-            </a:pPr>
-            <a:r>
-              <a:rPr sz="1000" b="0">
-                <a:solidFill>
-                  <a:srgbClr val="555555"/>
-                </a:solidFill>
-                <a:latin typeface="SamsungOneKorean"/>
-                <a:ea typeface="SamsungOneKorean"/>
-                <a:cs typeface="SamsungOneKorean"/>
-              </a:rPr>
-              <a:t>범용·레거시</a:t>
-            </a:r>
-          </a:p>
-        </p:txBody>
-      </p:sp>
-      <p:sp>
-        <p:nvSpPr>
-          <p:cNvPr id="105" name="Rectangle 104"/>
-          <p:cNvSpPr/>
-          <p:nvPr/>
-        </p:nvSpPr>
-        <p:spPr>
-          <a:xfrm>
-            <a:off x="6391655" y="2668219"/>
-            <a:ext cx="105156" cy="105156"/>
-          </a:xfrm>
-          <a:prstGeom prst="rect">
-            <a:avLst/>
-          </a:prstGeom>
-          <a:solidFill>
-            <a:srgbClr val="D93025"/>
-          </a:solidFill>
-          <a:ln>
-            <a:noFill/>
-          </a:ln>
-          <a:effectLst/>
-        </p:spPr>
-        <p:style>
-          <a:lnRef idx="1">
-            <a:schemeClr val="accent1"/>
-          </a:lnRef>
-          <a:fillRef idx="3">
-            <a:schemeClr val="accent1"/>
-          </a:fillRef>
-          <a:effectRef idx="2">
-            <a:schemeClr val="accent1"/>
-          </a:effectRef>
-          <a:fontRef idx="minor">
-            <a:schemeClr val="lt1"/>
-          </a:fontRef>
-        </p:style>
-        <p:txBody>
-          <a:bodyPr rtlCol="0" anchor="ctr"/>
-          <a:lstStyle/>
-          <a:p>
-            <a:pPr algn="ctr"/>
-          </a:p>
-        </p:txBody>
-      </p:sp>
-      <p:sp>
-        <p:nvSpPr>
-          <p:cNvPr id="106" name="TextBox 105"/>
-          <p:cNvSpPr txBox="1"/>
-          <p:nvPr/>
-        </p:nvSpPr>
-        <p:spPr>
-          <a:xfrm>
-            <a:off x="6556248" y="2652674"/>
-            <a:ext cx="566928" cy="137160"/>
-          </a:xfrm>
-          <a:prstGeom prst="rect">
-            <a:avLst/>
-          </a:prstGeom>
-          <a:noFill/>
-        </p:spPr>
-        <p:txBody>
-          <a:bodyPr wrap="none" anchor="t" lIns="0" rIns="0" tIns="0" bIns="0">
-            <a:spAutoFit/>
-          </a:bodyPr>
-          <a:lstStyle/>
-          <a:p>
-            <a:pPr algn="l">
-              <a:lnSpc>
-                <a:spcPct val="100000"/>
-              </a:lnSpc>
-            </a:pPr>
-            <a:r>
-              <a:rPr sz="1000" b="1">
-                <a:solidFill>
-                  <a:srgbClr val="D93025"/>
-                </a:solidFill>
-                <a:latin typeface="SamsungOneKorean"/>
-                <a:ea typeface="SamsungOneKorean"/>
-                <a:cs typeface="SamsungOneKorean"/>
-              </a:rPr>
-              <a:t>직격</a:t>
-            </a:r>
-          </a:p>
-        </p:txBody>
-      </p:sp>
-      <p:sp>
-        <p:nvSpPr>
-          <p:cNvPr id="107" name="TextBox 106"/>
-          <p:cNvSpPr txBox="1"/>
-          <p:nvPr/>
-        </p:nvSpPr>
-        <p:spPr>
-          <a:xfrm>
-            <a:off x="5093207" y="2806293"/>
-            <a:ext cx="1078992" cy="137160"/>
-          </a:xfrm>
-          <a:prstGeom prst="rect">
-            <a:avLst/>
-          </a:prstGeom>
-          <a:noFill/>
-        </p:spPr>
-        <p:txBody>
-          <a:bodyPr wrap="none" anchor="t" lIns="0" rIns="0" tIns="0" bIns="0">
-            <a:spAutoFit/>
-          </a:bodyPr>
-          <a:lstStyle/>
-          <a:p>
-            <a:pPr algn="l">
-              <a:lnSpc>
-                <a:spcPct val="100000"/>
-              </a:lnSpc>
-            </a:pPr>
-            <a:r>
-              <a:rPr sz="1000" b="0">
-                <a:solidFill>
-                  <a:srgbClr val="555555"/>
-                </a:solidFill>
-                <a:latin typeface="SamsungOneKorean"/>
-                <a:ea typeface="SamsungOneKorean"/>
-                <a:cs typeface="SamsungOneKorean"/>
-              </a:rPr>
-              <a:t>NAND·SSD</a:t>
-            </a:r>
-          </a:p>
-        </p:txBody>
-      </p:sp>
-      <p:sp>
-        <p:nvSpPr>
-          <p:cNvPr id="108" name="Rectangle 107"/>
-          <p:cNvSpPr/>
-          <p:nvPr/>
-        </p:nvSpPr>
-        <p:spPr>
-          <a:xfrm>
-            <a:off x="6391655" y="2821838"/>
-            <a:ext cx="105156" cy="105156"/>
-          </a:xfrm>
-          <a:prstGeom prst="rect">
-            <a:avLst/>
-          </a:prstGeom>
-          <a:solidFill>
-            <a:srgbClr val="D93025"/>
-          </a:solidFill>
-          <a:ln>
-            <a:noFill/>
-          </a:ln>
-          <a:effectLst/>
-        </p:spPr>
-        <p:style>
-          <a:lnRef idx="1">
-            <a:schemeClr val="accent1"/>
-          </a:lnRef>
-          <a:fillRef idx="3">
-            <a:schemeClr val="accent1"/>
-          </a:fillRef>
-          <a:effectRef idx="2">
-            <a:schemeClr val="accent1"/>
-          </a:effectRef>
-          <a:fontRef idx="minor">
-            <a:schemeClr val="lt1"/>
-          </a:fontRef>
-        </p:style>
-        <p:txBody>
-          <a:bodyPr rtlCol="0" anchor="ctr"/>
-          <a:lstStyle/>
-          <a:p>
-            <a:pPr algn="ctr"/>
-          </a:p>
-        </p:txBody>
-      </p:sp>
-      <p:sp>
-        <p:nvSpPr>
-          <p:cNvPr id="109" name="TextBox 108"/>
-          <p:cNvSpPr txBox="1"/>
-          <p:nvPr/>
-        </p:nvSpPr>
-        <p:spPr>
-          <a:xfrm>
-            <a:off x="6556248" y="2806293"/>
-            <a:ext cx="566928" cy="137160"/>
-          </a:xfrm>
-          <a:prstGeom prst="rect">
-            <a:avLst/>
-          </a:prstGeom>
-          <a:noFill/>
-        </p:spPr>
-        <p:txBody>
-          <a:bodyPr wrap="none" anchor="t" lIns="0" rIns="0" tIns="0" bIns="0">
-            <a:spAutoFit/>
-          </a:bodyPr>
-          <a:lstStyle/>
-          <a:p>
-            <a:pPr algn="l">
-              <a:lnSpc>
-                <a:spcPct val="100000"/>
-              </a:lnSpc>
-            </a:pPr>
-            <a:r>
-              <a:rPr sz="1000" b="1">
-                <a:solidFill>
-                  <a:srgbClr val="D93025"/>
-                </a:solidFill>
-                <a:latin typeface="SamsungOneKorean"/>
-                <a:ea typeface="SamsungOneKorean"/>
-                <a:cs typeface="SamsungOneKorean"/>
-              </a:rPr>
-              <a:t>직격</a:t>
-            </a:r>
-          </a:p>
-        </p:txBody>
-      </p:sp>
-      <p:cxnSp>
-        <p:nvCxnSpPr>
-          <p:cNvPr id="110" name="Connector 109"/>
-          <p:cNvCxnSpPr/>
-          <p:nvPr/>
-        </p:nvCxnSpPr>
-        <p:spPr>
-          <a:xfrm>
-            <a:off x="5093207" y="3010204"/>
-            <a:ext cx="2006194" cy="0"/>
-          </a:xfrm>
-          <a:prstGeom prst="line">
-            <a:avLst/>
-          </a:prstGeom>
-          <a:ln w="6350">
-            <a:solidFill>
-              <a:srgbClr val="D9D9D9"/>
-            </a:solidFill>
-          </a:ln>
-          <a:effectLst/>
-        </p:spPr>
-        <p:style>
-          <a:lnRef idx="2">
-            <a:schemeClr val="accent1"/>
-          </a:lnRef>
-          <a:fillRef idx="0">
-            <a:schemeClr val="accent1"/>
-          </a:fillRef>
-          <a:effectRef idx="1">
-            <a:schemeClr val="accent1"/>
-          </a:effectRef>
-          <a:fontRef idx="minor">
-            <a:schemeClr val="tx1"/>
-          </a:fontRef>
-        </p:style>
-      </p:cxnSp>
-      <p:sp>
-        <p:nvSpPr>
-          <p:cNvPr id="111" name="TextBox 110"/>
-          <p:cNvSpPr txBox="1"/>
-          <p:nvPr/>
-        </p:nvSpPr>
-        <p:spPr>
-          <a:xfrm>
-            <a:off x="5093207" y="3065068"/>
-            <a:ext cx="2006193" cy="146304"/>
-          </a:xfrm>
-          <a:prstGeom prst="rect">
-            <a:avLst/>
-          </a:prstGeom>
-          <a:noFill/>
-        </p:spPr>
-        <p:txBody>
-          <a:bodyPr wrap="square" anchor="t" lIns="0" rIns="0" tIns="0" bIns="0">
-            <a:spAutoFit/>
-          </a:bodyPr>
-          <a:lstStyle/>
-          <a:p>
-            <a:pPr algn="l">
-              <a:lnSpc>
-                <a:spcPct val="100000"/>
-              </a:lnSpc>
-            </a:pPr>
-            <a:r>
-              <a:rPr sz="1000" b="1">
-                <a:solidFill>
-                  <a:srgbClr val="1428A0"/>
-                </a:solidFill>
-                <a:latin typeface="SamsungOneKorean"/>
-                <a:ea typeface="SamsungOneKorean"/>
-                <a:cs typeface="SamsungOneKorean"/>
-              </a:rPr>
-              <a:t>무엇이 갈리나</a:t>
-            </a:r>
-          </a:p>
-        </p:txBody>
-      </p:sp>
-      <p:sp>
-        <p:nvSpPr>
-          <p:cNvPr id="112" name="TextBox 111"/>
-          <p:cNvSpPr txBox="1"/>
-          <p:nvPr/>
-        </p:nvSpPr>
-        <p:spPr>
-          <a:xfrm>
-            <a:off x="5093207" y="3225088"/>
-            <a:ext cx="2006193" cy="457200"/>
-          </a:xfrm>
-          <a:prstGeom prst="rect">
-            <a:avLst/>
-          </a:prstGeom>
-          <a:noFill/>
-        </p:spPr>
-        <p:txBody>
-          <a:bodyPr wrap="square" anchor="t" lIns="0" rIns="0" tIns="0" bIns="0">
-            <a:spAutoFit/>
-          </a:bodyPr>
-          <a:lstStyle/>
-          <a:p>
-            <a:pPr algn="l">
-              <a:lnSpc>
-                <a:spcPct val="106000"/>
-              </a:lnSpc>
-            </a:pPr>
-            <a:r>
-              <a:rPr sz="1000" b="0">
-                <a:solidFill>
-                  <a:srgbClr val="1A1A1A"/>
-                </a:solidFill>
-                <a:latin typeface="SamsungOneKorean"/>
-                <a:ea typeface="SamsungOneKorean"/>
-                <a:cs typeface="SamsungOneKorean"/>
-              </a:rPr>
-              <a:t>공급 조절이 직접 작동하는 유일한 판. 성패는 조절 여부가 아니라 조절의 속도다</a:t>
-            </a:r>
-          </a:p>
-        </p:txBody>
-      </p:sp>
-      <p:sp>
-        <p:nvSpPr>
-          <p:cNvPr id="113" name="TextBox 112"/>
-          <p:cNvSpPr txBox="1"/>
-          <p:nvPr/>
-        </p:nvSpPr>
-        <p:spPr>
-          <a:xfrm>
-            <a:off x="5093207" y="3741724"/>
-            <a:ext cx="2006193" cy="146304"/>
-          </a:xfrm>
-          <a:prstGeom prst="rect">
-            <a:avLst/>
-          </a:prstGeom>
-          <a:noFill/>
-        </p:spPr>
-        <p:txBody>
-          <a:bodyPr wrap="square" anchor="t" lIns="0" rIns="0" tIns="0" bIns="0">
-            <a:spAutoFit/>
-          </a:bodyPr>
-          <a:lstStyle/>
-          <a:p>
-            <a:pPr algn="l">
-              <a:lnSpc>
-                <a:spcPct val="100000"/>
-              </a:lnSpc>
-            </a:pPr>
-            <a:r>
-              <a:rPr sz="1000" b="1">
-                <a:solidFill>
-                  <a:srgbClr val="D93025"/>
-                </a:solidFill>
-                <a:latin typeface="SamsungOneKorean"/>
-                <a:ea typeface="SamsungOneKorean"/>
-                <a:cs typeface="SamsungOneKorean"/>
-              </a:rPr>
-              <a:t>찔리는 곳 </a:t>
-            </a:r>
-            <a:r>
-              <a:rPr sz="1000" b="1">
-                <a:solidFill>
-                  <a:srgbClr val="D93025"/>
-                </a:solidFill>
-                <a:latin typeface="SamsungOneKorean"/>
-                <a:ea typeface="SamsungOneKorean"/>
-                <a:cs typeface="SamsungOneKorean"/>
-              </a:rPr>
-              <a:t>W3·W4</a:t>
-            </a:r>
-          </a:p>
-        </p:txBody>
-      </p:sp>
-      <p:sp>
-        <p:nvSpPr>
-          <p:cNvPr id="114" name="TextBox 113"/>
-          <p:cNvSpPr txBox="1"/>
-          <p:nvPr/>
-        </p:nvSpPr>
-        <p:spPr>
-          <a:xfrm>
-            <a:off x="5093207" y="3901744"/>
-            <a:ext cx="2006193" cy="457200"/>
-          </a:xfrm>
-          <a:prstGeom prst="rect">
-            <a:avLst/>
-          </a:prstGeom>
-          <a:noFill/>
-        </p:spPr>
-        <p:txBody>
-          <a:bodyPr wrap="square" anchor="t" lIns="0" rIns="0" tIns="0" bIns="0">
-            <a:spAutoFit/>
-          </a:bodyPr>
-          <a:lstStyle/>
-          <a:p>
-            <a:pPr algn="l">
-              <a:lnSpc>
-                <a:spcPct val="106000"/>
-              </a:lnSpc>
-            </a:pPr>
-            <a:r>
-              <a:rPr sz="1000" b="0">
-                <a:solidFill>
-                  <a:srgbClr val="1A1A1A"/>
-                </a:solidFill>
-                <a:latin typeface="SamsungOneKorean"/>
-                <a:ea typeface="SamsungOneKorean"/>
-                <a:cs typeface="SamsungOneKorean"/>
-              </a:rPr>
-              <a:t>감산 6개월 지연과 맞불 증설 관성. 조절 결정의 기준과 기한을 사전에 못박아 둘 것</a:t>
-            </a:r>
-          </a:p>
-        </p:txBody>
-      </p:sp>
-      <p:sp>
-        <p:nvSpPr>
-          <p:cNvPr id="115" name="TextBox 114"/>
-          <p:cNvSpPr txBox="1"/>
-          <p:nvPr/>
-        </p:nvSpPr>
-        <p:spPr>
-          <a:xfrm>
-            <a:off x="5093207" y="4422952"/>
-            <a:ext cx="2006193" cy="146304"/>
-          </a:xfrm>
-          <a:prstGeom prst="rect">
-            <a:avLst/>
-          </a:prstGeom>
-          <a:noFill/>
-        </p:spPr>
-        <p:txBody>
-          <a:bodyPr wrap="square" anchor="t" lIns="0" rIns="0" tIns="0" bIns="0">
-            <a:spAutoFit/>
-          </a:bodyPr>
-          <a:lstStyle/>
-          <a:p>
-            <a:pPr algn="l">
-              <a:lnSpc>
-                <a:spcPct val="100000"/>
-              </a:lnSpc>
-            </a:pPr>
-            <a:r>
-              <a:rPr sz="1000" b="1">
-                <a:solidFill>
-                  <a:srgbClr val="1428A0"/>
-                </a:solidFill>
-                <a:latin typeface="SamsungOneKorean"/>
-                <a:ea typeface="SamsungOneKorean"/>
-                <a:cs typeface="SamsungOneKorean"/>
-              </a:rPr>
-              <a:t>살리는 곳 </a:t>
-            </a:r>
-            <a:r>
-              <a:rPr sz="1000" b="1">
-                <a:solidFill>
-                  <a:srgbClr val="1428A0"/>
-                </a:solidFill>
-                <a:latin typeface="SamsungOneKorean"/>
-                <a:ea typeface="SamsungOneKorean"/>
-                <a:cs typeface="SamsungOneKorean"/>
-              </a:rPr>
-              <a:t>S4·S1</a:t>
-            </a:r>
-          </a:p>
-        </p:txBody>
-      </p:sp>
-      <p:sp>
-        <p:nvSpPr>
-          <p:cNvPr id="116" name="TextBox 115"/>
-          <p:cNvSpPr txBox="1"/>
-          <p:nvPr/>
-        </p:nvSpPr>
-        <p:spPr>
-          <a:xfrm>
-            <a:off x="5093207" y="4582972"/>
-            <a:ext cx="2006193" cy="457200"/>
-          </a:xfrm>
-          <a:prstGeom prst="rect">
-            <a:avLst/>
-          </a:prstGeom>
-          <a:noFill/>
-        </p:spPr>
-        <p:txBody>
-          <a:bodyPr wrap="square" anchor="t" lIns="0" rIns="0" tIns="0" bIns="0">
-            <a:spAutoFit/>
-          </a:bodyPr>
-          <a:lstStyle/>
-          <a:p>
-            <a:pPr algn="l">
-              <a:lnSpc>
-                <a:spcPct val="106000"/>
-              </a:lnSpc>
-            </a:pPr>
-            <a:r>
-              <a:rPr sz="1000" b="0">
-                <a:solidFill>
-                  <a:srgbClr val="1A1A1A"/>
-                </a:solidFill>
-                <a:latin typeface="SamsungOneKorean"/>
-                <a:ea typeface="SamsungOneKorean"/>
-                <a:cs typeface="SamsungOneKorean"/>
-              </a:rPr>
-              <a:t>세대 선행·감가 완료 설비가 바닥 가격을 버틴다. 소모전이 아니라 규율 선도의 여유로 쓸 것</a:t>
-            </a:r>
-          </a:p>
-        </p:txBody>
-      </p:sp>
-      <p:sp>
-        <p:nvSpPr>
-          <p:cNvPr id="117" name="TextBox 116"/>
-          <p:cNvSpPr txBox="1"/>
-          <p:nvPr/>
-        </p:nvSpPr>
-        <p:spPr>
-          <a:xfrm>
-            <a:off x="5093207" y="5104180"/>
-            <a:ext cx="2006193" cy="146304"/>
-          </a:xfrm>
-          <a:prstGeom prst="rect">
-            <a:avLst/>
-          </a:prstGeom>
-          <a:noFill/>
-        </p:spPr>
-        <p:txBody>
-          <a:bodyPr wrap="square" anchor="t" lIns="0" rIns="0" tIns="0" bIns="0">
-            <a:spAutoFit/>
-          </a:bodyPr>
-          <a:lstStyle/>
-          <a:p>
-            <a:pPr algn="l">
-              <a:lnSpc>
-                <a:spcPct val="100000"/>
-              </a:lnSpc>
-            </a:pPr>
-            <a:r>
               <a:rPr sz="1000" b="1">
                 <a:solidFill>
                   <a:srgbClr val="555555"/>
@@ -8234,8 +8356,8 @@
         </p:nvSpPr>
         <p:spPr>
           <a:xfrm>
-            <a:off x="5093207" y="5273344"/>
-            <a:ext cx="2006193" cy="173736"/>
+            <a:off x="5580766" y="5335524"/>
+            <a:ext cx="1999427" cy="192024"/>
           </a:xfrm>
           <a:prstGeom prst="roundRect">
             <a:avLst>
@@ -8282,8 +8404,8 @@
         </p:nvSpPr>
         <p:spPr>
           <a:xfrm>
-            <a:off x="5157216" y="5293461"/>
-            <a:ext cx="1878177" cy="137160"/>
+            <a:off x="5580766" y="5367528"/>
+            <a:ext cx="1999427" cy="137160"/>
           </a:xfrm>
           <a:prstGeom prst="rect">
             <a:avLst/>
@@ -8310,7 +8432,7 @@
                 <a:ea typeface="SamsungOneKorean"/>
                 <a:cs typeface="SamsungOneKorean"/>
               </a:rPr>
-              <a:t>재고·투입 갭 감시</a:t>
+              <a:t>재고·투입 갭</a:t>
             </a:r>
           </a:p>
         </p:txBody>
@@ -8323,8 +8445,8 @@
         </p:nvSpPr>
         <p:spPr>
           <a:xfrm>
-            <a:off x="5093207" y="5479084"/>
-            <a:ext cx="2006193" cy="173736"/>
+            <a:off x="5580766" y="5568696"/>
+            <a:ext cx="1999427" cy="192024"/>
           </a:xfrm>
           <a:prstGeom prst="roundRect">
             <a:avLst>
@@ -8371,8 +8493,8 @@
         </p:nvSpPr>
         <p:spPr>
           <a:xfrm>
-            <a:off x="5157216" y="5499201"/>
-            <a:ext cx="1878177" cy="137160"/>
+            <a:off x="5580766" y="5600700"/>
+            <a:ext cx="1999427" cy="137160"/>
           </a:xfrm>
           <a:prstGeom prst="rect">
             <a:avLst/>
@@ -8412,8 +8534,8 @@
         </p:nvSpPr>
         <p:spPr>
           <a:xfrm>
-            <a:off x="5093207" y="5684824"/>
-            <a:ext cx="2006193" cy="173736"/>
+            <a:off x="5580766" y="5801868"/>
+            <a:ext cx="1999427" cy="192024"/>
           </a:xfrm>
           <a:prstGeom prst="roundRect">
             <a:avLst>
@@ -8460,8 +8582,8 @@
         </p:nvSpPr>
         <p:spPr>
           <a:xfrm>
-            <a:off x="5157216" y="5704941"/>
-            <a:ext cx="1878177" cy="137160"/>
+            <a:off x="5580766" y="5833872"/>
+            <a:ext cx="1999427" cy="137160"/>
           </a:xfrm>
           <a:prstGeom prst="rect">
             <a:avLst/>
@@ -8495,62 +8617,14 @@
       </p:sp>
       <p:sp>
         <p:nvSpPr>
-          <p:cNvPr id="124" name="Rounded Rectangle 123"/>
+          <p:cNvPr id="124" name="Rectangle 123"/>
           <p:cNvSpPr/>
           <p:nvPr/>
         </p:nvSpPr>
         <p:spPr>
           <a:xfrm>
-            <a:off x="7287768" y="1783080"/>
-            <a:ext cx="2189073" cy="4224528"/>
-          </a:xfrm>
-          <a:prstGeom prst="roundRect">
-            <a:avLst>
-              <a:gd name="adj" fmla="val 2800"/>
-            </a:avLst>
-          </a:prstGeom>
-          <a:solidFill>
-            <a:srgbClr val="FFFFFF"/>
-          </a:solidFill>
-          <a:ln w="7620">
-            <a:solidFill>
-              <a:srgbClr val="D9D9D9"/>
-            </a:solidFill>
-          </a:ln>
-          <a:effectLst/>
-        </p:spPr>
-        <p:style>
-          <a:lnRef idx="1">
-            <a:schemeClr val="accent1"/>
-          </a:lnRef>
-          <a:fillRef idx="3">
-            <a:schemeClr val="accent1"/>
-          </a:fillRef>
-          <a:effectRef idx="2">
-            <a:schemeClr val="accent1"/>
-          </a:effectRef>
-          <a:fontRef idx="minor">
-            <a:schemeClr val="lt1"/>
-          </a:fontRef>
-        </p:style>
-        <p:txBody>
-          <a:bodyPr rtlCol="0" anchor="ctr"/>
-          <a:lstStyle/>
-          <a:p>
-            <a:pPr algn="ctr"/>
-          </a:p>
-        </p:txBody>
-      </p:sp>
-      <p:sp>
-        <p:nvSpPr>
-          <p:cNvPr id="125" name="Rectangle 124"/>
-          <p:cNvSpPr/>
-          <p:nvPr/>
-        </p:nvSpPr>
-        <p:spPr>
-          <a:xfrm>
-            <a:off x="7287768" y="1783080"/>
-            <a:ext cx="2189073" cy="41148"/>
+            <a:off x="7671633" y="3515868"/>
+            <a:ext cx="32004" cy="475488"/>
           </a:xfrm>
           <a:prstGeom prst="rect">
             <a:avLst/>
@@ -8587,14 +8661,73 @@
       </p:sp>
       <p:sp>
         <p:nvSpPr>
+          <p:cNvPr id="125" name="TextBox 124"/>
+          <p:cNvSpPr txBox="1"/>
+          <p:nvPr/>
+        </p:nvSpPr>
+        <p:spPr>
+          <a:xfrm>
+            <a:off x="7790505" y="3525011"/>
+            <a:ext cx="1880555" cy="475488"/>
+          </a:xfrm>
+          <a:prstGeom prst="rect">
+            <a:avLst/>
+          </a:prstGeom>
+          <a:noFill/>
+        </p:spPr>
+        <p:txBody>
+          <a:bodyPr wrap="square" anchor="t" lIns="0" rIns="0" tIns="0" bIns="0">
+            <a:spAutoFit/>
+          </a:bodyPr>
+          <a:lstStyle/>
+          <a:p>
+            <a:pPr algn="l">
+              <a:lnSpc>
+                <a:spcPct val="112000"/>
+              </a:lnSpc>
+            </a:pPr>
+            <a:r>
+              <a:rPr sz="1150" b="1">
+                <a:solidFill>
+                  <a:srgbClr val="1A1A1A"/>
+                </a:solidFill>
+                <a:latin typeface="SamsungOneKorean"/>
+                <a:ea typeface="SamsungOneKorean"/>
+                <a:cs typeface="SamsungOneKorean"/>
+              </a:rPr>
+              <a:t>하단은 돌아오지 않는다.</a:t>
+            </a:r>
+          </a:p>
+          <a:p>
+            <a:pPr algn="l">
+              <a:lnSpc>
+                <a:spcPct val="112000"/>
+              </a:lnSpc>
+            </a:pPr>
+            <a:r>
+              <a:rPr sz="1150" b="1">
+                <a:solidFill>
+                  <a:srgbClr val="1A1A1A"/>
+                </a:solidFill>
+                <a:latin typeface="SamsungOneKorean"/>
+                <a:ea typeface="SamsungOneKorean"/>
+                <a:cs typeface="SamsungOneKorean"/>
+              </a:rPr>
+              <a:t>버티기가 아니라 옮기기다</a:t>
+            </a:r>
+          </a:p>
+        </p:txBody>
+      </p:sp>
+      <p:sp>
+        <p:nvSpPr>
           <p:cNvPr id="126" name="TextBox 125"/>
           <p:cNvSpPr txBox="1"/>
           <p:nvPr/>
         </p:nvSpPr>
         <p:spPr>
           <a:xfrm>
-            <a:off x="7379208" y="1874519"/>
-            <a:ext cx="2006193" cy="182880"/>
+            <a:off x="7671633" y="4155948"/>
+            <a:ext cx="1999427" cy="155448"/>
           </a:xfrm>
           <a:prstGeom prst="rect">
             <a:avLst/>
@@ -8613,26 +8746,26 @@
               </a:lnSpc>
             </a:pPr>
             <a:r>
-              <a:rPr sz="1250" b="1">
-                <a:solidFill>
-                  <a:srgbClr val="1428A0"/>
-                </a:solidFill>
-                <a:latin typeface="SamsungOneKorean"/>
-                <a:ea typeface="SamsungOneKorean"/>
-                <a:cs typeface="SamsungOneKorean"/>
-              </a:rPr>
-              <a:t>DT-D  </a:t>
-            </a:r>
-            <a:r>
-              <a:rPr sz="1250" b="1">
-                <a:solidFill>
-                  <a:srgbClr val="1A1A1A"/>
-                </a:solidFill>
-                <a:latin typeface="SamsungOneKorean"/>
-                <a:ea typeface="SamsungOneKorean"/>
-                <a:cs typeface="SamsungOneKorean"/>
-              </a:rPr>
-              <a:t>저가 잠식</a:t>
+              <a:rPr sz="1000" b="1">
+                <a:solidFill>
+                  <a:srgbClr val="D93025"/>
+                </a:solidFill>
+                <a:latin typeface="SamsungOneKorean"/>
+                <a:ea typeface="SamsungOneKorean"/>
+                <a:cs typeface="SamsungOneKorean"/>
+              </a:rPr>
+              <a:t>찔리는 곳  </a:t>
+            </a:r>
+            <a:r>
+              <a:rPr sz="1050" b="1">
+                <a:solidFill>
+                  <a:srgbClr val="D93025"/>
+                </a:solidFill>
+                <a:latin typeface="SamsungOneKorean"/>
+                <a:ea typeface="SamsungOneKorean"/>
+                <a:cs typeface="SamsungOneKorean"/>
+              </a:rPr>
+              <a:t>W2·W4</a:t>
             </a:r>
           </a:p>
         </p:txBody>
@@ -8645,8 +8778,8 @@
         </p:nvSpPr>
         <p:spPr>
           <a:xfrm>
-            <a:off x="7379208" y="2089404"/>
-            <a:ext cx="2006193" cy="146304"/>
+            <a:off x="7671633" y="4338828"/>
+            <a:ext cx="1999427" cy="164592"/>
           </a:xfrm>
           <a:prstGeom prst="rect">
             <a:avLst/>
@@ -8665,65 +8798,29 @@
               </a:lnSpc>
             </a:pPr>
             <a:r>
-              <a:rPr sz="1000" b="0">
-                <a:solidFill>
-                  <a:srgbClr val="555555"/>
-                </a:solidFill>
-                <a:latin typeface="SamsungOneKorean"/>
-                <a:ea typeface="SamsungOneKorean"/>
-                <a:cs typeface="SamsungOneKorean"/>
-              </a:rPr>
-              <a:t>공급발 × 침식</a:t>
-            </a:r>
-          </a:p>
-        </p:txBody>
-      </p:sp>
-      <p:cxnSp>
-        <p:nvCxnSpPr>
-          <p:cNvPr id="128" name="Connector 127"/>
-          <p:cNvCxnSpPr/>
-          <p:nvPr/>
-        </p:nvCxnSpPr>
-        <p:spPr>
-          <a:xfrm>
-            <a:off x="7379208" y="2281428"/>
-            <a:ext cx="2006193" cy="0"/>
-          </a:xfrm>
-          <a:prstGeom prst="line">
-            <a:avLst/>
-          </a:prstGeom>
-          <a:ln w="6350">
-            <a:solidFill>
-              <a:srgbClr val="D9D9D9"/>
-            </a:solidFill>
-          </a:ln>
-          <a:effectLst/>
-        </p:spPr>
-        <p:style>
-          <a:lnRef idx="2">
-            <a:schemeClr val="accent1"/>
-          </a:lnRef>
-          <a:fillRef idx="0">
-            <a:schemeClr val="accent1"/>
-          </a:fillRef>
-          <a:effectRef idx="1">
-            <a:schemeClr val="accent1"/>
-          </a:effectRef>
-          <a:fontRef idx="minor">
-            <a:schemeClr val="tx1"/>
-          </a:fontRef>
-        </p:style>
-      </p:cxnSp>
-      <p:sp>
-        <p:nvSpPr>
-          <p:cNvPr id="129" name="TextBox 128"/>
+              <a:rPr sz="1050" b="0">
+                <a:solidFill>
+                  <a:srgbClr val="1A1A1A"/>
+                </a:solidFill>
+                <a:latin typeface="SamsungOneKorean"/>
+                <a:ea typeface="SamsungOneKorean"/>
+                <a:cs typeface="SamsungOneKorean"/>
+              </a:rPr>
+              <a:t>소모전 무효, 좌표 재설정</a:t>
+            </a:r>
+          </a:p>
+        </p:txBody>
+      </p:sp>
+      <p:sp>
+        <p:nvSpPr>
+          <p:cNvPr id="128" name="TextBox 127"/>
           <p:cNvSpPr txBox="1"/>
           <p:nvPr/>
         </p:nvSpPr>
         <p:spPr>
           <a:xfrm>
-            <a:off x="7379208" y="2345436"/>
-            <a:ext cx="1078992" cy="137160"/>
+            <a:off x="7671633" y="4631436"/>
+            <a:ext cx="1999427" cy="155448"/>
           </a:xfrm>
           <a:prstGeom prst="rect">
             <a:avLst/>
@@ -8731,7 +8828,7 @@
           <a:noFill/>
         </p:spPr>
         <p:txBody>
-          <a:bodyPr wrap="none" anchor="t" lIns="0" rIns="0" tIns="0" bIns="0">
+          <a:bodyPr wrap="square" anchor="t" lIns="0" rIns="0" tIns="0" bIns="0">
             <a:spAutoFit/>
           </a:bodyPr>
           <a:lstStyle/>
@@ -8742,73 +8839,40 @@
               </a:lnSpc>
             </a:pPr>
             <a:r>
-              <a:rPr sz="1000" b="0">
-                <a:solidFill>
-                  <a:srgbClr val="555555"/>
-                </a:solidFill>
-                <a:latin typeface="SamsungOneKorean"/>
-                <a:ea typeface="SamsungOneKorean"/>
-                <a:cs typeface="SamsungOneKorean"/>
-              </a:rPr>
-              <a:t>HBM</a:t>
-            </a:r>
-          </a:p>
-        </p:txBody>
-      </p:sp>
-      <p:sp>
-        <p:nvSpPr>
-          <p:cNvPr id="130" name="Rectangle 129"/>
-          <p:cNvSpPr/>
-          <p:nvPr/>
-        </p:nvSpPr>
-        <p:spPr>
-          <a:xfrm>
-            <a:off x="8677656" y="2360980"/>
-            <a:ext cx="105156" cy="105156"/>
-          </a:xfrm>
-          <a:prstGeom prst="rect">
-            <a:avLst/>
-          </a:prstGeom>
-          <a:solidFill>
-            <a:srgbClr val="00A651"/>
-          </a:solidFill>
-          <a:ln>
-            <a:noFill/>
-          </a:ln>
-          <a:effectLst/>
-        </p:spPr>
-        <p:style>
-          <a:lnRef idx="1">
-            <a:schemeClr val="accent1"/>
-          </a:lnRef>
-          <a:fillRef idx="3">
-            <a:schemeClr val="accent1"/>
-          </a:fillRef>
-          <a:effectRef idx="2">
-            <a:schemeClr val="accent1"/>
-          </a:effectRef>
-          <a:fontRef idx="minor">
-            <a:schemeClr val="lt1"/>
-          </a:fontRef>
-        </p:style>
-        <p:txBody>
-          <a:bodyPr rtlCol="0" anchor="ctr"/>
-          <a:lstStyle/>
-          <a:p>
-            <a:pPr algn="ctr"/>
-          </a:p>
-        </p:txBody>
-      </p:sp>
-      <p:sp>
-        <p:nvSpPr>
-          <p:cNvPr id="131" name="TextBox 130"/>
+              <a:rPr sz="1000" b="1">
+                <a:solidFill>
+                  <a:srgbClr val="1428A0"/>
+                </a:solidFill>
+                <a:latin typeface="SamsungOneKorean"/>
+                <a:ea typeface="SamsungOneKorean"/>
+                <a:cs typeface="SamsungOneKorean"/>
+              </a:rPr>
+              <a:t>살리는 곳  </a:t>
+            </a:r>
+            <a:r>
+              <a:rPr sz="1050" b="1">
+                <a:solidFill>
+                  <a:srgbClr val="1428A0"/>
+                </a:solidFill>
+                <a:latin typeface="SamsungOneKorean"/>
+                <a:ea typeface="SamsungOneKorean"/>
+                <a:cs typeface="SamsungOneKorean"/>
+              </a:rPr>
+              <a:t>S3</a:t>
+            </a:r>
+          </a:p>
+        </p:txBody>
+      </p:sp>
+      <p:sp>
+        <p:nvSpPr>
+          <p:cNvPr id="129" name="TextBox 128"/>
           <p:cNvSpPr txBox="1"/>
           <p:nvPr/>
         </p:nvSpPr>
         <p:spPr>
           <a:xfrm>
-            <a:off x="8842248" y="2345436"/>
-            <a:ext cx="566928" cy="137160"/>
+            <a:off x="7671633" y="4814316"/>
+            <a:ext cx="1999427" cy="164592"/>
           </a:xfrm>
           <a:prstGeom prst="rect">
             <a:avLst/>
@@ -8816,7 +8880,7 @@
           <a:noFill/>
         </p:spPr>
         <p:txBody>
-          <a:bodyPr wrap="none" anchor="t" lIns="0" rIns="0" tIns="0" bIns="0">
+          <a:bodyPr wrap="square" anchor="t" lIns="0" rIns="0" tIns="0" bIns="0">
             <a:spAutoFit/>
           </a:bodyPr>
           <a:lstStyle/>
@@ -8827,29 +8891,29 @@
               </a:lnSpc>
             </a:pPr>
             <a:r>
-              <a:rPr sz="1000" b="1">
-                <a:solidFill>
-                  <a:srgbClr val="00A651"/>
-                </a:solidFill>
-                <a:latin typeface="SamsungOneKorean"/>
-                <a:ea typeface="SamsungOneKorean"/>
-                <a:cs typeface="SamsungOneKorean"/>
-              </a:rPr>
-              <a:t>방어</a:t>
-            </a:r>
-          </a:p>
-        </p:txBody>
-      </p:sp>
-      <p:sp>
-        <p:nvSpPr>
-          <p:cNvPr id="132" name="TextBox 131"/>
+              <a:rPr sz="1050" b="0">
+                <a:solidFill>
+                  <a:srgbClr val="1A1A1A"/>
+                </a:solidFill>
+                <a:latin typeface="SamsungOneKorean"/>
+                <a:ea typeface="SamsungOneKorean"/>
+                <a:cs typeface="SamsungOneKorean"/>
+              </a:rPr>
+              <a:t>라인을 옮겨 태우는 전환력</a:t>
+            </a:r>
+          </a:p>
+        </p:txBody>
+      </p:sp>
+      <p:sp>
+        <p:nvSpPr>
+          <p:cNvPr id="130" name="TextBox 129"/>
           <p:cNvSpPr txBox="1"/>
           <p:nvPr/>
         </p:nvSpPr>
         <p:spPr>
           <a:xfrm>
-            <a:off x="7379208" y="2499055"/>
-            <a:ext cx="1078992" cy="137160"/>
+            <a:off x="7671633" y="5143500"/>
+            <a:ext cx="1999427" cy="146304"/>
           </a:xfrm>
           <a:prstGeom prst="rect">
             <a:avLst/>
@@ -8857,7 +8921,7 @@
           <a:noFill/>
         </p:spPr>
         <p:txBody>
-          <a:bodyPr wrap="none" anchor="t" lIns="0" rIns="0" tIns="0" bIns="0">
+          <a:bodyPr wrap="square" anchor="t" lIns="0" rIns="0" tIns="0" bIns="0">
             <a:spAutoFit/>
           </a:bodyPr>
           <a:lstStyle/>
@@ -8868,7 +8932,7 @@
               </a:lnSpc>
             </a:pPr>
             <a:r>
-              <a:rPr sz="1000" b="0">
+              <a:rPr sz="1000" b="1">
                 <a:solidFill>
                   <a:srgbClr val="555555"/>
                 </a:solidFill>
@@ -8876,703 +8940,21 @@
                 <a:ea typeface="SamsungOneKorean"/>
                 <a:cs typeface="SamsungOneKorean"/>
               </a:rPr>
-              <a:t>서버 DRAM</a:t>
-            </a:r>
-          </a:p>
-        </p:txBody>
-      </p:sp>
-      <p:sp>
-        <p:nvSpPr>
-          <p:cNvPr id="133" name="Rectangle 132"/>
+              <a:t>전략적 중요 분야</a:t>
+            </a:r>
+          </a:p>
+        </p:txBody>
+      </p:sp>
+      <p:sp>
+        <p:nvSpPr>
+          <p:cNvPr id="131" name="Rounded Rectangle 130"/>
           <p:cNvSpPr/>
           <p:nvPr/>
         </p:nvSpPr>
         <p:spPr>
           <a:xfrm>
-            <a:off x="8677656" y="2514600"/>
-            <a:ext cx="105156" cy="105156"/>
-          </a:xfrm>
-          <a:prstGeom prst="rect">
-            <a:avLst/>
-          </a:prstGeom>
-          <a:solidFill>
-            <a:srgbClr val="D9D9D9"/>
-          </a:solidFill>
-          <a:ln>
-            <a:noFill/>
-          </a:ln>
-          <a:effectLst/>
-        </p:spPr>
-        <p:style>
-          <a:lnRef idx="1">
-            <a:schemeClr val="accent1"/>
-          </a:lnRef>
-          <a:fillRef idx="3">
-            <a:schemeClr val="accent1"/>
-          </a:fillRef>
-          <a:effectRef idx="2">
-            <a:schemeClr val="accent1"/>
-          </a:effectRef>
-          <a:fontRef idx="minor">
-            <a:schemeClr val="lt1"/>
-          </a:fontRef>
-        </p:style>
-        <p:txBody>
-          <a:bodyPr rtlCol="0" anchor="ctr"/>
-          <a:lstStyle/>
-          <a:p>
-            <a:pPr algn="ctr"/>
-          </a:p>
-        </p:txBody>
-      </p:sp>
-      <p:sp>
-        <p:nvSpPr>
-          <p:cNvPr id="134" name="TextBox 133"/>
-          <p:cNvSpPr txBox="1"/>
-          <p:nvPr/>
-        </p:nvSpPr>
-        <p:spPr>
-          <a:xfrm>
-            <a:off x="8842248" y="2499055"/>
-            <a:ext cx="566928" cy="137160"/>
-          </a:xfrm>
-          <a:prstGeom prst="rect">
-            <a:avLst/>
-          </a:prstGeom>
-          <a:noFill/>
-        </p:spPr>
-        <p:txBody>
-          <a:bodyPr wrap="none" anchor="t" lIns="0" rIns="0" tIns="0" bIns="0">
-            <a:spAutoFit/>
-          </a:bodyPr>
-          <a:lstStyle/>
-          <a:p>
-            <a:pPr algn="l">
-              <a:lnSpc>
-                <a:spcPct val="100000"/>
-              </a:lnSpc>
-            </a:pPr>
-            <a:r>
-              <a:rPr sz="1000" b="1">
-                <a:solidFill>
-                  <a:srgbClr val="555555"/>
-                </a:solidFill>
-                <a:latin typeface="SamsungOneKorean"/>
-                <a:ea typeface="SamsungOneKorean"/>
-                <a:cs typeface="SamsungOneKorean"/>
-              </a:rPr>
-              <a:t>제한</a:t>
-            </a:r>
-          </a:p>
-        </p:txBody>
-      </p:sp>
-      <p:sp>
-        <p:nvSpPr>
-          <p:cNvPr id="135" name="TextBox 134"/>
-          <p:cNvSpPr txBox="1"/>
-          <p:nvPr/>
-        </p:nvSpPr>
-        <p:spPr>
-          <a:xfrm>
-            <a:off x="7379208" y="2652674"/>
-            <a:ext cx="1078992" cy="137160"/>
-          </a:xfrm>
-          <a:prstGeom prst="rect">
-            <a:avLst/>
-          </a:prstGeom>
-          <a:noFill/>
-        </p:spPr>
-        <p:txBody>
-          <a:bodyPr wrap="none" anchor="t" lIns="0" rIns="0" tIns="0" bIns="0">
-            <a:spAutoFit/>
-          </a:bodyPr>
-          <a:lstStyle/>
-          <a:p>
-            <a:pPr algn="l">
-              <a:lnSpc>
-                <a:spcPct val="100000"/>
-              </a:lnSpc>
-            </a:pPr>
-            <a:r>
-              <a:rPr sz="1000" b="0">
-                <a:solidFill>
-                  <a:srgbClr val="555555"/>
-                </a:solidFill>
-                <a:latin typeface="SamsungOneKorean"/>
-                <a:ea typeface="SamsungOneKorean"/>
-                <a:cs typeface="SamsungOneKorean"/>
-              </a:rPr>
-              <a:t>범용·레거시</a:t>
-            </a:r>
-          </a:p>
-        </p:txBody>
-      </p:sp>
-      <p:sp>
-        <p:nvSpPr>
-          <p:cNvPr id="136" name="Rectangle 135"/>
-          <p:cNvSpPr/>
-          <p:nvPr/>
-        </p:nvSpPr>
-        <p:spPr>
-          <a:xfrm>
-            <a:off x="8677656" y="2668219"/>
-            <a:ext cx="105156" cy="105156"/>
-          </a:xfrm>
-          <a:prstGeom prst="rect">
-            <a:avLst/>
-          </a:prstGeom>
-          <a:solidFill>
-            <a:srgbClr val="D93025"/>
-          </a:solidFill>
-          <a:ln>
-            <a:noFill/>
-          </a:ln>
-          <a:effectLst/>
-        </p:spPr>
-        <p:style>
-          <a:lnRef idx="1">
-            <a:schemeClr val="accent1"/>
-          </a:lnRef>
-          <a:fillRef idx="3">
-            <a:schemeClr val="accent1"/>
-          </a:fillRef>
-          <a:effectRef idx="2">
-            <a:schemeClr val="accent1"/>
-          </a:effectRef>
-          <a:fontRef idx="minor">
-            <a:schemeClr val="lt1"/>
-          </a:fontRef>
-        </p:style>
-        <p:txBody>
-          <a:bodyPr rtlCol="0" anchor="ctr"/>
-          <a:lstStyle/>
-          <a:p>
-            <a:pPr algn="ctr"/>
-          </a:p>
-        </p:txBody>
-      </p:sp>
-      <p:sp>
-        <p:nvSpPr>
-          <p:cNvPr id="137" name="TextBox 136"/>
-          <p:cNvSpPr txBox="1"/>
-          <p:nvPr/>
-        </p:nvSpPr>
-        <p:spPr>
-          <a:xfrm>
-            <a:off x="8842248" y="2652674"/>
-            <a:ext cx="566928" cy="137160"/>
-          </a:xfrm>
-          <a:prstGeom prst="rect">
-            <a:avLst/>
-          </a:prstGeom>
-          <a:noFill/>
-        </p:spPr>
-        <p:txBody>
-          <a:bodyPr wrap="none" anchor="t" lIns="0" rIns="0" tIns="0" bIns="0">
-            <a:spAutoFit/>
-          </a:bodyPr>
-          <a:lstStyle/>
-          <a:p>
-            <a:pPr algn="l">
-              <a:lnSpc>
-                <a:spcPct val="100000"/>
-              </a:lnSpc>
-            </a:pPr>
-            <a:r>
-              <a:rPr sz="1000" b="1">
-                <a:solidFill>
-                  <a:srgbClr val="D93025"/>
-                </a:solidFill>
-                <a:latin typeface="SamsungOneKorean"/>
-                <a:ea typeface="SamsungOneKorean"/>
-                <a:cs typeface="SamsungOneKorean"/>
-              </a:rPr>
-              <a:t>직격</a:t>
-            </a:r>
-          </a:p>
-        </p:txBody>
-      </p:sp>
-      <p:sp>
-        <p:nvSpPr>
-          <p:cNvPr id="138" name="TextBox 137"/>
-          <p:cNvSpPr txBox="1"/>
-          <p:nvPr/>
-        </p:nvSpPr>
-        <p:spPr>
-          <a:xfrm>
-            <a:off x="7379208" y="2806293"/>
-            <a:ext cx="1078992" cy="137160"/>
-          </a:xfrm>
-          <a:prstGeom prst="rect">
-            <a:avLst/>
-          </a:prstGeom>
-          <a:noFill/>
-        </p:spPr>
-        <p:txBody>
-          <a:bodyPr wrap="none" anchor="t" lIns="0" rIns="0" tIns="0" bIns="0">
-            <a:spAutoFit/>
-          </a:bodyPr>
-          <a:lstStyle/>
-          <a:p>
-            <a:pPr algn="l">
-              <a:lnSpc>
-                <a:spcPct val="100000"/>
-              </a:lnSpc>
-            </a:pPr>
-            <a:r>
-              <a:rPr sz="1000" b="0">
-                <a:solidFill>
-                  <a:srgbClr val="555555"/>
-                </a:solidFill>
-                <a:latin typeface="SamsungOneKorean"/>
-                <a:ea typeface="SamsungOneKorean"/>
-                <a:cs typeface="SamsungOneKorean"/>
-              </a:rPr>
-              <a:t>NAND·SSD</a:t>
-            </a:r>
-          </a:p>
-        </p:txBody>
-      </p:sp>
-      <p:sp>
-        <p:nvSpPr>
-          <p:cNvPr id="139" name="Rectangle 138"/>
-          <p:cNvSpPr/>
-          <p:nvPr/>
-        </p:nvSpPr>
-        <p:spPr>
-          <a:xfrm>
-            <a:off x="8677656" y="2821838"/>
-            <a:ext cx="105156" cy="105156"/>
-          </a:xfrm>
-          <a:prstGeom prst="rect">
-            <a:avLst/>
-          </a:prstGeom>
-          <a:solidFill>
-            <a:srgbClr val="D93025"/>
-          </a:solidFill>
-          <a:ln>
-            <a:noFill/>
-          </a:ln>
-          <a:effectLst/>
-        </p:spPr>
-        <p:style>
-          <a:lnRef idx="1">
-            <a:schemeClr val="accent1"/>
-          </a:lnRef>
-          <a:fillRef idx="3">
-            <a:schemeClr val="accent1"/>
-          </a:fillRef>
-          <a:effectRef idx="2">
-            <a:schemeClr val="accent1"/>
-          </a:effectRef>
-          <a:fontRef idx="minor">
-            <a:schemeClr val="lt1"/>
-          </a:fontRef>
-        </p:style>
-        <p:txBody>
-          <a:bodyPr rtlCol="0" anchor="ctr"/>
-          <a:lstStyle/>
-          <a:p>
-            <a:pPr algn="ctr"/>
-          </a:p>
-        </p:txBody>
-      </p:sp>
-      <p:sp>
-        <p:nvSpPr>
-          <p:cNvPr id="140" name="TextBox 139"/>
-          <p:cNvSpPr txBox="1"/>
-          <p:nvPr/>
-        </p:nvSpPr>
-        <p:spPr>
-          <a:xfrm>
-            <a:off x="8842248" y="2806293"/>
-            <a:ext cx="566928" cy="137160"/>
-          </a:xfrm>
-          <a:prstGeom prst="rect">
-            <a:avLst/>
-          </a:prstGeom>
-          <a:noFill/>
-        </p:spPr>
-        <p:txBody>
-          <a:bodyPr wrap="none" anchor="t" lIns="0" rIns="0" tIns="0" bIns="0">
-            <a:spAutoFit/>
-          </a:bodyPr>
-          <a:lstStyle/>
-          <a:p>
-            <a:pPr algn="l">
-              <a:lnSpc>
-                <a:spcPct val="100000"/>
-              </a:lnSpc>
-            </a:pPr>
-            <a:r>
-              <a:rPr sz="1000" b="1">
-                <a:solidFill>
-                  <a:srgbClr val="D93025"/>
-                </a:solidFill>
-                <a:latin typeface="SamsungOneKorean"/>
-                <a:ea typeface="SamsungOneKorean"/>
-                <a:cs typeface="SamsungOneKorean"/>
-              </a:rPr>
-              <a:t>직격</a:t>
-            </a:r>
-          </a:p>
-        </p:txBody>
-      </p:sp>
-      <p:cxnSp>
-        <p:nvCxnSpPr>
-          <p:cNvPr id="141" name="Connector 140"/>
-          <p:cNvCxnSpPr/>
-          <p:nvPr/>
-        </p:nvCxnSpPr>
-        <p:spPr>
-          <a:xfrm>
-            <a:off x="7379208" y="3010204"/>
-            <a:ext cx="2006193" cy="0"/>
-          </a:xfrm>
-          <a:prstGeom prst="line">
-            <a:avLst/>
-          </a:prstGeom>
-          <a:ln w="6350">
-            <a:solidFill>
-              <a:srgbClr val="D9D9D9"/>
-            </a:solidFill>
-          </a:ln>
-          <a:effectLst/>
-        </p:spPr>
-        <p:style>
-          <a:lnRef idx="2">
-            <a:schemeClr val="accent1"/>
-          </a:lnRef>
-          <a:fillRef idx="0">
-            <a:schemeClr val="accent1"/>
-          </a:fillRef>
-          <a:effectRef idx="1">
-            <a:schemeClr val="accent1"/>
-          </a:effectRef>
-          <a:fontRef idx="minor">
-            <a:schemeClr val="tx1"/>
-          </a:fontRef>
-        </p:style>
-      </p:cxnSp>
-      <p:sp>
-        <p:nvSpPr>
-          <p:cNvPr id="142" name="TextBox 141"/>
-          <p:cNvSpPr txBox="1"/>
-          <p:nvPr/>
-        </p:nvSpPr>
-        <p:spPr>
-          <a:xfrm>
-            <a:off x="7379208" y="3065068"/>
-            <a:ext cx="2006193" cy="146304"/>
-          </a:xfrm>
-          <a:prstGeom prst="rect">
-            <a:avLst/>
-          </a:prstGeom>
-          <a:noFill/>
-        </p:spPr>
-        <p:txBody>
-          <a:bodyPr wrap="square" anchor="t" lIns="0" rIns="0" tIns="0" bIns="0">
-            <a:spAutoFit/>
-          </a:bodyPr>
-          <a:lstStyle/>
-          <a:p>
-            <a:pPr algn="l">
-              <a:lnSpc>
-                <a:spcPct val="100000"/>
-              </a:lnSpc>
-            </a:pPr>
-            <a:r>
-              <a:rPr sz="1000" b="1">
-                <a:solidFill>
-                  <a:srgbClr val="1428A0"/>
-                </a:solidFill>
-                <a:latin typeface="SamsungOneKorean"/>
-                <a:ea typeface="SamsungOneKorean"/>
-                <a:cs typeface="SamsungOneKorean"/>
-              </a:rPr>
-              <a:t>무엇이 갈리나</a:t>
-            </a:r>
-          </a:p>
-        </p:txBody>
-      </p:sp>
-      <p:sp>
-        <p:nvSpPr>
-          <p:cNvPr id="143" name="TextBox 142"/>
-          <p:cNvSpPr txBox="1"/>
-          <p:nvPr/>
-        </p:nvSpPr>
-        <p:spPr>
-          <a:xfrm>
-            <a:off x="7379208" y="3225088"/>
-            <a:ext cx="2006193" cy="457200"/>
-          </a:xfrm>
-          <a:prstGeom prst="rect">
-            <a:avLst/>
-          </a:prstGeom>
-          <a:noFill/>
-        </p:spPr>
-        <p:txBody>
-          <a:bodyPr wrap="square" anchor="t" lIns="0" rIns="0" tIns="0" bIns="0">
-            <a:spAutoFit/>
-          </a:bodyPr>
-          <a:lstStyle/>
-          <a:p>
-            <a:pPr algn="l">
-              <a:lnSpc>
-                <a:spcPct val="106000"/>
-              </a:lnSpc>
-            </a:pPr>
-            <a:r>
-              <a:rPr sz="1000" b="0">
-                <a:solidFill>
-                  <a:srgbClr val="1A1A1A"/>
-                </a:solidFill>
-                <a:latin typeface="SamsungOneKorean"/>
-                <a:ea typeface="SamsungOneKorean"/>
-                <a:cs typeface="SamsungOneKorean"/>
-              </a:rPr>
-              <a:t>하단 가격은 돌아오지 않는다. 버티기가 아니라 옮기기의 문제다</a:t>
-            </a:r>
-          </a:p>
-        </p:txBody>
-      </p:sp>
-      <p:sp>
-        <p:nvSpPr>
-          <p:cNvPr id="144" name="TextBox 143"/>
-          <p:cNvSpPr txBox="1"/>
-          <p:nvPr/>
-        </p:nvSpPr>
-        <p:spPr>
-          <a:xfrm>
-            <a:off x="7379208" y="3741724"/>
-            <a:ext cx="2006193" cy="146304"/>
-          </a:xfrm>
-          <a:prstGeom prst="rect">
-            <a:avLst/>
-          </a:prstGeom>
-          <a:noFill/>
-        </p:spPr>
-        <p:txBody>
-          <a:bodyPr wrap="square" anchor="t" lIns="0" rIns="0" tIns="0" bIns="0">
-            <a:spAutoFit/>
-          </a:bodyPr>
-          <a:lstStyle/>
-          <a:p>
-            <a:pPr algn="l">
-              <a:lnSpc>
-                <a:spcPct val="100000"/>
-              </a:lnSpc>
-            </a:pPr>
-            <a:r>
-              <a:rPr sz="1000" b="1">
-                <a:solidFill>
-                  <a:srgbClr val="D93025"/>
-                </a:solidFill>
-                <a:latin typeface="SamsungOneKorean"/>
-                <a:ea typeface="SamsungOneKorean"/>
-                <a:cs typeface="SamsungOneKorean"/>
-              </a:rPr>
-              <a:t>찔리는 곳 </a:t>
-            </a:r>
-            <a:r>
-              <a:rPr sz="1000" b="1">
-                <a:solidFill>
-                  <a:srgbClr val="D93025"/>
-                </a:solidFill>
-                <a:latin typeface="SamsungOneKorean"/>
-                <a:ea typeface="SamsungOneKorean"/>
-                <a:cs typeface="SamsungOneKorean"/>
-              </a:rPr>
-              <a:t>W2·W4</a:t>
-            </a:r>
-          </a:p>
-        </p:txBody>
-      </p:sp>
-      <p:sp>
-        <p:nvSpPr>
-          <p:cNvPr id="145" name="TextBox 144"/>
-          <p:cNvSpPr txBox="1"/>
-          <p:nvPr/>
-        </p:nvSpPr>
-        <p:spPr>
-          <a:xfrm>
-            <a:off x="7379208" y="3901744"/>
-            <a:ext cx="2006193" cy="457200"/>
-          </a:xfrm>
-          <a:prstGeom prst="rect">
-            <a:avLst/>
-          </a:prstGeom>
-          <a:noFill/>
-        </p:spPr>
-        <p:txBody>
-          <a:bodyPr wrap="square" anchor="t" lIns="0" rIns="0" tIns="0" bIns="0">
-            <a:spAutoFit/>
-          </a:bodyPr>
-          <a:lstStyle/>
-          <a:p>
-            <a:pPr algn="l">
-              <a:lnSpc>
-                <a:spcPct val="106000"/>
-              </a:lnSpc>
-            </a:pPr>
-            <a:r>
-              <a:rPr sz="1000" b="0">
-                <a:solidFill>
-                  <a:srgbClr val="1A1A1A"/>
-                </a:solidFill>
-                <a:latin typeface="SamsungOneKorean"/>
-                <a:ea typeface="SamsungOneKorean"/>
-                <a:cs typeface="SamsungOneKorean"/>
-              </a:rPr>
-              <a:t>보조금 상대 체력전은 무효, 철수 결정은 지연된다. 원가 좌표를 CXMT 포함 4자 곡선으로 재설정</a:t>
-            </a:r>
-          </a:p>
-        </p:txBody>
-      </p:sp>
-      <p:sp>
-        <p:nvSpPr>
-          <p:cNvPr id="146" name="TextBox 145"/>
-          <p:cNvSpPr txBox="1"/>
-          <p:nvPr/>
-        </p:nvSpPr>
-        <p:spPr>
-          <a:xfrm>
-            <a:off x="7379208" y="4422952"/>
-            <a:ext cx="2006193" cy="146304"/>
-          </a:xfrm>
-          <a:prstGeom prst="rect">
-            <a:avLst/>
-          </a:prstGeom>
-          <a:noFill/>
-        </p:spPr>
-        <p:txBody>
-          <a:bodyPr wrap="square" anchor="t" lIns="0" rIns="0" tIns="0" bIns="0">
-            <a:spAutoFit/>
-          </a:bodyPr>
-          <a:lstStyle/>
-          <a:p>
-            <a:pPr algn="l">
-              <a:lnSpc>
-                <a:spcPct val="100000"/>
-              </a:lnSpc>
-            </a:pPr>
-            <a:r>
-              <a:rPr sz="1000" b="1">
-                <a:solidFill>
-                  <a:srgbClr val="1428A0"/>
-                </a:solidFill>
-                <a:latin typeface="SamsungOneKorean"/>
-                <a:ea typeface="SamsungOneKorean"/>
-                <a:cs typeface="SamsungOneKorean"/>
-              </a:rPr>
-              <a:t>살리는 곳 </a:t>
-            </a:r>
-            <a:r>
-              <a:rPr sz="1000" b="1">
-                <a:solidFill>
-                  <a:srgbClr val="1428A0"/>
-                </a:solidFill>
-                <a:latin typeface="SamsungOneKorean"/>
-                <a:ea typeface="SamsungOneKorean"/>
-                <a:cs typeface="SamsungOneKorean"/>
-              </a:rPr>
-              <a:t>S3</a:t>
-            </a:r>
-          </a:p>
-        </p:txBody>
-      </p:sp>
-      <p:sp>
-        <p:nvSpPr>
-          <p:cNvPr id="147" name="TextBox 146"/>
-          <p:cNvSpPr txBox="1"/>
-          <p:nvPr/>
-        </p:nvSpPr>
-        <p:spPr>
-          <a:xfrm>
-            <a:off x="7379208" y="4582972"/>
-            <a:ext cx="2006193" cy="457200"/>
-          </a:xfrm>
-          <a:prstGeom prst="rect">
-            <a:avLst/>
-          </a:prstGeom>
-          <a:noFill/>
-        </p:spPr>
-        <p:txBody>
-          <a:bodyPr wrap="square" anchor="t" lIns="0" rIns="0" tIns="0" bIns="0">
-            <a:spAutoFit/>
-          </a:bodyPr>
-          <a:lstStyle/>
-          <a:p>
-            <a:pPr algn="l">
-              <a:lnSpc>
-                <a:spcPct val="106000"/>
-              </a:lnSpc>
-            </a:pPr>
-            <a:r>
-              <a:rPr sz="1000" b="0">
-                <a:solidFill>
-                  <a:srgbClr val="1A1A1A"/>
-                </a:solidFill>
-                <a:latin typeface="SamsungOneKorean"/>
-                <a:ea typeface="SamsungOneKorean"/>
-                <a:cs typeface="SamsungOneKorean"/>
-              </a:rPr>
-              <a:t>전환 옵션 가치가 최대. 침식층을 지키지 말고 같은 라인으로 다른 것을 만드는 몸이 방어선</a:t>
-            </a:r>
-          </a:p>
-        </p:txBody>
-      </p:sp>
-      <p:sp>
-        <p:nvSpPr>
-          <p:cNvPr id="148" name="TextBox 147"/>
-          <p:cNvSpPr txBox="1"/>
-          <p:nvPr/>
-        </p:nvSpPr>
-        <p:spPr>
-          <a:xfrm>
-            <a:off x="7379208" y="5104180"/>
-            <a:ext cx="2006193" cy="146304"/>
-          </a:xfrm>
-          <a:prstGeom prst="rect">
-            <a:avLst/>
-          </a:prstGeom>
-          <a:noFill/>
-        </p:spPr>
-        <p:txBody>
-          <a:bodyPr wrap="square" anchor="t" lIns="0" rIns="0" tIns="0" bIns="0">
-            <a:spAutoFit/>
-          </a:bodyPr>
-          <a:lstStyle/>
-          <a:p>
-            <a:pPr algn="l">
-              <a:lnSpc>
-                <a:spcPct val="100000"/>
-              </a:lnSpc>
-            </a:pPr>
-            <a:r>
-              <a:rPr sz="1000" b="1">
-                <a:solidFill>
-                  <a:srgbClr val="555555"/>
-                </a:solidFill>
-                <a:latin typeface="SamsungOneKorean"/>
-                <a:ea typeface="SamsungOneKorean"/>
-                <a:cs typeface="SamsungOneKorean"/>
-              </a:rPr>
-              <a:t>전략적 중요 분야</a:t>
-            </a:r>
-          </a:p>
-        </p:txBody>
-      </p:sp>
-      <p:sp>
-        <p:nvSpPr>
-          <p:cNvPr id="149" name="Rounded Rectangle 148"/>
-          <p:cNvSpPr/>
-          <p:nvPr/>
-        </p:nvSpPr>
-        <p:spPr>
-          <a:xfrm>
-            <a:off x="7379208" y="5273344"/>
-            <a:ext cx="2006193" cy="173736"/>
+            <a:off x="7671633" y="5335524"/>
+            <a:ext cx="1999427" cy="192024"/>
           </a:xfrm>
           <a:prstGeom prst="roundRect">
             <a:avLst>
@@ -9613,14 +8995,14 @@
       </p:sp>
       <p:sp>
         <p:nvSpPr>
-          <p:cNvPr id="150" name="TextBox 149"/>
+          <p:cNvPr id="132" name="TextBox 131"/>
           <p:cNvSpPr txBox="1"/>
           <p:nvPr/>
         </p:nvSpPr>
         <p:spPr>
           <a:xfrm>
-            <a:off x="7443216" y="5293461"/>
-            <a:ext cx="1878177" cy="137160"/>
+            <a:off x="7671633" y="5367528"/>
+            <a:ext cx="1999427" cy="137160"/>
           </a:xfrm>
           <a:prstGeom prst="rect">
             <a:avLst/>
@@ -9647,21 +9029,21 @@
                 <a:ea typeface="SamsungOneKorean"/>
                 <a:cs typeface="SamsungOneKorean"/>
               </a:rPr>
-              <a:t>철수·전환 판단 체계</a:t>
-            </a:r>
-          </a:p>
-        </p:txBody>
-      </p:sp>
-      <p:sp>
-        <p:nvSpPr>
-          <p:cNvPr id="151" name="Rounded Rectangle 150"/>
+              <a:t>철수·전환 판단</a:t>
+            </a:r>
+          </a:p>
+        </p:txBody>
+      </p:sp>
+      <p:sp>
+        <p:nvSpPr>
+          <p:cNvPr id="133" name="Rounded Rectangle 132"/>
           <p:cNvSpPr/>
           <p:nvPr/>
         </p:nvSpPr>
         <p:spPr>
           <a:xfrm>
-            <a:off x="7379208" y="5479084"/>
-            <a:ext cx="2006193" cy="173736"/>
+            <a:off x="7671633" y="5568696"/>
+            <a:ext cx="1999427" cy="192024"/>
           </a:xfrm>
           <a:prstGeom prst="roundRect">
             <a:avLst>
@@ -9702,14 +9084,14 @@
       </p:sp>
       <p:sp>
         <p:nvSpPr>
-          <p:cNvPr id="152" name="TextBox 151"/>
+          <p:cNvPr id="134" name="TextBox 133"/>
           <p:cNvSpPr txBox="1"/>
           <p:nvPr/>
         </p:nvSpPr>
         <p:spPr>
           <a:xfrm>
-            <a:off x="7443216" y="5499201"/>
-            <a:ext cx="1878177" cy="137160"/>
+            <a:off x="7671633" y="5600700"/>
+            <a:ext cx="1999427" cy="137160"/>
           </a:xfrm>
           <a:prstGeom prst="rect">
             <a:avLst/>
@@ -9743,14 +9125,14 @@
       </p:sp>
       <p:sp>
         <p:nvSpPr>
-          <p:cNvPr id="153" name="Rounded Rectangle 152"/>
+          <p:cNvPr id="135" name="Rounded Rectangle 134"/>
           <p:cNvSpPr/>
           <p:nvPr/>
         </p:nvSpPr>
         <p:spPr>
           <a:xfrm>
-            <a:off x="7379208" y="5684824"/>
-            <a:ext cx="2006193" cy="173736"/>
+            <a:off x="7671633" y="5801868"/>
+            <a:ext cx="1999427" cy="192024"/>
           </a:xfrm>
           <a:prstGeom prst="roundRect">
             <a:avLst>
@@ -9791,14 +9173,14 @@
       </p:sp>
       <p:sp>
         <p:nvSpPr>
-          <p:cNvPr id="154" name="TextBox 153"/>
+          <p:cNvPr id="136" name="TextBox 135"/>
           <p:cNvSpPr txBox="1"/>
           <p:nvPr/>
         </p:nvSpPr>
         <p:spPr>
           <a:xfrm>
-            <a:off x="7443216" y="5704941"/>
-            <a:ext cx="1878177" cy="137160"/>
+            <a:off x="7671633" y="5833872"/>
+            <a:ext cx="1999427" cy="137160"/>
           </a:xfrm>
           <a:prstGeom prst="rect">
             <a:avLst/>
@@ -9832,62 +9214,14 @@
       </p:sp>
       <p:sp>
         <p:nvSpPr>
-          <p:cNvPr id="155" name="Rounded Rectangle 154"/>
+          <p:cNvPr id="137" name="Rectangle 136"/>
           <p:cNvSpPr/>
           <p:nvPr/>
         </p:nvSpPr>
         <p:spPr>
           <a:xfrm>
-            <a:off x="9573768" y="1783080"/>
-            <a:ext cx="2189073" cy="4224528"/>
-          </a:xfrm>
-          <a:prstGeom prst="roundRect">
-            <a:avLst>
-              <a:gd name="adj" fmla="val 2800"/>
-            </a:avLst>
-          </a:prstGeom>
-          <a:solidFill>
-            <a:srgbClr val="FFFFFF"/>
-          </a:solidFill>
-          <a:ln w="7620">
-            <a:solidFill>
-              <a:srgbClr val="D9D9D9"/>
-            </a:solidFill>
-          </a:ln>
-          <a:effectLst/>
-        </p:spPr>
-        <p:style>
-          <a:lnRef idx="1">
-            <a:schemeClr val="accent1"/>
-          </a:lnRef>
-          <a:fillRef idx="3">
-            <a:schemeClr val="accent1"/>
-          </a:fillRef>
-          <a:effectRef idx="2">
-            <a:schemeClr val="accent1"/>
-          </a:effectRef>
-          <a:fontRef idx="minor">
-            <a:schemeClr val="lt1"/>
-          </a:fontRef>
-        </p:style>
-        <p:txBody>
-          <a:bodyPr rtlCol="0" anchor="ctr"/>
-          <a:lstStyle/>
-          <a:p>
-            <a:pPr algn="ctr"/>
-          </a:p>
-        </p:txBody>
-      </p:sp>
-      <p:sp>
-        <p:nvSpPr>
-          <p:cNvPr id="156" name="Rectangle 155"/>
-          <p:cNvSpPr/>
-          <p:nvPr/>
-        </p:nvSpPr>
-        <p:spPr>
-          <a:xfrm>
-            <a:off x="9573768" y="1783080"/>
-            <a:ext cx="2189073" cy="41148"/>
+            <a:off x="9762500" y="3515868"/>
+            <a:ext cx="32004" cy="475488"/>
           </a:xfrm>
           <a:prstGeom prst="rect">
             <a:avLst/>
@@ -9924,14 +9258,73 @@
       </p:sp>
       <p:sp>
         <p:nvSpPr>
-          <p:cNvPr id="157" name="TextBox 156"/>
+          <p:cNvPr id="138" name="TextBox 137"/>
           <p:cNvSpPr txBox="1"/>
           <p:nvPr/>
         </p:nvSpPr>
         <p:spPr>
           <a:xfrm>
-            <a:off x="9665208" y="1874519"/>
-            <a:ext cx="2006193" cy="182880"/>
+            <a:off x="9881372" y="3525011"/>
+            <a:ext cx="1880555" cy="475488"/>
+          </a:xfrm>
+          <a:prstGeom prst="rect">
+            <a:avLst/>
+          </a:prstGeom>
+          <a:noFill/>
+        </p:spPr>
+        <p:txBody>
+          <a:bodyPr wrap="square" anchor="t" lIns="0" rIns="0" tIns="0" bIns="0">
+            <a:spAutoFit/>
+          </a:bodyPr>
+          <a:lstStyle/>
+          <a:p>
+            <a:pPr algn="l">
+              <a:lnSpc>
+                <a:spcPct val="112000"/>
+              </a:lnSpc>
+            </a:pPr>
+            <a:r>
+              <a:rPr sz="1150" b="1">
+                <a:solidFill>
+                  <a:srgbClr val="1A1A1A"/>
+                </a:solidFill>
+                <a:latin typeface="SamsungOneKorean"/>
+                <a:ea typeface="SamsungOneKorean"/>
+                <a:cs typeface="SamsungOneKorean"/>
+              </a:rPr>
+              <a:t>미리 그 자리에 있던</a:t>
+            </a:r>
+          </a:p>
+          <a:p>
+            <a:pPr algn="l">
+              <a:lnSpc>
+                <a:spcPct val="112000"/>
+              </a:lnSpc>
+            </a:pPr>
+            <a:r>
+              <a:rPr sz="1150" b="1">
+                <a:solidFill>
+                  <a:srgbClr val="1A1A1A"/>
+                </a:solidFill>
+                <a:latin typeface="SamsungOneKorean"/>
+                <a:ea typeface="SamsungOneKorean"/>
+                <a:cs typeface="SamsungOneKorean"/>
+              </a:rPr>
+              <a:t>것만 유효하다</a:t>
+            </a:r>
+          </a:p>
+        </p:txBody>
+      </p:sp>
+      <p:sp>
+        <p:nvSpPr>
+          <p:cNvPr id="139" name="TextBox 138"/>
+          <p:cNvSpPr txBox="1"/>
+          <p:nvPr/>
+        </p:nvSpPr>
+        <p:spPr>
+          <a:xfrm>
+            <a:off x="9762500" y="4155948"/>
+            <a:ext cx="1999427" cy="155448"/>
           </a:xfrm>
           <a:prstGeom prst="rect">
             <a:avLst/>
@@ -9950,40 +9343,40 @@
               </a:lnSpc>
             </a:pPr>
             <a:r>
-              <a:rPr sz="1250" b="1">
-                <a:solidFill>
-                  <a:srgbClr val="1428A0"/>
-                </a:solidFill>
-                <a:latin typeface="SamsungOneKorean"/>
-                <a:ea typeface="SamsungOneKorean"/>
-                <a:cs typeface="SamsungOneKorean"/>
-              </a:rPr>
-              <a:t>DT-E  </a:t>
-            </a:r>
-            <a:r>
-              <a:rPr sz="1250" b="1">
-                <a:solidFill>
-                  <a:srgbClr val="1A1A1A"/>
-                </a:solidFill>
-                <a:latin typeface="SamsungOneKorean"/>
-                <a:ea typeface="SamsungOneKorean"/>
-                <a:cs typeface="SamsungOneKorean"/>
-              </a:rPr>
-              <a:t>판 갈이</a:t>
-            </a:r>
-          </a:p>
-        </p:txBody>
-      </p:sp>
-      <p:sp>
-        <p:nvSpPr>
-          <p:cNvPr id="158" name="TextBox 157"/>
+              <a:rPr sz="1000" b="1">
+                <a:solidFill>
+                  <a:srgbClr val="D93025"/>
+                </a:solidFill>
+                <a:latin typeface="SamsungOneKorean"/>
+                <a:ea typeface="SamsungOneKorean"/>
+                <a:cs typeface="SamsungOneKorean"/>
+              </a:rPr>
+              <a:t>찔리는 곳  </a:t>
+            </a:r>
+            <a:r>
+              <a:rPr sz="1050" b="1">
+                <a:solidFill>
+                  <a:srgbClr val="D93025"/>
+                </a:solidFill>
+                <a:latin typeface="SamsungOneKorean"/>
+                <a:ea typeface="SamsungOneKorean"/>
+                <a:cs typeface="SamsungOneKorean"/>
+              </a:rPr>
+              <a:t>W4·W1</a:t>
+            </a:r>
+          </a:p>
+        </p:txBody>
+      </p:sp>
+      <p:sp>
+        <p:nvSpPr>
+          <p:cNvPr id="140" name="TextBox 139"/>
           <p:cNvSpPr txBox="1"/>
           <p:nvPr/>
         </p:nvSpPr>
         <p:spPr>
           <a:xfrm>
-            <a:off x="9665208" y="2089404"/>
-            <a:ext cx="2006193" cy="146304"/>
+            <a:off x="9762500" y="4338828"/>
+            <a:ext cx="1999427" cy="164592"/>
           </a:xfrm>
           <a:prstGeom prst="rect">
             <a:avLst/>
@@ -10002,65 +9395,29 @@
               </a:lnSpc>
             </a:pPr>
             <a:r>
-              <a:rPr sz="1000" b="0">
-                <a:solidFill>
-                  <a:srgbClr val="555555"/>
-                </a:solidFill>
-                <a:latin typeface="SamsungOneKorean"/>
-                <a:ea typeface="SamsungOneKorean"/>
-                <a:cs typeface="SamsungOneKorean"/>
-              </a:rPr>
-              <a:t>전환발 · 와일드카드</a:t>
-            </a:r>
-          </a:p>
-        </p:txBody>
-      </p:sp>
-      <p:cxnSp>
-        <p:nvCxnSpPr>
-          <p:cNvPr id="159" name="Connector 158"/>
-          <p:cNvCxnSpPr/>
-          <p:nvPr/>
-        </p:nvCxnSpPr>
-        <p:spPr>
-          <a:xfrm>
-            <a:off x="9665208" y="2281428"/>
-            <a:ext cx="2006193" cy="0"/>
-          </a:xfrm>
-          <a:prstGeom prst="line">
-            <a:avLst/>
-          </a:prstGeom>
-          <a:ln w="6350">
-            <a:solidFill>
-              <a:srgbClr val="D9D9D9"/>
-            </a:solidFill>
-          </a:ln>
-          <a:effectLst/>
-        </p:spPr>
-        <p:style>
-          <a:lnRef idx="2">
-            <a:schemeClr val="accent1"/>
-          </a:lnRef>
-          <a:fillRef idx="0">
-            <a:schemeClr val="accent1"/>
-          </a:fillRef>
-          <a:effectRef idx="1">
-            <a:schemeClr val="accent1"/>
-          </a:effectRef>
-          <a:fontRef idx="minor">
-            <a:schemeClr val="tx1"/>
-          </a:fontRef>
-        </p:style>
-      </p:cxnSp>
-      <p:sp>
-        <p:nvSpPr>
-          <p:cNvPr id="160" name="TextBox 159"/>
+              <a:rPr sz="1050" b="0">
+                <a:solidFill>
+                  <a:srgbClr val="1A1A1A"/>
+                </a:solidFill>
+                <a:latin typeface="SamsungOneKorean"/>
+                <a:ea typeface="SamsungOneKorean"/>
+                <a:cs typeface="SamsungOneKorean"/>
+              </a:rPr>
+              <a:t>별동대 분리 보존</a:t>
+            </a:r>
+          </a:p>
+        </p:txBody>
+      </p:sp>
+      <p:sp>
+        <p:nvSpPr>
+          <p:cNvPr id="141" name="TextBox 140"/>
           <p:cNvSpPr txBox="1"/>
           <p:nvPr/>
         </p:nvSpPr>
         <p:spPr>
           <a:xfrm>
-            <a:off x="9665208" y="2345436"/>
-            <a:ext cx="1078992" cy="137160"/>
+            <a:off x="9762500" y="4631436"/>
+            <a:ext cx="1999427" cy="155448"/>
           </a:xfrm>
           <a:prstGeom prst="rect">
             <a:avLst/>
@@ -10068,7 +9425,7 @@
           <a:noFill/>
         </p:spPr>
         <p:txBody>
-          <a:bodyPr wrap="none" anchor="t" lIns="0" rIns="0" tIns="0" bIns="0">
+          <a:bodyPr wrap="square" anchor="t" lIns="0" rIns="0" tIns="0" bIns="0">
             <a:spAutoFit/>
           </a:bodyPr>
           <a:lstStyle/>
@@ -10079,73 +9436,40 @@
               </a:lnSpc>
             </a:pPr>
             <a:r>
-              <a:rPr sz="1000" b="0">
-                <a:solidFill>
-                  <a:srgbClr val="555555"/>
-                </a:solidFill>
-                <a:latin typeface="SamsungOneKorean"/>
-                <a:ea typeface="SamsungOneKorean"/>
-                <a:cs typeface="SamsungOneKorean"/>
-              </a:rPr>
-              <a:t>HBM</a:t>
-            </a:r>
-          </a:p>
-        </p:txBody>
-      </p:sp>
-      <p:sp>
-        <p:nvSpPr>
-          <p:cNvPr id="161" name="Rectangle 160"/>
-          <p:cNvSpPr/>
-          <p:nvPr/>
-        </p:nvSpPr>
-        <p:spPr>
-          <a:xfrm>
-            <a:off x="10963656" y="2360980"/>
-            <a:ext cx="105156" cy="105156"/>
-          </a:xfrm>
-          <a:prstGeom prst="rect">
-            <a:avLst/>
-          </a:prstGeom>
-          <a:solidFill>
-            <a:srgbClr val="D93025"/>
-          </a:solidFill>
-          <a:ln>
-            <a:noFill/>
-          </a:ln>
-          <a:effectLst/>
-        </p:spPr>
-        <p:style>
-          <a:lnRef idx="1">
-            <a:schemeClr val="accent1"/>
-          </a:lnRef>
-          <a:fillRef idx="3">
-            <a:schemeClr val="accent1"/>
-          </a:fillRef>
-          <a:effectRef idx="2">
-            <a:schemeClr val="accent1"/>
-          </a:effectRef>
-          <a:fontRef idx="minor">
-            <a:schemeClr val="lt1"/>
-          </a:fontRef>
-        </p:style>
-        <p:txBody>
-          <a:bodyPr rtlCol="0" anchor="ctr"/>
-          <a:lstStyle/>
-          <a:p>
-            <a:pPr algn="ctr"/>
-          </a:p>
-        </p:txBody>
-      </p:sp>
-      <p:sp>
-        <p:nvSpPr>
-          <p:cNvPr id="162" name="TextBox 161"/>
+              <a:rPr sz="1000" b="1">
+                <a:solidFill>
+                  <a:srgbClr val="1428A0"/>
+                </a:solidFill>
+                <a:latin typeface="SamsungOneKorean"/>
+                <a:ea typeface="SamsungOneKorean"/>
+                <a:cs typeface="SamsungOneKorean"/>
+              </a:rPr>
+              <a:t>살리는 곳  </a:t>
+            </a:r>
+            <a:r>
+              <a:rPr sz="1050" b="1">
+                <a:solidFill>
+                  <a:srgbClr val="1428A0"/>
+                </a:solidFill>
+                <a:latin typeface="SamsungOneKorean"/>
+                <a:ea typeface="SamsungOneKorean"/>
+                <a:cs typeface="SamsungOneKorean"/>
+              </a:rPr>
+              <a:t>S3·S4</a:t>
+            </a:r>
+          </a:p>
+        </p:txBody>
+      </p:sp>
+      <p:sp>
+        <p:nvSpPr>
+          <p:cNvPr id="142" name="TextBox 141"/>
           <p:cNvSpPr txBox="1"/>
           <p:nvPr/>
         </p:nvSpPr>
         <p:spPr>
           <a:xfrm>
-            <a:off x="11128248" y="2345436"/>
-            <a:ext cx="566928" cy="137160"/>
+            <a:off x="9762500" y="4814316"/>
+            <a:ext cx="1999427" cy="164592"/>
           </a:xfrm>
           <a:prstGeom prst="rect">
             <a:avLst/>
@@ -10153,7 +9477,7 @@
           <a:noFill/>
         </p:spPr>
         <p:txBody>
-          <a:bodyPr wrap="none" anchor="t" lIns="0" rIns="0" tIns="0" bIns="0">
+          <a:bodyPr wrap="square" anchor="t" lIns="0" rIns="0" tIns="0" bIns="0">
             <a:spAutoFit/>
           </a:bodyPr>
           <a:lstStyle/>
@@ -10164,29 +9488,29 @@
               </a:lnSpc>
             </a:pPr>
             <a:r>
-              <a:rPr sz="1000" b="1">
-                <a:solidFill>
-                  <a:srgbClr val="D93025"/>
-                </a:solidFill>
-                <a:latin typeface="SamsungOneKorean"/>
-                <a:ea typeface="SamsungOneKorean"/>
-                <a:cs typeface="SamsungOneKorean"/>
-              </a:rPr>
-              <a:t>직격</a:t>
-            </a:r>
-          </a:p>
-        </p:txBody>
-      </p:sp>
-      <p:sp>
-        <p:nvSpPr>
-          <p:cNvPr id="163" name="TextBox 162"/>
+              <a:rPr sz="1050" b="0">
+                <a:solidFill>
+                  <a:srgbClr val="1A1A1A"/>
+                </a:solidFill>
+                <a:latin typeface="SamsungOneKorean"/>
+                <a:ea typeface="SamsungOneKorean"/>
+                <a:cs typeface="SamsungOneKorean"/>
+              </a:rPr>
+              <a:t>IDM 결합으로 표준 선점</a:t>
+            </a:r>
+          </a:p>
+        </p:txBody>
+      </p:sp>
+      <p:sp>
+        <p:nvSpPr>
+          <p:cNvPr id="143" name="TextBox 142"/>
           <p:cNvSpPr txBox="1"/>
           <p:nvPr/>
         </p:nvSpPr>
         <p:spPr>
           <a:xfrm>
-            <a:off x="9665208" y="2499055"/>
-            <a:ext cx="1078992" cy="137160"/>
+            <a:off x="9762500" y="5143500"/>
+            <a:ext cx="1999427" cy="146304"/>
           </a:xfrm>
           <a:prstGeom prst="rect">
             <a:avLst/>
@@ -10194,7 +9518,7 @@
           <a:noFill/>
         </p:spPr>
         <p:txBody>
-          <a:bodyPr wrap="none" anchor="t" lIns="0" rIns="0" tIns="0" bIns="0">
+          <a:bodyPr wrap="square" anchor="t" lIns="0" rIns="0" tIns="0" bIns="0">
             <a:spAutoFit/>
           </a:bodyPr>
           <a:lstStyle/>
@@ -10205,7 +9529,7 @@
               </a:lnSpc>
             </a:pPr>
             <a:r>
-              <a:rPr sz="1000" b="0">
+              <a:rPr sz="1000" b="1">
                 <a:solidFill>
                   <a:srgbClr val="555555"/>
                 </a:solidFill>
@@ -10213,703 +9537,21 @@
                 <a:ea typeface="SamsungOneKorean"/>
                 <a:cs typeface="SamsungOneKorean"/>
               </a:rPr>
-              <a:t>서버 DRAM</a:t>
-            </a:r>
-          </a:p>
-        </p:txBody>
-      </p:sp>
-      <p:sp>
-        <p:nvSpPr>
-          <p:cNvPr id="164" name="Rectangle 163"/>
+              <a:t>전략적 중요 분야</a:t>
+            </a:r>
+          </a:p>
+        </p:txBody>
+      </p:sp>
+      <p:sp>
+        <p:nvSpPr>
+          <p:cNvPr id="144" name="Rounded Rectangle 143"/>
           <p:cNvSpPr/>
           <p:nvPr/>
         </p:nvSpPr>
         <p:spPr>
           <a:xfrm>
-            <a:off x="10963656" y="2514600"/>
-            <a:ext cx="105156" cy="105156"/>
-          </a:xfrm>
-          <a:prstGeom prst="rect">
-            <a:avLst/>
-          </a:prstGeom>
-          <a:solidFill>
-            <a:srgbClr val="E89B94"/>
-          </a:solidFill>
-          <a:ln>
-            <a:noFill/>
-          </a:ln>
-          <a:effectLst/>
-        </p:spPr>
-        <p:style>
-          <a:lnRef idx="1">
-            <a:schemeClr val="accent1"/>
-          </a:lnRef>
-          <a:fillRef idx="3">
-            <a:schemeClr val="accent1"/>
-          </a:fillRef>
-          <a:effectRef idx="2">
-            <a:schemeClr val="accent1"/>
-          </a:effectRef>
-          <a:fontRef idx="minor">
-            <a:schemeClr val="lt1"/>
-          </a:fontRef>
-        </p:style>
-        <p:txBody>
-          <a:bodyPr rtlCol="0" anchor="ctr"/>
-          <a:lstStyle/>
-          <a:p>
-            <a:pPr algn="ctr"/>
-          </a:p>
-        </p:txBody>
-      </p:sp>
-      <p:sp>
-        <p:nvSpPr>
-          <p:cNvPr id="165" name="TextBox 164"/>
-          <p:cNvSpPr txBox="1"/>
-          <p:nvPr/>
-        </p:nvSpPr>
-        <p:spPr>
-          <a:xfrm>
-            <a:off x="11128248" y="2499055"/>
-            <a:ext cx="566928" cy="137160"/>
-          </a:xfrm>
-          <a:prstGeom prst="rect">
-            <a:avLst/>
-          </a:prstGeom>
-          <a:noFill/>
-        </p:spPr>
-        <p:txBody>
-          <a:bodyPr wrap="none" anchor="t" lIns="0" rIns="0" tIns="0" bIns="0">
-            <a:spAutoFit/>
-          </a:bodyPr>
-          <a:lstStyle/>
-          <a:p>
-            <a:pPr algn="l">
-              <a:lnSpc>
-                <a:spcPct val="100000"/>
-              </a:lnSpc>
-            </a:pPr>
-            <a:r>
-              <a:rPr sz="1000" b="1">
-                <a:solidFill>
-                  <a:srgbClr val="B44A40"/>
-                </a:solidFill>
-                <a:latin typeface="SamsungOneKorean"/>
-                <a:ea typeface="SamsungOneKorean"/>
-                <a:cs typeface="SamsungOneKorean"/>
-              </a:rPr>
-              <a:t>압박</a:t>
-            </a:r>
-          </a:p>
-        </p:txBody>
-      </p:sp>
-      <p:sp>
-        <p:nvSpPr>
-          <p:cNvPr id="166" name="TextBox 165"/>
-          <p:cNvSpPr txBox="1"/>
-          <p:nvPr/>
-        </p:nvSpPr>
-        <p:spPr>
-          <a:xfrm>
-            <a:off x="9665208" y="2652674"/>
-            <a:ext cx="1078992" cy="137160"/>
-          </a:xfrm>
-          <a:prstGeom prst="rect">
-            <a:avLst/>
-          </a:prstGeom>
-          <a:noFill/>
-        </p:spPr>
-        <p:txBody>
-          <a:bodyPr wrap="none" anchor="t" lIns="0" rIns="0" tIns="0" bIns="0">
-            <a:spAutoFit/>
-          </a:bodyPr>
-          <a:lstStyle/>
-          <a:p>
-            <a:pPr algn="l">
-              <a:lnSpc>
-                <a:spcPct val="100000"/>
-              </a:lnSpc>
-            </a:pPr>
-            <a:r>
-              <a:rPr sz="1000" b="0">
-                <a:solidFill>
-                  <a:srgbClr val="555555"/>
-                </a:solidFill>
-                <a:latin typeface="SamsungOneKorean"/>
-                <a:ea typeface="SamsungOneKorean"/>
-                <a:cs typeface="SamsungOneKorean"/>
-              </a:rPr>
-              <a:t>범용·레거시</a:t>
-            </a:r>
-          </a:p>
-        </p:txBody>
-      </p:sp>
-      <p:sp>
-        <p:nvSpPr>
-          <p:cNvPr id="167" name="Rectangle 166"/>
-          <p:cNvSpPr/>
-          <p:nvPr/>
-        </p:nvSpPr>
-        <p:spPr>
-          <a:xfrm>
-            <a:off x="10963656" y="2668219"/>
-            <a:ext cx="105156" cy="105156"/>
-          </a:xfrm>
-          <a:prstGeom prst="rect">
-            <a:avLst/>
-          </a:prstGeom>
-          <a:solidFill>
-            <a:srgbClr val="D9D9D9"/>
-          </a:solidFill>
-          <a:ln>
-            <a:noFill/>
-          </a:ln>
-          <a:effectLst/>
-        </p:spPr>
-        <p:style>
-          <a:lnRef idx="1">
-            <a:schemeClr val="accent1"/>
-          </a:lnRef>
-          <a:fillRef idx="3">
-            <a:schemeClr val="accent1"/>
-          </a:fillRef>
-          <a:effectRef idx="2">
-            <a:schemeClr val="accent1"/>
-          </a:effectRef>
-          <a:fontRef idx="minor">
-            <a:schemeClr val="lt1"/>
-          </a:fontRef>
-        </p:style>
-        <p:txBody>
-          <a:bodyPr rtlCol="0" anchor="ctr"/>
-          <a:lstStyle/>
-          <a:p>
-            <a:pPr algn="ctr"/>
-          </a:p>
-        </p:txBody>
-      </p:sp>
-      <p:sp>
-        <p:nvSpPr>
-          <p:cNvPr id="168" name="TextBox 167"/>
-          <p:cNvSpPr txBox="1"/>
-          <p:nvPr/>
-        </p:nvSpPr>
-        <p:spPr>
-          <a:xfrm>
-            <a:off x="11128248" y="2652674"/>
-            <a:ext cx="566928" cy="137160"/>
-          </a:xfrm>
-          <a:prstGeom prst="rect">
-            <a:avLst/>
-          </a:prstGeom>
-          <a:noFill/>
-        </p:spPr>
-        <p:txBody>
-          <a:bodyPr wrap="none" anchor="t" lIns="0" rIns="0" tIns="0" bIns="0">
-            <a:spAutoFit/>
-          </a:bodyPr>
-          <a:lstStyle/>
-          <a:p>
-            <a:pPr algn="l">
-              <a:lnSpc>
-                <a:spcPct val="100000"/>
-              </a:lnSpc>
-            </a:pPr>
-            <a:r>
-              <a:rPr sz="1000" b="1">
-                <a:solidFill>
-                  <a:srgbClr val="555555"/>
-                </a:solidFill>
-                <a:latin typeface="SamsungOneKorean"/>
-                <a:ea typeface="SamsungOneKorean"/>
-                <a:cs typeface="SamsungOneKorean"/>
-              </a:rPr>
-              <a:t>제한</a:t>
-            </a:r>
-          </a:p>
-        </p:txBody>
-      </p:sp>
-      <p:sp>
-        <p:nvSpPr>
-          <p:cNvPr id="169" name="TextBox 168"/>
-          <p:cNvSpPr txBox="1"/>
-          <p:nvPr/>
-        </p:nvSpPr>
-        <p:spPr>
-          <a:xfrm>
-            <a:off x="9665208" y="2806293"/>
-            <a:ext cx="1078992" cy="137160"/>
-          </a:xfrm>
-          <a:prstGeom prst="rect">
-            <a:avLst/>
-          </a:prstGeom>
-          <a:noFill/>
-        </p:spPr>
-        <p:txBody>
-          <a:bodyPr wrap="none" anchor="t" lIns="0" rIns="0" tIns="0" bIns="0">
-            <a:spAutoFit/>
-          </a:bodyPr>
-          <a:lstStyle/>
-          <a:p>
-            <a:pPr algn="l">
-              <a:lnSpc>
-                <a:spcPct val="100000"/>
-              </a:lnSpc>
-            </a:pPr>
-            <a:r>
-              <a:rPr sz="1000" b="0">
-                <a:solidFill>
-                  <a:srgbClr val="555555"/>
-                </a:solidFill>
-                <a:latin typeface="SamsungOneKorean"/>
-                <a:ea typeface="SamsungOneKorean"/>
-                <a:cs typeface="SamsungOneKorean"/>
-              </a:rPr>
-              <a:t>NAND·SSD</a:t>
-            </a:r>
-          </a:p>
-        </p:txBody>
-      </p:sp>
-      <p:sp>
-        <p:nvSpPr>
-          <p:cNvPr id="170" name="Rectangle 169"/>
-          <p:cNvSpPr/>
-          <p:nvPr/>
-        </p:nvSpPr>
-        <p:spPr>
-          <a:xfrm>
-            <a:off x="10963656" y="2821838"/>
-            <a:ext cx="105156" cy="105156"/>
-          </a:xfrm>
-          <a:prstGeom prst="rect">
-            <a:avLst/>
-          </a:prstGeom>
-          <a:solidFill>
-            <a:srgbClr val="00A651"/>
-          </a:solidFill>
-          <a:ln>
-            <a:noFill/>
-          </a:ln>
-          <a:effectLst/>
-        </p:spPr>
-        <p:style>
-          <a:lnRef idx="1">
-            <a:schemeClr val="accent1"/>
-          </a:lnRef>
-          <a:fillRef idx="3">
-            <a:schemeClr val="accent1"/>
-          </a:fillRef>
-          <a:effectRef idx="2">
-            <a:schemeClr val="accent1"/>
-          </a:effectRef>
-          <a:fontRef idx="minor">
-            <a:schemeClr val="lt1"/>
-          </a:fontRef>
-        </p:style>
-        <p:txBody>
-          <a:bodyPr rtlCol="0" anchor="ctr"/>
-          <a:lstStyle/>
-          <a:p>
-            <a:pPr algn="ctr"/>
-          </a:p>
-        </p:txBody>
-      </p:sp>
-      <p:sp>
-        <p:nvSpPr>
-          <p:cNvPr id="171" name="TextBox 170"/>
-          <p:cNvSpPr txBox="1"/>
-          <p:nvPr/>
-        </p:nvSpPr>
-        <p:spPr>
-          <a:xfrm>
-            <a:off x="11128248" y="2806293"/>
-            <a:ext cx="566928" cy="137160"/>
-          </a:xfrm>
-          <a:prstGeom prst="rect">
-            <a:avLst/>
-          </a:prstGeom>
-          <a:noFill/>
-        </p:spPr>
-        <p:txBody>
-          <a:bodyPr wrap="none" anchor="t" lIns="0" rIns="0" tIns="0" bIns="0">
-            <a:spAutoFit/>
-          </a:bodyPr>
-          <a:lstStyle/>
-          <a:p>
-            <a:pPr algn="l">
-              <a:lnSpc>
-                <a:spcPct val="100000"/>
-              </a:lnSpc>
-            </a:pPr>
-            <a:r>
-              <a:rPr sz="1000" b="1">
-                <a:solidFill>
-                  <a:srgbClr val="00A651"/>
-                </a:solidFill>
-                <a:latin typeface="SamsungOneKorean"/>
-                <a:ea typeface="SamsungOneKorean"/>
-                <a:cs typeface="SamsungOneKorean"/>
-              </a:rPr>
-              <a:t>수혜</a:t>
-            </a:r>
-          </a:p>
-        </p:txBody>
-      </p:sp>
-      <p:cxnSp>
-        <p:nvCxnSpPr>
-          <p:cNvPr id="172" name="Connector 171"/>
-          <p:cNvCxnSpPr/>
-          <p:nvPr/>
-        </p:nvCxnSpPr>
-        <p:spPr>
-          <a:xfrm>
-            <a:off x="9665208" y="3010204"/>
-            <a:ext cx="2006193" cy="0"/>
-          </a:xfrm>
-          <a:prstGeom prst="line">
-            <a:avLst/>
-          </a:prstGeom>
-          <a:ln w="6350">
-            <a:solidFill>
-              <a:srgbClr val="D9D9D9"/>
-            </a:solidFill>
-          </a:ln>
-          <a:effectLst/>
-        </p:spPr>
-        <p:style>
-          <a:lnRef idx="2">
-            <a:schemeClr val="accent1"/>
-          </a:lnRef>
-          <a:fillRef idx="0">
-            <a:schemeClr val="accent1"/>
-          </a:fillRef>
-          <a:effectRef idx="1">
-            <a:schemeClr val="accent1"/>
-          </a:effectRef>
-          <a:fontRef idx="minor">
-            <a:schemeClr val="tx1"/>
-          </a:fontRef>
-        </p:style>
-      </p:cxnSp>
-      <p:sp>
-        <p:nvSpPr>
-          <p:cNvPr id="173" name="TextBox 172"/>
-          <p:cNvSpPr txBox="1"/>
-          <p:nvPr/>
-        </p:nvSpPr>
-        <p:spPr>
-          <a:xfrm>
-            <a:off x="9665208" y="3065068"/>
-            <a:ext cx="2006193" cy="146304"/>
-          </a:xfrm>
-          <a:prstGeom prst="rect">
-            <a:avLst/>
-          </a:prstGeom>
-          <a:noFill/>
-        </p:spPr>
-        <p:txBody>
-          <a:bodyPr wrap="square" anchor="t" lIns="0" rIns="0" tIns="0" bIns="0">
-            <a:spAutoFit/>
-          </a:bodyPr>
-          <a:lstStyle/>
-          <a:p>
-            <a:pPr algn="l">
-              <a:lnSpc>
-                <a:spcPct val="100000"/>
-              </a:lnSpc>
-            </a:pPr>
-            <a:r>
-              <a:rPr sz="1000" b="1">
-                <a:solidFill>
-                  <a:srgbClr val="1428A0"/>
-                </a:solidFill>
-                <a:latin typeface="SamsungOneKorean"/>
-                <a:ea typeface="SamsungOneKorean"/>
-                <a:cs typeface="SamsungOneKorean"/>
-              </a:rPr>
-              <a:t>무엇이 갈리나</a:t>
-            </a:r>
-          </a:p>
-        </p:txBody>
-      </p:sp>
-      <p:sp>
-        <p:nvSpPr>
-          <p:cNvPr id="174" name="TextBox 173"/>
-          <p:cNvSpPr txBox="1"/>
-          <p:nvPr/>
-        </p:nvSpPr>
-        <p:spPr>
-          <a:xfrm>
-            <a:off x="9665208" y="3225088"/>
-            <a:ext cx="2006193" cy="457200"/>
-          </a:xfrm>
-          <a:prstGeom prst="rect">
-            <a:avLst/>
-          </a:prstGeom>
-          <a:noFill/>
-        </p:spPr>
-        <p:txBody>
-          <a:bodyPr wrap="square" anchor="t" lIns="0" rIns="0" tIns="0" bIns="0">
-            <a:spAutoFit/>
-          </a:bodyPr>
-          <a:lstStyle/>
-          <a:p>
-            <a:pPr algn="l">
-              <a:lnSpc>
-                <a:spcPct val="106000"/>
-              </a:lnSpc>
-            </a:pPr>
-            <a:r>
-              <a:rPr sz="1000" b="0">
-                <a:solidFill>
-                  <a:srgbClr val="1A1A1A"/>
-                </a:solidFill>
-                <a:latin typeface="SamsungOneKorean"/>
-                <a:ea typeface="SamsungOneKorean"/>
-                <a:cs typeface="SamsungOneKorean"/>
-              </a:rPr>
-              <a:t>감산·계약·원가가 모두 무효. 판이 바뀔 때 유효한 것은 미리 그 자리에 있던 것뿐이다</a:t>
-            </a:r>
-          </a:p>
-        </p:txBody>
-      </p:sp>
-      <p:sp>
-        <p:nvSpPr>
-          <p:cNvPr id="175" name="TextBox 174"/>
-          <p:cNvSpPr txBox="1"/>
-          <p:nvPr/>
-        </p:nvSpPr>
-        <p:spPr>
-          <a:xfrm>
-            <a:off x="9665208" y="3741724"/>
-            <a:ext cx="2006193" cy="146304"/>
-          </a:xfrm>
-          <a:prstGeom prst="rect">
-            <a:avLst/>
-          </a:prstGeom>
-          <a:noFill/>
-        </p:spPr>
-        <p:txBody>
-          <a:bodyPr wrap="square" anchor="t" lIns="0" rIns="0" tIns="0" bIns="0">
-            <a:spAutoFit/>
-          </a:bodyPr>
-          <a:lstStyle/>
-          <a:p>
-            <a:pPr algn="l">
-              <a:lnSpc>
-                <a:spcPct val="100000"/>
-              </a:lnSpc>
-            </a:pPr>
-            <a:r>
-              <a:rPr sz="1000" b="1">
-                <a:solidFill>
-                  <a:srgbClr val="D93025"/>
-                </a:solidFill>
-                <a:latin typeface="SamsungOneKorean"/>
-                <a:ea typeface="SamsungOneKorean"/>
-                <a:cs typeface="SamsungOneKorean"/>
-              </a:rPr>
-              <a:t>찔리는 곳 </a:t>
-            </a:r>
-            <a:r>
-              <a:rPr sz="1000" b="1">
-                <a:solidFill>
-                  <a:srgbClr val="D93025"/>
-                </a:solidFill>
-                <a:latin typeface="SamsungOneKorean"/>
-                <a:ea typeface="SamsungOneKorean"/>
-                <a:cs typeface="SamsungOneKorean"/>
-              </a:rPr>
-              <a:t>W4·W1</a:t>
-            </a:r>
-          </a:p>
-        </p:txBody>
-      </p:sp>
-      <p:sp>
-        <p:nvSpPr>
-          <p:cNvPr id="176" name="TextBox 175"/>
-          <p:cNvSpPr txBox="1"/>
-          <p:nvPr/>
-        </p:nvSpPr>
-        <p:spPr>
-          <a:xfrm>
-            <a:off x="9665208" y="3901744"/>
-            <a:ext cx="2006193" cy="457200"/>
-          </a:xfrm>
-          <a:prstGeom prst="rect">
-            <a:avLst/>
-          </a:prstGeom>
-          <a:noFill/>
-        </p:spPr>
-        <p:txBody>
-          <a:bodyPr wrap="square" anchor="t" lIns="0" rIns="0" tIns="0" bIns="0">
-            <a:spAutoFit/>
-          </a:bodyPr>
-          <a:lstStyle/>
-          <a:p>
-            <a:pPr algn="l">
-              <a:lnSpc>
-                <a:spcPct val="106000"/>
-              </a:lnSpc>
-            </a:pPr>
-            <a:r>
-              <a:rPr sz="1000" b="0">
-                <a:solidFill>
-                  <a:srgbClr val="1A1A1A"/>
-                </a:solidFill>
-                <a:latin typeface="SamsungOneKorean"/>
-                <a:ea typeface="SamsungOneKorean"/>
-                <a:cs typeface="SamsungOneKorean"/>
-              </a:rPr>
-              <a:t>니치 배제 논리의 재발이 최악 경로. 차세대 조직·예산을 주력 배분에서 분리해 보존할 것</a:t>
-            </a:r>
-          </a:p>
-        </p:txBody>
-      </p:sp>
-      <p:sp>
-        <p:nvSpPr>
-          <p:cNvPr id="177" name="TextBox 176"/>
-          <p:cNvSpPr txBox="1"/>
-          <p:nvPr/>
-        </p:nvSpPr>
-        <p:spPr>
-          <a:xfrm>
-            <a:off x="9665208" y="4422952"/>
-            <a:ext cx="2006193" cy="146304"/>
-          </a:xfrm>
-          <a:prstGeom prst="rect">
-            <a:avLst/>
-          </a:prstGeom>
-          <a:noFill/>
-        </p:spPr>
-        <p:txBody>
-          <a:bodyPr wrap="square" anchor="t" lIns="0" rIns="0" tIns="0" bIns="0">
-            <a:spAutoFit/>
-          </a:bodyPr>
-          <a:lstStyle/>
-          <a:p>
-            <a:pPr algn="l">
-              <a:lnSpc>
-                <a:spcPct val="100000"/>
-              </a:lnSpc>
-            </a:pPr>
-            <a:r>
-              <a:rPr sz="1000" b="1">
-                <a:solidFill>
-                  <a:srgbClr val="1428A0"/>
-                </a:solidFill>
-                <a:latin typeface="SamsungOneKorean"/>
-                <a:ea typeface="SamsungOneKorean"/>
-                <a:cs typeface="SamsungOneKorean"/>
-              </a:rPr>
-              <a:t>살리는 곳 </a:t>
-            </a:r>
-            <a:r>
-              <a:rPr sz="1000" b="1">
-                <a:solidFill>
-                  <a:srgbClr val="1428A0"/>
-                </a:solidFill>
-                <a:latin typeface="SamsungOneKorean"/>
-                <a:ea typeface="SamsungOneKorean"/>
-                <a:cs typeface="SamsungOneKorean"/>
-              </a:rPr>
-              <a:t>S3·S4</a:t>
-            </a:r>
-          </a:p>
-        </p:txBody>
-      </p:sp>
-      <p:sp>
-        <p:nvSpPr>
-          <p:cNvPr id="178" name="TextBox 177"/>
-          <p:cNvSpPr txBox="1"/>
-          <p:nvPr/>
-        </p:nvSpPr>
-        <p:spPr>
-          <a:xfrm>
-            <a:off x="9665208" y="4582972"/>
-            <a:ext cx="2006193" cy="457200"/>
-          </a:xfrm>
-          <a:prstGeom prst="rect">
-            <a:avLst/>
-          </a:prstGeom>
-          <a:noFill/>
-        </p:spPr>
-        <p:txBody>
-          <a:bodyPr wrap="square" anchor="t" lIns="0" rIns="0" tIns="0" bIns="0">
-            <a:spAutoFit/>
-          </a:bodyPr>
-          <a:lstStyle/>
-          <a:p>
-            <a:pPr algn="l">
-              <a:lnSpc>
-                <a:spcPct val="106000"/>
-              </a:lnSpc>
-            </a:pPr>
-            <a:r>
-              <a:rPr sz="1000" b="0">
-                <a:solidFill>
-                  <a:srgbClr val="1A1A1A"/>
-                </a:solidFill>
-                <a:latin typeface="SamsungOneKorean"/>
-                <a:ea typeface="SamsungOneKorean"/>
-                <a:cs typeface="SamsungOneKorean"/>
-              </a:rPr>
-              <a:t>로직+메모리+본딩 결합은 판 전환기의 최고 희소 자산. 새 판의 표준 선점에 투입할 것</a:t>
-            </a:r>
-          </a:p>
-        </p:txBody>
-      </p:sp>
-      <p:sp>
-        <p:nvSpPr>
-          <p:cNvPr id="179" name="TextBox 178"/>
-          <p:cNvSpPr txBox="1"/>
-          <p:nvPr/>
-        </p:nvSpPr>
-        <p:spPr>
-          <a:xfrm>
-            <a:off x="9665208" y="5104180"/>
-            <a:ext cx="2006193" cy="146304"/>
-          </a:xfrm>
-          <a:prstGeom prst="rect">
-            <a:avLst/>
-          </a:prstGeom>
-          <a:noFill/>
-        </p:spPr>
-        <p:txBody>
-          <a:bodyPr wrap="square" anchor="t" lIns="0" rIns="0" tIns="0" bIns="0">
-            <a:spAutoFit/>
-          </a:bodyPr>
-          <a:lstStyle/>
-          <a:p>
-            <a:pPr algn="l">
-              <a:lnSpc>
-                <a:spcPct val="100000"/>
-              </a:lnSpc>
-            </a:pPr>
-            <a:r>
-              <a:rPr sz="1000" b="1">
-                <a:solidFill>
-                  <a:srgbClr val="555555"/>
-                </a:solidFill>
-                <a:latin typeface="SamsungOneKorean"/>
-                <a:ea typeface="SamsungOneKorean"/>
-                <a:cs typeface="SamsungOneKorean"/>
-              </a:rPr>
-              <a:t>전략적 중요 분야</a:t>
-            </a:r>
-          </a:p>
-        </p:txBody>
-      </p:sp>
-      <p:sp>
-        <p:nvSpPr>
-          <p:cNvPr id="180" name="Rounded Rectangle 179"/>
-          <p:cNvSpPr/>
-          <p:nvPr/>
-        </p:nvSpPr>
-        <p:spPr>
-          <a:xfrm>
-            <a:off x="9665208" y="5273344"/>
-            <a:ext cx="2006193" cy="173736"/>
+            <a:off x="9762500" y="5335524"/>
+            <a:ext cx="1999427" cy="192024"/>
           </a:xfrm>
           <a:prstGeom prst="roundRect">
             <a:avLst>
@@ -10950,14 +9592,14 @@
       </p:sp>
       <p:sp>
         <p:nvSpPr>
-          <p:cNvPr id="181" name="TextBox 180"/>
+          <p:cNvPr id="145" name="TextBox 144"/>
           <p:cNvSpPr txBox="1"/>
           <p:nvPr/>
         </p:nvSpPr>
         <p:spPr>
           <a:xfrm>
-            <a:off x="9729216" y="5293461"/>
-            <a:ext cx="1878177" cy="137160"/>
+            <a:off x="9762500" y="5367528"/>
+            <a:ext cx="1999427" cy="137160"/>
           </a:xfrm>
           <a:prstGeom prst="rect">
             <a:avLst/>
@@ -10984,21 +9626,21 @@
                 <a:ea typeface="SamsungOneKorean"/>
                 <a:cs typeface="SamsungOneKorean"/>
               </a:rPr>
-              <a:t>차세대 진척 마일스톤</a:t>
-            </a:r>
-          </a:p>
-        </p:txBody>
-      </p:sp>
-      <p:sp>
-        <p:nvSpPr>
-          <p:cNvPr id="182" name="Rounded Rectangle 181"/>
+              <a:t>차세대 마일스톤</a:t>
+            </a:r>
+          </a:p>
+        </p:txBody>
+      </p:sp>
+      <p:sp>
+        <p:nvSpPr>
+          <p:cNvPr id="146" name="Rounded Rectangle 145"/>
           <p:cNvSpPr/>
           <p:nvPr/>
         </p:nvSpPr>
         <p:spPr>
           <a:xfrm>
-            <a:off x="9665208" y="5479084"/>
-            <a:ext cx="2006193" cy="173736"/>
+            <a:off x="9762500" y="5568696"/>
+            <a:ext cx="1999427" cy="192024"/>
           </a:xfrm>
           <a:prstGeom prst="roundRect">
             <a:avLst>
@@ -11039,14 +9681,14 @@
       </p:sp>
       <p:sp>
         <p:nvSpPr>
-          <p:cNvPr id="183" name="TextBox 182"/>
+          <p:cNvPr id="147" name="TextBox 146"/>
           <p:cNvSpPr txBox="1"/>
           <p:nvPr/>
         </p:nvSpPr>
         <p:spPr>
           <a:xfrm>
-            <a:off x="9729216" y="5499201"/>
-            <a:ext cx="1878177" cy="137160"/>
+            <a:off x="9762500" y="5600700"/>
+            <a:ext cx="1999427" cy="137160"/>
           </a:xfrm>
           <a:prstGeom prst="rect">
             <a:avLst/>
@@ -11080,14 +9722,14 @@
       </p:sp>
       <p:sp>
         <p:nvSpPr>
-          <p:cNvPr id="184" name="Rounded Rectangle 183"/>
+          <p:cNvPr id="148" name="Rounded Rectangle 147"/>
           <p:cNvSpPr/>
           <p:nvPr/>
         </p:nvSpPr>
         <p:spPr>
           <a:xfrm>
-            <a:off x="9665208" y="5684824"/>
-            <a:ext cx="2006193" cy="173736"/>
+            <a:off x="9762500" y="5801868"/>
+            <a:ext cx="1999427" cy="192024"/>
           </a:xfrm>
           <a:prstGeom prst="roundRect">
             <a:avLst>
@@ -11128,14 +9770,14 @@
       </p:sp>
       <p:sp>
         <p:nvSpPr>
-          <p:cNvPr id="185" name="TextBox 184"/>
+          <p:cNvPr id="149" name="TextBox 148"/>
           <p:cNvSpPr txBox="1"/>
           <p:nvPr/>
         </p:nvSpPr>
         <p:spPr>
           <a:xfrm>
-            <a:off x="9729216" y="5704941"/>
-            <a:ext cx="1878177" cy="137160"/>
+            <a:off x="9762500" y="5833872"/>
+            <a:ext cx="1999427" cy="137160"/>
           </a:xfrm>
           <a:prstGeom prst="rect">
             <a:avLst/>
@@ -11162,25 +9804,25 @@
                 <a:ea typeface="SamsungOneKorean"/>
                 <a:cs typeface="SamsungOneKorean"/>
               </a:rPr>
-              <a:t>조직 경계 설계</a:t>
-            </a:r>
-          </a:p>
-        </p:txBody>
-      </p:sp>
-      <p:sp>
-        <p:nvSpPr>
-          <p:cNvPr id="186" name="Rounded Rectangle 185"/>
+              <a:t>조직 경계</a:t>
+            </a:r>
+          </a:p>
+        </p:txBody>
+      </p:sp>
+      <p:sp>
+        <p:nvSpPr>
+          <p:cNvPr id="150" name="Rounded Rectangle 149"/>
           <p:cNvSpPr/>
           <p:nvPr/>
         </p:nvSpPr>
         <p:spPr>
           <a:xfrm>
-            <a:off x="429768" y="6089904"/>
-            <a:ext cx="11332159" cy="457200"/>
+            <a:off x="429768" y="6144768"/>
+            <a:ext cx="11332159" cy="310896"/>
           </a:xfrm>
           <a:prstGeom prst="roundRect">
             <a:avLst>
-              <a:gd name="adj" fmla="val 7000"/>
+              <a:gd name="adj" fmla="val 10000"/>
             </a:avLst>
           </a:prstGeom>
           <a:solidFill>
@@ -11215,77 +9857,14 @@
       </p:sp>
       <p:sp>
         <p:nvSpPr>
-          <p:cNvPr id="187" name="TextBox 186"/>
+          <p:cNvPr id="151" name="TextBox 150"/>
           <p:cNvSpPr txBox="1"/>
           <p:nvPr/>
         </p:nvSpPr>
         <p:spPr>
           <a:xfrm>
-            <a:off x="557784" y="6153912"/>
-            <a:ext cx="11076127" cy="347472"/>
-          </a:xfrm>
-          <a:prstGeom prst="rect">
-            <a:avLst/>
-          </a:prstGeom>
-          <a:noFill/>
-        </p:spPr>
-        <p:txBody>
-          <a:bodyPr wrap="square" anchor="t" lIns="0" rIns="0" tIns="0" bIns="0">
-            <a:spAutoFit/>
-          </a:bodyPr>
-          <a:lstStyle/>
-          <a:p>
-            <a:pPr algn="l">
-              <a:lnSpc>
-                <a:spcPct val="115000"/>
-              </a:lnSpc>
-            </a:pPr>
-            <a:r>
-              <a:rPr sz="1050" b="1">
-                <a:solidFill>
-                  <a:srgbClr val="1428A0"/>
-                </a:solidFill>
-                <a:latin typeface="SamsungOneKorean"/>
-                <a:ea typeface="SamsungOneKorean"/>
-                <a:cs typeface="SamsungOneKorean"/>
-              </a:rPr>
-              <a:t>종합  </a:t>
-            </a:r>
-            <a:r>
-              <a:rPr sz="1050" b="0">
-                <a:solidFill>
-                  <a:srgbClr val="1A1A1A"/>
-                </a:solidFill>
-                <a:latin typeface="SamsungOneKorean"/>
-                <a:ea typeface="SamsungOneKorean"/>
-                <a:cs typeface="SamsungOneKorean"/>
-              </a:rPr>
-              <a:t>약점은 W3(판단 지연)로 수렴하고(A·B·C·D 공통 노출), 강점의 발화는 갈린다(급락형 S1 체력, 침식형 S3 전환력, 공급발 S4 선행, 수요발 침식 S2 폭). </a:t>
-            </a:r>
-            <a:r>
-              <a:rPr sz="1050" b="1">
-                <a:solidFill>
-                  <a:srgbClr val="1A1A1A"/>
-                </a:solidFill>
-                <a:latin typeface="SamsungOneKorean"/>
-                <a:ea typeface="SamsungOneKorean"/>
-                <a:cs typeface="SamsungOneKorean"/>
-              </a:rPr>
-              <a:t>어떤 강점을 살릴지는 어떤 다운턴인지의 감별이 정한다.</a:t>
-            </a:r>
-          </a:p>
-        </p:txBody>
-      </p:sp>
-      <p:sp>
-        <p:nvSpPr>
-          <p:cNvPr id="188" name="TextBox 187"/>
-          <p:cNvSpPr txBox="1"/>
-          <p:nvPr/>
-        </p:nvSpPr>
-        <p:spPr>
-          <a:xfrm>
-            <a:off x="429768" y="6620256"/>
-            <a:ext cx="9869119" cy="164592"/>
+            <a:off x="576072" y="6213348"/>
+            <a:ext cx="11039551" cy="182880"/>
           </a:xfrm>
           <a:prstGeom prst="rect">
             <a:avLst/>
@@ -11304,6 +9883,69 @@
               </a:lnSpc>
             </a:pPr>
             <a:r>
+              <a:rPr sz="1050" b="1">
+                <a:solidFill>
+                  <a:srgbClr val="1428A0"/>
+                </a:solidFill>
+                <a:latin typeface="SamsungOneKorean"/>
+                <a:ea typeface="SamsungOneKorean"/>
+                <a:cs typeface="SamsungOneKorean"/>
+              </a:rPr>
+              <a:t>종합  </a:t>
+            </a:r>
+            <a:r>
+              <a:rPr sz="1050" b="0">
+                <a:solidFill>
+                  <a:srgbClr val="1A1A1A"/>
+                </a:solidFill>
+                <a:latin typeface="SamsungOneKorean"/>
+                <a:ea typeface="SamsungOneKorean"/>
+                <a:cs typeface="SamsungOneKorean"/>
+              </a:rPr>
+              <a:t>약점은 W3(판단 지연)로 수렴하고, 강점의 발화는 유형마다 갈린다.  </a:t>
+            </a:r>
+            <a:r>
+              <a:rPr sz="1050" b="1">
+                <a:solidFill>
+                  <a:srgbClr val="1A1A1A"/>
+                </a:solidFill>
+                <a:latin typeface="SamsungOneKorean"/>
+                <a:ea typeface="SamsungOneKorean"/>
+                <a:cs typeface="SamsungOneKorean"/>
+              </a:rPr>
+              <a:t>어떤 강점을 살릴지는 감별이 정한다.</a:t>
+            </a:r>
+          </a:p>
+        </p:txBody>
+      </p:sp>
+      <p:sp>
+        <p:nvSpPr>
+          <p:cNvPr id="152" name="TextBox 151"/>
+          <p:cNvSpPr txBox="1"/>
+          <p:nvPr/>
+        </p:nvSpPr>
+        <p:spPr>
+          <a:xfrm>
+            <a:off x="429768" y="6547104"/>
+            <a:ext cx="9869119" cy="164592"/>
+          </a:xfrm>
+          <a:prstGeom prst="rect">
+            <a:avLst/>
+          </a:prstGeom>
+          <a:noFill/>
+        </p:spPr>
+        <p:txBody>
+          <a:bodyPr wrap="square" anchor="t" lIns="0" rIns="0" tIns="0" bIns="0">
+            <a:spAutoFit/>
+          </a:bodyPr>
+          <a:lstStyle/>
+          <a:p>
+            <a:pPr algn="l">
+              <a:lnSpc>
+                <a:spcPct val="100000"/>
+              </a:lnSpc>
+            </a:pPr>
+            <a:r>
               <a:rPr sz="900" b="0">
                 <a:solidFill>
                   <a:srgbClr val="555555"/>
@@ -11312,20 +9954,20 @@
                 <a:ea typeface="SamsungOneKorean"/>
                 <a:cs typeface="SamsungOneKorean"/>
               </a:rPr>
-              <a:t>출처: wiki/downturn/samsung-impact.md (S/W 근거 인용 상세) · 노출 등급은 wiki/downturn/scenario-DT-A~E.md 정성 판정 · 기준일 2026-08</a:t>
-            </a:r>
-          </a:p>
-        </p:txBody>
-      </p:sp>
-      <p:sp>
-        <p:nvSpPr>
-          <p:cNvPr id="189" name="TextBox 188"/>
+              <a:t>출처: wiki/downturn/samsung-impact.md (근거·상세 진단) · 대응 전략은 별도 장 · 확률 미표기 원칙 · 기준일 2026-08</a:t>
+            </a:r>
+          </a:p>
+        </p:txBody>
+      </p:sp>
+      <p:sp>
+        <p:nvSpPr>
+          <p:cNvPr id="153" name="TextBox 152"/>
           <p:cNvSpPr txBox="1"/>
           <p:nvPr/>
         </p:nvSpPr>
         <p:spPr>
           <a:xfrm>
-            <a:off x="10390327" y="6620256"/>
+            <a:off x="10390327" y="6547104"/>
             <a:ext cx="1371600" cy="164592"/>
           </a:xfrm>
           <a:prstGeom prst="rect">

--- a/outputs/presentation/downturn-scenario-impact.pptx
+++ b/outputs/presentation/downturn-scenario-impact.pptx
@@ -3096,7 +3096,7 @@
         </p:nvSpPr>
         <p:spPr>
           <a:xfrm>
-            <a:off x="429768" y="256032"/>
+            <a:off x="429768" y="237744"/>
             <a:ext cx="11332159" cy="347472"/>
           </a:xfrm>
           <a:prstGeom prst="rect">
@@ -3148,7 +3148,7 @@
         </p:nvCxnSpPr>
         <p:spPr>
           <a:xfrm>
-            <a:off x="429768" y="694944"/>
+            <a:off x="429768" y="658368"/>
             <a:ext cx="11332159" cy="0"/>
           </a:xfrm>
           <a:prstGeom prst="line">
@@ -3184,21 +3184,19 @@
         </p:nvSpPr>
         <p:spPr>
           <a:xfrm>
-            <a:off x="1435608" y="859536"/>
-            <a:ext cx="4064690" cy="310896"/>
+            <a:off x="1435608" y="786384"/>
+            <a:ext cx="4064690" cy="292608"/>
           </a:xfrm>
           <a:prstGeom prst="roundRect">
             <a:avLst>
-              <a:gd name="adj" fmla="val 12000"/>
+              <a:gd name="adj" fmla="val 13000"/>
             </a:avLst>
           </a:prstGeom>
           <a:solidFill>
-            <a:srgbClr val="F6F6F7"/>
+            <a:srgbClr val="E9EDF8"/>
           </a:solidFill>
-          <a:ln w="6350">
-            <a:solidFill>
-              <a:srgbClr val="D9D9D9"/>
-            </a:solidFill>
+          <a:ln>
+            <a:noFill/>
           </a:ln>
           <a:effectLst/>
         </p:spPr>
@@ -3232,7 +3230,7 @@
         </p:nvSpPr>
         <p:spPr>
           <a:xfrm>
-            <a:off x="1435608" y="928115"/>
+            <a:off x="1435608" y="845820"/>
             <a:ext cx="4064690" cy="182880"/>
           </a:xfrm>
           <a:prstGeom prst="rect">
@@ -3284,21 +3282,19 @@
         </p:nvSpPr>
         <p:spPr>
           <a:xfrm>
-            <a:off x="5610026" y="859536"/>
-            <a:ext cx="4064690" cy="310896"/>
+            <a:off x="5610026" y="786384"/>
+            <a:ext cx="4064690" cy="292608"/>
           </a:xfrm>
           <a:prstGeom prst="roundRect">
             <a:avLst>
-              <a:gd name="adj" fmla="val 12000"/>
+              <a:gd name="adj" fmla="val 13000"/>
             </a:avLst>
           </a:prstGeom>
           <a:solidFill>
-            <a:srgbClr val="F6F6F7"/>
+            <a:srgbClr val="F3F0E9"/>
           </a:solidFill>
-          <a:ln w="6350">
-            <a:solidFill>
-              <a:srgbClr val="D9D9D9"/>
-            </a:solidFill>
+          <a:ln>
+            <a:noFill/>
           </a:ln>
           <a:effectLst/>
         </p:spPr>
@@ -3332,7 +3328,7 @@
         </p:nvSpPr>
         <p:spPr>
           <a:xfrm>
-            <a:off x="5610026" y="928115"/>
+            <a:off x="5610026" y="845820"/>
             <a:ext cx="4064690" cy="182880"/>
           </a:xfrm>
           <a:prstGeom prst="rect">
@@ -3384,21 +3380,19 @@
         </p:nvSpPr>
         <p:spPr>
           <a:xfrm>
-            <a:off x="9784445" y="859536"/>
-            <a:ext cx="1977481" cy="310896"/>
+            <a:off x="9784445" y="786384"/>
+            <a:ext cx="1977481" cy="292608"/>
           </a:xfrm>
           <a:prstGeom prst="roundRect">
             <a:avLst>
-              <a:gd name="adj" fmla="val 12000"/>
+              <a:gd name="adj" fmla="val 13000"/>
             </a:avLst>
           </a:prstGeom>
           <a:solidFill>
-            <a:srgbClr val="F6F6F7"/>
+            <a:srgbClr val="EFECF4"/>
           </a:solidFill>
-          <a:ln w="6350">
-            <a:solidFill>
-              <a:srgbClr val="D9D9D9"/>
-            </a:solidFill>
+          <a:ln>
+            <a:noFill/>
           </a:ln>
           <a:effectLst/>
         </p:spPr>
@@ -3432,7 +3426,7 @@
         </p:nvSpPr>
         <p:spPr>
           <a:xfrm>
-            <a:off x="9784445" y="928115"/>
+            <a:off x="9784445" y="845820"/>
             <a:ext cx="1977481" cy="182880"/>
           </a:xfrm>
           <a:prstGeom prst="rect">
@@ -3484,7 +3478,7 @@
         </p:nvSpPr>
         <p:spPr>
           <a:xfrm>
-            <a:off x="1435608" y="1316736"/>
+            <a:off x="1435608" y="1188720"/>
             <a:ext cx="1977481" cy="201168"/>
           </a:xfrm>
           <a:prstGeom prst="rect">
@@ -3512,7 +3506,7 @@
                 <a:ea typeface="SamsungOneKorean"/>
                 <a:cs typeface="SamsungOneKorean"/>
               </a:rPr>
-              <a:t>투자 자금이 끊긴다</a:t>
+              <a:t>투자 자금이 끊기는 경우</a:t>
             </a:r>
           </a:p>
         </p:txBody>
@@ -3525,8 +3519,8 @@
         </p:nvSpPr>
         <p:spPr>
           <a:xfrm>
-            <a:off x="1435608" y="1563624"/>
-            <a:ext cx="1977481" cy="146304"/>
+            <a:off x="3522817" y="1188720"/>
+            <a:ext cx="1977481" cy="201168"/>
           </a:xfrm>
           <a:prstGeom prst="rect">
             <a:avLst/>
@@ -3545,26 +3539,15 @@
               </a:lnSpc>
             </a:pPr>
             <a:r>
-              <a:rPr sz="1000" b="0">
-                <a:solidFill>
-                  <a:srgbClr val="8A8A8E"/>
+              <a:rPr sz="1250" b="1">
+                <a:solidFill>
+                  <a:srgbClr val="1A1A1A"/>
                 </a:solidFill>
                 <a:latin typeface="SamsungOneKorean"/>
                 <a:ea typeface="SamsungOneKorean"/>
                 <a:cs typeface="SamsungOneKorean"/>
               </a:rPr>
-              <a:t>조달 경색 · </a:t>
-            </a:r>
-            <a:r>
-              <a:rPr sz="1000" b="0">
-                <a:solidFill>
-                  <a:srgbClr val="555555"/>
-                </a:solidFill>
-                <a:latin typeface="SamsungOneKorean"/>
-                <a:ea typeface="SamsungOneKorean"/>
-                <a:cs typeface="SamsungOneKorean"/>
-              </a:rPr>
-              <a:t>DT-A 급제동</a:t>
+              <a:t>필요량이 줄어드는 경우</a:t>
             </a:r>
           </a:p>
         </p:txBody>
@@ -3577,7 +3560,7 @@
         </p:nvSpPr>
         <p:spPr>
           <a:xfrm>
-            <a:off x="3522817" y="1316736"/>
+            <a:off x="5610026" y="1188720"/>
             <a:ext cx="1977481" cy="201168"/>
           </a:xfrm>
           <a:prstGeom prst="rect">
@@ -3605,7 +3588,7 @@
                 <a:ea typeface="SamsungOneKorean"/>
                 <a:cs typeface="SamsungOneKorean"/>
               </a:rPr>
-              <a:t>필요량이 줄어든다</a:t>
+              <a:t>CAPEX가 몰리는 경우</a:t>
             </a:r>
           </a:p>
         </p:txBody>
@@ -3618,8 +3601,8 @@
         </p:nvSpPr>
         <p:spPr>
           <a:xfrm>
-            <a:off x="3522817" y="1563624"/>
-            <a:ext cx="1977481" cy="146304"/>
+            <a:off x="7697236" y="1188720"/>
+            <a:ext cx="1977481" cy="201168"/>
           </a:xfrm>
           <a:prstGeom prst="rect">
             <a:avLst/>
@@ -3638,26 +3621,15 @@
               </a:lnSpc>
             </a:pPr>
             <a:r>
-              <a:rPr sz="1000" b="0">
-                <a:solidFill>
-                  <a:srgbClr val="8A8A8E"/>
+              <a:rPr sz="1250" b="1">
+                <a:solidFill>
+                  <a:srgbClr val="1A1A1A"/>
                 </a:solidFill>
                 <a:latin typeface="SamsungOneKorean"/>
                 <a:ea typeface="SamsungOneKorean"/>
                 <a:cs typeface="SamsungOneKorean"/>
               </a:rPr>
-              <a:t>원단위 감소 · </a:t>
-            </a:r>
-            <a:r>
-              <a:rPr sz="1000" b="0">
-                <a:solidFill>
-                  <a:srgbClr val="555555"/>
-                </a:solidFill>
-                <a:latin typeface="SamsungOneKorean"/>
-                <a:ea typeface="SamsungOneKorean"/>
-                <a:cs typeface="SamsungOneKorean"/>
-              </a:rPr>
-              <a:t>DT-B 긴 하산</a:t>
+              <a:t>후발이 파고드는 경우</a:t>
             </a:r>
           </a:p>
         </p:txBody>
@@ -3670,7 +3642,7 @@
         </p:nvSpPr>
         <p:spPr>
           <a:xfrm>
-            <a:off x="5610026" y="1316736"/>
+            <a:off x="9784445" y="1188720"/>
             <a:ext cx="1977481" cy="201168"/>
           </a:xfrm>
           <a:prstGeom prst="rect">
@@ -3698,259 +3670,21 @@
                 <a:ea typeface="SamsungOneKorean"/>
                 <a:cs typeface="SamsungOneKorean"/>
               </a:rPr>
-              <a:t>기존 3사가 쏟아낸다</a:t>
-            </a:r>
-          </a:p>
-        </p:txBody>
-      </p:sp>
-      <p:sp>
-        <p:nvSpPr>
-          <p:cNvPr id="15" name="TextBox 14"/>
-          <p:cNvSpPr txBox="1"/>
-          <p:nvPr/>
-        </p:nvSpPr>
-        <p:spPr>
-          <a:xfrm>
-            <a:off x="5610026" y="1563624"/>
-            <a:ext cx="1977481" cy="146304"/>
-          </a:xfrm>
-          <a:prstGeom prst="rect">
-            <a:avLst/>
-          </a:prstGeom>
-          <a:noFill/>
-        </p:spPr>
-        <p:txBody>
-          <a:bodyPr wrap="square" anchor="t" lIns="0" rIns="0" tIns="0" bIns="0">
-            <a:spAutoFit/>
-          </a:bodyPr>
-          <a:lstStyle/>
-          <a:p>
-            <a:pPr algn="l">
-              <a:lnSpc>
-                <a:spcPct val="100000"/>
-              </a:lnSpc>
-            </a:pPr>
-            <a:r>
-              <a:rPr sz="1000" b="0">
-                <a:solidFill>
-                  <a:srgbClr val="8A8A8E"/>
-                </a:solidFill>
-                <a:latin typeface="SamsungOneKorean"/>
-                <a:ea typeface="SamsungOneKorean"/>
-                <a:cs typeface="SamsungOneKorean"/>
-              </a:rPr>
-              <a:t>증설 동시 도래 · </a:t>
-            </a:r>
-            <a:r>
-              <a:rPr sz="1000" b="0">
-                <a:solidFill>
-                  <a:srgbClr val="555555"/>
-                </a:solidFill>
-                <a:latin typeface="SamsungOneKorean"/>
-                <a:ea typeface="SamsungOneKorean"/>
-                <a:cs typeface="SamsungOneKorean"/>
-              </a:rPr>
-              <a:t>DT-C 동시 방류</a:t>
-            </a:r>
-          </a:p>
-        </p:txBody>
-      </p:sp>
-      <p:sp>
-        <p:nvSpPr>
-          <p:cNvPr id="16" name="TextBox 15"/>
-          <p:cNvSpPr txBox="1"/>
-          <p:nvPr/>
-        </p:nvSpPr>
-        <p:spPr>
-          <a:xfrm>
-            <a:off x="7697236" y="1316736"/>
-            <a:ext cx="1977481" cy="201168"/>
-          </a:xfrm>
-          <a:prstGeom prst="rect">
-            <a:avLst/>
-          </a:prstGeom>
-          <a:noFill/>
-        </p:spPr>
-        <p:txBody>
-          <a:bodyPr wrap="square" anchor="t" lIns="0" rIns="0" tIns="0" bIns="0">
-            <a:spAutoFit/>
-          </a:bodyPr>
-          <a:lstStyle/>
-          <a:p>
-            <a:pPr algn="l">
-              <a:lnSpc>
-                <a:spcPct val="100000"/>
-              </a:lnSpc>
-            </a:pPr>
-            <a:r>
-              <a:rPr sz="1250" b="1">
-                <a:solidFill>
-                  <a:srgbClr val="1A1A1A"/>
-                </a:solidFill>
-                <a:latin typeface="SamsungOneKorean"/>
-                <a:ea typeface="SamsungOneKorean"/>
-                <a:cs typeface="SamsungOneKorean"/>
-              </a:rPr>
-              <a:t>신흥이 파고든다</a:t>
-            </a:r>
-          </a:p>
-        </p:txBody>
-      </p:sp>
-      <p:sp>
-        <p:nvSpPr>
-          <p:cNvPr id="17" name="TextBox 16"/>
-          <p:cNvSpPr txBox="1"/>
-          <p:nvPr/>
-        </p:nvSpPr>
-        <p:spPr>
-          <a:xfrm>
-            <a:off x="7697236" y="1563624"/>
-            <a:ext cx="1977481" cy="146304"/>
-          </a:xfrm>
-          <a:prstGeom prst="rect">
-            <a:avLst/>
-          </a:prstGeom>
-          <a:noFill/>
-        </p:spPr>
-        <p:txBody>
-          <a:bodyPr wrap="square" anchor="t" lIns="0" rIns="0" tIns="0" bIns="0">
-            <a:spAutoFit/>
-          </a:bodyPr>
-          <a:lstStyle/>
-          <a:p>
-            <a:pPr algn="l">
-              <a:lnSpc>
-                <a:spcPct val="100000"/>
-              </a:lnSpc>
-            </a:pPr>
-            <a:r>
-              <a:rPr sz="1000" b="0">
-                <a:solidFill>
-                  <a:srgbClr val="8A8A8E"/>
-                </a:solidFill>
-                <a:latin typeface="SamsungOneKorean"/>
-                <a:ea typeface="SamsungOneKorean"/>
-                <a:cs typeface="SamsungOneKorean"/>
-              </a:rPr>
-              <a:t>보조금 공급 · </a:t>
-            </a:r>
-            <a:r>
-              <a:rPr sz="1000" b="0">
-                <a:solidFill>
-                  <a:srgbClr val="555555"/>
-                </a:solidFill>
-                <a:latin typeface="SamsungOneKorean"/>
-                <a:ea typeface="SamsungOneKorean"/>
-                <a:cs typeface="SamsungOneKorean"/>
-              </a:rPr>
-              <a:t>DT-D 저가 잠식</a:t>
-            </a:r>
-          </a:p>
-        </p:txBody>
-      </p:sp>
-      <p:sp>
-        <p:nvSpPr>
-          <p:cNvPr id="18" name="TextBox 17"/>
-          <p:cNvSpPr txBox="1"/>
-          <p:nvPr/>
-        </p:nvSpPr>
-        <p:spPr>
-          <a:xfrm>
-            <a:off x="9784445" y="1316736"/>
-            <a:ext cx="1977481" cy="201168"/>
-          </a:xfrm>
-          <a:prstGeom prst="rect">
-            <a:avLst/>
-          </a:prstGeom>
-          <a:noFill/>
-        </p:spPr>
-        <p:txBody>
-          <a:bodyPr wrap="square" anchor="t" lIns="0" rIns="0" tIns="0" bIns="0">
-            <a:spAutoFit/>
-          </a:bodyPr>
-          <a:lstStyle/>
-          <a:p>
-            <a:pPr algn="l">
-              <a:lnSpc>
-                <a:spcPct val="100000"/>
-              </a:lnSpc>
-            </a:pPr>
-            <a:r>
-              <a:rPr sz="1250" b="1">
-                <a:solidFill>
-                  <a:srgbClr val="1A1A1A"/>
-                </a:solidFill>
-                <a:latin typeface="SamsungOneKorean"/>
-                <a:ea typeface="SamsungOneKorean"/>
-                <a:cs typeface="SamsungOneKorean"/>
-              </a:rPr>
-              <a:t>제품 정의가 바뀐다</a:t>
-            </a:r>
-          </a:p>
-        </p:txBody>
-      </p:sp>
-      <p:sp>
-        <p:nvSpPr>
-          <p:cNvPr id="19" name="TextBox 18"/>
-          <p:cNvSpPr txBox="1"/>
-          <p:nvPr/>
-        </p:nvSpPr>
-        <p:spPr>
-          <a:xfrm>
-            <a:off x="9784445" y="1563624"/>
-            <a:ext cx="1977481" cy="146304"/>
-          </a:xfrm>
-          <a:prstGeom prst="rect">
-            <a:avLst/>
-          </a:prstGeom>
-          <a:noFill/>
-        </p:spPr>
-        <p:txBody>
-          <a:bodyPr wrap="square" anchor="t" lIns="0" rIns="0" tIns="0" bIns="0">
-            <a:spAutoFit/>
-          </a:bodyPr>
-          <a:lstStyle/>
-          <a:p>
-            <a:pPr algn="l">
-              <a:lnSpc>
-                <a:spcPct val="100000"/>
-              </a:lnSpc>
-            </a:pPr>
-            <a:r>
-              <a:rPr sz="1000" b="0">
-                <a:solidFill>
-                  <a:srgbClr val="8A8A8E"/>
-                </a:solidFill>
-                <a:latin typeface="SamsungOneKorean"/>
-                <a:ea typeface="SamsungOneKorean"/>
-                <a:cs typeface="SamsungOneKorean"/>
-              </a:rPr>
-              <a:t>기술 대체 · </a:t>
-            </a:r>
-            <a:r>
-              <a:rPr sz="1000" b="0">
-                <a:solidFill>
-                  <a:srgbClr val="555555"/>
-                </a:solidFill>
-                <a:latin typeface="SamsungOneKorean"/>
-                <a:ea typeface="SamsungOneKorean"/>
-                <a:cs typeface="SamsungOneKorean"/>
-              </a:rPr>
-              <a:t>DT-E 판 갈이</a:t>
+              <a:t>제품 정의가 바뀌는 경우</a:t>
             </a:r>
           </a:p>
         </p:txBody>
       </p:sp>
       <p:cxnSp>
         <p:nvCxnSpPr>
-          <p:cNvPr id="20" name="Connector 19"/>
+          <p:cNvPr id="15" name="Connector 14"/>
           <p:cNvCxnSpPr/>
           <p:nvPr/>
         </p:nvCxnSpPr>
         <p:spPr>
           <a:xfrm>
-            <a:off x="3467953" y="1298448"/>
-            <a:ext cx="0" cy="4443984"/>
+            <a:off x="3467953" y="1170432"/>
+            <a:ext cx="0" cy="4517136"/>
           </a:xfrm>
           <a:prstGeom prst="line">
             <a:avLst/>
@@ -3979,14 +3713,14 @@
       </p:cxnSp>
       <p:cxnSp>
         <p:nvCxnSpPr>
-          <p:cNvPr id="21" name="Connector 20"/>
+          <p:cNvPr id="16" name="Connector 15"/>
           <p:cNvCxnSpPr/>
           <p:nvPr/>
         </p:nvCxnSpPr>
         <p:spPr>
           <a:xfrm>
-            <a:off x="5555162" y="1298448"/>
-            <a:ext cx="0" cy="4443984"/>
+            <a:off x="5555162" y="1170432"/>
+            <a:ext cx="0" cy="4517136"/>
           </a:xfrm>
           <a:prstGeom prst="line">
             <a:avLst/>
@@ -4015,14 +3749,14 @@
       </p:cxnSp>
       <p:cxnSp>
         <p:nvCxnSpPr>
-          <p:cNvPr id="22" name="Connector 21"/>
+          <p:cNvPr id="17" name="Connector 16"/>
           <p:cNvCxnSpPr/>
           <p:nvPr/>
         </p:nvCxnSpPr>
         <p:spPr>
           <a:xfrm>
-            <a:off x="7642372" y="1298448"/>
-            <a:ext cx="0" cy="4443984"/>
+            <a:off x="7642372" y="1170432"/>
+            <a:ext cx="0" cy="4517136"/>
           </a:xfrm>
           <a:prstGeom prst="line">
             <a:avLst/>
@@ -4051,14 +3785,14 @@
       </p:cxnSp>
       <p:cxnSp>
         <p:nvCxnSpPr>
-          <p:cNvPr id="23" name="Connector 22"/>
+          <p:cNvPr id="18" name="Connector 17"/>
           <p:cNvCxnSpPr/>
           <p:nvPr/>
         </p:nvCxnSpPr>
         <p:spPr>
           <a:xfrm>
-            <a:off x="9729581" y="1298448"/>
-            <a:ext cx="0" cy="4443984"/>
+            <a:off x="9729581" y="1170432"/>
+            <a:ext cx="0" cy="4517136"/>
           </a:xfrm>
           <a:prstGeom prst="line">
             <a:avLst/>
@@ -4087,13 +3821,13 @@
       </p:cxnSp>
       <p:sp>
         <p:nvSpPr>
-          <p:cNvPr id="24" name="TextBox 23"/>
+          <p:cNvPr id="19" name="TextBox 18"/>
           <p:cNvSpPr txBox="1"/>
           <p:nvPr/>
         </p:nvSpPr>
         <p:spPr>
           <a:xfrm>
-            <a:off x="429768" y="1938528"/>
+            <a:off x="429768" y="1517904"/>
             <a:ext cx="877824" cy="457200"/>
           </a:xfrm>
           <a:prstGeom prst="rect">
@@ -4109,7 +3843,7 @@
           <a:p>
             <a:pPr algn="r">
               <a:lnSpc>
-                <a:spcPct val="115000"/>
+                <a:spcPct val="112000"/>
               </a:lnSpc>
             </a:pPr>
             <a:r>
@@ -4127,7 +3861,7 @@
           <a:p>
             <a:pPr algn="r">
               <a:lnSpc>
-                <a:spcPct val="115000"/>
+                <a:spcPct val="112000"/>
               </a:lnSpc>
             </a:pPr>
             <a:r>
@@ -4145,7 +3879,7 @@
           <a:p>
             <a:pPr algn="r">
               <a:lnSpc>
-                <a:spcPct val="115000"/>
+                <a:spcPct val="112000"/>
               </a:lnSpc>
             </a:pPr>
             <a:r>
@@ -4164,14 +3898,14 @@
       </p:sp>
       <p:sp>
         <p:nvSpPr>
-          <p:cNvPr id="25" name="Rectangle 24"/>
+          <p:cNvPr id="20" name="Rectangle 19"/>
           <p:cNvSpPr/>
           <p:nvPr/>
         </p:nvSpPr>
         <p:spPr>
           <a:xfrm>
-            <a:off x="1435608" y="1847088"/>
-            <a:ext cx="1977481" cy="749808"/>
+            <a:off x="1435608" y="1481328"/>
+            <a:ext cx="1977481" cy="585216"/>
           </a:xfrm>
           <a:prstGeom prst="rect">
             <a:avLst/>
@@ -4210,14 +3944,14 @@
       </p:sp>
       <p:sp>
         <p:nvSpPr>
-          <p:cNvPr id="26" name="Rectangle 25"/>
+          <p:cNvPr id="21" name="Rectangle 20"/>
           <p:cNvSpPr/>
           <p:nvPr/>
         </p:nvSpPr>
         <p:spPr>
           <a:xfrm>
-            <a:off x="1435608" y="1847088"/>
-            <a:ext cx="1977481" cy="32004"/>
+            <a:off x="1435608" y="1481328"/>
+            <a:ext cx="1977481" cy="29260"/>
           </a:xfrm>
           <a:prstGeom prst="rect">
             <a:avLst/>
@@ -4254,14 +3988,14 @@
       </p:sp>
       <p:sp>
         <p:nvSpPr>
-          <p:cNvPr id="27" name="TextBox 26"/>
+          <p:cNvPr id="22" name="TextBox 21"/>
           <p:cNvSpPr txBox="1"/>
           <p:nvPr/>
         </p:nvSpPr>
         <p:spPr>
           <a:xfrm>
-            <a:off x="1527048" y="1975104"/>
-            <a:ext cx="1794601" cy="548640"/>
+            <a:off x="1527048" y="1563624"/>
+            <a:ext cx="1794601" cy="457200"/>
           </a:xfrm>
           <a:prstGeom prst="rect">
             <a:avLst/>
@@ -4276,7 +4010,7 @@
           <a:p>
             <a:pPr algn="l">
               <a:lnSpc>
-                <a:spcPct val="122000"/>
+                <a:spcPct val="118000"/>
               </a:lnSpc>
             </a:pPr>
             <a:r>
@@ -4294,7 +4028,7 @@
           <a:p>
             <a:pPr algn="l">
               <a:lnSpc>
-                <a:spcPct val="122000"/>
+                <a:spcPct val="118000"/>
               </a:lnSpc>
             </a:pPr>
             <a:r>
@@ -4313,14 +4047,14 @@
       </p:sp>
       <p:sp>
         <p:nvSpPr>
-          <p:cNvPr id="28" name="Rectangle 27"/>
+          <p:cNvPr id="23" name="Rectangle 22"/>
           <p:cNvSpPr/>
           <p:nvPr/>
         </p:nvSpPr>
         <p:spPr>
           <a:xfrm>
-            <a:off x="3522817" y="1847088"/>
-            <a:ext cx="1977481" cy="749808"/>
+            <a:off x="3522817" y="1481328"/>
+            <a:ext cx="1977481" cy="585216"/>
           </a:xfrm>
           <a:prstGeom prst="rect">
             <a:avLst/>
@@ -4359,14 +4093,14 @@
       </p:sp>
       <p:sp>
         <p:nvSpPr>
-          <p:cNvPr id="29" name="Rectangle 28"/>
+          <p:cNvPr id="24" name="Rectangle 23"/>
           <p:cNvSpPr/>
           <p:nvPr/>
         </p:nvSpPr>
         <p:spPr>
           <a:xfrm>
-            <a:off x="3522817" y="1847088"/>
-            <a:ext cx="1977481" cy="32004"/>
+            <a:off x="3522817" y="1481328"/>
+            <a:ext cx="1977481" cy="29260"/>
           </a:xfrm>
           <a:prstGeom prst="rect">
             <a:avLst/>
@@ -4403,14 +4137,14 @@
       </p:sp>
       <p:sp>
         <p:nvSpPr>
-          <p:cNvPr id="30" name="TextBox 29"/>
+          <p:cNvPr id="25" name="TextBox 24"/>
           <p:cNvSpPr txBox="1"/>
           <p:nvPr/>
         </p:nvSpPr>
         <p:spPr>
           <a:xfrm>
-            <a:off x="3614257" y="1975104"/>
-            <a:ext cx="1794601" cy="548640"/>
+            <a:off x="3614257" y="1563624"/>
+            <a:ext cx="1794601" cy="457200"/>
           </a:xfrm>
           <a:prstGeom prst="rect">
             <a:avLst/>
@@ -4425,7 +4159,7 @@
           <a:p>
             <a:pPr algn="l">
               <a:lnSpc>
-                <a:spcPct val="122000"/>
+                <a:spcPct val="118000"/>
               </a:lnSpc>
             </a:pPr>
             <a:r>
@@ -4443,7 +4177,7 @@
           <a:p>
             <a:pPr algn="l">
               <a:lnSpc>
-                <a:spcPct val="122000"/>
+                <a:spcPct val="118000"/>
               </a:lnSpc>
             </a:pPr>
             <a:r>
@@ -4462,14 +4196,14 @@
       </p:sp>
       <p:sp>
         <p:nvSpPr>
-          <p:cNvPr id="31" name="Rectangle 30"/>
+          <p:cNvPr id="26" name="Rectangle 25"/>
           <p:cNvSpPr/>
           <p:nvPr/>
         </p:nvSpPr>
         <p:spPr>
           <a:xfrm>
-            <a:off x="5610026" y="1847088"/>
-            <a:ext cx="1977481" cy="749808"/>
+            <a:off x="5610026" y="1481328"/>
+            <a:ext cx="1977481" cy="585216"/>
           </a:xfrm>
           <a:prstGeom prst="rect">
             <a:avLst/>
@@ -4508,14 +4242,14 @@
       </p:sp>
       <p:sp>
         <p:nvSpPr>
-          <p:cNvPr id="32" name="Rectangle 31"/>
+          <p:cNvPr id="27" name="Rectangle 26"/>
           <p:cNvSpPr/>
           <p:nvPr/>
         </p:nvSpPr>
         <p:spPr>
           <a:xfrm>
-            <a:off x="5610026" y="1847088"/>
-            <a:ext cx="1977481" cy="32004"/>
+            <a:off x="5610026" y="1481328"/>
+            <a:ext cx="1977481" cy="29260"/>
           </a:xfrm>
           <a:prstGeom prst="rect">
             <a:avLst/>
@@ -4552,14 +4286,14 @@
       </p:sp>
       <p:sp>
         <p:nvSpPr>
-          <p:cNvPr id="33" name="TextBox 32"/>
+          <p:cNvPr id="28" name="TextBox 27"/>
           <p:cNvSpPr txBox="1"/>
           <p:nvPr/>
         </p:nvSpPr>
         <p:spPr>
           <a:xfrm>
-            <a:off x="5701466" y="1975104"/>
-            <a:ext cx="1794601" cy="548640"/>
+            <a:off x="5701466" y="1563624"/>
+            <a:ext cx="1794601" cy="457200"/>
           </a:xfrm>
           <a:prstGeom prst="rect">
             <a:avLst/>
@@ -4574,7 +4308,7 @@
           <a:p>
             <a:pPr algn="l">
               <a:lnSpc>
-                <a:spcPct val="122000"/>
+                <a:spcPct val="118000"/>
               </a:lnSpc>
             </a:pPr>
             <a:r>
@@ -4592,7 +4326,7 @@
           <a:p>
             <a:pPr algn="l">
               <a:lnSpc>
-                <a:spcPct val="122000"/>
+                <a:spcPct val="118000"/>
               </a:lnSpc>
             </a:pPr>
             <a:r>
@@ -4611,14 +4345,14 @@
       </p:sp>
       <p:sp>
         <p:nvSpPr>
-          <p:cNvPr id="34" name="Rectangle 33"/>
+          <p:cNvPr id="29" name="Rectangle 28"/>
           <p:cNvSpPr/>
           <p:nvPr/>
         </p:nvSpPr>
         <p:spPr>
           <a:xfrm>
-            <a:off x="7697236" y="1847088"/>
-            <a:ext cx="1977481" cy="749808"/>
+            <a:off x="7697236" y="1481328"/>
+            <a:ext cx="1977481" cy="585216"/>
           </a:xfrm>
           <a:prstGeom prst="rect">
             <a:avLst/>
@@ -4657,14 +4391,14 @@
       </p:sp>
       <p:sp>
         <p:nvSpPr>
-          <p:cNvPr id="35" name="Rectangle 34"/>
+          <p:cNvPr id="30" name="Rectangle 29"/>
           <p:cNvSpPr/>
           <p:nvPr/>
         </p:nvSpPr>
         <p:spPr>
           <a:xfrm>
-            <a:off x="7697236" y="1847088"/>
-            <a:ext cx="1977481" cy="32004"/>
+            <a:off x="7697236" y="1481328"/>
+            <a:ext cx="1977481" cy="29260"/>
           </a:xfrm>
           <a:prstGeom prst="rect">
             <a:avLst/>
@@ -4701,14 +4435,14 @@
       </p:sp>
       <p:sp>
         <p:nvSpPr>
-          <p:cNvPr id="36" name="TextBox 35"/>
+          <p:cNvPr id="31" name="TextBox 30"/>
           <p:cNvSpPr txBox="1"/>
           <p:nvPr/>
         </p:nvSpPr>
         <p:spPr>
           <a:xfrm>
-            <a:off x="7788676" y="1975104"/>
-            <a:ext cx="1794601" cy="548640"/>
+            <a:off x="7788676" y="1563624"/>
+            <a:ext cx="1794601" cy="457200"/>
           </a:xfrm>
           <a:prstGeom prst="rect">
             <a:avLst/>
@@ -4723,7 +4457,7 @@
           <a:p>
             <a:pPr algn="l">
               <a:lnSpc>
-                <a:spcPct val="122000"/>
+                <a:spcPct val="118000"/>
               </a:lnSpc>
             </a:pPr>
             <a:r>
@@ -4741,7 +4475,7 @@
           <a:p>
             <a:pPr algn="l">
               <a:lnSpc>
-                <a:spcPct val="122000"/>
+                <a:spcPct val="118000"/>
               </a:lnSpc>
             </a:pPr>
             <a:r>
@@ -4760,14 +4494,14 @@
       </p:sp>
       <p:sp>
         <p:nvSpPr>
-          <p:cNvPr id="37" name="Rectangle 36"/>
+          <p:cNvPr id="32" name="Rectangle 31"/>
           <p:cNvSpPr/>
           <p:nvPr/>
         </p:nvSpPr>
         <p:spPr>
           <a:xfrm>
-            <a:off x="9784445" y="1847088"/>
-            <a:ext cx="1977481" cy="749808"/>
+            <a:off x="9784445" y="1481328"/>
+            <a:ext cx="1977481" cy="585216"/>
           </a:xfrm>
           <a:prstGeom prst="rect">
             <a:avLst/>
@@ -4806,14 +4540,14 @@
       </p:sp>
       <p:sp>
         <p:nvSpPr>
-          <p:cNvPr id="38" name="Rectangle 37"/>
+          <p:cNvPr id="33" name="Rectangle 32"/>
           <p:cNvSpPr/>
           <p:nvPr/>
         </p:nvSpPr>
         <p:spPr>
           <a:xfrm>
-            <a:off x="9784445" y="1847088"/>
-            <a:ext cx="1977481" cy="32004"/>
+            <a:off x="9784445" y="1481328"/>
+            <a:ext cx="1977481" cy="29260"/>
           </a:xfrm>
           <a:prstGeom prst="rect">
             <a:avLst/>
@@ -4850,14 +4584,14 @@
       </p:sp>
       <p:sp>
         <p:nvSpPr>
-          <p:cNvPr id="39" name="TextBox 38"/>
+          <p:cNvPr id="34" name="TextBox 33"/>
           <p:cNvSpPr txBox="1"/>
           <p:nvPr/>
         </p:nvSpPr>
         <p:spPr>
           <a:xfrm>
-            <a:off x="9875885" y="1975104"/>
-            <a:ext cx="1794601" cy="548640"/>
+            <a:off x="9875885" y="1563624"/>
+            <a:ext cx="1794601" cy="457200"/>
           </a:xfrm>
           <a:prstGeom prst="rect">
             <a:avLst/>
@@ -4872,7 +4606,7 @@
           <a:p>
             <a:pPr algn="l">
               <a:lnSpc>
-                <a:spcPct val="122000"/>
+                <a:spcPct val="118000"/>
               </a:lnSpc>
             </a:pPr>
             <a:r>
@@ -4890,7 +4624,7 @@
           <a:p>
             <a:pPr algn="l">
               <a:lnSpc>
-                <a:spcPct val="122000"/>
+                <a:spcPct val="118000"/>
               </a:lnSpc>
             </a:pPr>
             <a:r>
@@ -4909,14 +4643,14 @@
       </p:sp>
       <p:sp>
         <p:nvSpPr>
-          <p:cNvPr id="40" name="TextBox 39"/>
+          <p:cNvPr id="35" name="TextBox 34"/>
           <p:cNvSpPr txBox="1"/>
           <p:nvPr/>
         </p:nvSpPr>
         <p:spPr>
           <a:xfrm>
-            <a:off x="429768" y="2798064"/>
-            <a:ext cx="877824" cy="146304"/>
+            <a:off x="429768" y="2212848"/>
+            <a:ext cx="877824" cy="365760"/>
           </a:xfrm>
           <a:prstGeom prst="rect">
             <a:avLst/>
@@ -4931,7 +4665,7 @@
           <a:p>
             <a:pPr algn="r">
               <a:lnSpc>
-                <a:spcPct val="100000"/>
+                <a:spcPct val="112000"/>
               </a:lnSpc>
             </a:pPr>
             <a:r>
@@ -4943,40 +4677,17 @@
                 <a:ea typeface="SamsungOneKorean"/>
                 <a:cs typeface="SamsungOneKorean"/>
               </a:rPr>
-              <a:t>제품 파급</a:t>
-            </a:r>
-          </a:p>
-        </p:txBody>
-      </p:sp>
-      <p:sp>
-        <p:nvSpPr>
-          <p:cNvPr id="41" name="TextBox 40"/>
-          <p:cNvSpPr txBox="1"/>
-          <p:nvPr/>
-        </p:nvSpPr>
-        <p:spPr>
-          <a:xfrm>
-            <a:off x="7921447" y="2798064"/>
-            <a:ext cx="3840480" cy="146304"/>
-          </a:xfrm>
-          <a:prstGeom prst="rect">
-            <a:avLst/>
-          </a:prstGeom>
-          <a:noFill/>
-        </p:spPr>
-        <p:txBody>
-          <a:bodyPr wrap="square" anchor="t" lIns="0" rIns="0" tIns="0" bIns="0">
-            <a:spAutoFit/>
-          </a:bodyPr>
-          <a:lstStyle/>
+              <a:t>무엇이</a:t>
+            </a:r>
+          </a:p>
           <a:p>
             <a:pPr algn="r">
               <a:lnSpc>
-                <a:spcPct val="100000"/>
+                <a:spcPct val="112000"/>
               </a:lnSpc>
             </a:pPr>
             <a:r>
-              <a:rPr sz="1000" b="0">
+              <a:rPr sz="1000" b="1">
                 <a:solidFill>
                   <a:srgbClr val="8A8A8E"/>
                 </a:solidFill>
@@ -4984,67 +4695,21 @@
                 <a:ea typeface="SamsungOneKorean"/>
                 <a:cs typeface="SamsungOneKorean"/>
               </a:rPr>
-              <a:t>▼▼ 급감 · ▼ 감소 · ─ 유지 · ▲ 증가 · ▲▲ 급증</a:t>
-            </a:r>
-          </a:p>
-        </p:txBody>
-      </p:sp>
-      <p:sp>
-        <p:nvSpPr>
-          <p:cNvPr id="42" name="Rounded Rectangle 41"/>
-          <p:cNvSpPr/>
-          <p:nvPr/>
-        </p:nvSpPr>
-        <p:spPr>
-          <a:xfrm>
-            <a:off x="1435608" y="3191256"/>
-            <a:ext cx="988740" cy="1472184"/>
-          </a:xfrm>
-          <a:prstGeom prst="roundRect">
-            <a:avLst>
-              <a:gd name="adj" fmla="val 6000"/>
-            </a:avLst>
-          </a:prstGeom>
-          <a:solidFill>
-            <a:srgbClr val="ECECEE"/>
-          </a:solidFill>
-          <a:ln>
-            <a:noFill/>
-          </a:ln>
-          <a:effectLst/>
-        </p:spPr>
-        <p:style>
-          <a:lnRef idx="1">
-            <a:schemeClr val="accent1"/>
-          </a:lnRef>
-          <a:fillRef idx="3">
-            <a:schemeClr val="accent1"/>
-          </a:fillRef>
-          <a:effectRef idx="2">
-            <a:schemeClr val="accent1"/>
-          </a:effectRef>
-          <a:fontRef idx="minor">
-            <a:schemeClr val="lt1"/>
-          </a:fontRef>
-        </p:style>
-        <p:txBody>
-          <a:bodyPr rtlCol="0" anchor="ctr"/>
-          <a:lstStyle/>
-          <a:p>
-            <a:pPr algn="ctr"/>
-          </a:p>
-        </p:txBody>
-      </p:sp>
-      <p:sp>
-        <p:nvSpPr>
-          <p:cNvPr id="43" name="TextBox 42"/>
+              <a:t>움직이나</a:t>
+            </a:r>
+          </a:p>
+        </p:txBody>
+      </p:sp>
+      <p:sp>
+        <p:nvSpPr>
+          <p:cNvPr id="36" name="TextBox 35"/>
           <p:cNvSpPr txBox="1"/>
           <p:nvPr/>
         </p:nvSpPr>
         <p:spPr>
           <a:xfrm>
-            <a:off x="1435608" y="3035808"/>
-            <a:ext cx="988740" cy="146304"/>
+            <a:off x="1435608" y="2194560"/>
+            <a:ext cx="1977481" cy="566928"/>
           </a:xfrm>
           <a:prstGeom prst="rect">
             <a:avLst/>
@@ -5057,122 +4722,46 @@
           </a:bodyPr>
           <a:lstStyle/>
           <a:p>
-            <a:pPr algn="ctr">
+            <a:pPr algn="l">
               <a:lnSpc>
-                <a:spcPct val="100000"/>
+                <a:spcPct val="116000"/>
               </a:lnSpc>
             </a:pPr>
             <a:r>
               <a:rPr sz="1000" b="1">
                 <a:solidFill>
-                  <a:srgbClr val="1A1A1A"/>
+                  <a:srgbClr val="1428A0"/>
                 </a:solidFill>
                 <a:latin typeface="SamsungOneKorean"/>
                 <a:ea typeface="SamsungOneKorean"/>
                 <a:cs typeface="SamsungOneKorean"/>
               </a:rPr>
-              <a:t>수요</a:t>
-            </a:r>
-          </a:p>
-        </p:txBody>
-      </p:sp>
-      <p:sp>
-        <p:nvSpPr>
-          <p:cNvPr id="44" name="TextBox 43"/>
-          <p:cNvSpPr txBox="1"/>
-          <p:nvPr/>
-        </p:nvSpPr>
-        <p:spPr>
-          <a:xfrm>
-            <a:off x="2424348" y="3035808"/>
-            <a:ext cx="988740" cy="146304"/>
-          </a:xfrm>
-          <a:prstGeom prst="rect">
-            <a:avLst/>
-          </a:prstGeom>
-          <a:noFill/>
-        </p:spPr>
-        <p:txBody>
-          <a:bodyPr wrap="square" anchor="t" lIns="0" rIns="0" tIns="0" bIns="0">
-            <a:spAutoFit/>
-          </a:bodyPr>
-          <a:lstStyle/>
-          <a:p>
-            <a:pPr algn="ctr">
-              <a:lnSpc>
-                <a:spcPct val="100000"/>
-              </a:lnSpc>
-            </a:pPr>
+              <a:t>전조  </a:t>
+            </a:r>
             <a:r>
               <a:rPr sz="1000" b="0">
                 <a:solidFill>
-                  <a:srgbClr val="8A8A8E"/>
+                  <a:srgbClr val="1A1A1A"/>
                 </a:solidFill>
                 <a:latin typeface="SamsungOneKorean"/>
                 <a:ea typeface="SamsungOneKorean"/>
                 <a:cs typeface="SamsungOneKorean"/>
               </a:rPr>
-              <a:t>공급</a:t>
-            </a:r>
-          </a:p>
-        </p:txBody>
-      </p:sp>
-      <p:sp>
-        <p:nvSpPr>
-          <p:cNvPr id="45" name="Rounded Rectangle 44"/>
-          <p:cNvSpPr/>
-          <p:nvPr/>
-        </p:nvSpPr>
-        <p:spPr>
-          <a:xfrm>
-            <a:off x="3522817" y="3191256"/>
-            <a:ext cx="988740" cy="1472184"/>
-          </a:xfrm>
-          <a:prstGeom prst="roundRect">
-            <a:avLst>
-              <a:gd name="adj" fmla="val 6000"/>
-            </a:avLst>
-          </a:prstGeom>
-          <a:solidFill>
-            <a:srgbClr val="ECECEE"/>
-          </a:solidFill>
-          <a:ln>
-            <a:noFill/>
-          </a:ln>
-          <a:effectLst/>
-        </p:spPr>
-        <p:style>
-          <a:lnRef idx="1">
-            <a:schemeClr val="accent1"/>
-          </a:lnRef>
-          <a:fillRef idx="3">
-            <a:schemeClr val="accent1"/>
-          </a:fillRef>
-          <a:effectRef idx="2">
-            <a:schemeClr val="accent1"/>
-          </a:effectRef>
-          <a:fontRef idx="minor">
-            <a:schemeClr val="lt1"/>
-          </a:fontRef>
-        </p:style>
-        <p:txBody>
-          <a:bodyPr rtlCol="0" anchor="ctr"/>
-          <a:lstStyle/>
-          <a:p>
-            <a:pPr algn="ctr"/>
-          </a:p>
-        </p:txBody>
-      </p:sp>
-      <p:sp>
-        <p:nvSpPr>
-          <p:cNvPr id="46" name="TextBox 45"/>
+              <a:t>Meta FCF -91% · Amazon FCF 적자 전환, 4사 CapEx ~$750B의 조달 의존</a:t>
+            </a:r>
+          </a:p>
+        </p:txBody>
+      </p:sp>
+      <p:sp>
+        <p:nvSpPr>
+          <p:cNvPr id="37" name="TextBox 36"/>
           <p:cNvSpPr txBox="1"/>
           <p:nvPr/>
         </p:nvSpPr>
         <p:spPr>
           <a:xfrm>
-            <a:off x="3522817" y="3035808"/>
-            <a:ext cx="988740" cy="146304"/>
+            <a:off x="3522817" y="2194560"/>
+            <a:ext cx="1977481" cy="566928"/>
           </a:xfrm>
           <a:prstGeom prst="rect">
             <a:avLst/>
@@ -5185,122 +4774,46 @@
           </a:bodyPr>
           <a:lstStyle/>
           <a:p>
-            <a:pPr algn="ctr">
+            <a:pPr algn="l">
               <a:lnSpc>
-                <a:spcPct val="100000"/>
+                <a:spcPct val="116000"/>
               </a:lnSpc>
             </a:pPr>
             <a:r>
               <a:rPr sz="1000" b="1">
                 <a:solidFill>
-                  <a:srgbClr val="1A1A1A"/>
+                  <a:srgbClr val="1428A0"/>
                 </a:solidFill>
                 <a:latin typeface="SamsungOneKorean"/>
                 <a:ea typeface="SamsungOneKorean"/>
                 <a:cs typeface="SamsungOneKorean"/>
               </a:rPr>
-              <a:t>수요</a:t>
-            </a:r>
-          </a:p>
-        </p:txBody>
-      </p:sp>
-      <p:sp>
-        <p:nvSpPr>
-          <p:cNvPr id="47" name="TextBox 46"/>
-          <p:cNvSpPr txBox="1"/>
-          <p:nvPr/>
-        </p:nvSpPr>
-        <p:spPr>
-          <a:xfrm>
-            <a:off x="4511558" y="3035808"/>
-            <a:ext cx="988740" cy="146304"/>
-          </a:xfrm>
-          <a:prstGeom prst="rect">
-            <a:avLst/>
-          </a:prstGeom>
-          <a:noFill/>
-        </p:spPr>
-        <p:txBody>
-          <a:bodyPr wrap="square" anchor="t" lIns="0" rIns="0" tIns="0" bIns="0">
-            <a:spAutoFit/>
-          </a:bodyPr>
-          <a:lstStyle/>
-          <a:p>
-            <a:pPr algn="ctr">
-              <a:lnSpc>
-                <a:spcPct val="100000"/>
-              </a:lnSpc>
-            </a:pPr>
+              <a:t>동인  </a:t>
+            </a:r>
             <a:r>
               <a:rPr sz="1000" b="0">
                 <a:solidFill>
-                  <a:srgbClr val="8A8A8E"/>
+                  <a:srgbClr val="1A1A1A"/>
                 </a:solidFill>
                 <a:latin typeface="SamsungOneKorean"/>
                 <a:ea typeface="SamsungOneKorean"/>
                 <a:cs typeface="SamsungOneKorean"/>
               </a:rPr>
-              <a:t>공급</a:t>
-            </a:r>
-          </a:p>
-        </p:txBody>
-      </p:sp>
-      <p:sp>
-        <p:nvSpPr>
-          <p:cNvPr id="48" name="Rounded Rectangle 47"/>
-          <p:cNvSpPr/>
-          <p:nvPr/>
-        </p:nvSpPr>
-        <p:spPr>
-          <a:xfrm>
-            <a:off x="6598767" y="3191256"/>
-            <a:ext cx="988740" cy="1472184"/>
-          </a:xfrm>
-          <a:prstGeom prst="roundRect">
-            <a:avLst>
-              <a:gd name="adj" fmla="val 6000"/>
-            </a:avLst>
-          </a:prstGeom>
-          <a:solidFill>
-            <a:srgbClr val="ECECEE"/>
-          </a:solidFill>
-          <a:ln>
-            <a:noFill/>
-          </a:ln>
-          <a:effectLst/>
-        </p:spPr>
-        <p:style>
-          <a:lnRef idx="1">
-            <a:schemeClr val="accent1"/>
-          </a:lnRef>
-          <a:fillRef idx="3">
-            <a:schemeClr val="accent1"/>
-          </a:fillRef>
-          <a:effectRef idx="2">
-            <a:schemeClr val="accent1"/>
-          </a:effectRef>
-          <a:fontRef idx="minor">
-            <a:schemeClr val="lt1"/>
-          </a:fontRef>
-        </p:style>
-        <p:txBody>
-          <a:bodyPr rtlCol="0" anchor="ctr"/>
-          <a:lstStyle/>
-          <a:p>
-            <a:pPr algn="ctr"/>
-          </a:p>
-        </p:txBody>
-      </p:sp>
-      <p:sp>
-        <p:nvSpPr>
-          <p:cNvPr id="49" name="TextBox 48"/>
+              <a:t>KV 캐시 오프로드(H100 동시 사용자 10배) · CXL 풀링 · 모델 경량화</a:t>
+            </a:r>
+          </a:p>
+        </p:txBody>
+      </p:sp>
+      <p:sp>
+        <p:nvSpPr>
+          <p:cNvPr id="38" name="TextBox 37"/>
           <p:cNvSpPr txBox="1"/>
           <p:nvPr/>
         </p:nvSpPr>
         <p:spPr>
           <a:xfrm>
-            <a:off x="5610026" y="3035808"/>
-            <a:ext cx="988740" cy="146304"/>
+            <a:off x="5610026" y="2194560"/>
+            <a:ext cx="1977481" cy="566928"/>
           </a:xfrm>
           <a:prstGeom prst="rect">
             <a:avLst/>
@@ -5313,54 +4826,24 @@
           </a:bodyPr>
           <a:lstStyle/>
           <a:p>
-            <a:pPr algn="ctr">
+            <a:pPr algn="l">
               <a:lnSpc>
-                <a:spcPct val="100000"/>
+                <a:spcPct val="116000"/>
               </a:lnSpc>
             </a:pPr>
             <a:r>
-              <a:rPr sz="1000" b="0">
-                <a:solidFill>
-                  <a:srgbClr val="8A8A8E"/>
+              <a:rPr sz="1000" b="1">
+                <a:solidFill>
+                  <a:srgbClr val="1428A0"/>
                 </a:solidFill>
                 <a:latin typeface="SamsungOneKorean"/>
                 <a:ea typeface="SamsungOneKorean"/>
                 <a:cs typeface="SamsungOneKorean"/>
               </a:rPr>
-              <a:t>수요</a:t>
-            </a:r>
-          </a:p>
-        </p:txBody>
-      </p:sp>
-      <p:sp>
-        <p:nvSpPr>
-          <p:cNvPr id="50" name="TextBox 49"/>
-          <p:cNvSpPr txBox="1"/>
-          <p:nvPr/>
-        </p:nvSpPr>
-        <p:spPr>
-          <a:xfrm>
-            <a:off x="6598767" y="3035808"/>
-            <a:ext cx="988740" cy="146304"/>
-          </a:xfrm>
-          <a:prstGeom prst="rect">
-            <a:avLst/>
-          </a:prstGeom>
-          <a:noFill/>
-        </p:spPr>
-        <p:txBody>
-          <a:bodyPr wrap="square" anchor="t" lIns="0" rIns="0" tIns="0" bIns="0">
-            <a:spAutoFit/>
-          </a:bodyPr>
-          <a:lstStyle/>
-          <a:p>
-            <a:pPr algn="ctr">
-              <a:lnSpc>
-                <a:spcPct val="100000"/>
-              </a:lnSpc>
-            </a:pPr>
-            <a:r>
-              <a:rPr sz="1000" b="1">
+              <a:t>공급  </a:t>
+            </a:r>
+            <a:r>
+              <a:rPr sz="1000" b="0">
                 <a:solidFill>
                   <a:srgbClr val="1A1A1A"/>
                 </a:solidFill>
@@ -5368,67 +4851,21 @@
                 <a:ea typeface="SamsungOneKorean"/>
                 <a:cs typeface="SamsungOneKorean"/>
               </a:rPr>
-              <a:t>공급</a:t>
-            </a:r>
-          </a:p>
-        </p:txBody>
-      </p:sp>
-      <p:sp>
-        <p:nvSpPr>
-          <p:cNvPr id="51" name="Rounded Rectangle 50"/>
-          <p:cNvSpPr/>
-          <p:nvPr/>
-        </p:nvSpPr>
-        <p:spPr>
-          <a:xfrm>
-            <a:off x="8685977" y="3191256"/>
-            <a:ext cx="988740" cy="1472184"/>
-          </a:xfrm>
-          <a:prstGeom prst="roundRect">
-            <a:avLst>
-              <a:gd name="adj" fmla="val 6000"/>
-            </a:avLst>
-          </a:prstGeom>
-          <a:solidFill>
-            <a:srgbClr val="ECECEE"/>
-          </a:solidFill>
-          <a:ln>
-            <a:noFill/>
-          </a:ln>
-          <a:effectLst/>
-        </p:spPr>
-        <p:style>
-          <a:lnRef idx="1">
-            <a:schemeClr val="accent1"/>
-          </a:lnRef>
-          <a:fillRef idx="3">
-            <a:schemeClr val="accent1"/>
-          </a:fillRef>
-          <a:effectRef idx="2">
-            <a:schemeClr val="accent1"/>
-          </a:effectRef>
-          <a:fontRef idx="minor">
-            <a:schemeClr val="lt1"/>
-          </a:fontRef>
-        </p:style>
-        <p:txBody>
-          <a:bodyPr rtlCol="0" anchor="ctr"/>
-          <a:lstStyle/>
-          <a:p>
-            <a:pPr algn="ctr"/>
-          </a:p>
-        </p:txBody>
-      </p:sp>
-      <p:sp>
-        <p:nvSpPr>
-          <p:cNvPr id="52" name="TextBox 51"/>
+              <a:t>Micron 아이다호 · SK하이닉스 용인 · 국내 신규 팹, 2028~29 동시 가동(착공 확정)</a:t>
+            </a:r>
+          </a:p>
+        </p:txBody>
+      </p:sp>
+      <p:sp>
+        <p:nvSpPr>
+          <p:cNvPr id="39" name="TextBox 38"/>
           <p:cNvSpPr txBox="1"/>
           <p:nvPr/>
         </p:nvSpPr>
         <p:spPr>
           <a:xfrm>
-            <a:off x="7697236" y="3035808"/>
-            <a:ext cx="988740" cy="146304"/>
+            <a:off x="7697236" y="2194560"/>
+            <a:ext cx="1977481" cy="566928"/>
           </a:xfrm>
           <a:prstGeom prst="rect">
             <a:avLst/>
@@ -5441,54 +4878,24 @@
           </a:bodyPr>
           <a:lstStyle/>
           <a:p>
-            <a:pPr algn="ctr">
+            <a:pPr algn="l">
               <a:lnSpc>
-                <a:spcPct val="100000"/>
+                <a:spcPct val="116000"/>
               </a:lnSpc>
             </a:pPr>
             <a:r>
-              <a:rPr sz="1000" b="0">
-                <a:solidFill>
-                  <a:srgbClr val="8A8A8E"/>
+              <a:rPr sz="1000" b="1">
+                <a:solidFill>
+                  <a:srgbClr val="1428A0"/>
                 </a:solidFill>
                 <a:latin typeface="SamsungOneKorean"/>
                 <a:ea typeface="SamsungOneKorean"/>
                 <a:cs typeface="SamsungOneKorean"/>
               </a:rPr>
-              <a:t>수요</a:t>
-            </a:r>
-          </a:p>
-        </p:txBody>
-      </p:sp>
-      <p:sp>
-        <p:nvSpPr>
-          <p:cNvPr id="53" name="TextBox 52"/>
-          <p:cNvSpPr txBox="1"/>
-          <p:nvPr/>
-        </p:nvSpPr>
-        <p:spPr>
-          <a:xfrm>
-            <a:off x="8685977" y="3035808"/>
-            <a:ext cx="988740" cy="146304"/>
-          </a:xfrm>
-          <a:prstGeom prst="rect">
-            <a:avLst/>
-          </a:prstGeom>
-          <a:noFill/>
-        </p:spPr>
-        <p:txBody>
-          <a:bodyPr wrap="square" anchor="t" lIns="0" rIns="0" tIns="0" bIns="0">
-            <a:spAutoFit/>
-          </a:bodyPr>
-          <a:lstStyle/>
-          <a:p>
-            <a:pPr algn="ctr">
-              <a:lnSpc>
-                <a:spcPct val="100000"/>
-              </a:lnSpc>
-            </a:pPr>
-            <a:r>
-              <a:rPr sz="1000" b="1">
+              <a:t>공급  </a:t>
+            </a:r>
+            <a:r>
+              <a:rPr sz="1000" b="0">
                 <a:solidFill>
                   <a:srgbClr val="1A1A1A"/>
                 </a:solidFill>
@@ -5496,67 +4903,21 @@
                 <a:ea typeface="SamsungOneKorean"/>
                 <a:cs typeface="SamsungOneKorean"/>
               </a:rPr>
-              <a:t>공급</a:t>
-            </a:r>
-          </a:p>
-        </p:txBody>
-      </p:sp>
-      <p:sp>
-        <p:nvSpPr>
-          <p:cNvPr id="54" name="Rounded Rectangle 53"/>
-          <p:cNvSpPr/>
-          <p:nvPr/>
-        </p:nvSpPr>
-        <p:spPr>
-          <a:xfrm>
-            <a:off x="9784445" y="3191256"/>
-            <a:ext cx="988740" cy="1472184"/>
-          </a:xfrm>
-          <a:prstGeom prst="roundRect">
-            <a:avLst>
-              <a:gd name="adj" fmla="val 6000"/>
-            </a:avLst>
-          </a:prstGeom>
-          <a:solidFill>
-            <a:srgbClr val="ECECEE"/>
-          </a:solidFill>
-          <a:ln>
-            <a:noFill/>
-          </a:ln>
-          <a:effectLst/>
-        </p:spPr>
-        <p:style>
-          <a:lnRef idx="1">
-            <a:schemeClr val="accent1"/>
-          </a:lnRef>
-          <a:fillRef idx="3">
-            <a:schemeClr val="accent1"/>
-          </a:fillRef>
-          <a:effectRef idx="2">
-            <a:schemeClr val="accent1"/>
-          </a:effectRef>
-          <a:fontRef idx="minor">
-            <a:schemeClr val="lt1"/>
-          </a:fontRef>
-        </p:style>
-        <p:txBody>
-          <a:bodyPr rtlCol="0" anchor="ctr"/>
-          <a:lstStyle/>
-          <a:p>
-            <a:pPr algn="ctr"/>
-          </a:p>
-        </p:txBody>
-      </p:sp>
-      <p:sp>
-        <p:nvSpPr>
-          <p:cNvPr id="55" name="TextBox 54"/>
+              <a:t>CXMT 캐파 점유 11%→15%E(2028) · HBM3 월 6만장, YMTC Xtacking 본딩</a:t>
+            </a:r>
+          </a:p>
+        </p:txBody>
+      </p:sp>
+      <p:sp>
+        <p:nvSpPr>
+          <p:cNvPr id="40" name="TextBox 39"/>
           <p:cNvSpPr txBox="1"/>
           <p:nvPr/>
         </p:nvSpPr>
         <p:spPr>
           <a:xfrm>
-            <a:off x="9784445" y="3035808"/>
-            <a:ext cx="988740" cy="146304"/>
+            <a:off x="9784445" y="2194560"/>
+            <a:ext cx="1977481" cy="566928"/>
           </a:xfrm>
           <a:prstGeom prst="rect">
             <a:avLst/>
@@ -5569,76 +4930,46 @@
           </a:bodyPr>
           <a:lstStyle/>
           <a:p>
-            <a:pPr algn="ctr">
+            <a:pPr algn="l">
               <a:lnSpc>
-                <a:spcPct val="100000"/>
+                <a:spcPct val="116000"/>
               </a:lnSpc>
             </a:pPr>
             <a:r>
               <a:rPr sz="1000" b="1">
                 <a:solidFill>
-                  <a:srgbClr val="1A1A1A"/>
+                  <a:srgbClr val="1428A0"/>
                 </a:solidFill>
                 <a:latin typeface="SamsungOneKorean"/>
                 <a:ea typeface="SamsungOneKorean"/>
                 <a:cs typeface="SamsungOneKorean"/>
               </a:rPr>
-              <a:t>수요</a:t>
-            </a:r>
-          </a:p>
-        </p:txBody>
-      </p:sp>
-      <p:sp>
-        <p:nvSpPr>
-          <p:cNvPr id="56" name="TextBox 55"/>
-          <p:cNvSpPr txBox="1"/>
-          <p:nvPr/>
-        </p:nvSpPr>
-        <p:spPr>
-          <a:xfrm>
-            <a:off x="10773186" y="3035808"/>
-            <a:ext cx="988740" cy="146304"/>
-          </a:xfrm>
-          <a:prstGeom prst="rect">
-            <a:avLst/>
-          </a:prstGeom>
-          <a:noFill/>
-        </p:spPr>
-        <p:txBody>
-          <a:bodyPr wrap="square" anchor="t" lIns="0" rIns="0" tIns="0" bIns="0">
-            <a:spAutoFit/>
-          </a:bodyPr>
-          <a:lstStyle/>
-          <a:p>
-            <a:pPr algn="ctr">
-              <a:lnSpc>
-                <a:spcPct val="100000"/>
-              </a:lnSpc>
-            </a:pPr>
+              <a:t>동인  </a:t>
+            </a:r>
             <a:r>
               <a:rPr sz="1000" b="0">
                 <a:solidFill>
-                  <a:srgbClr val="8A8A8E"/>
+                  <a:srgbClr val="1A1A1A"/>
                 </a:solidFill>
                 <a:latin typeface="SamsungOneKorean"/>
                 <a:ea typeface="SamsungOneKorean"/>
                 <a:cs typeface="SamsungOneKorean"/>
               </a:rPr>
-              <a:t>공급</a:t>
-            </a:r>
-          </a:p>
-        </p:txBody>
-      </p:sp>
-      <p:sp>
-        <p:nvSpPr>
-          <p:cNvPr id="57" name="TextBox 56"/>
+              <a:t>3D DRAM(4F² VCT) · zHBM · CXL 채택 개시로 표준 HBM 주문 이동</a:t>
+            </a:r>
+          </a:p>
+        </p:txBody>
+      </p:sp>
+      <p:sp>
+        <p:nvSpPr>
+          <p:cNvPr id="41" name="TextBox 40"/>
           <p:cNvSpPr txBox="1"/>
           <p:nvPr/>
         </p:nvSpPr>
         <p:spPr>
           <a:xfrm>
-            <a:off x="429768" y="3314700"/>
-            <a:ext cx="877824" cy="146304"/>
+            <a:off x="429768" y="2871216"/>
+            <a:ext cx="877824" cy="310896"/>
           </a:xfrm>
           <a:prstGeom prst="rect">
             <a:avLst/>
@@ -5646,1970 +4977,58 @@
           <a:noFill/>
         </p:spPr>
         <p:txBody>
-          <a:bodyPr wrap="none" anchor="t" lIns="0" rIns="0" tIns="0" bIns="0">
+          <a:bodyPr wrap="square" anchor="t" lIns="0" rIns="0" tIns="0" bIns="0">
             <a:spAutoFit/>
           </a:bodyPr>
           <a:lstStyle/>
           <a:p>
             <a:pPr algn="r">
               <a:lnSpc>
-                <a:spcPct val="100000"/>
+                <a:spcPct val="112000"/>
               </a:lnSpc>
             </a:pPr>
             <a:r>
-              <a:rPr sz="1000" b="0">
-                <a:solidFill>
-                  <a:srgbClr val="555555"/>
+              <a:rPr sz="1000" b="1">
+                <a:solidFill>
+                  <a:srgbClr val="8A8A8E"/>
                 </a:solidFill>
                 <a:latin typeface="SamsungOneKorean"/>
                 <a:ea typeface="SamsungOneKorean"/>
                 <a:cs typeface="SamsungOneKorean"/>
               </a:rPr>
-              <a:t>HBM</a:t>
-            </a:r>
-          </a:p>
-        </p:txBody>
-      </p:sp>
-      <p:sp>
-        <p:nvSpPr>
-          <p:cNvPr id="58" name="TextBox 57"/>
-          <p:cNvSpPr txBox="1"/>
-          <p:nvPr/>
-        </p:nvSpPr>
-        <p:spPr>
-          <a:xfrm>
-            <a:off x="1435608" y="3296412"/>
-            <a:ext cx="988740" cy="182880"/>
-          </a:xfrm>
-          <a:prstGeom prst="rect">
-            <a:avLst/>
-          </a:prstGeom>
-          <a:noFill/>
-        </p:spPr>
-        <p:txBody>
-          <a:bodyPr wrap="square" anchor="t" lIns="0" rIns="0" tIns="0" bIns="0">
-            <a:spAutoFit/>
-          </a:bodyPr>
-          <a:lstStyle/>
-          <a:p>
-            <a:pPr algn="ctr">
+              <a:t>제품 수요</a:t>
+            </a:r>
+          </a:p>
+          <a:p>
+            <a:pPr algn="r">
               <a:lnSpc>
-                <a:spcPct val="100000"/>
+                <a:spcPct val="112000"/>
               </a:lnSpc>
             </a:pPr>
             <a:r>
-              <a:rPr sz="1100" b="1">
-                <a:solidFill>
-                  <a:srgbClr val="1A1A1A"/>
+              <a:rPr sz="1000" b="0">
+                <a:solidFill>
+                  <a:srgbClr val="8A8A8E"/>
                 </a:solidFill>
                 <a:latin typeface="SamsungOneKorean"/>
                 <a:ea typeface="SamsungOneKorean"/>
                 <a:cs typeface="SamsungOneKorean"/>
               </a:rPr>
-              <a:t>▼▼</a:t>
-            </a:r>
-          </a:p>
-        </p:txBody>
-      </p:sp>
-      <p:sp>
-        <p:nvSpPr>
-          <p:cNvPr id="59" name="TextBox 58"/>
-          <p:cNvSpPr txBox="1"/>
-          <p:nvPr/>
-        </p:nvSpPr>
-        <p:spPr>
-          <a:xfrm>
-            <a:off x="2424348" y="3296412"/>
-            <a:ext cx="988740" cy="182880"/>
-          </a:xfrm>
-          <a:prstGeom prst="rect">
-            <a:avLst/>
-          </a:prstGeom>
-          <a:noFill/>
-        </p:spPr>
-        <p:txBody>
-          <a:bodyPr wrap="square" anchor="t" lIns="0" rIns="0" tIns="0" bIns="0">
-            <a:spAutoFit/>
-          </a:bodyPr>
-          <a:lstStyle/>
-          <a:p>
-            <a:pPr algn="ctr">
-              <a:lnSpc>
-                <a:spcPct val="100000"/>
-              </a:lnSpc>
-            </a:pPr>
-            <a:r>
-              <a:rPr sz="1100" b="0">
-                <a:solidFill>
-                  <a:srgbClr val="D9D9D9"/>
-                </a:solidFill>
-                <a:latin typeface="SamsungOneKorean"/>
-                <a:ea typeface="SamsungOneKorean"/>
-                <a:cs typeface="SamsungOneKorean"/>
-              </a:rPr>
-              <a:t>─</a:t>
-            </a:r>
-          </a:p>
-        </p:txBody>
-      </p:sp>
-      <p:sp>
-        <p:nvSpPr>
-          <p:cNvPr id="60" name="TextBox 59"/>
-          <p:cNvSpPr txBox="1"/>
-          <p:nvPr/>
-        </p:nvSpPr>
-        <p:spPr>
-          <a:xfrm>
-            <a:off x="3522817" y="3296412"/>
-            <a:ext cx="988740" cy="182880"/>
-          </a:xfrm>
-          <a:prstGeom prst="rect">
-            <a:avLst/>
-          </a:prstGeom>
-          <a:noFill/>
-        </p:spPr>
-        <p:txBody>
-          <a:bodyPr wrap="square" anchor="t" lIns="0" rIns="0" tIns="0" bIns="0">
-            <a:spAutoFit/>
-          </a:bodyPr>
-          <a:lstStyle/>
-          <a:p>
-            <a:pPr algn="ctr">
-              <a:lnSpc>
-                <a:spcPct val="100000"/>
-              </a:lnSpc>
-            </a:pPr>
-            <a:r>
-              <a:rPr sz="1100" b="0">
-                <a:solidFill>
-                  <a:srgbClr val="555555"/>
-                </a:solidFill>
-                <a:latin typeface="SamsungOneKorean"/>
-                <a:ea typeface="SamsungOneKorean"/>
-                <a:cs typeface="SamsungOneKorean"/>
-              </a:rPr>
-              <a:t>▼</a:t>
-            </a:r>
-          </a:p>
-        </p:txBody>
-      </p:sp>
-      <p:sp>
-        <p:nvSpPr>
-          <p:cNvPr id="61" name="TextBox 60"/>
-          <p:cNvSpPr txBox="1"/>
-          <p:nvPr/>
-        </p:nvSpPr>
-        <p:spPr>
-          <a:xfrm>
-            <a:off x="4511558" y="3296412"/>
-            <a:ext cx="988740" cy="182880"/>
-          </a:xfrm>
-          <a:prstGeom prst="rect">
-            <a:avLst/>
-          </a:prstGeom>
-          <a:noFill/>
-        </p:spPr>
-        <p:txBody>
-          <a:bodyPr wrap="square" anchor="t" lIns="0" rIns="0" tIns="0" bIns="0">
-            <a:spAutoFit/>
-          </a:bodyPr>
-          <a:lstStyle/>
-          <a:p>
-            <a:pPr algn="ctr">
-              <a:lnSpc>
-                <a:spcPct val="100000"/>
-              </a:lnSpc>
-            </a:pPr>
-            <a:r>
-              <a:rPr sz="1100" b="0">
-                <a:solidFill>
-                  <a:srgbClr val="D9D9D9"/>
-                </a:solidFill>
-                <a:latin typeface="SamsungOneKorean"/>
-                <a:ea typeface="SamsungOneKorean"/>
-                <a:cs typeface="SamsungOneKorean"/>
-              </a:rPr>
-              <a:t>─</a:t>
-            </a:r>
-          </a:p>
-        </p:txBody>
-      </p:sp>
-      <p:sp>
-        <p:nvSpPr>
-          <p:cNvPr id="62" name="TextBox 61"/>
-          <p:cNvSpPr txBox="1"/>
-          <p:nvPr/>
-        </p:nvSpPr>
-        <p:spPr>
-          <a:xfrm>
-            <a:off x="5610026" y="3296412"/>
-            <a:ext cx="988740" cy="182880"/>
-          </a:xfrm>
-          <a:prstGeom prst="rect">
-            <a:avLst/>
-          </a:prstGeom>
-          <a:noFill/>
-        </p:spPr>
-        <p:txBody>
-          <a:bodyPr wrap="square" anchor="t" lIns="0" rIns="0" tIns="0" bIns="0">
-            <a:spAutoFit/>
-          </a:bodyPr>
-          <a:lstStyle/>
-          <a:p>
-            <a:pPr algn="ctr">
-              <a:lnSpc>
-                <a:spcPct val="100000"/>
-              </a:lnSpc>
-            </a:pPr>
-            <a:r>
-              <a:rPr sz="1100" b="0">
-                <a:solidFill>
-                  <a:srgbClr val="D9D9D9"/>
-                </a:solidFill>
-                <a:latin typeface="SamsungOneKorean"/>
-                <a:ea typeface="SamsungOneKorean"/>
-                <a:cs typeface="SamsungOneKorean"/>
-              </a:rPr>
-              <a:t>─</a:t>
-            </a:r>
-          </a:p>
-        </p:txBody>
-      </p:sp>
-      <p:sp>
-        <p:nvSpPr>
-          <p:cNvPr id="63" name="TextBox 62"/>
-          <p:cNvSpPr txBox="1"/>
-          <p:nvPr/>
-        </p:nvSpPr>
-        <p:spPr>
-          <a:xfrm>
-            <a:off x="6598767" y="3296412"/>
-            <a:ext cx="988740" cy="182880"/>
-          </a:xfrm>
-          <a:prstGeom prst="rect">
-            <a:avLst/>
-          </a:prstGeom>
-          <a:noFill/>
-        </p:spPr>
-        <p:txBody>
-          <a:bodyPr wrap="square" anchor="t" lIns="0" rIns="0" tIns="0" bIns="0">
-            <a:spAutoFit/>
-          </a:bodyPr>
-          <a:lstStyle/>
-          <a:p>
-            <a:pPr algn="ctr">
-              <a:lnSpc>
-                <a:spcPct val="100000"/>
-              </a:lnSpc>
-            </a:pPr>
-            <a:r>
-              <a:rPr sz="1100" b="0">
-                <a:solidFill>
-                  <a:srgbClr val="555555"/>
-                </a:solidFill>
-                <a:latin typeface="SamsungOneKorean"/>
-                <a:ea typeface="SamsungOneKorean"/>
-                <a:cs typeface="SamsungOneKorean"/>
-              </a:rPr>
-              <a:t>▲</a:t>
-            </a:r>
-          </a:p>
-        </p:txBody>
-      </p:sp>
-      <p:sp>
-        <p:nvSpPr>
-          <p:cNvPr id="64" name="TextBox 63"/>
-          <p:cNvSpPr txBox="1"/>
-          <p:nvPr/>
-        </p:nvSpPr>
-        <p:spPr>
-          <a:xfrm>
-            <a:off x="7697236" y="3296412"/>
-            <a:ext cx="988740" cy="182880"/>
-          </a:xfrm>
-          <a:prstGeom prst="rect">
-            <a:avLst/>
-          </a:prstGeom>
-          <a:noFill/>
-        </p:spPr>
-        <p:txBody>
-          <a:bodyPr wrap="square" anchor="t" lIns="0" rIns="0" tIns="0" bIns="0">
-            <a:spAutoFit/>
-          </a:bodyPr>
-          <a:lstStyle/>
-          <a:p>
-            <a:pPr algn="ctr">
-              <a:lnSpc>
-                <a:spcPct val="100000"/>
-              </a:lnSpc>
-            </a:pPr>
-            <a:r>
-              <a:rPr sz="1100" b="0">
-                <a:solidFill>
-                  <a:srgbClr val="D9D9D9"/>
-                </a:solidFill>
-                <a:latin typeface="SamsungOneKorean"/>
-                <a:ea typeface="SamsungOneKorean"/>
-                <a:cs typeface="SamsungOneKorean"/>
-              </a:rPr>
-              <a:t>─</a:t>
-            </a:r>
-          </a:p>
-        </p:txBody>
-      </p:sp>
-      <p:sp>
-        <p:nvSpPr>
-          <p:cNvPr id="65" name="TextBox 64"/>
-          <p:cNvSpPr txBox="1"/>
-          <p:nvPr/>
-        </p:nvSpPr>
-        <p:spPr>
-          <a:xfrm>
-            <a:off x="8685977" y="3296412"/>
-            <a:ext cx="988740" cy="182880"/>
-          </a:xfrm>
-          <a:prstGeom prst="rect">
-            <a:avLst/>
-          </a:prstGeom>
-          <a:noFill/>
-        </p:spPr>
-        <p:txBody>
-          <a:bodyPr wrap="square" anchor="t" lIns="0" rIns="0" tIns="0" bIns="0">
-            <a:spAutoFit/>
-          </a:bodyPr>
-          <a:lstStyle/>
-          <a:p>
-            <a:pPr algn="ctr">
-              <a:lnSpc>
-                <a:spcPct val="100000"/>
-              </a:lnSpc>
-            </a:pPr>
-            <a:r>
-              <a:rPr sz="1100" b="0">
-                <a:solidFill>
-                  <a:srgbClr val="D9D9D9"/>
-                </a:solidFill>
-                <a:latin typeface="SamsungOneKorean"/>
-                <a:ea typeface="SamsungOneKorean"/>
-                <a:cs typeface="SamsungOneKorean"/>
-              </a:rPr>
-              <a:t>─</a:t>
-            </a:r>
-          </a:p>
-        </p:txBody>
-      </p:sp>
-      <p:sp>
-        <p:nvSpPr>
-          <p:cNvPr id="66" name="TextBox 65"/>
-          <p:cNvSpPr txBox="1"/>
-          <p:nvPr/>
-        </p:nvSpPr>
-        <p:spPr>
-          <a:xfrm>
-            <a:off x="9784445" y="3296412"/>
-            <a:ext cx="988740" cy="182880"/>
-          </a:xfrm>
-          <a:prstGeom prst="rect">
-            <a:avLst/>
-          </a:prstGeom>
-          <a:noFill/>
-        </p:spPr>
-        <p:txBody>
-          <a:bodyPr wrap="square" anchor="t" lIns="0" rIns="0" tIns="0" bIns="0">
-            <a:spAutoFit/>
-          </a:bodyPr>
-          <a:lstStyle/>
-          <a:p>
-            <a:pPr algn="ctr">
-              <a:lnSpc>
-                <a:spcPct val="100000"/>
-              </a:lnSpc>
-            </a:pPr>
-            <a:r>
-              <a:rPr sz="1100" b="1">
-                <a:solidFill>
-                  <a:srgbClr val="1A1A1A"/>
-                </a:solidFill>
-                <a:latin typeface="SamsungOneKorean"/>
-                <a:ea typeface="SamsungOneKorean"/>
-                <a:cs typeface="SamsungOneKorean"/>
-              </a:rPr>
-              <a:t>▼▼</a:t>
-            </a:r>
-          </a:p>
-        </p:txBody>
-      </p:sp>
-      <p:sp>
-        <p:nvSpPr>
-          <p:cNvPr id="67" name="TextBox 66"/>
-          <p:cNvSpPr txBox="1"/>
-          <p:nvPr/>
-        </p:nvSpPr>
-        <p:spPr>
-          <a:xfrm>
-            <a:off x="10773186" y="3296412"/>
-            <a:ext cx="988740" cy="182880"/>
-          </a:xfrm>
-          <a:prstGeom prst="rect">
-            <a:avLst/>
-          </a:prstGeom>
-          <a:noFill/>
-        </p:spPr>
-        <p:txBody>
-          <a:bodyPr wrap="square" anchor="t" lIns="0" rIns="0" tIns="0" bIns="0">
-            <a:spAutoFit/>
-          </a:bodyPr>
-          <a:lstStyle/>
-          <a:p>
-            <a:pPr algn="ctr">
-              <a:lnSpc>
-                <a:spcPct val="100000"/>
-              </a:lnSpc>
-            </a:pPr>
-            <a:r>
-              <a:rPr sz="1100" b="0">
-                <a:solidFill>
-                  <a:srgbClr val="D9D9D9"/>
-                </a:solidFill>
-                <a:latin typeface="SamsungOneKorean"/>
-                <a:ea typeface="SamsungOneKorean"/>
-                <a:cs typeface="SamsungOneKorean"/>
-              </a:rPr>
-              <a:t>─</a:t>
-            </a:r>
-          </a:p>
-        </p:txBody>
-      </p:sp>
-      <p:sp>
-        <p:nvSpPr>
-          <p:cNvPr id="68" name="TextBox 67"/>
-          <p:cNvSpPr txBox="1"/>
-          <p:nvPr/>
-        </p:nvSpPr>
-        <p:spPr>
-          <a:xfrm>
-            <a:off x="429768" y="3666744"/>
-            <a:ext cx="877824" cy="146304"/>
-          </a:xfrm>
-          <a:prstGeom prst="rect">
-            <a:avLst/>
-          </a:prstGeom>
-          <a:noFill/>
-        </p:spPr>
-        <p:txBody>
-          <a:bodyPr wrap="none" anchor="t" lIns="0" rIns="0" tIns="0" bIns="0">
-            <a:spAutoFit/>
-          </a:bodyPr>
-          <a:lstStyle/>
-          <a:p>
-            <a:pPr algn="r">
-              <a:lnSpc>
-                <a:spcPct val="100000"/>
-              </a:lnSpc>
-            </a:pPr>
-            <a:r>
-              <a:rPr sz="1000" b="0">
-                <a:solidFill>
-                  <a:srgbClr val="555555"/>
-                </a:solidFill>
-                <a:latin typeface="SamsungOneKorean"/>
-                <a:ea typeface="SamsungOneKorean"/>
-                <a:cs typeface="SamsungOneKorean"/>
-              </a:rPr>
-              <a:t>서버 DRAM</a:t>
-            </a:r>
-          </a:p>
-        </p:txBody>
-      </p:sp>
-      <p:cxnSp>
-        <p:nvCxnSpPr>
-          <p:cNvPr id="69" name="Connector 68"/>
-          <p:cNvCxnSpPr/>
-          <p:nvPr/>
-        </p:nvCxnSpPr>
-        <p:spPr>
-          <a:xfrm>
-            <a:off x="1435608" y="3575303"/>
-            <a:ext cx="10326319" cy="0"/>
-          </a:xfrm>
-          <a:prstGeom prst="line">
-            <a:avLst/>
-          </a:prstGeom>
-          <a:ln w="5080">
-            <a:solidFill>
-              <a:srgbClr val="D9D9D9"/>
-            </a:solidFill>
-          </a:ln>
-          <a:effectLst/>
-        </p:spPr>
-        <p:style>
-          <a:lnRef idx="2">
-            <a:schemeClr val="accent1"/>
-          </a:lnRef>
-          <a:fillRef idx="0">
-            <a:schemeClr val="accent1"/>
-          </a:fillRef>
-          <a:effectRef idx="1">
-            <a:schemeClr val="accent1"/>
-          </a:effectRef>
-          <a:fontRef idx="minor">
-            <a:schemeClr val="tx1"/>
-          </a:fontRef>
-        </p:style>
-      </p:cxnSp>
-      <p:sp>
-        <p:nvSpPr>
-          <p:cNvPr id="70" name="TextBox 69"/>
-          <p:cNvSpPr txBox="1"/>
-          <p:nvPr/>
-        </p:nvSpPr>
-        <p:spPr>
-          <a:xfrm>
-            <a:off x="1435608" y="3648456"/>
-            <a:ext cx="988740" cy="182880"/>
-          </a:xfrm>
-          <a:prstGeom prst="rect">
-            <a:avLst/>
-          </a:prstGeom>
-          <a:noFill/>
-        </p:spPr>
-        <p:txBody>
-          <a:bodyPr wrap="square" anchor="t" lIns="0" rIns="0" tIns="0" bIns="0">
-            <a:spAutoFit/>
-          </a:bodyPr>
-          <a:lstStyle/>
-          <a:p>
-            <a:pPr algn="ctr">
-              <a:lnSpc>
-                <a:spcPct val="100000"/>
-              </a:lnSpc>
-            </a:pPr>
-            <a:r>
-              <a:rPr sz="1100" b="1">
-                <a:solidFill>
-                  <a:srgbClr val="1A1A1A"/>
-                </a:solidFill>
-                <a:latin typeface="SamsungOneKorean"/>
-                <a:ea typeface="SamsungOneKorean"/>
-                <a:cs typeface="SamsungOneKorean"/>
-              </a:rPr>
-              <a:t>▼▼</a:t>
-            </a:r>
-          </a:p>
-        </p:txBody>
-      </p:sp>
-      <p:sp>
-        <p:nvSpPr>
-          <p:cNvPr id="71" name="TextBox 70"/>
-          <p:cNvSpPr txBox="1"/>
-          <p:nvPr/>
-        </p:nvSpPr>
-        <p:spPr>
-          <a:xfrm>
-            <a:off x="2424348" y="3648456"/>
-            <a:ext cx="988740" cy="182880"/>
-          </a:xfrm>
-          <a:prstGeom prst="rect">
-            <a:avLst/>
-          </a:prstGeom>
-          <a:noFill/>
-        </p:spPr>
-        <p:txBody>
-          <a:bodyPr wrap="square" anchor="t" lIns="0" rIns="0" tIns="0" bIns="0">
-            <a:spAutoFit/>
-          </a:bodyPr>
-          <a:lstStyle/>
-          <a:p>
-            <a:pPr algn="ctr">
-              <a:lnSpc>
-                <a:spcPct val="100000"/>
-              </a:lnSpc>
-            </a:pPr>
-            <a:r>
-              <a:rPr sz="1100" b="0">
-                <a:solidFill>
-                  <a:srgbClr val="D9D9D9"/>
-                </a:solidFill>
-                <a:latin typeface="SamsungOneKorean"/>
-                <a:ea typeface="SamsungOneKorean"/>
-                <a:cs typeface="SamsungOneKorean"/>
-              </a:rPr>
-              <a:t>─</a:t>
-            </a:r>
-          </a:p>
-        </p:txBody>
-      </p:sp>
-      <p:sp>
-        <p:nvSpPr>
-          <p:cNvPr id="72" name="TextBox 71"/>
-          <p:cNvSpPr txBox="1"/>
-          <p:nvPr/>
-        </p:nvSpPr>
-        <p:spPr>
-          <a:xfrm>
-            <a:off x="3522817" y="3648456"/>
-            <a:ext cx="988740" cy="182880"/>
-          </a:xfrm>
-          <a:prstGeom prst="rect">
-            <a:avLst/>
-          </a:prstGeom>
-          <a:noFill/>
-        </p:spPr>
-        <p:txBody>
-          <a:bodyPr wrap="square" anchor="t" lIns="0" rIns="0" tIns="0" bIns="0">
-            <a:spAutoFit/>
-          </a:bodyPr>
-          <a:lstStyle/>
-          <a:p>
-            <a:pPr algn="ctr">
-              <a:lnSpc>
-                <a:spcPct val="100000"/>
-              </a:lnSpc>
-            </a:pPr>
-            <a:r>
-              <a:rPr sz="1100" b="0">
-                <a:solidFill>
-                  <a:srgbClr val="555555"/>
-                </a:solidFill>
-                <a:latin typeface="SamsungOneKorean"/>
-                <a:ea typeface="SamsungOneKorean"/>
-                <a:cs typeface="SamsungOneKorean"/>
-              </a:rPr>
-              <a:t>▼</a:t>
-            </a:r>
-          </a:p>
-        </p:txBody>
-      </p:sp>
-      <p:sp>
-        <p:nvSpPr>
-          <p:cNvPr id="73" name="TextBox 72"/>
-          <p:cNvSpPr txBox="1"/>
-          <p:nvPr/>
-        </p:nvSpPr>
-        <p:spPr>
-          <a:xfrm>
-            <a:off x="4511558" y="3648456"/>
-            <a:ext cx="988740" cy="182880"/>
-          </a:xfrm>
-          <a:prstGeom prst="rect">
-            <a:avLst/>
-          </a:prstGeom>
-          <a:noFill/>
-        </p:spPr>
-        <p:txBody>
-          <a:bodyPr wrap="square" anchor="t" lIns="0" rIns="0" tIns="0" bIns="0">
-            <a:spAutoFit/>
-          </a:bodyPr>
-          <a:lstStyle/>
-          <a:p>
-            <a:pPr algn="ctr">
-              <a:lnSpc>
-                <a:spcPct val="100000"/>
-              </a:lnSpc>
-            </a:pPr>
-            <a:r>
-              <a:rPr sz="1100" b="0">
-                <a:solidFill>
-                  <a:srgbClr val="D9D9D9"/>
-                </a:solidFill>
-                <a:latin typeface="SamsungOneKorean"/>
-                <a:ea typeface="SamsungOneKorean"/>
-                <a:cs typeface="SamsungOneKorean"/>
-              </a:rPr>
-              <a:t>─</a:t>
-            </a:r>
-          </a:p>
-        </p:txBody>
-      </p:sp>
-      <p:sp>
-        <p:nvSpPr>
-          <p:cNvPr id="74" name="TextBox 73"/>
-          <p:cNvSpPr txBox="1"/>
-          <p:nvPr/>
-        </p:nvSpPr>
-        <p:spPr>
-          <a:xfrm>
-            <a:off x="5610026" y="3648456"/>
-            <a:ext cx="988740" cy="182880"/>
-          </a:xfrm>
-          <a:prstGeom prst="rect">
-            <a:avLst/>
-          </a:prstGeom>
-          <a:noFill/>
-        </p:spPr>
-        <p:txBody>
-          <a:bodyPr wrap="square" anchor="t" lIns="0" rIns="0" tIns="0" bIns="0">
-            <a:spAutoFit/>
-          </a:bodyPr>
-          <a:lstStyle/>
-          <a:p>
-            <a:pPr algn="ctr">
-              <a:lnSpc>
-                <a:spcPct val="100000"/>
-              </a:lnSpc>
-            </a:pPr>
-            <a:r>
-              <a:rPr sz="1100" b="0">
-                <a:solidFill>
-                  <a:srgbClr val="D9D9D9"/>
-                </a:solidFill>
-                <a:latin typeface="SamsungOneKorean"/>
-                <a:ea typeface="SamsungOneKorean"/>
-                <a:cs typeface="SamsungOneKorean"/>
-              </a:rPr>
-              <a:t>─</a:t>
-            </a:r>
-          </a:p>
-        </p:txBody>
-      </p:sp>
-      <p:sp>
-        <p:nvSpPr>
-          <p:cNvPr id="75" name="TextBox 74"/>
-          <p:cNvSpPr txBox="1"/>
-          <p:nvPr/>
-        </p:nvSpPr>
-        <p:spPr>
-          <a:xfrm>
-            <a:off x="6598767" y="3648456"/>
-            <a:ext cx="988740" cy="182880"/>
-          </a:xfrm>
-          <a:prstGeom prst="rect">
-            <a:avLst/>
-          </a:prstGeom>
-          <a:noFill/>
-        </p:spPr>
-        <p:txBody>
-          <a:bodyPr wrap="square" anchor="t" lIns="0" rIns="0" tIns="0" bIns="0">
-            <a:spAutoFit/>
-          </a:bodyPr>
-          <a:lstStyle/>
-          <a:p>
-            <a:pPr algn="ctr">
-              <a:lnSpc>
-                <a:spcPct val="100000"/>
-              </a:lnSpc>
-            </a:pPr>
-            <a:r>
-              <a:rPr sz="1100" b="0">
-                <a:solidFill>
-                  <a:srgbClr val="555555"/>
-                </a:solidFill>
-                <a:latin typeface="SamsungOneKorean"/>
-                <a:ea typeface="SamsungOneKorean"/>
-                <a:cs typeface="SamsungOneKorean"/>
-              </a:rPr>
-              <a:t>▲</a:t>
-            </a:r>
-          </a:p>
-        </p:txBody>
-      </p:sp>
-      <p:sp>
-        <p:nvSpPr>
-          <p:cNvPr id="76" name="TextBox 75"/>
-          <p:cNvSpPr txBox="1"/>
-          <p:nvPr/>
-        </p:nvSpPr>
-        <p:spPr>
-          <a:xfrm>
-            <a:off x="7697236" y="3648456"/>
-            <a:ext cx="988740" cy="182880"/>
-          </a:xfrm>
-          <a:prstGeom prst="rect">
-            <a:avLst/>
-          </a:prstGeom>
-          <a:noFill/>
-        </p:spPr>
-        <p:txBody>
-          <a:bodyPr wrap="square" anchor="t" lIns="0" rIns="0" tIns="0" bIns="0">
-            <a:spAutoFit/>
-          </a:bodyPr>
-          <a:lstStyle/>
-          <a:p>
-            <a:pPr algn="ctr">
-              <a:lnSpc>
-                <a:spcPct val="100000"/>
-              </a:lnSpc>
-            </a:pPr>
-            <a:r>
-              <a:rPr sz="1100" b="0">
-                <a:solidFill>
-                  <a:srgbClr val="D9D9D9"/>
-                </a:solidFill>
-                <a:latin typeface="SamsungOneKorean"/>
-                <a:ea typeface="SamsungOneKorean"/>
-                <a:cs typeface="SamsungOneKorean"/>
-              </a:rPr>
-              <a:t>─</a:t>
-            </a:r>
-          </a:p>
-        </p:txBody>
-      </p:sp>
-      <p:sp>
-        <p:nvSpPr>
-          <p:cNvPr id="77" name="TextBox 76"/>
-          <p:cNvSpPr txBox="1"/>
-          <p:nvPr/>
-        </p:nvSpPr>
-        <p:spPr>
-          <a:xfrm>
-            <a:off x="8685977" y="3648456"/>
-            <a:ext cx="988740" cy="182880"/>
-          </a:xfrm>
-          <a:prstGeom prst="rect">
-            <a:avLst/>
-          </a:prstGeom>
-          <a:noFill/>
-        </p:spPr>
-        <p:txBody>
-          <a:bodyPr wrap="square" anchor="t" lIns="0" rIns="0" tIns="0" bIns="0">
-            <a:spAutoFit/>
-          </a:bodyPr>
-          <a:lstStyle/>
-          <a:p>
-            <a:pPr algn="ctr">
-              <a:lnSpc>
-                <a:spcPct val="100000"/>
-              </a:lnSpc>
-            </a:pPr>
-            <a:r>
-              <a:rPr sz="1100" b="0">
-                <a:solidFill>
-                  <a:srgbClr val="555555"/>
-                </a:solidFill>
-                <a:latin typeface="SamsungOneKorean"/>
-                <a:ea typeface="SamsungOneKorean"/>
-                <a:cs typeface="SamsungOneKorean"/>
-              </a:rPr>
-              <a:t>▲</a:t>
-            </a:r>
-          </a:p>
-        </p:txBody>
-      </p:sp>
-      <p:sp>
-        <p:nvSpPr>
-          <p:cNvPr id="78" name="TextBox 77"/>
-          <p:cNvSpPr txBox="1"/>
-          <p:nvPr/>
-        </p:nvSpPr>
-        <p:spPr>
-          <a:xfrm>
-            <a:off x="9784445" y="3648456"/>
-            <a:ext cx="988740" cy="182880"/>
-          </a:xfrm>
-          <a:prstGeom prst="rect">
-            <a:avLst/>
-          </a:prstGeom>
-          <a:noFill/>
-        </p:spPr>
-        <p:txBody>
-          <a:bodyPr wrap="square" anchor="t" lIns="0" rIns="0" tIns="0" bIns="0">
-            <a:spAutoFit/>
-          </a:bodyPr>
-          <a:lstStyle/>
-          <a:p>
-            <a:pPr algn="ctr">
-              <a:lnSpc>
-                <a:spcPct val="100000"/>
-              </a:lnSpc>
-            </a:pPr>
-            <a:r>
-              <a:rPr sz="1100" b="0">
-                <a:solidFill>
-                  <a:srgbClr val="555555"/>
-                </a:solidFill>
-                <a:latin typeface="SamsungOneKorean"/>
-                <a:ea typeface="SamsungOneKorean"/>
-                <a:cs typeface="SamsungOneKorean"/>
-              </a:rPr>
-              <a:t>▼</a:t>
-            </a:r>
-          </a:p>
-        </p:txBody>
-      </p:sp>
-      <p:sp>
-        <p:nvSpPr>
-          <p:cNvPr id="79" name="TextBox 78"/>
-          <p:cNvSpPr txBox="1"/>
-          <p:nvPr/>
-        </p:nvSpPr>
-        <p:spPr>
-          <a:xfrm>
-            <a:off x="10773186" y="3648456"/>
-            <a:ext cx="988740" cy="182880"/>
-          </a:xfrm>
-          <a:prstGeom prst="rect">
-            <a:avLst/>
-          </a:prstGeom>
-          <a:noFill/>
-        </p:spPr>
-        <p:txBody>
-          <a:bodyPr wrap="square" anchor="t" lIns="0" rIns="0" tIns="0" bIns="0">
-            <a:spAutoFit/>
-          </a:bodyPr>
-          <a:lstStyle/>
-          <a:p>
-            <a:pPr algn="ctr">
-              <a:lnSpc>
-                <a:spcPct val="100000"/>
-              </a:lnSpc>
-            </a:pPr>
-            <a:r>
-              <a:rPr sz="1100" b="0">
-                <a:solidFill>
-                  <a:srgbClr val="D9D9D9"/>
-                </a:solidFill>
-                <a:latin typeface="SamsungOneKorean"/>
-                <a:ea typeface="SamsungOneKorean"/>
-                <a:cs typeface="SamsungOneKorean"/>
-              </a:rPr>
-              <a:t>─</a:t>
-            </a:r>
-          </a:p>
-        </p:txBody>
-      </p:sp>
-      <p:sp>
-        <p:nvSpPr>
-          <p:cNvPr id="80" name="TextBox 79"/>
-          <p:cNvSpPr txBox="1"/>
-          <p:nvPr/>
-        </p:nvSpPr>
-        <p:spPr>
-          <a:xfrm>
-            <a:off x="429768" y="4018788"/>
-            <a:ext cx="877824" cy="146304"/>
-          </a:xfrm>
-          <a:prstGeom prst="rect">
-            <a:avLst/>
-          </a:prstGeom>
-          <a:noFill/>
-        </p:spPr>
-        <p:txBody>
-          <a:bodyPr wrap="none" anchor="t" lIns="0" rIns="0" tIns="0" bIns="0">
-            <a:spAutoFit/>
-          </a:bodyPr>
-          <a:lstStyle/>
-          <a:p>
-            <a:pPr algn="r">
-              <a:lnSpc>
-                <a:spcPct val="100000"/>
-              </a:lnSpc>
-            </a:pPr>
-            <a:r>
-              <a:rPr sz="1000" b="0">
-                <a:solidFill>
-                  <a:srgbClr val="555555"/>
-                </a:solidFill>
-                <a:latin typeface="SamsungOneKorean"/>
-                <a:ea typeface="SamsungOneKorean"/>
-                <a:cs typeface="SamsungOneKorean"/>
-              </a:rPr>
-              <a:t>범용·레거시</a:t>
-            </a:r>
-          </a:p>
-        </p:txBody>
-      </p:sp>
-      <p:cxnSp>
-        <p:nvCxnSpPr>
-          <p:cNvPr id="81" name="Connector 80"/>
-          <p:cNvCxnSpPr/>
-          <p:nvPr/>
-        </p:nvCxnSpPr>
-        <p:spPr>
-          <a:xfrm>
-            <a:off x="1435608" y="3927348"/>
-            <a:ext cx="10326319" cy="0"/>
-          </a:xfrm>
-          <a:prstGeom prst="line">
-            <a:avLst/>
-          </a:prstGeom>
-          <a:ln w="5080">
-            <a:solidFill>
-              <a:srgbClr val="D9D9D9"/>
-            </a:solidFill>
-          </a:ln>
-          <a:effectLst/>
-        </p:spPr>
-        <p:style>
-          <a:lnRef idx="2">
-            <a:schemeClr val="accent1"/>
-          </a:lnRef>
-          <a:fillRef idx="0">
-            <a:schemeClr val="accent1"/>
-          </a:fillRef>
-          <a:effectRef idx="1">
-            <a:schemeClr val="accent1"/>
-          </a:effectRef>
-          <a:fontRef idx="minor">
-            <a:schemeClr val="tx1"/>
-          </a:fontRef>
-        </p:style>
-      </p:cxnSp>
-      <p:sp>
-        <p:nvSpPr>
-          <p:cNvPr id="82" name="TextBox 81"/>
-          <p:cNvSpPr txBox="1"/>
-          <p:nvPr/>
-        </p:nvSpPr>
-        <p:spPr>
-          <a:xfrm>
-            <a:off x="1435608" y="4000500"/>
-            <a:ext cx="988740" cy="182880"/>
-          </a:xfrm>
-          <a:prstGeom prst="rect">
-            <a:avLst/>
-          </a:prstGeom>
-          <a:noFill/>
-        </p:spPr>
-        <p:txBody>
-          <a:bodyPr wrap="square" anchor="t" lIns="0" rIns="0" tIns="0" bIns="0">
-            <a:spAutoFit/>
-          </a:bodyPr>
-          <a:lstStyle/>
-          <a:p>
-            <a:pPr algn="ctr">
-              <a:lnSpc>
-                <a:spcPct val="100000"/>
-              </a:lnSpc>
-            </a:pPr>
-            <a:r>
-              <a:rPr sz="1100" b="0">
-                <a:solidFill>
-                  <a:srgbClr val="D9D9D9"/>
-                </a:solidFill>
-                <a:latin typeface="SamsungOneKorean"/>
-                <a:ea typeface="SamsungOneKorean"/>
-                <a:cs typeface="SamsungOneKorean"/>
-              </a:rPr>
-              <a:t>─</a:t>
-            </a:r>
-          </a:p>
-        </p:txBody>
-      </p:sp>
-      <p:sp>
-        <p:nvSpPr>
-          <p:cNvPr id="83" name="TextBox 82"/>
-          <p:cNvSpPr txBox="1"/>
-          <p:nvPr/>
-        </p:nvSpPr>
-        <p:spPr>
-          <a:xfrm>
-            <a:off x="2424348" y="4000500"/>
-            <a:ext cx="988740" cy="182880"/>
-          </a:xfrm>
-          <a:prstGeom prst="rect">
-            <a:avLst/>
-          </a:prstGeom>
-          <a:noFill/>
-        </p:spPr>
-        <p:txBody>
-          <a:bodyPr wrap="square" anchor="t" lIns="0" rIns="0" tIns="0" bIns="0">
-            <a:spAutoFit/>
-          </a:bodyPr>
-          <a:lstStyle/>
-          <a:p>
-            <a:pPr algn="ctr">
-              <a:lnSpc>
-                <a:spcPct val="100000"/>
-              </a:lnSpc>
-            </a:pPr>
-            <a:r>
-              <a:rPr sz="1100" b="0">
-                <a:solidFill>
-                  <a:srgbClr val="D9D9D9"/>
-                </a:solidFill>
-                <a:latin typeface="SamsungOneKorean"/>
-                <a:ea typeface="SamsungOneKorean"/>
-                <a:cs typeface="SamsungOneKorean"/>
-              </a:rPr>
-              <a:t>─</a:t>
-            </a:r>
-          </a:p>
-        </p:txBody>
-      </p:sp>
-      <p:sp>
-        <p:nvSpPr>
-          <p:cNvPr id="84" name="TextBox 83"/>
-          <p:cNvSpPr txBox="1"/>
-          <p:nvPr/>
-        </p:nvSpPr>
-        <p:spPr>
-          <a:xfrm>
-            <a:off x="3522817" y="4000500"/>
-            <a:ext cx="988740" cy="182880"/>
-          </a:xfrm>
-          <a:prstGeom prst="rect">
-            <a:avLst/>
-          </a:prstGeom>
-          <a:noFill/>
-        </p:spPr>
-        <p:txBody>
-          <a:bodyPr wrap="square" anchor="t" lIns="0" rIns="0" tIns="0" bIns="0">
-            <a:spAutoFit/>
-          </a:bodyPr>
-          <a:lstStyle/>
-          <a:p>
-            <a:pPr algn="ctr">
-              <a:lnSpc>
-                <a:spcPct val="100000"/>
-              </a:lnSpc>
-            </a:pPr>
-            <a:r>
-              <a:rPr sz="1100" b="0">
-                <a:solidFill>
-                  <a:srgbClr val="555555"/>
-                </a:solidFill>
-                <a:latin typeface="SamsungOneKorean"/>
-                <a:ea typeface="SamsungOneKorean"/>
-                <a:cs typeface="SamsungOneKorean"/>
-              </a:rPr>
-              <a:t>▼</a:t>
-            </a:r>
-          </a:p>
-        </p:txBody>
-      </p:sp>
-      <p:sp>
-        <p:nvSpPr>
-          <p:cNvPr id="85" name="TextBox 84"/>
-          <p:cNvSpPr txBox="1"/>
-          <p:nvPr/>
-        </p:nvSpPr>
-        <p:spPr>
-          <a:xfrm>
-            <a:off x="4511558" y="4000500"/>
-            <a:ext cx="988740" cy="182880"/>
-          </a:xfrm>
-          <a:prstGeom prst="rect">
-            <a:avLst/>
-          </a:prstGeom>
-          <a:noFill/>
-        </p:spPr>
-        <p:txBody>
-          <a:bodyPr wrap="square" anchor="t" lIns="0" rIns="0" tIns="0" bIns="0">
-            <a:spAutoFit/>
-          </a:bodyPr>
-          <a:lstStyle/>
-          <a:p>
-            <a:pPr algn="ctr">
-              <a:lnSpc>
-                <a:spcPct val="100000"/>
-              </a:lnSpc>
-            </a:pPr>
-            <a:r>
-              <a:rPr sz="1100" b="0">
-                <a:solidFill>
-                  <a:srgbClr val="D9D9D9"/>
-                </a:solidFill>
-                <a:latin typeface="SamsungOneKorean"/>
-                <a:ea typeface="SamsungOneKorean"/>
-                <a:cs typeface="SamsungOneKorean"/>
-              </a:rPr>
-              <a:t>─</a:t>
-            </a:r>
-          </a:p>
-        </p:txBody>
-      </p:sp>
-      <p:sp>
-        <p:nvSpPr>
-          <p:cNvPr id="86" name="TextBox 85"/>
-          <p:cNvSpPr txBox="1"/>
-          <p:nvPr/>
-        </p:nvSpPr>
-        <p:spPr>
-          <a:xfrm>
-            <a:off x="5610026" y="4000500"/>
-            <a:ext cx="988740" cy="182880"/>
-          </a:xfrm>
-          <a:prstGeom prst="rect">
-            <a:avLst/>
-          </a:prstGeom>
-          <a:noFill/>
-        </p:spPr>
-        <p:txBody>
-          <a:bodyPr wrap="square" anchor="t" lIns="0" rIns="0" tIns="0" bIns="0">
-            <a:spAutoFit/>
-          </a:bodyPr>
-          <a:lstStyle/>
-          <a:p>
-            <a:pPr algn="ctr">
-              <a:lnSpc>
-                <a:spcPct val="100000"/>
-              </a:lnSpc>
-            </a:pPr>
-            <a:r>
-              <a:rPr sz="1100" b="0">
-                <a:solidFill>
-                  <a:srgbClr val="D9D9D9"/>
-                </a:solidFill>
-                <a:latin typeface="SamsungOneKorean"/>
-                <a:ea typeface="SamsungOneKorean"/>
-                <a:cs typeface="SamsungOneKorean"/>
-              </a:rPr>
-              <a:t>─</a:t>
-            </a:r>
-          </a:p>
-        </p:txBody>
-      </p:sp>
-      <p:sp>
-        <p:nvSpPr>
-          <p:cNvPr id="87" name="TextBox 86"/>
-          <p:cNvSpPr txBox="1"/>
-          <p:nvPr/>
-        </p:nvSpPr>
-        <p:spPr>
-          <a:xfrm>
-            <a:off x="6598767" y="4000500"/>
-            <a:ext cx="988740" cy="182880"/>
-          </a:xfrm>
-          <a:prstGeom prst="rect">
-            <a:avLst/>
-          </a:prstGeom>
-          <a:noFill/>
-        </p:spPr>
-        <p:txBody>
-          <a:bodyPr wrap="square" anchor="t" lIns="0" rIns="0" tIns="0" bIns="0">
-            <a:spAutoFit/>
-          </a:bodyPr>
-          <a:lstStyle/>
-          <a:p>
-            <a:pPr algn="ctr">
-              <a:lnSpc>
-                <a:spcPct val="100000"/>
-              </a:lnSpc>
-            </a:pPr>
-            <a:r>
-              <a:rPr sz="1100" b="1">
-                <a:solidFill>
-                  <a:srgbClr val="1A1A1A"/>
-                </a:solidFill>
-                <a:latin typeface="SamsungOneKorean"/>
-                <a:ea typeface="SamsungOneKorean"/>
-                <a:cs typeface="SamsungOneKorean"/>
-              </a:rPr>
-              <a:t>▲▲</a:t>
-            </a:r>
-          </a:p>
-        </p:txBody>
-      </p:sp>
-      <p:sp>
-        <p:nvSpPr>
-          <p:cNvPr id="88" name="TextBox 87"/>
-          <p:cNvSpPr txBox="1"/>
-          <p:nvPr/>
-        </p:nvSpPr>
-        <p:spPr>
-          <a:xfrm>
-            <a:off x="7697236" y="4000500"/>
-            <a:ext cx="988740" cy="182880"/>
-          </a:xfrm>
-          <a:prstGeom prst="rect">
-            <a:avLst/>
-          </a:prstGeom>
-          <a:noFill/>
-        </p:spPr>
-        <p:txBody>
-          <a:bodyPr wrap="square" anchor="t" lIns="0" rIns="0" tIns="0" bIns="0">
-            <a:spAutoFit/>
-          </a:bodyPr>
-          <a:lstStyle/>
-          <a:p>
-            <a:pPr algn="ctr">
-              <a:lnSpc>
-                <a:spcPct val="100000"/>
-              </a:lnSpc>
-            </a:pPr>
-            <a:r>
-              <a:rPr sz="1100" b="0">
-                <a:solidFill>
-                  <a:srgbClr val="D9D9D9"/>
-                </a:solidFill>
-                <a:latin typeface="SamsungOneKorean"/>
-                <a:ea typeface="SamsungOneKorean"/>
-                <a:cs typeface="SamsungOneKorean"/>
-              </a:rPr>
-              <a:t>─</a:t>
-            </a:r>
-          </a:p>
-        </p:txBody>
-      </p:sp>
-      <p:sp>
-        <p:nvSpPr>
-          <p:cNvPr id="89" name="TextBox 88"/>
-          <p:cNvSpPr txBox="1"/>
-          <p:nvPr/>
-        </p:nvSpPr>
-        <p:spPr>
-          <a:xfrm>
-            <a:off x="8685977" y="4000500"/>
-            <a:ext cx="988740" cy="182880"/>
-          </a:xfrm>
-          <a:prstGeom prst="rect">
-            <a:avLst/>
-          </a:prstGeom>
-          <a:noFill/>
-        </p:spPr>
-        <p:txBody>
-          <a:bodyPr wrap="square" anchor="t" lIns="0" rIns="0" tIns="0" bIns="0">
-            <a:spAutoFit/>
-          </a:bodyPr>
-          <a:lstStyle/>
-          <a:p>
-            <a:pPr algn="ctr">
-              <a:lnSpc>
-                <a:spcPct val="100000"/>
-              </a:lnSpc>
-            </a:pPr>
-            <a:r>
-              <a:rPr sz="1100" b="1">
-                <a:solidFill>
-                  <a:srgbClr val="1A1A1A"/>
-                </a:solidFill>
-                <a:latin typeface="SamsungOneKorean"/>
-                <a:ea typeface="SamsungOneKorean"/>
-                <a:cs typeface="SamsungOneKorean"/>
-              </a:rPr>
-              <a:t>▲▲</a:t>
-            </a:r>
-          </a:p>
-        </p:txBody>
-      </p:sp>
-      <p:sp>
-        <p:nvSpPr>
-          <p:cNvPr id="90" name="TextBox 89"/>
-          <p:cNvSpPr txBox="1"/>
-          <p:nvPr/>
-        </p:nvSpPr>
-        <p:spPr>
-          <a:xfrm>
-            <a:off x="9784445" y="4000500"/>
-            <a:ext cx="988740" cy="182880"/>
-          </a:xfrm>
-          <a:prstGeom prst="rect">
-            <a:avLst/>
-          </a:prstGeom>
-          <a:noFill/>
-        </p:spPr>
-        <p:txBody>
-          <a:bodyPr wrap="square" anchor="t" lIns="0" rIns="0" tIns="0" bIns="0">
-            <a:spAutoFit/>
-          </a:bodyPr>
-          <a:lstStyle/>
-          <a:p>
-            <a:pPr algn="ctr">
-              <a:lnSpc>
-                <a:spcPct val="100000"/>
-              </a:lnSpc>
-            </a:pPr>
-            <a:r>
-              <a:rPr sz="1100" b="0">
-                <a:solidFill>
-                  <a:srgbClr val="D9D9D9"/>
-                </a:solidFill>
-                <a:latin typeface="SamsungOneKorean"/>
-                <a:ea typeface="SamsungOneKorean"/>
-                <a:cs typeface="SamsungOneKorean"/>
-              </a:rPr>
-              <a:t>─</a:t>
-            </a:r>
-          </a:p>
-        </p:txBody>
-      </p:sp>
-      <p:sp>
-        <p:nvSpPr>
-          <p:cNvPr id="91" name="TextBox 90"/>
-          <p:cNvSpPr txBox="1"/>
-          <p:nvPr/>
-        </p:nvSpPr>
-        <p:spPr>
-          <a:xfrm>
-            <a:off x="10773186" y="4000500"/>
-            <a:ext cx="988740" cy="182880"/>
-          </a:xfrm>
-          <a:prstGeom prst="rect">
-            <a:avLst/>
-          </a:prstGeom>
-          <a:noFill/>
-        </p:spPr>
-        <p:txBody>
-          <a:bodyPr wrap="square" anchor="t" lIns="0" rIns="0" tIns="0" bIns="0">
-            <a:spAutoFit/>
-          </a:bodyPr>
-          <a:lstStyle/>
-          <a:p>
-            <a:pPr algn="ctr">
-              <a:lnSpc>
-                <a:spcPct val="100000"/>
-              </a:lnSpc>
-            </a:pPr>
-            <a:r>
-              <a:rPr sz="1100" b="0">
-                <a:solidFill>
-                  <a:srgbClr val="D9D9D9"/>
-                </a:solidFill>
-                <a:latin typeface="SamsungOneKorean"/>
-                <a:ea typeface="SamsungOneKorean"/>
-                <a:cs typeface="SamsungOneKorean"/>
-              </a:rPr>
-              <a:t>─</a:t>
-            </a:r>
-          </a:p>
-        </p:txBody>
-      </p:sp>
-      <p:sp>
-        <p:nvSpPr>
-          <p:cNvPr id="92" name="TextBox 91"/>
-          <p:cNvSpPr txBox="1"/>
-          <p:nvPr/>
-        </p:nvSpPr>
-        <p:spPr>
-          <a:xfrm>
-            <a:off x="429768" y="4370832"/>
-            <a:ext cx="877824" cy="146304"/>
-          </a:xfrm>
-          <a:prstGeom prst="rect">
-            <a:avLst/>
-          </a:prstGeom>
-          <a:noFill/>
-        </p:spPr>
-        <p:txBody>
-          <a:bodyPr wrap="none" anchor="t" lIns="0" rIns="0" tIns="0" bIns="0">
-            <a:spAutoFit/>
-          </a:bodyPr>
-          <a:lstStyle/>
-          <a:p>
-            <a:pPr algn="r">
-              <a:lnSpc>
-                <a:spcPct val="100000"/>
-              </a:lnSpc>
-            </a:pPr>
-            <a:r>
-              <a:rPr sz="1000" b="0">
-                <a:solidFill>
-                  <a:srgbClr val="555555"/>
-                </a:solidFill>
-                <a:latin typeface="SamsungOneKorean"/>
-                <a:ea typeface="SamsungOneKorean"/>
-                <a:cs typeface="SamsungOneKorean"/>
-              </a:rPr>
-              <a:t>NAND·SSD</a:t>
-            </a:r>
-          </a:p>
-        </p:txBody>
-      </p:sp>
-      <p:cxnSp>
-        <p:nvCxnSpPr>
-          <p:cNvPr id="93" name="Connector 92"/>
-          <p:cNvCxnSpPr/>
-          <p:nvPr/>
-        </p:nvCxnSpPr>
-        <p:spPr>
-          <a:xfrm>
-            <a:off x="1435608" y="4279392"/>
-            <a:ext cx="10326319" cy="0"/>
-          </a:xfrm>
-          <a:prstGeom prst="line">
-            <a:avLst/>
-          </a:prstGeom>
-          <a:ln w="5080">
-            <a:solidFill>
-              <a:srgbClr val="D9D9D9"/>
-            </a:solidFill>
-          </a:ln>
-          <a:effectLst/>
-        </p:spPr>
-        <p:style>
-          <a:lnRef idx="2">
-            <a:schemeClr val="accent1"/>
-          </a:lnRef>
-          <a:fillRef idx="0">
-            <a:schemeClr val="accent1"/>
-          </a:fillRef>
-          <a:effectRef idx="1">
-            <a:schemeClr val="accent1"/>
-          </a:effectRef>
-          <a:fontRef idx="minor">
-            <a:schemeClr val="tx1"/>
-          </a:fontRef>
-        </p:style>
-      </p:cxnSp>
-      <p:sp>
-        <p:nvSpPr>
-          <p:cNvPr id="94" name="TextBox 93"/>
-          <p:cNvSpPr txBox="1"/>
-          <p:nvPr/>
-        </p:nvSpPr>
-        <p:spPr>
-          <a:xfrm>
-            <a:off x="1435608" y="4352544"/>
-            <a:ext cx="988740" cy="182880"/>
-          </a:xfrm>
-          <a:prstGeom prst="rect">
-            <a:avLst/>
-          </a:prstGeom>
-          <a:noFill/>
-        </p:spPr>
-        <p:txBody>
-          <a:bodyPr wrap="square" anchor="t" lIns="0" rIns="0" tIns="0" bIns="0">
-            <a:spAutoFit/>
-          </a:bodyPr>
-          <a:lstStyle/>
-          <a:p>
-            <a:pPr algn="ctr">
-              <a:lnSpc>
-                <a:spcPct val="100000"/>
-              </a:lnSpc>
-            </a:pPr>
-            <a:r>
-              <a:rPr sz="1100" b="0">
-                <a:solidFill>
-                  <a:srgbClr val="555555"/>
-                </a:solidFill>
-                <a:latin typeface="SamsungOneKorean"/>
-                <a:ea typeface="SamsungOneKorean"/>
-                <a:cs typeface="SamsungOneKorean"/>
-              </a:rPr>
-              <a:t>▼</a:t>
-            </a:r>
-          </a:p>
-        </p:txBody>
-      </p:sp>
-      <p:sp>
-        <p:nvSpPr>
-          <p:cNvPr id="95" name="TextBox 94"/>
-          <p:cNvSpPr txBox="1"/>
-          <p:nvPr/>
-        </p:nvSpPr>
-        <p:spPr>
-          <a:xfrm>
-            <a:off x="2424348" y="4352544"/>
-            <a:ext cx="988740" cy="182880"/>
-          </a:xfrm>
-          <a:prstGeom prst="rect">
-            <a:avLst/>
-          </a:prstGeom>
-          <a:noFill/>
-        </p:spPr>
-        <p:txBody>
-          <a:bodyPr wrap="square" anchor="t" lIns="0" rIns="0" tIns="0" bIns="0">
-            <a:spAutoFit/>
-          </a:bodyPr>
-          <a:lstStyle/>
-          <a:p>
-            <a:pPr algn="ctr">
-              <a:lnSpc>
-                <a:spcPct val="100000"/>
-              </a:lnSpc>
-            </a:pPr>
-            <a:r>
-              <a:rPr sz="1100" b="0">
-                <a:solidFill>
-                  <a:srgbClr val="D9D9D9"/>
-                </a:solidFill>
-                <a:latin typeface="SamsungOneKorean"/>
-                <a:ea typeface="SamsungOneKorean"/>
-                <a:cs typeface="SamsungOneKorean"/>
-              </a:rPr>
-              <a:t>─</a:t>
-            </a:r>
-          </a:p>
-        </p:txBody>
-      </p:sp>
-      <p:sp>
-        <p:nvSpPr>
-          <p:cNvPr id="96" name="TextBox 95"/>
-          <p:cNvSpPr txBox="1"/>
-          <p:nvPr/>
-        </p:nvSpPr>
-        <p:spPr>
-          <a:xfrm>
-            <a:off x="3522817" y="4352544"/>
-            <a:ext cx="988740" cy="182880"/>
-          </a:xfrm>
-          <a:prstGeom prst="rect">
-            <a:avLst/>
-          </a:prstGeom>
-          <a:noFill/>
-        </p:spPr>
-        <p:txBody>
-          <a:bodyPr wrap="square" anchor="t" lIns="0" rIns="0" tIns="0" bIns="0">
-            <a:spAutoFit/>
-          </a:bodyPr>
-          <a:lstStyle/>
-          <a:p>
-            <a:pPr algn="ctr">
-              <a:lnSpc>
-                <a:spcPct val="100000"/>
-              </a:lnSpc>
-            </a:pPr>
-            <a:r>
-              <a:rPr sz="1100" b="0">
-                <a:solidFill>
-                  <a:srgbClr val="555555"/>
-                </a:solidFill>
-                <a:latin typeface="SamsungOneKorean"/>
-                <a:ea typeface="SamsungOneKorean"/>
-                <a:cs typeface="SamsungOneKorean"/>
-              </a:rPr>
-              <a:t>▲</a:t>
-            </a:r>
-          </a:p>
-        </p:txBody>
-      </p:sp>
-      <p:sp>
-        <p:nvSpPr>
-          <p:cNvPr id="97" name="TextBox 96"/>
-          <p:cNvSpPr txBox="1"/>
-          <p:nvPr/>
-        </p:nvSpPr>
-        <p:spPr>
-          <a:xfrm>
-            <a:off x="4511558" y="4352544"/>
-            <a:ext cx="988740" cy="182880"/>
-          </a:xfrm>
-          <a:prstGeom prst="rect">
-            <a:avLst/>
-          </a:prstGeom>
-          <a:noFill/>
-        </p:spPr>
-        <p:txBody>
-          <a:bodyPr wrap="square" anchor="t" lIns="0" rIns="0" tIns="0" bIns="0">
-            <a:spAutoFit/>
-          </a:bodyPr>
-          <a:lstStyle/>
-          <a:p>
-            <a:pPr algn="ctr">
-              <a:lnSpc>
-                <a:spcPct val="100000"/>
-              </a:lnSpc>
-            </a:pPr>
-            <a:r>
-              <a:rPr sz="1100" b="0">
-                <a:solidFill>
-                  <a:srgbClr val="D9D9D9"/>
-                </a:solidFill>
-                <a:latin typeface="SamsungOneKorean"/>
-                <a:ea typeface="SamsungOneKorean"/>
-                <a:cs typeface="SamsungOneKorean"/>
-              </a:rPr>
-              <a:t>─</a:t>
-            </a:r>
-          </a:p>
-        </p:txBody>
-      </p:sp>
-      <p:sp>
-        <p:nvSpPr>
-          <p:cNvPr id="98" name="TextBox 97"/>
-          <p:cNvSpPr txBox="1"/>
-          <p:nvPr/>
-        </p:nvSpPr>
-        <p:spPr>
-          <a:xfrm>
-            <a:off x="5610026" y="4352544"/>
-            <a:ext cx="988740" cy="182880"/>
-          </a:xfrm>
-          <a:prstGeom prst="rect">
-            <a:avLst/>
-          </a:prstGeom>
-          <a:noFill/>
-        </p:spPr>
-        <p:txBody>
-          <a:bodyPr wrap="square" anchor="t" lIns="0" rIns="0" tIns="0" bIns="0">
-            <a:spAutoFit/>
-          </a:bodyPr>
-          <a:lstStyle/>
-          <a:p>
-            <a:pPr algn="ctr">
-              <a:lnSpc>
-                <a:spcPct val="100000"/>
-              </a:lnSpc>
-            </a:pPr>
-            <a:r>
-              <a:rPr sz="1100" b="0">
-                <a:solidFill>
-                  <a:srgbClr val="D9D9D9"/>
-                </a:solidFill>
-                <a:latin typeface="SamsungOneKorean"/>
-                <a:ea typeface="SamsungOneKorean"/>
-                <a:cs typeface="SamsungOneKorean"/>
-              </a:rPr>
-              <a:t>─</a:t>
-            </a:r>
-          </a:p>
-        </p:txBody>
-      </p:sp>
-      <p:sp>
-        <p:nvSpPr>
-          <p:cNvPr id="99" name="TextBox 98"/>
-          <p:cNvSpPr txBox="1"/>
-          <p:nvPr/>
-        </p:nvSpPr>
-        <p:spPr>
-          <a:xfrm>
-            <a:off x="6598767" y="4352544"/>
-            <a:ext cx="988740" cy="182880"/>
-          </a:xfrm>
-          <a:prstGeom prst="rect">
-            <a:avLst/>
-          </a:prstGeom>
-          <a:noFill/>
-        </p:spPr>
-        <p:txBody>
-          <a:bodyPr wrap="square" anchor="t" lIns="0" rIns="0" tIns="0" bIns="0">
-            <a:spAutoFit/>
-          </a:bodyPr>
-          <a:lstStyle/>
-          <a:p>
-            <a:pPr algn="ctr">
-              <a:lnSpc>
-                <a:spcPct val="100000"/>
-              </a:lnSpc>
-            </a:pPr>
-            <a:r>
-              <a:rPr sz="1100" b="1">
-                <a:solidFill>
-                  <a:srgbClr val="1A1A1A"/>
-                </a:solidFill>
-                <a:latin typeface="SamsungOneKorean"/>
-                <a:ea typeface="SamsungOneKorean"/>
-                <a:cs typeface="SamsungOneKorean"/>
-              </a:rPr>
-              <a:t>▲▲</a:t>
-            </a:r>
-          </a:p>
-        </p:txBody>
-      </p:sp>
-      <p:sp>
-        <p:nvSpPr>
-          <p:cNvPr id="100" name="TextBox 99"/>
-          <p:cNvSpPr txBox="1"/>
-          <p:nvPr/>
-        </p:nvSpPr>
-        <p:spPr>
-          <a:xfrm>
-            <a:off x="7697236" y="4352544"/>
-            <a:ext cx="988740" cy="182880"/>
-          </a:xfrm>
-          <a:prstGeom prst="rect">
-            <a:avLst/>
-          </a:prstGeom>
-          <a:noFill/>
-        </p:spPr>
-        <p:txBody>
-          <a:bodyPr wrap="square" anchor="t" lIns="0" rIns="0" tIns="0" bIns="0">
-            <a:spAutoFit/>
-          </a:bodyPr>
-          <a:lstStyle/>
-          <a:p>
-            <a:pPr algn="ctr">
-              <a:lnSpc>
-                <a:spcPct val="100000"/>
-              </a:lnSpc>
-            </a:pPr>
-            <a:r>
-              <a:rPr sz="1100" b="0">
-                <a:solidFill>
-                  <a:srgbClr val="D9D9D9"/>
-                </a:solidFill>
-                <a:latin typeface="SamsungOneKorean"/>
-                <a:ea typeface="SamsungOneKorean"/>
-                <a:cs typeface="SamsungOneKorean"/>
-              </a:rPr>
-              <a:t>─</a:t>
-            </a:r>
-          </a:p>
-        </p:txBody>
-      </p:sp>
-      <p:sp>
-        <p:nvSpPr>
-          <p:cNvPr id="101" name="TextBox 100"/>
-          <p:cNvSpPr txBox="1"/>
-          <p:nvPr/>
-        </p:nvSpPr>
-        <p:spPr>
-          <a:xfrm>
-            <a:off x="8685977" y="4352544"/>
-            <a:ext cx="988740" cy="182880"/>
-          </a:xfrm>
-          <a:prstGeom prst="rect">
-            <a:avLst/>
-          </a:prstGeom>
-          <a:noFill/>
-        </p:spPr>
-        <p:txBody>
-          <a:bodyPr wrap="square" anchor="t" lIns="0" rIns="0" tIns="0" bIns="0">
-            <a:spAutoFit/>
-          </a:bodyPr>
-          <a:lstStyle/>
-          <a:p>
-            <a:pPr algn="ctr">
-              <a:lnSpc>
-                <a:spcPct val="100000"/>
-              </a:lnSpc>
-            </a:pPr>
-            <a:r>
-              <a:rPr sz="1100" b="1">
-                <a:solidFill>
-                  <a:srgbClr val="1A1A1A"/>
-                </a:solidFill>
-                <a:latin typeface="SamsungOneKorean"/>
-                <a:ea typeface="SamsungOneKorean"/>
-                <a:cs typeface="SamsungOneKorean"/>
-              </a:rPr>
-              <a:t>▲▲</a:t>
-            </a:r>
-          </a:p>
-        </p:txBody>
-      </p:sp>
-      <p:sp>
-        <p:nvSpPr>
-          <p:cNvPr id="102" name="TextBox 101"/>
-          <p:cNvSpPr txBox="1"/>
-          <p:nvPr/>
-        </p:nvSpPr>
-        <p:spPr>
-          <a:xfrm>
-            <a:off x="9784445" y="4352544"/>
-            <a:ext cx="988740" cy="182880"/>
-          </a:xfrm>
-          <a:prstGeom prst="rect">
-            <a:avLst/>
-          </a:prstGeom>
-          <a:noFill/>
-        </p:spPr>
-        <p:txBody>
-          <a:bodyPr wrap="square" anchor="t" lIns="0" rIns="0" tIns="0" bIns="0">
-            <a:spAutoFit/>
-          </a:bodyPr>
-          <a:lstStyle/>
-          <a:p>
-            <a:pPr algn="ctr">
-              <a:lnSpc>
-                <a:spcPct val="100000"/>
-              </a:lnSpc>
-            </a:pPr>
-            <a:r>
-              <a:rPr sz="1100" b="0">
-                <a:solidFill>
-                  <a:srgbClr val="555555"/>
-                </a:solidFill>
-                <a:latin typeface="SamsungOneKorean"/>
-                <a:ea typeface="SamsungOneKorean"/>
-                <a:cs typeface="SamsungOneKorean"/>
-              </a:rPr>
-              <a:t>▲</a:t>
-            </a:r>
-          </a:p>
-        </p:txBody>
-      </p:sp>
-      <p:sp>
-        <p:nvSpPr>
-          <p:cNvPr id="103" name="TextBox 102"/>
-          <p:cNvSpPr txBox="1"/>
-          <p:nvPr/>
-        </p:nvSpPr>
-        <p:spPr>
-          <a:xfrm>
-            <a:off x="10773186" y="4352544"/>
-            <a:ext cx="988740" cy="182880"/>
-          </a:xfrm>
-          <a:prstGeom prst="rect">
-            <a:avLst/>
-          </a:prstGeom>
-          <a:noFill/>
-        </p:spPr>
-        <p:txBody>
-          <a:bodyPr wrap="square" anchor="t" lIns="0" rIns="0" tIns="0" bIns="0">
-            <a:spAutoFit/>
-          </a:bodyPr>
-          <a:lstStyle/>
-          <a:p>
-            <a:pPr algn="ctr">
-              <a:lnSpc>
-                <a:spcPct val="100000"/>
-              </a:lnSpc>
-            </a:pPr>
-            <a:r>
-              <a:rPr sz="1100" b="0">
-                <a:solidFill>
-                  <a:srgbClr val="D9D9D9"/>
-                </a:solidFill>
-                <a:latin typeface="SamsungOneKorean"/>
-                <a:ea typeface="SamsungOneKorean"/>
-                <a:cs typeface="SamsungOneKorean"/>
-              </a:rPr>
-              <a:t>─</a:t>
-            </a:r>
-          </a:p>
-        </p:txBody>
-      </p:sp>
-      <p:sp>
-        <p:nvSpPr>
-          <p:cNvPr id="104" name="TextBox 103"/>
-          <p:cNvSpPr txBox="1"/>
-          <p:nvPr/>
-        </p:nvSpPr>
-        <p:spPr>
-          <a:xfrm>
-            <a:off x="429768" y="4937759"/>
-            <a:ext cx="877824" cy="365760"/>
-          </a:xfrm>
-          <a:prstGeom prst="rect">
-            <a:avLst/>
-          </a:prstGeom>
-          <a:noFill/>
-        </p:spPr>
-        <p:txBody>
-          <a:bodyPr wrap="square" anchor="t" lIns="0" rIns="0" tIns="0" bIns="0">
-            <a:spAutoFit/>
-          </a:bodyPr>
-          <a:lstStyle/>
-          <a:p>
-            <a:pPr algn="r">
-              <a:lnSpc>
-                <a:spcPct val="115000"/>
-              </a:lnSpc>
-            </a:pPr>
-            <a:r>
-              <a:rPr sz="1000" b="1">
-                <a:solidFill>
-                  <a:srgbClr val="8A8A8E"/>
-                </a:solidFill>
-                <a:latin typeface="SamsungOneKorean"/>
-                <a:ea typeface="SamsungOneKorean"/>
-                <a:cs typeface="SamsungOneKorean"/>
-              </a:rPr>
-              <a:t>풀어야 할</a:t>
-            </a:r>
-          </a:p>
-          <a:p>
-            <a:pPr algn="r">
-              <a:lnSpc>
-                <a:spcPct val="115000"/>
-              </a:lnSpc>
-            </a:pPr>
-            <a:r>
-              <a:rPr sz="1000" b="1">
-                <a:solidFill>
-                  <a:srgbClr val="8A8A8E"/>
-                </a:solidFill>
-                <a:latin typeface="SamsungOneKorean"/>
-                <a:ea typeface="SamsungOneKorean"/>
-                <a:cs typeface="SamsungOneKorean"/>
-              </a:rPr>
-              <a:t>문제</a:t>
-            </a:r>
-          </a:p>
-        </p:txBody>
-      </p:sp>
-      <p:sp>
-        <p:nvSpPr>
-          <p:cNvPr id="105" name="Rectangle 104"/>
+              <a:t>(지수 개념도)</a:t>
+            </a:r>
+          </a:p>
+        </p:txBody>
+      </p:sp>
+      <p:sp>
+        <p:nvSpPr>
+          <p:cNvPr id="42" name="Rectangle 41"/>
           <p:cNvSpPr/>
           <p:nvPr/>
         </p:nvSpPr>
         <p:spPr>
           <a:xfrm>
-            <a:off x="1435608" y="4901183"/>
-            <a:ext cx="32004" cy="457200"/>
+            <a:off x="502919" y="3342132"/>
+            <a:ext cx="105156" cy="105156"/>
           </a:xfrm>
           <a:prstGeom prst="rect">
             <a:avLst/>
@@ -7646,14 +5065,14 @@
       </p:sp>
       <p:sp>
         <p:nvSpPr>
-          <p:cNvPr id="106" name="TextBox 105"/>
+          <p:cNvPr id="43" name="TextBox 42"/>
           <p:cNvSpPr txBox="1"/>
           <p:nvPr/>
         </p:nvSpPr>
         <p:spPr>
           <a:xfrm>
-            <a:off x="1554480" y="4910328"/>
-            <a:ext cx="1858609" cy="457200"/>
+            <a:off x="667512" y="3328416"/>
+            <a:ext cx="749808" cy="146304"/>
           </a:xfrm>
           <a:prstGeom prst="rect">
             <a:avLst/>
@@ -7661,58 +5080,600 @@
           <a:noFill/>
         </p:spPr>
         <p:txBody>
-          <a:bodyPr wrap="square" anchor="t" lIns="0" rIns="0" tIns="0" bIns="0">
+          <a:bodyPr wrap="none" anchor="t" lIns="0" rIns="0" tIns="0" bIns="0">
             <a:spAutoFit/>
           </a:bodyPr>
           <a:lstStyle/>
           <a:p>
             <a:pPr algn="l">
               <a:lnSpc>
-                <a:spcPct val="114000"/>
+                <a:spcPct val="100000"/>
               </a:lnSpc>
             </a:pPr>
             <a:r>
-              <a:rPr sz="1150" b="1">
-                <a:solidFill>
-                  <a:srgbClr val="1A1A1A"/>
+              <a:rPr sz="1000" b="0">
+                <a:solidFill>
+                  <a:srgbClr val="555555"/>
                 </a:solidFill>
                 <a:latin typeface="SamsungOneKorean"/>
                 <a:ea typeface="SamsungOneKorean"/>
                 <a:cs typeface="SamsungOneKorean"/>
               </a:rPr>
-              <a:t>팔 곳이 사라진 고부가 캐파,</a:t>
-            </a:r>
-          </a:p>
+              <a:t>HBM</a:t>
+            </a:r>
+          </a:p>
+        </p:txBody>
+      </p:sp>
+      <p:sp>
+        <p:nvSpPr>
+          <p:cNvPr id="44" name="Rectangle 43"/>
+          <p:cNvSpPr/>
+          <p:nvPr/>
+        </p:nvSpPr>
+        <p:spPr>
+          <a:xfrm>
+            <a:off x="502919" y="3547872"/>
+            <a:ext cx="105156" cy="105156"/>
+          </a:xfrm>
+          <a:prstGeom prst="rect">
+            <a:avLst/>
+          </a:prstGeom>
+          <a:solidFill>
+            <a:srgbClr val="4E68C8"/>
+          </a:solidFill>
+          <a:ln>
+            <a:noFill/>
+          </a:ln>
+          <a:effectLst/>
+        </p:spPr>
+        <p:style>
+          <a:lnRef idx="1">
+            <a:schemeClr val="accent1"/>
+          </a:lnRef>
+          <a:fillRef idx="3">
+            <a:schemeClr val="accent1"/>
+          </a:fillRef>
+          <a:effectRef idx="2">
+            <a:schemeClr val="accent1"/>
+          </a:effectRef>
+          <a:fontRef idx="minor">
+            <a:schemeClr val="lt1"/>
+          </a:fontRef>
+        </p:style>
+        <p:txBody>
+          <a:bodyPr rtlCol="0" anchor="ctr"/>
+          <a:lstStyle/>
+          <a:p>
+            <a:pPr algn="ctr"/>
+          </a:p>
+        </p:txBody>
+      </p:sp>
+      <p:sp>
+        <p:nvSpPr>
+          <p:cNvPr id="45" name="TextBox 44"/>
+          <p:cNvSpPr txBox="1"/>
+          <p:nvPr/>
+        </p:nvSpPr>
+        <p:spPr>
+          <a:xfrm>
+            <a:off x="667512" y="3534156"/>
+            <a:ext cx="749808" cy="146304"/>
+          </a:xfrm>
+          <a:prstGeom prst="rect">
+            <a:avLst/>
+          </a:prstGeom>
+          <a:noFill/>
+        </p:spPr>
+        <p:txBody>
+          <a:bodyPr wrap="none" anchor="t" lIns="0" rIns="0" tIns="0" bIns="0">
+            <a:spAutoFit/>
+          </a:bodyPr>
+          <a:lstStyle/>
           <a:p>
             <a:pPr algn="l">
               <a:lnSpc>
-                <a:spcPct val="114000"/>
+                <a:spcPct val="100000"/>
               </a:lnSpc>
             </a:pPr>
             <a:r>
-              <a:rPr sz="1150" b="1">
-                <a:solidFill>
-                  <a:srgbClr val="1A1A1A"/>
+              <a:rPr sz="1000" b="0">
+                <a:solidFill>
+                  <a:srgbClr val="555555"/>
                 </a:solidFill>
                 <a:latin typeface="SamsungOneKorean"/>
                 <a:ea typeface="SamsungOneKorean"/>
                 <a:cs typeface="SamsungOneKorean"/>
               </a:rPr>
-              <a:t>어디로 돌릴 것인가</a:t>
-            </a:r>
-          </a:p>
-        </p:txBody>
-      </p:sp>
-      <p:sp>
-        <p:nvSpPr>
-          <p:cNvPr id="107" name="Rectangle 106"/>
+              <a:t>서버 DRAM</a:t>
+            </a:r>
+          </a:p>
+        </p:txBody>
+      </p:sp>
+      <p:sp>
+        <p:nvSpPr>
+          <p:cNvPr id="46" name="Rectangle 45"/>
           <p:cNvSpPr/>
           <p:nvPr/>
         </p:nvSpPr>
         <p:spPr>
           <a:xfrm>
-            <a:off x="3522817" y="4901183"/>
-            <a:ext cx="32004" cy="457200"/>
+            <a:off x="502919" y="3753611"/>
+            <a:ext cx="105156" cy="105156"/>
+          </a:xfrm>
+          <a:prstGeom prst="rect">
+            <a:avLst/>
+          </a:prstGeom>
+          <a:solidFill>
+            <a:srgbClr val="93A2DC"/>
+          </a:solidFill>
+          <a:ln>
+            <a:noFill/>
+          </a:ln>
+          <a:effectLst/>
+        </p:spPr>
+        <p:style>
+          <a:lnRef idx="1">
+            <a:schemeClr val="accent1"/>
+          </a:lnRef>
+          <a:fillRef idx="3">
+            <a:schemeClr val="accent1"/>
+          </a:fillRef>
+          <a:effectRef idx="2">
+            <a:schemeClr val="accent1"/>
+          </a:effectRef>
+          <a:fontRef idx="minor">
+            <a:schemeClr val="lt1"/>
+          </a:fontRef>
+        </p:style>
+        <p:txBody>
+          <a:bodyPr rtlCol="0" anchor="ctr"/>
+          <a:lstStyle/>
+          <a:p>
+            <a:pPr algn="ctr"/>
+          </a:p>
+        </p:txBody>
+      </p:sp>
+      <p:sp>
+        <p:nvSpPr>
+          <p:cNvPr id="47" name="TextBox 46"/>
+          <p:cNvSpPr txBox="1"/>
+          <p:nvPr/>
+        </p:nvSpPr>
+        <p:spPr>
+          <a:xfrm>
+            <a:off x="667512" y="3739896"/>
+            <a:ext cx="749808" cy="146304"/>
+          </a:xfrm>
+          <a:prstGeom prst="rect">
+            <a:avLst/>
+          </a:prstGeom>
+          <a:noFill/>
+        </p:spPr>
+        <p:txBody>
+          <a:bodyPr wrap="none" anchor="t" lIns="0" rIns="0" tIns="0" bIns="0">
+            <a:spAutoFit/>
+          </a:bodyPr>
+          <a:lstStyle/>
+          <a:p>
+            <a:pPr algn="l">
+              <a:lnSpc>
+                <a:spcPct val="100000"/>
+              </a:lnSpc>
+            </a:pPr>
+            <a:r>
+              <a:rPr sz="1000" b="0">
+                <a:solidFill>
+                  <a:srgbClr val="555555"/>
+                </a:solidFill>
+                <a:latin typeface="SamsungOneKorean"/>
+                <a:ea typeface="SamsungOneKorean"/>
+                <a:cs typeface="SamsungOneKorean"/>
+              </a:rPr>
+              <a:t>범용·레거시</a:t>
+            </a:r>
+          </a:p>
+        </p:txBody>
+      </p:sp>
+      <p:sp>
+        <p:nvSpPr>
+          <p:cNvPr id="48" name="Rectangle 47"/>
+          <p:cNvSpPr/>
+          <p:nvPr/>
+        </p:nvSpPr>
+        <p:spPr>
+          <a:xfrm>
+            <a:off x="502919" y="3959352"/>
+            <a:ext cx="105156" cy="105156"/>
+          </a:xfrm>
+          <a:prstGeom prst="rect">
+            <a:avLst/>
+          </a:prstGeom>
+          <a:solidFill>
+            <a:srgbClr val="C9D1EE"/>
+          </a:solidFill>
+          <a:ln>
+            <a:noFill/>
+          </a:ln>
+          <a:effectLst/>
+        </p:spPr>
+        <p:style>
+          <a:lnRef idx="1">
+            <a:schemeClr val="accent1"/>
+          </a:lnRef>
+          <a:fillRef idx="3">
+            <a:schemeClr val="accent1"/>
+          </a:fillRef>
+          <a:effectRef idx="2">
+            <a:schemeClr val="accent1"/>
+          </a:effectRef>
+          <a:fontRef idx="minor">
+            <a:schemeClr val="lt1"/>
+          </a:fontRef>
+        </p:style>
+        <p:txBody>
+          <a:bodyPr rtlCol="0" anchor="ctr"/>
+          <a:lstStyle/>
+          <a:p>
+            <a:pPr algn="ctr"/>
+          </a:p>
+        </p:txBody>
+      </p:sp>
+      <p:sp>
+        <p:nvSpPr>
+          <p:cNvPr id="49" name="TextBox 48"/>
+          <p:cNvSpPr txBox="1"/>
+          <p:nvPr/>
+        </p:nvSpPr>
+        <p:spPr>
+          <a:xfrm>
+            <a:off x="667512" y="3945636"/>
+            <a:ext cx="749808" cy="146304"/>
+          </a:xfrm>
+          <a:prstGeom prst="rect">
+            <a:avLst/>
+          </a:prstGeom>
+          <a:noFill/>
+        </p:spPr>
+        <p:txBody>
+          <a:bodyPr wrap="none" anchor="t" lIns="0" rIns="0" tIns="0" bIns="0">
+            <a:spAutoFit/>
+          </a:bodyPr>
+          <a:lstStyle/>
+          <a:p>
+            <a:pPr algn="l">
+              <a:lnSpc>
+                <a:spcPct val="100000"/>
+              </a:lnSpc>
+            </a:pPr>
+            <a:r>
+              <a:rPr sz="1000" b="0">
+                <a:solidFill>
+                  <a:srgbClr val="555555"/>
+                </a:solidFill>
+                <a:latin typeface="SamsungOneKorean"/>
+                <a:ea typeface="SamsungOneKorean"/>
+                <a:cs typeface="SamsungOneKorean"/>
+              </a:rPr>
+              <a:t>NAND·SSD</a:t>
+            </a:r>
+          </a:p>
+        </p:txBody>
+      </p:sp>
+      <p:sp>
+        <p:nvSpPr>
+          <p:cNvPr id="50" name="Rectangle 49"/>
+          <p:cNvSpPr/>
+          <p:nvPr/>
+        </p:nvSpPr>
+        <p:spPr>
+          <a:xfrm>
+            <a:off x="502919" y="4165091"/>
+            <a:ext cx="105156" cy="105156"/>
+          </a:xfrm>
+          <a:prstGeom prst="rect">
+            <a:avLst/>
+          </a:prstGeom>
+          <a:solidFill>
+            <a:srgbClr val="FFFFFF"/>
+          </a:solidFill>
+          <a:ln w="10160">
+            <a:solidFill>
+              <a:srgbClr val="8A8A8E"/>
+            </a:solidFill>
+            <a:prstDash val="sysDash"/>
+          </a:ln>
+          <a:effectLst/>
+        </p:spPr>
+        <p:style>
+          <a:lnRef idx="1">
+            <a:schemeClr val="accent1"/>
+          </a:lnRef>
+          <a:fillRef idx="3">
+            <a:schemeClr val="accent1"/>
+          </a:fillRef>
+          <a:effectRef idx="2">
+            <a:schemeClr val="accent1"/>
+          </a:effectRef>
+          <a:fontRef idx="minor">
+            <a:schemeClr val="lt1"/>
+          </a:fontRef>
+        </p:style>
+        <p:txBody>
+          <a:bodyPr rtlCol="0" anchor="ctr"/>
+          <a:lstStyle/>
+          <a:p>
+            <a:pPr algn="ctr"/>
+          </a:p>
+        </p:txBody>
+      </p:sp>
+      <p:sp>
+        <p:nvSpPr>
+          <p:cNvPr id="51" name="TextBox 50"/>
+          <p:cNvSpPr txBox="1"/>
+          <p:nvPr/>
+        </p:nvSpPr>
+        <p:spPr>
+          <a:xfrm>
+            <a:off x="667512" y="4151376"/>
+            <a:ext cx="749808" cy="146304"/>
+          </a:xfrm>
+          <a:prstGeom prst="rect">
+            <a:avLst/>
+          </a:prstGeom>
+          <a:noFill/>
+        </p:spPr>
+        <p:txBody>
+          <a:bodyPr wrap="none" anchor="t" lIns="0" rIns="0" tIns="0" bIns="0">
+            <a:spAutoFit/>
+          </a:bodyPr>
+          <a:lstStyle/>
+          <a:p>
+            <a:pPr algn="l">
+              <a:lnSpc>
+                <a:spcPct val="100000"/>
+              </a:lnSpc>
+            </a:pPr>
+            <a:r>
+              <a:rPr sz="1000" b="0">
+                <a:solidFill>
+                  <a:srgbClr val="555555"/>
+                </a:solidFill>
+                <a:latin typeface="SamsungOneKorean"/>
+                <a:ea typeface="SamsungOneKorean"/>
+                <a:cs typeface="SamsungOneKorean"/>
+              </a:rPr>
+              <a:t>차세대 이동분</a:t>
+            </a:r>
+          </a:p>
+        </p:txBody>
+      </p:sp>
+      <p:sp>
+        <p:nvSpPr>
+          <p:cNvPr id="52" name="Rectangle 51"/>
+          <p:cNvSpPr/>
+          <p:nvPr/>
+        </p:nvSpPr>
+        <p:spPr>
+          <a:xfrm>
+            <a:off x="1994580" y="3964838"/>
+            <a:ext cx="365760" cy="351129"/>
+          </a:xfrm>
+          <a:prstGeom prst="rect">
+            <a:avLst/>
+          </a:prstGeom>
+          <a:solidFill>
+            <a:srgbClr val="C4CAE7"/>
+          </a:solidFill>
+          <a:ln>
+            <a:noFill/>
+          </a:ln>
+          <a:effectLst/>
+        </p:spPr>
+        <p:style>
+          <a:lnRef idx="1">
+            <a:schemeClr val="accent1"/>
+          </a:lnRef>
+          <a:fillRef idx="3">
+            <a:schemeClr val="accent1"/>
+          </a:fillRef>
+          <a:effectRef idx="2">
+            <a:schemeClr val="accent1"/>
+          </a:effectRef>
+          <a:fontRef idx="minor">
+            <a:schemeClr val="lt1"/>
+          </a:fontRef>
+        </p:style>
+        <p:txBody>
+          <a:bodyPr rtlCol="0" anchor="ctr"/>
+          <a:lstStyle/>
+          <a:p>
+            <a:pPr algn="ctr"/>
+          </a:p>
+        </p:txBody>
+      </p:sp>
+      <p:sp>
+        <p:nvSpPr>
+          <p:cNvPr id="53" name="Rectangle 52"/>
+          <p:cNvSpPr/>
+          <p:nvPr/>
+        </p:nvSpPr>
+        <p:spPr>
+          <a:xfrm>
+            <a:off x="1994580" y="3672230"/>
+            <a:ext cx="365760" cy="292608"/>
+          </a:xfrm>
+          <a:prstGeom prst="rect">
+            <a:avLst/>
+          </a:prstGeom>
+          <a:solidFill>
+            <a:srgbClr val="D5DBF0"/>
+          </a:solidFill>
+          <a:ln>
+            <a:noFill/>
+          </a:ln>
+          <a:effectLst/>
+        </p:spPr>
+        <p:style>
+          <a:lnRef idx="1">
+            <a:schemeClr val="accent1"/>
+          </a:lnRef>
+          <a:fillRef idx="3">
+            <a:schemeClr val="accent1"/>
+          </a:fillRef>
+          <a:effectRef idx="2">
+            <a:schemeClr val="accent1"/>
+          </a:effectRef>
+          <a:fontRef idx="minor">
+            <a:schemeClr val="lt1"/>
+          </a:fontRef>
+        </p:style>
+        <p:txBody>
+          <a:bodyPr rtlCol="0" anchor="ctr"/>
+          <a:lstStyle/>
+          <a:p>
+            <a:pPr algn="ctr"/>
+          </a:p>
+        </p:txBody>
+      </p:sp>
+      <p:sp>
+        <p:nvSpPr>
+          <p:cNvPr id="54" name="Rectangle 53"/>
+          <p:cNvSpPr/>
+          <p:nvPr/>
+        </p:nvSpPr>
+        <p:spPr>
+          <a:xfrm>
+            <a:off x="1994580" y="3379622"/>
+            <a:ext cx="365760" cy="292608"/>
+          </a:xfrm>
+          <a:prstGeom prst="rect">
+            <a:avLst/>
+          </a:prstGeom>
+          <a:solidFill>
+            <a:srgbClr val="E3E7F6"/>
+          </a:solidFill>
+          <a:ln>
+            <a:noFill/>
+          </a:ln>
+          <a:effectLst/>
+        </p:spPr>
+        <p:style>
+          <a:lnRef idx="1">
+            <a:schemeClr val="accent1"/>
+          </a:lnRef>
+          <a:fillRef idx="3">
+            <a:schemeClr val="accent1"/>
+          </a:fillRef>
+          <a:effectRef idx="2">
+            <a:schemeClr val="accent1"/>
+          </a:effectRef>
+          <a:fontRef idx="minor">
+            <a:schemeClr val="lt1"/>
+          </a:fontRef>
+        </p:style>
+        <p:txBody>
+          <a:bodyPr rtlCol="0" anchor="ctr"/>
+          <a:lstStyle/>
+          <a:p>
+            <a:pPr algn="ctr"/>
+          </a:p>
+        </p:txBody>
+      </p:sp>
+      <p:sp>
+        <p:nvSpPr>
+          <p:cNvPr id="55" name="Rectangle 54"/>
+          <p:cNvSpPr/>
+          <p:nvPr/>
+        </p:nvSpPr>
+        <p:spPr>
+          <a:xfrm>
+            <a:off x="1994580" y="3145535"/>
+            <a:ext cx="365760" cy="234086"/>
+          </a:xfrm>
+          <a:prstGeom prst="rect">
+            <a:avLst/>
+          </a:prstGeom>
+          <a:solidFill>
+            <a:srgbClr val="EFF1FA"/>
+          </a:solidFill>
+          <a:ln>
+            <a:noFill/>
+          </a:ln>
+          <a:effectLst/>
+        </p:spPr>
+        <p:style>
+          <a:lnRef idx="1">
+            <a:schemeClr val="accent1"/>
+          </a:lnRef>
+          <a:fillRef idx="3">
+            <a:schemeClr val="accent1"/>
+          </a:fillRef>
+          <a:effectRef idx="2">
+            <a:schemeClr val="accent1"/>
+          </a:effectRef>
+          <a:fontRef idx="minor">
+            <a:schemeClr val="lt1"/>
+          </a:fontRef>
+        </p:style>
+        <p:txBody>
+          <a:bodyPr rtlCol="0" anchor="ctr"/>
+          <a:lstStyle/>
+          <a:p>
+            <a:pPr algn="ctr"/>
+          </a:p>
+        </p:txBody>
+      </p:sp>
+      <p:sp>
+        <p:nvSpPr>
+          <p:cNvPr id="56" name="TextBox 55"/>
+          <p:cNvSpPr txBox="1"/>
+          <p:nvPr/>
+        </p:nvSpPr>
+        <p:spPr>
+          <a:xfrm>
+            <a:off x="1903140" y="2944367"/>
+            <a:ext cx="548640" cy="146304"/>
+          </a:xfrm>
+          <a:prstGeom prst="rect">
+            <a:avLst/>
+          </a:prstGeom>
+          <a:noFill/>
+        </p:spPr>
+        <p:txBody>
+          <a:bodyPr wrap="square" anchor="t" lIns="0" rIns="0" tIns="0" bIns="0">
+            <a:spAutoFit/>
+          </a:bodyPr>
+          <a:lstStyle/>
+          <a:p>
+            <a:pPr algn="ctr">
+              <a:lnSpc>
+                <a:spcPct val="100000"/>
+              </a:lnSpc>
+            </a:pPr>
+            <a:r>
+              <a:rPr sz="1000" b="1">
+                <a:solidFill>
+                  <a:srgbClr val="8A8A8E"/>
+                </a:solidFill>
+                <a:latin typeface="SamsungOneKorean"/>
+                <a:ea typeface="SamsungOneKorean"/>
+                <a:cs typeface="SamsungOneKorean"/>
+              </a:rPr>
+              <a:t>100</a:t>
+            </a:r>
+          </a:p>
+        </p:txBody>
+      </p:sp>
+      <p:sp>
+        <p:nvSpPr>
+          <p:cNvPr id="57" name="Rectangle 56"/>
+          <p:cNvSpPr/>
+          <p:nvPr/>
+        </p:nvSpPr>
+        <p:spPr>
+          <a:xfrm>
+            <a:off x="2488356" y="4140403"/>
+            <a:ext cx="365760" cy="175564"/>
           </a:xfrm>
           <a:prstGeom prst="rect">
             <a:avLst/>
@@ -7749,14 +5710,146 @@
       </p:sp>
       <p:sp>
         <p:nvSpPr>
-          <p:cNvPr id="108" name="TextBox 107"/>
+          <p:cNvPr id="58" name="Rectangle 57"/>
+          <p:cNvSpPr/>
+          <p:nvPr/>
+        </p:nvSpPr>
+        <p:spPr>
+          <a:xfrm>
+            <a:off x="2488356" y="3988247"/>
+            <a:ext cx="365760" cy="152156"/>
+          </a:xfrm>
+          <a:prstGeom prst="rect">
+            <a:avLst/>
+          </a:prstGeom>
+          <a:solidFill>
+            <a:srgbClr val="4E68C8"/>
+          </a:solidFill>
+          <a:ln>
+            <a:noFill/>
+          </a:ln>
+          <a:effectLst/>
+        </p:spPr>
+        <p:style>
+          <a:lnRef idx="1">
+            <a:schemeClr val="accent1"/>
+          </a:lnRef>
+          <a:fillRef idx="3">
+            <a:schemeClr val="accent1"/>
+          </a:fillRef>
+          <a:effectRef idx="2">
+            <a:schemeClr val="accent1"/>
+          </a:effectRef>
+          <a:fontRef idx="minor">
+            <a:schemeClr val="lt1"/>
+          </a:fontRef>
+        </p:style>
+        <p:txBody>
+          <a:bodyPr rtlCol="0" anchor="ctr"/>
+          <a:lstStyle/>
+          <a:p>
+            <a:pPr algn="ctr"/>
+          </a:p>
+        </p:txBody>
+      </p:sp>
+      <p:sp>
+        <p:nvSpPr>
+          <p:cNvPr id="59" name="Rectangle 58"/>
+          <p:cNvSpPr/>
+          <p:nvPr/>
+        </p:nvSpPr>
+        <p:spPr>
+          <a:xfrm>
+            <a:off x="2488356" y="3707343"/>
+            <a:ext cx="365760" cy="280903"/>
+          </a:xfrm>
+          <a:prstGeom prst="rect">
+            <a:avLst/>
+          </a:prstGeom>
+          <a:solidFill>
+            <a:srgbClr val="93A2DC"/>
+          </a:solidFill>
+          <a:ln>
+            <a:noFill/>
+          </a:ln>
+          <a:effectLst/>
+        </p:spPr>
+        <p:style>
+          <a:lnRef idx="1">
+            <a:schemeClr val="accent1"/>
+          </a:lnRef>
+          <a:fillRef idx="3">
+            <a:schemeClr val="accent1"/>
+          </a:fillRef>
+          <a:effectRef idx="2">
+            <a:schemeClr val="accent1"/>
+          </a:effectRef>
+          <a:fontRef idx="minor">
+            <a:schemeClr val="lt1"/>
+          </a:fontRef>
+        </p:style>
+        <p:txBody>
+          <a:bodyPr rtlCol="0" anchor="ctr"/>
+          <a:lstStyle/>
+          <a:p>
+            <a:pPr algn="ctr"/>
+          </a:p>
+        </p:txBody>
+      </p:sp>
+      <p:sp>
+        <p:nvSpPr>
+          <p:cNvPr id="60" name="Rectangle 59"/>
+          <p:cNvSpPr/>
+          <p:nvPr/>
+        </p:nvSpPr>
+        <p:spPr>
+          <a:xfrm>
+            <a:off x="2488356" y="3520074"/>
+            <a:ext cx="365760" cy="187269"/>
+          </a:xfrm>
+          <a:prstGeom prst="rect">
+            <a:avLst/>
+          </a:prstGeom>
+          <a:solidFill>
+            <a:srgbClr val="C9D1EE"/>
+          </a:solidFill>
+          <a:ln>
+            <a:noFill/>
+          </a:ln>
+          <a:effectLst/>
+        </p:spPr>
+        <p:style>
+          <a:lnRef idx="1">
+            <a:schemeClr val="accent1"/>
+          </a:lnRef>
+          <a:fillRef idx="3">
+            <a:schemeClr val="accent1"/>
+          </a:fillRef>
+          <a:effectRef idx="2">
+            <a:schemeClr val="accent1"/>
+          </a:effectRef>
+          <a:fontRef idx="minor">
+            <a:schemeClr val="lt1"/>
+          </a:fontRef>
+        </p:style>
+        <p:txBody>
+          <a:bodyPr rtlCol="0" anchor="ctr"/>
+          <a:lstStyle/>
+          <a:p>
+            <a:pPr algn="ctr"/>
+          </a:p>
+        </p:txBody>
+      </p:sp>
+      <p:sp>
+        <p:nvSpPr>
+          <p:cNvPr id="61" name="TextBox 60"/>
           <p:cNvSpPr txBox="1"/>
           <p:nvPr/>
         </p:nvSpPr>
         <p:spPr>
           <a:xfrm>
-            <a:off x="3641689" y="4910328"/>
-            <a:ext cx="1858609" cy="457200"/>
+            <a:off x="2396916" y="3318906"/>
+            <a:ext cx="548640" cy="146304"/>
           </a:xfrm>
           <a:prstGeom prst="rect">
             <a:avLst/>
@@ -7769,53 +5862,370 @@
           </a:bodyPr>
           <a:lstStyle/>
           <a:p>
-            <a:pPr algn="l">
+            <a:pPr algn="ctr">
               <a:lnSpc>
-                <a:spcPct val="114000"/>
+                <a:spcPct val="100000"/>
               </a:lnSpc>
             </a:pPr>
             <a:r>
-              <a:rPr sz="1150" b="1">
-                <a:solidFill>
-                  <a:srgbClr val="1A1A1A"/>
+              <a:rPr sz="1050" b="1">
+                <a:solidFill>
+                  <a:srgbClr val="1428A0"/>
                 </a:solidFill>
                 <a:latin typeface="SamsungOneKorean"/>
                 <a:ea typeface="SamsungOneKorean"/>
                 <a:cs typeface="SamsungOneKorean"/>
               </a:rPr>
-              <a:t>경보 없는 하강,</a:t>
-            </a:r>
-          </a:p>
-          <a:p>
-            <a:pPr algn="l">
+              <a:t>68</a:t>
+            </a:r>
+          </a:p>
+        </p:txBody>
+      </p:sp>
+      <p:cxnSp>
+        <p:nvCxnSpPr>
+          <p:cNvPr id="62" name="Connector 61"/>
+          <p:cNvCxnSpPr/>
+          <p:nvPr/>
+        </p:nvCxnSpPr>
+        <p:spPr>
+          <a:xfrm>
+            <a:off x="1527048" y="4315968"/>
+            <a:ext cx="1794601" cy="0"/>
+          </a:xfrm>
+          <a:prstGeom prst="line">
+            <a:avLst/>
+          </a:prstGeom>
+          <a:ln w="11430">
+            <a:solidFill>
+              <a:srgbClr val="D9D9D9"/>
+            </a:solidFill>
+          </a:ln>
+          <a:effectLst/>
+        </p:spPr>
+        <p:style>
+          <a:lnRef idx="2">
+            <a:schemeClr val="accent1"/>
+          </a:lnRef>
+          <a:fillRef idx="0">
+            <a:schemeClr val="accent1"/>
+          </a:fillRef>
+          <a:effectRef idx="1">
+            <a:schemeClr val="accent1"/>
+          </a:effectRef>
+          <a:fontRef idx="minor">
+            <a:schemeClr val="tx1"/>
+          </a:fontRef>
+        </p:style>
+      </p:cxnSp>
+      <p:sp>
+        <p:nvSpPr>
+          <p:cNvPr id="63" name="TextBox 62"/>
+          <p:cNvSpPr txBox="1"/>
+          <p:nvPr/>
+        </p:nvSpPr>
+        <p:spPr>
+          <a:xfrm>
+            <a:off x="1921428" y="4361688"/>
+            <a:ext cx="512064" cy="128016"/>
+          </a:xfrm>
+          <a:prstGeom prst="rect">
+            <a:avLst/>
+          </a:prstGeom>
+          <a:noFill/>
+        </p:spPr>
+        <p:txBody>
+          <a:bodyPr wrap="square" anchor="t" lIns="0" rIns="0" tIns="0" bIns="0">
+            <a:spAutoFit/>
+          </a:bodyPr>
+          <a:lstStyle/>
+          <a:p>
+            <a:pPr algn="ctr">
               <a:lnSpc>
-                <a:spcPct val="114000"/>
+                <a:spcPct val="100000"/>
               </a:lnSpc>
             </a:pPr>
             <a:r>
-              <a:rPr sz="1150" b="1">
-                <a:solidFill>
-                  <a:srgbClr val="1A1A1A"/>
+              <a:rPr sz="1000" b="0">
+                <a:solidFill>
+                  <a:srgbClr val="8A8A8E"/>
                 </a:solidFill>
                 <a:latin typeface="SamsungOneKorean"/>
                 <a:ea typeface="SamsungOneKorean"/>
                 <a:cs typeface="SamsungOneKorean"/>
               </a:rPr>
-              <a:t>무엇으로 감지할 것인가</a:t>
-            </a:r>
-          </a:p>
-        </p:txBody>
-      </p:sp>
-      <p:sp>
-        <p:nvSpPr>
-          <p:cNvPr id="109" name="Rectangle 108"/>
+              <a:t>현재</a:t>
+            </a:r>
+          </a:p>
+        </p:txBody>
+      </p:sp>
+      <p:sp>
+        <p:nvSpPr>
+          <p:cNvPr id="64" name="TextBox 63"/>
+          <p:cNvSpPr txBox="1"/>
+          <p:nvPr/>
+        </p:nvSpPr>
+        <p:spPr>
+          <a:xfrm>
+            <a:off x="2415204" y="4361688"/>
+            <a:ext cx="512064" cy="128016"/>
+          </a:xfrm>
+          <a:prstGeom prst="rect">
+            <a:avLst/>
+          </a:prstGeom>
+          <a:noFill/>
+        </p:spPr>
+        <p:txBody>
+          <a:bodyPr wrap="square" anchor="t" lIns="0" rIns="0" tIns="0" bIns="0">
+            <a:spAutoFit/>
+          </a:bodyPr>
+          <a:lstStyle/>
+          <a:p>
+            <a:pPr algn="ctr">
+              <a:lnSpc>
+                <a:spcPct val="100000"/>
+              </a:lnSpc>
+            </a:pPr>
+            <a:r>
+              <a:rPr sz="1000" b="0">
+                <a:solidFill>
+                  <a:srgbClr val="8A8A8E"/>
+                </a:solidFill>
+                <a:latin typeface="SamsungOneKorean"/>
+                <a:ea typeface="SamsungOneKorean"/>
+                <a:cs typeface="SamsungOneKorean"/>
+              </a:rPr>
+              <a:t>시나리오</a:t>
+            </a:r>
+          </a:p>
+        </p:txBody>
+      </p:sp>
+      <p:sp>
+        <p:nvSpPr>
+          <p:cNvPr id="65" name="Rectangle 64"/>
           <p:cNvSpPr/>
           <p:nvPr/>
         </p:nvSpPr>
         <p:spPr>
           <a:xfrm>
-            <a:off x="5610026" y="4901183"/>
-            <a:ext cx="32004" cy="457200"/>
+            <a:off x="4081790" y="3964838"/>
+            <a:ext cx="365760" cy="351129"/>
+          </a:xfrm>
+          <a:prstGeom prst="rect">
+            <a:avLst/>
+          </a:prstGeom>
+          <a:solidFill>
+            <a:srgbClr val="C4CAE7"/>
+          </a:solidFill>
+          <a:ln>
+            <a:noFill/>
+          </a:ln>
+          <a:effectLst/>
+        </p:spPr>
+        <p:style>
+          <a:lnRef idx="1">
+            <a:schemeClr val="accent1"/>
+          </a:lnRef>
+          <a:fillRef idx="3">
+            <a:schemeClr val="accent1"/>
+          </a:fillRef>
+          <a:effectRef idx="2">
+            <a:schemeClr val="accent1"/>
+          </a:effectRef>
+          <a:fontRef idx="minor">
+            <a:schemeClr val="lt1"/>
+          </a:fontRef>
+        </p:style>
+        <p:txBody>
+          <a:bodyPr rtlCol="0" anchor="ctr"/>
+          <a:lstStyle/>
+          <a:p>
+            <a:pPr algn="ctr"/>
+          </a:p>
+        </p:txBody>
+      </p:sp>
+      <p:sp>
+        <p:nvSpPr>
+          <p:cNvPr id="66" name="Rectangle 65"/>
+          <p:cNvSpPr/>
+          <p:nvPr/>
+        </p:nvSpPr>
+        <p:spPr>
+          <a:xfrm>
+            <a:off x="4081790" y="3672230"/>
+            <a:ext cx="365760" cy="292608"/>
+          </a:xfrm>
+          <a:prstGeom prst="rect">
+            <a:avLst/>
+          </a:prstGeom>
+          <a:solidFill>
+            <a:srgbClr val="D5DBF0"/>
+          </a:solidFill>
+          <a:ln>
+            <a:noFill/>
+          </a:ln>
+          <a:effectLst/>
+        </p:spPr>
+        <p:style>
+          <a:lnRef idx="1">
+            <a:schemeClr val="accent1"/>
+          </a:lnRef>
+          <a:fillRef idx="3">
+            <a:schemeClr val="accent1"/>
+          </a:fillRef>
+          <a:effectRef idx="2">
+            <a:schemeClr val="accent1"/>
+          </a:effectRef>
+          <a:fontRef idx="minor">
+            <a:schemeClr val="lt1"/>
+          </a:fontRef>
+        </p:style>
+        <p:txBody>
+          <a:bodyPr rtlCol="0" anchor="ctr"/>
+          <a:lstStyle/>
+          <a:p>
+            <a:pPr algn="ctr"/>
+          </a:p>
+        </p:txBody>
+      </p:sp>
+      <p:sp>
+        <p:nvSpPr>
+          <p:cNvPr id="67" name="Rectangle 66"/>
+          <p:cNvSpPr/>
+          <p:nvPr/>
+        </p:nvSpPr>
+        <p:spPr>
+          <a:xfrm>
+            <a:off x="4081790" y="3379622"/>
+            <a:ext cx="365760" cy="292608"/>
+          </a:xfrm>
+          <a:prstGeom prst="rect">
+            <a:avLst/>
+          </a:prstGeom>
+          <a:solidFill>
+            <a:srgbClr val="E3E7F6"/>
+          </a:solidFill>
+          <a:ln>
+            <a:noFill/>
+          </a:ln>
+          <a:effectLst/>
+        </p:spPr>
+        <p:style>
+          <a:lnRef idx="1">
+            <a:schemeClr val="accent1"/>
+          </a:lnRef>
+          <a:fillRef idx="3">
+            <a:schemeClr val="accent1"/>
+          </a:fillRef>
+          <a:effectRef idx="2">
+            <a:schemeClr val="accent1"/>
+          </a:effectRef>
+          <a:fontRef idx="minor">
+            <a:schemeClr val="lt1"/>
+          </a:fontRef>
+        </p:style>
+        <p:txBody>
+          <a:bodyPr rtlCol="0" anchor="ctr"/>
+          <a:lstStyle/>
+          <a:p>
+            <a:pPr algn="ctr"/>
+          </a:p>
+        </p:txBody>
+      </p:sp>
+      <p:sp>
+        <p:nvSpPr>
+          <p:cNvPr id="68" name="Rectangle 67"/>
+          <p:cNvSpPr/>
+          <p:nvPr/>
+        </p:nvSpPr>
+        <p:spPr>
+          <a:xfrm>
+            <a:off x="4081790" y="3145535"/>
+            <a:ext cx="365760" cy="234086"/>
+          </a:xfrm>
+          <a:prstGeom prst="rect">
+            <a:avLst/>
+          </a:prstGeom>
+          <a:solidFill>
+            <a:srgbClr val="EFF1FA"/>
+          </a:solidFill>
+          <a:ln>
+            <a:noFill/>
+          </a:ln>
+          <a:effectLst/>
+        </p:spPr>
+        <p:style>
+          <a:lnRef idx="1">
+            <a:schemeClr val="accent1"/>
+          </a:lnRef>
+          <a:fillRef idx="3">
+            <a:schemeClr val="accent1"/>
+          </a:fillRef>
+          <a:effectRef idx="2">
+            <a:schemeClr val="accent1"/>
+          </a:effectRef>
+          <a:fontRef idx="minor">
+            <a:schemeClr val="lt1"/>
+          </a:fontRef>
+        </p:style>
+        <p:txBody>
+          <a:bodyPr rtlCol="0" anchor="ctr"/>
+          <a:lstStyle/>
+          <a:p>
+            <a:pPr algn="ctr"/>
+          </a:p>
+        </p:txBody>
+      </p:sp>
+      <p:sp>
+        <p:nvSpPr>
+          <p:cNvPr id="69" name="TextBox 68"/>
+          <p:cNvSpPr txBox="1"/>
+          <p:nvPr/>
+        </p:nvSpPr>
+        <p:spPr>
+          <a:xfrm>
+            <a:off x="3990350" y="2944367"/>
+            <a:ext cx="548640" cy="146304"/>
+          </a:xfrm>
+          <a:prstGeom prst="rect">
+            <a:avLst/>
+          </a:prstGeom>
+          <a:noFill/>
+        </p:spPr>
+        <p:txBody>
+          <a:bodyPr wrap="square" anchor="t" lIns="0" rIns="0" tIns="0" bIns="0">
+            <a:spAutoFit/>
+          </a:bodyPr>
+          <a:lstStyle/>
+          <a:p>
+            <a:pPr algn="ctr">
+              <a:lnSpc>
+                <a:spcPct val="100000"/>
+              </a:lnSpc>
+            </a:pPr>
+            <a:r>
+              <a:rPr sz="1000" b="1">
+                <a:solidFill>
+                  <a:srgbClr val="8A8A8E"/>
+                </a:solidFill>
+                <a:latin typeface="SamsungOneKorean"/>
+                <a:ea typeface="SamsungOneKorean"/>
+                <a:cs typeface="SamsungOneKorean"/>
+              </a:rPr>
+              <a:t>100</a:t>
+            </a:r>
+          </a:p>
+        </p:txBody>
+      </p:sp>
+      <p:sp>
+        <p:nvSpPr>
+          <p:cNvPr id="70" name="Rectangle 69"/>
+          <p:cNvSpPr/>
+          <p:nvPr/>
+        </p:nvSpPr>
+        <p:spPr>
+          <a:xfrm>
+            <a:off x="4575566" y="4035064"/>
+            <a:ext cx="365760" cy="280903"/>
           </a:xfrm>
           <a:prstGeom prst="rect">
             <a:avLst/>
@@ -7852,14 +6262,146 @@
       </p:sp>
       <p:sp>
         <p:nvSpPr>
-          <p:cNvPr id="110" name="TextBox 109"/>
+          <p:cNvPr id="71" name="Rectangle 70"/>
+          <p:cNvSpPr/>
+          <p:nvPr/>
+        </p:nvSpPr>
+        <p:spPr>
+          <a:xfrm>
+            <a:off x="4575566" y="3800977"/>
+            <a:ext cx="365760" cy="234086"/>
+          </a:xfrm>
+          <a:prstGeom prst="rect">
+            <a:avLst/>
+          </a:prstGeom>
+          <a:solidFill>
+            <a:srgbClr val="4E68C8"/>
+          </a:solidFill>
+          <a:ln>
+            <a:noFill/>
+          </a:ln>
+          <a:effectLst/>
+        </p:spPr>
+        <p:style>
+          <a:lnRef idx="1">
+            <a:schemeClr val="accent1"/>
+          </a:lnRef>
+          <a:fillRef idx="3">
+            <a:schemeClr val="accent1"/>
+          </a:fillRef>
+          <a:effectRef idx="2">
+            <a:schemeClr val="accent1"/>
+          </a:effectRef>
+          <a:fontRef idx="minor">
+            <a:schemeClr val="lt1"/>
+          </a:fontRef>
+        </p:style>
+        <p:txBody>
+          <a:bodyPr rtlCol="0" anchor="ctr"/>
+          <a:lstStyle/>
+          <a:p>
+            <a:pPr algn="ctr"/>
+          </a:p>
+        </p:txBody>
+      </p:sp>
+      <p:sp>
+        <p:nvSpPr>
+          <p:cNvPr id="72" name="Rectangle 71"/>
+          <p:cNvSpPr/>
+          <p:nvPr/>
+        </p:nvSpPr>
+        <p:spPr>
+          <a:xfrm>
+            <a:off x="4575566" y="3566891"/>
+            <a:ext cx="365760" cy="234086"/>
+          </a:xfrm>
+          <a:prstGeom prst="rect">
+            <a:avLst/>
+          </a:prstGeom>
+          <a:solidFill>
+            <a:srgbClr val="93A2DC"/>
+          </a:solidFill>
+          <a:ln>
+            <a:noFill/>
+          </a:ln>
+          <a:effectLst/>
+        </p:spPr>
+        <p:style>
+          <a:lnRef idx="1">
+            <a:schemeClr val="accent1"/>
+          </a:lnRef>
+          <a:fillRef idx="3">
+            <a:schemeClr val="accent1"/>
+          </a:fillRef>
+          <a:effectRef idx="2">
+            <a:schemeClr val="accent1"/>
+          </a:effectRef>
+          <a:fontRef idx="minor">
+            <a:schemeClr val="lt1"/>
+          </a:fontRef>
+        </p:style>
+        <p:txBody>
+          <a:bodyPr rtlCol="0" anchor="ctr"/>
+          <a:lstStyle/>
+          <a:p>
+            <a:pPr algn="ctr"/>
+          </a:p>
+        </p:txBody>
+      </p:sp>
+      <p:sp>
+        <p:nvSpPr>
+          <p:cNvPr id="73" name="Rectangle 72"/>
+          <p:cNvSpPr/>
+          <p:nvPr/>
+        </p:nvSpPr>
+        <p:spPr>
+          <a:xfrm>
+            <a:off x="4575566" y="3285987"/>
+            <a:ext cx="365760" cy="280903"/>
+          </a:xfrm>
+          <a:prstGeom prst="rect">
+            <a:avLst/>
+          </a:prstGeom>
+          <a:solidFill>
+            <a:srgbClr val="C9D1EE"/>
+          </a:solidFill>
+          <a:ln>
+            <a:noFill/>
+          </a:ln>
+          <a:effectLst/>
+        </p:spPr>
+        <p:style>
+          <a:lnRef idx="1">
+            <a:schemeClr val="accent1"/>
+          </a:lnRef>
+          <a:fillRef idx="3">
+            <a:schemeClr val="accent1"/>
+          </a:fillRef>
+          <a:effectRef idx="2">
+            <a:schemeClr val="accent1"/>
+          </a:effectRef>
+          <a:fontRef idx="minor">
+            <a:schemeClr val="lt1"/>
+          </a:fontRef>
+        </p:style>
+        <p:txBody>
+          <a:bodyPr rtlCol="0" anchor="ctr"/>
+          <a:lstStyle/>
+          <a:p>
+            <a:pPr algn="ctr"/>
+          </a:p>
+        </p:txBody>
+      </p:sp>
+      <p:sp>
+        <p:nvSpPr>
+          <p:cNvPr id="74" name="TextBox 73"/>
           <p:cNvSpPr txBox="1"/>
           <p:nvPr/>
         </p:nvSpPr>
         <p:spPr>
           <a:xfrm>
-            <a:off x="5728898" y="4910328"/>
-            <a:ext cx="1858609" cy="457200"/>
+            <a:off x="4484126" y="3084819"/>
+            <a:ext cx="548640" cy="146304"/>
           </a:xfrm>
           <a:prstGeom prst="rect">
             <a:avLst/>
@@ -7872,53 +6414,370 @@
           </a:bodyPr>
           <a:lstStyle/>
           <a:p>
-            <a:pPr algn="l">
+            <a:pPr algn="ctr">
               <a:lnSpc>
-                <a:spcPct val="114000"/>
+                <a:spcPct val="100000"/>
               </a:lnSpc>
             </a:pPr>
             <a:r>
-              <a:rPr sz="1150" b="1">
-                <a:solidFill>
-                  <a:srgbClr val="1A1A1A"/>
+              <a:rPr sz="1050" b="1">
+                <a:solidFill>
+                  <a:srgbClr val="1428A0"/>
                 </a:solidFill>
                 <a:latin typeface="SamsungOneKorean"/>
                 <a:ea typeface="SamsungOneKorean"/>
                 <a:cs typeface="SamsungOneKorean"/>
               </a:rPr>
-              <a:t>공급 조절 결단,</a:t>
-            </a:r>
-          </a:p>
-          <a:p>
-            <a:pPr algn="l">
+              <a:t>88</a:t>
+            </a:r>
+          </a:p>
+        </p:txBody>
+      </p:sp>
+      <p:cxnSp>
+        <p:nvCxnSpPr>
+          <p:cNvPr id="75" name="Connector 74"/>
+          <p:cNvCxnSpPr/>
+          <p:nvPr/>
+        </p:nvCxnSpPr>
+        <p:spPr>
+          <a:xfrm>
+            <a:off x="3614257" y="4315968"/>
+            <a:ext cx="1794601" cy="0"/>
+          </a:xfrm>
+          <a:prstGeom prst="line">
+            <a:avLst/>
+          </a:prstGeom>
+          <a:ln w="11430">
+            <a:solidFill>
+              <a:srgbClr val="D9D9D9"/>
+            </a:solidFill>
+          </a:ln>
+          <a:effectLst/>
+        </p:spPr>
+        <p:style>
+          <a:lnRef idx="2">
+            <a:schemeClr val="accent1"/>
+          </a:lnRef>
+          <a:fillRef idx="0">
+            <a:schemeClr val="accent1"/>
+          </a:fillRef>
+          <a:effectRef idx="1">
+            <a:schemeClr val="accent1"/>
+          </a:effectRef>
+          <a:fontRef idx="minor">
+            <a:schemeClr val="tx1"/>
+          </a:fontRef>
+        </p:style>
+      </p:cxnSp>
+      <p:sp>
+        <p:nvSpPr>
+          <p:cNvPr id="76" name="TextBox 75"/>
+          <p:cNvSpPr txBox="1"/>
+          <p:nvPr/>
+        </p:nvSpPr>
+        <p:spPr>
+          <a:xfrm>
+            <a:off x="4008638" y="4361688"/>
+            <a:ext cx="512064" cy="128016"/>
+          </a:xfrm>
+          <a:prstGeom prst="rect">
+            <a:avLst/>
+          </a:prstGeom>
+          <a:noFill/>
+        </p:spPr>
+        <p:txBody>
+          <a:bodyPr wrap="square" anchor="t" lIns="0" rIns="0" tIns="0" bIns="0">
+            <a:spAutoFit/>
+          </a:bodyPr>
+          <a:lstStyle/>
+          <a:p>
+            <a:pPr algn="ctr">
               <a:lnSpc>
-                <a:spcPct val="114000"/>
+                <a:spcPct val="100000"/>
               </a:lnSpc>
             </a:pPr>
             <a:r>
-              <a:rPr sz="1150" b="1">
-                <a:solidFill>
-                  <a:srgbClr val="1A1A1A"/>
+              <a:rPr sz="1000" b="0">
+                <a:solidFill>
+                  <a:srgbClr val="8A8A8E"/>
                 </a:solidFill>
                 <a:latin typeface="SamsungOneKorean"/>
                 <a:ea typeface="SamsungOneKorean"/>
                 <a:cs typeface="SamsungOneKorean"/>
               </a:rPr>
-              <a:t>얼마나 빨리 내릴 것인가</a:t>
-            </a:r>
-          </a:p>
-        </p:txBody>
-      </p:sp>
-      <p:sp>
-        <p:nvSpPr>
-          <p:cNvPr id="111" name="Rectangle 110"/>
+              <a:t>현재</a:t>
+            </a:r>
+          </a:p>
+        </p:txBody>
+      </p:sp>
+      <p:sp>
+        <p:nvSpPr>
+          <p:cNvPr id="77" name="TextBox 76"/>
+          <p:cNvSpPr txBox="1"/>
+          <p:nvPr/>
+        </p:nvSpPr>
+        <p:spPr>
+          <a:xfrm>
+            <a:off x="4502414" y="4361688"/>
+            <a:ext cx="512064" cy="128016"/>
+          </a:xfrm>
+          <a:prstGeom prst="rect">
+            <a:avLst/>
+          </a:prstGeom>
+          <a:noFill/>
+        </p:spPr>
+        <p:txBody>
+          <a:bodyPr wrap="square" anchor="t" lIns="0" rIns="0" tIns="0" bIns="0">
+            <a:spAutoFit/>
+          </a:bodyPr>
+          <a:lstStyle/>
+          <a:p>
+            <a:pPr algn="ctr">
+              <a:lnSpc>
+                <a:spcPct val="100000"/>
+              </a:lnSpc>
+            </a:pPr>
+            <a:r>
+              <a:rPr sz="1000" b="0">
+                <a:solidFill>
+                  <a:srgbClr val="8A8A8E"/>
+                </a:solidFill>
+                <a:latin typeface="SamsungOneKorean"/>
+                <a:ea typeface="SamsungOneKorean"/>
+                <a:cs typeface="SamsungOneKorean"/>
+              </a:rPr>
+              <a:t>시나리오</a:t>
+            </a:r>
+          </a:p>
+        </p:txBody>
+      </p:sp>
+      <p:sp>
+        <p:nvSpPr>
+          <p:cNvPr id="78" name="Rectangle 77"/>
           <p:cNvSpPr/>
           <p:nvPr/>
         </p:nvSpPr>
         <p:spPr>
           <a:xfrm>
-            <a:off x="7697236" y="4901183"/>
-            <a:ext cx="32004" cy="457200"/>
+            <a:off x="6168999" y="3964838"/>
+            <a:ext cx="365760" cy="351129"/>
+          </a:xfrm>
+          <a:prstGeom prst="rect">
+            <a:avLst/>
+          </a:prstGeom>
+          <a:solidFill>
+            <a:srgbClr val="C4CAE7"/>
+          </a:solidFill>
+          <a:ln>
+            <a:noFill/>
+          </a:ln>
+          <a:effectLst/>
+        </p:spPr>
+        <p:style>
+          <a:lnRef idx="1">
+            <a:schemeClr val="accent1"/>
+          </a:lnRef>
+          <a:fillRef idx="3">
+            <a:schemeClr val="accent1"/>
+          </a:fillRef>
+          <a:effectRef idx="2">
+            <a:schemeClr val="accent1"/>
+          </a:effectRef>
+          <a:fontRef idx="minor">
+            <a:schemeClr val="lt1"/>
+          </a:fontRef>
+        </p:style>
+        <p:txBody>
+          <a:bodyPr rtlCol="0" anchor="ctr"/>
+          <a:lstStyle/>
+          <a:p>
+            <a:pPr algn="ctr"/>
+          </a:p>
+        </p:txBody>
+      </p:sp>
+      <p:sp>
+        <p:nvSpPr>
+          <p:cNvPr id="79" name="Rectangle 78"/>
+          <p:cNvSpPr/>
+          <p:nvPr/>
+        </p:nvSpPr>
+        <p:spPr>
+          <a:xfrm>
+            <a:off x="6168999" y="3672230"/>
+            <a:ext cx="365760" cy="292608"/>
+          </a:xfrm>
+          <a:prstGeom prst="rect">
+            <a:avLst/>
+          </a:prstGeom>
+          <a:solidFill>
+            <a:srgbClr val="D5DBF0"/>
+          </a:solidFill>
+          <a:ln>
+            <a:noFill/>
+          </a:ln>
+          <a:effectLst/>
+        </p:spPr>
+        <p:style>
+          <a:lnRef idx="1">
+            <a:schemeClr val="accent1"/>
+          </a:lnRef>
+          <a:fillRef idx="3">
+            <a:schemeClr val="accent1"/>
+          </a:fillRef>
+          <a:effectRef idx="2">
+            <a:schemeClr val="accent1"/>
+          </a:effectRef>
+          <a:fontRef idx="minor">
+            <a:schemeClr val="lt1"/>
+          </a:fontRef>
+        </p:style>
+        <p:txBody>
+          <a:bodyPr rtlCol="0" anchor="ctr"/>
+          <a:lstStyle/>
+          <a:p>
+            <a:pPr algn="ctr"/>
+          </a:p>
+        </p:txBody>
+      </p:sp>
+      <p:sp>
+        <p:nvSpPr>
+          <p:cNvPr id="80" name="Rectangle 79"/>
+          <p:cNvSpPr/>
+          <p:nvPr/>
+        </p:nvSpPr>
+        <p:spPr>
+          <a:xfrm>
+            <a:off x="6168999" y="3379622"/>
+            <a:ext cx="365760" cy="292608"/>
+          </a:xfrm>
+          <a:prstGeom prst="rect">
+            <a:avLst/>
+          </a:prstGeom>
+          <a:solidFill>
+            <a:srgbClr val="E3E7F6"/>
+          </a:solidFill>
+          <a:ln>
+            <a:noFill/>
+          </a:ln>
+          <a:effectLst/>
+        </p:spPr>
+        <p:style>
+          <a:lnRef idx="1">
+            <a:schemeClr val="accent1"/>
+          </a:lnRef>
+          <a:fillRef idx="3">
+            <a:schemeClr val="accent1"/>
+          </a:fillRef>
+          <a:effectRef idx="2">
+            <a:schemeClr val="accent1"/>
+          </a:effectRef>
+          <a:fontRef idx="minor">
+            <a:schemeClr val="lt1"/>
+          </a:fontRef>
+        </p:style>
+        <p:txBody>
+          <a:bodyPr rtlCol="0" anchor="ctr"/>
+          <a:lstStyle/>
+          <a:p>
+            <a:pPr algn="ctr"/>
+          </a:p>
+        </p:txBody>
+      </p:sp>
+      <p:sp>
+        <p:nvSpPr>
+          <p:cNvPr id="81" name="Rectangle 80"/>
+          <p:cNvSpPr/>
+          <p:nvPr/>
+        </p:nvSpPr>
+        <p:spPr>
+          <a:xfrm>
+            <a:off x="6168999" y="3145535"/>
+            <a:ext cx="365760" cy="234086"/>
+          </a:xfrm>
+          <a:prstGeom prst="rect">
+            <a:avLst/>
+          </a:prstGeom>
+          <a:solidFill>
+            <a:srgbClr val="EFF1FA"/>
+          </a:solidFill>
+          <a:ln>
+            <a:noFill/>
+          </a:ln>
+          <a:effectLst/>
+        </p:spPr>
+        <p:style>
+          <a:lnRef idx="1">
+            <a:schemeClr val="accent1"/>
+          </a:lnRef>
+          <a:fillRef idx="3">
+            <a:schemeClr val="accent1"/>
+          </a:fillRef>
+          <a:effectRef idx="2">
+            <a:schemeClr val="accent1"/>
+          </a:effectRef>
+          <a:fontRef idx="minor">
+            <a:schemeClr val="lt1"/>
+          </a:fontRef>
+        </p:style>
+        <p:txBody>
+          <a:bodyPr rtlCol="0" anchor="ctr"/>
+          <a:lstStyle/>
+          <a:p>
+            <a:pPr algn="ctr"/>
+          </a:p>
+        </p:txBody>
+      </p:sp>
+      <p:sp>
+        <p:nvSpPr>
+          <p:cNvPr id="82" name="TextBox 81"/>
+          <p:cNvSpPr txBox="1"/>
+          <p:nvPr/>
+        </p:nvSpPr>
+        <p:spPr>
+          <a:xfrm>
+            <a:off x="6077559" y="2944367"/>
+            <a:ext cx="548640" cy="146304"/>
+          </a:xfrm>
+          <a:prstGeom prst="rect">
+            <a:avLst/>
+          </a:prstGeom>
+          <a:noFill/>
+        </p:spPr>
+        <p:txBody>
+          <a:bodyPr wrap="square" anchor="t" lIns="0" rIns="0" tIns="0" bIns="0">
+            <a:spAutoFit/>
+          </a:bodyPr>
+          <a:lstStyle/>
+          <a:p>
+            <a:pPr algn="ctr">
+              <a:lnSpc>
+                <a:spcPct val="100000"/>
+              </a:lnSpc>
+            </a:pPr>
+            <a:r>
+              <a:rPr sz="1000" b="1">
+                <a:solidFill>
+                  <a:srgbClr val="8A8A8E"/>
+                </a:solidFill>
+                <a:latin typeface="SamsungOneKorean"/>
+                <a:ea typeface="SamsungOneKorean"/>
+                <a:cs typeface="SamsungOneKorean"/>
+              </a:rPr>
+              <a:t>100</a:t>
+            </a:r>
+          </a:p>
+        </p:txBody>
+      </p:sp>
+      <p:sp>
+        <p:nvSpPr>
+          <p:cNvPr id="83" name="Rectangle 82"/>
+          <p:cNvSpPr/>
+          <p:nvPr/>
+        </p:nvSpPr>
+        <p:spPr>
+          <a:xfrm>
+            <a:off x="6662775" y="3964838"/>
+            <a:ext cx="365760" cy="351129"/>
           </a:xfrm>
           <a:prstGeom prst="rect">
             <a:avLst/>
@@ -7955,14 +6814,146 @@
       </p:sp>
       <p:sp>
         <p:nvSpPr>
-          <p:cNvPr id="112" name="TextBox 111"/>
+          <p:cNvPr id="84" name="Rectangle 83"/>
+          <p:cNvSpPr/>
+          <p:nvPr/>
+        </p:nvSpPr>
+        <p:spPr>
+          <a:xfrm>
+            <a:off x="6662775" y="3672230"/>
+            <a:ext cx="365760" cy="292608"/>
+          </a:xfrm>
+          <a:prstGeom prst="rect">
+            <a:avLst/>
+          </a:prstGeom>
+          <a:solidFill>
+            <a:srgbClr val="4E68C8"/>
+          </a:solidFill>
+          <a:ln>
+            <a:noFill/>
+          </a:ln>
+          <a:effectLst/>
+        </p:spPr>
+        <p:style>
+          <a:lnRef idx="1">
+            <a:schemeClr val="accent1"/>
+          </a:lnRef>
+          <a:fillRef idx="3">
+            <a:schemeClr val="accent1"/>
+          </a:fillRef>
+          <a:effectRef idx="2">
+            <a:schemeClr val="accent1"/>
+          </a:effectRef>
+          <a:fontRef idx="minor">
+            <a:schemeClr val="lt1"/>
+          </a:fontRef>
+        </p:style>
+        <p:txBody>
+          <a:bodyPr rtlCol="0" anchor="ctr"/>
+          <a:lstStyle/>
+          <a:p>
+            <a:pPr algn="ctr"/>
+          </a:p>
+        </p:txBody>
+      </p:sp>
+      <p:sp>
+        <p:nvSpPr>
+          <p:cNvPr id="85" name="Rectangle 84"/>
+          <p:cNvSpPr/>
+          <p:nvPr/>
+        </p:nvSpPr>
+        <p:spPr>
+          <a:xfrm>
+            <a:off x="6662775" y="3379622"/>
+            <a:ext cx="365760" cy="292608"/>
+          </a:xfrm>
+          <a:prstGeom prst="rect">
+            <a:avLst/>
+          </a:prstGeom>
+          <a:solidFill>
+            <a:srgbClr val="93A2DC"/>
+          </a:solidFill>
+          <a:ln>
+            <a:noFill/>
+          </a:ln>
+          <a:effectLst/>
+        </p:spPr>
+        <p:style>
+          <a:lnRef idx="1">
+            <a:schemeClr val="accent1"/>
+          </a:lnRef>
+          <a:fillRef idx="3">
+            <a:schemeClr val="accent1"/>
+          </a:fillRef>
+          <a:effectRef idx="2">
+            <a:schemeClr val="accent1"/>
+          </a:effectRef>
+          <a:fontRef idx="minor">
+            <a:schemeClr val="lt1"/>
+          </a:fontRef>
+        </p:style>
+        <p:txBody>
+          <a:bodyPr rtlCol="0" anchor="ctr"/>
+          <a:lstStyle/>
+          <a:p>
+            <a:pPr algn="ctr"/>
+          </a:p>
+        </p:txBody>
+      </p:sp>
+      <p:sp>
+        <p:nvSpPr>
+          <p:cNvPr id="86" name="Rectangle 85"/>
+          <p:cNvSpPr/>
+          <p:nvPr/>
+        </p:nvSpPr>
+        <p:spPr>
+          <a:xfrm>
+            <a:off x="6662775" y="3145535"/>
+            <a:ext cx="365760" cy="234086"/>
+          </a:xfrm>
+          <a:prstGeom prst="rect">
+            <a:avLst/>
+          </a:prstGeom>
+          <a:solidFill>
+            <a:srgbClr val="C9D1EE"/>
+          </a:solidFill>
+          <a:ln>
+            <a:noFill/>
+          </a:ln>
+          <a:effectLst/>
+        </p:spPr>
+        <p:style>
+          <a:lnRef idx="1">
+            <a:schemeClr val="accent1"/>
+          </a:lnRef>
+          <a:fillRef idx="3">
+            <a:schemeClr val="accent1"/>
+          </a:fillRef>
+          <a:effectRef idx="2">
+            <a:schemeClr val="accent1"/>
+          </a:effectRef>
+          <a:fontRef idx="minor">
+            <a:schemeClr val="lt1"/>
+          </a:fontRef>
+        </p:style>
+        <p:txBody>
+          <a:bodyPr rtlCol="0" anchor="ctr"/>
+          <a:lstStyle/>
+          <a:p>
+            <a:pPr algn="ctr"/>
+          </a:p>
+        </p:txBody>
+      </p:sp>
+      <p:sp>
+        <p:nvSpPr>
+          <p:cNvPr id="87" name="TextBox 86"/>
           <p:cNvSpPr txBox="1"/>
           <p:nvPr/>
         </p:nvSpPr>
         <p:spPr>
           <a:xfrm>
-            <a:off x="7816108" y="4910328"/>
-            <a:ext cx="1858609" cy="457200"/>
+            <a:off x="6571335" y="2944367"/>
+            <a:ext cx="548640" cy="146304"/>
           </a:xfrm>
           <a:prstGeom prst="rect">
             <a:avLst/>
@@ -7975,53 +6966,411 @@
           </a:bodyPr>
           <a:lstStyle/>
           <a:p>
-            <a:pPr algn="l">
+            <a:pPr algn="ctr">
               <a:lnSpc>
-                <a:spcPct val="114000"/>
+                <a:spcPct val="100000"/>
               </a:lnSpc>
             </a:pPr>
             <a:r>
-              <a:rPr sz="1150" b="1">
-                <a:solidFill>
-                  <a:srgbClr val="1A1A1A"/>
+              <a:rPr sz="1050" b="1">
+                <a:solidFill>
+                  <a:srgbClr val="1428A0"/>
                 </a:solidFill>
                 <a:latin typeface="SamsungOneKorean"/>
                 <a:ea typeface="SamsungOneKorean"/>
                 <a:cs typeface="SamsungOneKorean"/>
               </a:rPr>
-              <a:t>돌아오지 않는 하단,</a:t>
-            </a:r>
-          </a:p>
-          <a:p>
-            <a:pPr algn="l">
+              <a:t>100</a:t>
+            </a:r>
+          </a:p>
+        </p:txBody>
+      </p:sp>
+      <p:cxnSp>
+        <p:nvCxnSpPr>
+          <p:cNvPr id="88" name="Connector 87"/>
+          <p:cNvCxnSpPr/>
+          <p:nvPr/>
+        </p:nvCxnSpPr>
+        <p:spPr>
+          <a:xfrm>
+            <a:off x="5701466" y="4315968"/>
+            <a:ext cx="1794602" cy="0"/>
+          </a:xfrm>
+          <a:prstGeom prst="line">
+            <a:avLst/>
+          </a:prstGeom>
+          <a:ln w="11430">
+            <a:solidFill>
+              <a:srgbClr val="D9D9D9"/>
+            </a:solidFill>
+          </a:ln>
+          <a:effectLst/>
+        </p:spPr>
+        <p:style>
+          <a:lnRef idx="2">
+            <a:schemeClr val="accent1"/>
+          </a:lnRef>
+          <a:fillRef idx="0">
+            <a:schemeClr val="accent1"/>
+          </a:fillRef>
+          <a:effectRef idx="1">
+            <a:schemeClr val="accent1"/>
+          </a:effectRef>
+          <a:fontRef idx="minor">
+            <a:schemeClr val="tx1"/>
+          </a:fontRef>
+        </p:style>
+      </p:cxnSp>
+      <p:sp>
+        <p:nvSpPr>
+          <p:cNvPr id="89" name="TextBox 88"/>
+          <p:cNvSpPr txBox="1"/>
+          <p:nvPr/>
+        </p:nvSpPr>
+        <p:spPr>
+          <a:xfrm>
+            <a:off x="6095847" y="4361688"/>
+            <a:ext cx="512064" cy="128016"/>
+          </a:xfrm>
+          <a:prstGeom prst="rect">
+            <a:avLst/>
+          </a:prstGeom>
+          <a:noFill/>
+        </p:spPr>
+        <p:txBody>
+          <a:bodyPr wrap="square" anchor="t" lIns="0" rIns="0" tIns="0" bIns="0">
+            <a:spAutoFit/>
+          </a:bodyPr>
+          <a:lstStyle/>
+          <a:p>
+            <a:pPr algn="ctr">
               <a:lnSpc>
-                <a:spcPct val="114000"/>
+                <a:spcPct val="100000"/>
               </a:lnSpc>
             </a:pPr>
             <a:r>
-              <a:rPr sz="1150" b="1">
-                <a:solidFill>
-                  <a:srgbClr val="1A1A1A"/>
+              <a:rPr sz="1000" b="0">
+                <a:solidFill>
+                  <a:srgbClr val="8A8A8E"/>
                 </a:solidFill>
                 <a:latin typeface="SamsungOneKorean"/>
                 <a:ea typeface="SamsungOneKorean"/>
                 <a:cs typeface="SamsungOneKorean"/>
               </a:rPr>
-              <a:t>무엇으로 대체할 것인가</a:t>
-            </a:r>
-          </a:p>
-        </p:txBody>
-      </p:sp>
-      <p:sp>
-        <p:nvSpPr>
-          <p:cNvPr id="113" name="Rectangle 112"/>
+              <a:t>현재</a:t>
+            </a:r>
+          </a:p>
+        </p:txBody>
+      </p:sp>
+      <p:sp>
+        <p:nvSpPr>
+          <p:cNvPr id="90" name="TextBox 89"/>
+          <p:cNvSpPr txBox="1"/>
+          <p:nvPr/>
+        </p:nvSpPr>
+        <p:spPr>
+          <a:xfrm>
+            <a:off x="6589623" y="4361688"/>
+            <a:ext cx="512064" cy="128016"/>
+          </a:xfrm>
+          <a:prstGeom prst="rect">
+            <a:avLst/>
+          </a:prstGeom>
+          <a:noFill/>
+        </p:spPr>
+        <p:txBody>
+          <a:bodyPr wrap="square" anchor="t" lIns="0" rIns="0" tIns="0" bIns="0">
+            <a:spAutoFit/>
+          </a:bodyPr>
+          <a:lstStyle/>
+          <a:p>
+            <a:pPr algn="ctr">
+              <a:lnSpc>
+                <a:spcPct val="100000"/>
+              </a:lnSpc>
+            </a:pPr>
+            <a:r>
+              <a:rPr sz="1000" b="0">
+                <a:solidFill>
+                  <a:srgbClr val="8A8A8E"/>
+                </a:solidFill>
+                <a:latin typeface="SamsungOneKorean"/>
+                <a:ea typeface="SamsungOneKorean"/>
+                <a:cs typeface="SamsungOneKorean"/>
+              </a:rPr>
+              <a:t>시나리오</a:t>
+            </a:r>
+          </a:p>
+        </p:txBody>
+      </p:sp>
+      <p:sp>
+        <p:nvSpPr>
+          <p:cNvPr id="91" name="TextBox 90"/>
+          <p:cNvSpPr txBox="1"/>
+          <p:nvPr/>
+        </p:nvSpPr>
+        <p:spPr>
+          <a:xfrm>
+            <a:off x="5610026" y="4530852"/>
+            <a:ext cx="1977481" cy="137160"/>
+          </a:xfrm>
+          <a:prstGeom prst="rect">
+            <a:avLst/>
+          </a:prstGeom>
+          <a:noFill/>
+        </p:spPr>
+        <p:txBody>
+          <a:bodyPr wrap="square" anchor="t" lIns="0" rIns="0" tIns="0" bIns="0">
+            <a:spAutoFit/>
+          </a:bodyPr>
+          <a:lstStyle/>
+          <a:p>
+            <a:pPr algn="ctr">
+              <a:lnSpc>
+                <a:spcPct val="100000"/>
+              </a:lnSpc>
+            </a:pPr>
+            <a:r>
+              <a:rPr sz="1000" b="1">
+                <a:solidFill>
+                  <a:srgbClr val="555555"/>
+                </a:solidFill>
+                <a:latin typeface="SamsungOneKorean"/>
+                <a:ea typeface="SamsungOneKorean"/>
+                <a:cs typeface="SamsungOneKorean"/>
+              </a:rPr>
+              <a:t>수요 유지 · 공급이 초과</a:t>
+            </a:r>
+          </a:p>
+        </p:txBody>
+      </p:sp>
+      <p:sp>
+        <p:nvSpPr>
+          <p:cNvPr id="92" name="Rectangle 91"/>
           <p:cNvSpPr/>
           <p:nvPr/>
         </p:nvSpPr>
         <p:spPr>
           <a:xfrm>
-            <a:off x="9784445" y="4901183"/>
-            <a:ext cx="32004" cy="457200"/>
+            <a:off x="8256209" y="3964838"/>
+            <a:ext cx="365760" cy="351129"/>
+          </a:xfrm>
+          <a:prstGeom prst="rect">
+            <a:avLst/>
+          </a:prstGeom>
+          <a:solidFill>
+            <a:srgbClr val="C4CAE7"/>
+          </a:solidFill>
+          <a:ln>
+            <a:noFill/>
+          </a:ln>
+          <a:effectLst/>
+        </p:spPr>
+        <p:style>
+          <a:lnRef idx="1">
+            <a:schemeClr val="accent1"/>
+          </a:lnRef>
+          <a:fillRef idx="3">
+            <a:schemeClr val="accent1"/>
+          </a:fillRef>
+          <a:effectRef idx="2">
+            <a:schemeClr val="accent1"/>
+          </a:effectRef>
+          <a:fontRef idx="minor">
+            <a:schemeClr val="lt1"/>
+          </a:fontRef>
+        </p:style>
+        <p:txBody>
+          <a:bodyPr rtlCol="0" anchor="ctr"/>
+          <a:lstStyle/>
+          <a:p>
+            <a:pPr algn="ctr"/>
+          </a:p>
+        </p:txBody>
+      </p:sp>
+      <p:sp>
+        <p:nvSpPr>
+          <p:cNvPr id="93" name="Rectangle 92"/>
+          <p:cNvSpPr/>
+          <p:nvPr/>
+        </p:nvSpPr>
+        <p:spPr>
+          <a:xfrm>
+            <a:off x="8256209" y="3672230"/>
+            <a:ext cx="365760" cy="292608"/>
+          </a:xfrm>
+          <a:prstGeom prst="rect">
+            <a:avLst/>
+          </a:prstGeom>
+          <a:solidFill>
+            <a:srgbClr val="D5DBF0"/>
+          </a:solidFill>
+          <a:ln>
+            <a:noFill/>
+          </a:ln>
+          <a:effectLst/>
+        </p:spPr>
+        <p:style>
+          <a:lnRef idx="1">
+            <a:schemeClr val="accent1"/>
+          </a:lnRef>
+          <a:fillRef idx="3">
+            <a:schemeClr val="accent1"/>
+          </a:fillRef>
+          <a:effectRef idx="2">
+            <a:schemeClr val="accent1"/>
+          </a:effectRef>
+          <a:fontRef idx="minor">
+            <a:schemeClr val="lt1"/>
+          </a:fontRef>
+        </p:style>
+        <p:txBody>
+          <a:bodyPr rtlCol="0" anchor="ctr"/>
+          <a:lstStyle/>
+          <a:p>
+            <a:pPr algn="ctr"/>
+          </a:p>
+        </p:txBody>
+      </p:sp>
+      <p:sp>
+        <p:nvSpPr>
+          <p:cNvPr id="94" name="Rectangle 93"/>
+          <p:cNvSpPr/>
+          <p:nvPr/>
+        </p:nvSpPr>
+        <p:spPr>
+          <a:xfrm>
+            <a:off x="8256209" y="3379622"/>
+            <a:ext cx="365760" cy="292608"/>
+          </a:xfrm>
+          <a:prstGeom prst="rect">
+            <a:avLst/>
+          </a:prstGeom>
+          <a:solidFill>
+            <a:srgbClr val="E3E7F6"/>
+          </a:solidFill>
+          <a:ln>
+            <a:noFill/>
+          </a:ln>
+          <a:effectLst/>
+        </p:spPr>
+        <p:style>
+          <a:lnRef idx="1">
+            <a:schemeClr val="accent1"/>
+          </a:lnRef>
+          <a:fillRef idx="3">
+            <a:schemeClr val="accent1"/>
+          </a:fillRef>
+          <a:effectRef idx="2">
+            <a:schemeClr val="accent1"/>
+          </a:effectRef>
+          <a:fontRef idx="minor">
+            <a:schemeClr val="lt1"/>
+          </a:fontRef>
+        </p:style>
+        <p:txBody>
+          <a:bodyPr rtlCol="0" anchor="ctr"/>
+          <a:lstStyle/>
+          <a:p>
+            <a:pPr algn="ctr"/>
+          </a:p>
+        </p:txBody>
+      </p:sp>
+      <p:sp>
+        <p:nvSpPr>
+          <p:cNvPr id="95" name="Rectangle 94"/>
+          <p:cNvSpPr/>
+          <p:nvPr/>
+        </p:nvSpPr>
+        <p:spPr>
+          <a:xfrm>
+            <a:off x="8256209" y="3145535"/>
+            <a:ext cx="365760" cy="234086"/>
+          </a:xfrm>
+          <a:prstGeom prst="rect">
+            <a:avLst/>
+          </a:prstGeom>
+          <a:solidFill>
+            <a:srgbClr val="EFF1FA"/>
+          </a:solidFill>
+          <a:ln>
+            <a:noFill/>
+          </a:ln>
+          <a:effectLst/>
+        </p:spPr>
+        <p:style>
+          <a:lnRef idx="1">
+            <a:schemeClr val="accent1"/>
+          </a:lnRef>
+          <a:fillRef idx="3">
+            <a:schemeClr val="accent1"/>
+          </a:fillRef>
+          <a:effectRef idx="2">
+            <a:schemeClr val="accent1"/>
+          </a:effectRef>
+          <a:fontRef idx="minor">
+            <a:schemeClr val="lt1"/>
+          </a:fontRef>
+        </p:style>
+        <p:txBody>
+          <a:bodyPr rtlCol="0" anchor="ctr"/>
+          <a:lstStyle/>
+          <a:p>
+            <a:pPr algn="ctr"/>
+          </a:p>
+        </p:txBody>
+      </p:sp>
+      <p:sp>
+        <p:nvSpPr>
+          <p:cNvPr id="96" name="TextBox 95"/>
+          <p:cNvSpPr txBox="1"/>
+          <p:nvPr/>
+        </p:nvSpPr>
+        <p:spPr>
+          <a:xfrm>
+            <a:off x="8164769" y="2944367"/>
+            <a:ext cx="548640" cy="146304"/>
+          </a:xfrm>
+          <a:prstGeom prst="rect">
+            <a:avLst/>
+          </a:prstGeom>
+          <a:noFill/>
+        </p:spPr>
+        <p:txBody>
+          <a:bodyPr wrap="square" anchor="t" lIns="0" rIns="0" tIns="0" bIns="0">
+            <a:spAutoFit/>
+          </a:bodyPr>
+          <a:lstStyle/>
+          <a:p>
+            <a:pPr algn="ctr">
+              <a:lnSpc>
+                <a:spcPct val="100000"/>
+              </a:lnSpc>
+            </a:pPr>
+            <a:r>
+              <a:rPr sz="1000" b="1">
+                <a:solidFill>
+                  <a:srgbClr val="8A8A8E"/>
+                </a:solidFill>
+                <a:latin typeface="SamsungOneKorean"/>
+                <a:ea typeface="SamsungOneKorean"/>
+                <a:cs typeface="SamsungOneKorean"/>
+              </a:rPr>
+              <a:t>100</a:t>
+            </a:r>
+          </a:p>
+        </p:txBody>
+      </p:sp>
+      <p:sp>
+        <p:nvSpPr>
+          <p:cNvPr id="97" name="Rectangle 96"/>
+          <p:cNvSpPr/>
+          <p:nvPr/>
+        </p:nvSpPr>
+        <p:spPr>
+          <a:xfrm>
+            <a:off x="8749985" y="3964838"/>
+            <a:ext cx="365760" cy="351129"/>
           </a:xfrm>
           <a:prstGeom prst="rect">
             <a:avLst/>
@@ -8058,14 +7407,146 @@
       </p:sp>
       <p:sp>
         <p:nvSpPr>
-          <p:cNvPr id="114" name="TextBox 113"/>
+          <p:cNvPr id="98" name="Rectangle 97"/>
+          <p:cNvSpPr/>
+          <p:nvPr/>
+        </p:nvSpPr>
+        <p:spPr>
+          <a:xfrm>
+            <a:off x="8749985" y="3672230"/>
+            <a:ext cx="365760" cy="292608"/>
+          </a:xfrm>
+          <a:prstGeom prst="rect">
+            <a:avLst/>
+          </a:prstGeom>
+          <a:solidFill>
+            <a:srgbClr val="4E68C8"/>
+          </a:solidFill>
+          <a:ln>
+            <a:noFill/>
+          </a:ln>
+          <a:effectLst/>
+        </p:spPr>
+        <p:style>
+          <a:lnRef idx="1">
+            <a:schemeClr val="accent1"/>
+          </a:lnRef>
+          <a:fillRef idx="3">
+            <a:schemeClr val="accent1"/>
+          </a:fillRef>
+          <a:effectRef idx="2">
+            <a:schemeClr val="accent1"/>
+          </a:effectRef>
+          <a:fontRef idx="minor">
+            <a:schemeClr val="lt1"/>
+          </a:fontRef>
+        </p:style>
+        <p:txBody>
+          <a:bodyPr rtlCol="0" anchor="ctr"/>
+          <a:lstStyle/>
+          <a:p>
+            <a:pPr algn="ctr"/>
+          </a:p>
+        </p:txBody>
+      </p:sp>
+      <p:sp>
+        <p:nvSpPr>
+          <p:cNvPr id="99" name="Rectangle 98"/>
+          <p:cNvSpPr/>
+          <p:nvPr/>
+        </p:nvSpPr>
+        <p:spPr>
+          <a:xfrm>
+            <a:off x="8749985" y="3379622"/>
+            <a:ext cx="365760" cy="292608"/>
+          </a:xfrm>
+          <a:prstGeom prst="rect">
+            <a:avLst/>
+          </a:prstGeom>
+          <a:solidFill>
+            <a:srgbClr val="93A2DC"/>
+          </a:solidFill>
+          <a:ln>
+            <a:noFill/>
+          </a:ln>
+          <a:effectLst/>
+        </p:spPr>
+        <p:style>
+          <a:lnRef idx="1">
+            <a:schemeClr val="accent1"/>
+          </a:lnRef>
+          <a:fillRef idx="3">
+            <a:schemeClr val="accent1"/>
+          </a:fillRef>
+          <a:effectRef idx="2">
+            <a:schemeClr val="accent1"/>
+          </a:effectRef>
+          <a:fontRef idx="minor">
+            <a:schemeClr val="lt1"/>
+          </a:fontRef>
+        </p:style>
+        <p:txBody>
+          <a:bodyPr rtlCol="0" anchor="ctr"/>
+          <a:lstStyle/>
+          <a:p>
+            <a:pPr algn="ctr"/>
+          </a:p>
+        </p:txBody>
+      </p:sp>
+      <p:sp>
+        <p:nvSpPr>
+          <p:cNvPr id="100" name="Rectangle 99"/>
+          <p:cNvSpPr/>
+          <p:nvPr/>
+        </p:nvSpPr>
+        <p:spPr>
+          <a:xfrm>
+            <a:off x="8749985" y="3145535"/>
+            <a:ext cx="365760" cy="234086"/>
+          </a:xfrm>
+          <a:prstGeom prst="rect">
+            <a:avLst/>
+          </a:prstGeom>
+          <a:solidFill>
+            <a:srgbClr val="C9D1EE"/>
+          </a:solidFill>
+          <a:ln>
+            <a:noFill/>
+          </a:ln>
+          <a:effectLst/>
+        </p:spPr>
+        <p:style>
+          <a:lnRef idx="1">
+            <a:schemeClr val="accent1"/>
+          </a:lnRef>
+          <a:fillRef idx="3">
+            <a:schemeClr val="accent1"/>
+          </a:fillRef>
+          <a:effectRef idx="2">
+            <a:schemeClr val="accent1"/>
+          </a:effectRef>
+          <a:fontRef idx="minor">
+            <a:schemeClr val="lt1"/>
+          </a:fontRef>
+        </p:style>
+        <p:txBody>
+          <a:bodyPr rtlCol="0" anchor="ctr"/>
+          <a:lstStyle/>
+          <a:p>
+            <a:pPr algn="ctr"/>
+          </a:p>
+        </p:txBody>
+      </p:sp>
+      <p:sp>
+        <p:nvSpPr>
+          <p:cNvPr id="101" name="TextBox 100"/>
           <p:cNvSpPr txBox="1"/>
           <p:nvPr/>
         </p:nvSpPr>
         <p:spPr>
           <a:xfrm>
-            <a:off x="9903317" y="4910328"/>
-            <a:ext cx="1858609" cy="457200"/>
+            <a:off x="8658545" y="2944367"/>
+            <a:ext cx="548640" cy="146304"/>
           </a:xfrm>
           <a:prstGeom prst="rect">
             <a:avLst/>
@@ -8078,52 +7559,1497 @@
           </a:bodyPr>
           <a:lstStyle/>
           <a:p>
-            <a:pPr algn="l">
+            <a:pPr algn="ctr">
               <a:lnSpc>
-                <a:spcPct val="114000"/>
+                <a:spcPct val="100000"/>
               </a:lnSpc>
             </a:pPr>
             <a:r>
-              <a:rPr sz="1150" b="1">
-                <a:solidFill>
-                  <a:srgbClr val="1A1A1A"/>
+              <a:rPr sz="1050" b="1">
+                <a:solidFill>
+                  <a:srgbClr val="1428A0"/>
                 </a:solidFill>
                 <a:latin typeface="SamsungOneKorean"/>
                 <a:ea typeface="SamsungOneKorean"/>
                 <a:cs typeface="SamsungOneKorean"/>
               </a:rPr>
-              <a:t>다음 판의 자리,</a:t>
-            </a:r>
-          </a:p>
-          <a:p>
-            <a:pPr algn="l">
+              <a:t>100</a:t>
+            </a:r>
+          </a:p>
+        </p:txBody>
+      </p:sp>
+      <p:cxnSp>
+        <p:nvCxnSpPr>
+          <p:cNvPr id="102" name="Connector 101"/>
+          <p:cNvCxnSpPr/>
+          <p:nvPr/>
+        </p:nvCxnSpPr>
+        <p:spPr>
+          <a:xfrm>
+            <a:off x="7788676" y="4315968"/>
+            <a:ext cx="1794601" cy="0"/>
+          </a:xfrm>
+          <a:prstGeom prst="line">
+            <a:avLst/>
+          </a:prstGeom>
+          <a:ln w="11430">
+            <a:solidFill>
+              <a:srgbClr val="D9D9D9"/>
+            </a:solidFill>
+          </a:ln>
+          <a:effectLst/>
+        </p:spPr>
+        <p:style>
+          <a:lnRef idx="2">
+            <a:schemeClr val="accent1"/>
+          </a:lnRef>
+          <a:fillRef idx="0">
+            <a:schemeClr val="accent1"/>
+          </a:fillRef>
+          <a:effectRef idx="1">
+            <a:schemeClr val="accent1"/>
+          </a:effectRef>
+          <a:fontRef idx="minor">
+            <a:schemeClr val="tx1"/>
+          </a:fontRef>
+        </p:style>
+      </p:cxnSp>
+      <p:sp>
+        <p:nvSpPr>
+          <p:cNvPr id="103" name="TextBox 102"/>
+          <p:cNvSpPr txBox="1"/>
+          <p:nvPr/>
+        </p:nvSpPr>
+        <p:spPr>
+          <a:xfrm>
+            <a:off x="8183057" y="4361688"/>
+            <a:ext cx="512064" cy="128016"/>
+          </a:xfrm>
+          <a:prstGeom prst="rect">
+            <a:avLst/>
+          </a:prstGeom>
+          <a:noFill/>
+        </p:spPr>
+        <p:txBody>
+          <a:bodyPr wrap="square" anchor="t" lIns="0" rIns="0" tIns="0" bIns="0">
+            <a:spAutoFit/>
+          </a:bodyPr>
+          <a:lstStyle/>
+          <a:p>
+            <a:pPr algn="ctr">
               <a:lnSpc>
-                <a:spcPct val="114000"/>
+                <a:spcPct val="100000"/>
               </a:lnSpc>
             </a:pPr>
             <a:r>
-              <a:rPr sz="1150" b="1">
-                <a:solidFill>
-                  <a:srgbClr val="1A1A1A"/>
+              <a:rPr sz="1000" b="0">
+                <a:solidFill>
+                  <a:srgbClr val="8A8A8E"/>
                 </a:solidFill>
                 <a:latin typeface="SamsungOneKorean"/>
                 <a:ea typeface="SamsungOneKorean"/>
                 <a:cs typeface="SamsungOneKorean"/>
               </a:rPr>
-              <a:t>지금 어떻게 확보할 것인가</a:t>
-            </a:r>
-          </a:p>
-        </p:txBody>
-      </p:sp>
-      <p:sp>
-        <p:nvSpPr>
-          <p:cNvPr id="115" name="Rounded Rectangle 114"/>
+              <a:t>현재</a:t>
+            </a:r>
+          </a:p>
+        </p:txBody>
+      </p:sp>
+      <p:sp>
+        <p:nvSpPr>
+          <p:cNvPr id="104" name="TextBox 103"/>
+          <p:cNvSpPr txBox="1"/>
+          <p:nvPr/>
+        </p:nvSpPr>
+        <p:spPr>
+          <a:xfrm>
+            <a:off x="8676833" y="4361688"/>
+            <a:ext cx="512064" cy="128016"/>
+          </a:xfrm>
+          <a:prstGeom prst="rect">
+            <a:avLst/>
+          </a:prstGeom>
+          <a:noFill/>
+        </p:spPr>
+        <p:txBody>
+          <a:bodyPr wrap="square" anchor="t" lIns="0" rIns="0" tIns="0" bIns="0">
+            <a:spAutoFit/>
+          </a:bodyPr>
+          <a:lstStyle/>
+          <a:p>
+            <a:pPr algn="ctr">
+              <a:lnSpc>
+                <a:spcPct val="100000"/>
+              </a:lnSpc>
+            </a:pPr>
+            <a:r>
+              <a:rPr sz="1000" b="0">
+                <a:solidFill>
+                  <a:srgbClr val="8A8A8E"/>
+                </a:solidFill>
+                <a:latin typeface="SamsungOneKorean"/>
+                <a:ea typeface="SamsungOneKorean"/>
+                <a:cs typeface="SamsungOneKorean"/>
+              </a:rPr>
+              <a:t>시나리오</a:t>
+            </a:r>
+          </a:p>
+        </p:txBody>
+      </p:sp>
+      <p:sp>
+        <p:nvSpPr>
+          <p:cNvPr id="105" name="TextBox 104"/>
+          <p:cNvSpPr txBox="1"/>
+          <p:nvPr/>
+        </p:nvSpPr>
+        <p:spPr>
+          <a:xfrm>
+            <a:off x="7697236" y="4530852"/>
+            <a:ext cx="1977481" cy="137160"/>
+          </a:xfrm>
+          <a:prstGeom prst="rect">
+            <a:avLst/>
+          </a:prstGeom>
+          <a:noFill/>
+        </p:spPr>
+        <p:txBody>
+          <a:bodyPr wrap="square" anchor="t" lIns="0" rIns="0" tIns="0" bIns="0">
+            <a:spAutoFit/>
+          </a:bodyPr>
+          <a:lstStyle/>
+          <a:p>
+            <a:pPr algn="ctr">
+              <a:lnSpc>
+                <a:spcPct val="100000"/>
+              </a:lnSpc>
+            </a:pPr>
+            <a:r>
+              <a:rPr sz="1000" b="1">
+                <a:solidFill>
+                  <a:srgbClr val="555555"/>
+                </a:solidFill>
+                <a:latin typeface="SamsungOneKorean"/>
+                <a:ea typeface="SamsungOneKorean"/>
+                <a:cs typeface="SamsungOneKorean"/>
+              </a:rPr>
+              <a:t>수요 유지 · 하단 가격 붕괴</a:t>
+            </a:r>
+          </a:p>
+        </p:txBody>
+      </p:sp>
+      <p:sp>
+        <p:nvSpPr>
+          <p:cNvPr id="106" name="Rectangle 105"/>
           <p:cNvSpPr/>
           <p:nvPr/>
         </p:nvSpPr>
         <p:spPr>
           <a:xfrm>
-            <a:off x="429768" y="5925312"/>
+            <a:off x="10343418" y="3964838"/>
+            <a:ext cx="365760" cy="351129"/>
+          </a:xfrm>
+          <a:prstGeom prst="rect">
+            <a:avLst/>
+          </a:prstGeom>
+          <a:solidFill>
+            <a:srgbClr val="C4CAE7"/>
+          </a:solidFill>
+          <a:ln>
+            <a:noFill/>
+          </a:ln>
+          <a:effectLst/>
+        </p:spPr>
+        <p:style>
+          <a:lnRef idx="1">
+            <a:schemeClr val="accent1"/>
+          </a:lnRef>
+          <a:fillRef idx="3">
+            <a:schemeClr val="accent1"/>
+          </a:fillRef>
+          <a:effectRef idx="2">
+            <a:schemeClr val="accent1"/>
+          </a:effectRef>
+          <a:fontRef idx="minor">
+            <a:schemeClr val="lt1"/>
+          </a:fontRef>
+        </p:style>
+        <p:txBody>
+          <a:bodyPr rtlCol="0" anchor="ctr"/>
+          <a:lstStyle/>
+          <a:p>
+            <a:pPr algn="ctr"/>
+          </a:p>
+        </p:txBody>
+      </p:sp>
+      <p:sp>
+        <p:nvSpPr>
+          <p:cNvPr id="107" name="Rectangle 106"/>
+          <p:cNvSpPr/>
+          <p:nvPr/>
+        </p:nvSpPr>
+        <p:spPr>
+          <a:xfrm>
+            <a:off x="10343418" y="3672230"/>
+            <a:ext cx="365760" cy="292608"/>
+          </a:xfrm>
+          <a:prstGeom prst="rect">
+            <a:avLst/>
+          </a:prstGeom>
+          <a:solidFill>
+            <a:srgbClr val="D5DBF0"/>
+          </a:solidFill>
+          <a:ln>
+            <a:noFill/>
+          </a:ln>
+          <a:effectLst/>
+        </p:spPr>
+        <p:style>
+          <a:lnRef idx="1">
+            <a:schemeClr val="accent1"/>
+          </a:lnRef>
+          <a:fillRef idx="3">
+            <a:schemeClr val="accent1"/>
+          </a:fillRef>
+          <a:effectRef idx="2">
+            <a:schemeClr val="accent1"/>
+          </a:effectRef>
+          <a:fontRef idx="minor">
+            <a:schemeClr val="lt1"/>
+          </a:fontRef>
+        </p:style>
+        <p:txBody>
+          <a:bodyPr rtlCol="0" anchor="ctr"/>
+          <a:lstStyle/>
+          <a:p>
+            <a:pPr algn="ctr"/>
+          </a:p>
+        </p:txBody>
+      </p:sp>
+      <p:sp>
+        <p:nvSpPr>
+          <p:cNvPr id="108" name="Rectangle 107"/>
+          <p:cNvSpPr/>
+          <p:nvPr/>
+        </p:nvSpPr>
+        <p:spPr>
+          <a:xfrm>
+            <a:off x="10343418" y="3379622"/>
+            <a:ext cx="365760" cy="292608"/>
+          </a:xfrm>
+          <a:prstGeom prst="rect">
+            <a:avLst/>
+          </a:prstGeom>
+          <a:solidFill>
+            <a:srgbClr val="E3E7F6"/>
+          </a:solidFill>
+          <a:ln>
+            <a:noFill/>
+          </a:ln>
+          <a:effectLst/>
+        </p:spPr>
+        <p:style>
+          <a:lnRef idx="1">
+            <a:schemeClr val="accent1"/>
+          </a:lnRef>
+          <a:fillRef idx="3">
+            <a:schemeClr val="accent1"/>
+          </a:fillRef>
+          <a:effectRef idx="2">
+            <a:schemeClr val="accent1"/>
+          </a:effectRef>
+          <a:fontRef idx="minor">
+            <a:schemeClr val="lt1"/>
+          </a:fontRef>
+        </p:style>
+        <p:txBody>
+          <a:bodyPr rtlCol="0" anchor="ctr"/>
+          <a:lstStyle/>
+          <a:p>
+            <a:pPr algn="ctr"/>
+          </a:p>
+        </p:txBody>
+      </p:sp>
+      <p:sp>
+        <p:nvSpPr>
+          <p:cNvPr id="109" name="Rectangle 108"/>
+          <p:cNvSpPr/>
+          <p:nvPr/>
+        </p:nvSpPr>
+        <p:spPr>
+          <a:xfrm>
+            <a:off x="10343418" y="3145535"/>
+            <a:ext cx="365760" cy="234086"/>
+          </a:xfrm>
+          <a:prstGeom prst="rect">
+            <a:avLst/>
+          </a:prstGeom>
+          <a:solidFill>
+            <a:srgbClr val="EFF1FA"/>
+          </a:solidFill>
+          <a:ln>
+            <a:noFill/>
+          </a:ln>
+          <a:effectLst/>
+        </p:spPr>
+        <p:style>
+          <a:lnRef idx="1">
+            <a:schemeClr val="accent1"/>
+          </a:lnRef>
+          <a:fillRef idx="3">
+            <a:schemeClr val="accent1"/>
+          </a:fillRef>
+          <a:effectRef idx="2">
+            <a:schemeClr val="accent1"/>
+          </a:effectRef>
+          <a:fontRef idx="minor">
+            <a:schemeClr val="lt1"/>
+          </a:fontRef>
+        </p:style>
+        <p:txBody>
+          <a:bodyPr rtlCol="0" anchor="ctr"/>
+          <a:lstStyle/>
+          <a:p>
+            <a:pPr algn="ctr"/>
+          </a:p>
+        </p:txBody>
+      </p:sp>
+      <p:sp>
+        <p:nvSpPr>
+          <p:cNvPr id="110" name="TextBox 109"/>
+          <p:cNvSpPr txBox="1"/>
+          <p:nvPr/>
+        </p:nvSpPr>
+        <p:spPr>
+          <a:xfrm>
+            <a:off x="10251978" y="2944367"/>
+            <a:ext cx="548640" cy="146304"/>
+          </a:xfrm>
+          <a:prstGeom prst="rect">
+            <a:avLst/>
+          </a:prstGeom>
+          <a:noFill/>
+        </p:spPr>
+        <p:txBody>
+          <a:bodyPr wrap="square" anchor="t" lIns="0" rIns="0" tIns="0" bIns="0">
+            <a:spAutoFit/>
+          </a:bodyPr>
+          <a:lstStyle/>
+          <a:p>
+            <a:pPr algn="ctr">
+              <a:lnSpc>
+                <a:spcPct val="100000"/>
+              </a:lnSpc>
+            </a:pPr>
+            <a:r>
+              <a:rPr sz="1000" b="1">
+                <a:solidFill>
+                  <a:srgbClr val="8A8A8E"/>
+                </a:solidFill>
+                <a:latin typeface="SamsungOneKorean"/>
+                <a:ea typeface="SamsungOneKorean"/>
+                <a:cs typeface="SamsungOneKorean"/>
+              </a:rPr>
+              <a:t>100</a:t>
+            </a:r>
+          </a:p>
+        </p:txBody>
+      </p:sp>
+      <p:sp>
+        <p:nvSpPr>
+          <p:cNvPr id="111" name="Rectangle 110"/>
+          <p:cNvSpPr/>
+          <p:nvPr/>
+        </p:nvSpPr>
+        <p:spPr>
+          <a:xfrm>
+            <a:off x="10837194" y="4175516"/>
+            <a:ext cx="365760" cy="140451"/>
+          </a:xfrm>
+          <a:prstGeom prst="rect">
+            <a:avLst/>
+          </a:prstGeom>
+          <a:solidFill>
+            <a:srgbClr val="1428A0"/>
+          </a:solidFill>
+          <a:ln>
+            <a:noFill/>
+          </a:ln>
+          <a:effectLst/>
+        </p:spPr>
+        <p:style>
+          <a:lnRef idx="1">
+            <a:schemeClr val="accent1"/>
+          </a:lnRef>
+          <a:fillRef idx="3">
+            <a:schemeClr val="accent1"/>
+          </a:fillRef>
+          <a:effectRef idx="2">
+            <a:schemeClr val="accent1"/>
+          </a:effectRef>
+          <a:fontRef idx="minor">
+            <a:schemeClr val="lt1"/>
+          </a:fontRef>
+        </p:style>
+        <p:txBody>
+          <a:bodyPr rtlCol="0" anchor="ctr"/>
+          <a:lstStyle/>
+          <a:p>
+            <a:pPr algn="ctr"/>
+          </a:p>
+        </p:txBody>
+      </p:sp>
+      <p:sp>
+        <p:nvSpPr>
+          <p:cNvPr id="112" name="Rectangle 111"/>
+          <p:cNvSpPr/>
+          <p:nvPr/>
+        </p:nvSpPr>
+        <p:spPr>
+          <a:xfrm>
+            <a:off x="10837194" y="3941429"/>
+            <a:ext cx="365760" cy="234086"/>
+          </a:xfrm>
+          <a:prstGeom prst="rect">
+            <a:avLst/>
+          </a:prstGeom>
+          <a:solidFill>
+            <a:srgbClr val="4E68C8"/>
+          </a:solidFill>
+          <a:ln>
+            <a:noFill/>
+          </a:ln>
+          <a:effectLst/>
+        </p:spPr>
+        <p:style>
+          <a:lnRef idx="1">
+            <a:schemeClr val="accent1"/>
+          </a:lnRef>
+          <a:fillRef idx="3">
+            <a:schemeClr val="accent1"/>
+          </a:fillRef>
+          <a:effectRef idx="2">
+            <a:schemeClr val="accent1"/>
+          </a:effectRef>
+          <a:fontRef idx="minor">
+            <a:schemeClr val="lt1"/>
+          </a:fontRef>
+        </p:style>
+        <p:txBody>
+          <a:bodyPr rtlCol="0" anchor="ctr"/>
+          <a:lstStyle/>
+          <a:p>
+            <a:pPr algn="ctr"/>
+          </a:p>
+        </p:txBody>
+      </p:sp>
+      <p:sp>
+        <p:nvSpPr>
+          <p:cNvPr id="113" name="Rectangle 112"/>
+          <p:cNvSpPr/>
+          <p:nvPr/>
+        </p:nvSpPr>
+        <p:spPr>
+          <a:xfrm>
+            <a:off x="10837194" y="3648821"/>
+            <a:ext cx="365760" cy="292608"/>
+          </a:xfrm>
+          <a:prstGeom prst="rect">
+            <a:avLst/>
+          </a:prstGeom>
+          <a:solidFill>
+            <a:srgbClr val="93A2DC"/>
+          </a:solidFill>
+          <a:ln>
+            <a:noFill/>
+          </a:ln>
+          <a:effectLst/>
+        </p:spPr>
+        <p:style>
+          <a:lnRef idx="1">
+            <a:schemeClr val="accent1"/>
+          </a:lnRef>
+          <a:fillRef idx="3">
+            <a:schemeClr val="accent1"/>
+          </a:fillRef>
+          <a:effectRef idx="2">
+            <a:schemeClr val="accent1"/>
+          </a:effectRef>
+          <a:fontRef idx="minor">
+            <a:schemeClr val="lt1"/>
+          </a:fontRef>
+        </p:style>
+        <p:txBody>
+          <a:bodyPr rtlCol="0" anchor="ctr"/>
+          <a:lstStyle/>
+          <a:p>
+            <a:pPr algn="ctr"/>
+          </a:p>
+        </p:txBody>
+      </p:sp>
+      <p:sp>
+        <p:nvSpPr>
+          <p:cNvPr id="114" name="Rectangle 113"/>
+          <p:cNvSpPr/>
+          <p:nvPr/>
+        </p:nvSpPr>
+        <p:spPr>
+          <a:xfrm>
+            <a:off x="10837194" y="3344509"/>
+            <a:ext cx="365760" cy="304312"/>
+          </a:xfrm>
+          <a:prstGeom prst="rect">
+            <a:avLst/>
+          </a:prstGeom>
+          <a:solidFill>
+            <a:srgbClr val="C9D1EE"/>
+          </a:solidFill>
+          <a:ln>
+            <a:noFill/>
+          </a:ln>
+          <a:effectLst/>
+        </p:spPr>
+        <p:style>
+          <a:lnRef idx="1">
+            <a:schemeClr val="accent1"/>
+          </a:lnRef>
+          <a:fillRef idx="3">
+            <a:schemeClr val="accent1"/>
+          </a:fillRef>
+          <a:effectRef idx="2">
+            <a:schemeClr val="accent1"/>
+          </a:effectRef>
+          <a:fontRef idx="minor">
+            <a:schemeClr val="lt1"/>
+          </a:fontRef>
+        </p:style>
+        <p:txBody>
+          <a:bodyPr rtlCol="0" anchor="ctr"/>
+          <a:lstStyle/>
+          <a:p>
+            <a:pPr algn="ctr"/>
+          </a:p>
+        </p:txBody>
+      </p:sp>
+      <p:sp>
+        <p:nvSpPr>
+          <p:cNvPr id="115" name="Rectangle 114"/>
+          <p:cNvSpPr/>
+          <p:nvPr/>
+        </p:nvSpPr>
+        <p:spPr>
+          <a:xfrm>
+            <a:off x="10837194" y="3168944"/>
+            <a:ext cx="365760" cy="175564"/>
+          </a:xfrm>
+          <a:prstGeom prst="rect">
+            <a:avLst/>
+          </a:prstGeom>
+          <a:solidFill>
+            <a:srgbClr val="FFFFFF"/>
+          </a:solidFill>
+          <a:ln w="11430">
+            <a:solidFill>
+              <a:srgbClr val="8A8A8E"/>
+            </a:solidFill>
+            <a:prstDash val="sysDash"/>
+          </a:ln>
+          <a:effectLst/>
+        </p:spPr>
+        <p:style>
+          <a:lnRef idx="1">
+            <a:schemeClr val="accent1"/>
+          </a:lnRef>
+          <a:fillRef idx="3">
+            <a:schemeClr val="accent1"/>
+          </a:fillRef>
+          <a:effectRef idx="2">
+            <a:schemeClr val="accent1"/>
+          </a:effectRef>
+          <a:fontRef idx="minor">
+            <a:schemeClr val="lt1"/>
+          </a:fontRef>
+        </p:style>
+        <p:txBody>
+          <a:bodyPr rtlCol="0" anchor="ctr"/>
+          <a:lstStyle/>
+          <a:p>
+            <a:pPr algn="ctr"/>
+          </a:p>
+        </p:txBody>
+      </p:sp>
+      <p:sp>
+        <p:nvSpPr>
+          <p:cNvPr id="116" name="TextBox 115"/>
+          <p:cNvSpPr txBox="1"/>
+          <p:nvPr/>
+        </p:nvSpPr>
+        <p:spPr>
+          <a:xfrm>
+            <a:off x="10745754" y="2967776"/>
+            <a:ext cx="548640" cy="146304"/>
+          </a:xfrm>
+          <a:prstGeom prst="rect">
+            <a:avLst/>
+          </a:prstGeom>
+          <a:noFill/>
+        </p:spPr>
+        <p:txBody>
+          <a:bodyPr wrap="square" anchor="t" lIns="0" rIns="0" tIns="0" bIns="0">
+            <a:spAutoFit/>
+          </a:bodyPr>
+          <a:lstStyle/>
+          <a:p>
+            <a:pPr algn="ctr">
+              <a:lnSpc>
+                <a:spcPct val="100000"/>
+              </a:lnSpc>
+            </a:pPr>
+            <a:r>
+              <a:rPr sz="1050" b="1">
+                <a:solidFill>
+                  <a:srgbClr val="1428A0"/>
+                </a:solidFill>
+                <a:latin typeface="SamsungOneKorean"/>
+                <a:ea typeface="SamsungOneKorean"/>
+                <a:cs typeface="SamsungOneKorean"/>
+              </a:rPr>
+              <a:t>98</a:t>
+            </a:r>
+          </a:p>
+        </p:txBody>
+      </p:sp>
+      <p:cxnSp>
+        <p:nvCxnSpPr>
+          <p:cNvPr id="117" name="Connector 116"/>
+          <p:cNvCxnSpPr/>
+          <p:nvPr/>
+        </p:nvCxnSpPr>
+        <p:spPr>
+          <a:xfrm>
+            <a:off x="9875885" y="4315968"/>
+            <a:ext cx="1794602" cy="0"/>
+          </a:xfrm>
+          <a:prstGeom prst="line">
+            <a:avLst/>
+          </a:prstGeom>
+          <a:ln w="11430">
+            <a:solidFill>
+              <a:srgbClr val="D9D9D9"/>
+            </a:solidFill>
+          </a:ln>
+          <a:effectLst/>
+        </p:spPr>
+        <p:style>
+          <a:lnRef idx="2">
+            <a:schemeClr val="accent1"/>
+          </a:lnRef>
+          <a:fillRef idx="0">
+            <a:schemeClr val="accent1"/>
+          </a:fillRef>
+          <a:effectRef idx="1">
+            <a:schemeClr val="accent1"/>
+          </a:effectRef>
+          <a:fontRef idx="minor">
+            <a:schemeClr val="tx1"/>
+          </a:fontRef>
+        </p:style>
+      </p:cxnSp>
+      <p:sp>
+        <p:nvSpPr>
+          <p:cNvPr id="118" name="TextBox 117"/>
+          <p:cNvSpPr txBox="1"/>
+          <p:nvPr/>
+        </p:nvSpPr>
+        <p:spPr>
+          <a:xfrm>
+            <a:off x="10270266" y="4361688"/>
+            <a:ext cx="512064" cy="128016"/>
+          </a:xfrm>
+          <a:prstGeom prst="rect">
+            <a:avLst/>
+          </a:prstGeom>
+          <a:noFill/>
+        </p:spPr>
+        <p:txBody>
+          <a:bodyPr wrap="square" anchor="t" lIns="0" rIns="0" tIns="0" bIns="0">
+            <a:spAutoFit/>
+          </a:bodyPr>
+          <a:lstStyle/>
+          <a:p>
+            <a:pPr algn="ctr">
+              <a:lnSpc>
+                <a:spcPct val="100000"/>
+              </a:lnSpc>
+            </a:pPr>
+            <a:r>
+              <a:rPr sz="1000" b="0">
+                <a:solidFill>
+                  <a:srgbClr val="8A8A8E"/>
+                </a:solidFill>
+                <a:latin typeface="SamsungOneKorean"/>
+                <a:ea typeface="SamsungOneKorean"/>
+                <a:cs typeface="SamsungOneKorean"/>
+              </a:rPr>
+              <a:t>현재</a:t>
+            </a:r>
+          </a:p>
+        </p:txBody>
+      </p:sp>
+      <p:sp>
+        <p:nvSpPr>
+          <p:cNvPr id="119" name="TextBox 118"/>
+          <p:cNvSpPr txBox="1"/>
+          <p:nvPr/>
+        </p:nvSpPr>
+        <p:spPr>
+          <a:xfrm>
+            <a:off x="10764042" y="4361688"/>
+            <a:ext cx="512064" cy="128016"/>
+          </a:xfrm>
+          <a:prstGeom prst="rect">
+            <a:avLst/>
+          </a:prstGeom>
+          <a:noFill/>
+        </p:spPr>
+        <p:txBody>
+          <a:bodyPr wrap="square" anchor="t" lIns="0" rIns="0" tIns="0" bIns="0">
+            <a:spAutoFit/>
+          </a:bodyPr>
+          <a:lstStyle/>
+          <a:p>
+            <a:pPr algn="ctr">
+              <a:lnSpc>
+                <a:spcPct val="100000"/>
+              </a:lnSpc>
+            </a:pPr>
+            <a:r>
+              <a:rPr sz="1000" b="0">
+                <a:solidFill>
+                  <a:srgbClr val="8A8A8E"/>
+                </a:solidFill>
+                <a:latin typeface="SamsungOneKorean"/>
+                <a:ea typeface="SamsungOneKorean"/>
+                <a:cs typeface="SamsungOneKorean"/>
+              </a:rPr>
+              <a:t>시나리오</a:t>
+            </a:r>
+          </a:p>
+        </p:txBody>
+      </p:sp>
+      <p:sp>
+        <p:nvSpPr>
+          <p:cNvPr id="120" name="TextBox 119"/>
+          <p:cNvSpPr txBox="1"/>
+          <p:nvPr/>
+        </p:nvSpPr>
+        <p:spPr>
+          <a:xfrm>
+            <a:off x="9784445" y="4530852"/>
+            <a:ext cx="1977481" cy="137160"/>
+          </a:xfrm>
+          <a:prstGeom prst="rect">
+            <a:avLst/>
+          </a:prstGeom>
+          <a:noFill/>
+        </p:spPr>
+        <p:txBody>
+          <a:bodyPr wrap="square" anchor="t" lIns="0" rIns="0" tIns="0" bIns="0">
+            <a:spAutoFit/>
+          </a:bodyPr>
+          <a:lstStyle/>
+          <a:p>
+            <a:pPr algn="ctr">
+              <a:lnSpc>
+                <a:spcPct val="100000"/>
+              </a:lnSpc>
+            </a:pPr>
+            <a:r>
+              <a:rPr sz="1000" b="1">
+                <a:solidFill>
+                  <a:srgbClr val="555555"/>
+                </a:solidFill>
+                <a:latin typeface="SamsungOneKorean"/>
+                <a:ea typeface="SamsungOneKorean"/>
+                <a:cs typeface="SamsungOneKorean"/>
+              </a:rPr>
+              <a:t>수요가 차세대로 이동</a:t>
+            </a:r>
+          </a:p>
+        </p:txBody>
+      </p:sp>
+      <p:sp>
+        <p:nvSpPr>
+          <p:cNvPr id="121" name="TextBox 120"/>
+          <p:cNvSpPr txBox="1"/>
+          <p:nvPr/>
+        </p:nvSpPr>
+        <p:spPr>
+          <a:xfrm>
+            <a:off x="429768" y="4928616"/>
+            <a:ext cx="877824" cy="365760"/>
+          </a:xfrm>
+          <a:prstGeom prst="rect">
+            <a:avLst/>
+          </a:prstGeom>
+          <a:noFill/>
+        </p:spPr>
+        <p:txBody>
+          <a:bodyPr wrap="square" anchor="t" lIns="0" rIns="0" tIns="0" bIns="0">
+            <a:spAutoFit/>
+          </a:bodyPr>
+          <a:lstStyle/>
+          <a:p>
+            <a:pPr algn="r">
+              <a:lnSpc>
+                <a:spcPct val="112000"/>
+              </a:lnSpc>
+            </a:pPr>
+            <a:r>
+              <a:rPr sz="1000" b="1">
+                <a:solidFill>
+                  <a:srgbClr val="8A8A8E"/>
+                </a:solidFill>
+                <a:latin typeface="SamsungOneKorean"/>
+                <a:ea typeface="SamsungOneKorean"/>
+                <a:cs typeface="SamsungOneKorean"/>
+              </a:rPr>
+              <a:t>풀어야 할</a:t>
+            </a:r>
+          </a:p>
+          <a:p>
+            <a:pPr algn="r">
+              <a:lnSpc>
+                <a:spcPct val="112000"/>
+              </a:lnSpc>
+            </a:pPr>
+            <a:r>
+              <a:rPr sz="1000" b="1">
+                <a:solidFill>
+                  <a:srgbClr val="8A8A8E"/>
+                </a:solidFill>
+                <a:latin typeface="SamsungOneKorean"/>
+                <a:ea typeface="SamsungOneKorean"/>
+                <a:cs typeface="SamsungOneKorean"/>
+              </a:rPr>
+              <a:t>문제</a:t>
+            </a:r>
+          </a:p>
+        </p:txBody>
+      </p:sp>
+      <p:sp>
+        <p:nvSpPr>
+          <p:cNvPr id="122" name="Rectangle 121"/>
+          <p:cNvSpPr/>
+          <p:nvPr/>
+        </p:nvSpPr>
+        <p:spPr>
+          <a:xfrm>
+            <a:off x="1435608" y="4901183"/>
+            <a:ext cx="32004" cy="475488"/>
+          </a:xfrm>
+          <a:prstGeom prst="rect">
+            <a:avLst/>
+          </a:prstGeom>
+          <a:solidFill>
+            <a:srgbClr val="1428A0"/>
+          </a:solidFill>
+          <a:ln>
+            <a:noFill/>
+          </a:ln>
+          <a:effectLst/>
+        </p:spPr>
+        <p:style>
+          <a:lnRef idx="1">
+            <a:schemeClr val="accent1"/>
+          </a:lnRef>
+          <a:fillRef idx="3">
+            <a:schemeClr val="accent1"/>
+          </a:fillRef>
+          <a:effectRef idx="2">
+            <a:schemeClr val="accent1"/>
+          </a:effectRef>
+          <a:fontRef idx="minor">
+            <a:schemeClr val="lt1"/>
+          </a:fontRef>
+        </p:style>
+        <p:txBody>
+          <a:bodyPr rtlCol="0" anchor="ctr"/>
+          <a:lstStyle/>
+          <a:p>
+            <a:pPr algn="ctr"/>
+          </a:p>
+        </p:txBody>
+      </p:sp>
+      <p:sp>
+        <p:nvSpPr>
+          <p:cNvPr id="123" name="TextBox 122"/>
+          <p:cNvSpPr txBox="1"/>
+          <p:nvPr/>
+        </p:nvSpPr>
+        <p:spPr>
+          <a:xfrm>
+            <a:off x="1545336" y="4910328"/>
+            <a:ext cx="1867753" cy="502920"/>
+          </a:xfrm>
+          <a:prstGeom prst="rect">
+            <a:avLst/>
+          </a:prstGeom>
+          <a:noFill/>
+        </p:spPr>
+        <p:txBody>
+          <a:bodyPr wrap="square" anchor="t" lIns="0" rIns="0" tIns="0" bIns="0">
+            <a:spAutoFit/>
+          </a:bodyPr>
+          <a:lstStyle/>
+          <a:p>
+            <a:pPr algn="l">
+              <a:lnSpc>
+                <a:spcPct val="118000"/>
+              </a:lnSpc>
+            </a:pPr>
+            <a:r>
+              <a:rPr sz="1050" b="1">
+                <a:solidFill>
+                  <a:srgbClr val="1A1A1A"/>
+                </a:solidFill>
+                <a:latin typeface="SamsungOneKorean"/>
+                <a:ea typeface="SamsungOneKorean"/>
+                <a:cs typeface="SamsungOneKorean"/>
+              </a:rPr>
+              <a:t>팔 곳 잃은 HBM4·서버 캐파:</a:t>
+            </a:r>
+          </a:p>
+          <a:p>
+            <a:pPr algn="l">
+              <a:lnSpc>
+                <a:spcPct val="118000"/>
+              </a:lnSpc>
+            </a:pPr>
+            <a:r>
+              <a:rPr sz="1050" b="1">
+                <a:solidFill>
+                  <a:srgbClr val="1A1A1A"/>
+                </a:solidFill>
+                <a:latin typeface="SamsungOneKorean"/>
+                <a:ea typeface="SamsungOneKorean"/>
+                <a:cs typeface="SamsungOneKorean"/>
+              </a:rPr>
+              <a:t>CIS 전환(공용 80%)인가,</a:t>
+            </a:r>
+          </a:p>
+          <a:p>
+            <a:pPr algn="l">
+              <a:lnSpc>
+                <a:spcPct val="118000"/>
+              </a:lnSpc>
+            </a:pPr>
+            <a:r>
+              <a:rPr sz="1050" b="1">
+                <a:solidFill>
+                  <a:srgbClr val="1A1A1A"/>
+                </a:solidFill>
+                <a:latin typeface="SamsungOneKorean"/>
+                <a:ea typeface="SamsungOneKorean"/>
+                <a:cs typeface="SamsungOneKorean"/>
+              </a:rPr>
+              <a:t>take-or-pay 방어인가</a:t>
+            </a:r>
+          </a:p>
+        </p:txBody>
+      </p:sp>
+      <p:sp>
+        <p:nvSpPr>
+          <p:cNvPr id="124" name="Rectangle 123"/>
+          <p:cNvSpPr/>
+          <p:nvPr/>
+        </p:nvSpPr>
+        <p:spPr>
+          <a:xfrm>
+            <a:off x="3522817" y="4901183"/>
+            <a:ext cx="32004" cy="475488"/>
+          </a:xfrm>
+          <a:prstGeom prst="rect">
+            <a:avLst/>
+          </a:prstGeom>
+          <a:solidFill>
+            <a:srgbClr val="1428A0"/>
+          </a:solidFill>
+          <a:ln>
+            <a:noFill/>
+          </a:ln>
+          <a:effectLst/>
+        </p:spPr>
+        <p:style>
+          <a:lnRef idx="1">
+            <a:schemeClr val="accent1"/>
+          </a:lnRef>
+          <a:fillRef idx="3">
+            <a:schemeClr val="accent1"/>
+          </a:fillRef>
+          <a:effectRef idx="2">
+            <a:schemeClr val="accent1"/>
+          </a:effectRef>
+          <a:fontRef idx="minor">
+            <a:schemeClr val="lt1"/>
+          </a:fontRef>
+        </p:style>
+        <p:txBody>
+          <a:bodyPr rtlCol="0" anchor="ctr"/>
+          <a:lstStyle/>
+          <a:p>
+            <a:pPr algn="ctr"/>
+          </a:p>
+        </p:txBody>
+      </p:sp>
+      <p:sp>
+        <p:nvSpPr>
+          <p:cNvPr id="125" name="TextBox 124"/>
+          <p:cNvSpPr txBox="1"/>
+          <p:nvPr/>
+        </p:nvSpPr>
+        <p:spPr>
+          <a:xfrm>
+            <a:off x="3632545" y="4910328"/>
+            <a:ext cx="1867753" cy="502920"/>
+          </a:xfrm>
+          <a:prstGeom prst="rect">
+            <a:avLst/>
+          </a:prstGeom>
+          <a:noFill/>
+        </p:spPr>
+        <p:txBody>
+          <a:bodyPr wrap="square" anchor="t" lIns="0" rIns="0" tIns="0" bIns="0">
+            <a:spAutoFit/>
+          </a:bodyPr>
+          <a:lstStyle/>
+          <a:p>
+            <a:pPr algn="l">
+              <a:lnSpc>
+                <a:spcPct val="118000"/>
+              </a:lnSpc>
+            </a:pPr>
+            <a:r>
+              <a:rPr sz="1050" b="1">
+                <a:solidFill>
+                  <a:srgbClr val="1A1A1A"/>
+                </a:solidFill>
+                <a:latin typeface="SamsungOneKorean"/>
+                <a:ea typeface="SamsungOneKorean"/>
+                <a:cs typeface="SamsungOneKorean"/>
+              </a:rPr>
+              <a:t>GPU당 HBM 탑재량을 읽을</a:t>
+            </a:r>
+          </a:p>
+          <a:p>
+            <a:pPr algn="l">
+              <a:lnSpc>
+                <a:spcPct val="118000"/>
+              </a:lnSpc>
+            </a:pPr>
+            <a:r>
+              <a:rPr sz="1050" b="1">
+                <a:solidFill>
+                  <a:srgbClr val="1A1A1A"/>
+                </a:solidFill>
+                <a:latin typeface="SamsungOneKorean"/>
+                <a:ea typeface="SamsungOneKorean"/>
+                <a:cs typeface="SamsungOneKorean"/>
+              </a:rPr>
+              <a:t>지표가 없다: 추적 체계와</a:t>
+            </a:r>
+          </a:p>
+          <a:p>
+            <a:pPr algn="l">
+              <a:lnSpc>
+                <a:spcPct val="118000"/>
+              </a:lnSpc>
+            </a:pPr>
+            <a:r>
+              <a:rPr sz="1050" b="1">
+                <a:solidFill>
+                  <a:srgbClr val="1A1A1A"/>
+                </a:solidFill>
+                <a:latin typeface="SamsungOneKorean"/>
+                <a:ea typeface="SamsungOneKorean"/>
+                <a:cs typeface="SamsungOneKorean"/>
+              </a:rPr>
+              <a:t>eSSD(1위 38.2%) 믹스 이동</a:t>
+            </a:r>
+          </a:p>
+        </p:txBody>
+      </p:sp>
+      <p:sp>
+        <p:nvSpPr>
+          <p:cNvPr id="126" name="Rectangle 125"/>
+          <p:cNvSpPr/>
+          <p:nvPr/>
+        </p:nvSpPr>
+        <p:spPr>
+          <a:xfrm>
+            <a:off x="5610026" y="4901183"/>
+            <a:ext cx="32004" cy="475488"/>
+          </a:xfrm>
+          <a:prstGeom prst="rect">
+            <a:avLst/>
+          </a:prstGeom>
+          <a:solidFill>
+            <a:srgbClr val="1428A0"/>
+          </a:solidFill>
+          <a:ln>
+            <a:noFill/>
+          </a:ln>
+          <a:effectLst/>
+        </p:spPr>
+        <p:style>
+          <a:lnRef idx="1">
+            <a:schemeClr val="accent1"/>
+          </a:lnRef>
+          <a:fillRef idx="3">
+            <a:schemeClr val="accent1"/>
+          </a:fillRef>
+          <a:effectRef idx="2">
+            <a:schemeClr val="accent1"/>
+          </a:effectRef>
+          <a:fontRef idx="minor">
+            <a:schemeClr val="lt1"/>
+          </a:fontRef>
+        </p:style>
+        <p:txBody>
+          <a:bodyPr rtlCol="0" anchor="ctr"/>
+          <a:lstStyle/>
+          <a:p>
+            <a:pPr algn="ctr"/>
+          </a:p>
+        </p:txBody>
+      </p:sp>
+      <p:sp>
+        <p:nvSpPr>
+          <p:cNvPr id="127" name="TextBox 126"/>
+          <p:cNvSpPr txBox="1"/>
+          <p:nvPr/>
+        </p:nvSpPr>
+        <p:spPr>
+          <a:xfrm>
+            <a:off x="5719754" y="4910328"/>
+            <a:ext cx="1867753" cy="502920"/>
+          </a:xfrm>
+          <a:prstGeom prst="rect">
+            <a:avLst/>
+          </a:prstGeom>
+          <a:noFill/>
+        </p:spPr>
+        <p:txBody>
+          <a:bodyPr wrap="square" anchor="t" lIns="0" rIns="0" tIns="0" bIns="0">
+            <a:spAutoFit/>
+          </a:bodyPr>
+          <a:lstStyle/>
+          <a:p>
+            <a:pPr algn="l">
+              <a:lnSpc>
+                <a:spcPct val="118000"/>
+              </a:lnSpc>
+            </a:pPr>
+            <a:r>
+              <a:rPr sz="1050" b="1">
+                <a:solidFill>
+                  <a:srgbClr val="1A1A1A"/>
+                </a:solidFill>
+                <a:latin typeface="SamsungOneKorean"/>
+                <a:ea typeface="SamsungOneKorean"/>
+                <a:cs typeface="SamsungOneKorean"/>
+              </a:rPr>
+              <a:t>범용·NAND 감산 결단의</a:t>
+            </a:r>
+          </a:p>
+          <a:p>
+            <a:pPr algn="l">
+              <a:lnSpc>
+                <a:spcPct val="118000"/>
+              </a:lnSpc>
+            </a:pPr>
+            <a:r>
+              <a:rPr sz="1050" b="1">
+                <a:solidFill>
+                  <a:srgbClr val="1A1A1A"/>
+                </a:solidFill>
+                <a:latin typeface="SamsungOneKorean"/>
+                <a:ea typeface="SamsungOneKorean"/>
+                <a:cs typeface="SamsungOneKorean"/>
+              </a:rPr>
+              <a:t>30일 규율: 2023년 6개월</a:t>
+            </a:r>
+          </a:p>
+          <a:p>
+            <a:pPr algn="l">
+              <a:lnSpc>
+                <a:spcPct val="118000"/>
+              </a:lnSpc>
+            </a:pPr>
+            <a:r>
+              <a:rPr sz="1050" b="1">
+                <a:solidFill>
+                  <a:srgbClr val="1A1A1A"/>
+                </a:solidFill>
+                <a:latin typeface="SamsungOneKorean"/>
+                <a:ea typeface="SamsungOneKorean"/>
+                <a:cs typeface="SamsungOneKorean"/>
+              </a:rPr>
+              <a:t>지연의 재발 차단</a:t>
+            </a:r>
+          </a:p>
+        </p:txBody>
+      </p:sp>
+      <p:sp>
+        <p:nvSpPr>
+          <p:cNvPr id="128" name="Rectangle 127"/>
+          <p:cNvSpPr/>
+          <p:nvPr/>
+        </p:nvSpPr>
+        <p:spPr>
+          <a:xfrm>
+            <a:off x="7697236" y="4901183"/>
+            <a:ext cx="32004" cy="475488"/>
+          </a:xfrm>
+          <a:prstGeom prst="rect">
+            <a:avLst/>
+          </a:prstGeom>
+          <a:solidFill>
+            <a:srgbClr val="1428A0"/>
+          </a:solidFill>
+          <a:ln>
+            <a:noFill/>
+          </a:ln>
+          <a:effectLst/>
+        </p:spPr>
+        <p:style>
+          <a:lnRef idx="1">
+            <a:schemeClr val="accent1"/>
+          </a:lnRef>
+          <a:fillRef idx="3">
+            <a:schemeClr val="accent1"/>
+          </a:fillRef>
+          <a:effectRef idx="2">
+            <a:schemeClr val="accent1"/>
+          </a:effectRef>
+          <a:fontRef idx="minor">
+            <a:schemeClr val="lt1"/>
+          </a:fontRef>
+        </p:style>
+        <p:txBody>
+          <a:bodyPr rtlCol="0" anchor="ctr"/>
+          <a:lstStyle/>
+          <a:p>
+            <a:pPr algn="ctr"/>
+          </a:p>
+        </p:txBody>
+      </p:sp>
+      <p:sp>
+        <p:nvSpPr>
+          <p:cNvPr id="129" name="TextBox 128"/>
+          <p:cNvSpPr txBox="1"/>
+          <p:nvPr/>
+        </p:nvSpPr>
+        <p:spPr>
+          <a:xfrm>
+            <a:off x="7806964" y="4910328"/>
+            <a:ext cx="1867753" cy="502920"/>
+          </a:xfrm>
+          <a:prstGeom prst="rect">
+            <a:avLst/>
+          </a:prstGeom>
+          <a:noFill/>
+        </p:spPr>
+        <p:txBody>
+          <a:bodyPr wrap="square" anchor="t" lIns="0" rIns="0" tIns="0" bIns="0">
+            <a:spAutoFit/>
+          </a:bodyPr>
+          <a:lstStyle/>
+          <a:p>
+            <a:pPr algn="l">
+              <a:lnSpc>
+                <a:spcPct val="118000"/>
+              </a:lnSpc>
+            </a:pPr>
+            <a:r>
+              <a:rPr sz="1050" b="1">
+                <a:solidFill>
+                  <a:srgbClr val="1A1A1A"/>
+                </a:solidFill>
+                <a:latin typeface="SamsungOneKorean"/>
+                <a:ea typeface="SamsungOneKorean"/>
+                <a:cs typeface="SamsungOneKorean"/>
+              </a:rPr>
+              <a:t>DDR4·LPDDR4 하단 철수</a:t>
+            </a:r>
+          </a:p>
+          <a:p>
+            <a:pPr algn="l">
+              <a:lnSpc>
+                <a:spcPct val="118000"/>
+              </a:lnSpc>
+            </a:pPr>
+            <a:r>
+              <a:rPr sz="1050" b="1">
+                <a:solidFill>
+                  <a:srgbClr val="1A1A1A"/>
+                </a:solidFill>
+                <a:latin typeface="SamsungOneKorean"/>
+                <a:ea typeface="SamsungOneKorean"/>
+                <a:cs typeface="SamsungOneKorean"/>
+              </a:rPr>
+              <a:t>시점과 전환처(CIS·차량),</a:t>
+            </a:r>
+          </a:p>
+          <a:p>
+            <a:pPr algn="l">
+              <a:lnSpc>
+                <a:spcPct val="118000"/>
+              </a:lnSpc>
+            </a:pPr>
+            <a:r>
+              <a:rPr sz="1050" b="1">
+                <a:solidFill>
+                  <a:srgbClr val="1A1A1A"/>
+                </a:solidFill>
+                <a:latin typeface="SamsungOneKorean"/>
+                <a:ea typeface="SamsungOneKorean"/>
+                <a:cs typeface="SamsungOneKorean"/>
+              </a:rPr>
+              <a:t>HBM 인증 장벽 사수</a:t>
+            </a:r>
+          </a:p>
+        </p:txBody>
+      </p:sp>
+      <p:sp>
+        <p:nvSpPr>
+          <p:cNvPr id="130" name="Rectangle 129"/>
+          <p:cNvSpPr/>
+          <p:nvPr/>
+        </p:nvSpPr>
+        <p:spPr>
+          <a:xfrm>
+            <a:off x="9784445" y="4901183"/>
+            <a:ext cx="32004" cy="475488"/>
+          </a:xfrm>
+          <a:prstGeom prst="rect">
+            <a:avLst/>
+          </a:prstGeom>
+          <a:solidFill>
+            <a:srgbClr val="1428A0"/>
+          </a:solidFill>
+          <a:ln>
+            <a:noFill/>
+          </a:ln>
+          <a:effectLst/>
+        </p:spPr>
+        <p:style>
+          <a:lnRef idx="1">
+            <a:schemeClr val="accent1"/>
+          </a:lnRef>
+          <a:fillRef idx="3">
+            <a:schemeClr val="accent1"/>
+          </a:fillRef>
+          <a:effectRef idx="2">
+            <a:schemeClr val="accent1"/>
+          </a:effectRef>
+          <a:fontRef idx="minor">
+            <a:schemeClr val="lt1"/>
+          </a:fontRef>
+        </p:style>
+        <p:txBody>
+          <a:bodyPr rtlCol="0" anchor="ctr"/>
+          <a:lstStyle/>
+          <a:p>
+            <a:pPr algn="ctr"/>
+          </a:p>
+        </p:txBody>
+      </p:sp>
+      <p:sp>
+        <p:nvSpPr>
+          <p:cNvPr id="131" name="TextBox 130"/>
+          <p:cNvSpPr txBox="1"/>
+          <p:nvPr/>
+        </p:nvSpPr>
+        <p:spPr>
+          <a:xfrm>
+            <a:off x="9894173" y="4910328"/>
+            <a:ext cx="1867753" cy="502920"/>
+          </a:xfrm>
+          <a:prstGeom prst="rect">
+            <a:avLst/>
+          </a:prstGeom>
+          <a:noFill/>
+        </p:spPr>
+        <p:txBody>
+          <a:bodyPr wrap="square" anchor="t" lIns="0" rIns="0" tIns="0" bIns="0">
+            <a:spAutoFit/>
+          </a:bodyPr>
+          <a:lstStyle/>
+          <a:p>
+            <a:pPr algn="l">
+              <a:lnSpc>
+                <a:spcPct val="118000"/>
+              </a:lnSpc>
+            </a:pPr>
+            <a:r>
+              <a:rPr sz="1050" b="1">
+                <a:solidFill>
+                  <a:srgbClr val="1A1A1A"/>
+                </a:solidFill>
+                <a:latin typeface="SamsungOneKorean"/>
+                <a:ea typeface="SamsungOneKorean"/>
+                <a:cs typeface="SamsungOneKorean"/>
+              </a:rPr>
+              <a:t>표준 HBM에서 zHBM·4F²</a:t>
+            </a:r>
+          </a:p>
+          <a:p>
+            <a:pPr algn="l">
+              <a:lnSpc>
+                <a:spcPct val="118000"/>
+              </a:lnSpc>
+            </a:pPr>
+            <a:r>
+              <a:rPr sz="1050" b="1">
+                <a:solidFill>
+                  <a:srgbClr val="1A1A1A"/>
+                </a:solidFill>
+                <a:latin typeface="SamsungOneKorean"/>
+                <a:ea typeface="SamsungOneKorean"/>
+                <a:cs typeface="SamsungOneKorean"/>
+              </a:rPr>
+              <a:t>3D DRAM으로의 전환기,</a:t>
+            </a:r>
+          </a:p>
+          <a:p>
+            <a:pPr algn="l">
+              <a:lnSpc>
+                <a:spcPct val="118000"/>
+              </a:lnSpc>
+            </a:pPr>
+            <a:r>
+              <a:rPr sz="1050" b="1">
+                <a:solidFill>
+                  <a:srgbClr val="1A1A1A"/>
+                </a:solidFill>
+                <a:latin typeface="SamsungOneKorean"/>
+                <a:ea typeface="SamsungOneKorean"/>
+                <a:cs typeface="SamsungOneKorean"/>
+              </a:rPr>
+              <a:t>별동대·R&amp;D 하한 사수</a:t>
+            </a:r>
+          </a:p>
+        </p:txBody>
+      </p:sp>
+      <p:sp>
+        <p:nvSpPr>
+          <p:cNvPr id="132" name="Rounded Rectangle 131"/>
+          <p:cNvSpPr/>
+          <p:nvPr/>
+        </p:nvSpPr>
+        <p:spPr>
+          <a:xfrm>
+            <a:off x="429768" y="5650992"/>
             <a:ext cx="11332159" cy="310896"/>
           </a:xfrm>
           <a:prstGeom prst="roundRect">
@@ -8163,13 +9089,13 @@
       </p:sp>
       <p:sp>
         <p:nvSpPr>
-          <p:cNvPr id="116" name="TextBox 115"/>
+          <p:cNvPr id="133" name="TextBox 132"/>
           <p:cNvSpPr txBox="1"/>
           <p:nvPr/>
         </p:nvSpPr>
         <p:spPr>
           <a:xfrm>
-            <a:off x="576072" y="5993892"/>
+            <a:off x="576072" y="5719572"/>
             <a:ext cx="11039551" cy="182880"/>
           </a:xfrm>
           <a:prstGeom prst="rect">
@@ -8208,7 +9134,7 @@
                 <a:ea typeface="SamsungOneKorean"/>
                 <a:cs typeface="SamsungOneKorean"/>
               </a:rPr>
-              <a:t>수요발에서는 수요 열만, 공급발에서는 공급 열만 움직인다.  </a:t>
+              <a:t>수요발은 막대가 줄고, 공급발은 수요가 그대로인 채 공급이 넘친다.  </a:t>
             </a:r>
             <a:r>
               <a:rPr sz="1050" b="1">
@@ -8219,21 +9145,21 @@
                 <a:ea typeface="SamsungOneKorean"/>
                 <a:cs typeface="SamsungOneKorean"/>
               </a:rPr>
-              <a:t>어느 열이 움직였는지 읽는 것이 대응의 첫 단추다.</a:t>
-            </a:r>
-          </a:p>
-        </p:txBody>
-      </p:sp>
-      <p:sp>
-        <p:nvSpPr>
-          <p:cNvPr id="117" name="TextBox 116"/>
+              <a:t>원인이 다르면 풀어야 할 문제도 다르다.</a:t>
+            </a:r>
+          </a:p>
+        </p:txBody>
+      </p:sp>
+      <p:sp>
+        <p:nvSpPr>
+          <p:cNvPr id="134" name="TextBox 133"/>
           <p:cNvSpPr txBox="1"/>
           <p:nvPr/>
         </p:nvSpPr>
         <p:spPr>
           <a:xfrm>
-            <a:off x="429768" y="6327648"/>
-            <a:ext cx="9869119" cy="164592"/>
+            <a:off x="429768" y="6071616"/>
+            <a:ext cx="9823399" cy="310896"/>
           </a:xfrm>
           <a:prstGeom prst="rect">
             <a:avLst/>
@@ -8248,7 +9174,7 @@
           <a:p>
             <a:pPr algn="l">
               <a:lnSpc>
-                <a:spcPct val="100000"/>
+                <a:spcPct val="125000"/>
               </a:lnSpc>
             </a:pPr>
             <a:r>
@@ -8260,20 +9186,20 @@
                 <a:ea typeface="SamsungOneKorean"/>
                 <a:cs typeface="SamsungOneKorean"/>
               </a:rPr>
-              <a:t>출처: wiki/downturn/samsung-impact.md §5 · 헤드라인은 가상 예시(실제 보도 아님) · 대응 전략은 별도 장 · 기준일 2026-08</a:t>
-            </a:r>
-          </a:p>
-        </p:txBody>
-      </p:sp>
-      <p:sp>
-        <p:nvSpPr>
-          <p:cNvPr id="118" name="TextBox 117"/>
+              <a:t>막대는 wiki/downturn/samsung-impact.md §5.3 방향 표의 지수화 개념도(현재 총수요=100, 배분·폭은 방향 표현용이며 실측 아님) · 헤드라인은 가상 예시 · 인용 수치: Meta FCF -91%·4사 CapEx ~$750B(hyperscaler-q2-2026-actuals) · CXMT 11%→15%E·HBM3 월 6만장(apple-cxmt·TrendForce) · eSSD 38.2%(1Q26) · CIS 공용률 80%(fab-toolset) · 대응 전략은 별도 장 · 기준일 2026-08</a:t>
+            </a:r>
+          </a:p>
+        </p:txBody>
+      </p:sp>
+      <p:sp>
+        <p:nvSpPr>
+          <p:cNvPr id="135" name="TextBox 134"/>
           <p:cNvSpPr txBox="1"/>
           <p:nvPr/>
         </p:nvSpPr>
         <p:spPr>
           <a:xfrm>
-            <a:off x="10390327" y="6327648"/>
+            <a:off x="10390327" y="6071616"/>
             <a:ext cx="1371600" cy="164592"/>
           </a:xfrm>
           <a:prstGeom prst="rect">

--- a/outputs/presentation/downturn-scenario-impact.pptx
+++ b/outputs/presentation/downturn-scenario-impact.pptx
@@ -105,6 +105,487 @@
     </a:lvl9pPr>
   </p:defaultTextStyle>
 </p:presentation>
+</file>
+
+<file path=ppt/notesMasters/notesMaster1.xml><?xml version="1.0" encoding="utf-8"?>
+<p:notesMaster xmlns:a="http://schemas.openxmlformats.org/drawingml/2006/main" xmlns:p="http://schemas.openxmlformats.org/presentationml/2006/main" xmlns:r="http://schemas.openxmlformats.org/officeDocument/2006/relationships">
+  <p:cSld>
+    <p:bg>
+      <p:bgRef idx="1001">
+        <a:schemeClr val="bg1"/>
+      </p:bgRef>
+    </p:bg>
+    <p:spTree>
+      <p:nvGrpSpPr>
+        <p:cNvPr id="1" name=""/>
+        <p:cNvGrpSpPr/>
+        <p:nvPr/>
+      </p:nvGrpSpPr>
+      <p:grpSpPr>
+        <a:xfrm>
+          <a:off x="0" y="0"/>
+          <a:ext cx="0" cy="0"/>
+          <a:chOff x="0" y="0"/>
+          <a:chExt cx="0" cy="0"/>
+        </a:xfrm>
+      </p:grpSpPr>
+      <p:sp>
+        <p:nvSpPr>
+          <p:cNvPr id="2" name="Header Placeholder 1"/>
+          <p:cNvSpPr>
+            <a:spLocks noGrp="1"/>
+          </p:cNvSpPr>
+          <p:nvPr>
+            <p:ph type="hdr" sz="quarter"/>
+          </p:nvPr>
+        </p:nvSpPr>
+        <p:spPr>
+          <a:xfrm>
+            <a:off x="0" y="0"/>
+            <a:ext cx="2971800" cy="457200"/>
+          </a:xfrm>
+          <a:prstGeom prst="rect">
+            <a:avLst/>
+          </a:prstGeom>
+        </p:spPr>
+        <p:txBody>
+          <a:bodyPr vert="horz" lIns="91440" tIns="45720" rIns="91440" bIns="45720" rtlCol="0"/>
+          <a:lstStyle>
+            <a:lvl1pPr algn="l">
+              <a:defRPr sz="1200"/>
+            </a:lvl1pPr>
+          </a:lstStyle>
+          <a:p>
+            <a:endParaRPr lang="en-US"/>
+          </a:p>
+        </p:txBody>
+      </p:sp>
+      <p:sp>
+        <p:nvSpPr>
+          <p:cNvPr id="3" name="Date Placeholder 2"/>
+          <p:cNvSpPr>
+            <a:spLocks noGrp="1"/>
+          </p:cNvSpPr>
+          <p:nvPr>
+            <p:ph type="dt" idx="1"/>
+          </p:nvPr>
+        </p:nvSpPr>
+        <p:spPr>
+          <a:xfrm>
+            <a:off x="3884613" y="0"/>
+            <a:ext cx="2971800" cy="457200"/>
+          </a:xfrm>
+          <a:prstGeom prst="rect">
+            <a:avLst/>
+          </a:prstGeom>
+        </p:spPr>
+        <p:txBody>
+          <a:bodyPr vert="horz" lIns="91440" tIns="45720" rIns="91440" bIns="45720" rtlCol="0"/>
+          <a:lstStyle>
+            <a:lvl1pPr algn="r">
+              <a:defRPr sz="1200"/>
+            </a:lvl1pPr>
+          </a:lstStyle>
+          <a:p>
+            <a:fld id="{0F89C1C7-3DCD-1040-A9CF-14679D8B5DDD}" type="datetimeFigureOut">
+              <a:rPr lang="en-US" smtClean="0"/>
+              <a:t>10/17/16</a:t>
+            </a:fld>
+            <a:endParaRPr lang="en-US"/>
+          </a:p>
+        </p:txBody>
+      </p:sp>
+      <p:sp>
+        <p:nvSpPr>
+          <p:cNvPr id="4" name="Slide Image Placeholder 3"/>
+          <p:cNvSpPr>
+            <a:spLocks noGrp="1" noRot="1" noChangeAspect="1"/>
+          </p:cNvSpPr>
+          <p:nvPr>
+            <p:ph type="sldImg" idx="2"/>
+          </p:nvPr>
+        </p:nvSpPr>
+        <p:spPr>
+          <a:xfrm>
+            <a:off x="1143000" y="685800"/>
+            <a:ext cx="4572000" cy="3429000"/>
+          </a:xfrm>
+          <a:prstGeom prst="rect">
+            <a:avLst/>
+          </a:prstGeom>
+          <a:noFill/>
+          <a:ln w="12700">
+            <a:solidFill>
+              <a:prstClr val="black"/>
+            </a:solidFill>
+          </a:ln>
+        </p:spPr>
+        <p:txBody>
+          <a:bodyPr vert="horz" lIns="91440" tIns="45720" rIns="91440" bIns="45720" rtlCol="0" anchor="ctr"/>
+          <a:lstStyle/>
+          <a:p>
+            <a:endParaRPr lang="en-US"/>
+          </a:p>
+        </p:txBody>
+      </p:sp>
+      <p:sp>
+        <p:nvSpPr>
+          <p:cNvPr id="5" name="Notes Placeholder 4"/>
+          <p:cNvSpPr>
+            <a:spLocks noGrp="1"/>
+          </p:cNvSpPr>
+          <p:nvPr>
+            <p:ph type="body" sz="quarter" idx="3"/>
+          </p:nvPr>
+        </p:nvSpPr>
+        <p:spPr>
+          <a:xfrm>
+            <a:off x="685800" y="4343400"/>
+            <a:ext cx="5486400" cy="4114800"/>
+          </a:xfrm>
+          <a:prstGeom prst="rect">
+            <a:avLst/>
+          </a:prstGeom>
+        </p:spPr>
+        <p:txBody>
+          <a:bodyPr vert="horz" lIns="91440" tIns="45720" rIns="91440" bIns="45720" rtlCol="0"/>
+          <a:lstStyle/>
+          <a:p>
+            <a:pPr lvl="0"/>
+            <a:r>
+              <a:rPr lang="en-US" smtClean="0"/>
+              <a:t>Click to edit Master text styles</a:t>
+            </a:r>
+          </a:p>
+          <a:p>
+            <a:pPr lvl="1"/>
+            <a:r>
+              <a:rPr lang="en-US" smtClean="0"/>
+              <a:t>Second level</a:t>
+            </a:r>
+          </a:p>
+          <a:p>
+            <a:pPr lvl="2"/>
+            <a:r>
+              <a:rPr lang="en-US" smtClean="0"/>
+              <a:t>Third level</a:t>
+            </a:r>
+          </a:p>
+          <a:p>
+            <a:pPr lvl="3"/>
+            <a:r>
+              <a:rPr lang="en-US" smtClean="0"/>
+              <a:t>Fourth level</a:t>
+            </a:r>
+          </a:p>
+          <a:p>
+            <a:pPr lvl="4"/>
+            <a:r>
+              <a:rPr lang="en-US" smtClean="0"/>
+              <a:t>Fifth level</a:t>
+            </a:r>
+            <a:endParaRPr lang="en-US"/>
+          </a:p>
+        </p:txBody>
+      </p:sp>
+      <p:sp>
+        <p:nvSpPr>
+          <p:cNvPr id="6" name="Footer Placeholder 5"/>
+          <p:cNvSpPr>
+            <a:spLocks noGrp="1"/>
+          </p:cNvSpPr>
+          <p:nvPr>
+            <p:ph type="ftr" sz="quarter" idx="4"/>
+          </p:nvPr>
+        </p:nvSpPr>
+        <p:spPr>
+          <a:xfrm>
+            <a:off x="0" y="8685213"/>
+            <a:ext cx="2971800" cy="457200"/>
+          </a:xfrm>
+          <a:prstGeom prst="rect">
+            <a:avLst/>
+          </a:prstGeom>
+        </p:spPr>
+        <p:txBody>
+          <a:bodyPr vert="horz" lIns="91440" tIns="45720" rIns="91440" bIns="45720" rtlCol="0" anchor="b"/>
+          <a:lstStyle>
+            <a:lvl1pPr algn="l">
+              <a:defRPr sz="1200"/>
+            </a:lvl1pPr>
+          </a:lstStyle>
+          <a:p>
+            <a:endParaRPr lang="en-US"/>
+          </a:p>
+        </p:txBody>
+      </p:sp>
+      <p:sp>
+        <p:nvSpPr>
+          <p:cNvPr id="7" name="Slide Number Placeholder 6"/>
+          <p:cNvSpPr>
+            <a:spLocks noGrp="1"/>
+          </p:cNvSpPr>
+          <p:nvPr>
+            <p:ph type="sldNum" sz="quarter" idx="5"/>
+          </p:nvPr>
+        </p:nvSpPr>
+        <p:spPr>
+          <a:xfrm>
+            <a:off x="3884613" y="8685213"/>
+            <a:ext cx="2971800" cy="457200"/>
+          </a:xfrm>
+          <a:prstGeom prst="rect">
+            <a:avLst/>
+          </a:prstGeom>
+        </p:spPr>
+        <p:txBody>
+          <a:bodyPr vert="horz" lIns="91440" tIns="45720" rIns="91440" bIns="45720" rtlCol="0" anchor="b"/>
+          <a:lstStyle>
+            <a:lvl1pPr algn="r">
+              <a:defRPr sz="1200"/>
+            </a:lvl1pPr>
+          </a:lstStyle>
+          <a:p>
+            <a:fld id="{BB5E49A5-4136-284D-997B-48E1D791AD67}" type="slidenum">
+              <a:rPr lang="en-US" smtClean="0"/>
+              <a:t>‹#›</a:t>
+            </a:fld>
+            <a:endParaRPr lang="en-US"/>
+          </a:p>
+        </p:txBody>
+      </p:sp>
+    </p:spTree>
+    <p:extLst>
+      <p:ext uri="{BB962C8B-B14F-4D97-AF65-F5344CB8AC3E}">
+        <p14:creationId xmlns:p14="http://schemas.microsoft.com/office/powerpoint/2010/main" val="2623252185"/>
+      </p:ext>
+    </p:extLst>
+  </p:cSld>
+  <p:clrMap bg1="lt1" tx1="dk1" bg2="lt2" tx2="dk2" accent1="accent1" accent2="accent2" accent3="accent3" accent4="accent4" accent5="accent5" accent6="accent6" hlink="hlink" folHlink="folHlink"/>
+  <p:notesStyle>
+    <a:lvl1pPr marL="0" algn="l" defTabSz="457200" rtl="0" eaLnBrk="1" latinLnBrk="0" hangingPunct="1">
+      <a:defRPr sz="1200" kern="1200">
+        <a:solidFill>
+          <a:schemeClr val="tx1"/>
+        </a:solidFill>
+        <a:latin typeface="+mn-lt"/>
+        <a:ea typeface="+mn-ea"/>
+        <a:cs typeface="+mn-cs"/>
+      </a:defRPr>
+    </a:lvl1pPr>
+    <a:lvl2pPr marL="457200" algn="l" defTabSz="457200" rtl="0" eaLnBrk="1" latinLnBrk="0" hangingPunct="1">
+      <a:defRPr sz="1200" kern="1200">
+        <a:solidFill>
+          <a:schemeClr val="tx1"/>
+        </a:solidFill>
+        <a:latin typeface="+mn-lt"/>
+        <a:ea typeface="+mn-ea"/>
+        <a:cs typeface="+mn-cs"/>
+      </a:defRPr>
+    </a:lvl2pPr>
+    <a:lvl3pPr marL="914400" algn="l" defTabSz="457200" rtl="0" eaLnBrk="1" latinLnBrk="0" hangingPunct="1">
+      <a:defRPr sz="1200" kern="1200">
+        <a:solidFill>
+          <a:schemeClr val="tx1"/>
+        </a:solidFill>
+        <a:latin typeface="+mn-lt"/>
+        <a:ea typeface="+mn-ea"/>
+        <a:cs typeface="+mn-cs"/>
+      </a:defRPr>
+    </a:lvl3pPr>
+    <a:lvl4pPr marL="1371600" algn="l" defTabSz="457200" rtl="0" eaLnBrk="1" latinLnBrk="0" hangingPunct="1">
+      <a:defRPr sz="1200" kern="1200">
+        <a:solidFill>
+          <a:schemeClr val="tx1"/>
+        </a:solidFill>
+        <a:latin typeface="+mn-lt"/>
+        <a:ea typeface="+mn-ea"/>
+        <a:cs typeface="+mn-cs"/>
+      </a:defRPr>
+    </a:lvl4pPr>
+    <a:lvl5pPr marL="1828800" algn="l" defTabSz="457200" rtl="0" eaLnBrk="1" latinLnBrk="0" hangingPunct="1">
+      <a:defRPr sz="1200" kern="1200">
+        <a:solidFill>
+          <a:schemeClr val="tx1"/>
+        </a:solidFill>
+        <a:latin typeface="+mn-lt"/>
+        <a:ea typeface="+mn-ea"/>
+        <a:cs typeface="+mn-cs"/>
+      </a:defRPr>
+    </a:lvl5pPr>
+    <a:lvl6pPr marL="2286000" algn="l" defTabSz="457200" rtl="0" eaLnBrk="1" latinLnBrk="0" hangingPunct="1">
+      <a:defRPr sz="1200" kern="1200">
+        <a:solidFill>
+          <a:schemeClr val="tx1"/>
+        </a:solidFill>
+        <a:latin typeface="+mn-lt"/>
+        <a:ea typeface="+mn-ea"/>
+        <a:cs typeface="+mn-cs"/>
+      </a:defRPr>
+    </a:lvl6pPr>
+    <a:lvl7pPr marL="2743200" algn="l" defTabSz="457200" rtl="0" eaLnBrk="1" latinLnBrk="0" hangingPunct="1">
+      <a:defRPr sz="1200" kern="1200">
+        <a:solidFill>
+          <a:schemeClr val="tx1"/>
+        </a:solidFill>
+        <a:latin typeface="+mn-lt"/>
+        <a:ea typeface="+mn-ea"/>
+        <a:cs typeface="+mn-cs"/>
+      </a:defRPr>
+    </a:lvl7pPr>
+    <a:lvl8pPr marL="3200400" algn="l" defTabSz="457200" rtl="0" eaLnBrk="1" latinLnBrk="0" hangingPunct="1">
+      <a:defRPr sz="1200" kern="1200">
+        <a:solidFill>
+          <a:schemeClr val="tx1"/>
+        </a:solidFill>
+        <a:latin typeface="+mn-lt"/>
+        <a:ea typeface="+mn-ea"/>
+        <a:cs typeface="+mn-cs"/>
+      </a:defRPr>
+    </a:lvl8pPr>
+    <a:lvl9pPr marL="3657600" algn="l" defTabSz="457200" rtl="0" eaLnBrk="1" latinLnBrk="0" hangingPunct="1">
+      <a:defRPr sz="1200" kern="1200">
+        <a:solidFill>
+          <a:schemeClr val="tx1"/>
+        </a:solidFill>
+        <a:latin typeface="+mn-lt"/>
+        <a:ea typeface="+mn-ea"/>
+        <a:cs typeface="+mn-cs"/>
+      </a:defRPr>
+    </a:lvl9pPr>
+  </p:notesStyle>
+</p:notesMaster>
+</file>
+
+<file path=ppt/notesSlides/notesSlide1.xml><?xml version="1.0" encoding="utf-8"?>
+<p:notes xmlns:a="http://schemas.openxmlformats.org/drawingml/2006/main" xmlns:p="http://schemas.openxmlformats.org/presentationml/2006/main" xmlns:r="http://schemas.openxmlformats.org/officeDocument/2006/relationships">
+  <p:cSld>
+    <p:spTree>
+      <p:nvGrpSpPr>
+        <p:cNvPr id="1" name=""/>
+        <p:cNvGrpSpPr/>
+        <p:nvPr/>
+      </p:nvGrpSpPr>
+      <p:grpSpPr>
+        <a:xfrm>
+          <a:off x="0" y="0"/>
+          <a:ext cx="0" cy="0"/>
+          <a:chOff x="0" y="0"/>
+          <a:chExt cx="0" cy="0"/>
+        </a:xfrm>
+      </p:grpSpPr>
+      <p:sp>
+        <p:nvSpPr>
+          <p:cNvPr id="2" name="Slide Image Placeholder 1"/>
+          <p:cNvSpPr>
+            <a:spLocks noGrp="1"/>
+          </p:cNvSpPr>
+          <p:nvPr>
+            <p:ph type="sldImg" idx="2"/>
+          </p:nvPr>
+        </p:nvSpPr>
+        <p:spPr/>
+      </p:sp>
+      <p:sp>
+        <p:nvSpPr>
+          <p:cNvPr id="3" name="Notes Placeholder 2"/>
+          <p:cNvSpPr>
+            <a:spLocks noGrp="1"/>
+          </p:cNvSpPr>
+          <p:nvPr>
+            <p:ph type="body" idx="3" sz="quarter"/>
+          </p:nvPr>
+        </p:nvSpPr>
+        <p:spPr/>
+        <p:txBody>
+          <a:bodyPr/>
+          <a:lstStyle/>
+          <a:p>
+            <a:r>
+              <a:t>[슬라이드 위치] SP-2 다운턴 시나리오 플래닝 트랙의 영향 진단 장. 앞 장들이 "다운턴이 오는가"(EWI)와 "다섯 시나리오가 무엇인가"를 다뤘다면, 이 장은 원인 기준으로 다섯 갈래를 한눈에 정리하고 각 갈래가 남기는 "풀어야 할 문제"까지 연결한다. 대응 전략(DP-1~7 대비, DR-1~6 대응)은 다음 장에서 다룬다.</a:t>
+            </a:r>
+          </a:p>
+          <a:p/>
+          <a:p>
+            <a:r>
+              <a:t>[왜 원인 중심인가] 다운턴 기간은 원인이 정한다는 패턴이 지난 20년 복기(DT08·DT12·DT16·DT19·DT23)에서 확인됐다. 수요발은 짧고 깊게(단기전), 공급발은 길게(장기전) 간다. 그래서 속도·기간 축은 이 장에서 제외했고, 원인만 맞히면 싸움의 성격이 따라온다. 시나리오 코드(DT-A 등)와 확률 수치도 발표 층에서는 제외했다. 확률은 추정 정밀도가 낮아 정성 판단만 남겼고, 정량 추정 근거는 wiki/downturn/scenario-matrix.md에 유지되어 있다.</a:t>
+            </a:r>
+          </a:p>
+          <a:p/>
+          <a:p>
+            <a:r>
+              <a:t>[다섯 갈래 해설]</a:t>
+            </a:r>
+          </a:p>
+          <a:p>
+            <a:r>
+              <a:t>1. 투자 자금이 끊기는 경우(수요발·조달): 최종 수요가 아니라 돈이 먼저 끊기는 경로. 이미 전조가 실측됐다. Meta의 분기 FCF가 -91%(약 $7.8억까지 축소), Amazon은 TTM FCF가 적자로 전환했는데 4사 합산 CapEx는 ~$750B(+82% YoY)로 계속 늘고 있다. 지출과 현금창출의 방향이 갈라진 상태는 지속 기간에 한계가 있고, 신용 이벤트(네오클라우드·DC SPV 디폴트) 하나로 발주 동결이 시작될 수 있다. 이때 가장 먼저 비는 곳은 가장 많이 투자한 고부가(HBM·서버) 캐파다.</a:t>
+            </a:r>
+          </a:p>
+          <a:p>
+            <a:r>
+              <a:t>2. 필요량이 줄어드는 경우(수요발·원단위): AI는 성장하는데 작업당 메모리 소요가 꺾이는 경로. NVIDIA Dynamo 계열 KV 캐시 오프로드는 같은 H100으로 동시 사용자를 10배로 늘렸다. 같은 하드웨어로 10배를 처리한다는 것은 10배를 사지 않아도 된다는 뜻이기도 하다. CXL 풀링·모델 경량화도 같은 방향. 가격 폭락 없이 성장률만 꺾여서 위기감이 생기지 않는 것이 최대 위험이며, NAND·SSD는 오프로드 수혜로 오히려 수요가 는다(막대에서 유일하게 커지는 세그먼트).</a:t>
+            </a:r>
+          </a:p>
+          <a:p>
+            <a:r>
+              <a:t>3. CAPEX가 몰리는 경우(공급발·기존 3사): 수요는 멀쩡한데 호황기에 결정된 투자가 한꺼번에 캐파로 도착하는 경로. 차트의 3사 CAPEX 합산이 2024 $54B, 2025 $64B, 2026E $95B로 가파르게 서 있고, 투자가 캐파로 바뀌는 리드타임 2~3년을 감안하면 2028~29에 Micron 아이다호, SK하이닉스 용인 1기, 국내 신규 팹이 동시에 가동된다(모두 착공이 끝난 확정 사실). 여기에 3강 절제가 무너지면(점유율 목표 선언, 조기 램프업) 급락으로 전환된다. 다섯 갈래 중 감산이 직접 효과를 내는 유일한 경우다.</a:t>
+            </a:r>
+          </a:p>
+          <a:p>
+            <a:r>
+              <a:t>4. 후발이 파고드는 경우(공급발·신흥): 보조금 기반 후발이 하단 가격대를 영구히 끌어내리는 경로. CXMT는 글로벌 DRAM 캐파 점유 11%에서 2028년 15%로, 매출 점유는 8%(2025 Q3)에서 14%(2027E)로 오르는 전망이고 HBM3도 월 6만 장 양산에 들어간다. NAND에서는 YMTC가 Xtacking 하이브리드 본딩으로 같은 일을 한다. 손실이 나도 퇴출되지 않는 공급자라서 치킨게임(소모전)의 승리 조건 자체가 없고, 다른 갈래와 달리 회복이 없다. 지금도 진행 중인 유일한 갈래다.</a:t>
+            </a:r>
+          </a:p>
+          <a:p>
+            <a:r>
+              <a:t>5. 제품 정의가 바뀌는 경우(전환발): 수요가 사라지는 게 아니라 다른 제품군으로 이동하는 경로. 3D DRAM(4F² VCT 셀), zHBM(커스텀 적층), CXL 채택이 시작되면 표준 HBM 주문이 옮겨간다. 막대 꼭대기의 점선 세그먼트가 그 이동분이다. 감산도 계약 방어도 무의미하고, 미리 그 자리에 가 있는 것(별동대)만 유효하다.</a:t>
+            </a:r>
+          </a:p>
+          <a:p/>
+          <a:p>
+            <a:r>
+              <a:t>[수요 막대 읽는 법] 왼쪽 옅은 막대는 2025 글로벌 메모리 매출의 실측 구성을 100으로 지수화한 것이다. DRAM $1,657억(그중 HBM $340억) + NAND $697억 = $2,354억(TrendForce·Yole) 이므로 HBM 14, HBM 제외 DRAM 56, NAND·SSD 30. 오른쪽 진한 막대는 각 시나리오의 방향 가정(wiki/downturn/samsung-impact.md §5.3)을 이 실측 구성에 적용한 시나리오 값이다. 기준은 실측, 변화 폭은 시나리오 가정이라는 점을 구분해서 설명할 것. 서버/범용 DRAM 분리 실측치는 공개 소스에 없어 DRAM은 한 세그먼트로 묶었다.</a:t>
+            </a:r>
+          </a:p>
+          <a:p/>
+          <a:p>
+            <a:r>
+              <a:t>[공급 차트 읽는 법] CAPEX가 몰리는 경우는 수요 막대가 무의미하다(수요는 그대로). 대신 공급의 선행 지표인 3사 CAPEX 합산을 보여준다. 후발의 경우도 마찬가지로 CXMT의 캐파·매출 점유 전망을 보여준다. 두 차트 모두 "수요가 아니라 공급 쪽 곡선이 커진다"는 것이 메시지다.</a:t>
+            </a:r>
+          </a:p>
+          <a:p/>
+          <a:p>
+            <a:r>
+              <a:t>[풀어야 할 문제] 전략 자체가 아니라 전략이 풀어야 할 문제를 정의한 것이다(전략은 다음 장). 1번: HBM4 캐파는 +50% 증설이 잡혀 있는데 조달이 끊기면 팔 곳이 없다. DRAM-CIS 설비 공용률 80%인 전환 옵션과 take-or-pay·NTB 계약 방어선 중 무엇을 어디까지 쓸 것인가. 2번: GPU당 HBM 탑재량 같은 원단위 지표가 현재 추적 체계에 없다(감별 지표 DX-8 미구축). enterprise SSD 1위(점유 38.2%)를 활용한 믹스 이동이 유일한 상방. 3번: 2022-10 무감산 선언에서 2023-04 감산 공식화까지 6개월이 걸렸고 그 사이 DS 적자 -4.58조가 쌓였다. 같은 지연을 막을 30일 결정 규율이 문제. 4번: DDR4·LPDDR4 하단은 CXMT 침투로 돌아오지 않는다. 철수 시점과 라인 전환처(CIS·차량용), 그리고 HBM 인증 장벽 유지가 문제. 5번: 2019년 HBM팀 해체가 점유 40%에서 17%로의 추락으로 이어진 전례가 있다. 전환기에 별동대와 R&amp;D 하한을 배분 논리에서 지켜내는 것이 문제.</a:t>
+            </a:r>
+          </a:p>
+          <a:p/>
+          <a:p>
+            <a:r>
+              <a:t>[출처] wiki/downturn/samsung-impact.md §5(단일 소스), scenario-matrix.md, downturn-history.md, key-drivers.md. 수치 원출처: hyperscaler-q2-2026-actuals(FCF·CapEx), kv-cache-ssd-offload(10배), memory-capex-history(3사 CAPEX), apple-cxmt-china-dram·TrendForce(CXMT), enterprise-ssd-market-1q26(38.2%), fab-toolset-commonality(공용률 80%), samsung-downturn-actions(2023 감산 지연). 헤드라인은 상황 이해를 돕는 가상 예시 문장으로 실제 보도가 아니다.</a:t>
+            </a:r>
+          </a:p>
+        </p:txBody>
+      </p:sp>
+      <p:sp>
+        <p:nvSpPr>
+          <p:cNvPr id="4" name="Slide Number Placeholder 3"/>
+          <p:cNvSpPr>
+            <a:spLocks noGrp="1"/>
+          </p:cNvSpPr>
+          <p:nvPr>
+            <p:ph type="sldNum" idx="5" sz="quarter"/>
+          </p:nvPr>
+        </p:nvSpPr>
+        <p:spPr/>
+      </p:sp>
+    </p:spTree>
+  </p:cSld>
+  <p:clrMapOvr>
+    <a:masterClrMapping/>
+  </p:clrMapOvr>
+</p:notes>
 </file>
 
 <file path=ppt/slideLayouts/slideLayout1.xml><?xml version="1.0" encoding="utf-8"?>
@@ -4968,8 +5449,8 @@
         </p:nvSpPr>
         <p:spPr>
           <a:xfrm>
-            <a:off x="429768" y="2871216"/>
-            <a:ext cx="877824" cy="310896"/>
+            <a:off x="429768" y="2743200"/>
+            <a:ext cx="877824" cy="164592"/>
           </a:xfrm>
           <a:prstGeom prst="rect">
             <a:avLst/>
@@ -4984,7 +5465,7 @@
           <a:p>
             <a:pPr algn="r">
               <a:lnSpc>
-                <a:spcPct val="112000"/>
+                <a:spcPct val="100000"/>
               </a:lnSpc>
             </a:pPr>
             <a:r>
@@ -4996,25 +5477,7 @@
                 <a:ea typeface="SamsungOneKorean"/>
                 <a:cs typeface="SamsungOneKorean"/>
               </a:rPr>
-              <a:t>제품 수요</a:t>
-            </a:r>
-          </a:p>
-          <a:p>
-            <a:pPr algn="r">
-              <a:lnSpc>
-                <a:spcPct val="112000"/>
-              </a:lnSpc>
-            </a:pPr>
-            <a:r>
-              <a:rPr sz="1000" b="0">
-                <a:solidFill>
-                  <a:srgbClr val="8A8A8E"/>
-                </a:solidFill>
-                <a:latin typeface="SamsungOneKorean"/>
-                <a:ea typeface="SamsungOneKorean"/>
-                <a:cs typeface="SamsungOneKorean"/>
-              </a:rPr>
-              <a:t>(지수 개념도)</a:t>
+              <a:t>수요 막대</a:t>
             </a:r>
           </a:p>
         </p:txBody>
@@ -5027,8 +5490,8 @@
         </p:nvSpPr>
         <p:spPr>
           <a:xfrm>
-            <a:off x="502919" y="3342132"/>
-            <a:ext cx="105156" cy="105156"/>
+            <a:off x="448056" y="2994660"/>
+            <a:ext cx="100584" cy="100584"/>
           </a:xfrm>
           <a:prstGeom prst="rect">
             <a:avLst/>
@@ -5071,8 +5534,8 @@
         </p:nvSpPr>
         <p:spPr>
           <a:xfrm>
-            <a:off x="667512" y="3328416"/>
-            <a:ext cx="749808" cy="146304"/>
+            <a:off x="603503" y="2980944"/>
+            <a:ext cx="822960" cy="146304"/>
           </a:xfrm>
           <a:prstGeom prst="rect">
             <a:avLst/>
@@ -5112,14 +5575,14 @@
         </p:nvSpPr>
         <p:spPr>
           <a:xfrm>
-            <a:off x="502919" y="3547872"/>
-            <a:ext cx="105156" cy="105156"/>
+            <a:off x="448056" y="3191256"/>
+            <a:ext cx="100584" cy="100584"/>
           </a:xfrm>
           <a:prstGeom prst="rect">
             <a:avLst/>
           </a:prstGeom>
           <a:solidFill>
-            <a:srgbClr val="4E68C8"/>
+            <a:srgbClr val="5A73CC"/>
           </a:solidFill>
           <a:ln>
             <a:noFill/>
@@ -5156,8 +5619,8 @@
         </p:nvSpPr>
         <p:spPr>
           <a:xfrm>
-            <a:off x="667512" y="3534156"/>
-            <a:ext cx="749808" cy="146304"/>
+            <a:off x="603503" y="3177539"/>
+            <a:ext cx="822960" cy="146304"/>
           </a:xfrm>
           <a:prstGeom prst="rect">
             <a:avLst/>
@@ -5184,7 +5647,7 @@
                 <a:ea typeface="SamsungOneKorean"/>
                 <a:cs typeface="SamsungOneKorean"/>
               </a:rPr>
-              <a:t>서버 DRAM</a:t>
+              <a:t>기타 DRAM</a:t>
             </a:r>
           </a:p>
         </p:txBody>
@@ -5197,14 +5660,14 @@
         </p:nvSpPr>
         <p:spPr>
           <a:xfrm>
-            <a:off x="502919" y="3753611"/>
-            <a:ext cx="105156" cy="105156"/>
+            <a:off x="448056" y="3387852"/>
+            <a:ext cx="100584" cy="100584"/>
           </a:xfrm>
           <a:prstGeom prst="rect">
             <a:avLst/>
           </a:prstGeom>
           <a:solidFill>
-            <a:srgbClr val="93A2DC"/>
+            <a:srgbClr val="ADB9E4"/>
           </a:solidFill>
           <a:ln>
             <a:noFill/>
@@ -5241,8 +5704,8 @@
         </p:nvSpPr>
         <p:spPr>
           <a:xfrm>
-            <a:off x="667512" y="3739896"/>
-            <a:ext cx="749808" cy="146304"/>
+            <a:off x="603503" y="3374136"/>
+            <a:ext cx="822960" cy="146304"/>
           </a:xfrm>
           <a:prstGeom prst="rect">
             <a:avLst/>
@@ -5269,7 +5732,7 @@
                 <a:ea typeface="SamsungOneKorean"/>
                 <a:cs typeface="SamsungOneKorean"/>
               </a:rPr>
-              <a:t>범용·레거시</a:t>
+              <a:t>NAND·SSD</a:t>
             </a:r>
           </a:p>
         </p:txBody>
@@ -5282,93 +5745,8 @@
         </p:nvSpPr>
         <p:spPr>
           <a:xfrm>
-            <a:off x="502919" y="3959352"/>
-            <a:ext cx="105156" cy="105156"/>
-          </a:xfrm>
-          <a:prstGeom prst="rect">
-            <a:avLst/>
-          </a:prstGeom>
-          <a:solidFill>
-            <a:srgbClr val="C9D1EE"/>
-          </a:solidFill>
-          <a:ln>
-            <a:noFill/>
-          </a:ln>
-          <a:effectLst/>
-        </p:spPr>
-        <p:style>
-          <a:lnRef idx="1">
-            <a:schemeClr val="accent1"/>
-          </a:lnRef>
-          <a:fillRef idx="3">
-            <a:schemeClr val="accent1"/>
-          </a:fillRef>
-          <a:effectRef idx="2">
-            <a:schemeClr val="accent1"/>
-          </a:effectRef>
-          <a:fontRef idx="minor">
-            <a:schemeClr val="lt1"/>
-          </a:fontRef>
-        </p:style>
-        <p:txBody>
-          <a:bodyPr rtlCol="0" anchor="ctr"/>
-          <a:lstStyle/>
-          <a:p>
-            <a:pPr algn="ctr"/>
-          </a:p>
-        </p:txBody>
-      </p:sp>
-      <p:sp>
-        <p:nvSpPr>
-          <p:cNvPr id="49" name="TextBox 48"/>
-          <p:cNvSpPr txBox="1"/>
-          <p:nvPr/>
-        </p:nvSpPr>
-        <p:spPr>
-          <a:xfrm>
-            <a:off x="667512" y="3945636"/>
-            <a:ext cx="749808" cy="146304"/>
-          </a:xfrm>
-          <a:prstGeom prst="rect">
-            <a:avLst/>
-          </a:prstGeom>
-          <a:noFill/>
-        </p:spPr>
-        <p:txBody>
-          <a:bodyPr wrap="none" anchor="t" lIns="0" rIns="0" tIns="0" bIns="0">
-            <a:spAutoFit/>
-          </a:bodyPr>
-          <a:lstStyle/>
-          <a:p>
-            <a:pPr algn="l">
-              <a:lnSpc>
-                <a:spcPct val="100000"/>
-              </a:lnSpc>
-            </a:pPr>
-            <a:r>
-              <a:rPr sz="1000" b="0">
-                <a:solidFill>
-                  <a:srgbClr val="555555"/>
-                </a:solidFill>
-                <a:latin typeface="SamsungOneKorean"/>
-                <a:ea typeface="SamsungOneKorean"/>
-                <a:cs typeface="SamsungOneKorean"/>
-              </a:rPr>
-              <a:t>NAND·SSD</a:t>
-            </a:r>
-          </a:p>
-        </p:txBody>
-      </p:sp>
-      <p:sp>
-        <p:nvSpPr>
-          <p:cNvPr id="50" name="Rectangle 49"/>
-          <p:cNvSpPr/>
-          <p:nvPr/>
-        </p:nvSpPr>
-        <p:spPr>
-          <a:xfrm>
-            <a:off x="502919" y="4165091"/>
-            <a:ext cx="105156" cy="105156"/>
+            <a:off x="448056" y="3584448"/>
+            <a:ext cx="100584" cy="100584"/>
           </a:xfrm>
           <a:prstGeom prst="rect">
             <a:avLst/>
@@ -5408,14 +5786,14 @@
       </p:sp>
       <p:sp>
         <p:nvSpPr>
-          <p:cNvPr id="51" name="TextBox 50"/>
+          <p:cNvPr id="49" name="TextBox 48"/>
           <p:cNvSpPr txBox="1"/>
           <p:nvPr/>
         </p:nvSpPr>
         <p:spPr>
           <a:xfrm>
-            <a:off x="667512" y="4151376"/>
-            <a:ext cx="749808" cy="146304"/>
+            <a:off x="603503" y="3570732"/>
+            <a:ext cx="822960" cy="146304"/>
           </a:xfrm>
           <a:prstGeom prst="rect">
             <a:avLst/>
@@ -5449,14 +5827,314 @@
       </p:sp>
       <p:sp>
         <p:nvSpPr>
-          <p:cNvPr id="52" name="Rectangle 51"/>
+          <p:cNvPr id="50" name="TextBox 49"/>
+          <p:cNvSpPr txBox="1"/>
+          <p:nvPr/>
+        </p:nvSpPr>
+        <p:spPr>
+          <a:xfrm>
+            <a:off x="429768" y="3931920"/>
+            <a:ext cx="877824" cy="310896"/>
+          </a:xfrm>
+          <a:prstGeom prst="rect">
+            <a:avLst/>
+          </a:prstGeom>
+          <a:noFill/>
+        </p:spPr>
+        <p:txBody>
+          <a:bodyPr wrap="square" anchor="t" lIns="0" rIns="0" tIns="0" bIns="0">
+            <a:spAutoFit/>
+          </a:bodyPr>
+          <a:lstStyle/>
+          <a:p>
+            <a:pPr algn="r">
+              <a:lnSpc>
+                <a:spcPct val="115000"/>
+              </a:lnSpc>
+            </a:pPr>
+            <a:r>
+              <a:rPr sz="1000" b="0">
+                <a:solidFill>
+                  <a:srgbClr val="8A8A8E"/>
+                </a:solidFill>
+                <a:latin typeface="SamsungOneKorean"/>
+                <a:ea typeface="SamsungOneKorean"/>
+                <a:cs typeface="SamsungOneKorean"/>
+              </a:rPr>
+              <a:t>2025 구성</a:t>
+            </a:r>
+          </a:p>
+          <a:p>
+            <a:pPr algn="r">
+              <a:lnSpc>
+                <a:spcPct val="115000"/>
+              </a:lnSpc>
+            </a:pPr>
+            <a:r>
+              <a:rPr sz="1000" b="0">
+                <a:solidFill>
+                  <a:srgbClr val="8A8A8E"/>
+                </a:solidFill>
+                <a:latin typeface="SamsungOneKorean"/>
+                <a:ea typeface="SamsungOneKorean"/>
+                <a:cs typeface="SamsungOneKorean"/>
+              </a:rPr>
+              <a:t>= 100 기준</a:t>
+            </a:r>
+          </a:p>
+        </p:txBody>
+      </p:sp>
+      <p:sp>
+        <p:nvSpPr>
+          <p:cNvPr id="51" name="TextBox 50"/>
+          <p:cNvSpPr txBox="1"/>
+          <p:nvPr/>
+        </p:nvSpPr>
+        <p:spPr>
+          <a:xfrm>
+            <a:off x="1435608" y="2743200"/>
+            <a:ext cx="1977481" cy="146304"/>
+          </a:xfrm>
+          <a:prstGeom prst="rect">
+            <a:avLst/>
+          </a:prstGeom>
+          <a:noFill/>
+        </p:spPr>
+        <p:txBody>
+          <a:bodyPr wrap="square" anchor="t" lIns="0" rIns="0" tIns="0" bIns="0">
+            <a:spAutoFit/>
+          </a:bodyPr>
+          <a:lstStyle/>
+          <a:p>
+            <a:pPr algn="ctr">
+              <a:lnSpc>
+                <a:spcPct val="100000"/>
+              </a:lnSpc>
+            </a:pPr>
+            <a:r>
+              <a:rPr sz="1000" b="1">
+                <a:solidFill>
+                  <a:srgbClr val="8A8A8E"/>
+                </a:solidFill>
+                <a:latin typeface="SamsungOneKorean"/>
+                <a:ea typeface="SamsungOneKorean"/>
+                <a:cs typeface="SamsungOneKorean"/>
+              </a:rPr>
+              <a:t>제품 수요 (2025=100)</a:t>
+            </a:r>
+          </a:p>
+        </p:txBody>
+      </p:sp>
+      <p:sp>
+        <p:nvSpPr>
+          <p:cNvPr id="52" name="TextBox 51"/>
+          <p:cNvSpPr txBox="1"/>
+          <p:nvPr/>
+        </p:nvSpPr>
+        <p:spPr>
+          <a:xfrm>
+            <a:off x="3522817" y="2743200"/>
+            <a:ext cx="1977481" cy="146304"/>
+          </a:xfrm>
+          <a:prstGeom prst="rect">
+            <a:avLst/>
+          </a:prstGeom>
+          <a:noFill/>
+        </p:spPr>
+        <p:txBody>
+          <a:bodyPr wrap="square" anchor="t" lIns="0" rIns="0" tIns="0" bIns="0">
+            <a:spAutoFit/>
+          </a:bodyPr>
+          <a:lstStyle/>
+          <a:p>
+            <a:pPr algn="ctr">
+              <a:lnSpc>
+                <a:spcPct val="100000"/>
+              </a:lnSpc>
+            </a:pPr>
+            <a:r>
+              <a:rPr sz="1000" b="1">
+                <a:solidFill>
+                  <a:srgbClr val="8A8A8E"/>
+                </a:solidFill>
+                <a:latin typeface="SamsungOneKorean"/>
+                <a:ea typeface="SamsungOneKorean"/>
+                <a:cs typeface="SamsungOneKorean"/>
+              </a:rPr>
+              <a:t>제품 수요 (2025=100)</a:t>
+            </a:r>
+          </a:p>
+        </p:txBody>
+      </p:sp>
+      <p:sp>
+        <p:nvSpPr>
+          <p:cNvPr id="53" name="TextBox 52"/>
+          <p:cNvSpPr txBox="1"/>
+          <p:nvPr/>
+        </p:nvSpPr>
+        <p:spPr>
+          <a:xfrm>
+            <a:off x="5610026" y="2743200"/>
+            <a:ext cx="1977481" cy="146304"/>
+          </a:xfrm>
+          <a:prstGeom prst="rect">
+            <a:avLst/>
+          </a:prstGeom>
+          <a:noFill/>
+        </p:spPr>
+        <p:txBody>
+          <a:bodyPr wrap="square" anchor="t" lIns="0" rIns="0" tIns="0" bIns="0">
+            <a:spAutoFit/>
+          </a:bodyPr>
+          <a:lstStyle/>
+          <a:p>
+            <a:pPr algn="ctr">
+              <a:lnSpc>
+                <a:spcPct val="100000"/>
+              </a:lnSpc>
+            </a:pPr>
+            <a:r>
+              <a:rPr sz="1000" b="1">
+                <a:solidFill>
+                  <a:srgbClr val="8A8A8E"/>
+                </a:solidFill>
+                <a:latin typeface="SamsungOneKorean"/>
+                <a:ea typeface="SamsungOneKorean"/>
+                <a:cs typeface="SamsungOneKorean"/>
+              </a:rPr>
+              <a:t>3사 CAPEX 합산 ($B)</a:t>
+            </a:r>
+          </a:p>
+        </p:txBody>
+      </p:sp>
+      <p:sp>
+        <p:nvSpPr>
+          <p:cNvPr id="54" name="TextBox 53"/>
+          <p:cNvSpPr txBox="1"/>
+          <p:nvPr/>
+        </p:nvSpPr>
+        <p:spPr>
+          <a:xfrm>
+            <a:off x="7697236" y="2743200"/>
+            <a:ext cx="1977481" cy="146304"/>
+          </a:xfrm>
+          <a:prstGeom prst="rect">
+            <a:avLst/>
+          </a:prstGeom>
+          <a:noFill/>
+        </p:spPr>
+        <p:txBody>
+          <a:bodyPr wrap="square" anchor="t" lIns="0" rIns="0" tIns="0" bIns="0">
+            <a:spAutoFit/>
+          </a:bodyPr>
+          <a:lstStyle/>
+          <a:p>
+            <a:pPr algn="ctr">
+              <a:lnSpc>
+                <a:spcPct val="100000"/>
+              </a:lnSpc>
+            </a:pPr>
+            <a:r>
+              <a:rPr sz="1000" b="1">
+                <a:solidFill>
+                  <a:srgbClr val="8A8A8E"/>
+                </a:solidFill>
+                <a:latin typeface="SamsungOneKorean"/>
+                <a:ea typeface="SamsungOneKorean"/>
+                <a:cs typeface="SamsungOneKorean"/>
+              </a:rPr>
+              <a:t>CXMT 점유율 (%)</a:t>
+            </a:r>
+          </a:p>
+        </p:txBody>
+      </p:sp>
+      <p:sp>
+        <p:nvSpPr>
+          <p:cNvPr id="55" name="TextBox 54"/>
+          <p:cNvSpPr txBox="1"/>
+          <p:nvPr/>
+        </p:nvSpPr>
+        <p:spPr>
+          <a:xfrm>
+            <a:off x="9784445" y="2743200"/>
+            <a:ext cx="1977481" cy="146304"/>
+          </a:xfrm>
+          <a:prstGeom prst="rect">
+            <a:avLst/>
+          </a:prstGeom>
+          <a:noFill/>
+        </p:spPr>
+        <p:txBody>
+          <a:bodyPr wrap="square" anchor="t" lIns="0" rIns="0" tIns="0" bIns="0">
+            <a:spAutoFit/>
+          </a:bodyPr>
+          <a:lstStyle/>
+          <a:p>
+            <a:pPr algn="ctr">
+              <a:lnSpc>
+                <a:spcPct val="100000"/>
+              </a:lnSpc>
+            </a:pPr>
+            <a:r>
+              <a:rPr sz="1000" b="1">
+                <a:solidFill>
+                  <a:srgbClr val="8A8A8E"/>
+                </a:solidFill>
+                <a:latin typeface="SamsungOneKorean"/>
+                <a:ea typeface="SamsungOneKorean"/>
+                <a:cs typeface="SamsungOneKorean"/>
+              </a:rPr>
+              <a:t>제품 수요 (2025=100)</a:t>
+            </a:r>
+          </a:p>
+        </p:txBody>
+      </p:sp>
+      <p:cxnSp>
+        <p:nvCxnSpPr>
+          <p:cNvPr id="56" name="Connector 55"/>
+          <p:cNvCxnSpPr/>
+          <p:nvPr/>
+        </p:nvCxnSpPr>
+        <p:spPr>
+          <a:xfrm>
+            <a:off x="1527048" y="4370832"/>
+            <a:ext cx="1794601" cy="0"/>
+          </a:xfrm>
+          <a:prstGeom prst="line">
+            <a:avLst/>
+          </a:prstGeom>
+          <a:ln w="11430">
+            <a:solidFill>
+              <a:srgbClr val="D9D9D9"/>
+            </a:solidFill>
+          </a:ln>
+          <a:effectLst/>
+        </p:spPr>
+        <p:style>
+          <a:lnRef idx="2">
+            <a:schemeClr val="accent1"/>
+          </a:lnRef>
+          <a:fillRef idx="0">
+            <a:schemeClr val="accent1"/>
+          </a:fillRef>
+          <a:effectRef idx="1">
+            <a:schemeClr val="accent1"/>
+          </a:effectRef>
+          <a:fontRef idx="minor">
+            <a:schemeClr val="tx1"/>
+          </a:fontRef>
+        </p:style>
+      </p:cxnSp>
+      <p:sp>
+        <p:nvSpPr>
+          <p:cNvPr id="57" name="Rectangle 56"/>
           <p:cNvSpPr/>
           <p:nvPr/>
         </p:nvSpPr>
         <p:spPr>
           <a:xfrm>
-            <a:off x="1994580" y="3964838"/>
-            <a:ext cx="365760" cy="351129"/>
+            <a:off x="1994580" y="4206971"/>
+            <a:ext cx="365760" cy="163860"/>
           </a:xfrm>
           <a:prstGeom prst="rect">
             <a:avLst/>
@@ -5493,20 +6171,20 @@
       </p:sp>
       <p:sp>
         <p:nvSpPr>
-          <p:cNvPr id="53" name="Rectangle 52"/>
+          <p:cNvPr id="58" name="Rectangle 57"/>
           <p:cNvSpPr/>
           <p:nvPr/>
         </p:nvSpPr>
         <p:spPr>
           <a:xfrm>
-            <a:off x="1994580" y="3672230"/>
-            <a:ext cx="365760" cy="292608"/>
+            <a:off x="1994580" y="3551529"/>
+            <a:ext cx="365760" cy="655441"/>
           </a:xfrm>
           <a:prstGeom prst="rect">
             <a:avLst/>
           </a:prstGeom>
           <a:solidFill>
-            <a:srgbClr val="D5DBF0"/>
+            <a:srgbClr val="D8DEF1"/>
           </a:solidFill>
           <a:ln>
             <a:noFill/>
@@ -5537,20 +6215,20 @@
       </p:sp>
       <p:sp>
         <p:nvSpPr>
-          <p:cNvPr id="54" name="Rectangle 53"/>
+          <p:cNvPr id="59" name="Rectangle 58"/>
           <p:cNvSpPr/>
           <p:nvPr/>
         </p:nvSpPr>
         <p:spPr>
           <a:xfrm>
-            <a:off x="1994580" y="3379622"/>
-            <a:ext cx="365760" cy="292608"/>
+            <a:off x="1994580" y="3200400"/>
+            <a:ext cx="365760" cy="351129"/>
           </a:xfrm>
           <a:prstGeom prst="rect">
             <a:avLst/>
           </a:prstGeom>
           <a:solidFill>
-            <a:srgbClr val="E3E7F6"/>
+            <a:srgbClr val="EAEDF8"/>
           </a:solidFill>
           <a:ln>
             <a:noFill/>
@@ -5581,57 +6259,13 @@
       </p:sp>
       <p:sp>
         <p:nvSpPr>
-          <p:cNvPr id="55" name="Rectangle 54"/>
-          <p:cNvSpPr/>
-          <p:nvPr/>
-        </p:nvSpPr>
-        <p:spPr>
-          <a:xfrm>
-            <a:off x="1994580" y="3145535"/>
-            <a:ext cx="365760" cy="234086"/>
-          </a:xfrm>
-          <a:prstGeom prst="rect">
-            <a:avLst/>
-          </a:prstGeom>
-          <a:solidFill>
-            <a:srgbClr val="EFF1FA"/>
-          </a:solidFill>
-          <a:ln>
-            <a:noFill/>
-          </a:ln>
-          <a:effectLst/>
-        </p:spPr>
-        <p:style>
-          <a:lnRef idx="1">
-            <a:schemeClr val="accent1"/>
-          </a:lnRef>
-          <a:fillRef idx="3">
-            <a:schemeClr val="accent1"/>
-          </a:fillRef>
-          <a:effectRef idx="2">
-            <a:schemeClr val="accent1"/>
-          </a:effectRef>
-          <a:fontRef idx="minor">
-            <a:schemeClr val="lt1"/>
-          </a:fontRef>
-        </p:style>
-        <p:txBody>
-          <a:bodyPr rtlCol="0" anchor="ctr"/>
-          <a:lstStyle/>
-          <a:p>
-            <a:pPr algn="ctr"/>
-          </a:p>
-        </p:txBody>
-      </p:sp>
-      <p:sp>
-        <p:nvSpPr>
-          <p:cNvPr id="56" name="TextBox 55"/>
+          <p:cNvPr id="60" name="TextBox 59"/>
           <p:cNvSpPr txBox="1"/>
           <p:nvPr/>
         </p:nvSpPr>
         <p:spPr>
           <a:xfrm>
-            <a:off x="1903140" y="2944367"/>
+            <a:off x="1903140" y="3008376"/>
             <a:ext cx="548640" cy="146304"/>
           </a:xfrm>
           <a:prstGeom prst="rect">
@@ -5666,14 +6300,14 @@
       </p:sp>
       <p:sp>
         <p:nvSpPr>
-          <p:cNvPr id="57" name="Rectangle 56"/>
+          <p:cNvPr id="61" name="Rectangle 60"/>
           <p:cNvSpPr/>
           <p:nvPr/>
         </p:nvSpPr>
         <p:spPr>
           <a:xfrm>
-            <a:off x="2488356" y="4140403"/>
-            <a:ext cx="365760" cy="175564"/>
+            <a:off x="2488356" y="4288901"/>
+            <a:ext cx="365760" cy="81930"/>
           </a:xfrm>
           <a:prstGeom prst="rect">
             <a:avLst/>
@@ -5710,20 +6344,20 @@
       </p:sp>
       <p:sp>
         <p:nvSpPr>
-          <p:cNvPr id="58" name="Rectangle 57"/>
+          <p:cNvPr id="62" name="Rectangle 61"/>
           <p:cNvSpPr/>
           <p:nvPr/>
         </p:nvSpPr>
         <p:spPr>
           <a:xfrm>
-            <a:off x="2488356" y="3988247"/>
-            <a:ext cx="365760" cy="152156"/>
+            <a:off x="2488356" y="3797320"/>
+            <a:ext cx="365760" cy="491581"/>
           </a:xfrm>
           <a:prstGeom prst="rect">
             <a:avLst/>
           </a:prstGeom>
           <a:solidFill>
-            <a:srgbClr val="4E68C8"/>
+            <a:srgbClr val="5A73CC"/>
           </a:solidFill>
           <a:ln>
             <a:noFill/>
@@ -5754,20 +6388,20 @@
       </p:sp>
       <p:sp>
         <p:nvSpPr>
-          <p:cNvPr id="59" name="Rectangle 58"/>
+          <p:cNvPr id="63" name="Rectangle 62"/>
           <p:cNvSpPr/>
           <p:nvPr/>
         </p:nvSpPr>
         <p:spPr>
           <a:xfrm>
-            <a:off x="2488356" y="3707343"/>
+            <a:off x="2488356" y="3516416"/>
             <a:ext cx="365760" cy="280903"/>
           </a:xfrm>
           <a:prstGeom prst="rect">
             <a:avLst/>
           </a:prstGeom>
           <a:solidFill>
-            <a:srgbClr val="93A2DC"/>
+            <a:srgbClr val="ADB9E4"/>
           </a:solidFill>
           <a:ln>
             <a:noFill/>
@@ -5798,57 +6432,13 @@
       </p:sp>
       <p:sp>
         <p:nvSpPr>
-          <p:cNvPr id="60" name="Rectangle 59"/>
-          <p:cNvSpPr/>
-          <p:nvPr/>
-        </p:nvSpPr>
-        <p:spPr>
-          <a:xfrm>
-            <a:off x="2488356" y="3520074"/>
-            <a:ext cx="365760" cy="187269"/>
-          </a:xfrm>
-          <a:prstGeom prst="rect">
-            <a:avLst/>
-          </a:prstGeom>
-          <a:solidFill>
-            <a:srgbClr val="C9D1EE"/>
-          </a:solidFill>
-          <a:ln>
-            <a:noFill/>
-          </a:ln>
-          <a:effectLst/>
-        </p:spPr>
-        <p:style>
-          <a:lnRef idx="1">
-            <a:schemeClr val="accent1"/>
-          </a:lnRef>
-          <a:fillRef idx="3">
-            <a:schemeClr val="accent1"/>
-          </a:fillRef>
-          <a:effectRef idx="2">
-            <a:schemeClr val="accent1"/>
-          </a:effectRef>
-          <a:fontRef idx="minor">
-            <a:schemeClr val="lt1"/>
-          </a:fontRef>
-        </p:style>
-        <p:txBody>
-          <a:bodyPr rtlCol="0" anchor="ctr"/>
-          <a:lstStyle/>
-          <a:p>
-            <a:pPr algn="ctr"/>
-          </a:p>
-        </p:txBody>
-      </p:sp>
-      <p:sp>
-        <p:nvSpPr>
-          <p:cNvPr id="61" name="TextBox 60"/>
+          <p:cNvPr id="64" name="TextBox 63"/>
           <p:cNvSpPr txBox="1"/>
           <p:nvPr/>
         </p:nvSpPr>
         <p:spPr>
           <a:xfrm>
-            <a:off x="2396916" y="3318906"/>
+            <a:off x="2396916" y="3324392"/>
             <a:ext cx="548640" cy="146304"/>
           </a:xfrm>
           <a:prstGeom prst="rect">
@@ -5876,20 +6466,102 @@
                 <a:ea typeface="SamsungOneKorean"/>
                 <a:cs typeface="SamsungOneKorean"/>
               </a:rPr>
-              <a:t>68</a:t>
+              <a:t>73</a:t>
+            </a:r>
+          </a:p>
+        </p:txBody>
+      </p:sp>
+      <p:sp>
+        <p:nvSpPr>
+          <p:cNvPr id="65" name="TextBox 64"/>
+          <p:cNvSpPr txBox="1"/>
+          <p:nvPr/>
+        </p:nvSpPr>
+        <p:spPr>
+          <a:xfrm>
+            <a:off x="1921428" y="4416552"/>
+            <a:ext cx="512064" cy="128016"/>
+          </a:xfrm>
+          <a:prstGeom prst="rect">
+            <a:avLst/>
+          </a:prstGeom>
+          <a:noFill/>
+        </p:spPr>
+        <p:txBody>
+          <a:bodyPr wrap="square" anchor="t" lIns="0" rIns="0" tIns="0" bIns="0">
+            <a:spAutoFit/>
+          </a:bodyPr>
+          <a:lstStyle/>
+          <a:p>
+            <a:pPr algn="ctr">
+              <a:lnSpc>
+                <a:spcPct val="100000"/>
+              </a:lnSpc>
+            </a:pPr>
+            <a:r>
+              <a:rPr sz="1000" b="0">
+                <a:solidFill>
+                  <a:srgbClr val="8A8A8E"/>
+                </a:solidFill>
+                <a:latin typeface="SamsungOneKorean"/>
+                <a:ea typeface="SamsungOneKorean"/>
+                <a:cs typeface="SamsungOneKorean"/>
+              </a:rPr>
+              <a:t>2025</a:t>
+            </a:r>
+          </a:p>
+        </p:txBody>
+      </p:sp>
+      <p:sp>
+        <p:nvSpPr>
+          <p:cNvPr id="66" name="TextBox 65"/>
+          <p:cNvSpPr txBox="1"/>
+          <p:nvPr/>
+        </p:nvSpPr>
+        <p:spPr>
+          <a:xfrm>
+            <a:off x="2415204" y="4416552"/>
+            <a:ext cx="512064" cy="128016"/>
+          </a:xfrm>
+          <a:prstGeom prst="rect">
+            <a:avLst/>
+          </a:prstGeom>
+          <a:noFill/>
+        </p:spPr>
+        <p:txBody>
+          <a:bodyPr wrap="square" anchor="t" lIns="0" rIns="0" tIns="0" bIns="0">
+            <a:spAutoFit/>
+          </a:bodyPr>
+          <a:lstStyle/>
+          <a:p>
+            <a:pPr algn="ctr">
+              <a:lnSpc>
+                <a:spcPct val="100000"/>
+              </a:lnSpc>
+            </a:pPr>
+            <a:r>
+              <a:rPr sz="1000" b="0">
+                <a:solidFill>
+                  <a:srgbClr val="8A8A8E"/>
+                </a:solidFill>
+                <a:latin typeface="SamsungOneKorean"/>
+                <a:ea typeface="SamsungOneKorean"/>
+                <a:cs typeface="SamsungOneKorean"/>
+              </a:rPr>
+              <a:t>시나리오</a:t>
             </a:r>
           </a:p>
         </p:txBody>
       </p:sp>
       <p:cxnSp>
         <p:nvCxnSpPr>
-          <p:cNvPr id="62" name="Connector 61"/>
+          <p:cNvPr id="67" name="Connector 66"/>
           <p:cNvCxnSpPr/>
           <p:nvPr/>
         </p:nvCxnSpPr>
         <p:spPr>
           <a:xfrm>
-            <a:off x="1527048" y="4315968"/>
+            <a:off x="3614257" y="4370832"/>
             <a:ext cx="1794601" cy="0"/>
           </a:xfrm>
           <a:prstGeom prst="line">
@@ -5919,96 +6591,14 @@
       </p:cxnSp>
       <p:sp>
         <p:nvSpPr>
-          <p:cNvPr id="63" name="TextBox 62"/>
-          <p:cNvSpPr txBox="1"/>
-          <p:nvPr/>
-        </p:nvSpPr>
-        <p:spPr>
-          <a:xfrm>
-            <a:off x="1921428" y="4361688"/>
-            <a:ext cx="512064" cy="128016"/>
-          </a:xfrm>
-          <a:prstGeom prst="rect">
-            <a:avLst/>
-          </a:prstGeom>
-          <a:noFill/>
-        </p:spPr>
-        <p:txBody>
-          <a:bodyPr wrap="square" anchor="t" lIns="0" rIns="0" tIns="0" bIns="0">
-            <a:spAutoFit/>
-          </a:bodyPr>
-          <a:lstStyle/>
-          <a:p>
-            <a:pPr algn="ctr">
-              <a:lnSpc>
-                <a:spcPct val="100000"/>
-              </a:lnSpc>
-            </a:pPr>
-            <a:r>
-              <a:rPr sz="1000" b="0">
-                <a:solidFill>
-                  <a:srgbClr val="8A8A8E"/>
-                </a:solidFill>
-                <a:latin typeface="SamsungOneKorean"/>
-                <a:ea typeface="SamsungOneKorean"/>
-                <a:cs typeface="SamsungOneKorean"/>
-              </a:rPr>
-              <a:t>현재</a:t>
-            </a:r>
-          </a:p>
-        </p:txBody>
-      </p:sp>
-      <p:sp>
-        <p:nvSpPr>
-          <p:cNvPr id="64" name="TextBox 63"/>
-          <p:cNvSpPr txBox="1"/>
-          <p:nvPr/>
-        </p:nvSpPr>
-        <p:spPr>
-          <a:xfrm>
-            <a:off x="2415204" y="4361688"/>
-            <a:ext cx="512064" cy="128016"/>
-          </a:xfrm>
-          <a:prstGeom prst="rect">
-            <a:avLst/>
-          </a:prstGeom>
-          <a:noFill/>
-        </p:spPr>
-        <p:txBody>
-          <a:bodyPr wrap="square" anchor="t" lIns="0" rIns="0" tIns="0" bIns="0">
-            <a:spAutoFit/>
-          </a:bodyPr>
-          <a:lstStyle/>
-          <a:p>
-            <a:pPr algn="ctr">
-              <a:lnSpc>
-                <a:spcPct val="100000"/>
-              </a:lnSpc>
-            </a:pPr>
-            <a:r>
-              <a:rPr sz="1000" b="0">
-                <a:solidFill>
-                  <a:srgbClr val="8A8A8E"/>
-                </a:solidFill>
-                <a:latin typeface="SamsungOneKorean"/>
-                <a:ea typeface="SamsungOneKorean"/>
-                <a:cs typeface="SamsungOneKorean"/>
-              </a:rPr>
-              <a:t>시나리오</a:t>
-            </a:r>
-          </a:p>
-        </p:txBody>
-      </p:sp>
-      <p:sp>
-        <p:nvSpPr>
-          <p:cNvPr id="65" name="Rectangle 64"/>
+          <p:cNvPr id="68" name="Rectangle 67"/>
           <p:cNvSpPr/>
           <p:nvPr/>
         </p:nvSpPr>
         <p:spPr>
           <a:xfrm>
-            <a:off x="4081790" y="3964838"/>
-            <a:ext cx="365760" cy="351129"/>
+            <a:off x="4081790" y="4206971"/>
+            <a:ext cx="365760" cy="163860"/>
           </a:xfrm>
           <a:prstGeom prst="rect">
             <a:avLst/>
@@ -6045,20 +6635,20 @@
       </p:sp>
       <p:sp>
         <p:nvSpPr>
-          <p:cNvPr id="66" name="Rectangle 65"/>
+          <p:cNvPr id="69" name="Rectangle 68"/>
           <p:cNvSpPr/>
           <p:nvPr/>
         </p:nvSpPr>
         <p:spPr>
           <a:xfrm>
-            <a:off x="4081790" y="3672230"/>
-            <a:ext cx="365760" cy="292608"/>
+            <a:off x="4081790" y="3551529"/>
+            <a:ext cx="365760" cy="655441"/>
           </a:xfrm>
           <a:prstGeom prst="rect">
             <a:avLst/>
           </a:prstGeom>
           <a:solidFill>
-            <a:srgbClr val="D5DBF0"/>
+            <a:srgbClr val="D8DEF1"/>
           </a:solidFill>
           <a:ln>
             <a:noFill/>
@@ -6089,20 +6679,20 @@
       </p:sp>
       <p:sp>
         <p:nvSpPr>
-          <p:cNvPr id="67" name="Rectangle 66"/>
+          <p:cNvPr id="70" name="Rectangle 69"/>
           <p:cNvSpPr/>
           <p:nvPr/>
         </p:nvSpPr>
         <p:spPr>
           <a:xfrm>
-            <a:off x="4081790" y="3379622"/>
-            <a:ext cx="365760" cy="292608"/>
+            <a:off x="4081790" y="3200400"/>
+            <a:ext cx="365760" cy="351129"/>
           </a:xfrm>
           <a:prstGeom prst="rect">
             <a:avLst/>
           </a:prstGeom>
           <a:solidFill>
-            <a:srgbClr val="E3E7F6"/>
+            <a:srgbClr val="EAEDF8"/>
           </a:solidFill>
           <a:ln>
             <a:noFill/>
@@ -6133,57 +6723,13 @@
       </p:sp>
       <p:sp>
         <p:nvSpPr>
-          <p:cNvPr id="68" name="Rectangle 67"/>
-          <p:cNvSpPr/>
-          <p:nvPr/>
-        </p:nvSpPr>
-        <p:spPr>
-          <a:xfrm>
-            <a:off x="4081790" y="3145535"/>
-            <a:ext cx="365760" cy="234086"/>
-          </a:xfrm>
-          <a:prstGeom prst="rect">
-            <a:avLst/>
-          </a:prstGeom>
-          <a:solidFill>
-            <a:srgbClr val="EFF1FA"/>
-          </a:solidFill>
-          <a:ln>
-            <a:noFill/>
-          </a:ln>
-          <a:effectLst/>
-        </p:spPr>
-        <p:style>
-          <a:lnRef idx="1">
-            <a:schemeClr val="accent1"/>
-          </a:lnRef>
-          <a:fillRef idx="3">
-            <a:schemeClr val="accent1"/>
-          </a:fillRef>
-          <a:effectRef idx="2">
-            <a:schemeClr val="accent1"/>
-          </a:effectRef>
-          <a:fontRef idx="minor">
-            <a:schemeClr val="lt1"/>
-          </a:fontRef>
-        </p:style>
-        <p:txBody>
-          <a:bodyPr rtlCol="0" anchor="ctr"/>
-          <a:lstStyle/>
-          <a:p>
-            <a:pPr algn="ctr"/>
-          </a:p>
-        </p:txBody>
-      </p:sp>
-      <p:sp>
-        <p:nvSpPr>
-          <p:cNvPr id="69" name="TextBox 68"/>
+          <p:cNvPr id="71" name="TextBox 70"/>
           <p:cNvSpPr txBox="1"/>
           <p:nvPr/>
         </p:nvSpPr>
         <p:spPr>
           <a:xfrm>
-            <a:off x="3990350" y="2944367"/>
+            <a:off x="3990350" y="3008376"/>
             <a:ext cx="548640" cy="146304"/>
           </a:xfrm>
           <a:prstGeom prst="rect">
@@ -6218,14 +6764,14 @@
       </p:sp>
       <p:sp>
         <p:nvSpPr>
-          <p:cNvPr id="70" name="Rectangle 69"/>
+          <p:cNvPr id="72" name="Rectangle 71"/>
           <p:cNvSpPr/>
           <p:nvPr/>
         </p:nvSpPr>
         <p:spPr>
           <a:xfrm>
-            <a:off x="4575566" y="4035064"/>
-            <a:ext cx="365760" cy="280903"/>
+            <a:off x="4575566" y="4242084"/>
+            <a:ext cx="365760" cy="128747"/>
           </a:xfrm>
           <a:prstGeom prst="rect">
             <a:avLst/>
@@ -6262,20 +6808,20 @@
       </p:sp>
       <p:sp>
         <p:nvSpPr>
-          <p:cNvPr id="71" name="Rectangle 70"/>
+          <p:cNvPr id="73" name="Rectangle 72"/>
           <p:cNvSpPr/>
           <p:nvPr/>
         </p:nvSpPr>
         <p:spPr>
           <a:xfrm>
-            <a:off x="4575566" y="3800977"/>
-            <a:ext cx="365760" cy="234086"/>
+            <a:off x="4575566" y="3715390"/>
+            <a:ext cx="365760" cy="526694"/>
           </a:xfrm>
           <a:prstGeom prst="rect">
             <a:avLst/>
           </a:prstGeom>
           <a:solidFill>
-            <a:srgbClr val="4E68C8"/>
+            <a:srgbClr val="5A73CC"/>
           </a:solidFill>
           <a:ln>
             <a:noFill/>
@@ -6306,20 +6852,20 @@
       </p:sp>
       <p:sp>
         <p:nvSpPr>
-          <p:cNvPr id="72" name="Rectangle 71"/>
+          <p:cNvPr id="74" name="Rectangle 73"/>
           <p:cNvSpPr/>
           <p:nvPr/>
         </p:nvSpPr>
         <p:spPr>
           <a:xfrm>
-            <a:off x="4575566" y="3566891"/>
-            <a:ext cx="365760" cy="234086"/>
+            <a:off x="4575566" y="3305738"/>
+            <a:ext cx="365760" cy="409651"/>
           </a:xfrm>
           <a:prstGeom prst="rect">
             <a:avLst/>
           </a:prstGeom>
           <a:solidFill>
-            <a:srgbClr val="93A2DC"/>
+            <a:srgbClr val="ADB9E4"/>
           </a:solidFill>
           <a:ln>
             <a:noFill/>
@@ -6350,57 +6896,13 @@
       </p:sp>
       <p:sp>
         <p:nvSpPr>
-          <p:cNvPr id="73" name="Rectangle 72"/>
-          <p:cNvSpPr/>
-          <p:nvPr/>
-        </p:nvSpPr>
-        <p:spPr>
-          <a:xfrm>
-            <a:off x="4575566" y="3285987"/>
-            <a:ext cx="365760" cy="280903"/>
-          </a:xfrm>
-          <a:prstGeom prst="rect">
-            <a:avLst/>
-          </a:prstGeom>
-          <a:solidFill>
-            <a:srgbClr val="C9D1EE"/>
-          </a:solidFill>
-          <a:ln>
-            <a:noFill/>
-          </a:ln>
-          <a:effectLst/>
-        </p:spPr>
-        <p:style>
-          <a:lnRef idx="1">
-            <a:schemeClr val="accent1"/>
-          </a:lnRef>
-          <a:fillRef idx="3">
-            <a:schemeClr val="accent1"/>
-          </a:fillRef>
-          <a:effectRef idx="2">
-            <a:schemeClr val="accent1"/>
-          </a:effectRef>
-          <a:fontRef idx="minor">
-            <a:schemeClr val="lt1"/>
-          </a:fontRef>
-        </p:style>
-        <p:txBody>
-          <a:bodyPr rtlCol="0" anchor="ctr"/>
-          <a:lstStyle/>
-          <a:p>
-            <a:pPr algn="ctr"/>
-          </a:p>
-        </p:txBody>
-      </p:sp>
-      <p:sp>
-        <p:nvSpPr>
-          <p:cNvPr id="74" name="TextBox 73"/>
+          <p:cNvPr id="75" name="TextBox 74"/>
           <p:cNvSpPr txBox="1"/>
           <p:nvPr/>
         </p:nvSpPr>
         <p:spPr>
           <a:xfrm>
-            <a:off x="4484126" y="3084819"/>
+            <a:off x="4484126" y="3113714"/>
             <a:ext cx="548640" cy="146304"/>
           </a:xfrm>
           <a:prstGeom prst="rect">
@@ -6428,21 +6930,103 @@
                 <a:ea typeface="SamsungOneKorean"/>
                 <a:cs typeface="SamsungOneKorean"/>
               </a:rPr>
-              <a:t>88</a:t>
+              <a:t>91</a:t>
+            </a:r>
+          </a:p>
+        </p:txBody>
+      </p:sp>
+      <p:sp>
+        <p:nvSpPr>
+          <p:cNvPr id="76" name="TextBox 75"/>
+          <p:cNvSpPr txBox="1"/>
+          <p:nvPr/>
+        </p:nvSpPr>
+        <p:spPr>
+          <a:xfrm>
+            <a:off x="4008638" y="4416552"/>
+            <a:ext cx="512064" cy="128016"/>
+          </a:xfrm>
+          <a:prstGeom prst="rect">
+            <a:avLst/>
+          </a:prstGeom>
+          <a:noFill/>
+        </p:spPr>
+        <p:txBody>
+          <a:bodyPr wrap="square" anchor="t" lIns="0" rIns="0" tIns="0" bIns="0">
+            <a:spAutoFit/>
+          </a:bodyPr>
+          <a:lstStyle/>
+          <a:p>
+            <a:pPr algn="ctr">
+              <a:lnSpc>
+                <a:spcPct val="100000"/>
+              </a:lnSpc>
+            </a:pPr>
+            <a:r>
+              <a:rPr sz="1000" b="0">
+                <a:solidFill>
+                  <a:srgbClr val="8A8A8E"/>
+                </a:solidFill>
+                <a:latin typeface="SamsungOneKorean"/>
+                <a:ea typeface="SamsungOneKorean"/>
+                <a:cs typeface="SamsungOneKorean"/>
+              </a:rPr>
+              <a:t>2025</a:t>
+            </a:r>
+          </a:p>
+        </p:txBody>
+      </p:sp>
+      <p:sp>
+        <p:nvSpPr>
+          <p:cNvPr id="77" name="TextBox 76"/>
+          <p:cNvSpPr txBox="1"/>
+          <p:nvPr/>
+        </p:nvSpPr>
+        <p:spPr>
+          <a:xfrm>
+            <a:off x="4502414" y="4416552"/>
+            <a:ext cx="512064" cy="128016"/>
+          </a:xfrm>
+          <a:prstGeom prst="rect">
+            <a:avLst/>
+          </a:prstGeom>
+          <a:noFill/>
+        </p:spPr>
+        <p:txBody>
+          <a:bodyPr wrap="square" anchor="t" lIns="0" rIns="0" tIns="0" bIns="0">
+            <a:spAutoFit/>
+          </a:bodyPr>
+          <a:lstStyle/>
+          <a:p>
+            <a:pPr algn="ctr">
+              <a:lnSpc>
+                <a:spcPct val="100000"/>
+              </a:lnSpc>
+            </a:pPr>
+            <a:r>
+              <a:rPr sz="1000" b="0">
+                <a:solidFill>
+                  <a:srgbClr val="8A8A8E"/>
+                </a:solidFill>
+                <a:latin typeface="SamsungOneKorean"/>
+                <a:ea typeface="SamsungOneKorean"/>
+                <a:cs typeface="SamsungOneKorean"/>
+              </a:rPr>
+              <a:t>시나리오</a:t>
             </a:r>
           </a:p>
         </p:txBody>
       </p:sp>
       <p:cxnSp>
         <p:nvCxnSpPr>
-          <p:cNvPr id="75" name="Connector 74"/>
+          <p:cNvPr id="78" name="Connector 77"/>
           <p:cNvCxnSpPr/>
           <p:nvPr/>
         </p:nvCxnSpPr>
         <p:spPr>
           <a:xfrm>
-            <a:off x="3614257" y="4315968"/>
-            <a:ext cx="1794601" cy="0"/>
+            <a:off x="5701466" y="4370832"/>
+            <a:ext cx="1794602" cy="0"/>
           </a:xfrm>
           <a:prstGeom prst="line">
             <a:avLst/>
@@ -6471,14 +7055,58 @@
       </p:cxnSp>
       <p:sp>
         <p:nvSpPr>
-          <p:cNvPr id="76" name="TextBox 75"/>
+          <p:cNvPr id="79" name="Rectangle 78"/>
+          <p:cNvSpPr/>
+          <p:nvPr/>
+        </p:nvSpPr>
+        <p:spPr>
+          <a:xfrm>
+            <a:off x="5903823" y="3695138"/>
+            <a:ext cx="329184" cy="675693"/>
+          </a:xfrm>
+          <a:prstGeom prst="rect">
+            <a:avLst/>
+          </a:prstGeom>
+          <a:solidFill>
+            <a:srgbClr val="C9C9CC"/>
+          </a:solidFill>
+          <a:ln>
+            <a:noFill/>
+          </a:ln>
+          <a:effectLst/>
+        </p:spPr>
+        <p:style>
+          <a:lnRef idx="1">
+            <a:schemeClr val="accent1"/>
+          </a:lnRef>
+          <a:fillRef idx="3">
+            <a:schemeClr val="accent1"/>
+          </a:fillRef>
+          <a:effectRef idx="2">
+            <a:schemeClr val="accent1"/>
+          </a:effectRef>
+          <a:fontRef idx="minor">
+            <a:schemeClr val="lt1"/>
+          </a:fontRef>
+        </p:style>
+        <p:txBody>
+          <a:bodyPr rtlCol="0" anchor="ctr"/>
+          <a:lstStyle/>
+          <a:p>
+            <a:pPr algn="ctr"/>
+          </a:p>
+        </p:txBody>
+      </p:sp>
+      <p:sp>
+        <p:nvSpPr>
+          <p:cNvPr id="80" name="TextBox 79"/>
           <p:cNvSpPr txBox="1"/>
           <p:nvPr/>
         </p:nvSpPr>
         <p:spPr>
           <a:xfrm>
-            <a:off x="4008638" y="4361688"/>
-            <a:ext cx="512064" cy="128016"/>
+            <a:off x="5812383" y="3503114"/>
+            <a:ext cx="512064" cy="146304"/>
           </a:xfrm>
           <a:prstGeom prst="rect">
             <a:avLst/>
@@ -6497,7 +7125,7 @@
               </a:lnSpc>
             </a:pPr>
             <a:r>
-              <a:rPr sz="1000" b="0">
+              <a:rPr sz="1000" b="1">
                 <a:solidFill>
                   <a:srgbClr val="8A8A8E"/>
                 </a:solidFill>
@@ -6505,21 +7133,21 @@
                 <a:ea typeface="SamsungOneKorean"/>
                 <a:cs typeface="SamsungOneKorean"/>
               </a:rPr>
-              <a:t>현재</a:t>
-            </a:r>
-          </a:p>
-        </p:txBody>
-      </p:sp>
-      <p:sp>
-        <p:nvSpPr>
-          <p:cNvPr id="77" name="TextBox 76"/>
+              <a:t>54</a:t>
+            </a:r>
+          </a:p>
+        </p:txBody>
+      </p:sp>
+      <p:sp>
+        <p:nvSpPr>
+          <p:cNvPr id="81" name="TextBox 80"/>
           <p:cNvSpPr txBox="1"/>
           <p:nvPr/>
         </p:nvSpPr>
         <p:spPr>
           <a:xfrm>
-            <a:off x="4502414" y="4361688"/>
-            <a:ext cx="512064" cy="128016"/>
+            <a:off x="5794095" y="4416552"/>
+            <a:ext cx="548640" cy="128016"/>
           </a:xfrm>
           <a:prstGeom prst="rect">
             <a:avLst/>
@@ -6546,21 +7174,849 @@
                 <a:ea typeface="SamsungOneKorean"/>
                 <a:cs typeface="SamsungOneKorean"/>
               </a:rPr>
-              <a:t>시나리오</a:t>
-            </a:r>
-          </a:p>
-        </p:txBody>
-      </p:sp>
-      <p:sp>
-        <p:nvSpPr>
-          <p:cNvPr id="78" name="Rectangle 77"/>
+              <a:t>2024</a:t>
+            </a:r>
+          </a:p>
+        </p:txBody>
+      </p:sp>
+      <p:sp>
+        <p:nvSpPr>
+          <p:cNvPr id="82" name="Rectangle 81"/>
           <p:cNvSpPr/>
           <p:nvPr/>
         </p:nvSpPr>
         <p:spPr>
           <a:xfrm>
-            <a:off x="6168999" y="3964838"/>
-            <a:ext cx="365760" cy="351129"/>
+            <a:off x="6434175" y="3570010"/>
+            <a:ext cx="329184" cy="800821"/>
+          </a:xfrm>
+          <a:prstGeom prst="rect">
+            <a:avLst/>
+          </a:prstGeom>
+          <a:solidFill>
+            <a:srgbClr val="C9C9CC"/>
+          </a:solidFill>
+          <a:ln>
+            <a:noFill/>
+          </a:ln>
+          <a:effectLst/>
+        </p:spPr>
+        <p:style>
+          <a:lnRef idx="1">
+            <a:schemeClr val="accent1"/>
+          </a:lnRef>
+          <a:fillRef idx="3">
+            <a:schemeClr val="accent1"/>
+          </a:fillRef>
+          <a:effectRef idx="2">
+            <a:schemeClr val="accent1"/>
+          </a:effectRef>
+          <a:fontRef idx="minor">
+            <a:schemeClr val="lt1"/>
+          </a:fontRef>
+        </p:style>
+        <p:txBody>
+          <a:bodyPr rtlCol="0" anchor="ctr"/>
+          <a:lstStyle/>
+          <a:p>
+            <a:pPr algn="ctr"/>
+          </a:p>
+        </p:txBody>
+      </p:sp>
+      <p:sp>
+        <p:nvSpPr>
+          <p:cNvPr id="83" name="TextBox 82"/>
+          <p:cNvSpPr txBox="1"/>
+          <p:nvPr/>
+        </p:nvSpPr>
+        <p:spPr>
+          <a:xfrm>
+            <a:off x="6342735" y="3377986"/>
+            <a:ext cx="512064" cy="146304"/>
+          </a:xfrm>
+          <a:prstGeom prst="rect">
+            <a:avLst/>
+          </a:prstGeom>
+          <a:noFill/>
+        </p:spPr>
+        <p:txBody>
+          <a:bodyPr wrap="square" anchor="t" lIns="0" rIns="0" tIns="0" bIns="0">
+            <a:spAutoFit/>
+          </a:bodyPr>
+          <a:lstStyle/>
+          <a:p>
+            <a:pPr algn="ctr">
+              <a:lnSpc>
+                <a:spcPct val="100000"/>
+              </a:lnSpc>
+            </a:pPr>
+            <a:r>
+              <a:rPr sz="1000" b="1">
+                <a:solidFill>
+                  <a:srgbClr val="8A8A8E"/>
+                </a:solidFill>
+                <a:latin typeface="SamsungOneKorean"/>
+                <a:ea typeface="SamsungOneKorean"/>
+                <a:cs typeface="SamsungOneKorean"/>
+              </a:rPr>
+              <a:t>64</a:t>
+            </a:r>
+          </a:p>
+        </p:txBody>
+      </p:sp>
+      <p:sp>
+        <p:nvSpPr>
+          <p:cNvPr id="84" name="TextBox 83"/>
+          <p:cNvSpPr txBox="1"/>
+          <p:nvPr/>
+        </p:nvSpPr>
+        <p:spPr>
+          <a:xfrm>
+            <a:off x="6324447" y="4416552"/>
+            <a:ext cx="548640" cy="128016"/>
+          </a:xfrm>
+          <a:prstGeom prst="rect">
+            <a:avLst/>
+          </a:prstGeom>
+          <a:noFill/>
+        </p:spPr>
+        <p:txBody>
+          <a:bodyPr wrap="square" anchor="t" lIns="0" rIns="0" tIns="0" bIns="0">
+            <a:spAutoFit/>
+          </a:bodyPr>
+          <a:lstStyle/>
+          <a:p>
+            <a:pPr algn="ctr">
+              <a:lnSpc>
+                <a:spcPct val="100000"/>
+              </a:lnSpc>
+            </a:pPr>
+            <a:r>
+              <a:rPr sz="1000" b="0">
+                <a:solidFill>
+                  <a:srgbClr val="8A8A8E"/>
+                </a:solidFill>
+                <a:latin typeface="SamsungOneKorean"/>
+                <a:ea typeface="SamsungOneKorean"/>
+                <a:cs typeface="SamsungOneKorean"/>
+              </a:rPr>
+              <a:t>2025</a:t>
+            </a:r>
+          </a:p>
+        </p:txBody>
+      </p:sp>
+      <p:sp>
+        <p:nvSpPr>
+          <p:cNvPr id="85" name="Rectangle 84"/>
+          <p:cNvSpPr/>
+          <p:nvPr/>
+        </p:nvSpPr>
+        <p:spPr>
+          <a:xfrm>
+            <a:off x="6964527" y="3182112"/>
+            <a:ext cx="329184" cy="1188720"/>
+          </a:xfrm>
+          <a:prstGeom prst="rect">
+            <a:avLst/>
+          </a:prstGeom>
+          <a:solidFill>
+            <a:srgbClr val="6B6B70"/>
+          </a:solidFill>
+          <a:ln>
+            <a:noFill/>
+          </a:ln>
+          <a:effectLst/>
+        </p:spPr>
+        <p:style>
+          <a:lnRef idx="1">
+            <a:schemeClr val="accent1"/>
+          </a:lnRef>
+          <a:fillRef idx="3">
+            <a:schemeClr val="accent1"/>
+          </a:fillRef>
+          <a:effectRef idx="2">
+            <a:schemeClr val="accent1"/>
+          </a:effectRef>
+          <a:fontRef idx="minor">
+            <a:schemeClr val="lt1"/>
+          </a:fontRef>
+        </p:style>
+        <p:txBody>
+          <a:bodyPr rtlCol="0" anchor="ctr"/>
+          <a:lstStyle/>
+          <a:p>
+            <a:pPr algn="ctr"/>
+          </a:p>
+        </p:txBody>
+      </p:sp>
+      <p:sp>
+        <p:nvSpPr>
+          <p:cNvPr id="86" name="TextBox 85"/>
+          <p:cNvSpPr txBox="1"/>
+          <p:nvPr/>
+        </p:nvSpPr>
+        <p:spPr>
+          <a:xfrm>
+            <a:off x="6873087" y="2990088"/>
+            <a:ext cx="512064" cy="146304"/>
+          </a:xfrm>
+          <a:prstGeom prst="rect">
+            <a:avLst/>
+          </a:prstGeom>
+          <a:noFill/>
+        </p:spPr>
+        <p:txBody>
+          <a:bodyPr wrap="square" anchor="t" lIns="0" rIns="0" tIns="0" bIns="0">
+            <a:spAutoFit/>
+          </a:bodyPr>
+          <a:lstStyle/>
+          <a:p>
+            <a:pPr algn="ctr">
+              <a:lnSpc>
+                <a:spcPct val="100000"/>
+              </a:lnSpc>
+            </a:pPr>
+            <a:r>
+              <a:rPr sz="1000" b="1">
+                <a:solidFill>
+                  <a:srgbClr val="1A1A1A"/>
+                </a:solidFill>
+                <a:latin typeface="SamsungOneKorean"/>
+                <a:ea typeface="SamsungOneKorean"/>
+                <a:cs typeface="SamsungOneKorean"/>
+              </a:rPr>
+              <a:t>95</a:t>
+            </a:r>
+          </a:p>
+        </p:txBody>
+      </p:sp>
+      <p:sp>
+        <p:nvSpPr>
+          <p:cNvPr id="87" name="TextBox 86"/>
+          <p:cNvSpPr txBox="1"/>
+          <p:nvPr/>
+        </p:nvSpPr>
+        <p:spPr>
+          <a:xfrm>
+            <a:off x="6854799" y="4416552"/>
+            <a:ext cx="548640" cy="128016"/>
+          </a:xfrm>
+          <a:prstGeom prst="rect">
+            <a:avLst/>
+          </a:prstGeom>
+          <a:noFill/>
+        </p:spPr>
+        <p:txBody>
+          <a:bodyPr wrap="square" anchor="t" lIns="0" rIns="0" tIns="0" bIns="0">
+            <a:spAutoFit/>
+          </a:bodyPr>
+          <a:lstStyle/>
+          <a:p>
+            <a:pPr algn="ctr">
+              <a:lnSpc>
+                <a:spcPct val="100000"/>
+              </a:lnSpc>
+            </a:pPr>
+            <a:r>
+              <a:rPr sz="1000" b="0">
+                <a:solidFill>
+                  <a:srgbClr val="8A8A8E"/>
+                </a:solidFill>
+                <a:latin typeface="SamsungOneKorean"/>
+                <a:ea typeface="SamsungOneKorean"/>
+                <a:cs typeface="SamsungOneKorean"/>
+              </a:rPr>
+              <a:t>2026E</a:t>
+            </a:r>
+          </a:p>
+        </p:txBody>
+      </p:sp>
+      <p:sp>
+        <p:nvSpPr>
+          <p:cNvPr id="88" name="TextBox 87"/>
+          <p:cNvSpPr txBox="1"/>
+          <p:nvPr/>
+        </p:nvSpPr>
+        <p:spPr>
+          <a:xfrm>
+            <a:off x="5610026" y="4585716"/>
+            <a:ext cx="1977481" cy="137160"/>
+          </a:xfrm>
+          <a:prstGeom prst="rect">
+            <a:avLst/>
+          </a:prstGeom>
+          <a:noFill/>
+        </p:spPr>
+        <p:txBody>
+          <a:bodyPr wrap="square" anchor="t" lIns="0" rIns="0" tIns="0" bIns="0">
+            <a:spAutoFit/>
+          </a:bodyPr>
+          <a:lstStyle/>
+          <a:p>
+            <a:pPr algn="ctr">
+              <a:lnSpc>
+                <a:spcPct val="100000"/>
+              </a:lnSpc>
+            </a:pPr>
+            <a:r>
+              <a:rPr sz="1000" b="1">
+                <a:solidFill>
+                  <a:srgbClr val="555555"/>
+                </a:solidFill>
+                <a:latin typeface="SamsungOneKorean"/>
+                <a:ea typeface="SamsungOneKorean"/>
+                <a:cs typeface="SamsungOneKorean"/>
+              </a:rPr>
+              <a:t>2026E 투자가 2028~29 캐파로</a:t>
+            </a:r>
+          </a:p>
+        </p:txBody>
+      </p:sp>
+      <p:cxnSp>
+        <p:nvCxnSpPr>
+          <p:cNvPr id="89" name="Connector 88"/>
+          <p:cNvCxnSpPr/>
+          <p:nvPr/>
+        </p:nvCxnSpPr>
+        <p:spPr>
+          <a:xfrm>
+            <a:off x="7788676" y="4370832"/>
+            <a:ext cx="1794601" cy="0"/>
+          </a:xfrm>
+          <a:prstGeom prst="line">
+            <a:avLst/>
+          </a:prstGeom>
+          <a:ln w="11430">
+            <a:solidFill>
+              <a:srgbClr val="D9D9D9"/>
+            </a:solidFill>
+          </a:ln>
+          <a:effectLst/>
+        </p:spPr>
+        <p:style>
+          <a:lnRef idx="2">
+            <a:schemeClr val="accent1"/>
+          </a:lnRef>
+          <a:fillRef idx="0">
+            <a:schemeClr val="accent1"/>
+          </a:fillRef>
+          <a:effectRef idx="1">
+            <a:schemeClr val="accent1"/>
+          </a:effectRef>
+          <a:fontRef idx="minor">
+            <a:schemeClr val="tx1"/>
+          </a:fontRef>
+        </p:style>
+      </p:cxnSp>
+      <p:sp>
+        <p:nvSpPr>
+          <p:cNvPr id="90" name="Rectangle 89"/>
+          <p:cNvSpPr/>
+          <p:nvPr/>
+        </p:nvSpPr>
+        <p:spPr>
+          <a:xfrm>
+            <a:off x="7808153" y="3599688"/>
+            <a:ext cx="310896" cy="771143"/>
+          </a:xfrm>
+          <a:prstGeom prst="rect">
+            <a:avLst/>
+          </a:prstGeom>
+          <a:solidFill>
+            <a:srgbClr val="C9C9CC"/>
+          </a:solidFill>
+          <a:ln>
+            <a:noFill/>
+          </a:ln>
+          <a:effectLst/>
+        </p:spPr>
+        <p:style>
+          <a:lnRef idx="1">
+            <a:schemeClr val="accent1"/>
+          </a:lnRef>
+          <a:fillRef idx="3">
+            <a:schemeClr val="accent1"/>
+          </a:fillRef>
+          <a:effectRef idx="2">
+            <a:schemeClr val="accent1"/>
+          </a:effectRef>
+          <a:fontRef idx="minor">
+            <a:schemeClr val="lt1"/>
+          </a:fontRef>
+        </p:style>
+        <p:txBody>
+          <a:bodyPr rtlCol="0" anchor="ctr"/>
+          <a:lstStyle/>
+          <a:p>
+            <a:pPr algn="ctr"/>
+          </a:p>
+        </p:txBody>
+      </p:sp>
+      <p:sp>
+        <p:nvSpPr>
+          <p:cNvPr id="91" name="TextBox 90"/>
+          <p:cNvSpPr txBox="1"/>
+          <p:nvPr/>
+        </p:nvSpPr>
+        <p:spPr>
+          <a:xfrm>
+            <a:off x="7698425" y="3407664"/>
+            <a:ext cx="530352" cy="146304"/>
+          </a:xfrm>
+          <a:prstGeom prst="rect">
+            <a:avLst/>
+          </a:prstGeom>
+          <a:noFill/>
+        </p:spPr>
+        <p:txBody>
+          <a:bodyPr wrap="square" anchor="t" lIns="0" rIns="0" tIns="0" bIns="0">
+            <a:spAutoFit/>
+          </a:bodyPr>
+          <a:lstStyle/>
+          <a:p>
+            <a:pPr algn="ctr">
+              <a:lnSpc>
+                <a:spcPct val="100000"/>
+              </a:lnSpc>
+            </a:pPr>
+            <a:r>
+              <a:rPr sz="1000" b="1">
+                <a:solidFill>
+                  <a:srgbClr val="8A8A8E"/>
+                </a:solidFill>
+                <a:latin typeface="SamsungOneKorean"/>
+                <a:ea typeface="SamsungOneKorean"/>
+                <a:cs typeface="SamsungOneKorean"/>
+              </a:rPr>
+              <a:t>11</a:t>
+            </a:r>
+          </a:p>
+        </p:txBody>
+      </p:sp>
+      <p:sp>
+        <p:nvSpPr>
+          <p:cNvPr id="92" name="Rectangle 91"/>
+          <p:cNvSpPr/>
+          <p:nvPr/>
+        </p:nvSpPr>
+        <p:spPr>
+          <a:xfrm>
+            <a:off x="8210489" y="3319272"/>
+            <a:ext cx="310896" cy="1051560"/>
+          </a:xfrm>
+          <a:prstGeom prst="rect">
+            <a:avLst/>
+          </a:prstGeom>
+          <a:solidFill>
+            <a:srgbClr val="6B6B70"/>
+          </a:solidFill>
+          <a:ln>
+            <a:noFill/>
+          </a:ln>
+          <a:effectLst/>
+        </p:spPr>
+        <p:style>
+          <a:lnRef idx="1">
+            <a:schemeClr val="accent1"/>
+          </a:lnRef>
+          <a:fillRef idx="3">
+            <a:schemeClr val="accent1"/>
+          </a:fillRef>
+          <a:effectRef idx="2">
+            <a:schemeClr val="accent1"/>
+          </a:effectRef>
+          <a:fontRef idx="minor">
+            <a:schemeClr val="lt1"/>
+          </a:fontRef>
+        </p:style>
+        <p:txBody>
+          <a:bodyPr rtlCol="0" anchor="ctr"/>
+          <a:lstStyle/>
+          <a:p>
+            <a:pPr algn="ctr"/>
+          </a:p>
+        </p:txBody>
+      </p:sp>
+      <p:sp>
+        <p:nvSpPr>
+          <p:cNvPr id="93" name="TextBox 92"/>
+          <p:cNvSpPr txBox="1"/>
+          <p:nvPr/>
+        </p:nvSpPr>
+        <p:spPr>
+          <a:xfrm>
+            <a:off x="8100761" y="3127248"/>
+            <a:ext cx="530352" cy="146304"/>
+          </a:xfrm>
+          <a:prstGeom prst="rect">
+            <a:avLst/>
+          </a:prstGeom>
+          <a:noFill/>
+        </p:spPr>
+        <p:txBody>
+          <a:bodyPr wrap="square" anchor="t" lIns="0" rIns="0" tIns="0" bIns="0">
+            <a:spAutoFit/>
+          </a:bodyPr>
+          <a:lstStyle/>
+          <a:p>
+            <a:pPr algn="ctr">
+              <a:lnSpc>
+                <a:spcPct val="100000"/>
+              </a:lnSpc>
+            </a:pPr>
+            <a:r>
+              <a:rPr sz="1000" b="1">
+                <a:solidFill>
+                  <a:srgbClr val="1A1A1A"/>
+                </a:solidFill>
+                <a:latin typeface="SamsungOneKorean"/>
+                <a:ea typeface="SamsungOneKorean"/>
+                <a:cs typeface="SamsungOneKorean"/>
+              </a:rPr>
+              <a:t>15E</a:t>
+            </a:r>
+          </a:p>
+        </p:txBody>
+      </p:sp>
+      <p:sp>
+        <p:nvSpPr>
+          <p:cNvPr id="94" name="TextBox 93"/>
+          <p:cNvSpPr txBox="1"/>
+          <p:nvPr/>
+        </p:nvSpPr>
+        <p:spPr>
+          <a:xfrm>
+            <a:off x="7753289" y="4416552"/>
+            <a:ext cx="822960" cy="128016"/>
+          </a:xfrm>
+          <a:prstGeom prst="rect">
+            <a:avLst/>
+          </a:prstGeom>
+          <a:noFill/>
+        </p:spPr>
+        <p:txBody>
+          <a:bodyPr wrap="square" anchor="t" lIns="0" rIns="0" tIns="0" bIns="0">
+            <a:spAutoFit/>
+          </a:bodyPr>
+          <a:lstStyle/>
+          <a:p>
+            <a:pPr algn="ctr">
+              <a:lnSpc>
+                <a:spcPct val="100000"/>
+              </a:lnSpc>
+            </a:pPr>
+            <a:r>
+              <a:rPr sz="1000" b="0">
+                <a:solidFill>
+                  <a:srgbClr val="8A8A8E"/>
+                </a:solidFill>
+                <a:latin typeface="SamsungOneKorean"/>
+                <a:ea typeface="SamsungOneKorean"/>
+                <a:cs typeface="SamsungOneKorean"/>
+              </a:rPr>
+              <a:t>캐파</a:t>
+            </a:r>
+          </a:p>
+        </p:txBody>
+      </p:sp>
+      <p:sp>
+        <p:nvSpPr>
+          <p:cNvPr id="95" name="Rectangle 94"/>
+          <p:cNvSpPr/>
+          <p:nvPr/>
+        </p:nvSpPr>
+        <p:spPr>
+          <a:xfrm>
+            <a:off x="8850569" y="3810000"/>
+            <a:ext cx="310896" cy="560832"/>
+          </a:xfrm>
+          <a:prstGeom prst="rect">
+            <a:avLst/>
+          </a:prstGeom>
+          <a:solidFill>
+            <a:srgbClr val="C9C9CC"/>
+          </a:solidFill>
+          <a:ln>
+            <a:noFill/>
+          </a:ln>
+          <a:effectLst/>
+        </p:spPr>
+        <p:style>
+          <a:lnRef idx="1">
+            <a:schemeClr val="accent1"/>
+          </a:lnRef>
+          <a:fillRef idx="3">
+            <a:schemeClr val="accent1"/>
+          </a:fillRef>
+          <a:effectRef idx="2">
+            <a:schemeClr val="accent1"/>
+          </a:effectRef>
+          <a:fontRef idx="minor">
+            <a:schemeClr val="lt1"/>
+          </a:fontRef>
+        </p:style>
+        <p:txBody>
+          <a:bodyPr rtlCol="0" anchor="ctr"/>
+          <a:lstStyle/>
+          <a:p>
+            <a:pPr algn="ctr"/>
+          </a:p>
+        </p:txBody>
+      </p:sp>
+      <p:sp>
+        <p:nvSpPr>
+          <p:cNvPr id="96" name="TextBox 95"/>
+          <p:cNvSpPr txBox="1"/>
+          <p:nvPr/>
+        </p:nvSpPr>
+        <p:spPr>
+          <a:xfrm>
+            <a:off x="8740841" y="3617976"/>
+            <a:ext cx="530352" cy="146304"/>
+          </a:xfrm>
+          <a:prstGeom prst="rect">
+            <a:avLst/>
+          </a:prstGeom>
+          <a:noFill/>
+        </p:spPr>
+        <p:txBody>
+          <a:bodyPr wrap="square" anchor="t" lIns="0" rIns="0" tIns="0" bIns="0">
+            <a:spAutoFit/>
+          </a:bodyPr>
+          <a:lstStyle/>
+          <a:p>
+            <a:pPr algn="ctr">
+              <a:lnSpc>
+                <a:spcPct val="100000"/>
+              </a:lnSpc>
+            </a:pPr>
+            <a:r>
+              <a:rPr sz="1000" b="1">
+                <a:solidFill>
+                  <a:srgbClr val="8A8A8E"/>
+                </a:solidFill>
+                <a:latin typeface="SamsungOneKorean"/>
+                <a:ea typeface="SamsungOneKorean"/>
+                <a:cs typeface="SamsungOneKorean"/>
+              </a:rPr>
+              <a:t>8</a:t>
+            </a:r>
+          </a:p>
+        </p:txBody>
+      </p:sp>
+      <p:sp>
+        <p:nvSpPr>
+          <p:cNvPr id="97" name="Rectangle 96"/>
+          <p:cNvSpPr/>
+          <p:nvPr/>
+        </p:nvSpPr>
+        <p:spPr>
+          <a:xfrm>
+            <a:off x="9252905" y="3389376"/>
+            <a:ext cx="310896" cy="981455"/>
+          </a:xfrm>
+          <a:prstGeom prst="rect">
+            <a:avLst/>
+          </a:prstGeom>
+          <a:solidFill>
+            <a:srgbClr val="6B6B70"/>
+          </a:solidFill>
+          <a:ln>
+            <a:noFill/>
+          </a:ln>
+          <a:effectLst/>
+        </p:spPr>
+        <p:style>
+          <a:lnRef idx="1">
+            <a:schemeClr val="accent1"/>
+          </a:lnRef>
+          <a:fillRef idx="3">
+            <a:schemeClr val="accent1"/>
+          </a:fillRef>
+          <a:effectRef idx="2">
+            <a:schemeClr val="accent1"/>
+          </a:effectRef>
+          <a:fontRef idx="minor">
+            <a:schemeClr val="lt1"/>
+          </a:fontRef>
+        </p:style>
+        <p:txBody>
+          <a:bodyPr rtlCol="0" anchor="ctr"/>
+          <a:lstStyle/>
+          <a:p>
+            <a:pPr algn="ctr"/>
+          </a:p>
+        </p:txBody>
+      </p:sp>
+      <p:sp>
+        <p:nvSpPr>
+          <p:cNvPr id="98" name="TextBox 97"/>
+          <p:cNvSpPr txBox="1"/>
+          <p:nvPr/>
+        </p:nvSpPr>
+        <p:spPr>
+          <a:xfrm>
+            <a:off x="9143177" y="3197352"/>
+            <a:ext cx="530352" cy="146304"/>
+          </a:xfrm>
+          <a:prstGeom prst="rect">
+            <a:avLst/>
+          </a:prstGeom>
+          <a:noFill/>
+        </p:spPr>
+        <p:txBody>
+          <a:bodyPr wrap="square" anchor="t" lIns="0" rIns="0" tIns="0" bIns="0">
+            <a:spAutoFit/>
+          </a:bodyPr>
+          <a:lstStyle/>
+          <a:p>
+            <a:pPr algn="ctr">
+              <a:lnSpc>
+                <a:spcPct val="100000"/>
+              </a:lnSpc>
+            </a:pPr>
+            <a:r>
+              <a:rPr sz="1000" b="1">
+                <a:solidFill>
+                  <a:srgbClr val="1A1A1A"/>
+                </a:solidFill>
+                <a:latin typeface="SamsungOneKorean"/>
+                <a:ea typeface="SamsungOneKorean"/>
+                <a:cs typeface="SamsungOneKorean"/>
+              </a:rPr>
+              <a:t>14E</a:t>
+            </a:r>
+          </a:p>
+        </p:txBody>
+      </p:sp>
+      <p:sp>
+        <p:nvSpPr>
+          <p:cNvPr id="99" name="TextBox 98"/>
+          <p:cNvSpPr txBox="1"/>
+          <p:nvPr/>
+        </p:nvSpPr>
+        <p:spPr>
+          <a:xfrm>
+            <a:off x="8795705" y="4416552"/>
+            <a:ext cx="822960" cy="128016"/>
+          </a:xfrm>
+          <a:prstGeom prst="rect">
+            <a:avLst/>
+          </a:prstGeom>
+          <a:noFill/>
+        </p:spPr>
+        <p:txBody>
+          <a:bodyPr wrap="square" anchor="t" lIns="0" rIns="0" tIns="0" bIns="0">
+            <a:spAutoFit/>
+          </a:bodyPr>
+          <a:lstStyle/>
+          <a:p>
+            <a:pPr algn="ctr">
+              <a:lnSpc>
+                <a:spcPct val="100000"/>
+              </a:lnSpc>
+            </a:pPr>
+            <a:r>
+              <a:rPr sz="1000" b="0">
+                <a:solidFill>
+                  <a:srgbClr val="8A8A8E"/>
+                </a:solidFill>
+                <a:latin typeface="SamsungOneKorean"/>
+                <a:ea typeface="SamsungOneKorean"/>
+                <a:cs typeface="SamsungOneKorean"/>
+              </a:rPr>
+              <a:t>매출</a:t>
+            </a:r>
+          </a:p>
+        </p:txBody>
+      </p:sp>
+      <p:sp>
+        <p:nvSpPr>
+          <p:cNvPr id="100" name="TextBox 99"/>
+          <p:cNvSpPr txBox="1"/>
+          <p:nvPr/>
+        </p:nvSpPr>
+        <p:spPr>
+          <a:xfrm>
+            <a:off x="7697236" y="4585716"/>
+            <a:ext cx="1977481" cy="137160"/>
+          </a:xfrm>
+          <a:prstGeom prst="rect">
+            <a:avLst/>
+          </a:prstGeom>
+          <a:noFill/>
+        </p:spPr>
+        <p:txBody>
+          <a:bodyPr wrap="square" anchor="t" lIns="0" rIns="0" tIns="0" bIns="0">
+            <a:spAutoFit/>
+          </a:bodyPr>
+          <a:lstStyle/>
+          <a:p>
+            <a:pPr algn="ctr">
+              <a:lnSpc>
+                <a:spcPct val="100000"/>
+              </a:lnSpc>
+            </a:pPr>
+            <a:r>
+              <a:rPr sz="1000" b="1">
+                <a:solidFill>
+                  <a:srgbClr val="555555"/>
+                </a:solidFill>
+                <a:latin typeface="SamsungOneKorean"/>
+                <a:ea typeface="SamsungOneKorean"/>
+                <a:cs typeface="SamsungOneKorean"/>
+              </a:rPr>
+              <a:t>하단 점유의 구조적 상승</a:t>
+            </a:r>
+          </a:p>
+        </p:txBody>
+      </p:sp>
+      <p:cxnSp>
+        <p:nvCxnSpPr>
+          <p:cNvPr id="101" name="Connector 100"/>
+          <p:cNvCxnSpPr/>
+          <p:nvPr/>
+        </p:nvCxnSpPr>
+        <p:spPr>
+          <a:xfrm>
+            <a:off x="9875885" y="4370832"/>
+            <a:ext cx="1794602" cy="0"/>
+          </a:xfrm>
+          <a:prstGeom prst="line">
+            <a:avLst/>
+          </a:prstGeom>
+          <a:ln w="11430">
+            <a:solidFill>
+              <a:srgbClr val="D9D9D9"/>
+            </a:solidFill>
+          </a:ln>
+          <a:effectLst/>
+        </p:spPr>
+        <p:style>
+          <a:lnRef idx="2">
+            <a:schemeClr val="accent1"/>
+          </a:lnRef>
+          <a:fillRef idx="0">
+            <a:schemeClr val="accent1"/>
+          </a:fillRef>
+          <a:effectRef idx="1">
+            <a:schemeClr val="accent1"/>
+          </a:effectRef>
+          <a:fontRef idx="minor">
+            <a:schemeClr val="tx1"/>
+          </a:fontRef>
+        </p:style>
+      </p:cxnSp>
+      <p:sp>
+        <p:nvSpPr>
+          <p:cNvPr id="102" name="Rectangle 101"/>
+          <p:cNvSpPr/>
+          <p:nvPr/>
+        </p:nvSpPr>
+        <p:spPr>
+          <a:xfrm>
+            <a:off x="10343418" y="4206971"/>
+            <a:ext cx="365760" cy="163860"/>
           </a:xfrm>
           <a:prstGeom prst="rect">
             <a:avLst/>
@@ -6597,20 +8053,20 @@
       </p:sp>
       <p:sp>
         <p:nvSpPr>
-          <p:cNvPr id="79" name="Rectangle 78"/>
+          <p:cNvPr id="103" name="Rectangle 102"/>
           <p:cNvSpPr/>
           <p:nvPr/>
         </p:nvSpPr>
         <p:spPr>
           <a:xfrm>
-            <a:off x="6168999" y="3672230"/>
-            <a:ext cx="365760" cy="292608"/>
+            <a:off x="10343418" y="3551529"/>
+            <a:ext cx="365760" cy="655441"/>
           </a:xfrm>
           <a:prstGeom prst="rect">
             <a:avLst/>
           </a:prstGeom>
           <a:solidFill>
-            <a:srgbClr val="D5DBF0"/>
+            <a:srgbClr val="D8DEF1"/>
           </a:solidFill>
           <a:ln>
             <a:noFill/>
@@ -6641,20 +8097,20 @@
       </p:sp>
       <p:sp>
         <p:nvSpPr>
-          <p:cNvPr id="80" name="Rectangle 79"/>
+          <p:cNvPr id="104" name="Rectangle 103"/>
           <p:cNvSpPr/>
           <p:nvPr/>
         </p:nvSpPr>
         <p:spPr>
           <a:xfrm>
-            <a:off x="6168999" y="3379622"/>
-            <a:ext cx="365760" cy="292608"/>
+            <a:off x="10343418" y="3200400"/>
+            <a:ext cx="365760" cy="351129"/>
           </a:xfrm>
           <a:prstGeom prst="rect">
             <a:avLst/>
           </a:prstGeom>
           <a:solidFill>
-            <a:srgbClr val="E3E7F6"/>
+            <a:srgbClr val="EAEDF8"/>
           </a:solidFill>
           <a:ln>
             <a:noFill/>
@@ -6685,57 +8141,13 @@
       </p:sp>
       <p:sp>
         <p:nvSpPr>
-          <p:cNvPr id="81" name="Rectangle 80"/>
-          <p:cNvSpPr/>
-          <p:nvPr/>
-        </p:nvSpPr>
-        <p:spPr>
-          <a:xfrm>
-            <a:off x="6168999" y="3145535"/>
-            <a:ext cx="365760" cy="234086"/>
-          </a:xfrm>
-          <a:prstGeom prst="rect">
-            <a:avLst/>
-          </a:prstGeom>
-          <a:solidFill>
-            <a:srgbClr val="EFF1FA"/>
-          </a:solidFill>
-          <a:ln>
-            <a:noFill/>
-          </a:ln>
-          <a:effectLst/>
-        </p:spPr>
-        <p:style>
-          <a:lnRef idx="1">
-            <a:schemeClr val="accent1"/>
-          </a:lnRef>
-          <a:fillRef idx="3">
-            <a:schemeClr val="accent1"/>
-          </a:fillRef>
-          <a:effectRef idx="2">
-            <a:schemeClr val="accent1"/>
-          </a:effectRef>
-          <a:fontRef idx="minor">
-            <a:schemeClr val="lt1"/>
-          </a:fontRef>
-        </p:style>
-        <p:txBody>
-          <a:bodyPr rtlCol="0" anchor="ctr"/>
-          <a:lstStyle/>
-          <a:p>
-            <a:pPr algn="ctr"/>
-          </a:p>
-        </p:txBody>
-      </p:sp>
-      <p:sp>
-        <p:nvSpPr>
-          <p:cNvPr id="82" name="TextBox 81"/>
+          <p:cNvPr id="105" name="TextBox 104"/>
           <p:cNvSpPr txBox="1"/>
           <p:nvPr/>
         </p:nvSpPr>
         <p:spPr>
           <a:xfrm>
-            <a:off x="6077559" y="2944367"/>
+            <a:off x="10251978" y="3008376"/>
             <a:ext cx="548640" cy="146304"/>
           </a:xfrm>
           <a:prstGeom prst="rect">
@@ -6770,14 +8182,14 @@
       </p:sp>
       <p:sp>
         <p:nvSpPr>
-          <p:cNvPr id="83" name="Rectangle 82"/>
+          <p:cNvPr id="106" name="Rectangle 105"/>
           <p:cNvSpPr/>
           <p:nvPr/>
         </p:nvSpPr>
         <p:spPr>
           <a:xfrm>
-            <a:off x="6662775" y="3964838"/>
-            <a:ext cx="365760" cy="351129"/>
+            <a:off x="10837194" y="4300606"/>
+            <a:ext cx="365760" cy="70225"/>
           </a:xfrm>
           <a:prstGeom prst="rect">
             <a:avLst/>
@@ -6814,20 +8226,20 @@
       </p:sp>
       <p:sp>
         <p:nvSpPr>
-          <p:cNvPr id="84" name="Rectangle 83"/>
+          <p:cNvPr id="107" name="Rectangle 106"/>
           <p:cNvSpPr/>
           <p:nvPr/>
         </p:nvSpPr>
         <p:spPr>
           <a:xfrm>
-            <a:off x="6662775" y="3672230"/>
-            <a:ext cx="365760" cy="292608"/>
+            <a:off x="10837194" y="3715390"/>
+            <a:ext cx="365760" cy="585216"/>
           </a:xfrm>
           <a:prstGeom prst="rect">
             <a:avLst/>
           </a:prstGeom>
           <a:solidFill>
-            <a:srgbClr val="4E68C8"/>
+            <a:srgbClr val="5A73CC"/>
           </a:solidFill>
           <a:ln>
             <a:noFill/>
@@ -6858,20 +8270,20 @@
       </p:sp>
       <p:sp>
         <p:nvSpPr>
-          <p:cNvPr id="85" name="Rectangle 84"/>
+          <p:cNvPr id="108" name="Rectangle 107"/>
           <p:cNvSpPr/>
           <p:nvPr/>
         </p:nvSpPr>
         <p:spPr>
           <a:xfrm>
-            <a:off x="6662775" y="3379622"/>
-            <a:ext cx="365760" cy="292608"/>
+            <a:off x="10837194" y="3305738"/>
+            <a:ext cx="365760" cy="409651"/>
           </a:xfrm>
           <a:prstGeom prst="rect">
             <a:avLst/>
           </a:prstGeom>
           <a:solidFill>
-            <a:srgbClr val="93A2DC"/>
+            <a:srgbClr val="ADB9E4"/>
           </a:solidFill>
           <a:ln>
             <a:noFill/>
@@ -6902,1244 +8314,14 @@
       </p:sp>
       <p:sp>
         <p:nvSpPr>
-          <p:cNvPr id="86" name="Rectangle 85"/>
-          <p:cNvSpPr/>
-          <p:nvPr/>
-        </p:nvSpPr>
-        <p:spPr>
-          <a:xfrm>
-            <a:off x="6662775" y="3145535"/>
-            <a:ext cx="365760" cy="234086"/>
-          </a:xfrm>
-          <a:prstGeom prst="rect">
-            <a:avLst/>
-          </a:prstGeom>
-          <a:solidFill>
-            <a:srgbClr val="C9D1EE"/>
-          </a:solidFill>
-          <a:ln>
-            <a:noFill/>
-          </a:ln>
-          <a:effectLst/>
-        </p:spPr>
-        <p:style>
-          <a:lnRef idx="1">
-            <a:schemeClr val="accent1"/>
-          </a:lnRef>
-          <a:fillRef idx="3">
-            <a:schemeClr val="accent1"/>
-          </a:fillRef>
-          <a:effectRef idx="2">
-            <a:schemeClr val="accent1"/>
-          </a:effectRef>
-          <a:fontRef idx="minor">
-            <a:schemeClr val="lt1"/>
-          </a:fontRef>
-        </p:style>
-        <p:txBody>
-          <a:bodyPr rtlCol="0" anchor="ctr"/>
-          <a:lstStyle/>
-          <a:p>
-            <a:pPr algn="ctr"/>
-          </a:p>
-        </p:txBody>
-      </p:sp>
-      <p:sp>
-        <p:nvSpPr>
-          <p:cNvPr id="87" name="TextBox 86"/>
-          <p:cNvSpPr txBox="1"/>
-          <p:nvPr/>
-        </p:nvSpPr>
-        <p:spPr>
-          <a:xfrm>
-            <a:off x="6571335" y="2944367"/>
-            <a:ext cx="548640" cy="146304"/>
-          </a:xfrm>
-          <a:prstGeom prst="rect">
-            <a:avLst/>
-          </a:prstGeom>
-          <a:noFill/>
-        </p:spPr>
-        <p:txBody>
-          <a:bodyPr wrap="square" anchor="t" lIns="0" rIns="0" tIns="0" bIns="0">
-            <a:spAutoFit/>
-          </a:bodyPr>
-          <a:lstStyle/>
-          <a:p>
-            <a:pPr algn="ctr">
-              <a:lnSpc>
-                <a:spcPct val="100000"/>
-              </a:lnSpc>
-            </a:pPr>
-            <a:r>
-              <a:rPr sz="1050" b="1">
-                <a:solidFill>
-                  <a:srgbClr val="1428A0"/>
-                </a:solidFill>
-                <a:latin typeface="SamsungOneKorean"/>
-                <a:ea typeface="SamsungOneKorean"/>
-                <a:cs typeface="SamsungOneKorean"/>
-              </a:rPr>
-              <a:t>100</a:t>
-            </a:r>
-          </a:p>
-        </p:txBody>
-      </p:sp>
-      <p:cxnSp>
-        <p:nvCxnSpPr>
-          <p:cNvPr id="88" name="Connector 87"/>
-          <p:cNvCxnSpPr/>
-          <p:nvPr/>
-        </p:nvCxnSpPr>
-        <p:spPr>
-          <a:xfrm>
-            <a:off x="5701466" y="4315968"/>
-            <a:ext cx="1794602" cy="0"/>
-          </a:xfrm>
-          <a:prstGeom prst="line">
-            <a:avLst/>
-          </a:prstGeom>
-          <a:ln w="11430">
-            <a:solidFill>
-              <a:srgbClr val="D9D9D9"/>
-            </a:solidFill>
-          </a:ln>
-          <a:effectLst/>
-        </p:spPr>
-        <p:style>
-          <a:lnRef idx="2">
-            <a:schemeClr val="accent1"/>
-          </a:lnRef>
-          <a:fillRef idx="0">
-            <a:schemeClr val="accent1"/>
-          </a:fillRef>
-          <a:effectRef idx="1">
-            <a:schemeClr val="accent1"/>
-          </a:effectRef>
-          <a:fontRef idx="minor">
-            <a:schemeClr val="tx1"/>
-          </a:fontRef>
-        </p:style>
-      </p:cxnSp>
-      <p:sp>
-        <p:nvSpPr>
-          <p:cNvPr id="89" name="TextBox 88"/>
-          <p:cNvSpPr txBox="1"/>
-          <p:nvPr/>
-        </p:nvSpPr>
-        <p:spPr>
-          <a:xfrm>
-            <a:off x="6095847" y="4361688"/>
-            <a:ext cx="512064" cy="128016"/>
-          </a:xfrm>
-          <a:prstGeom prst="rect">
-            <a:avLst/>
-          </a:prstGeom>
-          <a:noFill/>
-        </p:spPr>
-        <p:txBody>
-          <a:bodyPr wrap="square" anchor="t" lIns="0" rIns="0" tIns="0" bIns="0">
-            <a:spAutoFit/>
-          </a:bodyPr>
-          <a:lstStyle/>
-          <a:p>
-            <a:pPr algn="ctr">
-              <a:lnSpc>
-                <a:spcPct val="100000"/>
-              </a:lnSpc>
-            </a:pPr>
-            <a:r>
-              <a:rPr sz="1000" b="0">
-                <a:solidFill>
-                  <a:srgbClr val="8A8A8E"/>
-                </a:solidFill>
-                <a:latin typeface="SamsungOneKorean"/>
-                <a:ea typeface="SamsungOneKorean"/>
-                <a:cs typeface="SamsungOneKorean"/>
-              </a:rPr>
-              <a:t>현재</a:t>
-            </a:r>
-          </a:p>
-        </p:txBody>
-      </p:sp>
-      <p:sp>
-        <p:nvSpPr>
-          <p:cNvPr id="90" name="TextBox 89"/>
-          <p:cNvSpPr txBox="1"/>
-          <p:nvPr/>
-        </p:nvSpPr>
-        <p:spPr>
-          <a:xfrm>
-            <a:off x="6589623" y="4361688"/>
-            <a:ext cx="512064" cy="128016"/>
-          </a:xfrm>
-          <a:prstGeom prst="rect">
-            <a:avLst/>
-          </a:prstGeom>
-          <a:noFill/>
-        </p:spPr>
-        <p:txBody>
-          <a:bodyPr wrap="square" anchor="t" lIns="0" rIns="0" tIns="0" bIns="0">
-            <a:spAutoFit/>
-          </a:bodyPr>
-          <a:lstStyle/>
-          <a:p>
-            <a:pPr algn="ctr">
-              <a:lnSpc>
-                <a:spcPct val="100000"/>
-              </a:lnSpc>
-            </a:pPr>
-            <a:r>
-              <a:rPr sz="1000" b="0">
-                <a:solidFill>
-                  <a:srgbClr val="8A8A8E"/>
-                </a:solidFill>
-                <a:latin typeface="SamsungOneKorean"/>
-                <a:ea typeface="SamsungOneKorean"/>
-                <a:cs typeface="SamsungOneKorean"/>
-              </a:rPr>
-              <a:t>시나리오</a:t>
-            </a:r>
-          </a:p>
-        </p:txBody>
-      </p:sp>
-      <p:sp>
-        <p:nvSpPr>
-          <p:cNvPr id="91" name="TextBox 90"/>
-          <p:cNvSpPr txBox="1"/>
-          <p:nvPr/>
-        </p:nvSpPr>
-        <p:spPr>
-          <a:xfrm>
-            <a:off x="5610026" y="4530852"/>
-            <a:ext cx="1977481" cy="137160"/>
-          </a:xfrm>
-          <a:prstGeom prst="rect">
-            <a:avLst/>
-          </a:prstGeom>
-          <a:noFill/>
-        </p:spPr>
-        <p:txBody>
-          <a:bodyPr wrap="square" anchor="t" lIns="0" rIns="0" tIns="0" bIns="0">
-            <a:spAutoFit/>
-          </a:bodyPr>
-          <a:lstStyle/>
-          <a:p>
-            <a:pPr algn="ctr">
-              <a:lnSpc>
-                <a:spcPct val="100000"/>
-              </a:lnSpc>
-            </a:pPr>
-            <a:r>
-              <a:rPr sz="1000" b="1">
-                <a:solidFill>
-                  <a:srgbClr val="555555"/>
-                </a:solidFill>
-                <a:latin typeface="SamsungOneKorean"/>
-                <a:ea typeface="SamsungOneKorean"/>
-                <a:cs typeface="SamsungOneKorean"/>
-              </a:rPr>
-              <a:t>수요 유지 · 공급이 초과</a:t>
-            </a:r>
-          </a:p>
-        </p:txBody>
-      </p:sp>
-      <p:sp>
-        <p:nvSpPr>
-          <p:cNvPr id="92" name="Rectangle 91"/>
-          <p:cNvSpPr/>
-          <p:nvPr/>
-        </p:nvSpPr>
-        <p:spPr>
-          <a:xfrm>
-            <a:off x="8256209" y="3964838"/>
-            <a:ext cx="365760" cy="351129"/>
-          </a:xfrm>
-          <a:prstGeom prst="rect">
-            <a:avLst/>
-          </a:prstGeom>
-          <a:solidFill>
-            <a:srgbClr val="C4CAE7"/>
-          </a:solidFill>
-          <a:ln>
-            <a:noFill/>
-          </a:ln>
-          <a:effectLst/>
-        </p:spPr>
-        <p:style>
-          <a:lnRef idx="1">
-            <a:schemeClr val="accent1"/>
-          </a:lnRef>
-          <a:fillRef idx="3">
-            <a:schemeClr val="accent1"/>
-          </a:fillRef>
-          <a:effectRef idx="2">
-            <a:schemeClr val="accent1"/>
-          </a:effectRef>
-          <a:fontRef idx="minor">
-            <a:schemeClr val="lt1"/>
-          </a:fontRef>
-        </p:style>
-        <p:txBody>
-          <a:bodyPr rtlCol="0" anchor="ctr"/>
-          <a:lstStyle/>
-          <a:p>
-            <a:pPr algn="ctr"/>
-          </a:p>
-        </p:txBody>
-      </p:sp>
-      <p:sp>
-        <p:nvSpPr>
-          <p:cNvPr id="93" name="Rectangle 92"/>
-          <p:cNvSpPr/>
-          <p:nvPr/>
-        </p:nvSpPr>
-        <p:spPr>
-          <a:xfrm>
-            <a:off x="8256209" y="3672230"/>
-            <a:ext cx="365760" cy="292608"/>
-          </a:xfrm>
-          <a:prstGeom prst="rect">
-            <a:avLst/>
-          </a:prstGeom>
-          <a:solidFill>
-            <a:srgbClr val="D5DBF0"/>
-          </a:solidFill>
-          <a:ln>
-            <a:noFill/>
-          </a:ln>
-          <a:effectLst/>
-        </p:spPr>
-        <p:style>
-          <a:lnRef idx="1">
-            <a:schemeClr val="accent1"/>
-          </a:lnRef>
-          <a:fillRef idx="3">
-            <a:schemeClr val="accent1"/>
-          </a:fillRef>
-          <a:effectRef idx="2">
-            <a:schemeClr val="accent1"/>
-          </a:effectRef>
-          <a:fontRef idx="minor">
-            <a:schemeClr val="lt1"/>
-          </a:fontRef>
-        </p:style>
-        <p:txBody>
-          <a:bodyPr rtlCol="0" anchor="ctr"/>
-          <a:lstStyle/>
-          <a:p>
-            <a:pPr algn="ctr"/>
-          </a:p>
-        </p:txBody>
-      </p:sp>
-      <p:sp>
-        <p:nvSpPr>
-          <p:cNvPr id="94" name="Rectangle 93"/>
-          <p:cNvSpPr/>
-          <p:nvPr/>
-        </p:nvSpPr>
-        <p:spPr>
-          <a:xfrm>
-            <a:off x="8256209" y="3379622"/>
-            <a:ext cx="365760" cy="292608"/>
-          </a:xfrm>
-          <a:prstGeom prst="rect">
-            <a:avLst/>
-          </a:prstGeom>
-          <a:solidFill>
-            <a:srgbClr val="E3E7F6"/>
-          </a:solidFill>
-          <a:ln>
-            <a:noFill/>
-          </a:ln>
-          <a:effectLst/>
-        </p:spPr>
-        <p:style>
-          <a:lnRef idx="1">
-            <a:schemeClr val="accent1"/>
-          </a:lnRef>
-          <a:fillRef idx="3">
-            <a:schemeClr val="accent1"/>
-          </a:fillRef>
-          <a:effectRef idx="2">
-            <a:schemeClr val="accent1"/>
-          </a:effectRef>
-          <a:fontRef idx="minor">
-            <a:schemeClr val="lt1"/>
-          </a:fontRef>
-        </p:style>
-        <p:txBody>
-          <a:bodyPr rtlCol="0" anchor="ctr"/>
-          <a:lstStyle/>
-          <a:p>
-            <a:pPr algn="ctr"/>
-          </a:p>
-        </p:txBody>
-      </p:sp>
-      <p:sp>
-        <p:nvSpPr>
-          <p:cNvPr id="95" name="Rectangle 94"/>
-          <p:cNvSpPr/>
-          <p:nvPr/>
-        </p:nvSpPr>
-        <p:spPr>
-          <a:xfrm>
-            <a:off x="8256209" y="3145535"/>
-            <a:ext cx="365760" cy="234086"/>
-          </a:xfrm>
-          <a:prstGeom prst="rect">
-            <a:avLst/>
-          </a:prstGeom>
-          <a:solidFill>
-            <a:srgbClr val="EFF1FA"/>
-          </a:solidFill>
-          <a:ln>
-            <a:noFill/>
-          </a:ln>
-          <a:effectLst/>
-        </p:spPr>
-        <p:style>
-          <a:lnRef idx="1">
-            <a:schemeClr val="accent1"/>
-          </a:lnRef>
-          <a:fillRef idx="3">
-            <a:schemeClr val="accent1"/>
-          </a:fillRef>
-          <a:effectRef idx="2">
-            <a:schemeClr val="accent1"/>
-          </a:effectRef>
-          <a:fontRef idx="minor">
-            <a:schemeClr val="lt1"/>
-          </a:fontRef>
-        </p:style>
-        <p:txBody>
-          <a:bodyPr rtlCol="0" anchor="ctr"/>
-          <a:lstStyle/>
-          <a:p>
-            <a:pPr algn="ctr"/>
-          </a:p>
-        </p:txBody>
-      </p:sp>
-      <p:sp>
-        <p:nvSpPr>
-          <p:cNvPr id="96" name="TextBox 95"/>
-          <p:cNvSpPr txBox="1"/>
-          <p:nvPr/>
-        </p:nvSpPr>
-        <p:spPr>
-          <a:xfrm>
-            <a:off x="8164769" y="2944367"/>
-            <a:ext cx="548640" cy="146304"/>
-          </a:xfrm>
-          <a:prstGeom prst="rect">
-            <a:avLst/>
-          </a:prstGeom>
-          <a:noFill/>
-        </p:spPr>
-        <p:txBody>
-          <a:bodyPr wrap="square" anchor="t" lIns="0" rIns="0" tIns="0" bIns="0">
-            <a:spAutoFit/>
-          </a:bodyPr>
-          <a:lstStyle/>
-          <a:p>
-            <a:pPr algn="ctr">
-              <a:lnSpc>
-                <a:spcPct val="100000"/>
-              </a:lnSpc>
-            </a:pPr>
-            <a:r>
-              <a:rPr sz="1000" b="1">
-                <a:solidFill>
-                  <a:srgbClr val="8A8A8E"/>
-                </a:solidFill>
-                <a:latin typeface="SamsungOneKorean"/>
-                <a:ea typeface="SamsungOneKorean"/>
-                <a:cs typeface="SamsungOneKorean"/>
-              </a:rPr>
-              <a:t>100</a:t>
-            </a:r>
-          </a:p>
-        </p:txBody>
-      </p:sp>
-      <p:sp>
-        <p:nvSpPr>
-          <p:cNvPr id="97" name="Rectangle 96"/>
-          <p:cNvSpPr/>
-          <p:nvPr/>
-        </p:nvSpPr>
-        <p:spPr>
-          <a:xfrm>
-            <a:off x="8749985" y="3964838"/>
-            <a:ext cx="365760" cy="351129"/>
-          </a:xfrm>
-          <a:prstGeom prst="rect">
-            <a:avLst/>
-          </a:prstGeom>
-          <a:solidFill>
-            <a:srgbClr val="1428A0"/>
-          </a:solidFill>
-          <a:ln>
-            <a:noFill/>
-          </a:ln>
-          <a:effectLst/>
-        </p:spPr>
-        <p:style>
-          <a:lnRef idx="1">
-            <a:schemeClr val="accent1"/>
-          </a:lnRef>
-          <a:fillRef idx="3">
-            <a:schemeClr val="accent1"/>
-          </a:fillRef>
-          <a:effectRef idx="2">
-            <a:schemeClr val="accent1"/>
-          </a:effectRef>
-          <a:fontRef idx="minor">
-            <a:schemeClr val="lt1"/>
-          </a:fontRef>
-        </p:style>
-        <p:txBody>
-          <a:bodyPr rtlCol="0" anchor="ctr"/>
-          <a:lstStyle/>
-          <a:p>
-            <a:pPr algn="ctr"/>
-          </a:p>
-        </p:txBody>
-      </p:sp>
-      <p:sp>
-        <p:nvSpPr>
-          <p:cNvPr id="98" name="Rectangle 97"/>
-          <p:cNvSpPr/>
-          <p:nvPr/>
-        </p:nvSpPr>
-        <p:spPr>
-          <a:xfrm>
-            <a:off x="8749985" y="3672230"/>
-            <a:ext cx="365760" cy="292608"/>
-          </a:xfrm>
-          <a:prstGeom prst="rect">
-            <a:avLst/>
-          </a:prstGeom>
-          <a:solidFill>
-            <a:srgbClr val="4E68C8"/>
-          </a:solidFill>
-          <a:ln>
-            <a:noFill/>
-          </a:ln>
-          <a:effectLst/>
-        </p:spPr>
-        <p:style>
-          <a:lnRef idx="1">
-            <a:schemeClr val="accent1"/>
-          </a:lnRef>
-          <a:fillRef idx="3">
-            <a:schemeClr val="accent1"/>
-          </a:fillRef>
-          <a:effectRef idx="2">
-            <a:schemeClr val="accent1"/>
-          </a:effectRef>
-          <a:fontRef idx="minor">
-            <a:schemeClr val="lt1"/>
-          </a:fontRef>
-        </p:style>
-        <p:txBody>
-          <a:bodyPr rtlCol="0" anchor="ctr"/>
-          <a:lstStyle/>
-          <a:p>
-            <a:pPr algn="ctr"/>
-          </a:p>
-        </p:txBody>
-      </p:sp>
-      <p:sp>
-        <p:nvSpPr>
-          <p:cNvPr id="99" name="Rectangle 98"/>
-          <p:cNvSpPr/>
-          <p:nvPr/>
-        </p:nvSpPr>
-        <p:spPr>
-          <a:xfrm>
-            <a:off x="8749985" y="3379622"/>
-            <a:ext cx="365760" cy="292608"/>
-          </a:xfrm>
-          <a:prstGeom prst="rect">
-            <a:avLst/>
-          </a:prstGeom>
-          <a:solidFill>
-            <a:srgbClr val="93A2DC"/>
-          </a:solidFill>
-          <a:ln>
-            <a:noFill/>
-          </a:ln>
-          <a:effectLst/>
-        </p:spPr>
-        <p:style>
-          <a:lnRef idx="1">
-            <a:schemeClr val="accent1"/>
-          </a:lnRef>
-          <a:fillRef idx="3">
-            <a:schemeClr val="accent1"/>
-          </a:fillRef>
-          <a:effectRef idx="2">
-            <a:schemeClr val="accent1"/>
-          </a:effectRef>
-          <a:fontRef idx="minor">
-            <a:schemeClr val="lt1"/>
-          </a:fontRef>
-        </p:style>
-        <p:txBody>
-          <a:bodyPr rtlCol="0" anchor="ctr"/>
-          <a:lstStyle/>
-          <a:p>
-            <a:pPr algn="ctr"/>
-          </a:p>
-        </p:txBody>
-      </p:sp>
-      <p:sp>
-        <p:nvSpPr>
-          <p:cNvPr id="100" name="Rectangle 99"/>
-          <p:cNvSpPr/>
-          <p:nvPr/>
-        </p:nvSpPr>
-        <p:spPr>
-          <a:xfrm>
-            <a:off x="8749985" y="3145535"/>
-            <a:ext cx="365760" cy="234086"/>
-          </a:xfrm>
-          <a:prstGeom prst="rect">
-            <a:avLst/>
-          </a:prstGeom>
-          <a:solidFill>
-            <a:srgbClr val="C9D1EE"/>
-          </a:solidFill>
-          <a:ln>
-            <a:noFill/>
-          </a:ln>
-          <a:effectLst/>
-        </p:spPr>
-        <p:style>
-          <a:lnRef idx="1">
-            <a:schemeClr val="accent1"/>
-          </a:lnRef>
-          <a:fillRef idx="3">
-            <a:schemeClr val="accent1"/>
-          </a:fillRef>
-          <a:effectRef idx="2">
-            <a:schemeClr val="accent1"/>
-          </a:effectRef>
-          <a:fontRef idx="minor">
-            <a:schemeClr val="lt1"/>
-          </a:fontRef>
-        </p:style>
-        <p:txBody>
-          <a:bodyPr rtlCol="0" anchor="ctr"/>
-          <a:lstStyle/>
-          <a:p>
-            <a:pPr algn="ctr"/>
-          </a:p>
-        </p:txBody>
-      </p:sp>
-      <p:sp>
-        <p:nvSpPr>
-          <p:cNvPr id="101" name="TextBox 100"/>
-          <p:cNvSpPr txBox="1"/>
-          <p:nvPr/>
-        </p:nvSpPr>
-        <p:spPr>
-          <a:xfrm>
-            <a:off x="8658545" y="2944367"/>
-            <a:ext cx="548640" cy="146304"/>
-          </a:xfrm>
-          <a:prstGeom prst="rect">
-            <a:avLst/>
-          </a:prstGeom>
-          <a:noFill/>
-        </p:spPr>
-        <p:txBody>
-          <a:bodyPr wrap="square" anchor="t" lIns="0" rIns="0" tIns="0" bIns="0">
-            <a:spAutoFit/>
-          </a:bodyPr>
-          <a:lstStyle/>
-          <a:p>
-            <a:pPr algn="ctr">
-              <a:lnSpc>
-                <a:spcPct val="100000"/>
-              </a:lnSpc>
-            </a:pPr>
-            <a:r>
-              <a:rPr sz="1050" b="1">
-                <a:solidFill>
-                  <a:srgbClr val="1428A0"/>
-                </a:solidFill>
-                <a:latin typeface="SamsungOneKorean"/>
-                <a:ea typeface="SamsungOneKorean"/>
-                <a:cs typeface="SamsungOneKorean"/>
-              </a:rPr>
-              <a:t>100</a:t>
-            </a:r>
-          </a:p>
-        </p:txBody>
-      </p:sp>
-      <p:cxnSp>
-        <p:nvCxnSpPr>
-          <p:cNvPr id="102" name="Connector 101"/>
-          <p:cNvCxnSpPr/>
-          <p:nvPr/>
-        </p:nvCxnSpPr>
-        <p:spPr>
-          <a:xfrm>
-            <a:off x="7788676" y="4315968"/>
-            <a:ext cx="1794601" cy="0"/>
-          </a:xfrm>
-          <a:prstGeom prst="line">
-            <a:avLst/>
-          </a:prstGeom>
-          <a:ln w="11430">
-            <a:solidFill>
-              <a:srgbClr val="D9D9D9"/>
-            </a:solidFill>
-          </a:ln>
-          <a:effectLst/>
-        </p:spPr>
-        <p:style>
-          <a:lnRef idx="2">
-            <a:schemeClr val="accent1"/>
-          </a:lnRef>
-          <a:fillRef idx="0">
-            <a:schemeClr val="accent1"/>
-          </a:fillRef>
-          <a:effectRef idx="1">
-            <a:schemeClr val="accent1"/>
-          </a:effectRef>
-          <a:fontRef idx="minor">
-            <a:schemeClr val="tx1"/>
-          </a:fontRef>
-        </p:style>
-      </p:cxnSp>
-      <p:sp>
-        <p:nvSpPr>
-          <p:cNvPr id="103" name="TextBox 102"/>
-          <p:cNvSpPr txBox="1"/>
-          <p:nvPr/>
-        </p:nvSpPr>
-        <p:spPr>
-          <a:xfrm>
-            <a:off x="8183057" y="4361688"/>
-            <a:ext cx="512064" cy="128016"/>
-          </a:xfrm>
-          <a:prstGeom prst="rect">
-            <a:avLst/>
-          </a:prstGeom>
-          <a:noFill/>
-        </p:spPr>
-        <p:txBody>
-          <a:bodyPr wrap="square" anchor="t" lIns="0" rIns="0" tIns="0" bIns="0">
-            <a:spAutoFit/>
-          </a:bodyPr>
-          <a:lstStyle/>
-          <a:p>
-            <a:pPr algn="ctr">
-              <a:lnSpc>
-                <a:spcPct val="100000"/>
-              </a:lnSpc>
-            </a:pPr>
-            <a:r>
-              <a:rPr sz="1000" b="0">
-                <a:solidFill>
-                  <a:srgbClr val="8A8A8E"/>
-                </a:solidFill>
-                <a:latin typeface="SamsungOneKorean"/>
-                <a:ea typeface="SamsungOneKorean"/>
-                <a:cs typeface="SamsungOneKorean"/>
-              </a:rPr>
-              <a:t>현재</a:t>
-            </a:r>
-          </a:p>
-        </p:txBody>
-      </p:sp>
-      <p:sp>
-        <p:nvSpPr>
-          <p:cNvPr id="104" name="TextBox 103"/>
-          <p:cNvSpPr txBox="1"/>
-          <p:nvPr/>
-        </p:nvSpPr>
-        <p:spPr>
-          <a:xfrm>
-            <a:off x="8676833" y="4361688"/>
-            <a:ext cx="512064" cy="128016"/>
-          </a:xfrm>
-          <a:prstGeom prst="rect">
-            <a:avLst/>
-          </a:prstGeom>
-          <a:noFill/>
-        </p:spPr>
-        <p:txBody>
-          <a:bodyPr wrap="square" anchor="t" lIns="0" rIns="0" tIns="0" bIns="0">
-            <a:spAutoFit/>
-          </a:bodyPr>
-          <a:lstStyle/>
-          <a:p>
-            <a:pPr algn="ctr">
-              <a:lnSpc>
-                <a:spcPct val="100000"/>
-              </a:lnSpc>
-            </a:pPr>
-            <a:r>
-              <a:rPr sz="1000" b="0">
-                <a:solidFill>
-                  <a:srgbClr val="8A8A8E"/>
-                </a:solidFill>
-                <a:latin typeface="SamsungOneKorean"/>
-                <a:ea typeface="SamsungOneKorean"/>
-                <a:cs typeface="SamsungOneKorean"/>
-              </a:rPr>
-              <a:t>시나리오</a:t>
-            </a:r>
-          </a:p>
-        </p:txBody>
-      </p:sp>
-      <p:sp>
-        <p:nvSpPr>
-          <p:cNvPr id="105" name="TextBox 104"/>
-          <p:cNvSpPr txBox="1"/>
-          <p:nvPr/>
-        </p:nvSpPr>
-        <p:spPr>
-          <a:xfrm>
-            <a:off x="7697236" y="4530852"/>
-            <a:ext cx="1977481" cy="137160"/>
-          </a:xfrm>
-          <a:prstGeom prst="rect">
-            <a:avLst/>
-          </a:prstGeom>
-          <a:noFill/>
-        </p:spPr>
-        <p:txBody>
-          <a:bodyPr wrap="square" anchor="t" lIns="0" rIns="0" tIns="0" bIns="0">
-            <a:spAutoFit/>
-          </a:bodyPr>
-          <a:lstStyle/>
-          <a:p>
-            <a:pPr algn="ctr">
-              <a:lnSpc>
-                <a:spcPct val="100000"/>
-              </a:lnSpc>
-            </a:pPr>
-            <a:r>
-              <a:rPr sz="1000" b="1">
-                <a:solidFill>
-                  <a:srgbClr val="555555"/>
-                </a:solidFill>
-                <a:latin typeface="SamsungOneKorean"/>
-                <a:ea typeface="SamsungOneKorean"/>
-                <a:cs typeface="SamsungOneKorean"/>
-              </a:rPr>
-              <a:t>수요 유지 · 하단 가격 붕괴</a:t>
-            </a:r>
-          </a:p>
-        </p:txBody>
-      </p:sp>
-      <p:sp>
-        <p:nvSpPr>
-          <p:cNvPr id="106" name="Rectangle 105"/>
-          <p:cNvSpPr/>
-          <p:nvPr/>
-        </p:nvSpPr>
-        <p:spPr>
-          <a:xfrm>
-            <a:off x="10343418" y="3964838"/>
-            <a:ext cx="365760" cy="351129"/>
-          </a:xfrm>
-          <a:prstGeom prst="rect">
-            <a:avLst/>
-          </a:prstGeom>
-          <a:solidFill>
-            <a:srgbClr val="C4CAE7"/>
-          </a:solidFill>
-          <a:ln>
-            <a:noFill/>
-          </a:ln>
-          <a:effectLst/>
-        </p:spPr>
-        <p:style>
-          <a:lnRef idx="1">
-            <a:schemeClr val="accent1"/>
-          </a:lnRef>
-          <a:fillRef idx="3">
-            <a:schemeClr val="accent1"/>
-          </a:fillRef>
-          <a:effectRef idx="2">
-            <a:schemeClr val="accent1"/>
-          </a:effectRef>
-          <a:fontRef idx="minor">
-            <a:schemeClr val="lt1"/>
-          </a:fontRef>
-        </p:style>
-        <p:txBody>
-          <a:bodyPr rtlCol="0" anchor="ctr"/>
-          <a:lstStyle/>
-          <a:p>
-            <a:pPr algn="ctr"/>
-          </a:p>
-        </p:txBody>
-      </p:sp>
-      <p:sp>
-        <p:nvSpPr>
-          <p:cNvPr id="107" name="Rectangle 106"/>
-          <p:cNvSpPr/>
-          <p:nvPr/>
-        </p:nvSpPr>
-        <p:spPr>
-          <a:xfrm>
-            <a:off x="10343418" y="3672230"/>
-            <a:ext cx="365760" cy="292608"/>
-          </a:xfrm>
-          <a:prstGeom prst="rect">
-            <a:avLst/>
-          </a:prstGeom>
-          <a:solidFill>
-            <a:srgbClr val="D5DBF0"/>
-          </a:solidFill>
-          <a:ln>
-            <a:noFill/>
-          </a:ln>
-          <a:effectLst/>
-        </p:spPr>
-        <p:style>
-          <a:lnRef idx="1">
-            <a:schemeClr val="accent1"/>
-          </a:lnRef>
-          <a:fillRef idx="3">
-            <a:schemeClr val="accent1"/>
-          </a:fillRef>
-          <a:effectRef idx="2">
-            <a:schemeClr val="accent1"/>
-          </a:effectRef>
-          <a:fontRef idx="minor">
-            <a:schemeClr val="lt1"/>
-          </a:fontRef>
-        </p:style>
-        <p:txBody>
-          <a:bodyPr rtlCol="0" anchor="ctr"/>
-          <a:lstStyle/>
-          <a:p>
-            <a:pPr algn="ctr"/>
-          </a:p>
-        </p:txBody>
-      </p:sp>
-      <p:sp>
-        <p:nvSpPr>
-          <p:cNvPr id="108" name="Rectangle 107"/>
-          <p:cNvSpPr/>
-          <p:nvPr/>
-        </p:nvSpPr>
-        <p:spPr>
-          <a:xfrm>
-            <a:off x="10343418" y="3379622"/>
-            <a:ext cx="365760" cy="292608"/>
-          </a:xfrm>
-          <a:prstGeom prst="rect">
-            <a:avLst/>
-          </a:prstGeom>
-          <a:solidFill>
-            <a:srgbClr val="E3E7F6"/>
-          </a:solidFill>
-          <a:ln>
-            <a:noFill/>
-          </a:ln>
-          <a:effectLst/>
-        </p:spPr>
-        <p:style>
-          <a:lnRef idx="1">
-            <a:schemeClr val="accent1"/>
-          </a:lnRef>
-          <a:fillRef idx="3">
-            <a:schemeClr val="accent1"/>
-          </a:fillRef>
-          <a:effectRef idx="2">
-            <a:schemeClr val="accent1"/>
-          </a:effectRef>
-          <a:fontRef idx="minor">
-            <a:schemeClr val="lt1"/>
-          </a:fontRef>
-        </p:style>
-        <p:txBody>
-          <a:bodyPr rtlCol="0" anchor="ctr"/>
-          <a:lstStyle/>
-          <a:p>
-            <a:pPr algn="ctr"/>
-          </a:p>
-        </p:txBody>
-      </p:sp>
-      <p:sp>
-        <p:nvSpPr>
           <p:cNvPr id="109" name="Rectangle 108"/>
           <p:cNvSpPr/>
           <p:nvPr/>
         </p:nvSpPr>
         <p:spPr>
           <a:xfrm>
-            <a:off x="10343418" y="3145535"/>
-            <a:ext cx="365760" cy="234086"/>
-          </a:xfrm>
-          <a:prstGeom prst="rect">
-            <a:avLst/>
-          </a:prstGeom>
-          <a:solidFill>
-            <a:srgbClr val="EFF1FA"/>
-          </a:solidFill>
-          <a:ln>
-            <a:noFill/>
-          </a:ln>
-          <a:effectLst/>
-        </p:spPr>
-        <p:style>
-          <a:lnRef idx="1">
-            <a:schemeClr val="accent1"/>
-          </a:lnRef>
-          <a:fillRef idx="3">
-            <a:schemeClr val="accent1"/>
-          </a:fillRef>
-          <a:effectRef idx="2">
-            <a:schemeClr val="accent1"/>
-          </a:effectRef>
-          <a:fontRef idx="minor">
-            <a:schemeClr val="lt1"/>
-          </a:fontRef>
-        </p:style>
-        <p:txBody>
-          <a:bodyPr rtlCol="0" anchor="ctr"/>
-          <a:lstStyle/>
-          <a:p>
-            <a:pPr algn="ctr"/>
-          </a:p>
-        </p:txBody>
-      </p:sp>
-      <p:sp>
-        <p:nvSpPr>
-          <p:cNvPr id="110" name="TextBox 109"/>
-          <p:cNvSpPr txBox="1"/>
-          <p:nvPr/>
-        </p:nvSpPr>
-        <p:spPr>
-          <a:xfrm>
-            <a:off x="10251978" y="2944367"/>
-            <a:ext cx="548640" cy="146304"/>
-          </a:xfrm>
-          <a:prstGeom prst="rect">
-            <a:avLst/>
-          </a:prstGeom>
-          <a:noFill/>
-        </p:spPr>
-        <p:txBody>
-          <a:bodyPr wrap="square" anchor="t" lIns="0" rIns="0" tIns="0" bIns="0">
-            <a:spAutoFit/>
-          </a:bodyPr>
-          <a:lstStyle/>
-          <a:p>
-            <a:pPr algn="ctr">
-              <a:lnSpc>
-                <a:spcPct val="100000"/>
-              </a:lnSpc>
-            </a:pPr>
-            <a:r>
-              <a:rPr sz="1000" b="1">
-                <a:solidFill>
-                  <a:srgbClr val="8A8A8E"/>
-                </a:solidFill>
-                <a:latin typeface="SamsungOneKorean"/>
-                <a:ea typeface="SamsungOneKorean"/>
-                <a:cs typeface="SamsungOneKorean"/>
-              </a:rPr>
-              <a:t>100</a:t>
-            </a:r>
-          </a:p>
-        </p:txBody>
-      </p:sp>
-      <p:sp>
-        <p:nvSpPr>
-          <p:cNvPr id="111" name="Rectangle 110"/>
-          <p:cNvSpPr/>
-          <p:nvPr/>
-        </p:nvSpPr>
-        <p:spPr>
-          <a:xfrm>
-            <a:off x="10837194" y="4175516"/>
-            <a:ext cx="365760" cy="140451"/>
-          </a:xfrm>
-          <a:prstGeom prst="rect">
-            <a:avLst/>
-          </a:prstGeom>
-          <a:solidFill>
-            <a:srgbClr val="1428A0"/>
-          </a:solidFill>
-          <a:ln>
-            <a:noFill/>
-          </a:ln>
-          <a:effectLst/>
-        </p:spPr>
-        <p:style>
-          <a:lnRef idx="1">
-            <a:schemeClr val="accent1"/>
-          </a:lnRef>
-          <a:fillRef idx="3">
-            <a:schemeClr val="accent1"/>
-          </a:fillRef>
-          <a:effectRef idx="2">
-            <a:schemeClr val="accent1"/>
-          </a:effectRef>
-          <a:fontRef idx="minor">
-            <a:schemeClr val="lt1"/>
-          </a:fontRef>
-        </p:style>
-        <p:txBody>
-          <a:bodyPr rtlCol="0" anchor="ctr"/>
-          <a:lstStyle/>
-          <a:p>
-            <a:pPr algn="ctr"/>
-          </a:p>
-        </p:txBody>
-      </p:sp>
-      <p:sp>
-        <p:nvSpPr>
-          <p:cNvPr id="112" name="Rectangle 111"/>
-          <p:cNvSpPr/>
-          <p:nvPr/>
-        </p:nvSpPr>
-        <p:spPr>
-          <a:xfrm>
-            <a:off x="10837194" y="3941429"/>
-            <a:ext cx="365760" cy="234086"/>
-          </a:xfrm>
-          <a:prstGeom prst="rect">
-            <a:avLst/>
-          </a:prstGeom>
-          <a:solidFill>
-            <a:srgbClr val="4E68C8"/>
-          </a:solidFill>
-          <a:ln>
-            <a:noFill/>
-          </a:ln>
-          <a:effectLst/>
-        </p:spPr>
-        <p:style>
-          <a:lnRef idx="1">
-            <a:schemeClr val="accent1"/>
-          </a:lnRef>
-          <a:fillRef idx="3">
-            <a:schemeClr val="accent1"/>
-          </a:fillRef>
-          <a:effectRef idx="2">
-            <a:schemeClr val="accent1"/>
-          </a:effectRef>
-          <a:fontRef idx="minor">
-            <a:schemeClr val="lt1"/>
-          </a:fontRef>
-        </p:style>
-        <p:txBody>
-          <a:bodyPr rtlCol="0" anchor="ctr"/>
-          <a:lstStyle/>
-          <a:p>
-            <a:pPr algn="ctr"/>
-          </a:p>
-        </p:txBody>
-      </p:sp>
-      <p:sp>
-        <p:nvSpPr>
-          <p:cNvPr id="113" name="Rectangle 112"/>
-          <p:cNvSpPr/>
-          <p:nvPr/>
-        </p:nvSpPr>
-        <p:spPr>
-          <a:xfrm>
-            <a:off x="10837194" y="3648821"/>
-            <a:ext cx="365760" cy="292608"/>
-          </a:xfrm>
-          <a:prstGeom prst="rect">
-            <a:avLst/>
-          </a:prstGeom>
-          <a:solidFill>
-            <a:srgbClr val="93A2DC"/>
-          </a:solidFill>
-          <a:ln>
-            <a:noFill/>
-          </a:ln>
-          <a:effectLst/>
-        </p:spPr>
-        <p:style>
-          <a:lnRef idx="1">
-            <a:schemeClr val="accent1"/>
-          </a:lnRef>
-          <a:fillRef idx="3">
-            <a:schemeClr val="accent1"/>
-          </a:fillRef>
-          <a:effectRef idx="2">
-            <a:schemeClr val="accent1"/>
-          </a:effectRef>
-          <a:fontRef idx="minor">
-            <a:schemeClr val="lt1"/>
-          </a:fontRef>
-        </p:style>
-        <p:txBody>
-          <a:bodyPr rtlCol="0" anchor="ctr"/>
-          <a:lstStyle/>
-          <a:p>
-            <a:pPr algn="ctr"/>
-          </a:p>
-        </p:txBody>
-      </p:sp>
-      <p:sp>
-        <p:nvSpPr>
-          <p:cNvPr id="114" name="Rectangle 113"/>
-          <p:cNvSpPr/>
-          <p:nvPr/>
-        </p:nvSpPr>
-        <p:spPr>
-          <a:xfrm>
-            <a:off x="10837194" y="3344509"/>
-            <a:ext cx="365760" cy="304312"/>
-          </a:xfrm>
-          <a:prstGeom prst="rect">
-            <a:avLst/>
-          </a:prstGeom>
-          <a:solidFill>
-            <a:srgbClr val="C9D1EE"/>
-          </a:solidFill>
-          <a:ln>
-            <a:noFill/>
-          </a:ln>
-          <a:effectLst/>
-        </p:spPr>
-        <p:style>
-          <a:lnRef idx="1">
-            <a:schemeClr val="accent1"/>
-          </a:lnRef>
-          <a:fillRef idx="3">
-            <a:schemeClr val="accent1"/>
-          </a:fillRef>
-          <a:effectRef idx="2">
-            <a:schemeClr val="accent1"/>
-          </a:effectRef>
-          <a:fontRef idx="minor">
-            <a:schemeClr val="lt1"/>
-          </a:fontRef>
-        </p:style>
-        <p:txBody>
-          <a:bodyPr rtlCol="0" anchor="ctr"/>
-          <a:lstStyle/>
-          <a:p>
-            <a:pPr algn="ctr"/>
-          </a:p>
-        </p:txBody>
-      </p:sp>
-      <p:sp>
-        <p:nvSpPr>
-          <p:cNvPr id="115" name="Rectangle 114"/>
-          <p:cNvSpPr/>
-          <p:nvPr/>
-        </p:nvSpPr>
-        <p:spPr>
-          <a:xfrm>
-            <a:off x="10837194" y="3168944"/>
-            <a:ext cx="365760" cy="175564"/>
+            <a:off x="10837194" y="3212104"/>
+            <a:ext cx="365760" cy="93634"/>
           </a:xfrm>
           <a:prstGeom prst="rect">
             <a:avLst/>
@@ -8179,13 +8361,13 @@
       </p:sp>
       <p:sp>
         <p:nvSpPr>
-          <p:cNvPr id="116" name="TextBox 115"/>
+          <p:cNvPr id="110" name="TextBox 109"/>
           <p:cNvSpPr txBox="1"/>
           <p:nvPr/>
         </p:nvSpPr>
         <p:spPr>
           <a:xfrm>
-            <a:off x="10745754" y="2967776"/>
+            <a:off x="10745754" y="3020080"/>
             <a:ext cx="548640" cy="146304"/>
           </a:xfrm>
           <a:prstGeom prst="rect">
@@ -8213,56 +8395,20 @@
                 <a:ea typeface="SamsungOneKorean"/>
                 <a:cs typeface="SamsungOneKorean"/>
               </a:rPr>
-              <a:t>98</a:t>
-            </a:r>
-          </a:p>
-        </p:txBody>
-      </p:sp>
-      <p:cxnSp>
-        <p:nvCxnSpPr>
-          <p:cNvPr id="117" name="Connector 116"/>
-          <p:cNvCxnSpPr/>
-          <p:nvPr/>
-        </p:nvCxnSpPr>
-        <p:spPr>
-          <a:xfrm>
-            <a:off x="9875885" y="4315968"/>
-            <a:ext cx="1794602" cy="0"/>
-          </a:xfrm>
-          <a:prstGeom prst="line">
-            <a:avLst/>
-          </a:prstGeom>
-          <a:ln w="11430">
-            <a:solidFill>
-              <a:srgbClr val="D9D9D9"/>
-            </a:solidFill>
-          </a:ln>
-          <a:effectLst/>
-        </p:spPr>
-        <p:style>
-          <a:lnRef idx="2">
-            <a:schemeClr val="accent1"/>
-          </a:lnRef>
-          <a:fillRef idx="0">
-            <a:schemeClr val="accent1"/>
-          </a:fillRef>
-          <a:effectRef idx="1">
-            <a:schemeClr val="accent1"/>
-          </a:effectRef>
-          <a:fontRef idx="minor">
-            <a:schemeClr val="tx1"/>
-          </a:fontRef>
-        </p:style>
-      </p:cxnSp>
-      <p:sp>
-        <p:nvSpPr>
-          <p:cNvPr id="118" name="TextBox 117"/>
+              <a:t>99</a:t>
+            </a:r>
+          </a:p>
+        </p:txBody>
+      </p:sp>
+      <p:sp>
+        <p:nvSpPr>
+          <p:cNvPr id="111" name="TextBox 110"/>
           <p:cNvSpPr txBox="1"/>
           <p:nvPr/>
         </p:nvSpPr>
         <p:spPr>
           <a:xfrm>
-            <a:off x="10270266" y="4361688"/>
+            <a:off x="10270266" y="4416552"/>
             <a:ext cx="512064" cy="128016"/>
           </a:xfrm>
           <a:prstGeom prst="rect">
@@ -8290,20 +8436,20 @@
                 <a:ea typeface="SamsungOneKorean"/>
                 <a:cs typeface="SamsungOneKorean"/>
               </a:rPr>
-              <a:t>현재</a:t>
-            </a:r>
-          </a:p>
-        </p:txBody>
-      </p:sp>
-      <p:sp>
-        <p:nvSpPr>
-          <p:cNvPr id="119" name="TextBox 118"/>
+              <a:t>2025</a:t>
+            </a:r>
+          </a:p>
+        </p:txBody>
+      </p:sp>
+      <p:sp>
+        <p:nvSpPr>
+          <p:cNvPr id="112" name="TextBox 111"/>
           <p:cNvSpPr txBox="1"/>
           <p:nvPr/>
         </p:nvSpPr>
         <p:spPr>
           <a:xfrm>
-            <a:off x="10764042" y="4361688"/>
+            <a:off x="10764042" y="4416552"/>
             <a:ext cx="512064" cy="128016"/>
           </a:xfrm>
           <a:prstGeom prst="rect">
@@ -8338,13 +8484,13 @@
       </p:sp>
       <p:sp>
         <p:nvSpPr>
-          <p:cNvPr id="120" name="TextBox 119"/>
+          <p:cNvPr id="113" name="TextBox 112"/>
           <p:cNvSpPr txBox="1"/>
           <p:nvPr/>
         </p:nvSpPr>
         <p:spPr>
           <a:xfrm>
-            <a:off x="9784445" y="4530852"/>
+            <a:off x="9784445" y="4585716"/>
             <a:ext cx="1977481" cy="137160"/>
           </a:xfrm>
           <a:prstGeom prst="rect">
@@ -8379,7 +8525,7 @@
       </p:sp>
       <p:sp>
         <p:nvSpPr>
-          <p:cNvPr id="121" name="TextBox 120"/>
+          <p:cNvPr id="114" name="TextBox 113"/>
           <p:cNvSpPr txBox="1"/>
           <p:nvPr/>
         </p:nvSpPr>
@@ -8438,7 +8584,7 @@
       </p:sp>
       <p:sp>
         <p:nvSpPr>
-          <p:cNvPr id="122" name="Rectangle 121"/>
+          <p:cNvPr id="115" name="Rectangle 114"/>
           <p:cNvSpPr/>
           <p:nvPr/>
         </p:nvSpPr>
@@ -8482,7 +8628,7 @@
       </p:sp>
       <p:sp>
         <p:nvSpPr>
-          <p:cNvPr id="123" name="TextBox 122"/>
+          <p:cNvPr id="116" name="TextBox 115"/>
           <p:cNvSpPr txBox="1"/>
           <p:nvPr/>
         </p:nvSpPr>
@@ -8559,7 +8705,7 @@
       </p:sp>
       <p:sp>
         <p:nvSpPr>
-          <p:cNvPr id="124" name="Rectangle 123"/>
+          <p:cNvPr id="117" name="Rectangle 116"/>
           <p:cNvSpPr/>
           <p:nvPr/>
         </p:nvSpPr>
@@ -8603,7 +8749,7 @@
       </p:sp>
       <p:sp>
         <p:nvSpPr>
-          <p:cNvPr id="125" name="TextBox 124"/>
+          <p:cNvPr id="118" name="TextBox 117"/>
           <p:cNvSpPr txBox="1"/>
           <p:nvPr/>
         </p:nvSpPr>
@@ -8680,7 +8826,7 @@
       </p:sp>
       <p:sp>
         <p:nvSpPr>
-          <p:cNvPr id="126" name="Rectangle 125"/>
+          <p:cNvPr id="119" name="Rectangle 118"/>
           <p:cNvSpPr/>
           <p:nvPr/>
         </p:nvSpPr>
@@ -8724,7 +8870,7 @@
       </p:sp>
       <p:sp>
         <p:nvSpPr>
-          <p:cNvPr id="127" name="TextBox 126"/>
+          <p:cNvPr id="120" name="TextBox 119"/>
           <p:cNvSpPr txBox="1"/>
           <p:nvPr/>
         </p:nvSpPr>
@@ -8801,7 +8947,7 @@
       </p:sp>
       <p:sp>
         <p:nvSpPr>
-          <p:cNvPr id="128" name="Rectangle 127"/>
+          <p:cNvPr id="121" name="Rectangle 120"/>
           <p:cNvSpPr/>
           <p:nvPr/>
         </p:nvSpPr>
@@ -8845,7 +8991,7 @@
       </p:sp>
       <p:sp>
         <p:nvSpPr>
-          <p:cNvPr id="129" name="TextBox 128"/>
+          <p:cNvPr id="122" name="TextBox 121"/>
           <p:cNvSpPr txBox="1"/>
           <p:nvPr/>
         </p:nvSpPr>
@@ -8922,7 +9068,7 @@
       </p:sp>
       <p:sp>
         <p:nvSpPr>
-          <p:cNvPr id="130" name="Rectangle 129"/>
+          <p:cNvPr id="123" name="Rectangle 122"/>
           <p:cNvSpPr/>
           <p:nvPr/>
         </p:nvSpPr>
@@ -8966,7 +9112,7 @@
       </p:sp>
       <p:sp>
         <p:nvSpPr>
-          <p:cNvPr id="131" name="TextBox 130"/>
+          <p:cNvPr id="124" name="TextBox 123"/>
           <p:cNvSpPr txBox="1"/>
           <p:nvPr/>
         </p:nvSpPr>
@@ -9043,7 +9189,7 @@
       </p:sp>
       <p:sp>
         <p:nvSpPr>
-          <p:cNvPr id="132" name="Rounded Rectangle 131"/>
+          <p:cNvPr id="125" name="Rounded Rectangle 124"/>
           <p:cNvSpPr/>
           <p:nvPr/>
         </p:nvSpPr>
@@ -9089,7 +9235,7 @@
       </p:sp>
       <p:sp>
         <p:nvSpPr>
-          <p:cNvPr id="133" name="TextBox 132"/>
+          <p:cNvPr id="126" name="TextBox 125"/>
           <p:cNvSpPr txBox="1"/>
           <p:nvPr/>
         </p:nvSpPr>
@@ -9134,7 +9280,7 @@
                 <a:ea typeface="SamsungOneKorean"/>
                 <a:cs typeface="SamsungOneKorean"/>
               </a:rPr>
-              <a:t>수요발은 막대가 줄고, 공급발은 수요가 그대로인 채 공급이 넘친다.  </a:t>
+              <a:t>수요발은 수요 막대가 줄고, 공급발은 수요가 그대로인 채 공급 곡선이 커진다.  </a:t>
             </a:r>
             <a:r>
               <a:rPr sz="1050" b="1">
@@ -9152,7 +9298,7 @@
       </p:sp>
       <p:sp>
         <p:nvSpPr>
-          <p:cNvPr id="134" name="TextBox 133"/>
+          <p:cNvPr id="127" name="TextBox 126"/>
           <p:cNvSpPr txBox="1"/>
           <p:nvPr/>
         </p:nvSpPr>
@@ -9186,14 +9332,14 @@
                 <a:ea typeface="SamsungOneKorean"/>
                 <a:cs typeface="SamsungOneKorean"/>
               </a:rPr>
-              <a:t>막대는 wiki/downturn/samsung-impact.md §5.3 방향 표의 지수화 개념도(현재 총수요=100, 배분·폭은 방향 표현용이며 실측 아님) · 헤드라인은 가상 예시 · 인용 수치: Meta FCF -91%·4사 CapEx ~$750B(hyperscaler-q2-2026-actuals) · CXMT 11%→15%E·HBM3 월 6만장(apple-cxmt·TrendForce) · eSSD 38.2%(1Q26) · CIS 공용률 80%(fab-toolset) · 대응 전략은 별도 장 · 기준일 2026-08</a:t>
-            </a:r>
-          </a:p>
-        </p:txBody>
-      </p:sp>
-      <p:sp>
-        <p:nvSpPr>
-          <p:cNvPr id="135" name="TextBox 134"/>
+              <a:t>수요 막대 기준: 2025 글로벌 메모리 매출 실측 구성(DRAM $1,657억 중 HBM $340억 · NAND $697억, TrendForce·Yole)=100, 시나리오 막대는 방향 가정 적용 · 공급 차트: 3사 CAPEX 합산(각사 IR)·CXMT 점유(TrendForce·FT) · 헤드라인은 가상 예시 · 대응 전략은 별도 장 · 기준일 2026-08</a:t>
+            </a:r>
+          </a:p>
+        </p:txBody>
+      </p:sp>
+      <p:sp>
+        <p:nvSpPr>
+          <p:cNvPr id="128" name="TextBox 127"/>
           <p:cNvSpPr txBox="1"/>
           <p:nvPr/>
         </p:nvSpPr>
@@ -9558,4 +9704,324 @@
   </a:objectDefaults>
   <a:extraClrSchemeLst/>
 </a:theme>
+</file>
+
+<file path=ppt/theme/theme2.xml><?xml version="1.0" encoding="utf-8"?>
+<a:theme xmlns:a="http://schemas.openxmlformats.org/drawingml/2006/main" name="Office Theme">
+  <a:themeElements>
+    <a:clrScheme name="Office">
+      <a:dk1>
+        <a:sysClr val="windowText" lastClr="000000"/>
+      </a:dk1>
+      <a:lt1>
+        <a:sysClr val="window" lastClr="FFFFFF"/>
+      </a:lt1>
+      <a:dk2>
+        <a:srgbClr val="1F497D"/>
+      </a:dk2>
+      <a:lt2>
+        <a:srgbClr val="EEECE1"/>
+      </a:lt2>
+      <a:accent1>
+        <a:srgbClr val="4F81BD"/>
+      </a:accent1>
+      <a:accent2>
+        <a:srgbClr val="C0504D"/>
+      </a:accent2>
+      <a:accent3>
+        <a:srgbClr val="9BBB59"/>
+      </a:accent3>
+      <a:accent4>
+        <a:srgbClr val="8064A2"/>
+      </a:accent4>
+      <a:accent5>
+        <a:srgbClr val="4BACC6"/>
+      </a:accent5>
+      <a:accent6>
+        <a:srgbClr val="F79646"/>
+      </a:accent6>
+      <a:hlink>
+        <a:srgbClr val="0000FF"/>
+      </a:hlink>
+      <a:folHlink>
+        <a:srgbClr val="800080"/>
+      </a:folHlink>
+    </a:clrScheme>
+    <a:fontScheme name="Office">
+      <a:majorFont>
+        <a:latin typeface="Calibri"/>
+        <a:ea typeface=""/>
+        <a:cs typeface=""/>
+        <a:font script="Jpan" typeface="ＭＳ Ｐゴシック"/>
+        <a:font script="Hang" typeface="맑은 고딕"/>
+        <a:font script="Hans" typeface="宋体"/>
+        <a:font script="Hant" typeface="新細明體"/>
+        <a:font script="Arab" typeface="Times New Roman"/>
+        <a:font script="Hebr" typeface="Times New Roman"/>
+        <a:font script="Thai" typeface="Angsana New"/>
+        <a:font script="Ethi" typeface="Nyala"/>
+        <a:font script="Beng" typeface="Vrinda"/>
+        <a:font script="Gujr" typeface="Shruti"/>
+        <a:font script="Khmr" typeface="MoolBoran"/>
+        <a:font script="Knda" typeface="Tunga"/>
+        <a:font script="Guru" typeface="Raavi"/>
+        <a:font script="Cans" typeface="Euphemia"/>
+        <a:font script="Cher" typeface="Plantagenet Cherokee"/>
+        <a:font script="Yiii" typeface="Microsoft Yi Baiti"/>
+        <a:font script="Tibt" typeface="Microsoft Himalaya"/>
+        <a:font script="Thaa" typeface="MV Boli"/>
+        <a:font script="Deva" typeface="Mangal"/>
+        <a:font script="Telu" typeface="Gautami"/>
+        <a:font script="Taml" typeface="Latha"/>
+        <a:font script="Syrc" typeface="Estrangelo Edessa"/>
+        <a:font script="Orya" typeface="Kalinga"/>
+        <a:font script="Mlym" typeface="Kartika"/>
+        <a:font script="Laoo" typeface="DokChampa"/>
+        <a:font script="Sinh" typeface="Iskoola Pota"/>
+        <a:font script="Mong" typeface="Mongolian Baiti"/>
+        <a:font script="Viet" typeface="Times New Roman"/>
+        <a:font script="Uigh" typeface="Microsoft Uighur"/>
+        <a:font script="Geor" typeface="Sylfaen"/>
+      </a:majorFont>
+      <a:minorFont>
+        <a:latin typeface="Calibri"/>
+        <a:ea typeface=""/>
+        <a:cs typeface=""/>
+        <a:font script="Jpan" typeface="ＭＳ Ｐゴシック"/>
+        <a:font script="Hang" typeface="맑은 고딕"/>
+        <a:font script="Hans" typeface="宋体"/>
+        <a:font script="Hant" typeface="新細明體"/>
+        <a:font script="Arab" typeface="Arial"/>
+        <a:font script="Hebr" typeface="Arial"/>
+        <a:font script="Thai" typeface="Cordia New"/>
+        <a:font script="Ethi" typeface="Nyala"/>
+        <a:font script="Beng" typeface="Vrinda"/>
+        <a:font script="Gujr" typeface="Shruti"/>
+        <a:font script="Khmr" typeface="DaunPenh"/>
+        <a:font script="Knda" typeface="Tunga"/>
+        <a:font script="Guru" typeface="Raavi"/>
+        <a:font script="Cans" typeface="Euphemia"/>
+        <a:font script="Cher" typeface="Plantagenet Cherokee"/>
+        <a:font script="Yiii" typeface="Microsoft Yi Baiti"/>
+        <a:font script="Tibt" typeface="Microsoft Himalaya"/>
+        <a:font script="Thaa" typeface="MV Boli"/>
+        <a:font script="Deva" typeface="Mangal"/>
+        <a:font script="Telu" typeface="Gautami"/>
+        <a:font script="Taml" typeface="Latha"/>
+        <a:font script="Syrc" typeface="Estrangelo Edessa"/>
+        <a:font script="Orya" typeface="Kalinga"/>
+        <a:font script="Mlym" typeface="Kartika"/>
+        <a:font script="Laoo" typeface="DokChampa"/>
+        <a:font script="Sinh" typeface="Iskoola Pota"/>
+        <a:font script="Mong" typeface="Mongolian Baiti"/>
+        <a:font script="Viet" typeface="Arial"/>
+        <a:font script="Uigh" typeface="Microsoft Uighur"/>
+        <a:font script="Geor" typeface="Sylfaen"/>
+      </a:minorFont>
+    </a:fontScheme>
+    <a:fmtScheme name="Office">
+      <a:fillStyleLst>
+        <a:solidFill>
+          <a:schemeClr val="phClr"/>
+        </a:solidFill>
+        <a:gradFill rotWithShape="1">
+          <a:gsLst>
+            <a:gs pos="0">
+              <a:schemeClr val="phClr">
+                <a:tint val="50000"/>
+                <a:satMod val="300000"/>
+              </a:schemeClr>
+            </a:gs>
+            <a:gs pos="35000">
+              <a:schemeClr val="phClr">
+                <a:tint val="37000"/>
+                <a:satMod val="300000"/>
+              </a:schemeClr>
+            </a:gs>
+            <a:gs pos="100000">
+              <a:schemeClr val="phClr">
+                <a:tint val="15000"/>
+                <a:satMod val="350000"/>
+              </a:schemeClr>
+            </a:gs>
+          </a:gsLst>
+          <a:lin ang="16200000" scaled="1"/>
+        </a:gradFill>
+        <a:gradFill rotWithShape="1">
+          <a:gsLst>
+            <a:gs pos="0">
+              <a:schemeClr val="phClr">
+                <a:tint val="100000"/>
+                <a:shade val="100000"/>
+                <a:satMod val="130000"/>
+              </a:schemeClr>
+            </a:gs>
+            <a:gs pos="100000">
+              <a:schemeClr val="phClr">
+                <a:tint val="50000"/>
+                <a:shade val="100000"/>
+                <a:satMod val="350000"/>
+              </a:schemeClr>
+            </a:gs>
+          </a:gsLst>
+          <a:lin ang="16200000" scaled="0"/>
+        </a:gradFill>
+      </a:fillStyleLst>
+      <a:lnStyleLst>
+        <a:ln w="9525" cap="flat" cmpd="sng" algn="ctr">
+          <a:solidFill>
+            <a:schemeClr val="phClr">
+              <a:shade val="95000"/>
+              <a:satMod val="105000"/>
+            </a:schemeClr>
+          </a:solidFill>
+          <a:prstDash val="solid"/>
+        </a:ln>
+        <a:ln w="25400" cap="flat" cmpd="sng" algn="ctr">
+          <a:solidFill>
+            <a:schemeClr val="phClr"/>
+          </a:solidFill>
+          <a:prstDash val="solid"/>
+        </a:ln>
+        <a:ln w="38100" cap="flat" cmpd="sng" algn="ctr">
+          <a:solidFill>
+            <a:schemeClr val="phClr"/>
+          </a:solidFill>
+          <a:prstDash val="solid"/>
+        </a:ln>
+      </a:lnStyleLst>
+      <a:effectStyleLst>
+        <a:effectStyle>
+          <a:effectLst>
+            <a:outerShdw blurRad="40000" dist="20000" dir="5400000" rotWithShape="0">
+              <a:srgbClr val="000000">
+                <a:alpha val="38000"/>
+              </a:srgbClr>
+            </a:outerShdw>
+          </a:effectLst>
+        </a:effectStyle>
+        <a:effectStyle>
+          <a:effectLst>
+            <a:outerShdw blurRad="40000" dist="23000" dir="5400000" rotWithShape="0">
+              <a:srgbClr val="000000">
+                <a:alpha val="35000"/>
+              </a:srgbClr>
+            </a:outerShdw>
+          </a:effectLst>
+        </a:effectStyle>
+        <a:effectStyle>
+          <a:effectLst>
+            <a:outerShdw blurRad="40000" dist="23000" dir="5400000" rotWithShape="0">
+              <a:srgbClr val="000000">
+                <a:alpha val="35000"/>
+              </a:srgbClr>
+            </a:outerShdw>
+          </a:effectLst>
+          <a:scene3d>
+            <a:camera prst="orthographicFront">
+              <a:rot lat="0" lon="0" rev="0"/>
+            </a:camera>
+            <a:lightRig rig="threePt" dir="t">
+              <a:rot lat="0" lon="0" rev="1200000"/>
+            </a:lightRig>
+          </a:scene3d>
+          <a:sp3d>
+            <a:bevelT w="63500" h="25400"/>
+          </a:sp3d>
+        </a:effectStyle>
+      </a:effectStyleLst>
+      <a:bgFillStyleLst>
+        <a:solidFill>
+          <a:schemeClr val="phClr"/>
+        </a:solidFill>
+        <a:gradFill rotWithShape="1">
+          <a:gsLst>
+            <a:gs pos="0">
+              <a:schemeClr val="phClr">
+                <a:tint val="40000"/>
+                <a:satMod val="350000"/>
+              </a:schemeClr>
+            </a:gs>
+            <a:gs pos="40000">
+              <a:schemeClr val="phClr">
+                <a:tint val="45000"/>
+                <a:shade val="99000"/>
+                <a:satMod val="350000"/>
+              </a:schemeClr>
+            </a:gs>
+            <a:gs pos="100000">
+              <a:schemeClr val="phClr">
+                <a:shade val="20000"/>
+                <a:satMod val="255000"/>
+              </a:schemeClr>
+            </a:gs>
+          </a:gsLst>
+          <a:path path="circle">
+            <a:fillToRect l="50000" t="-80000" r="50000" b="180000"/>
+          </a:path>
+        </a:gradFill>
+        <a:gradFill rotWithShape="1">
+          <a:gsLst>
+            <a:gs pos="0">
+              <a:schemeClr val="phClr">
+                <a:tint val="80000"/>
+                <a:satMod val="300000"/>
+              </a:schemeClr>
+            </a:gs>
+            <a:gs pos="100000">
+              <a:schemeClr val="phClr">
+                <a:shade val="30000"/>
+                <a:satMod val="200000"/>
+              </a:schemeClr>
+            </a:gs>
+          </a:gsLst>
+          <a:path path="circle">
+            <a:fillToRect l="50000" t="50000" r="50000" b="50000"/>
+          </a:path>
+        </a:gradFill>
+      </a:bgFillStyleLst>
+    </a:fmtScheme>
+  </a:themeElements>
+  <a:objectDefaults>
+    <a:spDef>
+      <a:spPr/>
+      <a:bodyPr/>
+      <a:lstStyle/>
+      <a:style>
+        <a:lnRef idx="1">
+          <a:schemeClr val="accent1"/>
+        </a:lnRef>
+        <a:fillRef idx="3">
+          <a:schemeClr val="accent1"/>
+        </a:fillRef>
+        <a:effectRef idx="2">
+          <a:schemeClr val="accent1"/>
+        </a:effectRef>
+        <a:fontRef idx="minor">
+          <a:schemeClr val="lt1"/>
+        </a:fontRef>
+      </a:style>
+    </a:spDef>
+    <a:lnDef>
+      <a:spPr/>
+      <a:bodyPr/>
+      <a:lstStyle/>
+      <a:style>
+        <a:lnRef idx="2">
+          <a:schemeClr val="accent1"/>
+        </a:lnRef>
+        <a:fillRef idx="0">
+          <a:schemeClr val="accent1"/>
+        </a:fillRef>
+        <a:effectRef idx="1">
+          <a:schemeClr val="accent1"/>
+        </a:effectRef>
+        <a:fontRef idx="minor">
+          <a:schemeClr val="tx1"/>
+        </a:fontRef>
+      </a:style>
+    </a:lnDef>
+  </a:objectDefaults>
+  <a:extraClrSchemeLst/>
+</a:theme>
 </file>
--- a/outputs/presentation/downturn-scenario-impact.pptx
+++ b/outputs/presentation/downturn-scenario-impact.pptx
@@ -529,7 +529,7 @@
           </a:p>
           <a:p>
             <a:r>
-              <a:t>3. CAPEX가 몰리는 경우(공급발·기존 3사): 수요는 멀쩡한데 호황기에 결정된 투자가 한꺼번에 캐파로 도착하는 경로. 차트의 3사 CAPEX 합산이 2024 $54B, 2025 $64B, 2026E $95B로 가파르게 서 있고, 투자가 캐파로 바뀌는 리드타임 2~3년을 감안하면 2028~29에 Micron 아이다호, SK하이닉스 용인 1기, 국내 신규 팹이 동시에 가동된다(모두 착공이 끝난 확정 사실). 여기에 3강 절제가 무너지면(점유율 목표 선언, 조기 램프업) 급락으로 전환된다. 다섯 갈래 중 감산이 직접 효과를 내는 유일한 경우다.</a:t>
+              <a:t>3. CAPEX가 몰리는 경우(공급발·기존 진영): 수요는 멀쩡한데 호황기에 결정된 투자가 한꺼번에 캐파로 도착하는 경로. 차트는 부문별 CAPEX로, DRAM 3사(삼성·SK하이닉스·Micron)가 2025 $46.5B에서 2026E $54.0B, NAND 6사(삼성·키옥시아·SK/솔리다임·Micron·샌디스크·YMTC 산업 합계)가 $21.1B에서 $22.2B로 올라선다(TrendForce·각사 IR). 2027E·28E 막대는 공표된 전망치가 아니라 이 시나리오의 정의인 '과잉 유지 가정'(2026E 수준 지속)을 표시한 것으로 옅은 색·점선으로 구분했다. 투자가 캐파로 바뀌는 리드타임 2~3년을 감안하면 2028~29에 Micron 아이다호, SK하이닉스 용인 1기, 국내 신규 팹이 동시에 가동된다(모두 착공이 끝난 확정 사실). 여기에 3강 절제가 무너지면(점유율 목표 선언, 조기 램프업) 급락으로 전환된다. 다섯 갈래 중 감산이 직접 효과를 내는 유일한 경우다.</a:t>
             </a:r>
           </a:p>
           <a:p>
@@ -551,7 +551,7 @@
           <a:p/>
           <a:p>
             <a:r>
-              <a:t>[공급 차트 읽는 법] CAPEX가 몰리는 경우는 수요 막대가 무의미하다(수요는 그대로). 대신 공급의 선행 지표인 3사 CAPEX 합산을 보여준다. 후발의 경우도 마찬가지로 CXMT의 캐파·매출 점유 전망을 보여준다. 두 차트 모두 "수요가 아니라 공급 쪽 곡선이 커진다"는 것이 메시지다.</a:t>
+              <a:t>[공급 차트 읽는 법] CAPEX가 몰리는 경우는 수요 막대가 무의미하다(수요는 그대로). 대신 공급의 선행 지표인 부문별 CAPEX(DRAM 3사 + NAND 6사 누적)를 보여준다. 2025~26E는 실측·계획, 2027E·28E는 시나리오 가정이라는 구분을 반드시 언급할 것. 후발의 경우도 마찬가지로 CXMT의 캐파·매출 점유 전망을 보여준다. 두 차트 모두 "수요가 아니라 공급 쪽 곡선이 커진다"는 것이 메시지다.</a:t>
             </a:r>
           </a:p>
           <a:p/>
@@ -6002,7 +6002,7 @@
                 <a:ea typeface="SamsungOneKorean"/>
                 <a:cs typeface="SamsungOneKorean"/>
               </a:rPr>
-              <a:t>3사 CAPEX 합산 ($B)</a:t>
+              <a:t>메모리 CAPEX ($B)</a:t>
             </a:r>
           </a:p>
         </p:txBody>
@@ -6140,10 +6140,12 @@
             <a:avLst/>
           </a:prstGeom>
           <a:solidFill>
-            <a:srgbClr val="C4CAE7"/>
+            <a:srgbClr val="1428A0"/>
           </a:solidFill>
-          <a:ln>
-            <a:noFill/>
+          <a:ln w="9525">
+            <a:solidFill>
+              <a:srgbClr val="FFFFFF"/>
+            </a:solidFill>
           </a:ln>
           <a:effectLst/>
         </p:spPr>
@@ -6184,10 +6186,12 @@
             <a:avLst/>
           </a:prstGeom>
           <a:solidFill>
-            <a:srgbClr val="D8DEF1"/>
+            <a:srgbClr val="5A73CC"/>
           </a:solidFill>
-          <a:ln>
-            <a:noFill/>
+          <a:ln w="9525">
+            <a:solidFill>
+              <a:srgbClr val="FFFFFF"/>
+            </a:solidFill>
           </a:ln>
           <a:effectLst/>
         </p:spPr>
@@ -6228,10 +6232,12 @@
             <a:avLst/>
           </a:prstGeom>
           <a:solidFill>
-            <a:srgbClr val="EAEDF8"/>
+            <a:srgbClr val="ADB9E4"/>
           </a:solidFill>
-          <a:ln>
-            <a:noFill/>
+          <a:ln w="9525">
+            <a:solidFill>
+              <a:srgbClr val="FFFFFF"/>
+            </a:solidFill>
           </a:ln>
           <a:effectLst/>
         </p:spPr>
@@ -6315,8 +6321,10 @@
           <a:solidFill>
             <a:srgbClr val="1428A0"/>
           </a:solidFill>
-          <a:ln>
-            <a:noFill/>
+          <a:ln w="9525">
+            <a:solidFill>
+              <a:srgbClr val="FFFFFF"/>
+            </a:solidFill>
           </a:ln>
           <a:effectLst/>
         </p:spPr>
@@ -6359,8 +6367,10 @@
           <a:solidFill>
             <a:srgbClr val="5A73CC"/>
           </a:solidFill>
-          <a:ln>
-            <a:noFill/>
+          <a:ln w="9525">
+            <a:solidFill>
+              <a:srgbClr val="FFFFFF"/>
+            </a:solidFill>
           </a:ln>
           <a:effectLst/>
         </p:spPr>
@@ -6403,8 +6413,10 @@
           <a:solidFill>
             <a:srgbClr val="ADB9E4"/>
           </a:solidFill>
-          <a:ln>
-            <a:noFill/>
+          <a:ln w="9525">
+            <a:solidFill>
+              <a:srgbClr val="FFFFFF"/>
+            </a:solidFill>
           </a:ln>
           <a:effectLst/>
         </p:spPr>
@@ -6604,10 +6616,12 @@
             <a:avLst/>
           </a:prstGeom>
           <a:solidFill>
-            <a:srgbClr val="C4CAE7"/>
+            <a:srgbClr val="1428A0"/>
           </a:solidFill>
-          <a:ln>
-            <a:noFill/>
+          <a:ln w="9525">
+            <a:solidFill>
+              <a:srgbClr val="FFFFFF"/>
+            </a:solidFill>
           </a:ln>
           <a:effectLst/>
         </p:spPr>
@@ -6648,10 +6662,12 @@
             <a:avLst/>
           </a:prstGeom>
           <a:solidFill>
-            <a:srgbClr val="D8DEF1"/>
+            <a:srgbClr val="5A73CC"/>
           </a:solidFill>
-          <a:ln>
-            <a:noFill/>
+          <a:ln w="9525">
+            <a:solidFill>
+              <a:srgbClr val="FFFFFF"/>
+            </a:solidFill>
           </a:ln>
           <a:effectLst/>
         </p:spPr>
@@ -6692,10 +6708,12 @@
             <a:avLst/>
           </a:prstGeom>
           <a:solidFill>
-            <a:srgbClr val="EAEDF8"/>
+            <a:srgbClr val="ADB9E4"/>
           </a:solidFill>
-          <a:ln>
-            <a:noFill/>
+          <a:ln w="9525">
+            <a:solidFill>
+              <a:srgbClr val="FFFFFF"/>
+            </a:solidFill>
           </a:ln>
           <a:effectLst/>
         </p:spPr>
@@ -6779,8 +6797,10 @@
           <a:solidFill>
             <a:srgbClr val="1428A0"/>
           </a:solidFill>
-          <a:ln>
-            <a:noFill/>
+          <a:ln w="9525">
+            <a:solidFill>
+              <a:srgbClr val="FFFFFF"/>
+            </a:solidFill>
           </a:ln>
           <a:effectLst/>
         </p:spPr>
@@ -6823,8 +6843,10 @@
           <a:solidFill>
             <a:srgbClr val="5A73CC"/>
           </a:solidFill>
-          <a:ln>
-            <a:noFill/>
+          <a:ln w="9525">
+            <a:solidFill>
+              <a:srgbClr val="FFFFFF"/>
+            </a:solidFill>
           </a:ln>
           <a:effectLst/>
         </p:spPr>
@@ -6867,8 +6889,10 @@
           <a:solidFill>
             <a:srgbClr val="ADB9E4"/>
           </a:solidFill>
-          <a:ln>
-            <a:noFill/>
+          <a:ln w="9525">
+            <a:solidFill>
+              <a:srgbClr val="FFFFFF"/>
+            </a:solidFill>
           </a:ln>
           <a:effectLst/>
         </p:spPr>
@@ -7055,14 +7079,863 @@
       </p:cxnSp>
       <p:sp>
         <p:nvSpPr>
-          <p:cNvPr id="79" name="Rectangle 78"/>
+          <p:cNvPr id="79" name="TextBox 78"/>
+          <p:cNvSpPr txBox="1"/>
+          <p:nvPr/>
+        </p:nvSpPr>
+        <p:spPr>
+          <a:xfrm>
+            <a:off x="5610026" y="2903220"/>
+            <a:ext cx="1977481" cy="128016"/>
+          </a:xfrm>
+          <a:prstGeom prst="rect">
+            <a:avLst/>
+          </a:prstGeom>
+          <a:noFill/>
+        </p:spPr>
+        <p:txBody>
+          <a:bodyPr wrap="square" anchor="t" lIns="0" rIns="0" tIns="0" bIns="0">
+            <a:spAutoFit/>
+          </a:bodyPr>
+          <a:lstStyle/>
+          <a:p>
+            <a:pPr algn="ctr">
+              <a:lnSpc>
+                <a:spcPct val="100000"/>
+              </a:lnSpc>
+            </a:pPr>
+            <a:r>
+              <a:rPr sz="1000" b="0">
+                <a:solidFill>
+                  <a:srgbClr val="6B6B70"/>
+                </a:solidFill>
+                <a:latin typeface="SamsungOneKorean"/>
+                <a:ea typeface="SamsungOneKorean"/>
+                <a:cs typeface="SamsungOneKorean"/>
+              </a:rPr>
+              <a:t>■ </a:t>
+            </a:r>
+            <a:r>
+              <a:rPr sz="1000" b="0">
+                <a:solidFill>
+                  <a:srgbClr val="555555"/>
+                </a:solidFill>
+                <a:latin typeface="SamsungOneKorean"/>
+                <a:ea typeface="SamsungOneKorean"/>
+                <a:cs typeface="SamsungOneKorean"/>
+              </a:rPr>
+              <a:t>DRAM 3사  </a:t>
+            </a:r>
+            <a:r>
+              <a:rPr sz="1000" b="0">
+                <a:solidFill>
+                  <a:srgbClr val="C9C9CC"/>
+                </a:solidFill>
+                <a:latin typeface="SamsungOneKorean"/>
+                <a:ea typeface="SamsungOneKorean"/>
+                <a:cs typeface="SamsungOneKorean"/>
+              </a:rPr>
+              <a:t>■ </a:t>
+            </a:r>
+            <a:r>
+              <a:rPr sz="1000" b="0">
+                <a:solidFill>
+                  <a:srgbClr val="555555"/>
+                </a:solidFill>
+                <a:latin typeface="SamsungOneKorean"/>
+                <a:ea typeface="SamsungOneKorean"/>
+                <a:cs typeface="SamsungOneKorean"/>
+              </a:rPr>
+              <a:t>NAND 6사</a:t>
+            </a:r>
+          </a:p>
+        </p:txBody>
+      </p:sp>
+      <p:sp>
+        <p:nvSpPr>
+          <p:cNvPr id="80" name="Rectangle 79"/>
           <p:cNvSpPr/>
           <p:nvPr/>
         </p:nvSpPr>
         <p:spPr>
           <a:xfrm>
-            <a:off x="5903823" y="3695138"/>
-            <a:ext cx="329184" cy="675693"/>
+            <a:off x="5864961" y="3752365"/>
+            <a:ext cx="274320" cy="618466"/>
+          </a:xfrm>
+          <a:prstGeom prst="rect">
+            <a:avLst/>
+          </a:prstGeom>
+          <a:solidFill>
+            <a:srgbClr val="6B6B70"/>
+          </a:solidFill>
+          <a:ln w="9525">
+            <a:solidFill>
+              <a:srgbClr val="FFFFFF"/>
+            </a:solidFill>
+          </a:ln>
+          <a:effectLst/>
+        </p:spPr>
+        <p:style>
+          <a:lnRef idx="1">
+            <a:schemeClr val="accent1"/>
+          </a:lnRef>
+          <a:fillRef idx="3">
+            <a:schemeClr val="accent1"/>
+          </a:fillRef>
+          <a:effectRef idx="2">
+            <a:schemeClr val="accent1"/>
+          </a:effectRef>
+          <a:fontRef idx="minor">
+            <a:schemeClr val="lt1"/>
+          </a:fontRef>
+        </p:style>
+        <p:txBody>
+          <a:bodyPr rtlCol="0" anchor="ctr"/>
+          <a:lstStyle/>
+          <a:p>
+            <a:pPr algn="ctr"/>
+          </a:p>
+        </p:txBody>
+      </p:sp>
+      <p:sp>
+        <p:nvSpPr>
+          <p:cNvPr id="81" name="Rectangle 80"/>
+          <p:cNvSpPr/>
+          <p:nvPr/>
+        </p:nvSpPr>
+        <p:spPr>
+          <a:xfrm>
+            <a:off x="5864961" y="3471727"/>
+            <a:ext cx="274320" cy="280637"/>
+          </a:xfrm>
+          <a:prstGeom prst="rect">
+            <a:avLst/>
+          </a:prstGeom>
+          <a:solidFill>
+            <a:srgbClr val="C9C9CC"/>
+          </a:solidFill>
+          <a:ln w="9525">
+            <a:solidFill>
+              <a:srgbClr val="FFFFFF"/>
+            </a:solidFill>
+          </a:ln>
+          <a:effectLst/>
+        </p:spPr>
+        <p:style>
+          <a:lnRef idx="1">
+            <a:schemeClr val="accent1"/>
+          </a:lnRef>
+          <a:fillRef idx="3">
+            <a:schemeClr val="accent1"/>
+          </a:fillRef>
+          <a:effectRef idx="2">
+            <a:schemeClr val="accent1"/>
+          </a:effectRef>
+          <a:fontRef idx="minor">
+            <a:schemeClr val="lt1"/>
+          </a:fontRef>
+        </p:style>
+        <p:txBody>
+          <a:bodyPr rtlCol="0" anchor="ctr"/>
+          <a:lstStyle/>
+          <a:p>
+            <a:pPr algn="ctr"/>
+          </a:p>
+        </p:txBody>
+      </p:sp>
+      <p:sp>
+        <p:nvSpPr>
+          <p:cNvPr id="82" name="TextBox 81"/>
+          <p:cNvSpPr txBox="1"/>
+          <p:nvPr/>
+        </p:nvSpPr>
+        <p:spPr>
+          <a:xfrm>
+            <a:off x="5755233" y="3288847"/>
+            <a:ext cx="493776" cy="146304"/>
+          </a:xfrm>
+          <a:prstGeom prst="rect">
+            <a:avLst/>
+          </a:prstGeom>
+          <a:noFill/>
+        </p:spPr>
+        <p:txBody>
+          <a:bodyPr wrap="square" anchor="t" lIns="0" rIns="0" tIns="0" bIns="0">
+            <a:spAutoFit/>
+          </a:bodyPr>
+          <a:lstStyle/>
+          <a:p>
+            <a:pPr algn="ctr">
+              <a:lnSpc>
+                <a:spcPct val="100000"/>
+              </a:lnSpc>
+            </a:pPr>
+            <a:r>
+              <a:rPr sz="1000" b="1">
+                <a:solidFill>
+                  <a:srgbClr val="1A1A1A"/>
+                </a:solidFill>
+                <a:latin typeface="SamsungOneKorean"/>
+                <a:ea typeface="SamsungOneKorean"/>
+                <a:cs typeface="SamsungOneKorean"/>
+              </a:rPr>
+              <a:t>68</a:t>
+            </a:r>
+          </a:p>
+        </p:txBody>
+      </p:sp>
+      <p:sp>
+        <p:nvSpPr>
+          <p:cNvPr id="83" name="TextBox 82"/>
+          <p:cNvSpPr txBox="1"/>
+          <p:nvPr/>
+        </p:nvSpPr>
+        <p:spPr>
+          <a:xfrm>
+            <a:off x="5755233" y="4416552"/>
+            <a:ext cx="493776" cy="128016"/>
+          </a:xfrm>
+          <a:prstGeom prst="rect">
+            <a:avLst/>
+          </a:prstGeom>
+          <a:noFill/>
+        </p:spPr>
+        <p:txBody>
+          <a:bodyPr wrap="square" anchor="t" lIns="0" rIns="0" tIns="0" bIns="0">
+            <a:spAutoFit/>
+          </a:bodyPr>
+          <a:lstStyle/>
+          <a:p>
+            <a:pPr algn="ctr">
+              <a:lnSpc>
+                <a:spcPct val="100000"/>
+              </a:lnSpc>
+            </a:pPr>
+            <a:r>
+              <a:rPr sz="1000" b="0">
+                <a:solidFill>
+                  <a:srgbClr val="8A8A8E"/>
+                </a:solidFill>
+                <a:latin typeface="SamsungOneKorean"/>
+                <a:ea typeface="SamsungOneKorean"/>
+                <a:cs typeface="SamsungOneKorean"/>
+              </a:rPr>
+              <a:t>2025</a:t>
+            </a:r>
+          </a:p>
+        </p:txBody>
+      </p:sp>
+      <p:sp>
+        <p:nvSpPr>
+          <p:cNvPr id="84" name="Rectangle 83"/>
+          <p:cNvSpPr/>
+          <p:nvPr/>
+        </p:nvSpPr>
+        <p:spPr>
+          <a:xfrm>
+            <a:off x="6262725" y="3652612"/>
+            <a:ext cx="274320" cy="718219"/>
+          </a:xfrm>
+          <a:prstGeom prst="rect">
+            <a:avLst/>
+          </a:prstGeom>
+          <a:solidFill>
+            <a:srgbClr val="6B6B70"/>
+          </a:solidFill>
+          <a:ln w="9525">
+            <a:solidFill>
+              <a:srgbClr val="FFFFFF"/>
+            </a:solidFill>
+          </a:ln>
+          <a:effectLst/>
+        </p:spPr>
+        <p:style>
+          <a:lnRef idx="1">
+            <a:schemeClr val="accent1"/>
+          </a:lnRef>
+          <a:fillRef idx="3">
+            <a:schemeClr val="accent1"/>
+          </a:fillRef>
+          <a:effectRef idx="2">
+            <a:schemeClr val="accent1"/>
+          </a:effectRef>
+          <a:fontRef idx="minor">
+            <a:schemeClr val="lt1"/>
+          </a:fontRef>
+        </p:style>
+        <p:txBody>
+          <a:bodyPr rtlCol="0" anchor="ctr"/>
+          <a:lstStyle/>
+          <a:p>
+            <a:pPr algn="ctr"/>
+          </a:p>
+        </p:txBody>
+      </p:sp>
+      <p:sp>
+        <p:nvSpPr>
+          <p:cNvPr id="85" name="Rectangle 84"/>
+          <p:cNvSpPr/>
+          <p:nvPr/>
+        </p:nvSpPr>
+        <p:spPr>
+          <a:xfrm>
+            <a:off x="6262725" y="3357344"/>
+            <a:ext cx="274320" cy="295268"/>
+          </a:xfrm>
+          <a:prstGeom prst="rect">
+            <a:avLst/>
+          </a:prstGeom>
+          <a:solidFill>
+            <a:srgbClr val="C9C9CC"/>
+          </a:solidFill>
+          <a:ln w="9525">
+            <a:solidFill>
+              <a:srgbClr val="FFFFFF"/>
+            </a:solidFill>
+          </a:ln>
+          <a:effectLst/>
+        </p:spPr>
+        <p:style>
+          <a:lnRef idx="1">
+            <a:schemeClr val="accent1"/>
+          </a:lnRef>
+          <a:fillRef idx="3">
+            <a:schemeClr val="accent1"/>
+          </a:fillRef>
+          <a:effectRef idx="2">
+            <a:schemeClr val="accent1"/>
+          </a:effectRef>
+          <a:fontRef idx="minor">
+            <a:schemeClr val="lt1"/>
+          </a:fontRef>
+        </p:style>
+        <p:txBody>
+          <a:bodyPr rtlCol="0" anchor="ctr"/>
+          <a:lstStyle/>
+          <a:p>
+            <a:pPr algn="ctr"/>
+          </a:p>
+        </p:txBody>
+      </p:sp>
+      <p:sp>
+        <p:nvSpPr>
+          <p:cNvPr id="86" name="TextBox 85"/>
+          <p:cNvSpPr txBox="1"/>
+          <p:nvPr/>
+        </p:nvSpPr>
+        <p:spPr>
+          <a:xfrm>
+            <a:off x="6152997" y="3174464"/>
+            <a:ext cx="493776" cy="146304"/>
+          </a:xfrm>
+          <a:prstGeom prst="rect">
+            <a:avLst/>
+          </a:prstGeom>
+          <a:noFill/>
+        </p:spPr>
+        <p:txBody>
+          <a:bodyPr wrap="square" anchor="t" lIns="0" rIns="0" tIns="0" bIns="0">
+            <a:spAutoFit/>
+          </a:bodyPr>
+          <a:lstStyle/>
+          <a:p>
+            <a:pPr algn="ctr">
+              <a:lnSpc>
+                <a:spcPct val="100000"/>
+              </a:lnSpc>
+            </a:pPr>
+            <a:r>
+              <a:rPr sz="1000" b="1">
+                <a:solidFill>
+                  <a:srgbClr val="1A1A1A"/>
+                </a:solidFill>
+                <a:latin typeface="SamsungOneKorean"/>
+                <a:ea typeface="SamsungOneKorean"/>
+                <a:cs typeface="SamsungOneKorean"/>
+              </a:rPr>
+              <a:t>76</a:t>
+            </a:r>
+          </a:p>
+        </p:txBody>
+      </p:sp>
+      <p:sp>
+        <p:nvSpPr>
+          <p:cNvPr id="87" name="TextBox 86"/>
+          <p:cNvSpPr txBox="1"/>
+          <p:nvPr/>
+        </p:nvSpPr>
+        <p:spPr>
+          <a:xfrm>
+            <a:off x="6152997" y="4416552"/>
+            <a:ext cx="493776" cy="128016"/>
+          </a:xfrm>
+          <a:prstGeom prst="rect">
+            <a:avLst/>
+          </a:prstGeom>
+          <a:noFill/>
+        </p:spPr>
+        <p:txBody>
+          <a:bodyPr wrap="square" anchor="t" lIns="0" rIns="0" tIns="0" bIns="0">
+            <a:spAutoFit/>
+          </a:bodyPr>
+          <a:lstStyle/>
+          <a:p>
+            <a:pPr algn="ctr">
+              <a:lnSpc>
+                <a:spcPct val="100000"/>
+              </a:lnSpc>
+            </a:pPr>
+            <a:r>
+              <a:rPr sz="1000" b="0">
+                <a:solidFill>
+                  <a:srgbClr val="8A8A8E"/>
+                </a:solidFill>
+                <a:latin typeface="SamsungOneKorean"/>
+                <a:ea typeface="SamsungOneKorean"/>
+                <a:cs typeface="SamsungOneKorean"/>
+              </a:rPr>
+              <a:t>26E</a:t>
+            </a:r>
+          </a:p>
+        </p:txBody>
+      </p:sp>
+      <p:sp>
+        <p:nvSpPr>
+          <p:cNvPr id="88" name="Rectangle 87"/>
+          <p:cNvSpPr/>
+          <p:nvPr/>
+        </p:nvSpPr>
+        <p:spPr>
+          <a:xfrm>
+            <a:off x="6660489" y="3652612"/>
+            <a:ext cx="274320" cy="718219"/>
+          </a:xfrm>
+          <a:prstGeom prst="rect">
+            <a:avLst/>
+          </a:prstGeom>
+          <a:solidFill>
+            <a:srgbClr val="A9A9AE"/>
+          </a:solidFill>
+          <a:ln w="9525">
+            <a:solidFill>
+              <a:srgbClr val="FFFFFF"/>
+            </a:solidFill>
+          </a:ln>
+          <a:effectLst/>
+        </p:spPr>
+        <p:style>
+          <a:lnRef idx="1">
+            <a:schemeClr val="accent1"/>
+          </a:lnRef>
+          <a:fillRef idx="3">
+            <a:schemeClr val="accent1"/>
+          </a:fillRef>
+          <a:effectRef idx="2">
+            <a:schemeClr val="accent1"/>
+          </a:effectRef>
+          <a:fontRef idx="minor">
+            <a:schemeClr val="lt1"/>
+          </a:fontRef>
+        </p:style>
+        <p:txBody>
+          <a:bodyPr rtlCol="0" anchor="ctr"/>
+          <a:lstStyle/>
+          <a:p>
+            <a:pPr algn="ctr"/>
+          </a:p>
+        </p:txBody>
+      </p:sp>
+      <p:sp>
+        <p:nvSpPr>
+          <p:cNvPr id="89" name="Rectangle 88"/>
+          <p:cNvSpPr/>
+          <p:nvPr/>
+        </p:nvSpPr>
+        <p:spPr>
+          <a:xfrm>
+            <a:off x="6660489" y="3357344"/>
+            <a:ext cx="274320" cy="295268"/>
+          </a:xfrm>
+          <a:prstGeom prst="rect">
+            <a:avLst/>
+          </a:prstGeom>
+          <a:solidFill>
+            <a:srgbClr val="E2E2E5"/>
+          </a:solidFill>
+          <a:ln w="8890">
+            <a:solidFill>
+              <a:srgbClr val="8A8A8E"/>
+            </a:solidFill>
+            <a:prstDash val="sysDash"/>
+          </a:ln>
+          <a:effectLst/>
+        </p:spPr>
+        <p:style>
+          <a:lnRef idx="1">
+            <a:schemeClr val="accent1"/>
+          </a:lnRef>
+          <a:fillRef idx="3">
+            <a:schemeClr val="accent1"/>
+          </a:fillRef>
+          <a:effectRef idx="2">
+            <a:schemeClr val="accent1"/>
+          </a:effectRef>
+          <a:fontRef idx="minor">
+            <a:schemeClr val="lt1"/>
+          </a:fontRef>
+        </p:style>
+        <p:txBody>
+          <a:bodyPr rtlCol="0" anchor="ctr"/>
+          <a:lstStyle/>
+          <a:p>
+            <a:pPr algn="ctr"/>
+          </a:p>
+        </p:txBody>
+      </p:sp>
+      <p:sp>
+        <p:nvSpPr>
+          <p:cNvPr id="90" name="TextBox 89"/>
+          <p:cNvSpPr txBox="1"/>
+          <p:nvPr/>
+        </p:nvSpPr>
+        <p:spPr>
+          <a:xfrm>
+            <a:off x="6550761" y="3174464"/>
+            <a:ext cx="493776" cy="146304"/>
+          </a:xfrm>
+          <a:prstGeom prst="rect">
+            <a:avLst/>
+          </a:prstGeom>
+          <a:noFill/>
+        </p:spPr>
+        <p:txBody>
+          <a:bodyPr wrap="square" anchor="t" lIns="0" rIns="0" tIns="0" bIns="0">
+            <a:spAutoFit/>
+          </a:bodyPr>
+          <a:lstStyle/>
+          <a:p>
+            <a:pPr algn="ctr">
+              <a:lnSpc>
+                <a:spcPct val="100000"/>
+              </a:lnSpc>
+            </a:pPr>
+            <a:r>
+              <a:rPr sz="1000" b="1">
+                <a:solidFill>
+                  <a:srgbClr val="8A8A8E"/>
+                </a:solidFill>
+                <a:latin typeface="SamsungOneKorean"/>
+                <a:ea typeface="SamsungOneKorean"/>
+                <a:cs typeface="SamsungOneKorean"/>
+              </a:rPr>
+              <a:t>76ᵉ</a:t>
+            </a:r>
+          </a:p>
+        </p:txBody>
+      </p:sp>
+      <p:sp>
+        <p:nvSpPr>
+          <p:cNvPr id="91" name="TextBox 90"/>
+          <p:cNvSpPr txBox="1"/>
+          <p:nvPr/>
+        </p:nvSpPr>
+        <p:spPr>
+          <a:xfrm>
+            <a:off x="6550761" y="4416552"/>
+            <a:ext cx="493776" cy="128016"/>
+          </a:xfrm>
+          <a:prstGeom prst="rect">
+            <a:avLst/>
+          </a:prstGeom>
+          <a:noFill/>
+        </p:spPr>
+        <p:txBody>
+          <a:bodyPr wrap="square" anchor="t" lIns="0" rIns="0" tIns="0" bIns="0">
+            <a:spAutoFit/>
+          </a:bodyPr>
+          <a:lstStyle/>
+          <a:p>
+            <a:pPr algn="ctr">
+              <a:lnSpc>
+                <a:spcPct val="100000"/>
+              </a:lnSpc>
+            </a:pPr>
+            <a:r>
+              <a:rPr sz="1000" b="0">
+                <a:solidFill>
+                  <a:srgbClr val="8A8A8E"/>
+                </a:solidFill>
+                <a:latin typeface="SamsungOneKorean"/>
+                <a:ea typeface="SamsungOneKorean"/>
+                <a:cs typeface="SamsungOneKorean"/>
+              </a:rPr>
+              <a:t>27E</a:t>
+            </a:r>
+          </a:p>
+        </p:txBody>
+      </p:sp>
+      <p:sp>
+        <p:nvSpPr>
+          <p:cNvPr id="92" name="Rectangle 91"/>
+          <p:cNvSpPr/>
+          <p:nvPr/>
+        </p:nvSpPr>
+        <p:spPr>
+          <a:xfrm>
+            <a:off x="7058253" y="3652612"/>
+            <a:ext cx="274320" cy="718219"/>
+          </a:xfrm>
+          <a:prstGeom prst="rect">
+            <a:avLst/>
+          </a:prstGeom>
+          <a:solidFill>
+            <a:srgbClr val="A9A9AE"/>
+          </a:solidFill>
+          <a:ln w="9525">
+            <a:solidFill>
+              <a:srgbClr val="FFFFFF"/>
+            </a:solidFill>
+          </a:ln>
+          <a:effectLst/>
+        </p:spPr>
+        <p:style>
+          <a:lnRef idx="1">
+            <a:schemeClr val="accent1"/>
+          </a:lnRef>
+          <a:fillRef idx="3">
+            <a:schemeClr val="accent1"/>
+          </a:fillRef>
+          <a:effectRef idx="2">
+            <a:schemeClr val="accent1"/>
+          </a:effectRef>
+          <a:fontRef idx="minor">
+            <a:schemeClr val="lt1"/>
+          </a:fontRef>
+        </p:style>
+        <p:txBody>
+          <a:bodyPr rtlCol="0" anchor="ctr"/>
+          <a:lstStyle/>
+          <a:p>
+            <a:pPr algn="ctr"/>
+          </a:p>
+        </p:txBody>
+      </p:sp>
+      <p:sp>
+        <p:nvSpPr>
+          <p:cNvPr id="93" name="Rectangle 92"/>
+          <p:cNvSpPr/>
+          <p:nvPr/>
+        </p:nvSpPr>
+        <p:spPr>
+          <a:xfrm>
+            <a:off x="7058253" y="3357344"/>
+            <a:ext cx="274320" cy="295268"/>
+          </a:xfrm>
+          <a:prstGeom prst="rect">
+            <a:avLst/>
+          </a:prstGeom>
+          <a:solidFill>
+            <a:srgbClr val="E2E2E5"/>
+          </a:solidFill>
+          <a:ln w="8890">
+            <a:solidFill>
+              <a:srgbClr val="8A8A8E"/>
+            </a:solidFill>
+            <a:prstDash val="sysDash"/>
+          </a:ln>
+          <a:effectLst/>
+        </p:spPr>
+        <p:style>
+          <a:lnRef idx="1">
+            <a:schemeClr val="accent1"/>
+          </a:lnRef>
+          <a:fillRef idx="3">
+            <a:schemeClr val="accent1"/>
+          </a:fillRef>
+          <a:effectRef idx="2">
+            <a:schemeClr val="accent1"/>
+          </a:effectRef>
+          <a:fontRef idx="minor">
+            <a:schemeClr val="lt1"/>
+          </a:fontRef>
+        </p:style>
+        <p:txBody>
+          <a:bodyPr rtlCol="0" anchor="ctr"/>
+          <a:lstStyle/>
+          <a:p>
+            <a:pPr algn="ctr"/>
+          </a:p>
+        </p:txBody>
+      </p:sp>
+      <p:sp>
+        <p:nvSpPr>
+          <p:cNvPr id="94" name="TextBox 93"/>
+          <p:cNvSpPr txBox="1"/>
+          <p:nvPr/>
+        </p:nvSpPr>
+        <p:spPr>
+          <a:xfrm>
+            <a:off x="6948525" y="3174464"/>
+            <a:ext cx="493776" cy="146304"/>
+          </a:xfrm>
+          <a:prstGeom prst="rect">
+            <a:avLst/>
+          </a:prstGeom>
+          <a:noFill/>
+        </p:spPr>
+        <p:txBody>
+          <a:bodyPr wrap="square" anchor="t" lIns="0" rIns="0" tIns="0" bIns="0">
+            <a:spAutoFit/>
+          </a:bodyPr>
+          <a:lstStyle/>
+          <a:p>
+            <a:pPr algn="ctr">
+              <a:lnSpc>
+                <a:spcPct val="100000"/>
+              </a:lnSpc>
+            </a:pPr>
+            <a:r>
+              <a:rPr sz="1000" b="1">
+                <a:solidFill>
+                  <a:srgbClr val="8A8A8E"/>
+                </a:solidFill>
+                <a:latin typeface="SamsungOneKorean"/>
+                <a:ea typeface="SamsungOneKorean"/>
+                <a:cs typeface="SamsungOneKorean"/>
+              </a:rPr>
+              <a:t>76ᵉ</a:t>
+            </a:r>
+          </a:p>
+        </p:txBody>
+      </p:sp>
+      <p:sp>
+        <p:nvSpPr>
+          <p:cNvPr id="95" name="TextBox 94"/>
+          <p:cNvSpPr txBox="1"/>
+          <p:nvPr/>
+        </p:nvSpPr>
+        <p:spPr>
+          <a:xfrm>
+            <a:off x="6948525" y="4416552"/>
+            <a:ext cx="493776" cy="128016"/>
+          </a:xfrm>
+          <a:prstGeom prst="rect">
+            <a:avLst/>
+          </a:prstGeom>
+          <a:noFill/>
+        </p:spPr>
+        <p:txBody>
+          <a:bodyPr wrap="square" anchor="t" lIns="0" rIns="0" tIns="0" bIns="0">
+            <a:spAutoFit/>
+          </a:bodyPr>
+          <a:lstStyle/>
+          <a:p>
+            <a:pPr algn="ctr">
+              <a:lnSpc>
+                <a:spcPct val="100000"/>
+              </a:lnSpc>
+            </a:pPr>
+            <a:r>
+              <a:rPr sz="1000" b="0">
+                <a:solidFill>
+                  <a:srgbClr val="8A8A8E"/>
+                </a:solidFill>
+                <a:latin typeface="SamsungOneKorean"/>
+                <a:ea typeface="SamsungOneKorean"/>
+                <a:cs typeface="SamsungOneKorean"/>
+              </a:rPr>
+              <a:t>28E</a:t>
+            </a:r>
+          </a:p>
+        </p:txBody>
+      </p:sp>
+      <p:sp>
+        <p:nvSpPr>
+          <p:cNvPr id="96" name="TextBox 95"/>
+          <p:cNvSpPr txBox="1"/>
+          <p:nvPr/>
+        </p:nvSpPr>
+        <p:spPr>
+          <a:xfrm>
+            <a:off x="5610026" y="4585716"/>
+            <a:ext cx="1977481" cy="137160"/>
+          </a:xfrm>
+          <a:prstGeom prst="rect">
+            <a:avLst/>
+          </a:prstGeom>
+          <a:noFill/>
+        </p:spPr>
+        <p:txBody>
+          <a:bodyPr wrap="square" anchor="t" lIns="0" rIns="0" tIns="0" bIns="0">
+            <a:spAutoFit/>
+          </a:bodyPr>
+          <a:lstStyle/>
+          <a:p>
+            <a:pPr algn="ctr">
+              <a:lnSpc>
+                <a:spcPct val="100000"/>
+              </a:lnSpc>
+            </a:pPr>
+            <a:r>
+              <a:rPr sz="1000" b="1">
+                <a:solidFill>
+                  <a:srgbClr val="555555"/>
+                </a:solidFill>
+                <a:latin typeface="SamsungOneKorean"/>
+                <a:ea typeface="SamsungOneKorean"/>
+                <a:cs typeface="SamsungOneKorean"/>
+              </a:rPr>
+              <a:t>27E·28E = 과잉 유지 가정</a:t>
+            </a:r>
+          </a:p>
+        </p:txBody>
+      </p:sp>
+      <p:cxnSp>
+        <p:nvCxnSpPr>
+          <p:cNvPr id="97" name="Connector 96"/>
+          <p:cNvCxnSpPr/>
+          <p:nvPr/>
+        </p:nvCxnSpPr>
+        <p:spPr>
+          <a:xfrm>
+            <a:off x="7788676" y="4370832"/>
+            <a:ext cx="1794601" cy="0"/>
+          </a:xfrm>
+          <a:prstGeom prst="line">
+            <a:avLst/>
+          </a:prstGeom>
+          <a:ln w="11430">
+            <a:solidFill>
+              <a:srgbClr val="D9D9D9"/>
+            </a:solidFill>
+          </a:ln>
+          <a:effectLst/>
+        </p:spPr>
+        <p:style>
+          <a:lnRef idx="2">
+            <a:schemeClr val="accent1"/>
+          </a:lnRef>
+          <a:fillRef idx="0">
+            <a:schemeClr val="accent1"/>
+          </a:fillRef>
+          <a:effectRef idx="1">
+            <a:schemeClr val="accent1"/>
+          </a:effectRef>
+          <a:fontRef idx="minor">
+            <a:schemeClr val="tx1"/>
+          </a:fontRef>
+        </p:style>
+      </p:cxnSp>
+      <p:sp>
+        <p:nvSpPr>
+          <p:cNvPr id="98" name="Rectangle 97"/>
+          <p:cNvSpPr/>
+          <p:nvPr/>
+        </p:nvSpPr>
+        <p:spPr>
+          <a:xfrm>
+            <a:off x="7808153" y="3599688"/>
+            <a:ext cx="310896" cy="771143"/>
           </a:xfrm>
           <a:prstGeom prst="rect">
             <a:avLst/>
@@ -7099,14 +7972,14 @@
       </p:sp>
       <p:sp>
         <p:nvSpPr>
-          <p:cNvPr id="80" name="TextBox 79"/>
+          <p:cNvPr id="99" name="TextBox 98"/>
           <p:cNvSpPr txBox="1"/>
           <p:nvPr/>
         </p:nvSpPr>
         <p:spPr>
           <a:xfrm>
-            <a:off x="5812383" y="3503114"/>
-            <a:ext cx="512064" cy="146304"/>
+            <a:off x="7698425" y="3407664"/>
+            <a:ext cx="530352" cy="146304"/>
           </a:xfrm>
           <a:prstGeom prst="rect">
             <a:avLst/>
@@ -7133,21 +8006,65 @@
                 <a:ea typeface="SamsungOneKorean"/>
                 <a:cs typeface="SamsungOneKorean"/>
               </a:rPr>
-              <a:t>54</a:t>
-            </a:r>
-          </a:p>
-        </p:txBody>
-      </p:sp>
-      <p:sp>
-        <p:nvSpPr>
-          <p:cNvPr id="81" name="TextBox 80"/>
+              <a:t>11</a:t>
+            </a:r>
+          </a:p>
+        </p:txBody>
+      </p:sp>
+      <p:sp>
+        <p:nvSpPr>
+          <p:cNvPr id="100" name="Rectangle 99"/>
+          <p:cNvSpPr/>
+          <p:nvPr/>
+        </p:nvSpPr>
+        <p:spPr>
+          <a:xfrm>
+            <a:off x="8210489" y="3319272"/>
+            <a:ext cx="310896" cy="1051560"/>
+          </a:xfrm>
+          <a:prstGeom prst="rect">
+            <a:avLst/>
+          </a:prstGeom>
+          <a:solidFill>
+            <a:srgbClr val="6B6B70"/>
+          </a:solidFill>
+          <a:ln>
+            <a:noFill/>
+          </a:ln>
+          <a:effectLst/>
+        </p:spPr>
+        <p:style>
+          <a:lnRef idx="1">
+            <a:schemeClr val="accent1"/>
+          </a:lnRef>
+          <a:fillRef idx="3">
+            <a:schemeClr val="accent1"/>
+          </a:fillRef>
+          <a:effectRef idx="2">
+            <a:schemeClr val="accent1"/>
+          </a:effectRef>
+          <a:fontRef idx="minor">
+            <a:schemeClr val="lt1"/>
+          </a:fontRef>
+        </p:style>
+        <p:txBody>
+          <a:bodyPr rtlCol="0" anchor="ctr"/>
+          <a:lstStyle/>
+          <a:p>
+            <a:pPr algn="ctr"/>
+          </a:p>
+        </p:txBody>
+      </p:sp>
+      <p:sp>
+        <p:nvSpPr>
+          <p:cNvPr id="101" name="TextBox 100"/>
           <p:cNvSpPr txBox="1"/>
           <p:nvPr/>
         </p:nvSpPr>
         <p:spPr>
           <a:xfrm>
-            <a:off x="5794095" y="4416552"/>
-            <a:ext cx="548640" cy="128016"/>
+            <a:off x="8100761" y="3127248"/>
+            <a:ext cx="530352" cy="146304"/>
           </a:xfrm>
           <a:prstGeom prst="rect">
             <a:avLst/>
@@ -7166,29 +8083,70 @@
               </a:lnSpc>
             </a:pPr>
             <a:r>
-              <a:rPr sz="1000" b="0">
-                <a:solidFill>
-                  <a:srgbClr val="8A8A8E"/>
+              <a:rPr sz="1000" b="1">
+                <a:solidFill>
+                  <a:srgbClr val="1A1A1A"/>
                 </a:solidFill>
                 <a:latin typeface="SamsungOneKorean"/>
                 <a:ea typeface="SamsungOneKorean"/>
                 <a:cs typeface="SamsungOneKorean"/>
               </a:rPr>
-              <a:t>2024</a:t>
-            </a:r>
-          </a:p>
-        </p:txBody>
-      </p:sp>
-      <p:sp>
-        <p:nvSpPr>
-          <p:cNvPr id="82" name="Rectangle 81"/>
+              <a:t>15E</a:t>
+            </a:r>
+          </a:p>
+        </p:txBody>
+      </p:sp>
+      <p:sp>
+        <p:nvSpPr>
+          <p:cNvPr id="102" name="TextBox 101"/>
+          <p:cNvSpPr txBox="1"/>
+          <p:nvPr/>
+        </p:nvSpPr>
+        <p:spPr>
+          <a:xfrm>
+            <a:off x="7753289" y="4416552"/>
+            <a:ext cx="822960" cy="128016"/>
+          </a:xfrm>
+          <a:prstGeom prst="rect">
+            <a:avLst/>
+          </a:prstGeom>
+          <a:noFill/>
+        </p:spPr>
+        <p:txBody>
+          <a:bodyPr wrap="square" anchor="t" lIns="0" rIns="0" tIns="0" bIns="0">
+            <a:spAutoFit/>
+          </a:bodyPr>
+          <a:lstStyle/>
+          <a:p>
+            <a:pPr algn="ctr">
+              <a:lnSpc>
+                <a:spcPct val="100000"/>
+              </a:lnSpc>
+            </a:pPr>
+            <a:r>
+              <a:rPr sz="1000" b="0">
+                <a:solidFill>
+                  <a:srgbClr val="8A8A8E"/>
+                </a:solidFill>
+                <a:latin typeface="SamsungOneKorean"/>
+                <a:ea typeface="SamsungOneKorean"/>
+                <a:cs typeface="SamsungOneKorean"/>
+              </a:rPr>
+              <a:t>캐파</a:t>
+            </a:r>
+          </a:p>
+        </p:txBody>
+      </p:sp>
+      <p:sp>
+        <p:nvSpPr>
+          <p:cNvPr id="103" name="Rectangle 102"/>
           <p:cNvSpPr/>
           <p:nvPr/>
         </p:nvSpPr>
         <p:spPr>
           <a:xfrm>
-            <a:off x="6434175" y="3570010"/>
-            <a:ext cx="329184" cy="800821"/>
+            <a:off x="8850569" y="3810000"/>
+            <a:ext cx="310896" cy="560832"/>
           </a:xfrm>
           <a:prstGeom prst="rect">
             <a:avLst/>
@@ -7225,14 +8183,14 @@
       </p:sp>
       <p:sp>
         <p:nvSpPr>
-          <p:cNvPr id="83" name="TextBox 82"/>
+          <p:cNvPr id="104" name="TextBox 103"/>
           <p:cNvSpPr txBox="1"/>
           <p:nvPr/>
         </p:nvSpPr>
         <p:spPr>
           <a:xfrm>
-            <a:off x="6342735" y="3377986"/>
-            <a:ext cx="512064" cy="146304"/>
+            <a:off x="8740841" y="3617976"/>
+            <a:ext cx="530352" cy="146304"/>
           </a:xfrm>
           <a:prstGeom prst="rect">
             <a:avLst/>
@@ -7259,62 +8217,21 @@
                 <a:ea typeface="SamsungOneKorean"/>
                 <a:cs typeface="SamsungOneKorean"/>
               </a:rPr>
-              <a:t>64</a:t>
-            </a:r>
-          </a:p>
-        </p:txBody>
-      </p:sp>
-      <p:sp>
-        <p:nvSpPr>
-          <p:cNvPr id="84" name="TextBox 83"/>
-          <p:cNvSpPr txBox="1"/>
-          <p:nvPr/>
-        </p:nvSpPr>
-        <p:spPr>
-          <a:xfrm>
-            <a:off x="6324447" y="4416552"/>
-            <a:ext cx="548640" cy="128016"/>
-          </a:xfrm>
-          <a:prstGeom prst="rect">
-            <a:avLst/>
-          </a:prstGeom>
-          <a:noFill/>
-        </p:spPr>
-        <p:txBody>
-          <a:bodyPr wrap="square" anchor="t" lIns="0" rIns="0" tIns="0" bIns="0">
-            <a:spAutoFit/>
-          </a:bodyPr>
-          <a:lstStyle/>
-          <a:p>
-            <a:pPr algn="ctr">
-              <a:lnSpc>
-                <a:spcPct val="100000"/>
-              </a:lnSpc>
-            </a:pPr>
-            <a:r>
-              <a:rPr sz="1000" b="0">
-                <a:solidFill>
-                  <a:srgbClr val="8A8A8E"/>
-                </a:solidFill>
-                <a:latin typeface="SamsungOneKorean"/>
-                <a:ea typeface="SamsungOneKorean"/>
-                <a:cs typeface="SamsungOneKorean"/>
-              </a:rPr>
-              <a:t>2025</a:t>
-            </a:r>
-          </a:p>
-        </p:txBody>
-      </p:sp>
-      <p:sp>
-        <p:nvSpPr>
-          <p:cNvPr id="85" name="Rectangle 84"/>
+              <a:t>8</a:t>
+            </a:r>
+          </a:p>
+        </p:txBody>
+      </p:sp>
+      <p:sp>
+        <p:nvSpPr>
+          <p:cNvPr id="105" name="Rectangle 104"/>
           <p:cNvSpPr/>
           <p:nvPr/>
         </p:nvSpPr>
         <p:spPr>
           <a:xfrm>
-            <a:off x="6964527" y="3182112"/>
-            <a:ext cx="329184" cy="1188720"/>
+            <a:off x="9252905" y="3389376"/>
+            <a:ext cx="310896" cy="981455"/>
           </a:xfrm>
           <a:prstGeom prst="rect">
             <a:avLst/>
@@ -7351,14 +8268,14 @@
       </p:sp>
       <p:sp>
         <p:nvSpPr>
-          <p:cNvPr id="86" name="TextBox 85"/>
+          <p:cNvPr id="106" name="TextBox 105"/>
           <p:cNvSpPr txBox="1"/>
           <p:nvPr/>
         </p:nvSpPr>
         <p:spPr>
           <a:xfrm>
-            <a:off x="6873087" y="2990088"/>
-            <a:ext cx="512064" cy="146304"/>
+            <a:off x="9143177" y="3197352"/>
+            <a:ext cx="530352" cy="146304"/>
           </a:xfrm>
           <a:prstGeom prst="rect">
             <a:avLst/>
@@ -7385,21 +8302,21 @@
                 <a:ea typeface="SamsungOneKorean"/>
                 <a:cs typeface="SamsungOneKorean"/>
               </a:rPr>
-              <a:t>95</a:t>
-            </a:r>
-          </a:p>
-        </p:txBody>
-      </p:sp>
-      <p:sp>
-        <p:nvSpPr>
-          <p:cNvPr id="87" name="TextBox 86"/>
+              <a:t>14E</a:t>
+            </a:r>
+          </a:p>
+        </p:txBody>
+      </p:sp>
+      <p:sp>
+        <p:nvSpPr>
+          <p:cNvPr id="107" name="TextBox 106"/>
           <p:cNvSpPr txBox="1"/>
           <p:nvPr/>
         </p:nvSpPr>
         <p:spPr>
           <a:xfrm>
-            <a:off x="6854799" y="4416552"/>
-            <a:ext cx="548640" cy="128016"/>
+            <a:off x="8795705" y="4416552"/>
+            <a:ext cx="822960" cy="128016"/>
           </a:xfrm>
           <a:prstGeom prst="rect">
             <a:avLst/>
@@ -7426,20 +8343,20 @@
                 <a:ea typeface="SamsungOneKorean"/>
                 <a:cs typeface="SamsungOneKorean"/>
               </a:rPr>
-              <a:t>2026E</a:t>
-            </a:r>
-          </a:p>
-        </p:txBody>
-      </p:sp>
-      <p:sp>
-        <p:nvSpPr>
-          <p:cNvPr id="88" name="TextBox 87"/>
+              <a:t>매출</a:t>
+            </a:r>
+          </a:p>
+        </p:txBody>
+      </p:sp>
+      <p:sp>
+        <p:nvSpPr>
+          <p:cNvPr id="108" name="TextBox 107"/>
           <p:cNvSpPr txBox="1"/>
           <p:nvPr/>
         </p:nvSpPr>
         <p:spPr>
           <a:xfrm>
-            <a:off x="5610026" y="4585716"/>
+            <a:off x="7697236" y="4585716"/>
             <a:ext cx="1977481" cy="137160"/>
           </a:xfrm>
           <a:prstGeom prst="rect">
@@ -7467,21 +8384,21 @@
                 <a:ea typeface="SamsungOneKorean"/>
                 <a:cs typeface="SamsungOneKorean"/>
               </a:rPr>
-              <a:t>2026E 투자가 2028~29 캐파로</a:t>
+              <a:t>하단 점유의 구조적 상승</a:t>
             </a:r>
           </a:p>
         </p:txBody>
       </p:sp>
       <p:cxnSp>
         <p:nvCxnSpPr>
-          <p:cNvPr id="89" name="Connector 88"/>
+          <p:cNvPr id="109" name="Connector 108"/>
           <p:cNvCxnSpPr/>
           <p:nvPr/>
         </p:nvCxnSpPr>
         <p:spPr>
           <a:xfrm>
-            <a:off x="7788676" y="4370832"/>
-            <a:ext cx="1794601" cy="0"/>
+            <a:off x="9875885" y="4370832"/>
+            <a:ext cx="1794602" cy="0"/>
           </a:xfrm>
           <a:prstGeom prst="line">
             <a:avLst/>
@@ -7510,23 +8427,25 @@
       </p:cxnSp>
       <p:sp>
         <p:nvSpPr>
-          <p:cNvPr id="90" name="Rectangle 89"/>
+          <p:cNvPr id="110" name="Rectangle 109"/>
           <p:cNvSpPr/>
           <p:nvPr/>
         </p:nvSpPr>
         <p:spPr>
           <a:xfrm>
-            <a:off x="7808153" y="3599688"/>
-            <a:ext cx="310896" cy="771143"/>
+            <a:off x="10343418" y="4206971"/>
+            <a:ext cx="365760" cy="163860"/>
           </a:xfrm>
           <a:prstGeom prst="rect">
             <a:avLst/>
           </a:prstGeom>
           <a:solidFill>
-            <a:srgbClr val="C9C9CC"/>
+            <a:srgbClr val="1428A0"/>
           </a:solidFill>
-          <a:ln>
-            <a:noFill/>
+          <a:ln w="9525">
+            <a:solidFill>
+              <a:srgbClr val="FFFFFF"/>
+            </a:solidFill>
           </a:ln>
           <a:effectLst/>
         </p:spPr>
@@ -7554,14 +8473,106 @@
       </p:sp>
       <p:sp>
         <p:nvSpPr>
-          <p:cNvPr id="91" name="TextBox 90"/>
+          <p:cNvPr id="111" name="Rectangle 110"/>
+          <p:cNvSpPr/>
+          <p:nvPr/>
+        </p:nvSpPr>
+        <p:spPr>
+          <a:xfrm>
+            <a:off x="10343418" y="3551529"/>
+            <a:ext cx="365760" cy="655441"/>
+          </a:xfrm>
+          <a:prstGeom prst="rect">
+            <a:avLst/>
+          </a:prstGeom>
+          <a:solidFill>
+            <a:srgbClr val="5A73CC"/>
+          </a:solidFill>
+          <a:ln w="9525">
+            <a:solidFill>
+              <a:srgbClr val="FFFFFF"/>
+            </a:solidFill>
+          </a:ln>
+          <a:effectLst/>
+        </p:spPr>
+        <p:style>
+          <a:lnRef idx="1">
+            <a:schemeClr val="accent1"/>
+          </a:lnRef>
+          <a:fillRef idx="3">
+            <a:schemeClr val="accent1"/>
+          </a:fillRef>
+          <a:effectRef idx="2">
+            <a:schemeClr val="accent1"/>
+          </a:effectRef>
+          <a:fontRef idx="minor">
+            <a:schemeClr val="lt1"/>
+          </a:fontRef>
+        </p:style>
+        <p:txBody>
+          <a:bodyPr rtlCol="0" anchor="ctr"/>
+          <a:lstStyle/>
+          <a:p>
+            <a:pPr algn="ctr"/>
+          </a:p>
+        </p:txBody>
+      </p:sp>
+      <p:sp>
+        <p:nvSpPr>
+          <p:cNvPr id="112" name="Rectangle 111"/>
+          <p:cNvSpPr/>
+          <p:nvPr/>
+        </p:nvSpPr>
+        <p:spPr>
+          <a:xfrm>
+            <a:off x="10343418" y="3200400"/>
+            <a:ext cx="365760" cy="351129"/>
+          </a:xfrm>
+          <a:prstGeom prst="rect">
+            <a:avLst/>
+          </a:prstGeom>
+          <a:solidFill>
+            <a:srgbClr val="ADB9E4"/>
+          </a:solidFill>
+          <a:ln w="9525">
+            <a:solidFill>
+              <a:srgbClr val="FFFFFF"/>
+            </a:solidFill>
+          </a:ln>
+          <a:effectLst/>
+        </p:spPr>
+        <p:style>
+          <a:lnRef idx="1">
+            <a:schemeClr val="accent1"/>
+          </a:lnRef>
+          <a:fillRef idx="3">
+            <a:schemeClr val="accent1"/>
+          </a:fillRef>
+          <a:effectRef idx="2">
+            <a:schemeClr val="accent1"/>
+          </a:effectRef>
+          <a:fontRef idx="minor">
+            <a:schemeClr val="lt1"/>
+          </a:fontRef>
+        </p:style>
+        <p:txBody>
+          <a:bodyPr rtlCol="0" anchor="ctr"/>
+          <a:lstStyle/>
+          <a:p>
+            <a:pPr algn="ctr"/>
+          </a:p>
+        </p:txBody>
+      </p:sp>
+      <p:sp>
+        <p:nvSpPr>
+          <p:cNvPr id="113" name="TextBox 112"/>
           <p:cNvSpPr txBox="1"/>
           <p:nvPr/>
         </p:nvSpPr>
         <p:spPr>
           <a:xfrm>
-            <a:off x="7698425" y="3407664"/>
-            <a:ext cx="530352" cy="146304"/>
+            <a:off x="10251978" y="3008376"/>
+            <a:ext cx="548640" cy="146304"/>
           </a:xfrm>
           <a:prstGeom prst="rect">
             <a:avLst/>
@@ -7588,30 +8599,32 @@
                 <a:ea typeface="SamsungOneKorean"/>
                 <a:cs typeface="SamsungOneKorean"/>
               </a:rPr>
-              <a:t>11</a:t>
-            </a:r>
-          </a:p>
-        </p:txBody>
-      </p:sp>
-      <p:sp>
-        <p:nvSpPr>
-          <p:cNvPr id="92" name="Rectangle 91"/>
+              <a:t>100</a:t>
+            </a:r>
+          </a:p>
+        </p:txBody>
+      </p:sp>
+      <p:sp>
+        <p:nvSpPr>
+          <p:cNvPr id="114" name="Rectangle 113"/>
           <p:cNvSpPr/>
           <p:nvPr/>
         </p:nvSpPr>
         <p:spPr>
           <a:xfrm>
-            <a:off x="8210489" y="3319272"/>
-            <a:ext cx="310896" cy="1051560"/>
+            <a:off x="10837194" y="4300606"/>
+            <a:ext cx="365760" cy="70225"/>
           </a:xfrm>
           <a:prstGeom prst="rect">
             <a:avLst/>
           </a:prstGeom>
           <a:solidFill>
-            <a:srgbClr val="6B6B70"/>
+            <a:srgbClr val="1428A0"/>
           </a:solidFill>
-          <a:ln>
-            <a:noFill/>
+          <a:ln w="9525">
+            <a:solidFill>
+              <a:srgbClr val="FFFFFF"/>
+            </a:solidFill>
           </a:ln>
           <a:effectLst/>
         </p:spPr>
@@ -7639,105 +8652,25 @@
       </p:sp>
       <p:sp>
         <p:nvSpPr>
-          <p:cNvPr id="93" name="TextBox 92"/>
-          <p:cNvSpPr txBox="1"/>
-          <p:nvPr/>
-        </p:nvSpPr>
-        <p:spPr>
-          <a:xfrm>
-            <a:off x="8100761" y="3127248"/>
-            <a:ext cx="530352" cy="146304"/>
-          </a:xfrm>
-          <a:prstGeom prst="rect">
-            <a:avLst/>
-          </a:prstGeom>
-          <a:noFill/>
-        </p:spPr>
-        <p:txBody>
-          <a:bodyPr wrap="square" anchor="t" lIns="0" rIns="0" tIns="0" bIns="0">
-            <a:spAutoFit/>
-          </a:bodyPr>
-          <a:lstStyle/>
-          <a:p>
-            <a:pPr algn="ctr">
-              <a:lnSpc>
-                <a:spcPct val="100000"/>
-              </a:lnSpc>
-            </a:pPr>
-            <a:r>
-              <a:rPr sz="1000" b="1">
-                <a:solidFill>
-                  <a:srgbClr val="1A1A1A"/>
-                </a:solidFill>
-                <a:latin typeface="SamsungOneKorean"/>
-                <a:ea typeface="SamsungOneKorean"/>
-                <a:cs typeface="SamsungOneKorean"/>
-              </a:rPr>
-              <a:t>15E</a:t>
-            </a:r>
-          </a:p>
-        </p:txBody>
-      </p:sp>
-      <p:sp>
-        <p:nvSpPr>
-          <p:cNvPr id="94" name="TextBox 93"/>
-          <p:cNvSpPr txBox="1"/>
-          <p:nvPr/>
-        </p:nvSpPr>
-        <p:spPr>
-          <a:xfrm>
-            <a:off x="7753289" y="4416552"/>
-            <a:ext cx="822960" cy="128016"/>
-          </a:xfrm>
-          <a:prstGeom prst="rect">
-            <a:avLst/>
-          </a:prstGeom>
-          <a:noFill/>
-        </p:spPr>
-        <p:txBody>
-          <a:bodyPr wrap="square" anchor="t" lIns="0" rIns="0" tIns="0" bIns="0">
-            <a:spAutoFit/>
-          </a:bodyPr>
-          <a:lstStyle/>
-          <a:p>
-            <a:pPr algn="ctr">
-              <a:lnSpc>
-                <a:spcPct val="100000"/>
-              </a:lnSpc>
-            </a:pPr>
-            <a:r>
-              <a:rPr sz="1000" b="0">
-                <a:solidFill>
-                  <a:srgbClr val="8A8A8E"/>
-                </a:solidFill>
-                <a:latin typeface="SamsungOneKorean"/>
-                <a:ea typeface="SamsungOneKorean"/>
-                <a:cs typeface="SamsungOneKorean"/>
-              </a:rPr>
-              <a:t>캐파</a:t>
-            </a:r>
-          </a:p>
-        </p:txBody>
-      </p:sp>
-      <p:sp>
-        <p:nvSpPr>
-          <p:cNvPr id="95" name="Rectangle 94"/>
+          <p:cNvPr id="115" name="Rectangle 114"/>
           <p:cNvSpPr/>
           <p:nvPr/>
         </p:nvSpPr>
         <p:spPr>
           <a:xfrm>
-            <a:off x="8850569" y="3810000"/>
-            <a:ext cx="310896" cy="560832"/>
+            <a:off x="10837194" y="3715390"/>
+            <a:ext cx="365760" cy="585216"/>
           </a:xfrm>
           <a:prstGeom prst="rect">
             <a:avLst/>
           </a:prstGeom>
           <a:solidFill>
-            <a:srgbClr val="C9C9CC"/>
+            <a:srgbClr val="5A73CC"/>
           </a:solidFill>
-          <a:ln>
-            <a:noFill/>
+          <a:ln w="9525">
+            <a:solidFill>
+              <a:srgbClr val="FFFFFF"/>
+            </a:solidFill>
           </a:ln>
           <a:effectLst/>
         </p:spPr>
@@ -7765,64 +8698,25 @@
       </p:sp>
       <p:sp>
         <p:nvSpPr>
-          <p:cNvPr id="96" name="TextBox 95"/>
-          <p:cNvSpPr txBox="1"/>
-          <p:nvPr/>
-        </p:nvSpPr>
-        <p:spPr>
-          <a:xfrm>
-            <a:off x="8740841" y="3617976"/>
-            <a:ext cx="530352" cy="146304"/>
-          </a:xfrm>
-          <a:prstGeom prst="rect">
-            <a:avLst/>
-          </a:prstGeom>
-          <a:noFill/>
-        </p:spPr>
-        <p:txBody>
-          <a:bodyPr wrap="square" anchor="t" lIns="0" rIns="0" tIns="0" bIns="0">
-            <a:spAutoFit/>
-          </a:bodyPr>
-          <a:lstStyle/>
-          <a:p>
-            <a:pPr algn="ctr">
-              <a:lnSpc>
-                <a:spcPct val="100000"/>
-              </a:lnSpc>
-            </a:pPr>
-            <a:r>
-              <a:rPr sz="1000" b="1">
-                <a:solidFill>
-                  <a:srgbClr val="8A8A8E"/>
-                </a:solidFill>
-                <a:latin typeface="SamsungOneKorean"/>
-                <a:ea typeface="SamsungOneKorean"/>
-                <a:cs typeface="SamsungOneKorean"/>
-              </a:rPr>
-              <a:t>8</a:t>
-            </a:r>
-          </a:p>
-        </p:txBody>
-      </p:sp>
-      <p:sp>
-        <p:nvSpPr>
-          <p:cNvPr id="97" name="Rectangle 96"/>
+          <p:cNvPr id="116" name="Rectangle 115"/>
           <p:cNvSpPr/>
           <p:nvPr/>
         </p:nvSpPr>
         <p:spPr>
           <a:xfrm>
-            <a:off x="9252905" y="3389376"/>
-            <a:ext cx="310896" cy="981455"/>
+            <a:off x="10837194" y="3305738"/>
+            <a:ext cx="365760" cy="409651"/>
           </a:xfrm>
           <a:prstGeom prst="rect">
             <a:avLst/>
           </a:prstGeom>
           <a:solidFill>
-            <a:srgbClr val="6B6B70"/>
+            <a:srgbClr val="ADB9E4"/>
           </a:solidFill>
-          <a:ln>
-            <a:noFill/>
+          <a:ln w="9525">
+            <a:solidFill>
+              <a:srgbClr val="FFFFFF"/>
+            </a:solidFill>
           </a:ln>
           <a:effectLst/>
         </p:spPr>
@@ -7850,471 +8744,7 @@
       </p:sp>
       <p:sp>
         <p:nvSpPr>
-          <p:cNvPr id="98" name="TextBox 97"/>
-          <p:cNvSpPr txBox="1"/>
-          <p:nvPr/>
-        </p:nvSpPr>
-        <p:spPr>
-          <a:xfrm>
-            <a:off x="9143177" y="3197352"/>
-            <a:ext cx="530352" cy="146304"/>
-          </a:xfrm>
-          <a:prstGeom prst="rect">
-            <a:avLst/>
-          </a:prstGeom>
-          <a:noFill/>
-        </p:spPr>
-        <p:txBody>
-          <a:bodyPr wrap="square" anchor="t" lIns="0" rIns="0" tIns="0" bIns="0">
-            <a:spAutoFit/>
-          </a:bodyPr>
-          <a:lstStyle/>
-          <a:p>
-            <a:pPr algn="ctr">
-              <a:lnSpc>
-                <a:spcPct val="100000"/>
-              </a:lnSpc>
-            </a:pPr>
-            <a:r>
-              <a:rPr sz="1000" b="1">
-                <a:solidFill>
-                  <a:srgbClr val="1A1A1A"/>
-                </a:solidFill>
-                <a:latin typeface="SamsungOneKorean"/>
-                <a:ea typeface="SamsungOneKorean"/>
-                <a:cs typeface="SamsungOneKorean"/>
-              </a:rPr>
-              <a:t>14E</a:t>
-            </a:r>
-          </a:p>
-        </p:txBody>
-      </p:sp>
-      <p:sp>
-        <p:nvSpPr>
-          <p:cNvPr id="99" name="TextBox 98"/>
-          <p:cNvSpPr txBox="1"/>
-          <p:nvPr/>
-        </p:nvSpPr>
-        <p:spPr>
-          <a:xfrm>
-            <a:off x="8795705" y="4416552"/>
-            <a:ext cx="822960" cy="128016"/>
-          </a:xfrm>
-          <a:prstGeom prst="rect">
-            <a:avLst/>
-          </a:prstGeom>
-          <a:noFill/>
-        </p:spPr>
-        <p:txBody>
-          <a:bodyPr wrap="square" anchor="t" lIns="0" rIns="0" tIns="0" bIns="0">
-            <a:spAutoFit/>
-          </a:bodyPr>
-          <a:lstStyle/>
-          <a:p>
-            <a:pPr algn="ctr">
-              <a:lnSpc>
-                <a:spcPct val="100000"/>
-              </a:lnSpc>
-            </a:pPr>
-            <a:r>
-              <a:rPr sz="1000" b="0">
-                <a:solidFill>
-                  <a:srgbClr val="8A8A8E"/>
-                </a:solidFill>
-                <a:latin typeface="SamsungOneKorean"/>
-                <a:ea typeface="SamsungOneKorean"/>
-                <a:cs typeface="SamsungOneKorean"/>
-              </a:rPr>
-              <a:t>매출</a:t>
-            </a:r>
-          </a:p>
-        </p:txBody>
-      </p:sp>
-      <p:sp>
-        <p:nvSpPr>
-          <p:cNvPr id="100" name="TextBox 99"/>
-          <p:cNvSpPr txBox="1"/>
-          <p:nvPr/>
-        </p:nvSpPr>
-        <p:spPr>
-          <a:xfrm>
-            <a:off x="7697236" y="4585716"/>
-            <a:ext cx="1977481" cy="137160"/>
-          </a:xfrm>
-          <a:prstGeom prst="rect">
-            <a:avLst/>
-          </a:prstGeom>
-          <a:noFill/>
-        </p:spPr>
-        <p:txBody>
-          <a:bodyPr wrap="square" anchor="t" lIns="0" rIns="0" tIns="0" bIns="0">
-            <a:spAutoFit/>
-          </a:bodyPr>
-          <a:lstStyle/>
-          <a:p>
-            <a:pPr algn="ctr">
-              <a:lnSpc>
-                <a:spcPct val="100000"/>
-              </a:lnSpc>
-            </a:pPr>
-            <a:r>
-              <a:rPr sz="1000" b="1">
-                <a:solidFill>
-                  <a:srgbClr val="555555"/>
-                </a:solidFill>
-                <a:latin typeface="SamsungOneKorean"/>
-                <a:ea typeface="SamsungOneKorean"/>
-                <a:cs typeface="SamsungOneKorean"/>
-              </a:rPr>
-              <a:t>하단 점유의 구조적 상승</a:t>
-            </a:r>
-          </a:p>
-        </p:txBody>
-      </p:sp>
-      <p:cxnSp>
-        <p:nvCxnSpPr>
-          <p:cNvPr id="101" name="Connector 100"/>
-          <p:cNvCxnSpPr/>
-          <p:nvPr/>
-        </p:nvCxnSpPr>
-        <p:spPr>
-          <a:xfrm>
-            <a:off x="9875885" y="4370832"/>
-            <a:ext cx="1794602" cy="0"/>
-          </a:xfrm>
-          <a:prstGeom prst="line">
-            <a:avLst/>
-          </a:prstGeom>
-          <a:ln w="11430">
-            <a:solidFill>
-              <a:srgbClr val="D9D9D9"/>
-            </a:solidFill>
-          </a:ln>
-          <a:effectLst/>
-        </p:spPr>
-        <p:style>
-          <a:lnRef idx="2">
-            <a:schemeClr val="accent1"/>
-          </a:lnRef>
-          <a:fillRef idx="0">
-            <a:schemeClr val="accent1"/>
-          </a:fillRef>
-          <a:effectRef idx="1">
-            <a:schemeClr val="accent1"/>
-          </a:effectRef>
-          <a:fontRef idx="minor">
-            <a:schemeClr val="tx1"/>
-          </a:fontRef>
-        </p:style>
-      </p:cxnSp>
-      <p:sp>
-        <p:nvSpPr>
-          <p:cNvPr id="102" name="Rectangle 101"/>
-          <p:cNvSpPr/>
-          <p:nvPr/>
-        </p:nvSpPr>
-        <p:spPr>
-          <a:xfrm>
-            <a:off x="10343418" y="4206971"/>
-            <a:ext cx="365760" cy="163860"/>
-          </a:xfrm>
-          <a:prstGeom prst="rect">
-            <a:avLst/>
-          </a:prstGeom>
-          <a:solidFill>
-            <a:srgbClr val="C4CAE7"/>
-          </a:solidFill>
-          <a:ln>
-            <a:noFill/>
-          </a:ln>
-          <a:effectLst/>
-        </p:spPr>
-        <p:style>
-          <a:lnRef idx="1">
-            <a:schemeClr val="accent1"/>
-          </a:lnRef>
-          <a:fillRef idx="3">
-            <a:schemeClr val="accent1"/>
-          </a:fillRef>
-          <a:effectRef idx="2">
-            <a:schemeClr val="accent1"/>
-          </a:effectRef>
-          <a:fontRef idx="minor">
-            <a:schemeClr val="lt1"/>
-          </a:fontRef>
-        </p:style>
-        <p:txBody>
-          <a:bodyPr rtlCol="0" anchor="ctr"/>
-          <a:lstStyle/>
-          <a:p>
-            <a:pPr algn="ctr"/>
-          </a:p>
-        </p:txBody>
-      </p:sp>
-      <p:sp>
-        <p:nvSpPr>
-          <p:cNvPr id="103" name="Rectangle 102"/>
-          <p:cNvSpPr/>
-          <p:nvPr/>
-        </p:nvSpPr>
-        <p:spPr>
-          <a:xfrm>
-            <a:off x="10343418" y="3551529"/>
-            <a:ext cx="365760" cy="655441"/>
-          </a:xfrm>
-          <a:prstGeom prst="rect">
-            <a:avLst/>
-          </a:prstGeom>
-          <a:solidFill>
-            <a:srgbClr val="D8DEF1"/>
-          </a:solidFill>
-          <a:ln>
-            <a:noFill/>
-          </a:ln>
-          <a:effectLst/>
-        </p:spPr>
-        <p:style>
-          <a:lnRef idx="1">
-            <a:schemeClr val="accent1"/>
-          </a:lnRef>
-          <a:fillRef idx="3">
-            <a:schemeClr val="accent1"/>
-          </a:fillRef>
-          <a:effectRef idx="2">
-            <a:schemeClr val="accent1"/>
-          </a:effectRef>
-          <a:fontRef idx="minor">
-            <a:schemeClr val="lt1"/>
-          </a:fontRef>
-        </p:style>
-        <p:txBody>
-          <a:bodyPr rtlCol="0" anchor="ctr"/>
-          <a:lstStyle/>
-          <a:p>
-            <a:pPr algn="ctr"/>
-          </a:p>
-        </p:txBody>
-      </p:sp>
-      <p:sp>
-        <p:nvSpPr>
-          <p:cNvPr id="104" name="Rectangle 103"/>
-          <p:cNvSpPr/>
-          <p:nvPr/>
-        </p:nvSpPr>
-        <p:spPr>
-          <a:xfrm>
-            <a:off x="10343418" y="3200400"/>
-            <a:ext cx="365760" cy="351129"/>
-          </a:xfrm>
-          <a:prstGeom prst="rect">
-            <a:avLst/>
-          </a:prstGeom>
-          <a:solidFill>
-            <a:srgbClr val="EAEDF8"/>
-          </a:solidFill>
-          <a:ln>
-            <a:noFill/>
-          </a:ln>
-          <a:effectLst/>
-        </p:spPr>
-        <p:style>
-          <a:lnRef idx="1">
-            <a:schemeClr val="accent1"/>
-          </a:lnRef>
-          <a:fillRef idx="3">
-            <a:schemeClr val="accent1"/>
-          </a:fillRef>
-          <a:effectRef idx="2">
-            <a:schemeClr val="accent1"/>
-          </a:effectRef>
-          <a:fontRef idx="minor">
-            <a:schemeClr val="lt1"/>
-          </a:fontRef>
-        </p:style>
-        <p:txBody>
-          <a:bodyPr rtlCol="0" anchor="ctr"/>
-          <a:lstStyle/>
-          <a:p>
-            <a:pPr algn="ctr"/>
-          </a:p>
-        </p:txBody>
-      </p:sp>
-      <p:sp>
-        <p:nvSpPr>
-          <p:cNvPr id="105" name="TextBox 104"/>
-          <p:cNvSpPr txBox="1"/>
-          <p:nvPr/>
-        </p:nvSpPr>
-        <p:spPr>
-          <a:xfrm>
-            <a:off x="10251978" y="3008376"/>
-            <a:ext cx="548640" cy="146304"/>
-          </a:xfrm>
-          <a:prstGeom prst="rect">
-            <a:avLst/>
-          </a:prstGeom>
-          <a:noFill/>
-        </p:spPr>
-        <p:txBody>
-          <a:bodyPr wrap="square" anchor="t" lIns="0" rIns="0" tIns="0" bIns="0">
-            <a:spAutoFit/>
-          </a:bodyPr>
-          <a:lstStyle/>
-          <a:p>
-            <a:pPr algn="ctr">
-              <a:lnSpc>
-                <a:spcPct val="100000"/>
-              </a:lnSpc>
-            </a:pPr>
-            <a:r>
-              <a:rPr sz="1000" b="1">
-                <a:solidFill>
-                  <a:srgbClr val="8A8A8E"/>
-                </a:solidFill>
-                <a:latin typeface="SamsungOneKorean"/>
-                <a:ea typeface="SamsungOneKorean"/>
-                <a:cs typeface="SamsungOneKorean"/>
-              </a:rPr>
-              <a:t>100</a:t>
-            </a:r>
-          </a:p>
-        </p:txBody>
-      </p:sp>
-      <p:sp>
-        <p:nvSpPr>
-          <p:cNvPr id="106" name="Rectangle 105"/>
-          <p:cNvSpPr/>
-          <p:nvPr/>
-        </p:nvSpPr>
-        <p:spPr>
-          <a:xfrm>
-            <a:off x="10837194" y="4300606"/>
-            <a:ext cx="365760" cy="70225"/>
-          </a:xfrm>
-          <a:prstGeom prst="rect">
-            <a:avLst/>
-          </a:prstGeom>
-          <a:solidFill>
-            <a:srgbClr val="1428A0"/>
-          </a:solidFill>
-          <a:ln>
-            <a:noFill/>
-          </a:ln>
-          <a:effectLst/>
-        </p:spPr>
-        <p:style>
-          <a:lnRef idx="1">
-            <a:schemeClr val="accent1"/>
-          </a:lnRef>
-          <a:fillRef idx="3">
-            <a:schemeClr val="accent1"/>
-          </a:fillRef>
-          <a:effectRef idx="2">
-            <a:schemeClr val="accent1"/>
-          </a:effectRef>
-          <a:fontRef idx="minor">
-            <a:schemeClr val="lt1"/>
-          </a:fontRef>
-        </p:style>
-        <p:txBody>
-          <a:bodyPr rtlCol="0" anchor="ctr"/>
-          <a:lstStyle/>
-          <a:p>
-            <a:pPr algn="ctr"/>
-          </a:p>
-        </p:txBody>
-      </p:sp>
-      <p:sp>
-        <p:nvSpPr>
-          <p:cNvPr id="107" name="Rectangle 106"/>
-          <p:cNvSpPr/>
-          <p:nvPr/>
-        </p:nvSpPr>
-        <p:spPr>
-          <a:xfrm>
-            <a:off x="10837194" y="3715390"/>
-            <a:ext cx="365760" cy="585216"/>
-          </a:xfrm>
-          <a:prstGeom prst="rect">
-            <a:avLst/>
-          </a:prstGeom>
-          <a:solidFill>
-            <a:srgbClr val="5A73CC"/>
-          </a:solidFill>
-          <a:ln>
-            <a:noFill/>
-          </a:ln>
-          <a:effectLst/>
-        </p:spPr>
-        <p:style>
-          <a:lnRef idx="1">
-            <a:schemeClr val="accent1"/>
-          </a:lnRef>
-          <a:fillRef idx="3">
-            <a:schemeClr val="accent1"/>
-          </a:fillRef>
-          <a:effectRef idx="2">
-            <a:schemeClr val="accent1"/>
-          </a:effectRef>
-          <a:fontRef idx="minor">
-            <a:schemeClr val="lt1"/>
-          </a:fontRef>
-        </p:style>
-        <p:txBody>
-          <a:bodyPr rtlCol="0" anchor="ctr"/>
-          <a:lstStyle/>
-          <a:p>
-            <a:pPr algn="ctr"/>
-          </a:p>
-        </p:txBody>
-      </p:sp>
-      <p:sp>
-        <p:nvSpPr>
-          <p:cNvPr id="108" name="Rectangle 107"/>
-          <p:cNvSpPr/>
-          <p:nvPr/>
-        </p:nvSpPr>
-        <p:spPr>
-          <a:xfrm>
-            <a:off x="10837194" y="3305738"/>
-            <a:ext cx="365760" cy="409651"/>
-          </a:xfrm>
-          <a:prstGeom prst="rect">
-            <a:avLst/>
-          </a:prstGeom>
-          <a:solidFill>
-            <a:srgbClr val="ADB9E4"/>
-          </a:solidFill>
-          <a:ln>
-            <a:noFill/>
-          </a:ln>
-          <a:effectLst/>
-        </p:spPr>
-        <p:style>
-          <a:lnRef idx="1">
-            <a:schemeClr val="accent1"/>
-          </a:lnRef>
-          <a:fillRef idx="3">
-            <a:schemeClr val="accent1"/>
-          </a:fillRef>
-          <a:effectRef idx="2">
-            <a:schemeClr val="accent1"/>
-          </a:effectRef>
-          <a:fontRef idx="minor">
-            <a:schemeClr val="lt1"/>
-          </a:fontRef>
-        </p:style>
-        <p:txBody>
-          <a:bodyPr rtlCol="0" anchor="ctr"/>
-          <a:lstStyle/>
-          <a:p>
-            <a:pPr algn="ctr"/>
-          </a:p>
-        </p:txBody>
-      </p:sp>
-      <p:sp>
-        <p:nvSpPr>
-          <p:cNvPr id="109" name="Rectangle 108"/>
+          <p:cNvPr id="117" name="Rectangle 116"/>
           <p:cNvSpPr/>
           <p:nvPr/>
         </p:nvSpPr>
@@ -8361,7 +8791,7 @@
       </p:sp>
       <p:sp>
         <p:nvSpPr>
-          <p:cNvPr id="110" name="TextBox 109"/>
+          <p:cNvPr id="118" name="TextBox 117"/>
           <p:cNvSpPr txBox="1"/>
           <p:nvPr/>
         </p:nvSpPr>
@@ -8402,7 +8832,7 @@
       </p:sp>
       <p:sp>
         <p:nvSpPr>
-          <p:cNvPr id="111" name="TextBox 110"/>
+          <p:cNvPr id="119" name="TextBox 118"/>
           <p:cNvSpPr txBox="1"/>
           <p:nvPr/>
         </p:nvSpPr>
@@ -8443,7 +8873,7 @@
       </p:sp>
       <p:sp>
         <p:nvSpPr>
-          <p:cNvPr id="112" name="TextBox 111"/>
+          <p:cNvPr id="120" name="TextBox 119"/>
           <p:cNvSpPr txBox="1"/>
           <p:nvPr/>
         </p:nvSpPr>
@@ -8484,7 +8914,7 @@
       </p:sp>
       <p:sp>
         <p:nvSpPr>
-          <p:cNvPr id="113" name="TextBox 112"/>
+          <p:cNvPr id="121" name="TextBox 120"/>
           <p:cNvSpPr txBox="1"/>
           <p:nvPr/>
         </p:nvSpPr>
@@ -8525,7 +8955,7 @@
       </p:sp>
       <p:sp>
         <p:nvSpPr>
-          <p:cNvPr id="114" name="TextBox 113"/>
+          <p:cNvPr id="122" name="TextBox 121"/>
           <p:cNvSpPr txBox="1"/>
           <p:nvPr/>
         </p:nvSpPr>
@@ -8584,7 +9014,7 @@
       </p:sp>
       <p:sp>
         <p:nvSpPr>
-          <p:cNvPr id="115" name="Rectangle 114"/>
+          <p:cNvPr id="123" name="Rectangle 122"/>
           <p:cNvSpPr/>
           <p:nvPr/>
         </p:nvSpPr>
@@ -8628,7 +9058,7 @@
       </p:sp>
       <p:sp>
         <p:nvSpPr>
-          <p:cNvPr id="116" name="TextBox 115"/>
+          <p:cNvPr id="124" name="TextBox 123"/>
           <p:cNvSpPr txBox="1"/>
           <p:nvPr/>
         </p:nvSpPr>
@@ -8705,7 +9135,7 @@
       </p:sp>
       <p:sp>
         <p:nvSpPr>
-          <p:cNvPr id="117" name="Rectangle 116"/>
+          <p:cNvPr id="125" name="Rectangle 124"/>
           <p:cNvSpPr/>
           <p:nvPr/>
         </p:nvSpPr>
@@ -8749,7 +9179,7 @@
       </p:sp>
       <p:sp>
         <p:nvSpPr>
-          <p:cNvPr id="118" name="TextBox 117"/>
+          <p:cNvPr id="126" name="TextBox 125"/>
           <p:cNvSpPr txBox="1"/>
           <p:nvPr/>
         </p:nvSpPr>
@@ -8826,7 +9256,7 @@
       </p:sp>
       <p:sp>
         <p:nvSpPr>
-          <p:cNvPr id="119" name="Rectangle 118"/>
+          <p:cNvPr id="127" name="Rectangle 126"/>
           <p:cNvSpPr/>
           <p:nvPr/>
         </p:nvSpPr>
@@ -8870,7 +9300,7 @@
       </p:sp>
       <p:sp>
         <p:nvSpPr>
-          <p:cNvPr id="120" name="TextBox 119"/>
+          <p:cNvPr id="128" name="TextBox 127"/>
           <p:cNvSpPr txBox="1"/>
           <p:nvPr/>
         </p:nvSpPr>
@@ -8947,7 +9377,7 @@
       </p:sp>
       <p:sp>
         <p:nvSpPr>
-          <p:cNvPr id="121" name="Rectangle 120"/>
+          <p:cNvPr id="129" name="Rectangle 128"/>
           <p:cNvSpPr/>
           <p:nvPr/>
         </p:nvSpPr>
@@ -8991,7 +9421,7 @@
       </p:sp>
       <p:sp>
         <p:nvSpPr>
-          <p:cNvPr id="122" name="TextBox 121"/>
+          <p:cNvPr id="130" name="TextBox 129"/>
           <p:cNvSpPr txBox="1"/>
           <p:nvPr/>
         </p:nvSpPr>
@@ -9068,7 +9498,7 @@
       </p:sp>
       <p:sp>
         <p:nvSpPr>
-          <p:cNvPr id="123" name="Rectangle 122"/>
+          <p:cNvPr id="131" name="Rectangle 130"/>
           <p:cNvSpPr/>
           <p:nvPr/>
         </p:nvSpPr>
@@ -9112,7 +9542,7 @@
       </p:sp>
       <p:sp>
         <p:nvSpPr>
-          <p:cNvPr id="124" name="TextBox 123"/>
+          <p:cNvPr id="132" name="TextBox 131"/>
           <p:cNvSpPr txBox="1"/>
           <p:nvPr/>
         </p:nvSpPr>
@@ -9189,7 +9619,7 @@
       </p:sp>
       <p:sp>
         <p:nvSpPr>
-          <p:cNvPr id="125" name="Rounded Rectangle 124"/>
+          <p:cNvPr id="133" name="Rounded Rectangle 132"/>
           <p:cNvSpPr/>
           <p:nvPr/>
         </p:nvSpPr>
@@ -9235,7 +9665,7 @@
       </p:sp>
       <p:sp>
         <p:nvSpPr>
-          <p:cNvPr id="126" name="TextBox 125"/>
+          <p:cNvPr id="134" name="TextBox 133"/>
           <p:cNvSpPr txBox="1"/>
           <p:nvPr/>
         </p:nvSpPr>
@@ -9298,7 +9728,7 @@
       </p:sp>
       <p:sp>
         <p:nvSpPr>
-          <p:cNvPr id="127" name="TextBox 126"/>
+          <p:cNvPr id="135" name="TextBox 134"/>
           <p:cNvSpPr txBox="1"/>
           <p:nvPr/>
         </p:nvSpPr>
@@ -9332,14 +9762,14 @@
                 <a:ea typeface="SamsungOneKorean"/>
                 <a:cs typeface="SamsungOneKorean"/>
               </a:rPr>
-              <a:t>수요 막대 기준: 2025 글로벌 메모리 매출 실측 구성(DRAM $1,657억 중 HBM $340억 · NAND $697억, TrendForce·Yole)=100, 시나리오 막대는 방향 가정 적용 · 공급 차트: 3사 CAPEX 합산(각사 IR)·CXMT 점유(TrendForce·FT) · 헤드라인은 가상 예시 · 대응 전략은 별도 장 · 기준일 2026-08</a:t>
-            </a:r>
-          </a:p>
-        </p:txBody>
-      </p:sp>
-      <p:sp>
-        <p:nvSpPr>
-          <p:cNvPr id="128" name="TextBox 127"/>
+              <a:t>수요 막대 기준: 2025 글로벌 메모리 매출 실측 구성(DRAM $1,657억 중 HBM $340억 · NAND $697억, TrendForce·Yole)=100, 시나리오 막대는 방향 가정 적용 · 공급 차트: DRAM 3사·NAND 6사 부문별 CAPEX(TrendForce·각사 IR, 27Eᵉ·28Eᵉ는 과잉 유지 가정)·CXMT 점유(TrendForce·FT) · 헤드라인은 가상 예시 · 대응 전략은 별도 장 · 기준일 2026-08</a:t>
+            </a:r>
+          </a:p>
+        </p:txBody>
+      </p:sp>
+      <p:sp>
+        <p:nvSpPr>
+          <p:cNvPr id="136" name="TextBox 135"/>
           <p:cNvSpPr txBox="1"/>
           <p:nvPr/>
         </p:nvSpPr>

--- a/outputs/presentation/downturn-scenario-impact.pptx
+++ b/outputs/presentation/downturn-scenario-impact.pptx
@@ -529,7 +529,7 @@
           </a:p>
           <a:p>
             <a:r>
-              <a:t>3. CAPEX가 몰리는 경우(공급발·기존 진영): 수요는 멀쩡한데 호황기에 결정된 투자가 한꺼번에 캐파로 도착하는 경로. 차트는 부문별 CAPEX로, DRAM 3사(삼성·SK하이닉스·Micron)가 2025 $46.5B에서 2026E $54.0B, NAND 6사(삼성·키옥시아·SK/솔리다임·Micron·샌디스크·YMTC 산업 합계)가 $21.1B에서 $22.2B로 올라선다(TrendForce·각사 IR). 2027E·28E 막대는 공표된 전망치가 아니라 이 시나리오의 정의인 '과잉 유지 가정'(2026E 수준 지속)을 표시한 것으로 옅은 색·점선으로 구분했다. 투자가 캐파로 바뀌는 리드타임 2~3년을 감안하면 2028~29에 Micron 아이다호, SK하이닉스 용인 1기, 국내 신규 팹이 동시에 가동된다(모두 착공이 끝난 확정 사실). 여기에 3강 절제가 무너지면(점유율 목표 선언, 조기 램프업) 급락으로 전환된다. 다섯 갈래 중 감산이 직접 효과를 내는 유일한 경우다.</a:t>
+              <a:t>3. CAPEX가 몰리는 경우(공급발·기존 진영): 수요는 멀쩡한데 호황기에 결정된 투자가 한꺼번에 캐파로 도착하는 경로. 차트는 부문별 CAPEX로, DRAM 3사(삼성·SK하이닉스·Micron)가 2025 $46.5B에서 2026E $54.0B, NAND 6사(삼성·키옥시아·SK/솔리다임·Micron·샌디스크·YMTC 산업 합계)가 $21.1B에서 $22.2B로 올라선다(TrendForce·각사 IR). 2027E·28E 막대는 리서치 기반 추정(ᵉ)이다: 2027E 합산 ≈$81B는 DRAM 3사 ≈$58B(반도체 장비 시장 전망의 DRAM 장비 매출 2027 +7.8%를 프록시로 적용)와 NAND 6사 ≈$23B(Kioxia FY26~28 연평균 ¥4,700억 고원 유지 계획 +66% vs FY25, Kioxia-SanDisk 2026 합산 +40%, YMTC 캐파 2026~27 약 2배)로 구성했고, 2028E는 공표치 부재로 27E 수준 유지 가정이다(TrendForce 2026-07-30: 신규 캐파의 실질 산출 기여가 2028년 본격화 = 투자 고원 지속과 정합). 실측·계획과 구분되도록 옅은 색·점선·ᵉ로 표기했다. 산출 방법과 한계는 sources/articles/memory-capex-outlook-2027-2028-2026-08-26.md 참조. 투자가 캐파로 바뀌는 리드타임 2~3년을 감안하면 2028~29에 Micron 아이다호, SK하이닉스 용인 1기, 국내 신규 팹이 동시에 가동된다(모두 착공이 끝난 확정 사실). 여기에 3강 절제가 무너지면(점유율 목표 선언, 조기 램프업) 급락으로 전환된다. 다섯 갈래 중 감산이 직접 효과를 내는 유일한 경우다.</a:t>
             </a:r>
           </a:p>
           <a:p>
@@ -557,13 +557,19 @@
           <a:p/>
           <a:p>
             <a:r>
-              <a:t>[풀어야 할 문제] 전략 자체가 아니라 전략이 풀어야 할 문제를 정의한 것이다(전략은 다음 장). 1번: HBM4 캐파는 +50% 증설이 잡혀 있는데 조달이 끊기면 팔 곳이 없다. DRAM-CIS 설비 공용률 80%인 전환 옵션과 take-or-pay·NTB 계약 방어선 중 무엇을 어디까지 쓸 것인가. 2번: GPU당 HBM 탑재량 같은 원단위 지표가 현재 추적 체계에 없다(감별 지표 DX-8 미구축). enterprise SSD 1위(점유 38.2%)를 활용한 믹스 이동이 유일한 상방. 3번: 2022-10 무감산 선언에서 2023-04 감산 공식화까지 6개월이 걸렸고 그 사이 DS 적자 -4.58조가 쌓였다. 같은 지연을 막을 30일 결정 규율이 문제. 4번: DDR4·LPDDR4 하단은 CXMT 침투로 돌아오지 않는다. 철수 시점과 라인 전환처(CIS·차량용), 그리고 HBM 인증 장벽 유지가 문제. 5번: 2019년 HBM팀 해체가 점유 40%에서 17%로의 추락으로 이어진 전례가 있다. 전환기에 별동대와 R&amp;D 하한을 배분 논리에서 지켜내는 것이 문제.</a:t>
+              <a:t>[풀어야 할 문제] 전략 자체가 아니라 전략이 풀어야 할 문제를 정의한 것이다(전략은 다음 장). 1번: HBM4 캐파는 +50% 증설이 잡혀 있는데 조달이 끊기면 팔 곳이 없다. DRAM-CIS 설비 공용률 80%인 전환 옵션과 take-or-pay·NTB 계약 방어선 중 무엇을 어디까지 쓸 것인가. 2번: 필요량이 줄어드는 경로에서 HBM을 떠난 수요는 KV 캐시 오프로드를 타고 SSD로 온다. 문제는 그 수요가 우리 eSSD(1위 38.2%)에 머물게 할 고리다. 하드웨어 스펙만으로는 교체가 쉬우니, 서버 고객의 스토리지 스택에 깊이 박히는 표준·소프트웨어 층(예: FDP 같은 데이터 배치 표준의 주도권)이 잠금 고리의 후보가 된다. 원단위 추적 지표(DX-8) 확보도 병행 과제. 3번: 2022-10 무감산 선언에서 2023-04 감산 공식화까지 6개월이 걸렸고 그 사이 DS 적자 -4.58조가 쌓였다. 같은 지연을 막을 30일 결정 규율이 문제. 4번: DDR4·LPDDR4 하단은 CXMT 침투로 돌아오지 않는다. 철수 시점과 라인 전환처(CIS·차량용), 그리고 HBM 인증 장벽 유지가 문제. 5번: 2019년 HBM팀 해체가 점유 40%에서 17%로의 추락으로 이어진 전례가 있다. 전환기에 별동대와 R&amp;D 하한을 배분 논리에서 지켜내는 것이 문제.</a:t>
             </a:r>
           </a:p>
           <a:p/>
           <a:p>
             <a:r>
-              <a:t>[출처] wiki/downturn/samsung-impact.md §5(단일 소스), scenario-matrix.md, downturn-history.md, key-drivers.md. 수치 원출처: hyperscaler-q2-2026-actuals(FCF·CapEx), kv-cache-ssd-offload(10배), memory-capex-history(3사 CAPEX), apple-cxmt-china-dram·TrendForce(CXMT), enterprise-ssd-market-1q26(38.2%), fab-toolset-commonality(공용률 80%), samsung-downturn-actions(2023 감산 지연). 헤드라인은 상황 이해를 돕는 가상 예시 문장으로 실제 보도가 아니다.</a:t>
+              <a:t>[문제와 대응 방향의 연결] 다섯 문제는 다음 장(대응 전략)의 후보 방향과 자연스럽게 이어진다. 1·4번(캐파의 전환처, 하단 철수 후 전환)은 라인을 다른 제품으로 돌릴 수 있는 몸을 갖추는 방향을, 2번(SSD로 오는 수요를 묶어둘 표준·SW 고리)은 서버 고객 락인을 만드는 스토리지 소프트웨어 층의 주도권을, 5번(전환기 별동대·R&amp;D 하한)은 zHBM 등 차세대 메모리 연구의 보존·집중을 가리킨다. 발표 시 결론을 못박지 말고 '문제가 가리키는 방향'으로만 열어 둘 것.</a:t>
+            </a:r>
+          </a:p>
+          <a:p/>
+          <a:p>
+            <a:r>
+              <a:t>[출처] wiki/downturn/samsung-impact.md §5(단일 소스), scenario-matrix.md, downturn-history.md, key-drivers.md, memory-capex-outlook-2027-2028(2027~28 CAPEX 추정). 수치 원출처: hyperscaler-q2-2026-actuals(FCF·CapEx), kv-cache-ssd-offload(10배), memory-capex-history(3사 CAPEX), apple-cxmt-china-dram·TrendForce(CXMT), enterprise-ssd-market-1q26(38.2%), fab-toolset-commonality(공용률 80%), samsung-downturn-actions(2023 감산 지연). 헤드라인은 상황 이해를 돕는 가상 예시 문장으로 실제 보도가 아니다.</a:t>
             </a:r>
           </a:p>
         </p:txBody>
@@ -7159,8 +7165,8 @@
         </p:nvSpPr>
         <p:spPr>
           <a:xfrm>
-            <a:off x="5864961" y="3752365"/>
-            <a:ext cx="274320" cy="618466"/>
+            <a:off x="5864961" y="3800447"/>
+            <a:ext cx="274320" cy="570384"/>
           </a:xfrm>
           <a:prstGeom prst="rect">
             <a:avLst/>
@@ -7205,8 +7211,8 @@
         </p:nvSpPr>
         <p:spPr>
           <a:xfrm>
-            <a:off x="5864961" y="3471727"/>
-            <a:ext cx="274320" cy="280637"/>
+            <a:off x="5864961" y="3541627"/>
+            <a:ext cx="274320" cy="258819"/>
           </a:xfrm>
           <a:prstGeom prst="rect">
             <a:avLst/>
@@ -7251,7 +7257,7 @@
         </p:nvSpPr>
         <p:spPr>
           <a:xfrm>
-            <a:off x="5755233" y="3288847"/>
+            <a:off x="5755233" y="3358747"/>
             <a:ext cx="493776" cy="146304"/>
           </a:xfrm>
           <a:prstGeom prst="rect">
@@ -7333,8 +7339,8 @@
         </p:nvSpPr>
         <p:spPr>
           <a:xfrm>
-            <a:off x="6262725" y="3652612"/>
-            <a:ext cx="274320" cy="718219"/>
+            <a:off x="6262725" y="3708449"/>
+            <a:ext cx="274320" cy="662382"/>
           </a:xfrm>
           <a:prstGeom prst="rect">
             <a:avLst/>
@@ -7379,8 +7385,8 @@
         </p:nvSpPr>
         <p:spPr>
           <a:xfrm>
-            <a:off x="6262725" y="3357344"/>
-            <a:ext cx="274320" cy="295268"/>
+            <a:off x="6262725" y="3436136"/>
+            <a:ext cx="274320" cy="272312"/>
           </a:xfrm>
           <a:prstGeom prst="rect">
             <a:avLst/>
@@ -7425,7 +7431,7 @@
         </p:nvSpPr>
         <p:spPr>
           <a:xfrm>
-            <a:off x="6152997" y="3174464"/>
+            <a:off x="6152997" y="3253256"/>
             <a:ext cx="493776" cy="146304"/>
           </a:xfrm>
           <a:prstGeom prst="rect">
@@ -7507,8 +7513,8 @@
         </p:nvSpPr>
         <p:spPr>
           <a:xfrm>
-            <a:off x="6660489" y="3652612"/>
-            <a:ext cx="274320" cy="718219"/>
+            <a:off x="6660489" y="3656930"/>
+            <a:ext cx="274320" cy="713901"/>
           </a:xfrm>
           <a:prstGeom prst="rect">
             <a:avLst/>
@@ -7553,8 +7559,8 @@
         </p:nvSpPr>
         <p:spPr>
           <a:xfrm>
-            <a:off x="6660489" y="3357344"/>
-            <a:ext cx="274320" cy="295268"/>
+            <a:off x="6660489" y="3374805"/>
+            <a:ext cx="274320" cy="282125"/>
           </a:xfrm>
           <a:prstGeom prst="rect">
             <a:avLst/>
@@ -7600,7 +7606,7 @@
         </p:nvSpPr>
         <p:spPr>
           <a:xfrm>
-            <a:off x="6550761" y="3174464"/>
+            <a:off x="6550761" y="3191925"/>
             <a:ext cx="493776" cy="146304"/>
           </a:xfrm>
           <a:prstGeom prst="rect">
@@ -7628,7 +7634,7 @@
                 <a:ea typeface="SamsungOneKorean"/>
                 <a:cs typeface="SamsungOneKorean"/>
               </a:rPr>
-              <a:t>76ᵉ</a:t>
+              <a:t>81ᵉ</a:t>
             </a:r>
           </a:p>
         </p:txBody>
@@ -7682,8 +7688,8 @@
         </p:nvSpPr>
         <p:spPr>
           <a:xfrm>
-            <a:off x="7058253" y="3652612"/>
-            <a:ext cx="274320" cy="718219"/>
+            <a:off x="7058253" y="3656930"/>
+            <a:ext cx="274320" cy="713901"/>
           </a:xfrm>
           <a:prstGeom prst="rect">
             <a:avLst/>
@@ -7728,8 +7734,8 @@
         </p:nvSpPr>
         <p:spPr>
           <a:xfrm>
-            <a:off x="7058253" y="3357344"/>
-            <a:ext cx="274320" cy="295268"/>
+            <a:off x="7058253" y="3374805"/>
+            <a:ext cx="274320" cy="282125"/>
           </a:xfrm>
           <a:prstGeom prst="rect">
             <a:avLst/>
@@ -7775,7 +7781,7 @@
         </p:nvSpPr>
         <p:spPr>
           <a:xfrm>
-            <a:off x="6948525" y="3174464"/>
+            <a:off x="6948525" y="3191925"/>
             <a:ext cx="493776" cy="146304"/>
           </a:xfrm>
           <a:prstGeom prst="rect">
@@ -7803,7 +7809,7 @@
                 <a:ea typeface="SamsungOneKorean"/>
                 <a:cs typeface="SamsungOneKorean"/>
               </a:rPr>
-              <a:t>76ᵉ</a:t>
+              <a:t>81ᵉ</a:t>
             </a:r>
           </a:p>
         </p:txBody>
@@ -7885,7 +7891,7 @@
                 <a:ea typeface="SamsungOneKorean"/>
                 <a:cs typeface="SamsungOneKorean"/>
               </a:rPr>
-              <a:t>27E·28E = 과잉 유지 가정</a:t>
+              <a:t>27E·28Eᵉ = 리서치 기반 추정</a:t>
             </a:r>
           </a:p>
         </p:txBody>
@@ -9213,7 +9219,7 @@
                 <a:ea typeface="SamsungOneKorean"/>
                 <a:cs typeface="SamsungOneKorean"/>
               </a:rPr>
-              <a:t>GPU당 HBM 탑재량을 읽을</a:t>
+              <a:t>밀려난 수요는 SSD로 온다:</a:t>
             </a:r>
           </a:p>
           <a:p>
@@ -9231,7 +9237,7 @@
                 <a:ea typeface="SamsungOneKorean"/>
                 <a:cs typeface="SamsungOneKorean"/>
               </a:rPr>
-              <a:t>지표가 없다: 추적 체계와</a:t>
+              <a:t>서버 고객을 묶어둘</a:t>
             </a:r>
           </a:p>
           <a:p>
@@ -9249,7 +9255,7 @@
                 <a:ea typeface="SamsungOneKorean"/>
                 <a:cs typeface="SamsungOneKorean"/>
               </a:rPr>
-              <a:t>eSSD(1위 38.2%) 믹스 이동</a:t>
+              <a:t>표준·SW 고리의 확보</a:t>
             </a:r>
           </a:p>
         </p:txBody>
@@ -9762,7 +9768,7 @@
                 <a:ea typeface="SamsungOneKorean"/>
                 <a:cs typeface="SamsungOneKorean"/>
               </a:rPr>
-              <a:t>수요 막대 기준: 2025 글로벌 메모리 매출 실측 구성(DRAM $1,657억 중 HBM $340억 · NAND $697억, TrendForce·Yole)=100, 시나리오 막대는 방향 가정 적용 · 공급 차트: DRAM 3사·NAND 6사 부문별 CAPEX(TrendForce·각사 IR, 27Eᵉ·28Eᵉ는 과잉 유지 가정)·CXMT 점유(TrendForce·FT) · 헤드라인은 가상 예시 · 대응 전략은 별도 장 · 기준일 2026-08</a:t>
+              <a:t>수요 막대 기준: 2025 글로벌 메모리 매출 실측 구성(DRAM $1,657억 중 HBM $340억 · NAND $697억, TrendForce·Yole)=100, 시나리오 막대는 방향 가정 적용 · 공급 차트: DRAM 3사·NAND 6사 부문별 CAPEX(TrendForce·각사 IR, 27Eᵉ=장비 매출 +7.8% 프록시+Kioxia ¥470B 고원·28Eᵉ=유지 가정)·CXMT 점유(TrendForce·FT) · 헤드라인은 가상 예시 · 대응 전략은 별도 장 · 기준일 2026-08</a:t>
             </a:r>
           </a:p>
         </p:txBody>

--- a/outputs/presentation/downturn-scenario-impact.pptx
+++ b/outputs/presentation/downturn-scenario-impact.pptx
@@ -6,6 +6,7 @@
   </p:sldMasterIdLst>
   <p:sldIdLst>
     <p:sldId id="256" r:id="rId7"/>
+    <p:sldId id="257" r:id="rId9"/>
   </p:sldIdLst>
   <p:sldSz cx="12191695" cy="6858000" type="screen4x3"/>
   <p:notesSz cx="6858000" cy="9144000"/>
@@ -570,6 +571,106 @@
           <a:p>
             <a:r>
               <a:t>[출처] wiki/downturn/samsung-impact.md §5(단일 소스), scenario-matrix.md, downturn-history.md, key-drivers.md, memory-capex-outlook-2027-2028(2027~28 CAPEX 추정). 수치 원출처: hyperscaler-q2-2026-actuals(FCF·CapEx), kv-cache-ssd-offload(10배), memory-capex-history(3사 CAPEX), apple-cxmt-china-dram·TrendForce(CXMT), enterprise-ssd-market-1q26(38.2%), fab-toolset-commonality(공용률 80%), samsung-downturn-actions(2023 감산 지연). 헤드라인은 상황 이해를 돕는 가상 예시 문장으로 실제 보도가 아니다.</a:t>
+            </a:r>
+          </a:p>
+        </p:txBody>
+      </p:sp>
+      <p:sp>
+        <p:nvSpPr>
+          <p:cNvPr id="4" name="Slide Number Placeholder 3"/>
+          <p:cNvSpPr>
+            <a:spLocks noGrp="1"/>
+          </p:cNvSpPr>
+          <p:nvPr>
+            <p:ph type="sldNum" idx="5" sz="quarter"/>
+          </p:nvPr>
+        </p:nvSpPr>
+        <p:spPr/>
+      </p:sp>
+    </p:spTree>
+  </p:cSld>
+  <p:clrMapOvr>
+    <a:masterClrMapping/>
+  </p:clrMapOvr>
+</p:notes>
+</file>
+
+<file path=ppt/notesSlides/notesSlide2.xml><?xml version="1.0" encoding="utf-8"?>
+<p:notes xmlns:a="http://schemas.openxmlformats.org/drawingml/2006/main" xmlns:p="http://schemas.openxmlformats.org/presentationml/2006/main" xmlns:r="http://schemas.openxmlformats.org/officeDocument/2006/relationships">
+  <p:cSld>
+    <p:spTree>
+      <p:nvGrpSpPr>
+        <p:cNvPr id="1" name=""/>
+        <p:cNvGrpSpPr/>
+        <p:nvPr/>
+      </p:nvGrpSpPr>
+      <p:grpSpPr>
+        <a:xfrm>
+          <a:off x="0" y="0"/>
+          <a:ext cx="0" cy="0"/>
+          <a:chOff x="0" y="0"/>
+          <a:chExt cx="0" cy="0"/>
+        </a:xfrm>
+      </p:grpSpPr>
+      <p:sp>
+        <p:nvSpPr>
+          <p:cNvPr id="2" name="Slide Image Placeholder 1"/>
+          <p:cNvSpPr>
+            <a:spLocks noGrp="1"/>
+          </p:cNvSpPr>
+          <p:nvPr>
+            <p:ph type="sldImg" idx="2"/>
+          </p:nvPr>
+        </p:nvSpPr>
+        <p:spPr/>
+      </p:sp>
+      <p:sp>
+        <p:nvSpPr>
+          <p:cNvPr id="3" name="Notes Placeholder 2"/>
+          <p:cNvSpPr>
+            <a:spLocks noGrp="1"/>
+          </p:cNvSpPr>
+          <p:nvPr>
+            <p:ph type="body" idx="3" sz="quarter"/>
+          </p:nvPr>
+        </p:nvSpPr>
+        <p:spPr/>
+        <p:txBody>
+          <a:bodyPr/>
+          <a:lstStyle/>
+          <a:p>
+            <a:r>
+              <a:t>[슬라이드 위치] 앞 장(다섯 갈래)의 1번 시나리오(투자 자금이 끊기는 경우)에 대한 심화 장. 질문은 하나다: 이 시나리오는 지금 얼마나 가까이 와 있는가. 구성은 지출(왼쪽), 창출(가운데), 판정(오른쪽)의 3단이다.</a:t>
+            </a:r>
+          </a:p>
+          <a:p/>
+          <a:p>
+            <a:r>
+              <a:t>[왼쪽: 지출 패널] 4사(Alphabet·Amazon·Microsoft·Meta) 합산 AI CapEx는 2024 약 $205B, 2025 약 $410B(+100%), 2026E 약 $750B(+82%)로 2년 새 3.7배가 됐다. 2026E는 Q2 실적 발표 후 네 곳 전원이 가이던스를 올린 결과이고 삭감 발표는 0건이다(Amazon ~$220B, Google $195~205B, Meta $130~145B, MS ~$190B + FY27 $255~260B 상향). 2027E $1,100B+는 JPMorgan 전망으로 점선ᵉ 표기했다. 참고로 4사는 토지·전력·셸 같은 장기 자산은 조기 확약하고 칩은 필요 몇 달 전에 사는 디리스킹 관행을 공통 채택 중이다.</a:t>
+            </a:r>
+          </a:p>
+          <a:p/>
+          <a:p>
+            <a:r>
+              <a:t>[가운데: 창출 패널] 지출을 받쳐줄 이익·현금의 실측이 핵심이다. 첫째, AI CapEx가 영업현금흐름에서 차지하는 비율이 2024년 76%에서 2026E 94%로 올라 자기잠식 임계점에 접근했다. 내부 현금만으로는 지출을 유지하기 어려워지는 지점이며, 그 다음 수단이 부채·SPV 조달이라서 이 시나리오(조달 경색)의 노출이 커진다. 둘째, Meta의 분기 FCF가 -91%($784M)로 급감했고 Amazon은 TTM FCF가 약 -$7.6B로 적자 전환해 다이버전스가 개별 회사가 아니라 패턴이 될 조짐이다. 셋째, Bain 프레임에 따르면 2030년 지출 궤도를 수익성 있게 회수하려면 연 $2조의 신규 AI 매출이 필요한데 자금 갭이 연 $800B다. 지출의 지속 가능성 자체가 외부 조달에 걸려 있다는 뜻이다.</a:t>
+            </a:r>
+          </a:p>
+          <a:p/>
+          <a:p>
+            <a:r>
+              <a:t>[오른쪽: 판정 보드] 실측된 전조 3건(빨강)과 미발동 발화 신호 4건(초록)을 구분하는 것이 이 장의 핵심 규율이다. 전조: FCF 다이버전스 2사, CapEx/현금흐름 94%, 공급자(SK하이닉스) 영업이익률 사상 최대(~76%)라는 후기순환 신호. 미발동: CapEx 삭감 발표 0건(감별 트리거는 YoY -25%), GPU 임대가 firming(H100 ~$2.69·H200 ~$4.38, 트리거는 6개월 -35% 급락), DC 착공·발주 취소 미관측(파이프라인 55.9GW 유지), Google Cloud 백로그 $514B로 오히려 +$50B 증가. 완충 요인으로 take-or-pay·NTB 계약 락인이 발화 후에도 초기 6~12개월의 매출을 흡수한다. 그래서 같은 발화라도 커버리지 만기가 몰려 있으면 절벽, 분산되어 있으면 완만한 하강이 된다.</a:t>
+            </a:r>
+          </a:p>
+          <a:p/>
+          <a:p>
+            <a:r>
+              <a:t>[판정을 말로 하면] "가능성이 오르는 국면이지, 발현 국면이 아니다." 확률 숫자는 표기하지 않되, 방향은 분명하다: 괴리(전조)는 계속 벌어지고 있고, 발화는 아직 시작되지 않았다. 다음 변곡은 FCF 반전이 실제 발주 동결로 번지는 순간이며, 빅테크 FCF·조달 스프레드와 GPU 임대가가 그 최선행 감시선이다. 질문이 나오면: 이 감시선은 대시보드 EWI로 이미 배선되어 있고, 트리거 도달 시 30일 내 대응 규율과 연결된다.</a:t>
+            </a:r>
+          </a:p>
+          <a:p/>
+          <a:p>
+            <a:r>
+              <a:t>[출처] wiki/downturn/samsung-impact.md §5.1c(단일 소스). 수치 원출처: ai-capex(연도별 CapEx), hyperscaler-q2-2026-actuals(가이던스 상향·FCF·임대가), hyperscaler-q2-2026-capex(백로그·SK OPM), ai-compute-economics-gap(Bain $2조·$800B), visualizations 하이퍼스케일러 구성(76%→94%). 2027E는 JPMorgan 전망 인용.</a:t>
             </a:r>
           </a:p>
         </p:txBody>
@@ -9776,6 +9877,2942 @@
       <p:sp>
         <p:nvSpPr>
           <p:cNvPr id="136" name="TextBox 135"/>
+          <p:cNvSpPr txBox="1"/>
+          <p:nvPr/>
+        </p:nvSpPr>
+        <p:spPr>
+          <a:xfrm>
+            <a:off x="10390327" y="6071616"/>
+            <a:ext cx="1371600" cy="164592"/>
+          </a:xfrm>
+          <a:prstGeom prst="rect">
+            <a:avLst/>
+          </a:prstGeom>
+          <a:noFill/>
+        </p:spPr>
+        <p:txBody>
+          <a:bodyPr wrap="square" anchor="t" lIns="0" rIns="0" tIns="0" bIns="0">
+            <a:spAutoFit/>
+          </a:bodyPr>
+          <a:lstStyle/>
+          <a:p>
+            <a:pPr algn="r">
+              <a:lnSpc>
+                <a:spcPct val="100000"/>
+              </a:lnSpc>
+            </a:pPr>
+            <a:r>
+              <a:rPr sz="900" b="0">
+                <a:solidFill>
+                  <a:srgbClr val="555555"/>
+                </a:solidFill>
+                <a:latin typeface="SamsungOneKorean"/>
+                <a:ea typeface="SamsungOneKorean"/>
+                <a:cs typeface="SamsungOneKorean"/>
+              </a:rPr>
+              <a:t>[문서등급 표기]</a:t>
+            </a:r>
+          </a:p>
+        </p:txBody>
+      </p:sp>
+    </p:spTree>
+  </p:cSld>
+  <p:clrMapOvr>
+    <a:masterClrMapping/>
+  </p:clrMapOvr>
+</p:sld>
+</file>
+
+<file path=ppt/slides/slide2.xml><?xml version="1.0" encoding="utf-8"?>
+<p:sld xmlns:a="http://schemas.openxmlformats.org/drawingml/2006/main" xmlns:p="http://schemas.openxmlformats.org/presentationml/2006/main" xmlns:r="http://schemas.openxmlformats.org/officeDocument/2006/relationships">
+  <p:cSld>
+    <p:spTree>
+      <p:nvGrpSpPr>
+        <p:cNvPr id="1" name=""/>
+        <p:cNvGrpSpPr/>
+        <p:nvPr/>
+      </p:nvGrpSpPr>
+      <p:grpSpPr/>
+      <p:sp>
+        <p:nvSpPr>
+          <p:cNvPr id="2" name="TextBox 1"/>
+          <p:cNvSpPr txBox="1"/>
+          <p:nvPr/>
+        </p:nvSpPr>
+        <p:spPr>
+          <a:xfrm>
+            <a:off x="429768" y="237744"/>
+            <a:ext cx="11332159" cy="347472"/>
+          </a:xfrm>
+          <a:prstGeom prst="rect">
+            <a:avLst/>
+          </a:prstGeom>
+          <a:noFill/>
+        </p:spPr>
+        <p:txBody>
+          <a:bodyPr wrap="square" anchor="t" lIns="0" rIns="0" tIns="0" bIns="0">
+            <a:spAutoFit/>
+          </a:bodyPr>
+          <a:lstStyle/>
+          <a:p>
+            <a:pPr algn="l">
+              <a:lnSpc>
+                <a:spcPct val="112000"/>
+              </a:lnSpc>
+            </a:pPr>
+            <a:r>
+              <a:rPr sz="2000" b="1">
+                <a:solidFill>
+                  <a:srgbClr val="1428A0"/>
+                </a:solidFill>
+                <a:latin typeface="SamsungOneKorean"/>
+                <a:ea typeface="SamsungOneKorean"/>
+                <a:cs typeface="SamsungOneKorean"/>
+              </a:rPr>
+              <a:t>끊기는 경우의 근접도:  </a:t>
+            </a:r>
+            <a:r>
+              <a:rPr sz="2000" b="1">
+                <a:solidFill>
+                  <a:srgbClr val="1A1A1A"/>
+                </a:solidFill>
+                <a:latin typeface="SamsungOneKorean"/>
+                <a:ea typeface="SamsungOneKorean"/>
+                <a:cs typeface="SamsungOneKorean"/>
+              </a:rPr>
+              <a:t>전조는 실측되었지만, 발화 신호는 아직 없다</a:t>
+            </a:r>
+          </a:p>
+        </p:txBody>
+      </p:sp>
+      <p:cxnSp>
+        <p:nvCxnSpPr>
+          <p:cNvPr id="3" name="Connector 2"/>
+          <p:cNvCxnSpPr/>
+          <p:nvPr/>
+        </p:nvCxnSpPr>
+        <p:spPr>
+          <a:xfrm>
+            <a:off x="429768" y="658368"/>
+            <a:ext cx="11332159" cy="0"/>
+          </a:xfrm>
+          <a:prstGeom prst="line">
+            <a:avLst/>
+          </a:prstGeom>
+          <a:ln w="17780">
+            <a:solidFill>
+              <a:srgbClr val="1428A0"/>
+            </a:solidFill>
+          </a:ln>
+          <a:effectLst/>
+        </p:spPr>
+        <p:style>
+          <a:lnRef idx="2">
+            <a:schemeClr val="accent1"/>
+          </a:lnRef>
+          <a:fillRef idx="0">
+            <a:schemeClr val="accent1"/>
+          </a:fillRef>
+          <a:effectRef idx="1">
+            <a:schemeClr val="accent1"/>
+          </a:effectRef>
+          <a:fontRef idx="minor">
+            <a:schemeClr val="tx1"/>
+          </a:fontRef>
+        </p:style>
+      </p:cxnSp>
+      <p:sp>
+        <p:nvSpPr>
+          <p:cNvPr id="4" name="TextBox 3"/>
+          <p:cNvSpPr txBox="1"/>
+          <p:nvPr/>
+        </p:nvSpPr>
+        <p:spPr>
+          <a:xfrm>
+            <a:off x="429768" y="768096"/>
+            <a:ext cx="11332159" cy="182880"/>
+          </a:xfrm>
+          <a:prstGeom prst="rect">
+            <a:avLst/>
+          </a:prstGeom>
+          <a:noFill/>
+        </p:spPr>
+        <p:txBody>
+          <a:bodyPr wrap="square" anchor="t" lIns="0" rIns="0" tIns="0" bIns="0">
+            <a:spAutoFit/>
+          </a:bodyPr>
+          <a:lstStyle/>
+          <a:p>
+            <a:pPr algn="l">
+              <a:lnSpc>
+                <a:spcPct val="100000"/>
+              </a:lnSpc>
+            </a:pPr>
+            <a:r>
+              <a:rPr sz="1050" b="0">
+                <a:solidFill>
+                  <a:srgbClr val="555555"/>
+                </a:solidFill>
+                <a:latin typeface="SamsungOneKorean"/>
+                <a:ea typeface="SamsungOneKorean"/>
+                <a:cs typeface="SamsungOneKorean"/>
+              </a:rPr>
+              <a:t>1번 시나리오(투자 자금이 끊기는 경우)의 발현 가능성 평가: 지출 속도와 창출 속도의 괴리, 그리고 발화 전 체크리스트</a:t>
+            </a:r>
+          </a:p>
+        </p:txBody>
+      </p:sp>
+      <p:sp>
+        <p:nvSpPr>
+          <p:cNvPr id="5" name="Rectangle 4"/>
+          <p:cNvSpPr/>
+          <p:nvPr/>
+        </p:nvSpPr>
+        <p:spPr>
+          <a:xfrm>
+            <a:off x="429768" y="1115568"/>
+            <a:ext cx="3584448" cy="41148"/>
+          </a:xfrm>
+          <a:prstGeom prst="rect">
+            <a:avLst/>
+          </a:prstGeom>
+          <a:solidFill>
+            <a:srgbClr val="1428A0"/>
+          </a:solidFill>
+          <a:ln>
+            <a:noFill/>
+          </a:ln>
+          <a:effectLst/>
+        </p:spPr>
+        <p:style>
+          <a:lnRef idx="1">
+            <a:schemeClr val="accent1"/>
+          </a:lnRef>
+          <a:fillRef idx="3">
+            <a:schemeClr val="accent1"/>
+          </a:fillRef>
+          <a:effectRef idx="2">
+            <a:schemeClr val="accent1"/>
+          </a:effectRef>
+          <a:fontRef idx="minor">
+            <a:schemeClr val="lt1"/>
+          </a:fontRef>
+        </p:style>
+        <p:txBody>
+          <a:bodyPr rtlCol="0" anchor="ctr"/>
+          <a:lstStyle/>
+          <a:p>
+            <a:pPr algn="ctr"/>
+          </a:p>
+        </p:txBody>
+      </p:sp>
+      <p:sp>
+        <p:nvSpPr>
+          <p:cNvPr id="6" name="TextBox 5"/>
+          <p:cNvSpPr txBox="1"/>
+          <p:nvPr/>
+        </p:nvSpPr>
+        <p:spPr>
+          <a:xfrm>
+            <a:off x="429768" y="1225295"/>
+            <a:ext cx="3584448" cy="182880"/>
+          </a:xfrm>
+          <a:prstGeom prst="rect">
+            <a:avLst/>
+          </a:prstGeom>
+          <a:noFill/>
+        </p:spPr>
+        <p:txBody>
+          <a:bodyPr wrap="square" anchor="t" lIns="0" rIns="0" tIns="0" bIns="0">
+            <a:spAutoFit/>
+          </a:bodyPr>
+          <a:lstStyle/>
+          <a:p>
+            <a:pPr algn="l">
+              <a:lnSpc>
+                <a:spcPct val="100000"/>
+              </a:lnSpc>
+            </a:pPr>
+            <a:r>
+              <a:rPr sz="1250" b="1">
+                <a:solidFill>
+                  <a:srgbClr val="1428A0"/>
+                </a:solidFill>
+                <a:latin typeface="SamsungOneKorean"/>
+                <a:ea typeface="SamsungOneKorean"/>
+                <a:cs typeface="SamsungOneKorean"/>
+              </a:rPr>
+              <a:t>지출   </a:t>
+            </a:r>
+            <a:r>
+              <a:rPr sz="1250" b="1">
+                <a:solidFill>
+                  <a:srgbClr val="1A1A1A"/>
+                </a:solidFill>
+                <a:latin typeface="SamsungOneKorean"/>
+                <a:ea typeface="SamsungOneKorean"/>
+                <a:cs typeface="SamsungOneKorean"/>
+              </a:rPr>
+              <a:t>AI CapEx, 4사 합산 ($B)</a:t>
+            </a:r>
+          </a:p>
+        </p:txBody>
+      </p:sp>
+      <p:sp>
+        <p:nvSpPr>
+          <p:cNvPr id="7" name="Rectangle 6"/>
+          <p:cNvSpPr/>
+          <p:nvPr/>
+        </p:nvSpPr>
+        <p:spPr>
+          <a:xfrm>
+            <a:off x="4178807" y="1115568"/>
+            <a:ext cx="3584448" cy="41148"/>
+          </a:xfrm>
+          <a:prstGeom prst="rect">
+            <a:avLst/>
+          </a:prstGeom>
+          <a:solidFill>
+            <a:srgbClr val="1428A0"/>
+          </a:solidFill>
+          <a:ln>
+            <a:noFill/>
+          </a:ln>
+          <a:effectLst/>
+        </p:spPr>
+        <p:style>
+          <a:lnRef idx="1">
+            <a:schemeClr val="accent1"/>
+          </a:lnRef>
+          <a:fillRef idx="3">
+            <a:schemeClr val="accent1"/>
+          </a:fillRef>
+          <a:effectRef idx="2">
+            <a:schemeClr val="accent1"/>
+          </a:effectRef>
+          <a:fontRef idx="minor">
+            <a:schemeClr val="lt1"/>
+          </a:fontRef>
+        </p:style>
+        <p:txBody>
+          <a:bodyPr rtlCol="0" anchor="ctr"/>
+          <a:lstStyle/>
+          <a:p>
+            <a:pPr algn="ctr"/>
+          </a:p>
+        </p:txBody>
+      </p:sp>
+      <p:sp>
+        <p:nvSpPr>
+          <p:cNvPr id="8" name="TextBox 7"/>
+          <p:cNvSpPr txBox="1"/>
+          <p:nvPr/>
+        </p:nvSpPr>
+        <p:spPr>
+          <a:xfrm>
+            <a:off x="4178807" y="1225295"/>
+            <a:ext cx="3584448" cy="182880"/>
+          </a:xfrm>
+          <a:prstGeom prst="rect">
+            <a:avLst/>
+          </a:prstGeom>
+          <a:noFill/>
+        </p:spPr>
+        <p:txBody>
+          <a:bodyPr wrap="square" anchor="t" lIns="0" rIns="0" tIns="0" bIns="0">
+            <a:spAutoFit/>
+          </a:bodyPr>
+          <a:lstStyle/>
+          <a:p>
+            <a:pPr algn="l">
+              <a:lnSpc>
+                <a:spcPct val="100000"/>
+              </a:lnSpc>
+            </a:pPr>
+            <a:r>
+              <a:rPr sz="1250" b="1">
+                <a:solidFill>
+                  <a:srgbClr val="1428A0"/>
+                </a:solidFill>
+                <a:latin typeface="SamsungOneKorean"/>
+                <a:ea typeface="SamsungOneKorean"/>
+                <a:cs typeface="SamsungOneKorean"/>
+              </a:rPr>
+              <a:t>창출   </a:t>
+            </a:r>
+            <a:r>
+              <a:rPr sz="1250" b="1">
+                <a:solidFill>
+                  <a:srgbClr val="1A1A1A"/>
+                </a:solidFill>
+                <a:latin typeface="SamsungOneKorean"/>
+                <a:ea typeface="SamsungOneKorean"/>
+                <a:cs typeface="SamsungOneKorean"/>
+              </a:rPr>
+              <a:t>이익·현금이 따라가지 못한다</a:t>
+            </a:r>
+          </a:p>
+        </p:txBody>
+      </p:sp>
+      <p:sp>
+        <p:nvSpPr>
+          <p:cNvPr id="9" name="Rectangle 8"/>
+          <p:cNvSpPr/>
+          <p:nvPr/>
+        </p:nvSpPr>
+        <p:spPr>
+          <a:xfrm>
+            <a:off x="7927848" y="1115568"/>
+            <a:ext cx="3834079" cy="41148"/>
+          </a:xfrm>
+          <a:prstGeom prst="rect">
+            <a:avLst/>
+          </a:prstGeom>
+          <a:solidFill>
+            <a:srgbClr val="1428A0"/>
+          </a:solidFill>
+          <a:ln>
+            <a:noFill/>
+          </a:ln>
+          <a:effectLst/>
+        </p:spPr>
+        <p:style>
+          <a:lnRef idx="1">
+            <a:schemeClr val="accent1"/>
+          </a:lnRef>
+          <a:fillRef idx="3">
+            <a:schemeClr val="accent1"/>
+          </a:fillRef>
+          <a:effectRef idx="2">
+            <a:schemeClr val="accent1"/>
+          </a:effectRef>
+          <a:fontRef idx="minor">
+            <a:schemeClr val="lt1"/>
+          </a:fontRef>
+        </p:style>
+        <p:txBody>
+          <a:bodyPr rtlCol="0" anchor="ctr"/>
+          <a:lstStyle/>
+          <a:p>
+            <a:pPr algn="ctr"/>
+          </a:p>
+        </p:txBody>
+      </p:sp>
+      <p:sp>
+        <p:nvSpPr>
+          <p:cNvPr id="10" name="TextBox 9"/>
+          <p:cNvSpPr txBox="1"/>
+          <p:nvPr/>
+        </p:nvSpPr>
+        <p:spPr>
+          <a:xfrm>
+            <a:off x="7927848" y="1225295"/>
+            <a:ext cx="3834079" cy="182880"/>
+          </a:xfrm>
+          <a:prstGeom prst="rect">
+            <a:avLst/>
+          </a:prstGeom>
+          <a:noFill/>
+        </p:spPr>
+        <p:txBody>
+          <a:bodyPr wrap="square" anchor="t" lIns="0" rIns="0" tIns="0" bIns="0">
+            <a:spAutoFit/>
+          </a:bodyPr>
+          <a:lstStyle/>
+          <a:p>
+            <a:pPr algn="l">
+              <a:lnSpc>
+                <a:spcPct val="100000"/>
+              </a:lnSpc>
+            </a:pPr>
+            <a:r>
+              <a:rPr sz="1250" b="1">
+                <a:solidFill>
+                  <a:srgbClr val="1428A0"/>
+                </a:solidFill>
+                <a:latin typeface="SamsungOneKorean"/>
+                <a:ea typeface="SamsungOneKorean"/>
+                <a:cs typeface="SamsungOneKorean"/>
+              </a:rPr>
+              <a:t>판정 보드   </a:t>
+            </a:r>
+            <a:r>
+              <a:rPr sz="1250" b="1">
+                <a:solidFill>
+                  <a:srgbClr val="1A1A1A"/>
+                </a:solidFill>
+                <a:latin typeface="SamsungOneKorean"/>
+                <a:ea typeface="SamsungOneKorean"/>
+                <a:cs typeface="SamsungOneKorean"/>
+              </a:rPr>
+              <a:t>발화 전 체크리스트</a:t>
+            </a:r>
+          </a:p>
+        </p:txBody>
+      </p:sp>
+      <p:cxnSp>
+        <p:nvCxnSpPr>
+          <p:cNvPr id="11" name="Connector 10"/>
+          <p:cNvCxnSpPr/>
+          <p:nvPr/>
+        </p:nvCxnSpPr>
+        <p:spPr>
+          <a:xfrm>
+            <a:off x="521207" y="4846320"/>
+            <a:ext cx="3401569" cy="0"/>
+          </a:xfrm>
+          <a:prstGeom prst="line">
+            <a:avLst/>
+          </a:prstGeom>
+          <a:ln w="11430">
+            <a:solidFill>
+              <a:srgbClr val="D9D9D9"/>
+            </a:solidFill>
+          </a:ln>
+          <a:effectLst/>
+        </p:spPr>
+        <p:style>
+          <a:lnRef idx="2">
+            <a:schemeClr val="accent1"/>
+          </a:lnRef>
+          <a:fillRef idx="0">
+            <a:schemeClr val="accent1"/>
+          </a:fillRef>
+          <a:effectRef idx="1">
+            <a:schemeClr val="accent1"/>
+          </a:effectRef>
+          <a:fontRef idx="minor">
+            <a:schemeClr val="tx1"/>
+          </a:fontRef>
+        </p:style>
+      </p:cxnSp>
+      <p:sp>
+        <p:nvSpPr>
+          <p:cNvPr id="12" name="Rectangle 11"/>
+          <p:cNvSpPr/>
+          <p:nvPr/>
+        </p:nvSpPr>
+        <p:spPr>
+          <a:xfrm>
+            <a:off x="758951" y="4283964"/>
+            <a:ext cx="566928" cy="562355"/>
+          </a:xfrm>
+          <a:prstGeom prst="rect">
+            <a:avLst/>
+          </a:prstGeom>
+          <a:solidFill>
+            <a:srgbClr val="6B6B70"/>
+          </a:solidFill>
+          <a:ln>
+            <a:noFill/>
+          </a:ln>
+          <a:effectLst/>
+        </p:spPr>
+        <p:style>
+          <a:lnRef idx="1">
+            <a:schemeClr val="accent1"/>
+          </a:lnRef>
+          <a:fillRef idx="3">
+            <a:schemeClr val="accent1"/>
+          </a:fillRef>
+          <a:effectRef idx="2">
+            <a:schemeClr val="accent1"/>
+          </a:effectRef>
+          <a:fontRef idx="minor">
+            <a:schemeClr val="lt1"/>
+          </a:fontRef>
+        </p:style>
+        <p:txBody>
+          <a:bodyPr rtlCol="0" anchor="ctr"/>
+          <a:lstStyle/>
+          <a:p>
+            <a:pPr algn="ctr"/>
+          </a:p>
+        </p:txBody>
+      </p:sp>
+      <p:sp>
+        <p:nvSpPr>
+          <p:cNvPr id="13" name="TextBox 12"/>
+          <p:cNvSpPr txBox="1"/>
+          <p:nvPr/>
+        </p:nvSpPr>
+        <p:spPr>
+          <a:xfrm>
+            <a:off x="621791" y="4082796"/>
+            <a:ext cx="841247" cy="146304"/>
+          </a:xfrm>
+          <a:prstGeom prst="rect">
+            <a:avLst/>
+          </a:prstGeom>
+          <a:noFill/>
+        </p:spPr>
+        <p:txBody>
+          <a:bodyPr wrap="square" anchor="t" lIns="0" rIns="0" tIns="0" bIns="0">
+            <a:spAutoFit/>
+          </a:bodyPr>
+          <a:lstStyle/>
+          <a:p>
+            <a:pPr algn="ctr">
+              <a:lnSpc>
+                <a:spcPct val="100000"/>
+              </a:lnSpc>
+            </a:pPr>
+            <a:r>
+              <a:rPr sz="1050" b="1">
+                <a:solidFill>
+                  <a:srgbClr val="1A1A1A"/>
+                </a:solidFill>
+                <a:latin typeface="SamsungOneKorean"/>
+                <a:ea typeface="SamsungOneKorean"/>
+                <a:cs typeface="SamsungOneKorean"/>
+              </a:rPr>
+              <a:t>205</a:t>
+            </a:r>
+          </a:p>
+        </p:txBody>
+      </p:sp>
+      <p:sp>
+        <p:nvSpPr>
+          <p:cNvPr id="14" name="TextBox 13"/>
+          <p:cNvSpPr txBox="1"/>
+          <p:nvPr/>
+        </p:nvSpPr>
+        <p:spPr>
+          <a:xfrm>
+            <a:off x="621791" y="4892040"/>
+            <a:ext cx="841247" cy="128016"/>
+          </a:xfrm>
+          <a:prstGeom prst="rect">
+            <a:avLst/>
+          </a:prstGeom>
+          <a:noFill/>
+        </p:spPr>
+        <p:txBody>
+          <a:bodyPr wrap="square" anchor="t" lIns="0" rIns="0" tIns="0" bIns="0">
+            <a:spAutoFit/>
+          </a:bodyPr>
+          <a:lstStyle/>
+          <a:p>
+            <a:pPr algn="ctr">
+              <a:lnSpc>
+                <a:spcPct val="100000"/>
+              </a:lnSpc>
+            </a:pPr>
+            <a:r>
+              <a:rPr sz="1000" b="0">
+                <a:solidFill>
+                  <a:srgbClr val="8A8A8E"/>
+                </a:solidFill>
+                <a:latin typeface="SamsungOneKorean"/>
+                <a:ea typeface="SamsungOneKorean"/>
+                <a:cs typeface="SamsungOneKorean"/>
+              </a:rPr>
+              <a:t>2024</a:t>
+            </a:r>
+          </a:p>
+        </p:txBody>
+      </p:sp>
+      <p:sp>
+        <p:nvSpPr>
+          <p:cNvPr id="15" name="Rectangle 14"/>
+          <p:cNvSpPr/>
+          <p:nvPr/>
+        </p:nvSpPr>
+        <p:spPr>
+          <a:xfrm>
+            <a:off x="1545336" y="3721608"/>
+            <a:ext cx="566928" cy="1124711"/>
+          </a:xfrm>
+          <a:prstGeom prst="rect">
+            <a:avLst/>
+          </a:prstGeom>
+          <a:solidFill>
+            <a:srgbClr val="6B6B70"/>
+          </a:solidFill>
+          <a:ln>
+            <a:noFill/>
+          </a:ln>
+          <a:effectLst/>
+        </p:spPr>
+        <p:style>
+          <a:lnRef idx="1">
+            <a:schemeClr val="accent1"/>
+          </a:lnRef>
+          <a:fillRef idx="3">
+            <a:schemeClr val="accent1"/>
+          </a:fillRef>
+          <a:effectRef idx="2">
+            <a:schemeClr val="accent1"/>
+          </a:effectRef>
+          <a:fontRef idx="minor">
+            <a:schemeClr val="lt1"/>
+          </a:fontRef>
+        </p:style>
+        <p:txBody>
+          <a:bodyPr rtlCol="0" anchor="ctr"/>
+          <a:lstStyle/>
+          <a:p>
+            <a:pPr algn="ctr"/>
+          </a:p>
+        </p:txBody>
+      </p:sp>
+      <p:sp>
+        <p:nvSpPr>
+          <p:cNvPr id="16" name="TextBox 15"/>
+          <p:cNvSpPr txBox="1"/>
+          <p:nvPr/>
+        </p:nvSpPr>
+        <p:spPr>
+          <a:xfrm>
+            <a:off x="1408176" y="3520440"/>
+            <a:ext cx="841247" cy="146304"/>
+          </a:xfrm>
+          <a:prstGeom prst="rect">
+            <a:avLst/>
+          </a:prstGeom>
+          <a:noFill/>
+        </p:spPr>
+        <p:txBody>
+          <a:bodyPr wrap="square" anchor="t" lIns="0" rIns="0" tIns="0" bIns="0">
+            <a:spAutoFit/>
+          </a:bodyPr>
+          <a:lstStyle/>
+          <a:p>
+            <a:pPr algn="ctr">
+              <a:lnSpc>
+                <a:spcPct val="100000"/>
+              </a:lnSpc>
+            </a:pPr>
+            <a:r>
+              <a:rPr sz="1050" b="1">
+                <a:solidFill>
+                  <a:srgbClr val="1A1A1A"/>
+                </a:solidFill>
+                <a:latin typeface="SamsungOneKorean"/>
+                <a:ea typeface="SamsungOneKorean"/>
+                <a:cs typeface="SamsungOneKorean"/>
+              </a:rPr>
+              <a:t>410</a:t>
+            </a:r>
+          </a:p>
+        </p:txBody>
+      </p:sp>
+      <p:sp>
+        <p:nvSpPr>
+          <p:cNvPr id="17" name="TextBox 16"/>
+          <p:cNvSpPr txBox="1"/>
+          <p:nvPr/>
+        </p:nvSpPr>
+        <p:spPr>
+          <a:xfrm>
+            <a:off x="1408176" y="3355848"/>
+            <a:ext cx="841247" cy="137160"/>
+          </a:xfrm>
+          <a:prstGeom prst="rect">
+            <a:avLst/>
+          </a:prstGeom>
+          <a:noFill/>
+        </p:spPr>
+        <p:txBody>
+          <a:bodyPr wrap="square" anchor="t" lIns="0" rIns="0" tIns="0" bIns="0">
+            <a:spAutoFit/>
+          </a:bodyPr>
+          <a:lstStyle/>
+          <a:p>
+            <a:pPr algn="ctr">
+              <a:lnSpc>
+                <a:spcPct val="100000"/>
+              </a:lnSpc>
+            </a:pPr>
+            <a:r>
+              <a:rPr sz="1000" b="0">
+                <a:solidFill>
+                  <a:srgbClr val="1428A0"/>
+                </a:solidFill>
+                <a:latin typeface="SamsungOneKorean"/>
+                <a:ea typeface="SamsungOneKorean"/>
+                <a:cs typeface="SamsungOneKorean"/>
+              </a:rPr>
+              <a:t>+100%</a:t>
+            </a:r>
+          </a:p>
+        </p:txBody>
+      </p:sp>
+      <p:sp>
+        <p:nvSpPr>
+          <p:cNvPr id="18" name="TextBox 17"/>
+          <p:cNvSpPr txBox="1"/>
+          <p:nvPr/>
+        </p:nvSpPr>
+        <p:spPr>
+          <a:xfrm>
+            <a:off x="1408176" y="4892040"/>
+            <a:ext cx="841247" cy="128016"/>
+          </a:xfrm>
+          <a:prstGeom prst="rect">
+            <a:avLst/>
+          </a:prstGeom>
+          <a:noFill/>
+        </p:spPr>
+        <p:txBody>
+          <a:bodyPr wrap="square" anchor="t" lIns="0" rIns="0" tIns="0" bIns="0">
+            <a:spAutoFit/>
+          </a:bodyPr>
+          <a:lstStyle/>
+          <a:p>
+            <a:pPr algn="ctr">
+              <a:lnSpc>
+                <a:spcPct val="100000"/>
+              </a:lnSpc>
+            </a:pPr>
+            <a:r>
+              <a:rPr sz="1000" b="0">
+                <a:solidFill>
+                  <a:srgbClr val="8A8A8E"/>
+                </a:solidFill>
+                <a:latin typeface="SamsungOneKorean"/>
+                <a:ea typeface="SamsungOneKorean"/>
+                <a:cs typeface="SamsungOneKorean"/>
+              </a:rPr>
+              <a:t>2025</a:t>
+            </a:r>
+          </a:p>
+        </p:txBody>
+      </p:sp>
+      <p:sp>
+        <p:nvSpPr>
+          <p:cNvPr id="19" name="Rectangle 18"/>
+          <p:cNvSpPr/>
+          <p:nvPr/>
+        </p:nvSpPr>
+        <p:spPr>
+          <a:xfrm>
+            <a:off x="2331720" y="2788920"/>
+            <a:ext cx="566928" cy="2057399"/>
+          </a:xfrm>
+          <a:prstGeom prst="rect">
+            <a:avLst/>
+          </a:prstGeom>
+          <a:solidFill>
+            <a:srgbClr val="6B6B70"/>
+          </a:solidFill>
+          <a:ln>
+            <a:noFill/>
+          </a:ln>
+          <a:effectLst/>
+        </p:spPr>
+        <p:style>
+          <a:lnRef idx="1">
+            <a:schemeClr val="accent1"/>
+          </a:lnRef>
+          <a:fillRef idx="3">
+            <a:schemeClr val="accent1"/>
+          </a:fillRef>
+          <a:effectRef idx="2">
+            <a:schemeClr val="accent1"/>
+          </a:effectRef>
+          <a:fontRef idx="minor">
+            <a:schemeClr val="lt1"/>
+          </a:fontRef>
+        </p:style>
+        <p:txBody>
+          <a:bodyPr rtlCol="0" anchor="ctr"/>
+          <a:lstStyle/>
+          <a:p>
+            <a:pPr algn="ctr"/>
+          </a:p>
+        </p:txBody>
+      </p:sp>
+      <p:sp>
+        <p:nvSpPr>
+          <p:cNvPr id="20" name="TextBox 19"/>
+          <p:cNvSpPr txBox="1"/>
+          <p:nvPr/>
+        </p:nvSpPr>
+        <p:spPr>
+          <a:xfrm>
+            <a:off x="2194560" y="2587752"/>
+            <a:ext cx="841247" cy="146304"/>
+          </a:xfrm>
+          <a:prstGeom prst="rect">
+            <a:avLst/>
+          </a:prstGeom>
+          <a:noFill/>
+        </p:spPr>
+        <p:txBody>
+          <a:bodyPr wrap="square" anchor="t" lIns="0" rIns="0" tIns="0" bIns="0">
+            <a:spAutoFit/>
+          </a:bodyPr>
+          <a:lstStyle/>
+          <a:p>
+            <a:pPr algn="ctr">
+              <a:lnSpc>
+                <a:spcPct val="100000"/>
+              </a:lnSpc>
+            </a:pPr>
+            <a:r>
+              <a:rPr sz="1050" b="1">
+                <a:solidFill>
+                  <a:srgbClr val="1A1A1A"/>
+                </a:solidFill>
+                <a:latin typeface="SamsungOneKorean"/>
+                <a:ea typeface="SamsungOneKorean"/>
+                <a:cs typeface="SamsungOneKorean"/>
+              </a:rPr>
+              <a:t>750</a:t>
+            </a:r>
+          </a:p>
+        </p:txBody>
+      </p:sp>
+      <p:sp>
+        <p:nvSpPr>
+          <p:cNvPr id="21" name="TextBox 20"/>
+          <p:cNvSpPr txBox="1"/>
+          <p:nvPr/>
+        </p:nvSpPr>
+        <p:spPr>
+          <a:xfrm>
+            <a:off x="2194560" y="2423160"/>
+            <a:ext cx="841247" cy="137160"/>
+          </a:xfrm>
+          <a:prstGeom prst="rect">
+            <a:avLst/>
+          </a:prstGeom>
+          <a:noFill/>
+        </p:spPr>
+        <p:txBody>
+          <a:bodyPr wrap="square" anchor="t" lIns="0" rIns="0" tIns="0" bIns="0">
+            <a:spAutoFit/>
+          </a:bodyPr>
+          <a:lstStyle/>
+          <a:p>
+            <a:pPr algn="ctr">
+              <a:lnSpc>
+                <a:spcPct val="100000"/>
+              </a:lnSpc>
+            </a:pPr>
+            <a:r>
+              <a:rPr sz="1000" b="0">
+                <a:solidFill>
+                  <a:srgbClr val="1428A0"/>
+                </a:solidFill>
+                <a:latin typeface="SamsungOneKorean"/>
+                <a:ea typeface="SamsungOneKorean"/>
+                <a:cs typeface="SamsungOneKorean"/>
+              </a:rPr>
+              <a:t>+82%</a:t>
+            </a:r>
+          </a:p>
+        </p:txBody>
+      </p:sp>
+      <p:sp>
+        <p:nvSpPr>
+          <p:cNvPr id="22" name="TextBox 21"/>
+          <p:cNvSpPr txBox="1"/>
+          <p:nvPr/>
+        </p:nvSpPr>
+        <p:spPr>
+          <a:xfrm>
+            <a:off x="2194560" y="4892040"/>
+            <a:ext cx="841247" cy="128016"/>
+          </a:xfrm>
+          <a:prstGeom prst="rect">
+            <a:avLst/>
+          </a:prstGeom>
+          <a:noFill/>
+        </p:spPr>
+        <p:txBody>
+          <a:bodyPr wrap="square" anchor="t" lIns="0" rIns="0" tIns="0" bIns="0">
+            <a:spAutoFit/>
+          </a:bodyPr>
+          <a:lstStyle/>
+          <a:p>
+            <a:pPr algn="ctr">
+              <a:lnSpc>
+                <a:spcPct val="100000"/>
+              </a:lnSpc>
+            </a:pPr>
+            <a:r>
+              <a:rPr sz="1000" b="0">
+                <a:solidFill>
+                  <a:srgbClr val="8A8A8E"/>
+                </a:solidFill>
+                <a:latin typeface="SamsungOneKorean"/>
+                <a:ea typeface="SamsungOneKorean"/>
+                <a:cs typeface="SamsungOneKorean"/>
+              </a:rPr>
+              <a:t>26E</a:t>
+            </a:r>
+          </a:p>
+        </p:txBody>
+      </p:sp>
+      <p:sp>
+        <p:nvSpPr>
+          <p:cNvPr id="23" name="Rectangle 22"/>
+          <p:cNvSpPr/>
+          <p:nvPr/>
+        </p:nvSpPr>
+        <p:spPr>
+          <a:xfrm>
+            <a:off x="3118104" y="1828800"/>
+            <a:ext cx="566928" cy="3017519"/>
+          </a:xfrm>
+          <a:prstGeom prst="rect">
+            <a:avLst/>
+          </a:prstGeom>
+          <a:solidFill>
+            <a:srgbClr val="E2E2E5"/>
+          </a:solidFill>
+          <a:ln w="10160">
+            <a:solidFill>
+              <a:srgbClr val="8A8A8E"/>
+            </a:solidFill>
+            <a:prstDash val="sysDash"/>
+          </a:ln>
+          <a:effectLst/>
+        </p:spPr>
+        <p:style>
+          <a:lnRef idx="1">
+            <a:schemeClr val="accent1"/>
+          </a:lnRef>
+          <a:fillRef idx="3">
+            <a:schemeClr val="accent1"/>
+          </a:fillRef>
+          <a:effectRef idx="2">
+            <a:schemeClr val="accent1"/>
+          </a:effectRef>
+          <a:fontRef idx="minor">
+            <a:schemeClr val="lt1"/>
+          </a:fontRef>
+        </p:style>
+        <p:txBody>
+          <a:bodyPr rtlCol="0" anchor="ctr"/>
+          <a:lstStyle/>
+          <a:p>
+            <a:pPr algn="ctr"/>
+          </a:p>
+        </p:txBody>
+      </p:sp>
+      <p:sp>
+        <p:nvSpPr>
+          <p:cNvPr id="24" name="TextBox 23"/>
+          <p:cNvSpPr txBox="1"/>
+          <p:nvPr/>
+        </p:nvSpPr>
+        <p:spPr>
+          <a:xfrm>
+            <a:off x="2980944" y="1627632"/>
+            <a:ext cx="841247" cy="146304"/>
+          </a:xfrm>
+          <a:prstGeom prst="rect">
+            <a:avLst/>
+          </a:prstGeom>
+          <a:noFill/>
+        </p:spPr>
+        <p:txBody>
+          <a:bodyPr wrap="square" anchor="t" lIns="0" rIns="0" tIns="0" bIns="0">
+            <a:spAutoFit/>
+          </a:bodyPr>
+          <a:lstStyle/>
+          <a:p>
+            <a:pPr algn="ctr">
+              <a:lnSpc>
+                <a:spcPct val="100000"/>
+              </a:lnSpc>
+            </a:pPr>
+            <a:r>
+              <a:rPr sz="1050" b="1">
+                <a:solidFill>
+                  <a:srgbClr val="8A8A8E"/>
+                </a:solidFill>
+                <a:latin typeface="SamsungOneKorean"/>
+                <a:ea typeface="SamsungOneKorean"/>
+                <a:cs typeface="SamsungOneKorean"/>
+              </a:rPr>
+              <a:t>1,100ᵉ</a:t>
+            </a:r>
+          </a:p>
+        </p:txBody>
+      </p:sp>
+      <p:sp>
+        <p:nvSpPr>
+          <p:cNvPr id="25" name="TextBox 24"/>
+          <p:cNvSpPr txBox="1"/>
+          <p:nvPr/>
+        </p:nvSpPr>
+        <p:spPr>
+          <a:xfrm>
+            <a:off x="2980944" y="1463040"/>
+            <a:ext cx="841247" cy="137160"/>
+          </a:xfrm>
+          <a:prstGeom prst="rect">
+            <a:avLst/>
+          </a:prstGeom>
+          <a:noFill/>
+        </p:spPr>
+        <p:txBody>
+          <a:bodyPr wrap="square" anchor="t" lIns="0" rIns="0" tIns="0" bIns="0">
+            <a:spAutoFit/>
+          </a:bodyPr>
+          <a:lstStyle/>
+          <a:p>
+            <a:pPr algn="ctr">
+              <a:lnSpc>
+                <a:spcPct val="100000"/>
+              </a:lnSpc>
+            </a:pPr>
+            <a:r>
+              <a:rPr sz="1000" b="0">
+                <a:solidFill>
+                  <a:srgbClr val="1428A0"/>
+                </a:solidFill>
+                <a:latin typeface="SamsungOneKorean"/>
+                <a:ea typeface="SamsungOneKorean"/>
+                <a:cs typeface="SamsungOneKorean"/>
+              </a:rPr>
+              <a:t>JPM 전망</a:t>
+            </a:r>
+          </a:p>
+        </p:txBody>
+      </p:sp>
+      <p:sp>
+        <p:nvSpPr>
+          <p:cNvPr id="26" name="TextBox 25"/>
+          <p:cNvSpPr txBox="1"/>
+          <p:nvPr/>
+        </p:nvSpPr>
+        <p:spPr>
+          <a:xfrm>
+            <a:off x="2980944" y="4892040"/>
+            <a:ext cx="841247" cy="128016"/>
+          </a:xfrm>
+          <a:prstGeom prst="rect">
+            <a:avLst/>
+          </a:prstGeom>
+          <a:noFill/>
+        </p:spPr>
+        <p:txBody>
+          <a:bodyPr wrap="square" anchor="t" lIns="0" rIns="0" tIns="0" bIns="0">
+            <a:spAutoFit/>
+          </a:bodyPr>
+          <a:lstStyle/>
+          <a:p>
+            <a:pPr algn="ctr">
+              <a:lnSpc>
+                <a:spcPct val="100000"/>
+              </a:lnSpc>
+            </a:pPr>
+            <a:r>
+              <a:rPr sz="1000" b="0">
+                <a:solidFill>
+                  <a:srgbClr val="8A8A8E"/>
+                </a:solidFill>
+                <a:latin typeface="SamsungOneKorean"/>
+                <a:ea typeface="SamsungOneKorean"/>
+                <a:cs typeface="SamsungOneKorean"/>
+              </a:rPr>
+              <a:t>27E</a:t>
+            </a:r>
+          </a:p>
+        </p:txBody>
+      </p:sp>
+      <p:sp>
+        <p:nvSpPr>
+          <p:cNvPr id="27" name="TextBox 26"/>
+          <p:cNvSpPr txBox="1"/>
+          <p:nvPr/>
+        </p:nvSpPr>
+        <p:spPr>
+          <a:xfrm>
+            <a:off x="429768" y="5102352"/>
+            <a:ext cx="3584448" cy="310896"/>
+          </a:xfrm>
+          <a:prstGeom prst="rect">
+            <a:avLst/>
+          </a:prstGeom>
+          <a:noFill/>
+        </p:spPr>
+        <p:txBody>
+          <a:bodyPr wrap="square" anchor="t" lIns="0" rIns="0" tIns="0" bIns="0">
+            <a:spAutoFit/>
+          </a:bodyPr>
+          <a:lstStyle/>
+          <a:p>
+            <a:pPr algn="l">
+              <a:lnSpc>
+                <a:spcPct val="120000"/>
+              </a:lnSpc>
+            </a:pPr>
+            <a:r>
+              <a:rPr sz="1000" b="0">
+                <a:solidFill>
+                  <a:srgbClr val="1A1A1A"/>
+                </a:solidFill>
+                <a:latin typeface="SamsungOneKorean"/>
+                <a:ea typeface="SamsungOneKorean"/>
+                <a:cs typeface="SamsungOneKorean"/>
+              </a:rPr>
+              <a:t>Q2 실적 후 4사 전원 상향, 삭감 발표 0건.</a:t>
+            </a:r>
+          </a:p>
+          <a:p>
+            <a:pPr algn="l">
+              <a:lnSpc>
+                <a:spcPct val="120000"/>
+              </a:lnSpc>
+            </a:pPr>
+            <a:r>
+              <a:rPr sz="1000" b="0">
+                <a:solidFill>
+                  <a:srgbClr val="1A1A1A"/>
+                </a:solidFill>
+                <a:latin typeface="SamsungOneKorean"/>
+                <a:ea typeface="SamsungOneKorean"/>
+                <a:cs typeface="SamsungOneKorean"/>
+              </a:rPr>
+              <a:t>장기 자산(토지·전력·셸)은 조기 확약 관행 지속</a:t>
+            </a:r>
+          </a:p>
+        </p:txBody>
+      </p:sp>
+      <p:sp>
+        <p:nvSpPr>
+          <p:cNvPr id="28" name="Rounded Rectangle 27"/>
+          <p:cNvSpPr/>
+          <p:nvPr/>
+        </p:nvSpPr>
+        <p:spPr>
+          <a:xfrm>
+            <a:off x="4178807" y="1389888"/>
+            <a:ext cx="3584448" cy="1152144"/>
+          </a:xfrm>
+          <a:prstGeom prst="roundRect">
+            <a:avLst>
+              <a:gd name="adj" fmla="val 6000"/>
+            </a:avLst>
+          </a:prstGeom>
+          <a:solidFill>
+            <a:srgbClr val="F6F6F7"/>
+          </a:solidFill>
+          <a:ln w="6350">
+            <a:solidFill>
+              <a:srgbClr val="D9D9D9"/>
+            </a:solidFill>
+          </a:ln>
+          <a:effectLst/>
+        </p:spPr>
+        <p:style>
+          <a:lnRef idx="1">
+            <a:schemeClr val="accent1"/>
+          </a:lnRef>
+          <a:fillRef idx="3">
+            <a:schemeClr val="accent1"/>
+          </a:fillRef>
+          <a:effectRef idx="2">
+            <a:schemeClr val="accent1"/>
+          </a:effectRef>
+          <a:fontRef idx="minor">
+            <a:schemeClr val="lt1"/>
+          </a:fontRef>
+        </p:style>
+        <p:txBody>
+          <a:bodyPr rtlCol="0" anchor="ctr"/>
+          <a:lstStyle/>
+          <a:p>
+            <a:pPr algn="ctr"/>
+          </a:p>
+        </p:txBody>
+      </p:sp>
+      <p:sp>
+        <p:nvSpPr>
+          <p:cNvPr id="29" name="TextBox 28"/>
+          <p:cNvSpPr txBox="1"/>
+          <p:nvPr/>
+        </p:nvSpPr>
+        <p:spPr>
+          <a:xfrm>
+            <a:off x="4325112" y="1499616"/>
+            <a:ext cx="3291840" cy="155448"/>
+          </a:xfrm>
+          <a:prstGeom prst="rect">
+            <a:avLst/>
+          </a:prstGeom>
+          <a:noFill/>
+        </p:spPr>
+        <p:txBody>
+          <a:bodyPr wrap="square" anchor="t" lIns="0" rIns="0" tIns="0" bIns="0">
+            <a:spAutoFit/>
+          </a:bodyPr>
+          <a:lstStyle/>
+          <a:p>
+            <a:pPr algn="l">
+              <a:lnSpc>
+                <a:spcPct val="100000"/>
+              </a:lnSpc>
+            </a:pPr>
+            <a:r>
+              <a:rPr sz="1050" b="1">
+                <a:solidFill>
+                  <a:srgbClr val="555555"/>
+                </a:solidFill>
+                <a:latin typeface="SamsungOneKorean"/>
+                <a:ea typeface="SamsungOneKorean"/>
+                <a:cs typeface="SamsungOneKorean"/>
+              </a:rPr>
+              <a:t>CapEx / 영업현금흐름</a:t>
+            </a:r>
+          </a:p>
+        </p:txBody>
+      </p:sp>
+      <p:sp>
+        <p:nvSpPr>
+          <p:cNvPr id="30" name="TextBox 29"/>
+          <p:cNvSpPr txBox="1"/>
+          <p:nvPr/>
+        </p:nvSpPr>
+        <p:spPr>
+          <a:xfrm>
+            <a:off x="4325112" y="1719072"/>
+            <a:ext cx="3291840" cy="310896"/>
+          </a:xfrm>
+          <a:prstGeom prst="rect">
+            <a:avLst/>
+          </a:prstGeom>
+          <a:noFill/>
+        </p:spPr>
+        <p:txBody>
+          <a:bodyPr wrap="square" anchor="t" lIns="0" rIns="0" tIns="0" bIns="0">
+            <a:spAutoFit/>
+          </a:bodyPr>
+          <a:lstStyle/>
+          <a:p>
+            <a:pPr algn="l">
+              <a:lnSpc>
+                <a:spcPct val="100000"/>
+              </a:lnSpc>
+            </a:pPr>
+            <a:r>
+              <a:rPr sz="1900" b="1">
+                <a:solidFill>
+                  <a:srgbClr val="8A8A8E"/>
+                </a:solidFill>
+                <a:latin typeface="SamsungOneKorean"/>
+                <a:ea typeface="SamsungOneKorean"/>
+                <a:cs typeface="SamsungOneKorean"/>
+              </a:rPr>
+              <a:t>76%</a:t>
+            </a:r>
+            <a:r>
+              <a:rPr sz="1900" b="1">
+                <a:solidFill>
+                  <a:srgbClr val="8A8A8E"/>
+                </a:solidFill>
+                <a:latin typeface="SamsungOneKorean"/>
+                <a:ea typeface="SamsungOneKorean"/>
+                <a:cs typeface="SamsungOneKorean"/>
+              </a:rPr>
+              <a:t>  →  </a:t>
+            </a:r>
+            <a:r>
+              <a:rPr sz="1900" b="1">
+                <a:solidFill>
+                  <a:srgbClr val="1428A0"/>
+                </a:solidFill>
+                <a:latin typeface="SamsungOneKorean"/>
+                <a:ea typeface="SamsungOneKorean"/>
+                <a:cs typeface="SamsungOneKorean"/>
+              </a:rPr>
+              <a:t>94%</a:t>
+            </a:r>
+          </a:p>
+        </p:txBody>
+      </p:sp>
+      <p:sp>
+        <p:nvSpPr>
+          <p:cNvPr id="31" name="TextBox 30"/>
+          <p:cNvSpPr txBox="1"/>
+          <p:nvPr/>
+        </p:nvSpPr>
+        <p:spPr>
+          <a:xfrm>
+            <a:off x="4325112" y="2139696"/>
+            <a:ext cx="3291840" cy="292608"/>
+          </a:xfrm>
+          <a:prstGeom prst="rect">
+            <a:avLst/>
+          </a:prstGeom>
+          <a:noFill/>
+        </p:spPr>
+        <p:txBody>
+          <a:bodyPr wrap="square" anchor="t" lIns="0" rIns="0" tIns="0" bIns="0">
+            <a:spAutoFit/>
+          </a:bodyPr>
+          <a:lstStyle/>
+          <a:p>
+            <a:pPr algn="l">
+              <a:lnSpc>
+                <a:spcPct val="115000"/>
+              </a:lnSpc>
+            </a:pPr>
+            <a:r>
+              <a:rPr sz="1000" b="0">
+                <a:solidFill>
+                  <a:srgbClr val="555555"/>
+                </a:solidFill>
+                <a:latin typeface="SamsungOneKorean"/>
+                <a:ea typeface="SamsungOneKorean"/>
+                <a:cs typeface="SamsungOneKorean"/>
+              </a:rPr>
+              <a:t>2024 → 2026E, '자기잠식' 임계점 근접</a:t>
+            </a:r>
+          </a:p>
+        </p:txBody>
+      </p:sp>
+      <p:sp>
+        <p:nvSpPr>
+          <p:cNvPr id="32" name="Rounded Rectangle 31"/>
+          <p:cNvSpPr/>
+          <p:nvPr/>
+        </p:nvSpPr>
+        <p:spPr>
+          <a:xfrm>
+            <a:off x="4178807" y="2688336"/>
+            <a:ext cx="3584448" cy="1152144"/>
+          </a:xfrm>
+          <a:prstGeom prst="roundRect">
+            <a:avLst>
+              <a:gd name="adj" fmla="val 6000"/>
+            </a:avLst>
+          </a:prstGeom>
+          <a:solidFill>
+            <a:srgbClr val="F6F6F7"/>
+          </a:solidFill>
+          <a:ln w="6350">
+            <a:solidFill>
+              <a:srgbClr val="D9D9D9"/>
+            </a:solidFill>
+          </a:ln>
+          <a:effectLst/>
+        </p:spPr>
+        <p:style>
+          <a:lnRef idx="1">
+            <a:schemeClr val="accent1"/>
+          </a:lnRef>
+          <a:fillRef idx="3">
+            <a:schemeClr val="accent1"/>
+          </a:fillRef>
+          <a:effectRef idx="2">
+            <a:schemeClr val="accent1"/>
+          </a:effectRef>
+          <a:fontRef idx="minor">
+            <a:schemeClr val="lt1"/>
+          </a:fontRef>
+        </p:style>
+        <p:txBody>
+          <a:bodyPr rtlCol="0" anchor="ctr"/>
+          <a:lstStyle/>
+          <a:p>
+            <a:pPr algn="ctr"/>
+          </a:p>
+        </p:txBody>
+      </p:sp>
+      <p:sp>
+        <p:nvSpPr>
+          <p:cNvPr id="33" name="TextBox 32"/>
+          <p:cNvSpPr txBox="1"/>
+          <p:nvPr/>
+        </p:nvSpPr>
+        <p:spPr>
+          <a:xfrm>
+            <a:off x="4325112" y="2798064"/>
+            <a:ext cx="3291840" cy="155448"/>
+          </a:xfrm>
+          <a:prstGeom prst="rect">
+            <a:avLst/>
+          </a:prstGeom>
+          <a:noFill/>
+        </p:spPr>
+        <p:txBody>
+          <a:bodyPr wrap="square" anchor="t" lIns="0" rIns="0" tIns="0" bIns="0">
+            <a:spAutoFit/>
+          </a:bodyPr>
+          <a:lstStyle/>
+          <a:p>
+            <a:pPr algn="l">
+              <a:lnSpc>
+                <a:spcPct val="100000"/>
+              </a:lnSpc>
+            </a:pPr>
+            <a:r>
+              <a:rPr sz="1050" b="1">
+                <a:solidFill>
+                  <a:srgbClr val="555555"/>
+                </a:solidFill>
+                <a:latin typeface="SamsungOneKorean"/>
+                <a:ea typeface="SamsungOneKorean"/>
+                <a:cs typeface="SamsungOneKorean"/>
+              </a:rPr>
+              <a:t>하이퍼스케일러 FCF 반전</a:t>
+            </a:r>
+          </a:p>
+        </p:txBody>
+      </p:sp>
+      <p:sp>
+        <p:nvSpPr>
+          <p:cNvPr id="34" name="TextBox 33"/>
+          <p:cNvSpPr txBox="1"/>
+          <p:nvPr/>
+        </p:nvSpPr>
+        <p:spPr>
+          <a:xfrm>
+            <a:off x="4325112" y="3017520"/>
+            <a:ext cx="3291840" cy="310896"/>
+          </a:xfrm>
+          <a:prstGeom prst="rect">
+            <a:avLst/>
+          </a:prstGeom>
+          <a:noFill/>
+        </p:spPr>
+        <p:txBody>
+          <a:bodyPr wrap="square" anchor="t" lIns="0" rIns="0" tIns="0" bIns="0">
+            <a:spAutoFit/>
+          </a:bodyPr>
+          <a:lstStyle/>
+          <a:p>
+            <a:pPr algn="l">
+              <a:lnSpc>
+                <a:spcPct val="100000"/>
+              </a:lnSpc>
+            </a:pPr>
+            <a:r>
+              <a:rPr sz="1600" b="1">
+                <a:solidFill>
+                  <a:srgbClr val="1428A0"/>
+                </a:solidFill>
+                <a:latin typeface="SamsungOneKorean"/>
+                <a:ea typeface="SamsungOneKorean"/>
+                <a:cs typeface="SamsungOneKorean"/>
+              </a:rPr>
+              <a:t>Meta -91%</a:t>
+            </a:r>
+            <a:r>
+              <a:rPr sz="1600" b="1">
+                <a:solidFill>
+                  <a:srgbClr val="8A8A8E"/>
+                </a:solidFill>
+                <a:latin typeface="SamsungOneKorean"/>
+                <a:ea typeface="SamsungOneKorean"/>
+                <a:cs typeface="SamsungOneKorean"/>
+              </a:rPr>
+              <a:t> · </a:t>
+            </a:r>
+            <a:r>
+              <a:rPr sz="1600" b="1">
+                <a:solidFill>
+                  <a:srgbClr val="1428A0"/>
+                </a:solidFill>
+                <a:latin typeface="SamsungOneKorean"/>
+                <a:ea typeface="SamsungOneKorean"/>
+                <a:cs typeface="SamsungOneKorean"/>
+              </a:rPr>
+              <a:t>Amazon 적자</a:t>
+            </a:r>
+          </a:p>
+        </p:txBody>
+      </p:sp>
+      <p:sp>
+        <p:nvSpPr>
+          <p:cNvPr id="35" name="TextBox 34"/>
+          <p:cNvSpPr txBox="1"/>
+          <p:nvPr/>
+        </p:nvSpPr>
+        <p:spPr>
+          <a:xfrm>
+            <a:off x="4325112" y="3438144"/>
+            <a:ext cx="3291840" cy="292608"/>
+          </a:xfrm>
+          <a:prstGeom prst="rect">
+            <a:avLst/>
+          </a:prstGeom>
+          <a:noFill/>
+        </p:spPr>
+        <p:txBody>
+          <a:bodyPr wrap="square" anchor="t" lIns="0" rIns="0" tIns="0" bIns="0">
+            <a:spAutoFit/>
+          </a:bodyPr>
+          <a:lstStyle/>
+          <a:p>
+            <a:pPr algn="l">
+              <a:lnSpc>
+                <a:spcPct val="115000"/>
+              </a:lnSpc>
+            </a:pPr>
+            <a:r>
+              <a:rPr sz="1000" b="0">
+                <a:solidFill>
+                  <a:srgbClr val="555555"/>
+                </a:solidFill>
+                <a:latin typeface="SamsungOneKorean"/>
+                <a:ea typeface="SamsungOneKorean"/>
+                <a:cs typeface="SamsungOneKorean"/>
+              </a:rPr>
+              <a:t>분기 $784M로 급감 · TTM ~-$7.6B, 두 번째 반전</a:t>
+            </a:r>
+          </a:p>
+        </p:txBody>
+      </p:sp>
+      <p:sp>
+        <p:nvSpPr>
+          <p:cNvPr id="36" name="Rounded Rectangle 35"/>
+          <p:cNvSpPr/>
+          <p:nvPr/>
+        </p:nvSpPr>
+        <p:spPr>
+          <a:xfrm>
+            <a:off x="4178807" y="3986783"/>
+            <a:ext cx="3584448" cy="1152144"/>
+          </a:xfrm>
+          <a:prstGeom prst="roundRect">
+            <a:avLst>
+              <a:gd name="adj" fmla="val 6000"/>
+            </a:avLst>
+          </a:prstGeom>
+          <a:solidFill>
+            <a:srgbClr val="F6F6F7"/>
+          </a:solidFill>
+          <a:ln w="6350">
+            <a:solidFill>
+              <a:srgbClr val="D9D9D9"/>
+            </a:solidFill>
+          </a:ln>
+          <a:effectLst/>
+        </p:spPr>
+        <p:style>
+          <a:lnRef idx="1">
+            <a:schemeClr val="accent1"/>
+          </a:lnRef>
+          <a:fillRef idx="3">
+            <a:schemeClr val="accent1"/>
+          </a:fillRef>
+          <a:effectRef idx="2">
+            <a:schemeClr val="accent1"/>
+          </a:effectRef>
+          <a:fontRef idx="minor">
+            <a:schemeClr val="lt1"/>
+          </a:fontRef>
+        </p:style>
+        <p:txBody>
+          <a:bodyPr rtlCol="0" anchor="ctr"/>
+          <a:lstStyle/>
+          <a:p>
+            <a:pPr algn="ctr"/>
+          </a:p>
+        </p:txBody>
+      </p:sp>
+      <p:sp>
+        <p:nvSpPr>
+          <p:cNvPr id="37" name="TextBox 36"/>
+          <p:cNvSpPr txBox="1"/>
+          <p:nvPr/>
+        </p:nvSpPr>
+        <p:spPr>
+          <a:xfrm>
+            <a:off x="4325112" y="4096511"/>
+            <a:ext cx="3291840" cy="155448"/>
+          </a:xfrm>
+          <a:prstGeom prst="rect">
+            <a:avLst/>
+          </a:prstGeom>
+          <a:noFill/>
+        </p:spPr>
+        <p:txBody>
+          <a:bodyPr wrap="square" anchor="t" lIns="0" rIns="0" tIns="0" bIns="0">
+            <a:spAutoFit/>
+          </a:bodyPr>
+          <a:lstStyle/>
+          <a:p>
+            <a:pPr algn="l">
+              <a:lnSpc>
+                <a:spcPct val="100000"/>
+              </a:lnSpc>
+            </a:pPr>
+            <a:r>
+              <a:rPr sz="1050" b="1">
+                <a:solidFill>
+                  <a:srgbClr val="555555"/>
+                </a:solidFill>
+                <a:latin typeface="SamsungOneKorean"/>
+                <a:ea typeface="SamsungOneKorean"/>
+                <a:cs typeface="SamsungOneKorean"/>
+              </a:rPr>
+              <a:t>필요 매출 vs 자금 갭 (Bain)</a:t>
+            </a:r>
+          </a:p>
+        </p:txBody>
+      </p:sp>
+      <p:sp>
+        <p:nvSpPr>
+          <p:cNvPr id="38" name="TextBox 37"/>
+          <p:cNvSpPr txBox="1"/>
+          <p:nvPr/>
+        </p:nvSpPr>
+        <p:spPr>
+          <a:xfrm>
+            <a:off x="4325112" y="4315968"/>
+            <a:ext cx="3291840" cy="310896"/>
+          </a:xfrm>
+          <a:prstGeom prst="rect">
+            <a:avLst/>
+          </a:prstGeom>
+          <a:noFill/>
+        </p:spPr>
+        <p:txBody>
+          <a:bodyPr wrap="square" anchor="t" lIns="0" rIns="0" tIns="0" bIns="0">
+            <a:spAutoFit/>
+          </a:bodyPr>
+          <a:lstStyle/>
+          <a:p>
+            <a:pPr algn="l">
+              <a:lnSpc>
+                <a:spcPct val="100000"/>
+              </a:lnSpc>
+            </a:pPr>
+            <a:r>
+              <a:rPr sz="1900" b="1">
+                <a:solidFill>
+                  <a:srgbClr val="1428A0"/>
+                </a:solidFill>
+                <a:latin typeface="SamsungOneKorean"/>
+                <a:ea typeface="SamsungOneKorean"/>
+                <a:cs typeface="SamsungOneKorean"/>
+              </a:rPr>
+              <a:t>$2조/년</a:t>
+            </a:r>
+            <a:r>
+              <a:rPr sz="1900" b="1">
+                <a:solidFill>
+                  <a:srgbClr val="8A8A8E"/>
+                </a:solidFill>
+                <a:latin typeface="SamsungOneKorean"/>
+                <a:ea typeface="SamsungOneKorean"/>
+                <a:cs typeface="SamsungOneKorean"/>
+              </a:rPr>
+              <a:t>  vs 갭 </a:t>
+            </a:r>
+            <a:r>
+              <a:rPr sz="1900" b="1">
+                <a:solidFill>
+                  <a:srgbClr val="1428A0"/>
+                </a:solidFill>
+                <a:latin typeface="SamsungOneKorean"/>
+                <a:ea typeface="SamsungOneKorean"/>
+                <a:cs typeface="SamsungOneKorean"/>
+              </a:rPr>
+              <a:t>$800B/년</a:t>
+            </a:r>
+          </a:p>
+        </p:txBody>
+      </p:sp>
+      <p:sp>
+        <p:nvSpPr>
+          <p:cNvPr id="39" name="TextBox 38"/>
+          <p:cNvSpPr txBox="1"/>
+          <p:nvPr/>
+        </p:nvSpPr>
+        <p:spPr>
+          <a:xfrm>
+            <a:off x="4325112" y="4736592"/>
+            <a:ext cx="3291840" cy="292608"/>
+          </a:xfrm>
+          <a:prstGeom prst="rect">
+            <a:avLst/>
+          </a:prstGeom>
+          <a:noFill/>
+        </p:spPr>
+        <p:txBody>
+          <a:bodyPr wrap="square" anchor="t" lIns="0" rIns="0" tIns="0" bIns="0">
+            <a:spAutoFit/>
+          </a:bodyPr>
+          <a:lstStyle/>
+          <a:p>
+            <a:pPr algn="l">
+              <a:lnSpc>
+                <a:spcPct val="115000"/>
+              </a:lnSpc>
+            </a:pPr>
+            <a:r>
+              <a:rPr sz="1000" b="0">
+                <a:solidFill>
+                  <a:srgbClr val="555555"/>
+                </a:solidFill>
+                <a:latin typeface="SamsungOneKorean"/>
+                <a:ea typeface="SamsungOneKorean"/>
+                <a:cs typeface="SamsungOneKorean"/>
+              </a:rPr>
+              <a:t>2030 수익성 회수에 필요한 신규 매출과 부족분</a:t>
+            </a:r>
+          </a:p>
+        </p:txBody>
+      </p:sp>
+      <p:sp>
+        <p:nvSpPr>
+          <p:cNvPr id="40" name="TextBox 39"/>
+          <p:cNvSpPr txBox="1"/>
+          <p:nvPr/>
+        </p:nvSpPr>
+        <p:spPr>
+          <a:xfrm>
+            <a:off x="7927848" y="1389888"/>
+            <a:ext cx="3834079" cy="155448"/>
+          </a:xfrm>
+          <a:prstGeom prst="rect">
+            <a:avLst/>
+          </a:prstGeom>
+          <a:noFill/>
+        </p:spPr>
+        <p:txBody>
+          <a:bodyPr wrap="square" anchor="t" lIns="0" rIns="0" tIns="0" bIns="0">
+            <a:spAutoFit/>
+          </a:bodyPr>
+          <a:lstStyle/>
+          <a:p>
+            <a:pPr algn="l">
+              <a:lnSpc>
+                <a:spcPct val="100000"/>
+              </a:lnSpc>
+            </a:pPr>
+            <a:r>
+              <a:rPr sz="1050" b="1">
+                <a:solidFill>
+                  <a:srgbClr val="D93025"/>
+                </a:solidFill>
+                <a:latin typeface="SamsungOneKorean"/>
+                <a:ea typeface="SamsungOneKorean"/>
+                <a:cs typeface="SamsungOneKorean"/>
+              </a:rPr>
+              <a:t>실측된 전조 3</a:t>
+            </a:r>
+          </a:p>
+        </p:txBody>
+      </p:sp>
+      <p:sp>
+        <p:nvSpPr>
+          <p:cNvPr id="41" name="Rectangle 40"/>
+          <p:cNvSpPr/>
+          <p:nvPr/>
+        </p:nvSpPr>
+        <p:spPr>
+          <a:xfrm>
+            <a:off x="7946136" y="1616659"/>
+            <a:ext cx="91440" cy="91440"/>
+          </a:xfrm>
+          <a:prstGeom prst="rect">
+            <a:avLst/>
+          </a:prstGeom>
+          <a:solidFill>
+            <a:srgbClr val="D93025"/>
+          </a:solidFill>
+          <a:ln>
+            <a:noFill/>
+          </a:ln>
+          <a:effectLst/>
+        </p:spPr>
+        <p:style>
+          <a:lnRef idx="1">
+            <a:schemeClr val="accent1"/>
+          </a:lnRef>
+          <a:fillRef idx="3">
+            <a:schemeClr val="accent1"/>
+          </a:fillRef>
+          <a:effectRef idx="2">
+            <a:schemeClr val="accent1"/>
+          </a:effectRef>
+          <a:fontRef idx="minor">
+            <a:schemeClr val="lt1"/>
+          </a:fontRef>
+        </p:style>
+        <p:txBody>
+          <a:bodyPr rtlCol="0" anchor="ctr"/>
+          <a:lstStyle/>
+          <a:p>
+            <a:pPr algn="ctr"/>
+          </a:p>
+        </p:txBody>
+      </p:sp>
+      <p:sp>
+        <p:nvSpPr>
+          <p:cNvPr id="42" name="TextBox 41"/>
+          <p:cNvSpPr txBox="1"/>
+          <p:nvPr/>
+        </p:nvSpPr>
+        <p:spPr>
+          <a:xfrm>
+            <a:off x="8129016" y="1591056"/>
+            <a:ext cx="3614623" cy="292608"/>
+          </a:xfrm>
+          <a:prstGeom prst="rect">
+            <a:avLst/>
+          </a:prstGeom>
+          <a:noFill/>
+        </p:spPr>
+        <p:txBody>
+          <a:bodyPr wrap="square" anchor="t" lIns="0" rIns="0" tIns="0" bIns="0">
+            <a:spAutoFit/>
+          </a:bodyPr>
+          <a:lstStyle/>
+          <a:p>
+            <a:pPr algn="l">
+              <a:lnSpc>
+                <a:spcPct val="112000"/>
+              </a:lnSpc>
+            </a:pPr>
+            <a:r>
+              <a:rPr sz="1000" b="1">
+                <a:solidFill>
+                  <a:srgbClr val="1A1A1A"/>
+                </a:solidFill>
+                <a:latin typeface="SamsungOneKorean"/>
+                <a:ea typeface="SamsungOneKorean"/>
+                <a:cs typeface="SamsungOneKorean"/>
+              </a:rPr>
+              <a:t>FCF 다이버전스 2사</a:t>
+            </a:r>
+            <a:r>
+              <a:rPr sz="1000" b="0">
+                <a:solidFill>
+                  <a:srgbClr val="555555"/>
+                </a:solidFill>
+                <a:latin typeface="SamsungOneKorean"/>
+                <a:ea typeface="SamsungOneKorean"/>
+                <a:cs typeface="SamsungOneKorean"/>
+              </a:rPr>
+              <a:t>: Meta·Amazon 반전</a:t>
+            </a:r>
+          </a:p>
+        </p:txBody>
+      </p:sp>
+      <p:sp>
+        <p:nvSpPr>
+          <p:cNvPr id="43" name="Rectangle 42"/>
+          <p:cNvSpPr/>
+          <p:nvPr/>
+        </p:nvSpPr>
+        <p:spPr>
+          <a:xfrm>
+            <a:off x="7946136" y="1845259"/>
+            <a:ext cx="91440" cy="91440"/>
+          </a:xfrm>
+          <a:prstGeom prst="rect">
+            <a:avLst/>
+          </a:prstGeom>
+          <a:solidFill>
+            <a:srgbClr val="D93025"/>
+          </a:solidFill>
+          <a:ln>
+            <a:noFill/>
+          </a:ln>
+          <a:effectLst/>
+        </p:spPr>
+        <p:style>
+          <a:lnRef idx="1">
+            <a:schemeClr val="accent1"/>
+          </a:lnRef>
+          <a:fillRef idx="3">
+            <a:schemeClr val="accent1"/>
+          </a:fillRef>
+          <a:effectRef idx="2">
+            <a:schemeClr val="accent1"/>
+          </a:effectRef>
+          <a:fontRef idx="minor">
+            <a:schemeClr val="lt1"/>
+          </a:fontRef>
+        </p:style>
+        <p:txBody>
+          <a:bodyPr rtlCol="0" anchor="ctr"/>
+          <a:lstStyle/>
+          <a:p>
+            <a:pPr algn="ctr"/>
+          </a:p>
+        </p:txBody>
+      </p:sp>
+      <p:sp>
+        <p:nvSpPr>
+          <p:cNvPr id="44" name="TextBox 43"/>
+          <p:cNvSpPr txBox="1"/>
+          <p:nvPr/>
+        </p:nvSpPr>
+        <p:spPr>
+          <a:xfrm>
+            <a:off x="8129016" y="1819656"/>
+            <a:ext cx="3614623" cy="292608"/>
+          </a:xfrm>
+          <a:prstGeom prst="rect">
+            <a:avLst/>
+          </a:prstGeom>
+          <a:noFill/>
+        </p:spPr>
+        <p:txBody>
+          <a:bodyPr wrap="square" anchor="t" lIns="0" rIns="0" tIns="0" bIns="0">
+            <a:spAutoFit/>
+          </a:bodyPr>
+          <a:lstStyle/>
+          <a:p>
+            <a:pPr algn="l">
+              <a:lnSpc>
+                <a:spcPct val="112000"/>
+              </a:lnSpc>
+            </a:pPr>
+            <a:r>
+              <a:rPr sz="1000" b="1">
+                <a:solidFill>
+                  <a:srgbClr val="1A1A1A"/>
+                </a:solidFill>
+                <a:latin typeface="SamsungOneKorean"/>
+                <a:ea typeface="SamsungOneKorean"/>
+                <a:cs typeface="SamsungOneKorean"/>
+              </a:rPr>
+              <a:t>CapEx/현금흐름 94%</a:t>
+            </a:r>
+            <a:r>
+              <a:rPr sz="1000" b="0">
+                <a:solidFill>
+                  <a:srgbClr val="555555"/>
+                </a:solidFill>
+                <a:latin typeface="SamsungOneKorean"/>
+                <a:ea typeface="SamsungOneKorean"/>
+                <a:cs typeface="SamsungOneKorean"/>
+              </a:rPr>
+              <a:t>: 자기잠식 임계</a:t>
+            </a:r>
+          </a:p>
+        </p:txBody>
+      </p:sp>
+      <p:sp>
+        <p:nvSpPr>
+          <p:cNvPr id="45" name="Rectangle 44"/>
+          <p:cNvSpPr/>
+          <p:nvPr/>
+        </p:nvSpPr>
+        <p:spPr>
+          <a:xfrm>
+            <a:off x="7946136" y="2073859"/>
+            <a:ext cx="91440" cy="91440"/>
+          </a:xfrm>
+          <a:prstGeom prst="rect">
+            <a:avLst/>
+          </a:prstGeom>
+          <a:solidFill>
+            <a:srgbClr val="D93025"/>
+          </a:solidFill>
+          <a:ln>
+            <a:noFill/>
+          </a:ln>
+          <a:effectLst/>
+        </p:spPr>
+        <p:style>
+          <a:lnRef idx="1">
+            <a:schemeClr val="accent1"/>
+          </a:lnRef>
+          <a:fillRef idx="3">
+            <a:schemeClr val="accent1"/>
+          </a:fillRef>
+          <a:effectRef idx="2">
+            <a:schemeClr val="accent1"/>
+          </a:effectRef>
+          <a:fontRef idx="minor">
+            <a:schemeClr val="lt1"/>
+          </a:fontRef>
+        </p:style>
+        <p:txBody>
+          <a:bodyPr rtlCol="0" anchor="ctr"/>
+          <a:lstStyle/>
+          <a:p>
+            <a:pPr algn="ctr"/>
+          </a:p>
+        </p:txBody>
+      </p:sp>
+      <p:sp>
+        <p:nvSpPr>
+          <p:cNvPr id="46" name="TextBox 45"/>
+          <p:cNvSpPr txBox="1"/>
+          <p:nvPr/>
+        </p:nvSpPr>
+        <p:spPr>
+          <a:xfrm>
+            <a:off x="8129016" y="2048256"/>
+            <a:ext cx="3614623" cy="292608"/>
+          </a:xfrm>
+          <a:prstGeom prst="rect">
+            <a:avLst/>
+          </a:prstGeom>
+          <a:noFill/>
+        </p:spPr>
+        <p:txBody>
+          <a:bodyPr wrap="square" anchor="t" lIns="0" rIns="0" tIns="0" bIns="0">
+            <a:spAutoFit/>
+          </a:bodyPr>
+          <a:lstStyle/>
+          <a:p>
+            <a:pPr algn="l">
+              <a:lnSpc>
+                <a:spcPct val="112000"/>
+              </a:lnSpc>
+            </a:pPr>
+            <a:r>
+              <a:rPr sz="1000" b="1">
+                <a:solidFill>
+                  <a:srgbClr val="1A1A1A"/>
+                </a:solidFill>
+                <a:latin typeface="SamsungOneKorean"/>
+                <a:ea typeface="SamsungOneKorean"/>
+                <a:cs typeface="SamsungOneKorean"/>
+              </a:rPr>
+              <a:t>공급자 이익 정점</a:t>
+            </a:r>
+            <a:r>
+              <a:rPr sz="1000" b="0">
+                <a:solidFill>
+                  <a:srgbClr val="555555"/>
+                </a:solidFill>
+                <a:latin typeface="SamsungOneKorean"/>
+                <a:ea typeface="SamsungOneKorean"/>
+                <a:cs typeface="SamsungOneKorean"/>
+              </a:rPr>
+              <a:t>: SK OPM ~76% 사상 최대</a:t>
+            </a:r>
+          </a:p>
+        </p:txBody>
+      </p:sp>
+      <p:sp>
+        <p:nvSpPr>
+          <p:cNvPr id="47" name="TextBox 46"/>
+          <p:cNvSpPr txBox="1"/>
+          <p:nvPr/>
+        </p:nvSpPr>
+        <p:spPr>
+          <a:xfrm>
+            <a:off x="7927848" y="2395728"/>
+            <a:ext cx="3834079" cy="155448"/>
+          </a:xfrm>
+          <a:prstGeom prst="rect">
+            <a:avLst/>
+          </a:prstGeom>
+          <a:noFill/>
+        </p:spPr>
+        <p:txBody>
+          <a:bodyPr wrap="square" anchor="t" lIns="0" rIns="0" tIns="0" bIns="0">
+            <a:spAutoFit/>
+          </a:bodyPr>
+          <a:lstStyle/>
+          <a:p>
+            <a:pPr algn="l">
+              <a:lnSpc>
+                <a:spcPct val="100000"/>
+              </a:lnSpc>
+            </a:pPr>
+            <a:r>
+              <a:rPr sz="1050" b="1">
+                <a:solidFill>
+                  <a:srgbClr val="00A651"/>
+                </a:solidFill>
+                <a:latin typeface="SamsungOneKorean"/>
+                <a:ea typeface="SamsungOneKorean"/>
+                <a:cs typeface="SamsungOneKorean"/>
+              </a:rPr>
+              <a:t>미발동 발화 신호 4</a:t>
+            </a:r>
+          </a:p>
+        </p:txBody>
+      </p:sp>
+      <p:sp>
+        <p:nvSpPr>
+          <p:cNvPr id="48" name="Rectangle 47"/>
+          <p:cNvSpPr/>
+          <p:nvPr/>
+        </p:nvSpPr>
+        <p:spPr>
+          <a:xfrm>
+            <a:off x="7946136" y="2622499"/>
+            <a:ext cx="91440" cy="91440"/>
+          </a:xfrm>
+          <a:prstGeom prst="rect">
+            <a:avLst/>
+          </a:prstGeom>
+          <a:solidFill>
+            <a:srgbClr val="00A651"/>
+          </a:solidFill>
+          <a:ln>
+            <a:noFill/>
+          </a:ln>
+          <a:effectLst/>
+        </p:spPr>
+        <p:style>
+          <a:lnRef idx="1">
+            <a:schemeClr val="accent1"/>
+          </a:lnRef>
+          <a:fillRef idx="3">
+            <a:schemeClr val="accent1"/>
+          </a:fillRef>
+          <a:effectRef idx="2">
+            <a:schemeClr val="accent1"/>
+          </a:effectRef>
+          <a:fontRef idx="minor">
+            <a:schemeClr val="lt1"/>
+          </a:fontRef>
+        </p:style>
+        <p:txBody>
+          <a:bodyPr rtlCol="0" anchor="ctr"/>
+          <a:lstStyle/>
+          <a:p>
+            <a:pPr algn="ctr"/>
+          </a:p>
+        </p:txBody>
+      </p:sp>
+      <p:sp>
+        <p:nvSpPr>
+          <p:cNvPr id="49" name="TextBox 48"/>
+          <p:cNvSpPr txBox="1"/>
+          <p:nvPr/>
+        </p:nvSpPr>
+        <p:spPr>
+          <a:xfrm>
+            <a:off x="8129016" y="2596896"/>
+            <a:ext cx="3614623" cy="292608"/>
+          </a:xfrm>
+          <a:prstGeom prst="rect">
+            <a:avLst/>
+          </a:prstGeom>
+          <a:noFill/>
+        </p:spPr>
+        <p:txBody>
+          <a:bodyPr wrap="square" anchor="t" lIns="0" rIns="0" tIns="0" bIns="0">
+            <a:spAutoFit/>
+          </a:bodyPr>
+          <a:lstStyle/>
+          <a:p>
+            <a:pPr algn="l">
+              <a:lnSpc>
+                <a:spcPct val="112000"/>
+              </a:lnSpc>
+            </a:pPr>
+            <a:r>
+              <a:rPr sz="1000" b="1">
+                <a:solidFill>
+                  <a:srgbClr val="1A1A1A"/>
+                </a:solidFill>
+                <a:latin typeface="SamsungOneKorean"/>
+                <a:ea typeface="SamsungOneKorean"/>
+                <a:cs typeface="SamsungOneKorean"/>
+              </a:rPr>
+              <a:t>CapEx 삭감 0건</a:t>
+            </a:r>
+            <a:r>
+              <a:rPr sz="1000" b="0">
+                <a:solidFill>
+                  <a:srgbClr val="555555"/>
+                </a:solidFill>
+                <a:latin typeface="SamsungOneKorean"/>
+                <a:ea typeface="SamsungOneKorean"/>
+                <a:cs typeface="SamsungOneKorean"/>
+              </a:rPr>
+              <a:t>: 트리거 YoY -25%</a:t>
+            </a:r>
+          </a:p>
+        </p:txBody>
+      </p:sp>
+      <p:sp>
+        <p:nvSpPr>
+          <p:cNvPr id="50" name="Rectangle 49"/>
+          <p:cNvSpPr/>
+          <p:nvPr/>
+        </p:nvSpPr>
+        <p:spPr>
+          <a:xfrm>
+            <a:off x="7946136" y="2851099"/>
+            <a:ext cx="91440" cy="91440"/>
+          </a:xfrm>
+          <a:prstGeom prst="rect">
+            <a:avLst/>
+          </a:prstGeom>
+          <a:solidFill>
+            <a:srgbClr val="00A651"/>
+          </a:solidFill>
+          <a:ln>
+            <a:noFill/>
+          </a:ln>
+          <a:effectLst/>
+        </p:spPr>
+        <p:style>
+          <a:lnRef idx="1">
+            <a:schemeClr val="accent1"/>
+          </a:lnRef>
+          <a:fillRef idx="3">
+            <a:schemeClr val="accent1"/>
+          </a:fillRef>
+          <a:effectRef idx="2">
+            <a:schemeClr val="accent1"/>
+          </a:effectRef>
+          <a:fontRef idx="minor">
+            <a:schemeClr val="lt1"/>
+          </a:fontRef>
+        </p:style>
+        <p:txBody>
+          <a:bodyPr rtlCol="0" anchor="ctr"/>
+          <a:lstStyle/>
+          <a:p>
+            <a:pPr algn="ctr"/>
+          </a:p>
+        </p:txBody>
+      </p:sp>
+      <p:sp>
+        <p:nvSpPr>
+          <p:cNvPr id="51" name="TextBox 50"/>
+          <p:cNvSpPr txBox="1"/>
+          <p:nvPr/>
+        </p:nvSpPr>
+        <p:spPr>
+          <a:xfrm>
+            <a:off x="8129016" y="2825496"/>
+            <a:ext cx="3614623" cy="292608"/>
+          </a:xfrm>
+          <a:prstGeom prst="rect">
+            <a:avLst/>
+          </a:prstGeom>
+          <a:noFill/>
+        </p:spPr>
+        <p:txBody>
+          <a:bodyPr wrap="square" anchor="t" lIns="0" rIns="0" tIns="0" bIns="0">
+            <a:spAutoFit/>
+          </a:bodyPr>
+          <a:lstStyle/>
+          <a:p>
+            <a:pPr algn="l">
+              <a:lnSpc>
+                <a:spcPct val="112000"/>
+              </a:lnSpc>
+            </a:pPr>
+            <a:r>
+              <a:rPr sz="1000" b="1">
+                <a:solidFill>
+                  <a:srgbClr val="1A1A1A"/>
+                </a:solidFill>
+                <a:latin typeface="SamsungOneKorean"/>
+                <a:ea typeface="SamsungOneKorean"/>
+                <a:cs typeface="SamsungOneKorean"/>
+              </a:rPr>
+              <a:t>GPU 임대가 firming</a:t>
+            </a:r>
+            <a:r>
+              <a:rPr sz="1000" b="0">
+                <a:solidFill>
+                  <a:srgbClr val="555555"/>
+                </a:solidFill>
+                <a:latin typeface="SamsungOneKorean"/>
+                <a:ea typeface="SamsungOneKorean"/>
+                <a:cs typeface="SamsungOneKorean"/>
+              </a:rPr>
+              <a:t>: H100 $2.69·H200 $4.38</a:t>
+            </a:r>
+          </a:p>
+        </p:txBody>
+      </p:sp>
+      <p:sp>
+        <p:nvSpPr>
+          <p:cNvPr id="52" name="Rectangle 51"/>
+          <p:cNvSpPr/>
+          <p:nvPr/>
+        </p:nvSpPr>
+        <p:spPr>
+          <a:xfrm>
+            <a:off x="7946136" y="3079699"/>
+            <a:ext cx="91440" cy="91440"/>
+          </a:xfrm>
+          <a:prstGeom prst="rect">
+            <a:avLst/>
+          </a:prstGeom>
+          <a:solidFill>
+            <a:srgbClr val="00A651"/>
+          </a:solidFill>
+          <a:ln>
+            <a:noFill/>
+          </a:ln>
+          <a:effectLst/>
+        </p:spPr>
+        <p:style>
+          <a:lnRef idx="1">
+            <a:schemeClr val="accent1"/>
+          </a:lnRef>
+          <a:fillRef idx="3">
+            <a:schemeClr val="accent1"/>
+          </a:fillRef>
+          <a:effectRef idx="2">
+            <a:schemeClr val="accent1"/>
+          </a:effectRef>
+          <a:fontRef idx="minor">
+            <a:schemeClr val="lt1"/>
+          </a:fontRef>
+        </p:style>
+        <p:txBody>
+          <a:bodyPr rtlCol="0" anchor="ctr"/>
+          <a:lstStyle/>
+          <a:p>
+            <a:pPr algn="ctr"/>
+          </a:p>
+        </p:txBody>
+      </p:sp>
+      <p:sp>
+        <p:nvSpPr>
+          <p:cNvPr id="53" name="TextBox 52"/>
+          <p:cNvSpPr txBox="1"/>
+          <p:nvPr/>
+        </p:nvSpPr>
+        <p:spPr>
+          <a:xfrm>
+            <a:off x="8129016" y="3054096"/>
+            <a:ext cx="3614623" cy="292608"/>
+          </a:xfrm>
+          <a:prstGeom prst="rect">
+            <a:avLst/>
+          </a:prstGeom>
+          <a:noFill/>
+        </p:spPr>
+        <p:txBody>
+          <a:bodyPr wrap="square" anchor="t" lIns="0" rIns="0" tIns="0" bIns="0">
+            <a:spAutoFit/>
+          </a:bodyPr>
+          <a:lstStyle/>
+          <a:p>
+            <a:pPr algn="l">
+              <a:lnSpc>
+                <a:spcPct val="112000"/>
+              </a:lnSpc>
+            </a:pPr>
+            <a:r>
+              <a:rPr sz="1000" b="1">
+                <a:solidFill>
+                  <a:srgbClr val="1A1A1A"/>
+                </a:solidFill>
+                <a:latin typeface="SamsungOneKorean"/>
+                <a:ea typeface="SamsungOneKorean"/>
+                <a:cs typeface="SamsungOneKorean"/>
+              </a:rPr>
+              <a:t>DC 취소 미관측</a:t>
+            </a:r>
+            <a:r>
+              <a:rPr sz="1000" b="0">
+                <a:solidFill>
+                  <a:srgbClr val="555555"/>
+                </a:solidFill>
+                <a:latin typeface="SamsungOneKorean"/>
+                <a:ea typeface="SamsungOneKorean"/>
+                <a:cs typeface="SamsungOneKorean"/>
+              </a:rPr>
+              <a:t>: 파이프라인 55.9GW 유지</a:t>
+            </a:r>
+          </a:p>
+        </p:txBody>
+      </p:sp>
+      <p:sp>
+        <p:nvSpPr>
+          <p:cNvPr id="54" name="Rectangle 53"/>
+          <p:cNvSpPr/>
+          <p:nvPr/>
+        </p:nvSpPr>
+        <p:spPr>
+          <a:xfrm>
+            <a:off x="7946136" y="3308299"/>
+            <a:ext cx="91440" cy="91440"/>
+          </a:xfrm>
+          <a:prstGeom prst="rect">
+            <a:avLst/>
+          </a:prstGeom>
+          <a:solidFill>
+            <a:srgbClr val="00A651"/>
+          </a:solidFill>
+          <a:ln>
+            <a:noFill/>
+          </a:ln>
+          <a:effectLst/>
+        </p:spPr>
+        <p:style>
+          <a:lnRef idx="1">
+            <a:schemeClr val="accent1"/>
+          </a:lnRef>
+          <a:fillRef idx="3">
+            <a:schemeClr val="accent1"/>
+          </a:fillRef>
+          <a:effectRef idx="2">
+            <a:schemeClr val="accent1"/>
+          </a:effectRef>
+          <a:fontRef idx="minor">
+            <a:schemeClr val="lt1"/>
+          </a:fontRef>
+        </p:style>
+        <p:txBody>
+          <a:bodyPr rtlCol="0" anchor="ctr"/>
+          <a:lstStyle/>
+          <a:p>
+            <a:pPr algn="ctr"/>
+          </a:p>
+        </p:txBody>
+      </p:sp>
+      <p:sp>
+        <p:nvSpPr>
+          <p:cNvPr id="55" name="TextBox 54"/>
+          <p:cNvSpPr txBox="1"/>
+          <p:nvPr/>
+        </p:nvSpPr>
+        <p:spPr>
+          <a:xfrm>
+            <a:off x="8129016" y="3282696"/>
+            <a:ext cx="3614623" cy="292608"/>
+          </a:xfrm>
+          <a:prstGeom prst="rect">
+            <a:avLst/>
+          </a:prstGeom>
+          <a:noFill/>
+        </p:spPr>
+        <p:txBody>
+          <a:bodyPr wrap="square" anchor="t" lIns="0" rIns="0" tIns="0" bIns="0">
+            <a:spAutoFit/>
+          </a:bodyPr>
+          <a:lstStyle/>
+          <a:p>
+            <a:pPr algn="l">
+              <a:lnSpc>
+                <a:spcPct val="112000"/>
+              </a:lnSpc>
+            </a:pPr>
+            <a:r>
+              <a:rPr sz="1000" b="1">
+                <a:solidFill>
+                  <a:srgbClr val="1A1A1A"/>
+                </a:solidFill>
+                <a:latin typeface="SamsungOneKorean"/>
+                <a:ea typeface="SamsungOneKorean"/>
+                <a:cs typeface="SamsungOneKorean"/>
+              </a:rPr>
+              <a:t>Cloud 백로그 견조</a:t>
+            </a:r>
+            <a:r>
+              <a:rPr sz="1000" b="0">
+                <a:solidFill>
+                  <a:srgbClr val="555555"/>
+                </a:solidFill>
+                <a:latin typeface="SamsungOneKorean"/>
+                <a:ea typeface="SamsungOneKorean"/>
+                <a:cs typeface="SamsungOneKorean"/>
+              </a:rPr>
+              <a:t>: Google $514B(+$50B QoQ)</a:t>
+            </a:r>
+          </a:p>
+        </p:txBody>
+      </p:sp>
+      <p:sp>
+        <p:nvSpPr>
+          <p:cNvPr id="56" name="TextBox 55"/>
+          <p:cNvSpPr txBox="1"/>
+          <p:nvPr/>
+        </p:nvSpPr>
+        <p:spPr>
+          <a:xfrm>
+            <a:off x="7927848" y="3630168"/>
+            <a:ext cx="3834079" cy="155448"/>
+          </a:xfrm>
+          <a:prstGeom prst="rect">
+            <a:avLst/>
+          </a:prstGeom>
+          <a:noFill/>
+        </p:spPr>
+        <p:txBody>
+          <a:bodyPr wrap="square" anchor="t" lIns="0" rIns="0" tIns="0" bIns="0">
+            <a:spAutoFit/>
+          </a:bodyPr>
+          <a:lstStyle/>
+          <a:p>
+            <a:pPr algn="l">
+              <a:lnSpc>
+                <a:spcPct val="100000"/>
+              </a:lnSpc>
+            </a:pPr>
+            <a:r>
+              <a:rPr sz="1050" b="1">
+                <a:solidFill>
+                  <a:srgbClr val="555555"/>
+                </a:solidFill>
+                <a:latin typeface="SamsungOneKorean"/>
+                <a:ea typeface="SamsungOneKorean"/>
+                <a:cs typeface="SamsungOneKorean"/>
+              </a:rPr>
+              <a:t>완충</a:t>
+            </a:r>
+          </a:p>
+        </p:txBody>
+      </p:sp>
+      <p:sp>
+        <p:nvSpPr>
+          <p:cNvPr id="57" name="TextBox 56"/>
+          <p:cNvSpPr txBox="1"/>
+          <p:nvPr/>
+        </p:nvSpPr>
+        <p:spPr>
+          <a:xfrm>
+            <a:off x="7946136" y="3831336"/>
+            <a:ext cx="3797503" cy="457200"/>
+          </a:xfrm>
+          <a:prstGeom prst="rect">
+            <a:avLst/>
+          </a:prstGeom>
+          <a:noFill/>
+        </p:spPr>
+        <p:txBody>
+          <a:bodyPr wrap="square" anchor="t" lIns="0" rIns="0" tIns="0" bIns="0">
+            <a:spAutoFit/>
+          </a:bodyPr>
+          <a:lstStyle/>
+          <a:p>
+            <a:pPr algn="l">
+              <a:lnSpc>
+                <a:spcPct val="125000"/>
+              </a:lnSpc>
+            </a:pPr>
+            <a:r>
+              <a:rPr sz="1000" b="0">
+                <a:solidFill>
+                  <a:srgbClr val="1A1A1A"/>
+                </a:solidFill>
+                <a:latin typeface="SamsungOneKorean"/>
+                <a:ea typeface="SamsungOneKorean"/>
+                <a:cs typeface="SamsungOneKorean"/>
+              </a:rPr>
+              <a:t>take-or-pay·NTB 락인이 발화 후에도 초기 6~12개월을 흡수.</a:t>
+            </a:r>
+          </a:p>
+          <a:p>
+            <a:pPr algn="l">
+              <a:lnSpc>
+                <a:spcPct val="125000"/>
+              </a:lnSpc>
+            </a:pPr>
+            <a:r>
+              <a:rPr sz="1000" b="1">
+                <a:solidFill>
+                  <a:srgbClr val="1A1A1A"/>
+                </a:solidFill>
+                <a:latin typeface="SamsungOneKorean"/>
+                <a:ea typeface="SamsungOneKorean"/>
+                <a:cs typeface="SamsungOneKorean"/>
+              </a:rPr>
+              <a:t>그래서 관건은 커버리지의 만기 구조다</a:t>
+            </a:r>
+          </a:p>
+        </p:txBody>
+      </p:sp>
+      <p:sp>
+        <p:nvSpPr>
+          <p:cNvPr id="58" name="Rounded Rectangle 57"/>
+          <p:cNvSpPr/>
+          <p:nvPr/>
+        </p:nvSpPr>
+        <p:spPr>
+          <a:xfrm>
+            <a:off x="7927848" y="4370832"/>
+            <a:ext cx="3834079" cy="1005840"/>
+          </a:xfrm>
+          <a:prstGeom prst="roundRect">
+            <a:avLst>
+              <a:gd name="adj" fmla="val 6000"/>
+            </a:avLst>
+          </a:prstGeom>
+          <a:solidFill>
+            <a:srgbClr val="F6F6F7"/>
+          </a:solidFill>
+          <a:ln>
+            <a:noFill/>
+          </a:ln>
+          <a:effectLst/>
+        </p:spPr>
+        <p:style>
+          <a:lnRef idx="1">
+            <a:schemeClr val="accent1"/>
+          </a:lnRef>
+          <a:fillRef idx="3">
+            <a:schemeClr val="accent1"/>
+          </a:fillRef>
+          <a:effectRef idx="2">
+            <a:schemeClr val="accent1"/>
+          </a:effectRef>
+          <a:fontRef idx="minor">
+            <a:schemeClr val="lt1"/>
+          </a:fontRef>
+        </p:style>
+        <p:txBody>
+          <a:bodyPr rtlCol="0" anchor="ctr"/>
+          <a:lstStyle/>
+          <a:p>
+            <a:pPr algn="ctr"/>
+          </a:p>
+        </p:txBody>
+      </p:sp>
+      <p:sp>
+        <p:nvSpPr>
+          <p:cNvPr id="59" name="TextBox 58"/>
+          <p:cNvSpPr txBox="1"/>
+          <p:nvPr/>
+        </p:nvSpPr>
+        <p:spPr>
+          <a:xfrm>
+            <a:off x="8055864" y="4480560"/>
+            <a:ext cx="3578047" cy="822960"/>
+          </a:xfrm>
+          <a:prstGeom prst="rect">
+            <a:avLst/>
+          </a:prstGeom>
+          <a:noFill/>
+        </p:spPr>
+        <p:txBody>
+          <a:bodyPr wrap="square" anchor="t" lIns="0" rIns="0" tIns="0" bIns="0">
+            <a:spAutoFit/>
+          </a:bodyPr>
+          <a:lstStyle/>
+          <a:p>
+            <a:pPr algn="l">
+              <a:lnSpc>
+                <a:spcPct val="125000"/>
+              </a:lnSpc>
+            </a:pPr>
+            <a:r>
+              <a:rPr sz="1050" b="1">
+                <a:solidFill>
+                  <a:srgbClr val="1428A0"/>
+                </a:solidFill>
+                <a:latin typeface="SamsungOneKorean"/>
+                <a:ea typeface="SamsungOneKorean"/>
+                <a:cs typeface="SamsungOneKorean"/>
+              </a:rPr>
+              <a:t>감시선  </a:t>
+            </a:r>
+            <a:r>
+              <a:rPr sz="1050" b="0">
+                <a:solidFill>
+                  <a:srgbClr val="1A1A1A"/>
+                </a:solidFill>
+                <a:latin typeface="SamsungOneKorean"/>
+                <a:ea typeface="SamsungOneKorean"/>
+                <a:cs typeface="SamsungOneKorean"/>
+              </a:rPr>
+              <a:t>다음 변곡 = FCF 반전이</a:t>
+            </a:r>
+          </a:p>
+          <a:p>
+            <a:pPr algn="l">
+              <a:lnSpc>
+                <a:spcPct val="125000"/>
+              </a:lnSpc>
+            </a:pPr>
+            <a:r>
+              <a:rPr sz="1050" b="0">
+                <a:solidFill>
+                  <a:srgbClr val="1A1A1A"/>
+                </a:solidFill>
+                <a:latin typeface="SamsungOneKorean"/>
+                <a:ea typeface="SamsungOneKorean"/>
+                <a:cs typeface="SamsungOneKorean"/>
+              </a:rPr>
+              <a:t>발주 동결로 번지는 순간.</a:t>
+            </a:r>
+          </a:p>
+          <a:p>
+            <a:pPr algn="l">
+              <a:lnSpc>
+                <a:spcPct val="125000"/>
+              </a:lnSpc>
+            </a:pPr>
+            <a:r>
+              <a:rPr sz="1050" b="0">
+                <a:solidFill>
+                  <a:srgbClr val="1A1A1A"/>
+                </a:solidFill>
+                <a:latin typeface="SamsungOneKorean"/>
+                <a:ea typeface="SamsungOneKorean"/>
+                <a:cs typeface="SamsungOneKorean"/>
+              </a:rPr>
+              <a:t>빅테크 FCF·조달 스프레드와 GPU</a:t>
+            </a:r>
+          </a:p>
+          <a:p>
+            <a:pPr algn="l">
+              <a:lnSpc>
+                <a:spcPct val="125000"/>
+              </a:lnSpc>
+            </a:pPr>
+            <a:r>
+              <a:rPr sz="1050" b="0">
+                <a:solidFill>
+                  <a:srgbClr val="1A1A1A"/>
+                </a:solidFill>
+                <a:latin typeface="SamsungOneKorean"/>
+                <a:ea typeface="SamsungOneKorean"/>
+                <a:cs typeface="SamsungOneKorean"/>
+              </a:rPr>
+              <a:t>임대가(6개월 -35%)가 최선행 감시선</a:t>
+            </a:r>
+          </a:p>
+        </p:txBody>
+      </p:sp>
+      <p:sp>
+        <p:nvSpPr>
+          <p:cNvPr id="60" name="Rounded Rectangle 59"/>
+          <p:cNvSpPr/>
+          <p:nvPr/>
+        </p:nvSpPr>
+        <p:spPr>
+          <a:xfrm>
+            <a:off x="429768" y="5650992"/>
+            <a:ext cx="11332159" cy="310896"/>
+          </a:xfrm>
+          <a:prstGeom prst="roundRect">
+            <a:avLst>
+              <a:gd name="adj" fmla="val 10000"/>
+            </a:avLst>
+          </a:prstGeom>
+          <a:solidFill>
+            <a:srgbClr val="F6F6F7"/>
+          </a:solidFill>
+          <a:ln>
+            <a:noFill/>
+          </a:ln>
+          <a:effectLst/>
+        </p:spPr>
+        <p:style>
+          <a:lnRef idx="1">
+            <a:schemeClr val="accent1"/>
+          </a:lnRef>
+          <a:fillRef idx="3">
+            <a:schemeClr val="accent1"/>
+          </a:fillRef>
+          <a:effectRef idx="2">
+            <a:schemeClr val="accent1"/>
+          </a:effectRef>
+          <a:fontRef idx="minor">
+            <a:schemeClr val="lt1"/>
+          </a:fontRef>
+        </p:style>
+        <p:txBody>
+          <a:bodyPr rtlCol="0" anchor="ctr"/>
+          <a:lstStyle/>
+          <a:p>
+            <a:pPr algn="ctr"/>
+          </a:p>
+        </p:txBody>
+      </p:sp>
+      <p:sp>
+        <p:nvSpPr>
+          <p:cNvPr id="61" name="TextBox 60"/>
+          <p:cNvSpPr txBox="1"/>
+          <p:nvPr/>
+        </p:nvSpPr>
+        <p:spPr>
+          <a:xfrm>
+            <a:off x="576072" y="5719572"/>
+            <a:ext cx="11039551" cy="182880"/>
+          </a:xfrm>
+          <a:prstGeom prst="rect">
+            <a:avLst/>
+          </a:prstGeom>
+          <a:noFill/>
+        </p:spPr>
+        <p:txBody>
+          <a:bodyPr wrap="square" anchor="t" lIns="0" rIns="0" tIns="0" bIns="0">
+            <a:spAutoFit/>
+          </a:bodyPr>
+          <a:lstStyle/>
+          <a:p>
+            <a:pPr algn="l">
+              <a:lnSpc>
+                <a:spcPct val="100000"/>
+              </a:lnSpc>
+            </a:pPr>
+            <a:r>
+              <a:rPr sz="1050" b="1">
+                <a:solidFill>
+                  <a:srgbClr val="1428A0"/>
+                </a:solidFill>
+                <a:latin typeface="SamsungOneKorean"/>
+                <a:ea typeface="SamsungOneKorean"/>
+                <a:cs typeface="SamsungOneKorean"/>
+              </a:rPr>
+              <a:t>종합  </a:t>
+            </a:r>
+            <a:r>
+              <a:rPr sz="1050" b="0">
+                <a:solidFill>
+                  <a:srgbClr val="1A1A1A"/>
+                </a:solidFill>
+                <a:latin typeface="SamsungOneKorean"/>
+                <a:ea typeface="SamsungOneKorean"/>
+                <a:cs typeface="SamsungOneKorean"/>
+              </a:rPr>
+              <a:t>지출은 2년 새 3.7배가 됐는데 내부 현금 여력은 임계에 닿았다. 전조 3건 실측, 발화 신호 0건.  </a:t>
+            </a:r>
+            <a:r>
+              <a:rPr sz="1050" b="1">
+                <a:solidFill>
+                  <a:srgbClr val="1A1A1A"/>
+                </a:solidFill>
+                <a:latin typeface="SamsungOneKorean"/>
+                <a:ea typeface="SamsungOneKorean"/>
+                <a:cs typeface="SamsungOneKorean"/>
+              </a:rPr>
+              <a:t>가능성이 오르는 국면이지, 아직 발현 국면은 아니다.</a:t>
+            </a:r>
+          </a:p>
+        </p:txBody>
+      </p:sp>
+      <p:sp>
+        <p:nvSpPr>
+          <p:cNvPr id="62" name="TextBox 61"/>
+          <p:cNvSpPr txBox="1"/>
+          <p:nvPr/>
+        </p:nvSpPr>
+        <p:spPr>
+          <a:xfrm>
+            <a:off x="429768" y="6071616"/>
+            <a:ext cx="9823399" cy="310896"/>
+          </a:xfrm>
+          <a:prstGeom prst="rect">
+            <a:avLst/>
+          </a:prstGeom>
+          <a:noFill/>
+        </p:spPr>
+        <p:txBody>
+          <a:bodyPr wrap="square" anchor="t" lIns="0" rIns="0" tIns="0" bIns="0">
+            <a:spAutoFit/>
+          </a:bodyPr>
+          <a:lstStyle/>
+          <a:p>
+            <a:pPr algn="l">
+              <a:lnSpc>
+                <a:spcPct val="125000"/>
+              </a:lnSpc>
+            </a:pPr>
+            <a:r>
+              <a:rPr sz="900" b="0">
+                <a:solidFill>
+                  <a:srgbClr val="555555"/>
+                </a:solidFill>
+                <a:latin typeface="SamsungOneKorean"/>
+                <a:ea typeface="SamsungOneKorean"/>
+                <a:cs typeface="SamsungOneKorean"/>
+              </a:rPr>
+              <a:t>출처: wiki/downturn/samsung-impact.md §5.1c · CapEx: 각사 가이던스 종합(2026E ~$750B)·27Eᵉ JPMorgan 전망 · FCF·백로그·임대가: Q2 2026 실적 보도 종합 · CapEx/현금흐름·자금 갭: SemiAnalysis 계열·Bain · 기준일 2026-08</a:t>
+            </a:r>
+          </a:p>
+        </p:txBody>
+      </p:sp>
+      <p:sp>
+        <p:nvSpPr>
+          <p:cNvPr id="63" name="TextBox 62"/>
           <p:cNvSpPr txBox="1"/>
           <p:nvPr/>
         </p:nvSpPr>
